--- a/第四週(10-01)/第四週_第3節_簡報.pptx
+++ b/第四週(10-01)/第四週_第3節_簡報.pptx
@@ -933,7 +933,7 @@
                 <a:ea typeface="Arial Unicode MS"/>
                 <a:cs typeface="Arial Unicode MS"/>
               </a:rPr>
-              <a:t>（各位今天掃參數的時候，應該已經自己體會到了：把張角拉到一百八十度，反而更容易撞。）
+              <a:t>（各位今天掃參數的時候，應該已經自己體會到了：張角一百二十度大約撐三十四秒，放大到一百五十度反而掉到二十七秒。射線被攤稀了，機車就從縫裡鑽進來。）
 </a:t>
             </a:r>
           </a:p>
@@ -2209,7 +2209,7 @@
                 <a:ea typeface="Arial Unicode MS"/>
                 <a:cs typeface="Arial Unicode MS"/>
               </a:rPr>
-              <a:t>目標：讓車子在河內尖峰裡跑九十秒不撞，而且</a:t>
+              <a:t>目標：調三個參數，讓車子在撞車前</a:t>
             </a:r>
             <a:r>
               <a:rPr sz="1000" b="1" lang="zh-TW" dirty="0">
@@ -2220,7 +2220,7 @@
                 <a:ea typeface="Arial Unicode MS"/>
                 <a:cs typeface="Arial Unicode MS"/>
               </a:rPr>
-              <a:t>平均車速不低於時速二十五公里</a:t>
+              <a:t>撐得最久</a:t>
             </a:r>
             <a:r>
               <a:rPr sz="1000" lang="zh-TW" dirty="0">
@@ -2231,7 +2231,7 @@
                 <a:ea typeface="Arial Unicode MS"/>
                 <a:cs typeface="Arial Unicode MS"/>
               </a:rPr>
-              <a:t>。
+              <a:t>。每組跑三次，取最好的那一次。
 </a:t>
             </a:r>
           </a:p>
@@ -2253,7 +2253,7 @@
                 <a:ea typeface="Arial Unicode MS"/>
                 <a:cs typeface="Arial Unicode MS"/>
               </a:rPr>
-              <a:t>（先講清楚那個速度條件為什麼存在。）
+              <a:t>（先講清楚為什麼是比「撐最久」，不是「不准撞」。）
 </a:t>
             </a:r>
           </a:p>
@@ -2275,7 +2275,29 @@
                 <a:ea typeface="Arial Unicode MS"/>
                 <a:cs typeface="Arial Unicode MS"/>
               </a:rPr>
-              <a:t>為什麼要加「平均車速二十五」這個條件？
+              <a:t>我先告訴各位一件事，免得大家白費力氣：</a:t>
+            </a:r>
+            <a:r>
+              <a:rPr sz="1000" b="1" lang="zh-TW" dirty="0">
+                <a:solidFill>
+                  <a:srgbClr val="000000"/>
+                </a:solidFill>
+                <a:latin typeface="Arial Unicode MS"/>
+                <a:ea typeface="Arial Unicode MS"/>
+                <a:cs typeface="Arial Unicode MS"/>
+              </a:rPr>
+              <a:t>在河內尖峰這個場景裡，沒有任何一組參數能保證不撞。</a:t>
+            </a:r>
+            <a:r>
+              <a:rPr sz="1000" lang="zh-TW" dirty="0">
+                <a:solidFill>
+                  <a:srgbClr val="000000"/>
+                </a:solidFill>
+                <a:latin typeface="Arial Unicode MS"/>
+                <a:ea typeface="Arial Unicode MS"/>
+                <a:cs typeface="Arial Unicode MS"/>
+              </a:rPr>
+              <a:t>我自己跑過七十次，三個參數全部拉到最大，也撐不過九十秒。
 </a:t>
             </a:r>
           </a:p>
@@ -2297,7 +2319,7 @@
                 <a:ea typeface="Arial Unicode MS"/>
                 <a:cs typeface="Arial Unicode MS"/>
               </a:rPr>
-              <a:t>（讓學生想一下。）
+              <a:t>（學生聽到這裡通常會愣一下，那個反應是好的。）
 </a:t>
             </a:r>
           </a:p>
@@ -2319,7 +2341,7 @@
                 <a:ea typeface="Arial Unicode MS"/>
                 <a:cs typeface="Arial Unicode MS"/>
               </a:rPr>
-              <a:t>因為如果沒有這個條件，最簡單的答案是什麼？</a:t>
+              <a:t>這不是模擬器壞了，這正是這個場景要告訴大家的事：</a:t>
             </a:r>
             <a:r>
               <a:rPr sz="1000" b="1" lang="zh-TW" dirty="0">
@@ -2330,7 +2352,7 @@
                 <a:ea typeface="Arial Unicode MS"/>
                 <a:cs typeface="Arial Unicode MS"/>
               </a:rPr>
-              <a:t>把車速調到時速五公里。</a:t>
+              <a:t>有些環境，用現在這些感測器規格就是搞不定。</a:t>
             </a:r>
             <a:r>
               <a:rPr sz="1000" lang="zh-TW" dirty="0">
@@ -2341,7 +2363,29 @@
                 <a:ea typeface="Arial Unicode MS"/>
                 <a:cs typeface="Arial Unicode MS"/>
               </a:rPr>
-              <a:t>一定不會撞——但那台車也沒有用，沒有人要搭一台比走路還慢的計程車。
+              <a:t>這時候工程上的答案不是再加感測器，是</a:t>
+            </a:r>
+            <a:r>
+              <a:rPr sz="1000" b="1" lang="zh-TW" dirty="0">
+                <a:solidFill>
+                  <a:srgbClr val="000000"/>
+                </a:solidFill>
+                <a:latin typeface="Arial Unicode MS"/>
+                <a:ea typeface="Arial Unicode MS"/>
+                <a:cs typeface="Arial Unicode MS"/>
+              </a:rPr>
+              <a:t>把運行範圍縮小</a:t>
+            </a:r>
+            <a:r>
+              <a:rPr sz="1000" lang="zh-TW" dirty="0">
+                <a:solidFill>
+                  <a:srgbClr val="000000"/>
+                </a:solidFill>
+                <a:latin typeface="Arial Unicode MS"/>
+                <a:ea typeface="Arial Unicode MS"/>
+                <a:cs typeface="Arial Unicode MS"/>
+              </a:rPr>
+              <a:t>——降速、避開尖峰時段、或者根本不在這條路上營運。這就是第二週講的 ODD。
 </a:t>
             </a:r>
           </a:p>
@@ -2355,17 +2399,6 @@
               </a:spcAft>
             </a:pPr>
             <a:r>
-              <a:rPr sz="1000" b="1" lang="zh-TW" dirty="0">
-                <a:solidFill>
-                  <a:srgbClr val="000000"/>
-                </a:solidFill>
-                <a:latin typeface="Arial Unicode MS"/>
-                <a:ea typeface="Arial Unicode MS"/>
-                <a:cs typeface="Arial Unicode MS"/>
-              </a:rPr>
-              <a:t>這就是工程的本質：不是找一個不會出錯的答案，是在兩個互相衝突的要求之間找平衡。</a:t>
-            </a:r>
-            <a:r>
               <a:rPr sz="1000" lang="zh-TW" dirty="0">
                 <a:solidFill>
                   <a:srgbClr val="000000"/>
@@ -2374,7 +2407,7 @@
                 <a:ea typeface="Arial Unicode MS"/>
                 <a:cs typeface="Arial Unicode MS"/>
               </a:rPr>
-              <a:t>安全和效率，永遠在拉扯。
+              <a:t>所以今天的題目是：在搞不定的環境裡，你能把界線推到多遠？
 </a:t>
             </a:r>
           </a:p>
@@ -2465,6 +2498,17 @@
               </a:spcAft>
             </a:pPr>
             <a:r>
+              <a:rPr sz="1000" b="1" lang="zh-TW" dirty="0">
+                <a:solidFill>
+                  <a:srgbClr val="000000"/>
+                </a:solidFill>
+                <a:latin typeface="Arial Unicode MS"/>
+                <a:ea typeface="Arial Unicode MS"/>
+                <a:cs typeface="Arial Unicode MS"/>
+              </a:rPr>
+              <a:t>我先給各位一組參考數字</a:t>
+            </a:r>
+            <a:r>
               <a:rPr sz="1000" lang="zh-TW" dirty="0">
                 <a:solidFill>
                   <a:srgbClr val="000000"/>
@@ -2473,7 +2517,7 @@
                 <a:ea typeface="Arial Unicode MS"/>
                 <a:cs typeface="Arial Unicode MS"/>
               </a:rPr>
-              <a:t>（巡視時可以問各組：你現在改的是哪一個？為什麼改它？逼他們講出理由。）
+              <a:t>，這是我自己實測的中位數，各組跑出來會有出入：
 </a:t>
             </a:r>
           </a:p>
@@ -2495,7 +2539,29 @@
                 <a:ea typeface="Arial Unicode MS"/>
                 <a:cs typeface="Arial Unicode MS"/>
               </a:rPr>
-              <a:t>平均車速的算法寫在題目上：距離除以時間再乘三點六。
+              <a:t>預設的九條、二十五公尺、一百二十度，大約撐</a:t>
+            </a:r>
+            <a:r>
+              <a:rPr sz="1000" b="1" lang="zh-TW" dirty="0">
+                <a:solidFill>
+                  <a:srgbClr val="000000"/>
+                </a:solidFill>
+                <a:latin typeface="Arial Unicode MS"/>
+                <a:ea typeface="Arial Unicode MS"/>
+                <a:cs typeface="Arial Unicode MS"/>
+              </a:rPr>
+              <a:t>十八秒</a:t>
+            </a:r>
+            <a:r>
+              <a:rPr sz="1000" lang="zh-TW" dirty="0">
+                <a:solidFill>
+                  <a:srgbClr val="000000"/>
+                </a:solidFill>
+                <a:latin typeface="Arial Unicode MS"/>
+                <a:ea typeface="Arial Unicode MS"/>
+                <a:cs typeface="Arial Unicode MS"/>
+              </a:rPr>
+              <a:t>。
 </a:t>
             </a:r>
           </a:p>
@@ -2517,7 +2583,117 @@
                 <a:ea typeface="Arial Unicode MS"/>
                 <a:cs typeface="Arial Unicode MS"/>
               </a:rPr>
-              <a:t>十五分鐘後，每組要交出三個數字。</a:t>
+              <a:t>調到三十條、四十五公尺、一百二十度，大約撐</a:t>
+            </a:r>
+            <a:r>
+              <a:rPr sz="1000" b="1" lang="zh-TW" dirty="0">
+                <a:solidFill>
+                  <a:srgbClr val="000000"/>
+                </a:solidFill>
+                <a:latin typeface="Arial Unicode MS"/>
+                <a:ea typeface="Arial Unicode MS"/>
+                <a:cs typeface="Arial Unicode MS"/>
+              </a:rPr>
+              <a:t>三十四秒</a:t>
+            </a:r>
+            <a:r>
+              <a:rPr sz="1000" lang="zh-TW" dirty="0">
+                <a:solidFill>
+                  <a:srgbClr val="000000"/>
+                </a:solidFill>
+                <a:latin typeface="Arial Unicode MS"/>
+                <a:ea typeface="Arial Unicode MS"/>
+                <a:cs typeface="Arial Unicode MS"/>
+              </a:rPr>
+              <a:t>，差不多快了一倍。
+</a:t>
+            </a:r>
+          </a:p>
+          <a:p>
+            <a:pPr algn="l">
+              <a:lnSpc>
+                <a:spcPct val="115000"/>
+              </a:lnSpc>
+              <a:spcAft>
+                <a:spcPts val="500"/>
+              </a:spcAft>
+            </a:pPr>
+            <a:r>
+              <a:rPr sz="1000" lang="zh-TW" dirty="0">
+                <a:solidFill>
+                  <a:srgbClr val="000000"/>
+                </a:solidFill>
+                <a:latin typeface="Arial Unicode MS"/>
+                <a:ea typeface="Arial Unicode MS"/>
+                <a:cs typeface="Arial Unicode MS"/>
+              </a:rPr>
+              <a:t>所以參數是真的有用的。但是——
+</a:t>
+            </a:r>
+          </a:p>
+          <a:p>
+            <a:pPr algn="l">
+              <a:lnSpc>
+                <a:spcPct val="115000"/>
+              </a:lnSpc>
+              <a:spcAft>
+                <a:spcPts val="500"/>
+              </a:spcAft>
+            </a:pPr>
+            <a:r>
+              <a:rPr sz="1000" lang="zh-TW" dirty="0">
+                <a:solidFill>
+                  <a:srgbClr val="000000"/>
+                </a:solidFill>
+                <a:latin typeface="Arial Unicode MS"/>
+                <a:ea typeface="Arial Unicode MS"/>
+                <a:cs typeface="Arial Unicode MS"/>
+              </a:rPr>
+              <a:t>（這句話先不要講，留到上台那一頁再揭曉，讓學生自己去撞上這個發現：再往上拉到滿檔，並不會更好。）
+</a:t>
+            </a:r>
+          </a:p>
+          <a:p>
+            <a:pPr algn="l">
+              <a:lnSpc>
+                <a:spcPct val="115000"/>
+              </a:lnSpc>
+              <a:spcAft>
+                <a:spcPts val="500"/>
+              </a:spcAft>
+            </a:pPr>
+            <a:r>
+              <a:rPr sz="1000" lang="zh-TW" dirty="0">
+                <a:solidFill>
+                  <a:srgbClr val="000000"/>
+                </a:solidFill>
+                <a:latin typeface="Arial Unicode MS"/>
+                <a:ea typeface="Arial Unicode MS"/>
+                <a:cs typeface="Arial Unicode MS"/>
+              </a:rPr>
+              <a:t>（巡視時可以問各組：你現在改的是哪一個？為什麼改它？逼他們講出理由。）
+</a:t>
+            </a:r>
+          </a:p>
+          <a:p>
+            <a:pPr algn="l">
+              <a:lnSpc>
+                <a:spcPct val="115000"/>
+              </a:lnSpc>
+              <a:spcAft>
+                <a:spcPts val="500"/>
+              </a:spcAft>
+            </a:pPr>
+            <a:r>
+              <a:rPr sz="1000" lang="zh-TW" dirty="0">
+                <a:solidFill>
+                  <a:srgbClr val="000000"/>
+                </a:solidFill>
+                <a:latin typeface="Arial Unicode MS"/>
+                <a:ea typeface="Arial Unicode MS"/>
+                <a:cs typeface="Arial Unicode MS"/>
+              </a:rPr>
+              <a:t>十五分鐘後，每組要交出：撐最久的那個秒數，加上當時的三個數字。</a:t>
             </a:r>
           </a:p>
         </p:txBody>
@@ -4199,11 +4375,11 @@
                 <a:spcPct val="115000"/>
               </a:lnSpc>
               <a:spcAft>
-                <a:spcPts val="525"/>
+                <a:spcPts val="500"/>
               </a:spcAft>
             </a:pPr>
             <a:r>
-              <a:rPr sz="1050" lang="zh-TW" dirty="0">
+              <a:rPr sz="1000" lang="zh-TW" dirty="0">
                 <a:solidFill>
                   <a:srgbClr val="000000"/>
                 </a:solidFill>
@@ -4221,11 +4397,11 @@
                 <a:spcPct val="115000"/>
               </a:lnSpc>
               <a:spcAft>
-                <a:spcPts val="525"/>
+                <a:spcPts val="500"/>
               </a:spcAft>
             </a:pPr>
             <a:r>
-              <a:rPr sz="1050" lang="zh-TW" dirty="0">
+              <a:rPr sz="1000" lang="zh-TW" dirty="0">
                 <a:solidFill>
                   <a:srgbClr val="000000"/>
                 </a:solidFill>
@@ -4243,19 +4419,19 @@
                 <a:spcPct val="115000"/>
               </a:lnSpc>
               <a:spcAft>
-                <a:spcPts val="525"/>
+                <a:spcPts val="500"/>
               </a:spcAft>
             </a:pPr>
             <a:r>
-              <a:rPr sz="1050" lang="zh-TW" dirty="0">
-                <a:solidFill>
-                  <a:srgbClr val="000000"/>
-                </a:solidFill>
-                <a:latin typeface="Arial Unicode MS"/>
-                <a:ea typeface="Arial Unicode MS"/>
-                <a:cs typeface="Arial Unicode MS"/>
-              </a:rPr>
-              <a:t>（老師在白板上開一個表格，記每組的三個數字。）
+              <a:rPr sz="1000" lang="zh-TW" dirty="0">
+                <a:solidFill>
+                  <a:srgbClr val="000000"/>
+                </a:solidFill>
+                <a:latin typeface="Arial Unicode MS"/>
+                <a:ea typeface="Arial Unicode MS"/>
+                <a:cs typeface="Arial Unicode MS"/>
+              </a:rPr>
+              <a:t>（老師在白板上開一個表格，記每組撐了幾秒，還有當時的三個數字。）
 </a:t>
             </a:r>
           </a:p>
@@ -4265,11 +4441,11 @@
                 <a:spcPct val="115000"/>
               </a:lnSpc>
               <a:spcAft>
-                <a:spcPts val="525"/>
+                <a:spcPts val="500"/>
               </a:spcAft>
             </a:pPr>
             <a:r>
-              <a:rPr sz="1050" lang="zh-TW" dirty="0">
+              <a:rPr sz="1000" lang="zh-TW" dirty="0">
                 <a:solidFill>
                   <a:srgbClr val="000000"/>
                 </a:solidFill>
@@ -4287,11 +4463,11 @@
                 <a:spcPct val="115000"/>
               </a:lnSpc>
               <a:spcAft>
-                <a:spcPts val="525"/>
+                <a:spcPts val="500"/>
               </a:spcAft>
             </a:pPr>
             <a:r>
-              <a:rPr sz="1050" lang="zh-TW" dirty="0">
+              <a:rPr sz="1000" lang="zh-TW" dirty="0">
                 <a:solidFill>
                   <a:srgbClr val="000000"/>
                 </a:solidFill>
@@ -4302,7 +4478,7 @@
               <a:t>第一，</a:t>
             </a:r>
             <a:r>
-              <a:rPr sz="1050" b="1" lang="zh-TW" dirty="0">
+              <a:rPr sz="1000" b="1" lang="zh-TW" dirty="0">
                 <a:solidFill>
                   <a:srgbClr val="000000"/>
                 </a:solidFill>
@@ -4313,7 +4489,7 @@
               <a:t>有沒有兩組完全一樣？</a:t>
             </a:r>
             <a:r>
-              <a:rPr sz="1050" lang="zh-TW" dirty="0">
+              <a:rPr sz="1000" lang="zh-TW" dirty="0">
                 <a:solidFill>
                   <a:srgbClr val="000000"/>
                 </a:solidFill>
@@ -4331,11 +4507,11 @@
                 <a:spcPct val="115000"/>
               </a:lnSpc>
               <a:spcAft>
-                <a:spcPts val="525"/>
+                <a:spcPts val="500"/>
               </a:spcAft>
             </a:pPr>
             <a:r>
-              <a:rPr sz="1050" lang="zh-TW" dirty="0">
+              <a:rPr sz="1000" lang="zh-TW" dirty="0">
                 <a:solidFill>
                   <a:srgbClr val="000000"/>
                 </a:solidFill>
@@ -4353,11 +4529,11 @@
                 <a:spcPct val="115000"/>
               </a:lnSpc>
               <a:spcAft>
-                <a:spcPts val="525"/>
+                <a:spcPts val="500"/>
               </a:spcAft>
             </a:pPr>
             <a:r>
-              <a:rPr sz="1050" lang="zh-TW" dirty="0">
+              <a:rPr sz="1000" lang="zh-TW" dirty="0">
                 <a:solidFill>
                   <a:srgbClr val="000000"/>
                 </a:solidFill>
@@ -4368,18 +4544,18 @@
               <a:t>第二，</a:t>
             </a:r>
             <a:r>
-              <a:rPr sz="1050" b="1" lang="zh-TW" dirty="0">
-                <a:solidFill>
-                  <a:srgbClr val="000000"/>
-                </a:solidFill>
-                <a:latin typeface="Arial Unicode MS"/>
-                <a:ea typeface="Arial Unicode MS"/>
-                <a:cs typeface="Arial Unicode MS"/>
-              </a:rPr>
-              <a:t>平均車速最高的是哪一組？他們的數字有什麼特別？</a:t>
-            </a:r>
-            <a:r>
-              <a:rPr sz="1050" lang="zh-TW" dirty="0">
+              <a:rPr sz="1000" b="1" lang="zh-TW" dirty="0">
+                <a:solidFill>
+                  <a:srgbClr val="000000"/>
+                </a:solidFill>
+                <a:latin typeface="Arial Unicode MS"/>
+                <a:ea typeface="Arial Unicode MS"/>
+                <a:cs typeface="Arial Unicode MS"/>
+              </a:rPr>
+              <a:t>撐最久的那一組，用的是哪三個數字？</a:t>
+            </a:r>
+            <a:r>
+              <a:rPr sz="1000" lang="zh-TW" dirty="0">
                 <a:solidFill>
                   <a:srgbClr val="000000"/>
                 </a:solidFill>
@@ -4397,11 +4573,165 @@
                 <a:spcPct val="115000"/>
               </a:lnSpc>
               <a:spcAft>
-                <a:spcPts val="525"/>
+                <a:spcPts val="500"/>
               </a:spcAft>
             </a:pPr>
             <a:r>
-              <a:rPr sz="1050" lang="zh-TW" dirty="0">
+              <a:rPr sz="1000" lang="zh-TW" dirty="0">
+                <a:solidFill>
+                  <a:srgbClr val="000000"/>
+                </a:solidFill>
+                <a:latin typeface="Arial Unicode MS"/>
+                <a:ea typeface="Arial Unicode MS"/>
+                <a:cs typeface="Arial Unicode MS"/>
+              </a:rPr>
+              <a:t>（這裡要揭曉我剛剛保留的那件事。先問全班一個問題。）
+</a:t>
+            </a:r>
+          </a:p>
+          <a:p>
+            <a:pPr algn="l">
+              <a:lnSpc>
+                <a:spcPct val="115000"/>
+              </a:lnSpc>
+              <a:spcAft>
+                <a:spcPts val="500"/>
+              </a:spcAft>
+            </a:pPr>
+            <a:r>
+              <a:rPr sz="1000" lang="zh-TW" dirty="0">
+                <a:solidFill>
+                  <a:srgbClr val="000000"/>
+                </a:solidFill>
+                <a:latin typeface="Arial Unicode MS"/>
+                <a:ea typeface="Arial Unicode MS"/>
+                <a:cs typeface="Arial Unicode MS"/>
+              </a:rPr>
+              <a:t>我先問各位：三個參數全部拉到最大的那一組，是不是撐最久的？
+</a:t>
+            </a:r>
+          </a:p>
+          <a:p>
+            <a:pPr algn="l">
+              <a:lnSpc>
+                <a:spcPct val="115000"/>
+              </a:lnSpc>
+              <a:spcAft>
+                <a:spcPts val="500"/>
+              </a:spcAft>
+            </a:pPr>
+            <a:r>
+              <a:rPr sz="1000" lang="zh-TW" dirty="0">
+                <a:solidFill>
+                  <a:srgbClr val="000000"/>
+                </a:solidFill>
+                <a:latin typeface="Arial Unicode MS"/>
+                <a:ea typeface="Arial Unicode MS"/>
+                <a:cs typeface="Arial Unicode MS"/>
+              </a:rPr>
+              <a:t>（通常不是，這個結果會讓學生意外。）
+</a:t>
+            </a:r>
+          </a:p>
+          <a:p>
+            <a:pPr algn="l">
+              <a:lnSpc>
+                <a:spcPct val="115000"/>
+              </a:lnSpc>
+              <a:spcAft>
+                <a:spcPts val="500"/>
+              </a:spcAft>
+            </a:pPr>
+            <a:r>
+              <a:rPr sz="1000" lang="zh-TW" dirty="0">
+                <a:solidFill>
+                  <a:srgbClr val="000000"/>
+                </a:solidFill>
+                <a:latin typeface="Arial Unicode MS"/>
+                <a:ea typeface="Arial Unicode MS"/>
+                <a:cs typeface="Arial Unicode MS"/>
+              </a:rPr>
+              <a:t>我自己實測的結果是這樣。射線三十條、長度四十五公尺、張角一百二十度，大約撐三十四秒。三個全部拉到滿檔——六十條、六十公尺——只多撐到四十二秒，沒有再進步了。
+</a:t>
+            </a:r>
+          </a:p>
+          <a:p>
+            <a:pPr algn="l">
+              <a:lnSpc>
+                <a:spcPct val="115000"/>
+              </a:lnSpc>
+              <a:spcAft>
+                <a:spcPts val="500"/>
+              </a:spcAft>
+            </a:pPr>
+            <a:r>
+              <a:rPr sz="1000" lang="zh-TW" dirty="0">
+                <a:solidFill>
+                  <a:srgbClr val="000000"/>
+                </a:solidFill>
+                <a:latin typeface="Arial Unicode MS"/>
+                <a:ea typeface="Arial Unicode MS"/>
+                <a:cs typeface="Arial Unicode MS"/>
+              </a:rPr>
+              <a:t>為什麼？回想第二節那張圖：</a:t>
+            </a:r>
+            <a:r>
+              <a:rPr sz="1000" b="1" lang="zh-TW" dirty="0">
+                <a:solidFill>
+                  <a:srgbClr val="000000"/>
+                </a:solidFill>
+                <a:latin typeface="Arial Unicode MS"/>
+                <a:ea typeface="Arial Unicode MS"/>
+                <a:cs typeface="Arial Unicode MS"/>
+              </a:rPr>
+              <a:t>射線的數量是固定的，攤得愈廣就愈稀。</a:t>
+            </a:r>
+            <a:r>
+              <a:rPr sz="1000" lang="zh-TW" dirty="0">
+                <a:solidFill>
+                  <a:srgbClr val="000000"/>
+                </a:solidFill>
+                <a:latin typeface="Arial Unicode MS"/>
+                <a:ea typeface="Arial Unicode MS"/>
+                <a:cs typeface="Arial Unicode MS"/>
+              </a:rPr>
+              <a:t>把張角從一百二十度放大到一百五十度，聽起來看得更廣，可是我實測反而掉到二十七秒，因為每一條射線之間的縫變大了，機車就是從那個縫鑽進來的。反過來把張角收到九十度，也只剩二十二秒，因為側面來的車完全看不到。
+</a:t>
+            </a:r>
+          </a:p>
+          <a:p>
+            <a:pPr algn="l">
+              <a:lnSpc>
+                <a:spcPct val="115000"/>
+              </a:lnSpc>
+              <a:spcAft>
+                <a:spcPts val="500"/>
+              </a:spcAft>
+            </a:pPr>
+            <a:r>
+              <a:rPr sz="1000" lang="zh-TW" dirty="0">
+                <a:solidFill>
+                  <a:srgbClr val="000000"/>
+                </a:solidFill>
+                <a:latin typeface="Arial Unicode MS"/>
+                <a:ea typeface="Arial Unicode MS"/>
+                <a:cs typeface="Arial Unicode MS"/>
+              </a:rPr>
+              <a:t>一百二十度左右是最好的。這個「甜蜜點」不是我告訴各位的，是各位自己調出來的。
+</a:t>
+            </a:r>
+          </a:p>
+          <a:p>
+            <a:pPr algn="l">
+              <a:lnSpc>
+                <a:spcPct val="115000"/>
+              </a:lnSpc>
+              <a:spcAft>
+                <a:spcPts val="500"/>
+              </a:spcAft>
+            </a:pPr>
+            <a:r>
+              <a:rPr sz="1000" lang="zh-TW" dirty="0">
                 <a:solidFill>
                   <a:srgbClr val="000000"/>
                 </a:solidFill>
@@ -4412,7 +4742,7 @@
               <a:t>第三，這是最重要的一件事——</a:t>
             </a:r>
             <a:r>
-              <a:rPr sz="1050" b="1" lang="zh-TW" dirty="0">
+              <a:rPr sz="1000" b="1" lang="zh-TW" dirty="0">
                 <a:solidFill>
                   <a:srgbClr val="000000"/>
                 </a:solidFill>
@@ -4423,7 +4753,7 @@
               <a:t>把所有數字看成一片，它們會集中在某個範圍。</a:t>
             </a:r>
             <a:r>
-              <a:rPr sz="1050" lang="zh-TW" dirty="0">
+              <a:rPr sz="1000" lang="zh-TW" dirty="0">
                 <a:solidFill>
                   <a:srgbClr val="000000"/>
                 </a:solidFill>
@@ -4441,11 +4771,11 @@
                 <a:spcPct val="115000"/>
               </a:lnSpc>
               <a:spcAft>
-                <a:spcPts val="525"/>
+                <a:spcPts val="500"/>
               </a:spcAft>
             </a:pPr>
             <a:r>
-              <a:rPr sz="1050" lang="zh-TW" dirty="0">
+              <a:rPr sz="1000" lang="zh-TW" dirty="0">
                 <a:solidFill>
                   <a:srgbClr val="000000"/>
                 </a:solidFill>
@@ -4463,11 +4793,11 @@
                 <a:spcPct val="115000"/>
               </a:lnSpc>
               <a:spcAft>
-                <a:spcPts val="525"/>
+                <a:spcPts val="500"/>
               </a:spcAft>
             </a:pPr>
             <a:r>
-              <a:rPr sz="1050" lang="zh-TW" dirty="0">
+              <a:rPr sz="1000" lang="zh-TW" dirty="0">
                 <a:solidFill>
                   <a:srgbClr val="000000"/>
                 </a:solidFill>
@@ -4478,7 +4808,7 @@
               <a:t>那個範圍有一個名字：</a:t>
             </a:r>
             <a:r>
-              <a:rPr sz="1050" b="1" lang="zh-TW" dirty="0">
+              <a:rPr sz="1000" b="1" lang="zh-TW" dirty="0">
                 <a:solidFill>
                   <a:srgbClr val="000000"/>
                 </a:solidFill>
@@ -4489,7 +4819,7 @@
               <a:t>河內尖峰的最低感測器規格。</a:t>
             </a:r>
             <a:r>
-              <a:rPr sz="1050" lang="zh-TW" dirty="0">
+              <a:rPr sz="1000" lang="zh-TW" dirty="0">
                 <a:solidFill>
                   <a:srgbClr val="000000"/>
                 </a:solidFill>
@@ -4507,11 +4837,11 @@
                 <a:spcPct val="115000"/>
               </a:lnSpc>
               <a:spcAft>
-                <a:spcPts val="525"/>
+                <a:spcPts val="500"/>
               </a:spcAft>
             </a:pPr>
             <a:r>
-              <a:rPr sz="1050" lang="zh-TW" dirty="0">
+              <a:rPr sz="1000" lang="zh-TW" dirty="0">
                 <a:solidFill>
                   <a:srgbClr val="000000"/>
                 </a:solidFill>
@@ -4529,11 +4859,11 @@
                 <a:spcPct val="115000"/>
               </a:lnSpc>
               <a:spcAft>
-                <a:spcPts val="525"/>
+                <a:spcPts val="500"/>
               </a:spcAft>
             </a:pPr>
             <a:r>
-              <a:rPr sz="1050" lang="zh-TW" dirty="0">
+              <a:rPr sz="1000" lang="zh-TW" dirty="0">
                 <a:solidFill>
                   <a:srgbClr val="000000"/>
                 </a:solidFill>
@@ -7120,7 +7450,7 @@
                 <a:ea typeface="Arial" pitchFamily="34" charset="-122"/>
                 <a:cs typeface="Arial" pitchFamily="34" charset="-120"/>
               </a:rPr>
-              <a:t>90 giây không đâm\n≥ 25 km/h</a:t>
+              <a:t>Trụ được lâu nhất\n3 lần lấy lần tốt nhất</a:t>
             </a:r>
             <a:endParaRPr lang="en-US" sz="1050" dirty="0"/>
           </a:p>
@@ -7140,7 +7470,7 @@
                 <a:ea typeface="微軟正黑體" pitchFamily="34" charset="-122"/>
                 <a:cs typeface="微軟正黑體" pitchFamily="34" charset="-120"/>
               </a:rPr>
-              <a:t>跑 90 秒不撞\n均速 ≥ 25</a:t>
+              <a:t>撐最久\n跑 3 次取最好</a:t>
             </a:r>
             <a:endParaRPr lang="en-US" sz="1050" dirty="0"/>
           </a:p>
@@ -8725,7 +9055,7 @@
                 <a:ea typeface="Arial" pitchFamily="34" charset="-122"/>
                 <a:cs typeface="Arial" pitchFamily="34" charset="-120"/>
               </a:rPr>
-              <a:t>Đổi ba tham số, sao cho xe chạy 90 giây không đâm, và tốc độ trung bình ≥ 25 km/h.</a:t>
+              <a:t>Chỉnh ba tham số, sao cho xe trụ được LÂU NHẤT trước khi đâm. Chạy 3 lần, lấy lần tốt nhất.</a:t>
             </a:r>
             <a:endParaRPr lang="en-US" sz="2300" dirty="0"/>
           </a:p>
@@ -8745,7 +9075,7 @@
                 <a:ea typeface="微軟正黑體" pitchFamily="34" charset="-122"/>
                 <a:cs typeface="微軟正黑體" pitchFamily="34" charset="-120"/>
               </a:rPr>
-              <a:t>調三個參數，讓車子跑 90 秒不撞，而且平均車速 ≥ 25 公里。</a:t>
+              <a:t>調三個參數，讓車子在撞車前撐得**最久**。跑三次，取最好的那一次。</a:t>
             </a:r>
             <a:endParaRPr lang="en-US" sz="2300" dirty="0"/>
           </a:p>
@@ -9154,7 +9484,7 @@
                 <a:ea typeface="Arial" pitchFamily="34" charset="-122"/>
                 <a:cs typeface="Arial" pitchFamily="34" charset="-120"/>
               </a:rPr>
-              <a:t>Tốc độ trung bình = quãng đường ÷ thời gian × 3,6. Nộp ba con số của nhóm.</a:t>
+              <a:t>Nộp: số giây trụ được lâu nhất, kèm ba con số lúc đó.</a:t>
             </a:r>
             <a:endParaRPr lang="en-US" sz="1250" dirty="0"/>
           </a:p>
@@ -9174,7 +9504,7 @@
                 <a:ea typeface="微軟正黑體" pitchFamily="34" charset="-122"/>
                 <a:cs typeface="微軟正黑體" pitchFamily="34" charset="-120"/>
               </a:rPr>
-              <a:t>平均車速 ＝ 行駛距離 ÷ 時間 × 3.6。交出你們這組的三個數字。</a:t>
+              <a:t>要交的是：撐最久的那個秒數，加上當時的三個數字。</a:t>
             </a:r>
             <a:endParaRPr lang="en-US" sz="1250" dirty="0"/>
           </a:p>
@@ -9216,7 +9546,7 @@
                 <a:ea typeface="Arial" pitchFamily="34" charset="-122"/>
                 <a:cs typeface="Arial" pitchFamily="34" charset="-120"/>
               </a:rPr>
-              <a:t>Vì sao phải có điều kiện tốc độ? Vì chạy 5 km/h thì chắc chắn không đâm — mà cũng vô dụng.</a:t>
+              <a:t>Không nhóm nào qua được 90 giây — kể cả khi kéo cả ba lên tối đa. Đó chính là bài học.</a:t>
             </a:r>
             <a:endParaRPr lang="en-US" sz="1250" dirty="0"/>
           </a:p>
@@ -9236,7 +9566,7 @@
                 <a:ea typeface="微軟正黑體" pitchFamily="34" charset="-122"/>
                 <a:cs typeface="微軟正黑體" pitchFamily="34" charset="-120"/>
               </a:rPr>
-              <a:t>為什麼要加速度的條件？因為用時速 5 公里跑一定不會撞——但那台車也沒用。</a:t>
+              <a:t>沒有一組能撐過 90 秒——就算三個都拉到最大也一樣。這正是這一題要教的事。</a:t>
             </a:r>
             <a:endParaRPr lang="en-US" sz="1250" dirty="0"/>
           </a:p>
@@ -9474,7 +9804,7 @@
                 <a:ea typeface="Arial" pitchFamily="34" charset="-122"/>
                 <a:cs typeface="Arial" pitchFamily="34" charset="-120"/>
               </a:rPr>
-              <a:t>Giữ nguyên ba con số vừa tìm được, bật mưa lên. Còn trụ được không?</a:t>
+              <a:t>Giữ nguyên ba con số vừa tìm được, bật mưa lên. Trụ được bao lâu?</a:t>
             </a:r>
             <a:endParaRPr lang="en-US" sz="2300" dirty="0"/>
           </a:p>
@@ -9494,7 +9824,7 @@
                 <a:ea typeface="微軟正黑體" pitchFamily="34" charset="-122"/>
                 <a:cs typeface="微軟正黑體" pitchFamily="34" charset="-120"/>
               </a:rPr>
-              <a:t>三個數字不要動，把雨天打開。還撐得住嗎？</a:t>
+              <a:t>三個數字不要動，把雨天打開。這次撐得了多久？</a:t>
             </a:r>
             <a:endParaRPr lang="en-US" sz="2300" dirty="0"/>
           </a:p>
@@ -9903,7 +10233,7 @@
                 <a:ea typeface="Arial" pitchFamily="34" charset="-122"/>
                 <a:cs typeface="Arial" pitchFamily="34" charset="-120"/>
               </a:rPr>
-              <a:t>Nếu không trụ được thì bạn đổi gì? Ghi lại đổi gì và VÌ SAO.</a:t>
+              <a:t>Ngắn đi bao nhiêu giây? Bạn đổi gì để kéo lại? Ghi lại đổi gì và VÌ SAO.</a:t>
             </a:r>
             <a:endParaRPr lang="en-US" sz="1250" dirty="0"/>
           </a:p>
@@ -9923,7 +10253,7 @@
                 <a:ea typeface="微軟正黑體" pitchFamily="34" charset="-122"/>
                 <a:cs typeface="微軟正黑體" pitchFamily="34" charset="-120"/>
               </a:rPr>
-              <a:t>如果撐不住，你要改什麼？寫下改了什麼、還有為什麼。</a:t>
+              <a:t>少撐了幾秒？你要改什麼把它拉回來？寫下改了什麼、還有為什麼。</a:t>
             </a:r>
             <a:endParaRPr lang="en-US" sz="1250" dirty="0"/>
           </a:p>
@@ -11735,7 +12065,7 @@
                 <a:ea typeface="Arial" pitchFamily="34" charset="-122"/>
                 <a:cs typeface="Arial" pitchFamily="34" charset="-120"/>
               </a:rPr>
-              <a:t>Thầy ghi số tia · chiều dài · góc quét của từng nhóm lên bảng</a:t>
+              <a:t>Thầy ghi lên bảng: số giây trụ được · số tia · chiều dài · góc quét</a:t>
             </a:r>
             <a:endParaRPr lang="en-US" sz="1250" dirty="0"/>
           </a:p>
@@ -11755,7 +12085,7 @@
                 <a:ea typeface="微軟正黑體" pitchFamily="34" charset="-122"/>
                 <a:cs typeface="微軟正黑體" pitchFamily="34" charset="-120"/>
               </a:rPr>
-              <a:t>老師把每組的射線數・長度・張角寫在白板上</a:t>
+              <a:t>老師在白板上記：撐了幾秒・射線數・長度・張角</a:t>
             </a:r>
             <a:endParaRPr lang="en-US" sz="1250" dirty="0"/>
           </a:p>
@@ -11878,7 +12208,7 @@
                 <a:ea typeface="Arial" pitchFamily="34" charset="-122"/>
                 <a:cs typeface="Arial" pitchFamily="34" charset="-120"/>
               </a:rPr>
-              <a:t>Xem có hai nhóm nào ra giống hệt nhau không. Nhóm nào tốc độ trung bình cao nhất?</a:t>
+              <a:t>Xem có hai nhóm nào ra giống hệt nhau không. Nhóm trụ lâu nhất dùng ba con số nào?</a:t>
             </a:r>
             <a:endParaRPr lang="en-US" sz="1250" dirty="0"/>
           </a:p>
@@ -11898,7 +12228,7 @@
                 <a:ea typeface="微軟正黑體" pitchFamily="34" charset="-122"/>
                 <a:cs typeface="微軟正黑體" pitchFamily="34" charset="-120"/>
               </a:rPr>
-              <a:t>看有沒有兩組完全一樣。平均車速最高的是哪一組？</a:t>
+              <a:t>看有沒有兩組完全一樣。撐最久的那一組，用的是哪三個數字？</a:t>
             </a:r>
             <a:endParaRPr lang="en-US" sz="1250" dirty="0"/>
           </a:p>

--- a/第四週(10-01)/第四週_第3節_簡報.pptx
+++ b/第四週(10-01)/第四週_第3節_簡報.pptx
@@ -5627,7 +5627,7 @@
         <p:spPr>
           <a:xfrm>
             <a:off x="502920" y="1572768"/>
-            <a:ext cx="7498080" cy="1371600"/>
+            <a:ext cx="7498080" cy="885499"/>
           </a:xfrm>
           <a:prstGeom prst="rect">
             <a:avLst/>
@@ -5688,7 +5688,7 @@
         </p:nvSpPr>
         <p:spPr>
           <a:xfrm>
-            <a:off x="502920" y="3218688"/>
+            <a:off x="502920" y="2787554"/>
             <a:ext cx="1371600" cy="41148"/>
           </a:xfrm>
           <a:prstGeom prst="rect">
@@ -5708,8 +5708,8 @@
         </p:nvSpPr>
         <p:spPr>
           <a:xfrm>
-            <a:off x="502920" y="3419856"/>
-            <a:ext cx="7132320" cy="731520"/>
+            <a:off x="502920" y="2988722"/>
+            <a:ext cx="7132320" cy="833470"/>
           </a:xfrm>
           <a:prstGeom prst="rect">
             <a:avLst/>
@@ -6117,7 +6117,7 @@
         <p:spPr>
           <a:xfrm>
             <a:off x="722376" y="1938528"/>
-            <a:ext cx="7863840" cy="603504"/>
+            <a:ext cx="7863840" cy="621792"/>
           </a:xfrm>
           <a:prstGeom prst="rect">
             <a:avLst/>
@@ -6178,8 +6178,8 @@
         </p:nvSpPr>
         <p:spPr>
           <a:xfrm>
-            <a:off x="502920" y="2633472"/>
-            <a:ext cx="45720" cy="512064"/>
+            <a:off x="502920" y="2688336"/>
+            <a:ext cx="45720" cy="672713"/>
           </a:xfrm>
           <a:prstGeom prst="rect">
             <a:avLst/>
@@ -6198,8 +6198,8 @@
         </p:nvSpPr>
         <p:spPr>
           <a:xfrm>
-            <a:off x="722376" y="2596896"/>
-            <a:ext cx="7863840" cy="603504"/>
+            <a:off x="722376" y="2651760"/>
+            <a:ext cx="7863840" cy="782441"/>
           </a:xfrm>
           <a:prstGeom prst="rect">
             <a:avLst/>
@@ -6260,8 +6260,8 @@
         </p:nvSpPr>
         <p:spPr>
           <a:xfrm>
-            <a:off x="502920" y="3291840"/>
-            <a:ext cx="45720" cy="512064"/>
+            <a:off x="502920" y="3562217"/>
+            <a:ext cx="45720" cy="672713"/>
           </a:xfrm>
           <a:prstGeom prst="rect">
             <a:avLst/>
@@ -6280,8 +6280,8 @@
         </p:nvSpPr>
         <p:spPr>
           <a:xfrm>
-            <a:off x="722376" y="3255264"/>
-            <a:ext cx="7863840" cy="603504"/>
+            <a:off x="722376" y="3525641"/>
+            <a:ext cx="7863840" cy="782441"/>
           </a:xfrm>
           <a:prstGeom prst="rect">
             <a:avLst/>
@@ -6621,7 +6621,7 @@
         <p:spPr>
           <a:xfrm>
             <a:off x="722376" y="1938528"/>
-            <a:ext cx="7863840" cy="603504"/>
+            <a:ext cx="7863840" cy="621792"/>
           </a:xfrm>
           <a:prstGeom prst="rect">
             <a:avLst/>
@@ -6682,7 +6682,7 @@
         </p:nvSpPr>
         <p:spPr>
           <a:xfrm>
-            <a:off x="502920" y="2633472"/>
+            <a:off x="502920" y="2688336"/>
             <a:ext cx="45720" cy="512064"/>
           </a:xfrm>
           <a:prstGeom prst="rect">
@@ -6702,8 +6702,8 @@
         </p:nvSpPr>
         <p:spPr>
           <a:xfrm>
-            <a:off x="722376" y="2596896"/>
-            <a:ext cx="7863840" cy="603504"/>
+            <a:off x="722376" y="2651760"/>
+            <a:ext cx="7863840" cy="621792"/>
           </a:xfrm>
           <a:prstGeom prst="rect">
             <a:avLst/>
@@ -6764,7 +6764,7 @@
         </p:nvSpPr>
         <p:spPr>
           <a:xfrm>
-            <a:off x="502920" y="3291840"/>
+            <a:off x="502920" y="3401568"/>
             <a:ext cx="45720" cy="512064"/>
           </a:xfrm>
           <a:prstGeom prst="rect">
@@ -6784,8 +6784,8 @@
         </p:nvSpPr>
         <p:spPr>
           <a:xfrm>
-            <a:off x="722376" y="3255264"/>
-            <a:ext cx="7863840" cy="603504"/>
+            <a:off x="722376" y="3364992"/>
+            <a:ext cx="7863840" cy="621792"/>
           </a:xfrm>
           <a:prstGeom prst="rect">
             <a:avLst/>
@@ -7194,7 +7194,27 @@
                 <a:ea typeface="Arial" pitchFamily="34" charset="-122"/>
                 <a:cs typeface="Arial" pitchFamily="34" charset="-120"/>
               </a:rPr>
-              <a:t>Chưa đổi gì cả\n3 lần va chạm đầu</a:t>
+              <a:t>Chưa đổi gì cả</a:t>
+            </a:r>
+            <a:endParaRPr lang="en-US" sz="1050" dirty="0"/>
+          </a:p>
+          <a:p>
+            <a:pPr algn="ctr" indent="0" marL="0">
+              <a:lnSpc>
+                <a:spcPct val="126000"/>
+              </a:lnSpc>
+              <a:buNone/>
+            </a:pPr>
+            <a:r>
+              <a:rPr lang="en-US" sz="1050" dirty="0">
+                <a:solidFill>
+                  <a:srgbClr val="5F7183"/>
+                </a:solidFill>
+                <a:latin typeface="Arial" pitchFamily="34" charset="0"/>
+                <a:ea typeface="Arial" pitchFamily="34" charset="-122"/>
+                <a:cs typeface="Arial" pitchFamily="34" charset="-120"/>
+              </a:rPr>
+              <a:t>3 lần va chạm đầu</a:t>
             </a:r>
             <a:endParaRPr lang="en-US" sz="1050" dirty="0"/>
           </a:p>
@@ -7214,7 +7234,27 @@
                 <a:ea typeface="微軟正黑體" pitchFamily="34" charset="-122"/>
                 <a:cs typeface="微軟正黑體" pitchFamily="34" charset="-120"/>
               </a:rPr>
-              <a:t>什麼都不要改\n記前三次</a:t>
+              <a:t>什麼都不要改</a:t>
+            </a:r>
+            <a:endParaRPr lang="en-US" sz="1050" dirty="0"/>
+          </a:p>
+          <a:p>
+            <a:pPr algn="ctr" indent="0" marL="0">
+              <a:lnSpc>
+                <a:spcPct val="126000"/>
+              </a:lnSpc>
+              <a:buNone/>
+            </a:pPr>
+            <a:r>
+              <a:rPr lang="en-US" sz="950" dirty="0">
+                <a:solidFill>
+                  <a:srgbClr val="5F7183"/>
+                </a:solidFill>
+                <a:latin typeface="微軟正黑體" pitchFamily="34" charset="0"/>
+                <a:ea typeface="微軟正黑體" pitchFamily="34" charset="-122"/>
+                <a:cs typeface="微軟正黑體" pitchFamily="34" charset="-120"/>
+              </a:rPr>
+              <a:t>記前三次</a:t>
             </a:r>
             <a:endParaRPr lang="en-US" sz="1050" dirty="0"/>
           </a:p>
@@ -7450,7 +7490,27 @@
                 <a:ea typeface="Arial" pitchFamily="34" charset="-122"/>
                 <a:cs typeface="Arial" pitchFamily="34" charset="-120"/>
               </a:rPr>
-              <a:t>Trụ được lâu nhất\n3 lần lấy lần tốt nhất</a:t>
+              <a:t>Trụ được lâu nhất</a:t>
+            </a:r>
+            <a:endParaRPr lang="en-US" sz="1050" dirty="0"/>
+          </a:p>
+          <a:p>
+            <a:pPr algn="ctr" indent="0" marL="0">
+              <a:lnSpc>
+                <a:spcPct val="126000"/>
+              </a:lnSpc>
+              <a:buNone/>
+            </a:pPr>
+            <a:r>
+              <a:rPr lang="en-US" sz="1050" dirty="0">
+                <a:solidFill>
+                  <a:srgbClr val="5F7183"/>
+                </a:solidFill>
+                <a:latin typeface="Arial" pitchFamily="34" charset="0"/>
+                <a:ea typeface="Arial" pitchFamily="34" charset="-122"/>
+                <a:cs typeface="Arial" pitchFamily="34" charset="-120"/>
+              </a:rPr>
+              <a:t>3 lần lấy lần tốt nhất</a:t>
             </a:r>
             <a:endParaRPr lang="en-US" sz="1050" dirty="0"/>
           </a:p>
@@ -7470,7 +7530,27 @@
                 <a:ea typeface="微軟正黑體" pitchFamily="34" charset="-122"/>
                 <a:cs typeface="微軟正黑體" pitchFamily="34" charset="-120"/>
               </a:rPr>
-              <a:t>撐最久\n跑 3 次取最好</a:t>
+              <a:t>撐最久</a:t>
+            </a:r>
+            <a:endParaRPr lang="en-US" sz="1050" dirty="0"/>
+          </a:p>
+          <a:p>
+            <a:pPr algn="ctr" indent="0" marL="0">
+              <a:lnSpc>
+                <a:spcPct val="126000"/>
+              </a:lnSpc>
+              <a:buNone/>
+            </a:pPr>
+            <a:r>
+              <a:rPr lang="en-US" sz="950" dirty="0">
+                <a:solidFill>
+                  <a:srgbClr val="5F7183"/>
+                </a:solidFill>
+                <a:latin typeface="微軟正黑體" pitchFamily="34" charset="0"/>
+                <a:ea typeface="微軟正黑體" pitchFamily="34" charset="-122"/>
+                <a:cs typeface="微軟正黑體" pitchFamily="34" charset="-120"/>
+              </a:rPr>
+              <a:t>跑 3 次取最好</a:t>
             </a:r>
             <a:endParaRPr lang="en-US" sz="1050" dirty="0"/>
           </a:p>
@@ -7706,7 +7786,27 @@
                 <a:ea typeface="Arial" pitchFamily="34" charset="-122"/>
                 <a:cs typeface="Arial" pitchFamily="34" charset="-120"/>
               </a:rPr>
-              <a:t>Còn trụ được không?\nĐổi gì, vì sao</a:t>
+              <a:t>Trụ được bao lâu?</a:t>
+            </a:r>
+            <a:endParaRPr lang="en-US" sz="1050" dirty="0"/>
+          </a:p>
+          <a:p>
+            <a:pPr algn="ctr" indent="0" marL="0">
+              <a:lnSpc>
+                <a:spcPct val="126000"/>
+              </a:lnSpc>
+              <a:buNone/>
+            </a:pPr>
+            <a:r>
+              <a:rPr lang="en-US" sz="1050" dirty="0">
+                <a:solidFill>
+                  <a:srgbClr val="5F7183"/>
+                </a:solidFill>
+                <a:latin typeface="Arial" pitchFamily="34" charset="0"/>
+                <a:ea typeface="Arial" pitchFamily="34" charset="-122"/>
+                <a:cs typeface="Arial" pitchFamily="34" charset="-120"/>
+              </a:rPr>
+              <a:t>Đổi gì, vì sao</a:t>
             </a:r>
             <a:endParaRPr lang="en-US" sz="1050" dirty="0"/>
           </a:p>
@@ -7726,7 +7826,27 @@
                 <a:ea typeface="微軟正黑體" pitchFamily="34" charset="-122"/>
                 <a:cs typeface="微軟正黑體" pitchFamily="34" charset="-120"/>
               </a:rPr>
-              <a:t>還撐得住嗎？\n改什麼、為什麼</a:t>
+              <a:t>這次撐多久？</a:t>
+            </a:r>
+            <a:endParaRPr lang="en-US" sz="1050" dirty="0"/>
+          </a:p>
+          <a:p>
+            <a:pPr algn="ctr" indent="0" marL="0">
+              <a:lnSpc>
+                <a:spcPct val="126000"/>
+              </a:lnSpc>
+              <a:buNone/>
+            </a:pPr>
+            <a:r>
+              <a:rPr lang="en-US" sz="950" dirty="0">
+                <a:solidFill>
+                  <a:srgbClr val="5F7183"/>
+                </a:solidFill>
+                <a:latin typeface="微軟正黑體" pitchFamily="34" charset="0"/>
+                <a:ea typeface="微軟正黑體" pitchFamily="34" charset="-122"/>
+                <a:cs typeface="微軟正黑體" pitchFamily="34" charset="-120"/>
+              </a:rPr>
+              <a:t>改什麼、為什麼</a:t>
             </a:r>
             <a:endParaRPr lang="en-US" sz="1050" dirty="0"/>
           </a:p>
@@ -7962,7 +8082,27 @@
                 <a:ea typeface="Arial" pitchFamily="34" charset="-122"/>
                 <a:cs typeface="Arial" pitchFamily="34" charset="-120"/>
               </a:rPr>
-              <a:t>Tia = cảm biến nào?\nThiếu gì?</a:t>
+              <a:t>Tia = cảm biến nào?</a:t>
+            </a:r>
+            <a:endParaRPr lang="en-US" sz="1050" dirty="0"/>
+          </a:p>
+          <a:p>
+            <a:pPr algn="ctr" indent="0" marL="0">
+              <a:lnSpc>
+                <a:spcPct val="126000"/>
+              </a:lnSpc>
+              <a:buNone/>
+            </a:pPr>
+            <a:r>
+              <a:rPr lang="en-US" sz="1050" dirty="0">
+                <a:solidFill>
+                  <a:srgbClr val="5F7183"/>
+                </a:solidFill>
+                <a:latin typeface="Arial" pitchFamily="34" charset="0"/>
+                <a:ea typeface="Arial" pitchFamily="34" charset="-122"/>
+                <a:cs typeface="Arial" pitchFamily="34" charset="-120"/>
+              </a:rPr>
+              <a:t>Thiếu gì?</a:t>
             </a:r>
             <a:endParaRPr lang="en-US" sz="1050" dirty="0"/>
           </a:p>
@@ -7982,7 +8122,27 @@
                 <a:ea typeface="微軟正黑體" pitchFamily="34" charset="-122"/>
                 <a:cs typeface="微軟正黑體" pitchFamily="34" charset="-120"/>
               </a:rPr>
-              <a:t>射線＝哪種感測器？\n少了什麼？</a:t>
+              <a:t>射線＝哪種感測器？</a:t>
+            </a:r>
+            <a:endParaRPr lang="en-US" sz="1050" dirty="0"/>
+          </a:p>
+          <a:p>
+            <a:pPr algn="ctr" indent="0" marL="0">
+              <a:lnSpc>
+                <a:spcPct val="126000"/>
+              </a:lnSpc>
+              <a:buNone/>
+            </a:pPr>
+            <a:r>
+              <a:rPr lang="en-US" sz="950" dirty="0">
+                <a:solidFill>
+                  <a:srgbClr val="5F7183"/>
+                </a:solidFill>
+                <a:latin typeface="微軟正黑體" pitchFamily="34" charset="0"/>
+                <a:ea typeface="微軟正黑體" pitchFamily="34" charset="-122"/>
+                <a:cs typeface="微軟正黑體" pitchFamily="34" charset="-120"/>
+              </a:rPr>
+              <a:t>少了什麼？</a:t>
             </a:r>
             <a:endParaRPr lang="en-US" sz="1050" dirty="0"/>
           </a:p>
@@ -9075,7 +9235,7 @@
                 <a:ea typeface="微軟正黑體" pitchFamily="34" charset="-122"/>
                 <a:cs typeface="微軟正黑體" pitchFamily="34" charset="-120"/>
               </a:rPr>
-              <a:t>調三個參數，讓車子在撞車前撐得**最久**。跑三次，取最好的那一次。</a:t>
+              <a:t>調三個參數，讓車子在撞車前撐得最久。跑三次，取最好的那一次。</a:t>
             </a:r>
             <a:endParaRPr lang="en-US" sz="2300" dirty="0"/>
           </a:p>
@@ -11246,15 +11406,196 @@
           <p:nvPr/>
         </p:nvSpPr>
         <p:spPr>
-          <a:xfrm rot="-2280000">
-            <a:off x="1965498" y="1882114"/>
-            <a:ext cx="481889" cy="51024"/>
-          </a:xfrm>
-          <a:prstGeom prst="rect">
+          <a:xfrm flipH="1" flipV="1">
+            <a:off x="657831" y="2306044"/>
+            <a:ext cx="459932" cy="265542"/>
+          </a:xfrm>
+          <a:prstGeom prst="line">
+            <a:avLst/>
+          </a:prstGeom>
+          <a:noFill/>
+          <a:ln w="15240">
+            <a:solidFill>
+              <a:srgbClr val="2E6E4E"/>
+            </a:solidFill>
+            <a:prstDash val="solid"/>
+          </a:ln>
+        </p:spPr>
+      </p:sp>
+      <p:sp>
+        <p:nvSpPr>
+          <p:cNvPr id="5" name="Shape 3"/>
+          <p:cNvSpPr/>
+          <p:nvPr/>
+        </p:nvSpPr>
+        <p:spPr>
+          <a:xfrm flipH="1" flipV="1">
+            <a:off x="776389" y="2164752"/>
+            <a:ext cx="341374" cy="406834"/>
+          </a:xfrm>
+          <a:prstGeom prst="line">
+            <a:avLst/>
+          </a:prstGeom>
+          <a:noFill/>
+          <a:ln w="15240">
+            <a:solidFill>
+              <a:srgbClr val="2E6E4E"/>
+            </a:solidFill>
+            <a:prstDash val="solid"/>
+          </a:ln>
+        </p:spPr>
+      </p:sp>
+      <p:sp>
+        <p:nvSpPr>
+          <p:cNvPr id="6" name="Shape 4"/>
+          <p:cNvSpPr/>
+          <p:nvPr/>
+        </p:nvSpPr>
+        <p:spPr>
+          <a:xfrm flipH="1" flipV="1">
+            <a:off x="936121" y="2072530"/>
+            <a:ext cx="181641" cy="499055"/>
+          </a:xfrm>
+          <a:prstGeom prst="line">
+            <a:avLst/>
+          </a:prstGeom>
+          <a:noFill/>
+          <a:ln w="15240">
+            <a:solidFill>
+              <a:srgbClr val="2E6E4E"/>
+            </a:solidFill>
+            <a:prstDash val="solid"/>
+          </a:ln>
+        </p:spPr>
+      </p:sp>
+      <p:sp>
+        <p:nvSpPr>
+          <p:cNvPr id="7" name="Shape 5"/>
+          <p:cNvSpPr/>
+          <p:nvPr/>
+        </p:nvSpPr>
+        <p:spPr>
+          <a:xfrm flipV="1">
+            <a:off x="1117763" y="2040502"/>
+            <a:ext cx="0" cy="531084"/>
+          </a:xfrm>
+          <a:prstGeom prst="line">
+            <a:avLst/>
+          </a:prstGeom>
+          <a:noFill/>
+          <a:ln w="15240">
+            <a:solidFill>
+              <a:srgbClr val="2E6E4E"/>
+            </a:solidFill>
+            <a:prstDash val="solid"/>
+          </a:ln>
+        </p:spPr>
+      </p:sp>
+      <p:sp>
+        <p:nvSpPr>
+          <p:cNvPr id="8" name="Shape 6"/>
+          <p:cNvSpPr/>
+          <p:nvPr/>
+        </p:nvSpPr>
+        <p:spPr>
+          <a:xfrm flipV="1">
+            <a:off x="1117763" y="2072530"/>
+            <a:ext cx="181641" cy="499055"/>
+          </a:xfrm>
+          <a:prstGeom prst="line">
+            <a:avLst/>
+          </a:prstGeom>
+          <a:noFill/>
+          <a:ln w="15240">
+            <a:solidFill>
+              <a:srgbClr val="2E6E4E"/>
+            </a:solidFill>
+            <a:prstDash val="solid"/>
+          </a:ln>
+        </p:spPr>
+      </p:sp>
+      <p:sp>
+        <p:nvSpPr>
+          <p:cNvPr id="9" name="Shape 7"/>
+          <p:cNvSpPr/>
+          <p:nvPr/>
+        </p:nvSpPr>
+        <p:spPr>
+          <a:xfrm flipV="1">
+            <a:off x="1117763" y="2164752"/>
+            <a:ext cx="341374" cy="406834"/>
+          </a:xfrm>
+          <a:prstGeom prst="line">
+            <a:avLst/>
+          </a:prstGeom>
+          <a:noFill/>
+          <a:ln w="15240">
+            <a:solidFill>
+              <a:srgbClr val="2E6E4E"/>
+            </a:solidFill>
+            <a:prstDash val="solid"/>
+          </a:ln>
+        </p:spPr>
+      </p:sp>
+      <p:sp>
+        <p:nvSpPr>
+          <p:cNvPr id="10" name="Shape 8"/>
+          <p:cNvSpPr/>
+          <p:nvPr/>
+        </p:nvSpPr>
+        <p:spPr>
+          <a:xfrm flipV="1">
+            <a:off x="1117763" y="2306044"/>
+            <a:ext cx="459932" cy="265542"/>
+          </a:xfrm>
+          <a:prstGeom prst="line">
+            <a:avLst/>
+          </a:prstGeom>
+          <a:noFill/>
+          <a:ln w="15240">
+            <a:solidFill>
+              <a:srgbClr val="2E6E4E"/>
+            </a:solidFill>
+            <a:prstDash val="solid"/>
+          </a:ln>
+        </p:spPr>
+      </p:sp>
+      <p:sp>
+        <p:nvSpPr>
+          <p:cNvPr id="11" name="Shape 9"/>
+          <p:cNvSpPr/>
+          <p:nvPr/>
+        </p:nvSpPr>
+        <p:spPr>
+          <a:xfrm>
+            <a:off x="1069080" y="2522903"/>
+            <a:ext cx="97365" cy="97365"/>
+          </a:xfrm>
+          <a:prstGeom prst="ellipse">
             <a:avLst/>
           </a:prstGeom>
           <a:solidFill>
-            <a:srgbClr val="7ED957">
+            <a:srgbClr val="2E6E4E"/>
+          </a:solidFill>
+          <a:ln/>
+        </p:spPr>
+      </p:sp>
+      <p:sp>
+        <p:nvSpPr>
+          <p:cNvPr id="12" name="Shape 10"/>
+          <p:cNvSpPr/>
+          <p:nvPr/>
+        </p:nvSpPr>
+        <p:spPr>
+          <a:xfrm>
+            <a:off x="2002902" y="2005096"/>
+            <a:ext cx="708111" cy="708111"/>
+          </a:xfrm>
+          <a:prstGeom prst="donut">
+            <a:avLst/>
+          </a:prstGeom>
+          <a:solidFill>
+            <a:srgbClr val="2E6E4E">
               <a:alpha val="45000"/>
             </a:srgbClr>
           </a:solidFill>
@@ -11263,199 +11604,323 @@
       </p:sp>
       <p:sp>
         <p:nvSpPr>
-          <p:cNvPr id="5" name="Shape 3"/>
-          <p:cNvSpPr/>
-          <p:nvPr/>
-        </p:nvSpPr>
-        <p:spPr>
-          <a:xfrm rot="-1140000">
-            <a:off x="2059259" y="2054799"/>
-            <a:ext cx="481889" cy="51024"/>
-          </a:xfrm>
-          <a:prstGeom prst="rect">
-            <a:avLst/>
-          </a:prstGeom>
-          <a:solidFill>
-            <a:srgbClr val="7ED957">
-              <a:alpha val="45000"/>
-            </a:srgbClr>
-          </a:solidFill>
-          <a:ln/>
-        </p:spPr>
-      </p:sp>
-      <p:sp>
-        <p:nvSpPr>
-          <p:cNvPr id="6" name="Shape 4"/>
-          <p:cNvSpPr/>
-          <p:nvPr/>
-        </p:nvSpPr>
-        <p:spPr>
-          <a:xfrm>
-            <a:off x="2091690" y="2248601"/>
-            <a:ext cx="481889" cy="51024"/>
-          </a:xfrm>
-          <a:prstGeom prst="rect">
-            <a:avLst/>
-          </a:prstGeom>
-          <a:solidFill>
-            <a:srgbClr val="7ED957">
-              <a:alpha val="45000"/>
-            </a:srgbClr>
-          </a:solidFill>
-          <a:ln/>
-        </p:spPr>
-      </p:sp>
-      <p:sp>
-        <p:nvSpPr>
-          <p:cNvPr id="7" name="Shape 5"/>
-          <p:cNvSpPr/>
-          <p:nvPr/>
-        </p:nvSpPr>
-        <p:spPr>
-          <a:xfrm rot="1140000">
-            <a:off x="2059259" y="2442403"/>
-            <a:ext cx="481889" cy="51024"/>
-          </a:xfrm>
-          <a:prstGeom prst="rect">
-            <a:avLst/>
-          </a:prstGeom>
-          <a:solidFill>
-            <a:srgbClr val="7ED957">
-              <a:alpha val="45000"/>
-            </a:srgbClr>
-          </a:solidFill>
-          <a:ln/>
-        </p:spPr>
-      </p:sp>
-      <p:sp>
-        <p:nvSpPr>
-          <p:cNvPr id="8" name="Shape 6"/>
-          <p:cNvSpPr/>
-          <p:nvPr/>
-        </p:nvSpPr>
-        <p:spPr>
-          <a:xfrm rot="2280000">
-            <a:off x="1965498" y="2615089"/>
-            <a:ext cx="481889" cy="51024"/>
-          </a:xfrm>
-          <a:prstGeom prst="rect">
-            <a:avLst/>
-          </a:prstGeom>
-          <a:solidFill>
-            <a:srgbClr val="7ED957">
-              <a:alpha val="45000"/>
-            </a:srgbClr>
-          </a:solidFill>
-          <a:ln/>
-        </p:spPr>
-      </p:sp>
-      <p:sp>
-        <p:nvSpPr>
-          <p:cNvPr id="9" name="Shape 7"/>
-          <p:cNvSpPr/>
-          <p:nvPr/>
-        </p:nvSpPr>
-        <p:spPr>
-          <a:xfrm>
-            <a:off x="1340510" y="1990649"/>
-            <a:ext cx="510235" cy="184252"/>
-          </a:xfrm>
-          <a:prstGeom prst="ellipse">
-            <a:avLst/>
-          </a:prstGeom>
-          <a:solidFill>
-            <a:srgbClr val="7ED957"/>
-          </a:solidFill>
-          <a:ln/>
-        </p:spPr>
-      </p:sp>
-      <p:sp>
-        <p:nvSpPr>
-          <p:cNvPr id="10" name="Shape 8"/>
-          <p:cNvSpPr/>
-          <p:nvPr/>
-        </p:nvSpPr>
-        <p:spPr>
-          <a:xfrm>
-            <a:off x="1340510" y="2075688"/>
-            <a:ext cx="510235" cy="481889"/>
-          </a:xfrm>
-          <a:prstGeom prst="rect">
-            <a:avLst/>
-          </a:prstGeom>
-          <a:solidFill>
-            <a:srgbClr val="7ED957"/>
-          </a:solidFill>
-          <a:ln/>
-        </p:spPr>
-      </p:sp>
-      <p:sp>
-        <p:nvSpPr>
-          <p:cNvPr id="11" name="Shape 9"/>
-          <p:cNvSpPr/>
-          <p:nvPr/>
-        </p:nvSpPr>
-        <p:spPr>
-          <a:xfrm>
-            <a:off x="1340510" y="2458364"/>
-            <a:ext cx="510235" cy="184252"/>
-          </a:xfrm>
-          <a:prstGeom prst="ellipse">
-            <a:avLst/>
-          </a:prstGeom>
-          <a:solidFill>
-            <a:srgbClr val="7ED957"/>
-          </a:solidFill>
-          <a:ln/>
-        </p:spPr>
-      </p:sp>
-      <p:sp>
-        <p:nvSpPr>
-          <p:cNvPr id="12" name="Shape 10"/>
-          <p:cNvSpPr/>
-          <p:nvPr/>
-        </p:nvSpPr>
-        <p:spPr>
-          <a:xfrm>
-            <a:off x="1340510" y="2217420"/>
-            <a:ext cx="510235" cy="99212"/>
-          </a:xfrm>
-          <a:prstGeom prst="rect">
-            <a:avLst/>
-          </a:prstGeom>
-          <a:solidFill>
-            <a:srgbClr val="FFFFFF">
-              <a:alpha val="65000"/>
-            </a:srgbClr>
-          </a:solidFill>
-          <a:ln/>
-        </p:spPr>
-      </p:sp>
-      <p:sp>
-        <p:nvSpPr>
           <p:cNvPr id="13" name="Shape 11"/>
           <p:cNvSpPr/>
           <p:nvPr/>
         </p:nvSpPr>
         <p:spPr>
           <a:xfrm>
-            <a:off x="1510589" y="2642616"/>
-            <a:ext cx="170078" cy="198425"/>
-          </a:xfrm>
-          <a:prstGeom prst="rect">
+            <a:off x="2711013" y="2359152"/>
+            <a:ext cx="177028" cy="0"/>
+          </a:xfrm>
+          <a:prstGeom prst="line">
+            <a:avLst/>
+          </a:prstGeom>
+          <a:noFill/>
+          <a:ln w="13970">
+            <a:solidFill>
+              <a:srgbClr val="2E6E4E"/>
+            </a:solidFill>
+            <a:prstDash val="solid"/>
+          </a:ln>
+        </p:spPr>
+      </p:sp>
+      <p:sp>
+        <p:nvSpPr>
+          <p:cNvPr id="14" name="Shape 12"/>
+          <p:cNvSpPr/>
+          <p:nvPr/>
+        </p:nvSpPr>
+        <p:spPr>
+          <a:xfrm>
+            <a:off x="2663579" y="2536180"/>
+            <a:ext cx="153311" cy="88514"/>
+          </a:xfrm>
+          <a:prstGeom prst="line">
+            <a:avLst/>
+          </a:prstGeom>
+          <a:noFill/>
+          <a:ln w="13970">
+            <a:solidFill>
+              <a:srgbClr val="2E6E4E"/>
+            </a:solidFill>
+            <a:prstDash val="solid"/>
+          </a:ln>
+        </p:spPr>
+      </p:sp>
+      <p:sp>
+        <p:nvSpPr>
+          <p:cNvPr id="15" name="Shape 13"/>
+          <p:cNvSpPr/>
+          <p:nvPr/>
+        </p:nvSpPr>
+        <p:spPr>
+          <a:xfrm>
+            <a:off x="2533985" y="2665773"/>
+            <a:ext cx="88514" cy="153311"/>
+          </a:xfrm>
+          <a:prstGeom prst="line">
+            <a:avLst/>
+          </a:prstGeom>
+          <a:noFill/>
+          <a:ln w="13970">
+            <a:solidFill>
+              <a:srgbClr val="2E6E4E"/>
+            </a:solidFill>
+            <a:prstDash val="solid"/>
+          </a:ln>
+        </p:spPr>
+      </p:sp>
+      <p:sp>
+        <p:nvSpPr>
+          <p:cNvPr id="16" name="Shape 14"/>
+          <p:cNvSpPr/>
+          <p:nvPr/>
+        </p:nvSpPr>
+        <p:spPr>
+          <a:xfrm>
+            <a:off x="2356957" y="2713208"/>
+            <a:ext cx="0" cy="177028"/>
+          </a:xfrm>
+          <a:prstGeom prst="line">
+            <a:avLst/>
+          </a:prstGeom>
+          <a:noFill/>
+          <a:ln w="13970">
+            <a:solidFill>
+              <a:srgbClr val="2E6E4E"/>
+            </a:solidFill>
+            <a:prstDash val="solid"/>
+          </a:ln>
+        </p:spPr>
+      </p:sp>
+      <p:sp>
+        <p:nvSpPr>
+          <p:cNvPr id="17" name="Shape 15"/>
+          <p:cNvSpPr/>
+          <p:nvPr/>
+        </p:nvSpPr>
+        <p:spPr>
+          <a:xfrm flipH="1">
+            <a:off x="2091416" y="2665773"/>
+            <a:ext cx="88514" cy="153311"/>
+          </a:xfrm>
+          <a:prstGeom prst="line">
+            <a:avLst/>
+          </a:prstGeom>
+          <a:noFill/>
+          <a:ln w="13970">
+            <a:solidFill>
+              <a:srgbClr val="2E6E4E"/>
+            </a:solidFill>
+            <a:prstDash val="solid"/>
+          </a:ln>
+        </p:spPr>
+      </p:sp>
+      <p:sp>
+        <p:nvSpPr>
+          <p:cNvPr id="18" name="Shape 16"/>
+          <p:cNvSpPr/>
+          <p:nvPr/>
+        </p:nvSpPr>
+        <p:spPr>
+          <a:xfrm flipH="1">
+            <a:off x="1897026" y="2536180"/>
+            <a:ext cx="153311" cy="88514"/>
+          </a:xfrm>
+          <a:prstGeom prst="line">
+            <a:avLst/>
+          </a:prstGeom>
+          <a:noFill/>
+          <a:ln w="13970">
+            <a:solidFill>
+              <a:srgbClr val="2E6E4E"/>
+            </a:solidFill>
+            <a:prstDash val="solid"/>
+          </a:ln>
+        </p:spPr>
+      </p:sp>
+      <p:sp>
+        <p:nvSpPr>
+          <p:cNvPr id="19" name="Shape 17"/>
+          <p:cNvSpPr/>
+          <p:nvPr/>
+        </p:nvSpPr>
+        <p:spPr>
+          <a:xfrm flipH="1">
+            <a:off x="1825874" y="2359152"/>
+            <a:ext cx="177028" cy="0"/>
+          </a:xfrm>
+          <a:prstGeom prst="line">
+            <a:avLst/>
+          </a:prstGeom>
+          <a:noFill/>
+          <a:ln w="13970">
+            <a:solidFill>
+              <a:srgbClr val="2E6E4E"/>
+            </a:solidFill>
+            <a:prstDash val="solid"/>
+          </a:ln>
+        </p:spPr>
+      </p:sp>
+      <p:sp>
+        <p:nvSpPr>
+          <p:cNvPr id="20" name="Shape 18"/>
+          <p:cNvSpPr/>
+          <p:nvPr/>
+        </p:nvSpPr>
+        <p:spPr>
+          <a:xfrm flipH="1" flipV="1">
+            <a:off x="1897026" y="2093610"/>
+            <a:ext cx="153311" cy="88514"/>
+          </a:xfrm>
+          <a:prstGeom prst="line">
+            <a:avLst/>
+          </a:prstGeom>
+          <a:noFill/>
+          <a:ln w="13970">
+            <a:solidFill>
+              <a:srgbClr val="2E6E4E"/>
+            </a:solidFill>
+            <a:prstDash val="solid"/>
+          </a:ln>
+        </p:spPr>
+      </p:sp>
+      <p:sp>
+        <p:nvSpPr>
+          <p:cNvPr id="21" name="Shape 19"/>
+          <p:cNvSpPr/>
+          <p:nvPr/>
+        </p:nvSpPr>
+        <p:spPr>
+          <a:xfrm flipH="1" flipV="1">
+            <a:off x="2091416" y="1899220"/>
+            <a:ext cx="88514" cy="153311"/>
+          </a:xfrm>
+          <a:prstGeom prst="line">
+            <a:avLst/>
+          </a:prstGeom>
+          <a:noFill/>
+          <a:ln w="13970">
+            <a:solidFill>
+              <a:srgbClr val="2E6E4E"/>
+            </a:solidFill>
+            <a:prstDash val="solid"/>
+          </a:ln>
+        </p:spPr>
+      </p:sp>
+      <p:sp>
+        <p:nvSpPr>
+          <p:cNvPr id="22" name="Shape 20"/>
+          <p:cNvSpPr/>
+          <p:nvPr/>
+        </p:nvSpPr>
+        <p:spPr>
+          <a:xfrm flipH="1" flipV="1">
+            <a:off x="2356957" y="1828068"/>
+            <a:ext cx="0" cy="177028"/>
+          </a:xfrm>
+          <a:prstGeom prst="line">
+            <a:avLst/>
+          </a:prstGeom>
+          <a:noFill/>
+          <a:ln w="13970">
+            <a:solidFill>
+              <a:srgbClr val="2E6E4E"/>
+            </a:solidFill>
+            <a:prstDash val="solid"/>
+          </a:ln>
+        </p:spPr>
+      </p:sp>
+      <p:sp>
+        <p:nvSpPr>
+          <p:cNvPr id="23" name="Shape 21"/>
+          <p:cNvSpPr/>
+          <p:nvPr/>
+        </p:nvSpPr>
+        <p:spPr>
+          <a:xfrm flipV="1">
+            <a:off x="2533985" y="1899220"/>
+            <a:ext cx="88514" cy="153311"/>
+          </a:xfrm>
+          <a:prstGeom prst="line">
+            <a:avLst/>
+          </a:prstGeom>
+          <a:noFill/>
+          <a:ln w="13970">
+            <a:solidFill>
+              <a:srgbClr val="2E6E4E"/>
+            </a:solidFill>
+            <a:prstDash val="solid"/>
+          </a:ln>
+        </p:spPr>
+      </p:sp>
+      <p:sp>
+        <p:nvSpPr>
+          <p:cNvPr id="24" name="Shape 22"/>
+          <p:cNvSpPr/>
+          <p:nvPr/>
+        </p:nvSpPr>
+        <p:spPr>
+          <a:xfrm flipV="1">
+            <a:off x="2663579" y="2093610"/>
+            <a:ext cx="153311" cy="88514"/>
+          </a:xfrm>
+          <a:prstGeom prst="line">
+            <a:avLst/>
+          </a:prstGeom>
+          <a:noFill/>
+          <a:ln w="13970">
+            <a:solidFill>
+              <a:srgbClr val="2E6E4E"/>
+            </a:solidFill>
+            <a:prstDash val="solid"/>
+          </a:ln>
+        </p:spPr>
+      </p:sp>
+      <p:sp>
+        <p:nvSpPr>
+          <p:cNvPr id="25" name="Shape 23"/>
+          <p:cNvSpPr/>
+          <p:nvPr/>
+        </p:nvSpPr>
+        <p:spPr>
+          <a:xfrm>
+            <a:off x="2308275" y="2310469"/>
+            <a:ext cx="97365" cy="97365"/>
+          </a:xfrm>
+          <a:prstGeom prst="ellipse">
             <a:avLst/>
           </a:prstGeom>
           <a:solidFill>
-            <a:srgbClr val="7ED957">
-              <a:alpha val="60000"/>
-            </a:srgbClr>
+            <a:srgbClr val="2E6E4E"/>
           </a:solidFill>
           <a:ln/>
         </p:spPr>
       </p:sp>
       <p:sp>
         <p:nvSpPr>
-          <p:cNvPr id="14" name="Text 12"/>
+          <p:cNvPr id="26" name="Shape 24"/>
+          <p:cNvSpPr/>
+          <p:nvPr/>
+        </p:nvSpPr>
+        <p:spPr>
+          <a:xfrm>
+            <a:off x="1648846" y="2292492"/>
+            <a:ext cx="177028" cy="133320"/>
+          </a:xfrm>
+          <a:prstGeom prst="rightArrow">
+            <a:avLst/>
+          </a:prstGeom>
+          <a:solidFill>
+            <a:srgbClr val="9AA6B0"/>
+          </a:solidFill>
+          <a:ln/>
+        </p:spPr>
+      </p:sp>
+      <p:sp>
+        <p:nvSpPr>
+          <p:cNvPr id="27" name="Text 25"/>
           <p:cNvSpPr txBox="1"/>
           <p:nvPr/>
         </p:nvSpPr>
@@ -11517,7 +11982,7 @@
       </p:sp>
       <p:sp>
         <p:nvSpPr>
-          <p:cNvPr id="15" name="Text 13"/>
+          <p:cNvPr id="28" name="Text 26"/>
           <p:cNvSpPr txBox="1"/>
           <p:nvPr/>
         </p:nvSpPr>
@@ -11579,7 +12044,7 @@
       </p:sp>
       <p:sp>
         <p:nvSpPr>
-          <p:cNvPr id="16" name="Shape 14"/>
+          <p:cNvPr id="29" name="Shape 27"/>
           <p:cNvSpPr/>
           <p:nvPr/>
         </p:nvSpPr>
@@ -11606,7 +12071,7 @@
       </p:sp>
       <p:sp>
         <p:nvSpPr>
-          <p:cNvPr id="17" name="Text 15"/>
+          <p:cNvPr id="30" name="Text 28"/>
           <p:cNvSpPr txBox="1"/>
           <p:nvPr/>
         </p:nvSpPr>
@@ -11668,7 +12133,7 @@
       </p:sp>
       <p:pic>
         <p:nvPicPr>
-          <p:cNvPr id="19" name="Image 0" descr="/Users/tsengchenghsun/Class/carClass/Claude outputs/第四週(10-1)/src/logo.png">    </p:cNvPr>
+          <p:cNvPr id="32" name="Image 0" descr="/Users/tsengchenghsun/Class/carClass/Claude outputs/第四週(10-1)/src/logo.png">    </p:cNvPr>
           <p:cNvPicPr>
             <a:picLocks noChangeAspect="1"/>
           </p:cNvPicPr>
@@ -11692,7 +12157,7 @@
       </p:pic>
       <p:sp>
         <p:nvSpPr>
-          <p:cNvPr id="20" name="Text 16"/>
+          <p:cNvPr id="33" name="Text 29"/>
           <p:cNvSpPr txBox="1"/>
           <p:nvPr/>
         </p:nvSpPr>
@@ -11731,7 +12196,7 @@
       </p:sp>
       <p:sp>
         <p:nvSpPr>
-          <p:cNvPr id="21" name="Text 17"/>
+          <p:cNvPr id="34" name="Text 30"/>
           <p:cNvSpPr txBox="1"/>
           <p:nvPr/>
         </p:nvSpPr>

--- a/第四週(10-01)/第四週_第3節_簡報.pptx
+++ b/第四週(10-01)/第四週_第3節_簡報.pptx
@@ -603,7 +603,7 @@
                 <a:ea typeface="Arial Unicode MS"/>
                 <a:cs typeface="Arial Unicode MS"/>
               </a:rPr>
-              <a:t>（把任務單發下去。前三題有數字，第四題是文字。）</a:t>
+              <a:t>我把任務單發下去。前三題有數字，第四題是文字。</a:t>
             </a:r>
           </a:p>
         </p:txBody>
@@ -933,7 +933,7 @@
                 <a:ea typeface="Arial Unicode MS"/>
                 <a:cs typeface="Arial Unicode MS"/>
               </a:rPr>
-              <a:t>（各位今天掃參數的時候，應該已經自己體會到了：張角一百二十度大約撐三十四秒，放大到一百五十度反而掉到二十七秒。射線被攤稀了，機車就從縫裡鑽進來。）
+              <a:t>各位今天掃參數的時候應該已經體會到了：張角一百二十度大約撐三十四秒，放大到一百五十度反而掉到二十七秒。射線被攤稀了，機車就從縫裡鑽進來。
 </a:t>
             </a:r>
           </a:p>
@@ -988,7 +988,7 @@
                 <a:ea typeface="Arial Unicode MS"/>
                 <a:cs typeface="Arial Unicode MS"/>
               </a:rPr>
-              <a:t>（這四句話，是今天三節課的總複習。如果各位都答對了，今天的課就沒有白上。）</a:t>
+              <a:t>這四句話就是今天三節課的總複習。如果各位都答對了，今天的課就沒有白上。</a:t>
             </a:r>
           </a:p>
         </p:txBody>
@@ -1175,7 +1175,7 @@
                 <a:ea typeface="Arial Unicode MS"/>
                 <a:cs typeface="Arial Unicode MS"/>
               </a:rPr>
-              <a:t>三件事：
+              <a:t>有三件事。
 </a:t>
             </a:r>
           </a:p>
@@ -1307,7 +1307,7 @@
                 <a:ea typeface="Arial Unicode MS"/>
                 <a:cs typeface="Arial Unicode MS"/>
               </a:rPr>
-              <a:t>（下週會把學生拍的照片投影出來一起看。這比任何教科書的例子都有效，因為那是他們自己走過的路。）
+              <a:t>下週我會把各位拍的照片投影出來一起看。那比任何教科書的例子都有效，因為那是你們自己走過的路。
 </a:t>
             </a:r>
           </a:p>
@@ -1714,7 +1714,7 @@
                 <a:ea typeface="Arial Unicode MS"/>
                 <a:cs typeface="Arial Unicode MS"/>
               </a:rPr>
-              <a:t>（分配時間：第一題 5 分鐘、第二題 15 分鐘、第三題 5 分鐘、第四題 5 分鐘，最後 10 分鐘上台。）
+              <a:t>時間是這樣分的：第一題五分鐘、第二題十五分鐘、第三題五分鐘、第四題五分鐘，最後十分鐘上台。
 </a:t>
             </a:r>
           </a:p>
@@ -1879,7 +1879,7 @@
                 <a:ea typeface="Arial Unicode MS"/>
                 <a:cs typeface="Arial Unicode MS"/>
               </a:rPr>
-              <a:t>（這一題看起來很簡單，但它有一個埋伏。）
+              <a:t>這一題看起來很簡單，可是它有一個埋伏。
 </a:t>
             </a:r>
           </a:p>
@@ -1923,7 +1923,7 @@
                 <a:ea typeface="Arial Unicode MS"/>
                 <a:cs typeface="Arial Unicode MS"/>
               </a:rPr>
-              <a:t>（走動巡視。學生會陸續發現三次的原因不一樣。）
+              <a:t>三次的原因一樣嗎？
 </a:t>
             </a:r>
           </a:p>
@@ -1945,7 +1945,7 @@
                 <a:ea typeface="Arial Unicode MS"/>
                 <a:cs typeface="Arial Unicode MS"/>
               </a:rPr>
-              <a:t>三次的原因一樣嗎？
+              <a:t>答案是不一樣。
 </a:t>
             </a:r>
           </a:p>
@@ -1959,6 +1959,17 @@
               </a:spcAft>
             </a:pPr>
             <a:r>
+              <a:rPr sz="1200" b="1" lang="zh-TW" dirty="0">
+                <a:solidFill>
+                  <a:srgbClr val="000000"/>
+                </a:solidFill>
+                <a:latin typeface="Arial Unicode MS"/>
+                <a:ea typeface="Arial Unicode MS"/>
+                <a:cs typeface="Arial Unicode MS"/>
+              </a:rPr>
+              <a:t>這就是重點。</a:t>
+            </a:r>
+            <a:r>
               <a:rPr sz="1200" lang="zh-TW" dirty="0">
                 <a:solidFill>
                   <a:srgbClr val="000000"/>
@@ -1967,7 +1978,7 @@
                 <a:ea typeface="Arial Unicode MS"/>
                 <a:cs typeface="Arial Unicode MS"/>
               </a:rPr>
-              <a:t>（預期答案：不一樣。）
+              <a:t>同一組參數、同一個場景，跑三次可能撞在三個不同的地方——因為機車出現的位置和時間有隨機性。
 </a:t>
             </a:r>
           </a:p>
@@ -1981,6 +1992,17 @@
               </a:spcAft>
             </a:pPr>
             <a:r>
+              <a:rPr sz="1200" lang="zh-TW" dirty="0">
+                <a:solidFill>
+                  <a:srgbClr val="000000"/>
+                </a:solidFill>
+                <a:latin typeface="Arial Unicode MS"/>
+                <a:ea typeface="Arial Unicode MS"/>
+                <a:cs typeface="Arial Unicode MS"/>
+              </a:rPr>
+              <a:t>（連回第二節）所以我們說「掃參數」，不只是掃參數的值，</a:t>
+            </a:r>
+            <a:r>
               <a:rPr sz="1200" b="1" lang="zh-TW" dirty="0">
                 <a:solidFill>
                   <a:srgbClr val="000000"/>
@@ -1989,7 +2011,7 @@
                 <a:ea typeface="Arial Unicode MS"/>
                 <a:cs typeface="Arial Unicode MS"/>
               </a:rPr>
-              <a:t>這就是重點。</a:t>
+              <a:t>同一組參數也要跑很多次</a:t>
             </a:r>
             <a:r>
               <a:rPr sz="1200" lang="zh-TW" dirty="0">
@@ -2000,7 +2022,7 @@
                 <a:ea typeface="Arial Unicode MS"/>
                 <a:cs typeface="Arial Unicode MS"/>
               </a:rPr>
-              <a:t>同一組參數、同一個場景，跑三次可能撞在三個不同的地方——因為機車出現的位置和時間有隨機性。
+              <a:t>。跑一次就下結論，是不夠的。
 </a:t>
             </a:r>
           </a:p>
@@ -2022,51 +2044,7 @@
                 <a:ea typeface="Arial Unicode MS"/>
                 <a:cs typeface="Arial Unicode MS"/>
               </a:rPr>
-              <a:t>（連回第二節）所以我們說「掃參數」，不只是掃參數的值，</a:t>
-            </a:r>
-            <a:r>
-              <a:rPr sz="1200" b="1" lang="zh-TW" dirty="0">
-                <a:solidFill>
-                  <a:srgbClr val="000000"/>
-                </a:solidFill>
-                <a:latin typeface="Arial Unicode MS"/>
-                <a:ea typeface="Arial Unicode MS"/>
-                <a:cs typeface="Arial Unicode MS"/>
-              </a:rPr>
-              <a:t>同一組參數也要跑很多次</a:t>
-            </a:r>
-            <a:r>
-              <a:rPr sz="1200" lang="zh-TW" dirty="0">
-                <a:solidFill>
-                  <a:srgbClr val="000000"/>
-                </a:solidFill>
-                <a:latin typeface="Arial Unicode MS"/>
-                <a:ea typeface="Arial Unicode MS"/>
-                <a:cs typeface="Arial Unicode MS"/>
-              </a:rPr>
-              <a:t>。跑一次就下結論，是不夠的。
-</a:t>
-            </a:r>
-          </a:p>
-          <a:p>
-            <a:pPr algn="l">
-              <a:lnSpc>
-                <a:spcPct val="115000"/>
-              </a:lnSpc>
-              <a:spcAft>
-                <a:spcPts val="600"/>
-              </a:spcAft>
-            </a:pPr>
-            <a:r>
-              <a:rPr sz="1200" lang="zh-TW" dirty="0">
-                <a:solidFill>
-                  <a:srgbClr val="000000"/>
-                </a:solidFill>
-                <a:latin typeface="Arial Unicode MS"/>
-                <a:ea typeface="Arial Unicode MS"/>
-                <a:cs typeface="Arial Unicode MS"/>
-              </a:rPr>
-              <a:t>（如果有組別跑三次都沒撞，請他們多跑幾次，或者記下「跑了幾次才撞」——那也是有用的資訊。）</a:t>
+              <a:t>如果有組別跑三次都沒撞，就多跑幾次，或者記下「跑了幾次才撞」，那也是有用的資訊。</a:t>
             </a:r>
           </a:p>
         </p:txBody>
@@ -2253,7 +2231,7 @@
                 <a:ea typeface="Arial Unicode MS"/>
                 <a:cs typeface="Arial Unicode MS"/>
               </a:rPr>
-              <a:t>（先講清楚為什麼是比「撐最久」，不是「不准撞」。）
+              <a:t>我先講清楚，為什麼這一題是比「撐最久」，而不是「不准撞」。
 </a:t>
             </a:r>
           </a:p>
@@ -2319,7 +2297,51 @@
                 <a:ea typeface="Arial Unicode MS"/>
                 <a:cs typeface="Arial Unicode MS"/>
               </a:rPr>
-              <a:t>（學生聽到這裡通常會愣一下，那個反應是好的。）
+              <a:t>這不是模擬器壞了，這正是這個場景要告訴大家的事：</a:t>
+            </a:r>
+            <a:r>
+              <a:rPr sz="1000" b="1" lang="zh-TW" dirty="0">
+                <a:solidFill>
+                  <a:srgbClr val="000000"/>
+                </a:solidFill>
+                <a:latin typeface="Arial Unicode MS"/>
+                <a:ea typeface="Arial Unicode MS"/>
+                <a:cs typeface="Arial Unicode MS"/>
+              </a:rPr>
+              <a:t>有些環境，用現在這些感測器規格就是搞不定。</a:t>
+            </a:r>
+            <a:r>
+              <a:rPr sz="1000" lang="zh-TW" dirty="0">
+                <a:solidFill>
+                  <a:srgbClr val="000000"/>
+                </a:solidFill>
+                <a:latin typeface="Arial Unicode MS"/>
+                <a:ea typeface="Arial Unicode MS"/>
+                <a:cs typeface="Arial Unicode MS"/>
+              </a:rPr>
+              <a:t>這時候工程上的答案不是再加感測器，是</a:t>
+            </a:r>
+            <a:r>
+              <a:rPr sz="1000" b="1" lang="zh-TW" dirty="0">
+                <a:solidFill>
+                  <a:srgbClr val="000000"/>
+                </a:solidFill>
+                <a:latin typeface="Arial Unicode MS"/>
+                <a:ea typeface="Arial Unicode MS"/>
+                <a:cs typeface="Arial Unicode MS"/>
+              </a:rPr>
+              <a:t>把運行範圍縮小</a:t>
+            </a:r>
+            <a:r>
+              <a:rPr sz="1000" lang="zh-TW" dirty="0">
+                <a:solidFill>
+                  <a:srgbClr val="000000"/>
+                </a:solidFill>
+                <a:latin typeface="Arial Unicode MS"/>
+                <a:ea typeface="Arial Unicode MS"/>
+                <a:cs typeface="Arial Unicode MS"/>
+              </a:rPr>
+              <a:t>——降速、避開尖峰時段、或者根本不在這條路上營運。這就是第二週講的 ODD。
 </a:t>
             </a:r>
           </a:p>
@@ -2341,51 +2363,7 @@
                 <a:ea typeface="Arial Unicode MS"/>
                 <a:cs typeface="Arial Unicode MS"/>
               </a:rPr>
-              <a:t>這不是模擬器壞了，這正是這個場景要告訴大家的事：</a:t>
-            </a:r>
-            <a:r>
-              <a:rPr sz="1000" b="1" lang="zh-TW" dirty="0">
-                <a:solidFill>
-                  <a:srgbClr val="000000"/>
-                </a:solidFill>
-                <a:latin typeface="Arial Unicode MS"/>
-                <a:ea typeface="Arial Unicode MS"/>
-                <a:cs typeface="Arial Unicode MS"/>
-              </a:rPr>
-              <a:t>有些環境，用現在這些感測器規格就是搞不定。</a:t>
-            </a:r>
-            <a:r>
-              <a:rPr sz="1000" lang="zh-TW" dirty="0">
-                <a:solidFill>
-                  <a:srgbClr val="000000"/>
-                </a:solidFill>
-                <a:latin typeface="Arial Unicode MS"/>
-                <a:ea typeface="Arial Unicode MS"/>
-                <a:cs typeface="Arial Unicode MS"/>
-              </a:rPr>
-              <a:t>這時候工程上的答案不是再加感測器，是</a:t>
-            </a:r>
-            <a:r>
-              <a:rPr sz="1000" b="1" lang="zh-TW" dirty="0">
-                <a:solidFill>
-                  <a:srgbClr val="000000"/>
-                </a:solidFill>
-                <a:latin typeface="Arial Unicode MS"/>
-                <a:ea typeface="Arial Unicode MS"/>
-                <a:cs typeface="Arial Unicode MS"/>
-              </a:rPr>
-              <a:t>把運行範圍縮小</a:t>
-            </a:r>
-            <a:r>
-              <a:rPr sz="1000" lang="zh-TW" dirty="0">
-                <a:solidFill>
-                  <a:srgbClr val="000000"/>
-                </a:solidFill>
-                <a:latin typeface="Arial Unicode MS"/>
-                <a:ea typeface="Arial Unicode MS"/>
-                <a:cs typeface="Arial Unicode MS"/>
-              </a:rPr>
-              <a:t>——降速、避開尖峰時段、或者根本不在這條路上營運。這就是第二週講的 ODD。
+              <a:t>所以今天的題目是：在搞不定的環境裡，你能把界線推到多遠？
 </a:t>
             </a:r>
           </a:p>
@@ -2407,7 +2385,7 @@
                 <a:ea typeface="Arial Unicode MS"/>
                 <a:cs typeface="Arial Unicode MS"/>
               </a:rPr>
-              <a:t>所以今天的題目是：在搞不定的環境裡，你能把界線推到多遠？
+              <a:t>操作上我要提醒一件事，而且會一直重複講。
 </a:t>
             </a:r>
           </a:p>
@@ -2421,6 +2399,17 @@
               </a:spcAft>
             </a:pPr>
             <a:r>
+              <a:rPr sz="1000" b="1" lang="zh-TW" dirty="0">
+                <a:solidFill>
+                  <a:srgbClr val="000000"/>
+                </a:solidFill>
+                <a:latin typeface="Arial Unicode MS"/>
+                <a:ea typeface="Arial Unicode MS"/>
+                <a:cs typeface="Arial Unicode MS"/>
+              </a:rPr>
+              <a:t>一次只改一個參數。</a:t>
+            </a:r>
+            <a:r>
               <a:rPr sz="1000" lang="zh-TW" dirty="0">
                 <a:solidFill>
                   <a:srgbClr val="000000"/>
@@ -2429,7 +2418,7 @@
                 <a:ea typeface="Arial Unicode MS"/>
                 <a:cs typeface="Arial Unicode MS"/>
               </a:rPr>
-              <a:t>（操作提醒，走動時反覆強調。）
+              <a:t>三個一起改，你不會知道是哪一個起了作用——這就是第二節說的「掃參數」，一次掃一維。
 </a:t>
             </a:r>
           </a:p>
@@ -2443,17 +2432,6 @@
               </a:spcAft>
             </a:pPr>
             <a:r>
-              <a:rPr sz="1000" b="1" lang="zh-TW" dirty="0">
-                <a:solidFill>
-                  <a:srgbClr val="000000"/>
-                </a:solidFill>
-                <a:latin typeface="Arial Unicode MS"/>
-                <a:ea typeface="Arial Unicode MS"/>
-                <a:cs typeface="Arial Unicode MS"/>
-              </a:rPr>
-              <a:t>一次只改一個參數。</a:t>
-            </a:r>
-            <a:r>
               <a:rPr sz="1000" lang="zh-TW" dirty="0">
                 <a:solidFill>
                   <a:srgbClr val="000000"/>
@@ -2462,7 +2440,7 @@
                 <a:ea typeface="Arial Unicode MS"/>
                 <a:cs typeface="Arial Unicode MS"/>
               </a:rPr>
-              <a:t>三個一起改，你不會知道是哪一個起了作用——這就是第二節說的「掃參數」，一次掃一維。
+              <a:t>還有，回頭看第一節算的：時速五十，射線不能短於二十五公尺。如果有組別把射線長度拉到二十以下還在調射線數，請提醒他們那是白費力氣。
 </a:t>
             </a:r>
           </a:p>
@@ -2476,6 +2454,17 @@
               </a:spcAft>
             </a:pPr>
             <a:r>
+              <a:rPr sz="1000" b="1" lang="zh-TW" dirty="0">
+                <a:solidFill>
+                  <a:srgbClr val="000000"/>
+                </a:solidFill>
+                <a:latin typeface="Arial Unicode MS"/>
+                <a:ea typeface="Arial Unicode MS"/>
+                <a:cs typeface="Arial Unicode MS"/>
+              </a:rPr>
+              <a:t>我先給各位一組參考數字</a:t>
+            </a:r>
+            <a:r>
               <a:rPr sz="1000" lang="zh-TW" dirty="0">
                 <a:solidFill>
                   <a:srgbClr val="000000"/>
@@ -2484,7 +2473,7 @@
                 <a:ea typeface="Arial Unicode MS"/>
                 <a:cs typeface="Arial Unicode MS"/>
               </a:rPr>
-              <a:t>還有，回頭看第一節算的：時速五十，射線不能短於二十五公尺。如果有組別把射線長度拉到二十以下還在調射線數，請提醒他們那是白費力氣。
+              <a:t>，這是我自己實測的中位數，各組跑出來會有出入：
 </a:t>
             </a:r>
           </a:p>
@@ -2498,6 +2487,17 @@
               </a:spcAft>
             </a:pPr>
             <a:r>
+              <a:rPr sz="1000" lang="zh-TW" dirty="0">
+                <a:solidFill>
+                  <a:srgbClr val="000000"/>
+                </a:solidFill>
+                <a:latin typeface="Arial Unicode MS"/>
+                <a:ea typeface="Arial Unicode MS"/>
+                <a:cs typeface="Arial Unicode MS"/>
+              </a:rPr>
+              <a:t>預設的九條、二十五公尺、一百二十度，大約撐</a:t>
+            </a:r>
+            <a:r>
               <a:rPr sz="1000" b="1" lang="zh-TW" dirty="0">
                 <a:solidFill>
                   <a:srgbClr val="000000"/>
@@ -2506,7 +2506,7 @@
                 <a:ea typeface="Arial Unicode MS"/>
                 <a:cs typeface="Arial Unicode MS"/>
               </a:rPr>
-              <a:t>我先給各位一組參考數字</a:t>
+              <a:t>十八秒</a:t>
             </a:r>
             <a:r>
               <a:rPr sz="1000" lang="zh-TW" dirty="0">
@@ -2517,7 +2517,7 @@
                 <a:ea typeface="Arial Unicode MS"/>
                 <a:cs typeface="Arial Unicode MS"/>
               </a:rPr>
-              <a:t>，這是我自己實測的中位數，各組跑出來會有出入：
+              <a:t>。
 </a:t>
             </a:r>
           </a:p>
@@ -2539,7 +2539,7 @@
                 <a:ea typeface="Arial Unicode MS"/>
                 <a:cs typeface="Arial Unicode MS"/>
               </a:rPr>
-              <a:t>預設的九條、二十五公尺、一百二十度，大約撐</a:t>
+              <a:t>調到三十條、四十五公尺、一百二十度，大約撐</a:t>
             </a:r>
             <a:r>
               <a:rPr sz="1000" b="1" lang="zh-TW" dirty="0">
@@ -2550,7 +2550,7 @@
                 <a:ea typeface="Arial Unicode MS"/>
                 <a:cs typeface="Arial Unicode MS"/>
               </a:rPr>
-              <a:t>十八秒</a:t>
+              <a:t>三十四秒</a:t>
             </a:r>
             <a:r>
               <a:rPr sz="1000" lang="zh-TW" dirty="0">
@@ -2561,7 +2561,7 @@
                 <a:ea typeface="Arial Unicode MS"/>
                 <a:cs typeface="Arial Unicode MS"/>
               </a:rPr>
-              <a:t>。
+              <a:t>，差不多快了一倍。
 </a:t>
             </a:r>
           </a:p>
@@ -2583,29 +2583,7 @@
                 <a:ea typeface="Arial Unicode MS"/>
                 <a:cs typeface="Arial Unicode MS"/>
               </a:rPr>
-              <a:t>調到三十條、四十五公尺、一百二十度，大約撐</a:t>
-            </a:r>
-            <a:r>
-              <a:rPr sz="1000" b="1" lang="zh-TW" dirty="0">
-                <a:solidFill>
-                  <a:srgbClr val="000000"/>
-                </a:solidFill>
-                <a:latin typeface="Arial Unicode MS"/>
-                <a:ea typeface="Arial Unicode MS"/>
-                <a:cs typeface="Arial Unicode MS"/>
-              </a:rPr>
-              <a:t>三十四秒</a:t>
-            </a:r>
-            <a:r>
-              <a:rPr sz="1000" lang="zh-TW" dirty="0">
-                <a:solidFill>
-                  <a:srgbClr val="000000"/>
-                </a:solidFill>
-                <a:latin typeface="Arial Unicode MS"/>
-                <a:ea typeface="Arial Unicode MS"/>
-                <a:cs typeface="Arial Unicode MS"/>
-              </a:rPr>
-              <a:t>，差不多快了一倍。
+              <a:t>所以參數是真的有用的。但是——
 </a:t>
             </a:r>
           </a:p>
@@ -2627,7 +2605,7 @@
                 <a:ea typeface="Arial Unicode MS"/>
                 <a:cs typeface="Arial Unicode MS"/>
               </a:rPr>
-              <a:t>所以參數是真的有用的。但是——
+              <a:t>後面還有一件事，我先留著，等上台那一頁再揭曉，讓各位自己去撞上那個發現。
 </a:t>
             </a:r>
           </a:p>
@@ -2649,29 +2627,7 @@
                 <a:ea typeface="Arial Unicode MS"/>
                 <a:cs typeface="Arial Unicode MS"/>
               </a:rPr>
-              <a:t>（這句話先不要講，留到上台那一頁再揭曉，讓學生自己去撞上這個發現：再往上拉到滿檔，並不會更好。）
-</a:t>
-            </a:r>
-          </a:p>
-          <a:p>
-            <a:pPr algn="l">
-              <a:lnSpc>
-                <a:spcPct val="115000"/>
-              </a:lnSpc>
-              <a:spcAft>
-                <a:spcPts val="500"/>
-              </a:spcAft>
-            </a:pPr>
-            <a:r>
-              <a:rPr sz="1000" lang="zh-TW" dirty="0">
-                <a:solidFill>
-                  <a:srgbClr val="000000"/>
-                </a:solidFill>
-                <a:latin typeface="Arial Unicode MS"/>
-                <a:ea typeface="Arial Unicode MS"/>
-                <a:cs typeface="Arial Unicode MS"/>
-              </a:rPr>
-              <a:t>（巡視時可以問各組：你現在改的是哪一個？為什麼改它？逼他們講出理由。）
+              <a:t>我會一組一組問：你現在改的是哪一個？為什麼改它？請各位講得出理由。
 </a:t>
             </a:r>
           </a:p>
@@ -2836,7 +2792,7 @@
                 <a:ea typeface="Arial Unicode MS"/>
                 <a:cs typeface="Arial Unicode MS"/>
               </a:rPr>
-              <a:t>（這一題有一個陷阱，我要各位自己踩進去。）
+              <a:t>這一題有一個陷阱，我要各位自己踩進去。
 </a:t>
             </a:r>
           </a:p>
@@ -2858,7 +2814,7 @@
                 <a:ea typeface="Arial Unicode MS"/>
                 <a:cs typeface="Arial Unicode MS"/>
               </a:rPr>
-              <a:t>先看兩件事：</a:t>
+              <a:t>先看兩件事，一個是</a:t>
             </a:r>
             <a:r>
               <a:rPr sz="1000" b="1" lang="zh-TW" dirty="0">
@@ -2880,7 +2836,7 @@
                 <a:ea typeface="Arial Unicode MS"/>
                 <a:cs typeface="Arial Unicode MS"/>
               </a:rPr>
-              <a:t>變多少、</a:t>
+              <a:t>變多少，一個是</a:t>
             </a:r>
             <a:r>
               <a:rPr sz="1000" b="1" lang="zh-TW" dirty="0">
@@ -2968,7 +2924,7 @@
                 <a:ea typeface="Arial Unicode MS"/>
                 <a:cs typeface="Arial Unicode MS"/>
               </a:rPr>
-              <a:t>（一定要讓學生自己回答。多數人會先愣一下。）
+              <a:t>這題我一定要聽各位自己回答。
 </a:t>
             </a:r>
           </a:p>
@@ -3023,7 +2979,7 @@
                 <a:ea typeface="Arial Unicode MS"/>
                 <a:cs typeface="Arial Unicode MS"/>
               </a:rPr>
-              <a:t>（在白板上把兩件事分開寫：）
+              <a:t>我在白板上把兩件事分開寫。
 </a:t>
             </a:r>
           </a:p>
@@ -3221,7 +3177,7 @@
                 <a:ea typeface="Arial Unicode MS"/>
                 <a:cs typeface="Arial Unicode MS"/>
               </a:rPr>
-              <a:t>（如果有組別兩個都做了，那也很好——真車就是兩個都做。）
+              <a:t>如果有組別兩個都做了，那也很好，真車就是兩個都做。
 </a:t>
             </a:r>
           </a:p>
@@ -3265,7 +3221,7 @@
                 <a:ea typeface="Arial Unicode MS"/>
                 <a:cs typeface="Arial Unicode MS"/>
               </a:rPr>
-              <a:t>（補一句物理：真車在濕路面上減速度只剩一半，煞停距離反而</a:t>
+              <a:t>再補一句物理。真車在濕路面上減速度只剩一半，煞停距離反而</a:t>
             </a:r>
             <a:r>
               <a:rPr sz="1000" b="1" lang="zh-TW" dirty="0">
@@ -3287,7 +3243,7 @@
                 <a:ea typeface="Arial Unicode MS"/>
                 <a:cs typeface="Arial Unicode MS"/>
               </a:rPr>
-              <a:t>。我們的模擬器沒有模擬這件事——這本身就是第一節講的「物理落差」的例子。）</a:t>
+              <a:t>。我們的模擬器沒有模擬這件事，而這本身就是第一節講的「物理落差」的例子。</a:t>
             </a:r>
           </a:p>
         </p:txBody>
@@ -3452,7 +3408,7 @@
                 <a:ea typeface="Arial Unicode MS"/>
                 <a:cs typeface="Arial Unicode MS"/>
               </a:rPr>
-              <a:t>（預期答案：光達。這題大部分人會答對。）
+              <a:t>答案是光達，這題大部分的人會答對。
 </a:t>
             </a:r>
           </a:p>
@@ -3529,7 +3485,7 @@
                 <a:ea typeface="Arial Unicode MS"/>
                 <a:cs typeface="Arial Unicode MS"/>
               </a:rPr>
-              <a:t>（讓各組自己寫三句話，不要急著給答案。走動看他們寫什麼。）
+              <a:t>請各組自己寫三句話，先不要急著問我答案。
 </a:t>
             </a:r>
           </a:p>
@@ -3551,7 +3507,7 @@
                 <a:ea typeface="Arial Unicode MS"/>
                 <a:cs typeface="Arial Unicode MS"/>
               </a:rPr>
-              <a:t>提示三個方向：
+              <a:t>我給三個方向當提示。
 </a:t>
             </a:r>
           </a:p>
@@ -3705,7 +3661,51 @@
                 <a:ea typeface="Arial Unicode MS"/>
                 <a:cs typeface="Arial Unicode MS"/>
               </a:rPr>
-              <a:t>（停一下講這第三點。）
+              <a:t>前兩個是</a:t>
+            </a:r>
+            <a:r>
+              <a:rPr sz="1000" b="1" lang="zh-TW" dirty="0">
+                <a:solidFill>
+                  <a:srgbClr val="000000"/>
+                </a:solidFill>
+                <a:latin typeface="Arial Unicode MS"/>
+                <a:ea typeface="Arial Unicode MS"/>
+                <a:cs typeface="Arial Unicode MS"/>
+              </a:rPr>
+              <a:t>感知</a:t>
+            </a:r>
+            <a:r>
+              <a:rPr sz="1000" lang="zh-TW" dirty="0">
+                <a:solidFill>
+                  <a:srgbClr val="000000"/>
+                </a:solidFill>
+                <a:latin typeface="Arial Unicode MS"/>
+                <a:ea typeface="Arial Unicode MS"/>
+                <a:cs typeface="Arial Unicode MS"/>
+              </a:rPr>
+              <a:t>的問題——第四章會講。第三個是</a:t>
+            </a:r>
+            <a:r>
+              <a:rPr sz="1000" b="1" lang="zh-TW" dirty="0">
+                <a:solidFill>
+                  <a:srgbClr val="000000"/>
+                </a:solidFill>
+                <a:latin typeface="Arial Unicode MS"/>
+                <a:ea typeface="Arial Unicode MS"/>
+                <a:cs typeface="Arial Unicode MS"/>
+              </a:rPr>
+              <a:t>預測</a:t>
+            </a:r>
+            <a:r>
+              <a:rPr sz="1000" lang="zh-TW" dirty="0">
+                <a:solidFill>
+                  <a:srgbClr val="000000"/>
+                </a:solidFill>
+                <a:latin typeface="Arial Unicode MS"/>
+                <a:ea typeface="Arial Unicode MS"/>
+                <a:cs typeface="Arial Unicode MS"/>
+              </a:rPr>
+              <a:t>的問題——那是第六章。
 </a:t>
             </a:r>
           </a:p>
@@ -3727,7 +3727,7 @@
                 <a:ea typeface="Arial Unicode MS"/>
                 <a:cs typeface="Arial Unicode MS"/>
               </a:rPr>
-              <a:t>前兩個是</a:t>
+              <a:t>一台真的自駕車，光是「看到」還不夠，它必須</a:t>
             </a:r>
             <a:r>
               <a:rPr sz="1000" b="1" lang="zh-TW" dirty="0">
@@ -3738,7 +3738,7 @@
                 <a:ea typeface="Arial Unicode MS"/>
                 <a:cs typeface="Arial Unicode MS"/>
               </a:rPr>
-              <a:t>感知</a:t>
+              <a:t>猜</a:t>
             </a:r>
             <a:r>
               <a:rPr sz="1000" lang="zh-TW" dirty="0">
@@ -3749,29 +3749,7 @@
                 <a:ea typeface="Arial Unicode MS"/>
                 <a:cs typeface="Arial Unicode MS"/>
               </a:rPr>
-              <a:t>的問題——第四章會講。第三個是</a:t>
-            </a:r>
-            <a:r>
-              <a:rPr sz="1000" b="1" lang="zh-TW" dirty="0">
-                <a:solidFill>
-                  <a:srgbClr val="000000"/>
-                </a:solidFill>
-                <a:latin typeface="Arial Unicode MS"/>
-                <a:ea typeface="Arial Unicode MS"/>
-                <a:cs typeface="Arial Unicode MS"/>
-              </a:rPr>
-              <a:t>預測</a:t>
-            </a:r>
-            <a:r>
-              <a:rPr sz="1000" lang="zh-TW" dirty="0">
-                <a:solidFill>
-                  <a:srgbClr val="000000"/>
-                </a:solidFill>
-                <a:latin typeface="Arial Unicode MS"/>
-                <a:ea typeface="Arial Unicode MS"/>
-                <a:cs typeface="Arial Unicode MS"/>
-              </a:rPr>
-              <a:t>的問題——那是第六章。
+              <a:t>別人接下來要做什麼。而在河內，猜機車的下一步，比看到它難得多。
 </a:t>
             </a:r>
           </a:p>
@@ -3793,51 +3771,7 @@
                 <a:ea typeface="Arial Unicode MS"/>
                 <a:cs typeface="Arial Unicode MS"/>
               </a:rPr>
-              <a:t>一台真的自駕車，光是「看到」還不夠，它必須</a:t>
-            </a:r>
-            <a:r>
-              <a:rPr sz="1000" b="1" lang="zh-TW" dirty="0">
-                <a:solidFill>
-                  <a:srgbClr val="000000"/>
-                </a:solidFill>
-                <a:latin typeface="Arial Unicode MS"/>
-                <a:ea typeface="Arial Unicode MS"/>
-                <a:cs typeface="Arial Unicode MS"/>
-              </a:rPr>
-              <a:t>猜</a:t>
-            </a:r>
-            <a:r>
-              <a:rPr sz="1000" lang="zh-TW" dirty="0">
-                <a:solidFill>
-                  <a:srgbClr val="000000"/>
-                </a:solidFill>
-                <a:latin typeface="Arial Unicode MS"/>
-                <a:ea typeface="Arial Unicode MS"/>
-                <a:cs typeface="Arial Unicode MS"/>
-              </a:rPr>
-              <a:t>別人接下來要做什麼。而在河內，猜機車的下一步，比看到它難得多。
-</a:t>
-            </a:r>
-          </a:p>
-          <a:p>
-            <a:pPr algn="l">
-              <a:lnSpc>
-                <a:spcPct val="115000"/>
-              </a:lnSpc>
-              <a:spcAft>
-                <a:spcPts val="500"/>
-              </a:spcAft>
-            </a:pPr>
-            <a:r>
-              <a:rPr sz="1000" lang="zh-TW" dirty="0">
-                <a:solidFill>
-                  <a:srgbClr val="000000"/>
-                </a:solidFill>
-                <a:latin typeface="Arial Unicode MS"/>
-                <a:ea typeface="Arial Unicode MS"/>
-                <a:cs typeface="Arial Unicode MS"/>
-              </a:rPr>
-              <a:t>（收上來的紙留著。第八週講完感知，可以拿出來對照，讓學生看自己當初寫了什麼。）</a:t>
+              <a:t>收上來的紙我會留著。第八週講完感知之後，我會拿出來給各位對照，看看自己當初寫了什麼。</a:t>
             </a:r>
           </a:p>
         </p:txBody>
@@ -3958,7 +3892,7 @@
                 <a:ea typeface="Arial Unicode MS"/>
                 <a:cs typeface="Arial Unicode MS"/>
               </a:rPr>
-              <a:t>（這一頁是給提早做完的組別，不是全班必做。）
+              <a:t>這一頁是給提早做完的組別，不是全班都要做。
 </a:t>
             </a:r>
           </a:p>
@@ -4046,7 +3980,7 @@
                 <a:ea typeface="Arial Unicode MS"/>
                 <a:cs typeface="Arial Unicode MS"/>
               </a:rPr>
-              <a:t>上週第三週我們講過旋轉式光達。這裡複習一下它的取捨：
+              <a:t>上週第三週我們講過旋轉式光達，這裡複習一下它的取捨。
 </a:t>
             </a:r>
           </a:p>
@@ -4079,7 +4013,7 @@
                 <a:ea typeface="Arial Unicode MS"/>
                 <a:cs typeface="Arial Unicode MS"/>
               </a:rPr>
-              <a:t>：只看前方那個扇形，但那個扇形裡的資料</a:t>
+              <a:t>只看前方那個扇形，可是那個扇形裡的資料</a:t>
             </a:r>
             <a:r>
               <a:rPr sz="1200" b="1" lang="zh-TW" dirty="0">
@@ -4134,7 +4068,7 @@
                 <a:ea typeface="Arial Unicode MS"/>
                 <a:cs typeface="Arial Unicode MS"/>
               </a:rPr>
-              <a:t>：看得到一整圈，但每個方向</a:t>
+              <a:t>看得到一整圈，可是每個方向</a:t>
             </a:r>
             <a:r>
               <a:rPr sz="1200" b="1" lang="zh-TW" dirty="0">
@@ -4145,7 +4079,7 @@
                 <a:ea typeface="Arial Unicode MS"/>
                 <a:cs typeface="Arial Unicode MS"/>
               </a:rPr>
-              <a:t>每轉一圈才更新一次</a:t>
+              <a:t>要等它轉一圈才更新一次</a:t>
             </a:r>
             <a:r>
               <a:rPr sz="1200" lang="zh-TW" dirty="0">
@@ -4178,7 +4112,7 @@
                 <a:ea typeface="Arial Unicode MS"/>
                 <a:cs typeface="Arial Unicode MS"/>
               </a:rPr>
-              <a:t>（問提早做完的組別）零點一秒很短，有差嗎？
+              <a:t>我問做完的那幾組一個問題。零點一秒很短，有差嗎？
 </a:t>
             </a:r>
           </a:p>
@@ -4200,7 +4134,7 @@
                 <a:ea typeface="Arial Unicode MS"/>
                 <a:cs typeface="Arial Unicode MS"/>
               </a:rPr>
-              <a:t>（讓他們算：時速五十是每秒十三點九公尺，零點一秒就是一點四公尺。）
+              <a:t>大家算一下：時速五十是每秒十三點九公尺，零點一秒就是一點四公尺。
 </a:t>
             </a:r>
           </a:p>
@@ -4266,7 +4200,7 @@
                 <a:ea typeface="Arial Unicode MS"/>
                 <a:cs typeface="Arial Unicode MS"/>
               </a:rPr>
-              <a:t>（這個探索沒有標準答案，但它會讓學生看到：換一種感測器，整組參數可能都要重配。這正是第三章要講的事。）</a:t>
+              <a:t>這個探索沒有標準答案，可是它會讓各位看到一件事：換一種感測器，整組參數可能都要重配。這正是第三章要講的。</a:t>
             </a:r>
           </a:p>
         </p:txBody>
@@ -4431,7 +4365,7 @@
                 <a:ea typeface="Arial Unicode MS"/>
                 <a:cs typeface="Arial Unicode MS"/>
               </a:rPr>
-              <a:t>（老師在白板上開一個表格，記每組撐了幾秒，還有當時的三個數字。）
+              <a:t>我在白板上開一個表格，記每一組撐了幾秒，還有當時的三個數字。
 </a:t>
             </a:r>
           </a:p>
@@ -4519,7 +4453,7 @@
                 <a:ea typeface="Arial Unicode MS"/>
                 <a:cs typeface="Arial Unicode MS"/>
               </a:rPr>
-              <a:t>（通常沒有。這件事本身就值得講：同一個問題，不同的人配出不同的解。）
+              <a:t>通常沒有。這件事本身就值得講：同一個問題，不同的人配出不同的解。
 </a:t>
             </a:r>
           </a:p>
@@ -4585,7 +4519,7 @@
                 <a:ea typeface="Arial Unicode MS"/>
                 <a:cs typeface="Arial Unicode MS"/>
               </a:rPr>
-              <a:t>（這裡要揭曉我剛剛保留的那件事。先問全班一個問題。）
+              <a:t>現在我要揭曉剛剛保留的那件事。先問全班一個問題。
 </a:t>
             </a:r>
           </a:p>
@@ -4629,7 +4563,7 @@
                 <a:ea typeface="Arial Unicode MS"/>
                 <a:cs typeface="Arial Unicode MS"/>
               </a:rPr>
-              <a:t>（通常不是，這個結果會讓學生意外。）
+              <a:t>通常不是，這個結果會讓大家意外。
 </a:t>
             </a:r>
           </a:p>
@@ -4783,7 +4717,7 @@
                 <a:ea typeface="Arial Unicode MS"/>
                 <a:cs typeface="Arial Unicode MS"/>
               </a:rPr>
-              <a:t>（在白板上把範圍圈出來，例如射線 20–35 條、長度 30–50 公尺、張角 100–140 度。）
+              <a:t>我在白板上把範圍圈出來，例如射線二十到三十五條、長度三十到五十公尺、張角一百到一百四十度。
 </a:t>
             </a:r>
           </a:p>
@@ -4871,7 +4805,7 @@
                 <a:ea typeface="Arial Unicode MS"/>
                 <a:cs typeface="Arial Unicode MS"/>
               </a:rPr>
-              <a:t>（把白板拍照留下。第五週第一節開場，我會拿真正的光達規格表來跟這張照片對照——那時候各位會發現，自己掃出來的範圍，跟真實產品的規格意外地接近。）</a:t>
+              <a:t>我把白板拍照留下來。第五週第一節開場，我會拿真正的光達規格表來跟這張照片對照。那時候各位會發現，自己掃出來的範圍，跟真實產品的規格意外地接近。</a:t>
             </a:r>
           </a:p>
         </p:txBody>
@@ -5014,7 +4948,7 @@
                 <a:ea typeface="Arial Unicode MS"/>
                 <a:cs typeface="Arial Unicode MS"/>
               </a:rPr>
-              <a:t>（四題都唸完再開始討論，不要一題一題來。）
+              <a:t>四題我先全部唸完，再開始討論，不要一題一題來。
 </a:t>
             </a:r>
           </a:p>
@@ -5146,7 +5080,7 @@
                 <a:ea typeface="Arial Unicode MS"/>
                 <a:cs typeface="Arial Unicode MS"/>
               </a:rPr>
-              <a:t>（一分鐘後收答案，下一頁公布。）</a:t>
+              <a:t>一分鐘後我收答案，下一頁公布。</a:t>
             </a:r>
           </a:p>
         </p:txBody>

--- a/第四週(10-01)/第四週_第3節_簡報.pptx
+++ b/第四週(10-01)/第四週_第3節_簡報.pptx
@@ -712,11 +712,11 @@
                 <a:spcPct val="115000"/>
               </a:lnSpc>
               <a:spcAft>
-                <a:spcPts val="600"/>
+                <a:spcPts val="575"/>
               </a:spcAft>
             </a:pPr>
             <a:r>
-              <a:rPr sz="1200" lang="zh-TW" dirty="0">
+              <a:rPr sz="1150" lang="zh-TW" dirty="0">
                 <a:solidFill>
                   <a:srgbClr val="000000"/>
                 </a:solidFill>
@@ -727,7 +727,7 @@
               <a:t>答案：</a:t>
             </a:r>
             <a:r>
-              <a:rPr sz="1200" b="1" lang="zh-TW" dirty="0">
+              <a:rPr sz="1150" b="1" lang="zh-TW" dirty="0">
                 <a:solidFill>
                   <a:srgbClr val="000000"/>
                 </a:solidFill>
@@ -738,7 +738,7 @@
               <a:t>四句都錯。</a:t>
             </a:r>
             <a:r>
-              <a:rPr sz="1200" lang="zh-TW" dirty="0">
+              <a:rPr sz="1150" lang="zh-TW" dirty="0">
                 <a:solidFill>
                   <a:srgbClr val="000000"/>
                 </a:solidFill>
@@ -756,11 +756,11 @@
                 <a:spcPct val="115000"/>
               </a:lnSpc>
               <a:spcAft>
-                <a:spcPts val="600"/>
+                <a:spcPts val="575"/>
               </a:spcAft>
             </a:pPr>
             <a:r>
-              <a:rPr sz="1200" b="1" lang="zh-TW" dirty="0">
+              <a:rPr sz="1150" b="1" lang="zh-TW" dirty="0">
                 <a:solidFill>
                   <a:srgbClr val="000000"/>
                 </a:solidFill>
@@ -771,7 +771,7 @@
               <a:t>第一句</a:t>
             </a:r>
             <a:r>
-              <a:rPr sz="1200" lang="zh-TW" dirty="0">
+              <a:rPr sz="1150" lang="zh-TW" dirty="0">
                 <a:solidFill>
                   <a:srgbClr val="000000"/>
                 </a:solidFill>
@@ -789,11 +789,11 @@
                 <a:spcPct val="115000"/>
               </a:lnSpc>
               <a:spcAft>
-                <a:spcPts val="600"/>
+                <a:spcPts val="575"/>
               </a:spcAft>
             </a:pPr>
             <a:r>
-              <a:rPr sz="1200" b="1" lang="zh-TW" dirty="0">
+              <a:rPr sz="1150" b="1" lang="zh-TW" dirty="0">
                 <a:solidFill>
                   <a:srgbClr val="000000"/>
                 </a:solidFill>
@@ -804,7 +804,7 @@
               <a:t>第二句</a:t>
             </a:r>
             <a:r>
-              <a:rPr sz="1200" lang="zh-TW" dirty="0">
+              <a:rPr sz="1150" lang="zh-TW" dirty="0">
                 <a:solidFill>
                   <a:srgbClr val="000000"/>
                 </a:solidFill>
@@ -822,11 +822,11 @@
                 <a:spcPct val="115000"/>
               </a:lnSpc>
               <a:spcAft>
-                <a:spcPts val="600"/>
+                <a:spcPts val="575"/>
               </a:spcAft>
             </a:pPr>
             <a:r>
-              <a:rPr sz="1200" lang="zh-TW" dirty="0">
+              <a:rPr sz="1150" lang="zh-TW" dirty="0">
                 <a:solidFill>
                   <a:srgbClr val="000000"/>
                 </a:solidFill>
@@ -837,7 +837,7 @@
               <a:t>（這裡給一個比喻）模擬是一個</a:t>
             </a:r>
             <a:r>
-              <a:rPr sz="1200" b="1" lang="zh-TW" dirty="0">
+              <a:rPr sz="1150" b="1" lang="zh-TW" dirty="0">
                 <a:solidFill>
                   <a:srgbClr val="000000"/>
                 </a:solidFill>
@@ -848,7 +848,7 @@
               <a:t>篩子</a:t>
             </a:r>
             <a:r>
-              <a:rPr sz="1200" lang="zh-TW" dirty="0">
+              <a:rPr sz="1150" lang="zh-TW" dirty="0">
                 <a:solidFill>
                   <a:srgbClr val="000000"/>
                 </a:solidFill>
@@ -859,7 +859,7 @@
               <a:t>。通過篩子不代表你安全，只代表你</a:t>
             </a:r>
             <a:r>
-              <a:rPr sz="1200" b="1" lang="zh-TW" dirty="0">
+              <a:rPr sz="1150" b="1" lang="zh-TW" dirty="0">
                 <a:solidFill>
                   <a:srgbClr val="000000"/>
                 </a:solidFill>
@@ -870,7 +870,7 @@
               <a:t>拿到了上真車測試的門票</a:t>
             </a:r>
             <a:r>
-              <a:rPr sz="1200" lang="zh-TW" dirty="0">
+              <a:rPr sz="1150" lang="zh-TW" dirty="0">
                 <a:solidFill>
                   <a:srgbClr val="000000"/>
                 </a:solidFill>
@@ -888,11 +888,11 @@
                 <a:spcPct val="115000"/>
               </a:lnSpc>
               <a:spcAft>
-                <a:spcPts val="600"/>
+                <a:spcPts val="575"/>
               </a:spcAft>
             </a:pPr>
             <a:r>
-              <a:rPr sz="1200" b="1" lang="zh-TW" dirty="0">
+              <a:rPr sz="1150" b="1" lang="zh-TW" dirty="0">
                 <a:solidFill>
                   <a:srgbClr val="000000"/>
                 </a:solidFill>
@@ -903,7 +903,7 @@
               <a:t>第三句</a:t>
             </a:r>
             <a:r>
-              <a:rPr sz="1200" lang="zh-TW" dirty="0">
+              <a:rPr sz="1150" lang="zh-TW" dirty="0">
                 <a:solidFill>
                   <a:srgbClr val="000000"/>
                 </a:solidFill>
@@ -921,19 +921,41 @@
                 <a:spcPct val="115000"/>
               </a:lnSpc>
               <a:spcAft>
-                <a:spcPts val="600"/>
+                <a:spcPts val="575"/>
               </a:spcAft>
             </a:pPr>
             <a:r>
-              <a:rPr sz="1200" lang="zh-TW" dirty="0">
-                <a:solidFill>
-                  <a:srgbClr val="000000"/>
-                </a:solidFill>
-                <a:latin typeface="Arial Unicode MS"/>
-                <a:ea typeface="Arial Unicode MS"/>
-                <a:cs typeface="Arial Unicode MS"/>
-              </a:rPr>
-              <a:t>各位今天掃參數的時候應該已經體會到了：張角一百二十度大約撐三十四秒，放大到一百五十度反而掉到二十七秒。射線被攤稀了，機車就從縫裡鑽進來。
+              <a:rPr sz="1150" lang="zh-TW" dirty="0">
+                <a:solidFill>
+                  <a:srgbClr val="000000"/>
+                </a:solidFill>
+                <a:latin typeface="Arial Unicode MS"/>
+                <a:ea typeface="Arial Unicode MS"/>
+                <a:cs typeface="Arial Unicode MS"/>
+              </a:rPr>
+              <a:t>各位今天掃參數的時候已經自己撞上另一半的答案了：</a:t>
+            </a:r>
+            <a:r>
+              <a:rPr sz="1150" b="1" lang="zh-TW" dirty="0">
+                <a:solidFill>
+                  <a:srgbClr val="000000"/>
+                </a:solidFill>
+                <a:latin typeface="Arial Unicode MS"/>
+                <a:ea typeface="Arial Unicode MS"/>
+                <a:cs typeface="Arial Unicode MS"/>
+              </a:rPr>
+              <a:t>射線長度過了煞停距離那個門檻之後，再加完全沒有用。</a:t>
+            </a:r>
+            <a:r>
+              <a:rPr sz="1150" lang="zh-TW" dirty="0">
+                <a:solidFill>
+                  <a:srgbClr val="000000"/>
+                </a:solidFill>
+                <a:latin typeface="Arial Unicode MS"/>
+                <a:ea typeface="Arial Unicode MS"/>
+                <a:cs typeface="Arial Unicode MS"/>
+              </a:rPr>
+              <a:t>四十五公尺和一百二十公尺，九個種子跑出來一秒都不差。規格不是愈大愈好，是要剛好跨過門檻。
 </a:t>
             </a:r>
           </a:p>
@@ -943,11 +965,11 @@
                 <a:spcPct val="115000"/>
               </a:lnSpc>
               <a:spcAft>
-                <a:spcPts val="600"/>
+                <a:spcPts val="575"/>
               </a:spcAft>
             </a:pPr>
             <a:r>
-              <a:rPr sz="1200" b="1" lang="zh-TW" dirty="0">
+              <a:rPr sz="1150" b="1" lang="zh-TW" dirty="0">
                 <a:solidFill>
                   <a:srgbClr val="000000"/>
                 </a:solidFill>
@@ -958,7 +980,7 @@
               <a:t>第四句</a:t>
             </a:r>
             <a:r>
-              <a:rPr sz="1200" lang="zh-TW" dirty="0">
+              <a:rPr sz="1150" lang="zh-TW" dirty="0">
                 <a:solidFill>
                   <a:srgbClr val="000000"/>
                 </a:solidFill>
@@ -976,11 +998,11 @@
                 <a:spcPct val="115000"/>
               </a:lnSpc>
               <a:spcAft>
-                <a:spcPts val="600"/>
+                <a:spcPts val="575"/>
               </a:spcAft>
             </a:pPr>
             <a:r>
-              <a:rPr sz="1200" lang="zh-TW" dirty="0">
+              <a:rPr sz="1150" lang="zh-TW" dirty="0">
                 <a:solidFill>
                   <a:srgbClr val="000000"/>
                 </a:solidFill>
@@ -2253,7 +2275,7 @@
                 <a:ea typeface="Arial Unicode MS"/>
                 <a:cs typeface="Arial Unicode MS"/>
               </a:rPr>
-              <a:t>我先告訴各位一件事，免得大家白費力氣：</a:t>
+              <a:t>在開始調之前，請各組先做一件事：</a:t>
             </a:r>
             <a:r>
               <a:rPr sz="1000" b="1" lang="zh-TW" dirty="0">
@@ -2264,7 +2286,7 @@
                 <a:ea typeface="Arial Unicode MS"/>
                 <a:cs typeface="Arial Unicode MS"/>
               </a:rPr>
-              <a:t>在河內尖峰這個場景裡，沒有任何一組參數能保證不撞。</a:t>
+              <a:t>把左邊的「固定車流」打勾，種子填一個你們自己的號碼。</a:t>
             </a:r>
             <a:r>
               <a:rPr sz="1000" lang="zh-TW" dirty="0">
@@ -2275,7 +2297,7 @@
                 <a:ea typeface="Arial Unicode MS"/>
                 <a:cs typeface="Arial Unicode MS"/>
               </a:rPr>
-              <a:t>我自己跑過七十次，三個參數全部拉到最大，也撐不過九十秒。
+              <a:t>
 </a:t>
             </a:r>
           </a:p>
@@ -2297,51 +2319,7 @@
                 <a:ea typeface="Arial Unicode MS"/>
                 <a:cs typeface="Arial Unicode MS"/>
               </a:rPr>
-              <a:t>這不是模擬器壞了，這正是這個場景要告訴大家的事：</a:t>
-            </a:r>
-            <a:r>
-              <a:rPr sz="1000" b="1" lang="zh-TW" dirty="0">
-                <a:solidFill>
-                  <a:srgbClr val="000000"/>
-                </a:solidFill>
-                <a:latin typeface="Arial Unicode MS"/>
-                <a:ea typeface="Arial Unicode MS"/>
-                <a:cs typeface="Arial Unicode MS"/>
-              </a:rPr>
-              <a:t>有些環境，用現在這些感測器規格就是搞不定。</a:t>
-            </a:r>
-            <a:r>
-              <a:rPr sz="1000" lang="zh-TW" dirty="0">
-                <a:solidFill>
-                  <a:srgbClr val="000000"/>
-                </a:solidFill>
-                <a:latin typeface="Arial Unicode MS"/>
-                <a:ea typeface="Arial Unicode MS"/>
-                <a:cs typeface="Arial Unicode MS"/>
-              </a:rPr>
-              <a:t>這時候工程上的答案不是再加感測器，是</a:t>
-            </a:r>
-            <a:r>
-              <a:rPr sz="1000" b="1" lang="zh-TW" dirty="0">
-                <a:solidFill>
-                  <a:srgbClr val="000000"/>
-                </a:solidFill>
-                <a:latin typeface="Arial Unicode MS"/>
-                <a:ea typeface="Arial Unicode MS"/>
-                <a:cs typeface="Arial Unicode MS"/>
-              </a:rPr>
-              <a:t>把運行範圍縮小</a:t>
-            </a:r>
-            <a:r>
-              <a:rPr sz="1000" lang="zh-TW" dirty="0">
-                <a:solidFill>
-                  <a:srgbClr val="000000"/>
-                </a:solidFill>
-                <a:latin typeface="Arial Unicode MS"/>
-                <a:ea typeface="Arial Unicode MS"/>
-                <a:cs typeface="Arial Unicode MS"/>
-              </a:rPr>
-              <a:t>——降速、避開尖峰時段、或者根本不在這條路上營運。這就是第二週講的 ODD。
+              <a:t>為什麼？第一題各位已經看到了，同樣的參數跑三次會撞在三個不同的地方。如果每一趟的車流都不一樣，你根本分不出秒數變長是因為你調對了，還是因為這一趟運氣好。
 </a:t>
             </a:r>
           </a:p>
@@ -2363,7 +2341,29 @@
                 <a:ea typeface="Arial Unicode MS"/>
                 <a:cs typeface="Arial Unicode MS"/>
               </a:rPr>
-              <a:t>所以今天的題目是：在搞不定的環境裡，你能把界線推到多遠？
+              <a:t>固定車流之後按重新開始，出現的會是</a:t>
+            </a:r>
+            <a:r>
+              <a:rPr sz="1000" b="1" lang="zh-TW" dirty="0">
+                <a:solidFill>
+                  <a:srgbClr val="000000"/>
+                </a:solidFill>
+                <a:latin typeface="Arial Unicode MS"/>
+                <a:ea typeface="Arial Unicode MS"/>
+                <a:cs typeface="Arial Unicode MS"/>
+              </a:rPr>
+              <a:t>一模一樣的那一批車</a:t>
+            </a:r>
+            <a:r>
+              <a:rPr sz="1000" lang="zh-TW" dirty="0">
+                <a:solidFill>
+                  <a:srgbClr val="000000"/>
+                </a:solidFill>
+                <a:latin typeface="Arial Unicode MS"/>
+                <a:ea typeface="Arial Unicode MS"/>
+                <a:cs typeface="Arial Unicode MS"/>
+              </a:rPr>
+              <a:t>。這時候你改一個參數，秒數的變化就真的是那個參數造成的。
 </a:t>
             </a:r>
           </a:p>
@@ -2385,7 +2385,29 @@
                 <a:ea typeface="Arial Unicode MS"/>
                 <a:cs typeface="Arial Unicode MS"/>
               </a:rPr>
-              <a:t>操作上我要提醒一件事，而且會一直重複講。
+              <a:t>這就是第二節講的「掃參數」在真實工程裡的樣子：</a:t>
+            </a:r>
+            <a:r>
+              <a:rPr sz="1000" b="1" lang="zh-TW" dirty="0">
+                <a:solidFill>
+                  <a:srgbClr val="000000"/>
+                </a:solidFill>
+                <a:latin typeface="Arial Unicode MS"/>
+                <a:ea typeface="Arial Unicode MS"/>
+                <a:cs typeface="Arial Unicode MS"/>
+              </a:rPr>
+              <a:t>先把場景鎖死，再一次只改一個變數。</a:t>
+            </a:r>
+            <a:r>
+              <a:rPr sz="1000" lang="zh-TW" dirty="0">
+                <a:solidFill>
+                  <a:srgbClr val="000000"/>
+                </a:solidFill>
+                <a:latin typeface="Arial Unicode MS"/>
+                <a:ea typeface="Arial Unicode MS"/>
+                <a:cs typeface="Arial Unicode MS"/>
+              </a:rPr>
+              <a:t>真的模擬工程師每天都在做這件事。
 </a:t>
             </a:r>
           </a:p>
@@ -2399,6 +2421,17 @@
               </a:spcAft>
             </a:pPr>
             <a:r>
+              <a:rPr sz="1000" lang="zh-TW" dirty="0">
+                <a:solidFill>
+                  <a:srgbClr val="000000"/>
+                </a:solidFill>
+                <a:latin typeface="Arial Unicode MS"/>
+                <a:ea typeface="Arial Unicode MS"/>
+                <a:cs typeface="Arial Unicode MS"/>
+              </a:rPr>
+              <a:t>我先告訴各位一件事，免得大家白費力氣：</a:t>
+            </a:r>
+            <a:r>
               <a:rPr sz="1000" b="1" lang="zh-TW" dirty="0">
                 <a:solidFill>
                   <a:srgbClr val="000000"/>
@@ -2407,7 +2440,7 @@
                 <a:ea typeface="Arial Unicode MS"/>
                 <a:cs typeface="Arial Unicode MS"/>
               </a:rPr>
-              <a:t>一次只改一個參數。</a:t>
+              <a:t>在河內尖峰這個場景裡，沒有任何一組參數能保證不撞。</a:t>
             </a:r>
             <a:r>
               <a:rPr sz="1000" lang="zh-TW" dirty="0">
@@ -2418,7 +2451,7 @@
                 <a:ea typeface="Arial Unicode MS"/>
                 <a:cs typeface="Arial Unicode MS"/>
               </a:rPr>
-              <a:t>三個一起改，你不會知道是哪一個起了作用——這就是第二節說的「掃參數」，一次掃一維。
+              <a:t>
 </a:t>
             </a:r>
           </a:p>
@@ -2440,7 +2473,51 @@
                 <a:ea typeface="Arial Unicode MS"/>
                 <a:cs typeface="Arial Unicode MS"/>
               </a:rPr>
-              <a:t>還有，回頭看第一節算的：時速五十，射線不能短於二十五公尺。如果有組別把射線長度拉到二十以下還在調射線數，請提醒他們那是白費力氣。
+              <a:t>這不是模擬器壞了，這正是這個場景要告訴大家的事：</a:t>
+            </a:r>
+            <a:r>
+              <a:rPr sz="1000" b="1" lang="zh-TW" dirty="0">
+                <a:solidFill>
+                  <a:srgbClr val="000000"/>
+                </a:solidFill>
+                <a:latin typeface="Arial Unicode MS"/>
+                <a:ea typeface="Arial Unicode MS"/>
+                <a:cs typeface="Arial Unicode MS"/>
+              </a:rPr>
+              <a:t>有些環境，用現在這些感測器規格就是搞不定。</a:t>
+            </a:r>
+            <a:r>
+              <a:rPr sz="1000" lang="zh-TW" dirty="0">
+                <a:solidFill>
+                  <a:srgbClr val="000000"/>
+                </a:solidFill>
+                <a:latin typeface="Arial Unicode MS"/>
+                <a:ea typeface="Arial Unicode MS"/>
+                <a:cs typeface="Arial Unicode MS"/>
+              </a:rPr>
+              <a:t>這時候工程上的答案不是再加感測器，是</a:t>
+            </a:r>
+            <a:r>
+              <a:rPr sz="1000" b="1" lang="zh-TW" dirty="0">
+                <a:solidFill>
+                  <a:srgbClr val="000000"/>
+                </a:solidFill>
+                <a:latin typeface="Arial Unicode MS"/>
+                <a:ea typeface="Arial Unicode MS"/>
+                <a:cs typeface="Arial Unicode MS"/>
+              </a:rPr>
+              <a:t>把運行範圍縮小</a:t>
+            </a:r>
+            <a:r>
+              <a:rPr sz="1000" lang="zh-TW" dirty="0">
+                <a:solidFill>
+                  <a:srgbClr val="000000"/>
+                </a:solidFill>
+                <a:latin typeface="Arial Unicode MS"/>
+                <a:ea typeface="Arial Unicode MS"/>
+                <a:cs typeface="Arial Unicode MS"/>
+              </a:rPr>
+              <a:t>——降速、避開尖峰時段、或者根本不在這條路上營運。這就是第二週講的 ODD。
 </a:t>
             </a:r>
           </a:p>
@@ -2454,17 +2531,6 @@
               </a:spcAft>
             </a:pPr>
             <a:r>
-              <a:rPr sz="1000" b="1" lang="zh-TW" dirty="0">
-                <a:solidFill>
-                  <a:srgbClr val="000000"/>
-                </a:solidFill>
-                <a:latin typeface="Arial Unicode MS"/>
-                <a:ea typeface="Arial Unicode MS"/>
-                <a:cs typeface="Arial Unicode MS"/>
-              </a:rPr>
-              <a:t>我先給各位一組參考數字</a:t>
-            </a:r>
-            <a:r>
               <a:rPr sz="1000" lang="zh-TW" dirty="0">
                 <a:solidFill>
                   <a:srgbClr val="000000"/>
@@ -2473,7 +2539,7 @@
                 <a:ea typeface="Arial Unicode MS"/>
                 <a:cs typeface="Arial Unicode MS"/>
               </a:rPr>
-              <a:t>，這是我自己實測的中位數，各組跑出來會有出入：
+              <a:t>所以今天的題目是：在搞不定的環境裡，你能把界線推到多遠？
 </a:t>
             </a:r>
           </a:p>
@@ -2495,29 +2561,7 @@
                 <a:ea typeface="Arial Unicode MS"/>
                 <a:cs typeface="Arial Unicode MS"/>
               </a:rPr>
-              <a:t>預設的九條、二十五公尺、一百二十度，大約撐</a:t>
-            </a:r>
-            <a:r>
-              <a:rPr sz="1000" b="1" lang="zh-TW" dirty="0">
-                <a:solidFill>
-                  <a:srgbClr val="000000"/>
-                </a:solidFill>
-                <a:latin typeface="Arial Unicode MS"/>
-                <a:ea typeface="Arial Unicode MS"/>
-                <a:cs typeface="Arial Unicode MS"/>
-              </a:rPr>
-              <a:t>十八秒</a:t>
-            </a:r>
-            <a:r>
-              <a:rPr sz="1000" lang="zh-TW" dirty="0">
-                <a:solidFill>
-                  <a:srgbClr val="000000"/>
-                </a:solidFill>
-                <a:latin typeface="Arial Unicode MS"/>
-                <a:ea typeface="Arial Unicode MS"/>
-                <a:cs typeface="Arial Unicode MS"/>
-              </a:rPr>
-              <a:t>。
+              <a:t>操作上我要提醒一件事，而且會一直重複講。
 </a:t>
             </a:r>
           </a:p>
@@ -2531,6 +2575,17 @@
               </a:spcAft>
             </a:pPr>
             <a:r>
+              <a:rPr sz="1000" b="1" lang="zh-TW" dirty="0">
+                <a:solidFill>
+                  <a:srgbClr val="000000"/>
+                </a:solidFill>
+                <a:latin typeface="Arial Unicode MS"/>
+                <a:ea typeface="Arial Unicode MS"/>
+                <a:cs typeface="Arial Unicode MS"/>
+              </a:rPr>
+              <a:t>一次只改一個參數。</a:t>
+            </a:r>
+            <a:r>
               <a:rPr sz="1000" lang="zh-TW" dirty="0">
                 <a:solidFill>
                   <a:srgbClr val="000000"/>
@@ -2539,29 +2594,7 @@
                 <a:ea typeface="Arial Unicode MS"/>
                 <a:cs typeface="Arial Unicode MS"/>
               </a:rPr>
-              <a:t>調到三十條、四十五公尺、一百二十度，大約撐</a:t>
-            </a:r>
-            <a:r>
-              <a:rPr sz="1000" b="1" lang="zh-TW" dirty="0">
-                <a:solidFill>
-                  <a:srgbClr val="000000"/>
-                </a:solidFill>
-                <a:latin typeface="Arial Unicode MS"/>
-                <a:ea typeface="Arial Unicode MS"/>
-                <a:cs typeface="Arial Unicode MS"/>
-              </a:rPr>
-              <a:t>三十四秒</a:t>
-            </a:r>
-            <a:r>
-              <a:rPr sz="1000" lang="zh-TW" dirty="0">
-                <a:solidFill>
-                  <a:srgbClr val="000000"/>
-                </a:solidFill>
-                <a:latin typeface="Arial Unicode MS"/>
-                <a:ea typeface="Arial Unicode MS"/>
-                <a:cs typeface="Arial Unicode MS"/>
-              </a:rPr>
-              <a:t>，差不多快了一倍。
+              <a:t>三個一起改，你不會知道是哪一個起了作用——這就是第二節說的「掃參數」，一次掃一維。
 </a:t>
             </a:r>
           </a:p>
@@ -2583,7 +2616,7 @@
                 <a:ea typeface="Arial Unicode MS"/>
                 <a:cs typeface="Arial Unicode MS"/>
               </a:rPr>
-              <a:t>所以參數是真的有用的。但是——
+              <a:t>還有，回頭看第一節算的：時速五十，射線不能短於二十五公尺。如果有組別把射線長度拉到二十以下還在調射線數，請提醒他們那是白費力氣。
 </a:t>
             </a:r>
           </a:p>
@@ -2605,7 +2638,29 @@
                 <a:ea typeface="Arial Unicode MS"/>
                 <a:cs typeface="Arial Unicode MS"/>
               </a:rPr>
-              <a:t>後面還有一件事，我先留著，等上台那一頁再揭曉，讓各位自己去撞上那個發現。
+              <a:t>還有一件事：</a:t>
+            </a:r>
+            <a:r>
+              <a:rPr sz="1000" b="1" lang="zh-TW" dirty="0">
+                <a:solidFill>
+                  <a:srgbClr val="000000"/>
+                </a:solidFill>
+                <a:latin typeface="Arial Unicode MS"/>
+                <a:ea typeface="Arial Unicode MS"/>
+                <a:cs typeface="Arial Unicode MS"/>
+              </a:rPr>
+              <a:t>同一組參數至少要換三個種子試。</a:t>
+            </a:r>
+            <a:r>
+              <a:rPr sz="1000" lang="zh-TW" dirty="0">
+                <a:solidFill>
+                  <a:srgbClr val="000000"/>
+                </a:solidFill>
+                <a:latin typeface="Arial Unicode MS"/>
+                <a:ea typeface="Arial Unicode MS"/>
+                <a:cs typeface="Arial Unicode MS"/>
+              </a:rPr>
+              <a:t>一個種子只是一個路況，換個種子結論可能就反過來。
 </a:t>
             </a:r>
           </a:p>
@@ -2619,6 +2674,17 @@
               </a:spcAft>
             </a:pPr>
             <a:r>
+              <a:rPr sz="1000" b="1" lang="zh-TW" dirty="0">
+                <a:solidFill>
+                  <a:srgbClr val="000000"/>
+                </a:solidFill>
+                <a:latin typeface="Arial Unicode MS"/>
+                <a:ea typeface="Arial Unicode MS"/>
+                <a:cs typeface="Arial Unicode MS"/>
+              </a:rPr>
+              <a:t>我先給各位一組參考數字</a:t>
+            </a:r>
+            <a:r>
               <a:rPr sz="1000" lang="zh-TW" dirty="0">
                 <a:solidFill>
                   <a:srgbClr val="000000"/>
@@ -2627,7 +2693,7 @@
                 <a:ea typeface="Arial Unicode MS"/>
                 <a:cs typeface="Arial Unicode MS"/>
               </a:rPr>
-              <a:t>我會一組一組問：你現在改的是哪一個？為什麼改它？請各位講得出理由。
+              <a:t>，這是我用九個固定種子跑出來的中位數：
 </a:t>
             </a:r>
           </a:p>
@@ -2649,7 +2715,194 @@
                 <a:ea typeface="Arial Unicode MS"/>
                 <a:cs typeface="Arial Unicode MS"/>
               </a:rPr>
-              <a:t>十五分鐘後，每組要交出：撐最久的那個秒數，加上當時的三個數字。</a:t>
+              <a:t>預設的九條、二十五公尺、一百二十度，大約撐</a:t>
+            </a:r>
+            <a:r>
+              <a:rPr sz="1000" b="1" lang="zh-TW" dirty="0">
+                <a:solidFill>
+                  <a:srgbClr val="000000"/>
+                </a:solidFill>
+                <a:latin typeface="Arial Unicode MS"/>
+                <a:ea typeface="Arial Unicode MS"/>
+                <a:cs typeface="Arial Unicode MS"/>
+              </a:rPr>
+              <a:t>十五秒</a:t>
+            </a:r>
+            <a:r>
+              <a:rPr sz="1000" lang="zh-TW" dirty="0">
+                <a:solidFill>
+                  <a:srgbClr val="000000"/>
+                </a:solidFill>
+                <a:latin typeface="Arial Unicode MS"/>
+                <a:ea typeface="Arial Unicode MS"/>
+                <a:cs typeface="Arial Unicode MS"/>
+              </a:rPr>
+              <a:t>。
+</a:t>
+            </a:r>
+          </a:p>
+          <a:p>
+            <a:pPr algn="l">
+              <a:lnSpc>
+                <a:spcPct val="115000"/>
+              </a:lnSpc>
+              <a:spcAft>
+                <a:spcPts val="500"/>
+              </a:spcAft>
+            </a:pPr>
+            <a:r>
+              <a:rPr sz="1000" lang="zh-TW" dirty="0">
+                <a:solidFill>
+                  <a:srgbClr val="000000"/>
+                </a:solidFill>
+                <a:latin typeface="Arial Unicode MS"/>
+                <a:ea typeface="Arial Unicode MS"/>
+                <a:cs typeface="Arial Unicode MS"/>
+              </a:rPr>
+              <a:t>三個參數全部拉到最滿，六十條、一百二十公尺、一百八十度，大約撐</a:t>
+            </a:r>
+            <a:r>
+              <a:rPr sz="1000" b="1" lang="zh-TW" dirty="0">
+                <a:solidFill>
+                  <a:srgbClr val="000000"/>
+                </a:solidFill>
+                <a:latin typeface="Arial Unicode MS"/>
+                <a:ea typeface="Arial Unicode MS"/>
+                <a:cs typeface="Arial Unicode MS"/>
+              </a:rPr>
+              <a:t>二十一秒</a:t>
+            </a:r>
+            <a:r>
+              <a:rPr sz="1000" lang="zh-TW" dirty="0">
+                <a:solidFill>
+                  <a:srgbClr val="000000"/>
+                </a:solidFill>
+                <a:latin typeface="Arial Unicode MS"/>
+                <a:ea typeface="Arial Unicode MS"/>
+                <a:cs typeface="Arial Unicode MS"/>
+              </a:rPr>
+              <a:t>。
+</a:t>
+            </a:r>
+          </a:p>
+          <a:p>
+            <a:pPr algn="l">
+              <a:lnSpc>
+                <a:spcPct val="115000"/>
+              </a:lnSpc>
+              <a:spcAft>
+                <a:spcPts val="500"/>
+              </a:spcAft>
+            </a:pPr>
+            <a:r>
+              <a:rPr sz="1000" lang="zh-TW" dirty="0">
+                <a:solidFill>
+                  <a:srgbClr val="000000"/>
+                </a:solidFill>
+                <a:latin typeface="Arial Unicode MS"/>
+                <a:ea typeface="Arial Unicode MS"/>
+                <a:cs typeface="Arial Unicode MS"/>
+              </a:rPr>
+              <a:t>從十五到二十一。把規格拉到最滿，只多撐六秒。
+</a:t>
+            </a:r>
+          </a:p>
+          <a:p>
+            <a:pPr algn="l">
+              <a:lnSpc>
+                <a:spcPct val="115000"/>
+              </a:lnSpc>
+              <a:spcAft>
+                <a:spcPts val="500"/>
+              </a:spcAft>
+            </a:pPr>
+            <a:r>
+              <a:rPr sz="1000" lang="zh-TW" dirty="0">
+                <a:solidFill>
+                  <a:srgbClr val="000000"/>
+                </a:solidFill>
+                <a:latin typeface="Arial Unicode MS"/>
+                <a:ea typeface="Arial Unicode MS"/>
+                <a:cs typeface="Arial Unicode MS"/>
+              </a:rPr>
+              <a:t>所以今天各位真正要找的不是「哪一組數字最強」，是</a:t>
+            </a:r>
+            <a:r>
+              <a:rPr sz="1000" b="1" lang="zh-TW" dirty="0">
+                <a:solidFill>
+                  <a:srgbClr val="000000"/>
+                </a:solidFill>
+                <a:latin typeface="Arial Unicode MS"/>
+                <a:ea typeface="Arial Unicode MS"/>
+                <a:cs typeface="Arial Unicode MS"/>
+              </a:rPr>
+              <a:t>哪一個參數還有用、哪一個已經沒用了</a:t>
+            </a:r>
+            <a:r>
+              <a:rPr sz="1000" lang="zh-TW" dirty="0">
+                <a:solidFill>
+                  <a:srgbClr val="000000"/>
+                </a:solidFill>
+                <a:latin typeface="Arial Unicode MS"/>
+                <a:ea typeface="Arial Unicode MS"/>
+                <a:cs typeface="Arial Unicode MS"/>
+              </a:rPr>
+              <a:t>。後面那件事我先留著，等上台那一頁再揭曉。
+</a:t>
+            </a:r>
+          </a:p>
+          <a:p>
+            <a:pPr algn="l">
+              <a:lnSpc>
+                <a:spcPct val="115000"/>
+              </a:lnSpc>
+              <a:spcAft>
+                <a:spcPts val="500"/>
+              </a:spcAft>
+            </a:pPr>
+            <a:r>
+              <a:rPr sz="1000" lang="zh-TW" dirty="0">
+                <a:solidFill>
+                  <a:srgbClr val="000000"/>
+                </a:solidFill>
+                <a:latin typeface="Arial Unicode MS"/>
+                <a:ea typeface="Arial Unicode MS"/>
+                <a:cs typeface="Arial Unicode MS"/>
+              </a:rPr>
+              <a:t>我會一組一組問：你現在改的是哪一個？為什麼改它？請各位講得出理由。
+</a:t>
+            </a:r>
+          </a:p>
+          <a:p>
+            <a:pPr algn="l">
+              <a:lnSpc>
+                <a:spcPct val="115000"/>
+              </a:lnSpc>
+              <a:spcAft>
+                <a:spcPts val="500"/>
+              </a:spcAft>
+            </a:pPr>
+            <a:r>
+              <a:rPr sz="1000" lang="zh-TW" dirty="0">
+                <a:solidFill>
+                  <a:srgbClr val="000000"/>
+                </a:solidFill>
+                <a:latin typeface="Arial Unicode MS"/>
+                <a:ea typeface="Arial Unicode MS"/>
+                <a:cs typeface="Arial Unicode MS"/>
+              </a:rPr>
+              <a:t>十五分鐘後，每組要交出四樣東西：</a:t>
+            </a:r>
+            <a:r>
+              <a:rPr sz="1000" b="1" lang="zh-TW" dirty="0">
+                <a:solidFill>
+                  <a:srgbClr val="000000"/>
+                </a:solidFill>
+                <a:latin typeface="Arial Unicode MS"/>
+                <a:ea typeface="Arial Unicode MS"/>
+                <a:cs typeface="Arial Unicode MS"/>
+              </a:rPr>
+              <a:t>你們用的種子、撐最久的秒數、當時的三個數字，還有一句話——你改的哪一個參數最有用。</a:t>
             </a:r>
           </a:p>
         </p:txBody>
@@ -4519,7 +4772,7 @@
                 <a:ea typeface="Arial Unicode MS"/>
                 <a:cs typeface="Arial Unicode MS"/>
               </a:rPr>
-              <a:t>現在我要揭曉剛剛保留的那件事。先問全班一個問題。
+              <a:t>現在我要揭曉剛剛保留的那件事。我先問全班一個問題。
 </a:t>
             </a:r>
           </a:p>
@@ -4533,6 +4786,17 @@
               </a:spcAft>
             </a:pPr>
             <a:r>
+              <a:rPr sz="1000" b="1" lang="zh-TW" dirty="0">
+                <a:solidFill>
+                  <a:srgbClr val="000000"/>
+                </a:solidFill>
+                <a:latin typeface="Arial Unicode MS"/>
+                <a:ea typeface="Arial Unicode MS"/>
+                <a:cs typeface="Arial Unicode MS"/>
+              </a:rPr>
+              <a:t>有沒有哪一組，把射線長度愈拉愈長，秒數卻一動也不動？</a:t>
+            </a:r>
+            <a:r>
               <a:rPr sz="1000" lang="zh-TW" dirty="0">
                 <a:solidFill>
                   <a:srgbClr val="000000"/>
@@ -4541,7 +4805,7 @@
                 <a:ea typeface="Arial Unicode MS"/>
                 <a:cs typeface="Arial Unicode MS"/>
               </a:rPr>
-              <a:t>我先問各位：三個參數全部拉到最大的那一組，是不是撐最久的？
+              <a:t>
 </a:t>
             </a:r>
           </a:p>
@@ -4563,7 +4827,7 @@
                 <a:ea typeface="Arial Unicode MS"/>
                 <a:cs typeface="Arial Unicode MS"/>
               </a:rPr>
-              <a:t>通常不是，這個結果會讓大家意外。
+              <a:t>通常會有人舉手。這不是你們調錯，這是真的。
 </a:t>
             </a:r>
           </a:p>
@@ -4585,7 +4849,29 @@
                 <a:ea typeface="Arial Unicode MS"/>
                 <a:cs typeface="Arial Unicode MS"/>
               </a:rPr>
-              <a:t>我自己實測的結果是這樣。射線三十條、長度四十五公尺、張角一百二十度，大約撐三十四秒。三個全部拉到滿檔——六十條、六十公尺——只多撐到四十二秒，沒有再進步了。
+              <a:t>我用九個固定種子實測過：射線長度四十五公尺和一百二十公尺，九個種子跑出來的秒數</a:t>
+            </a:r>
+            <a:r>
+              <a:rPr sz="1000" b="1" lang="zh-TW" dirty="0">
+                <a:solidFill>
+                  <a:srgbClr val="000000"/>
+                </a:solidFill>
+                <a:latin typeface="Arial Unicode MS"/>
+                <a:ea typeface="Arial Unicode MS"/>
+                <a:cs typeface="Arial Unicode MS"/>
+              </a:rPr>
+              <a:t>一秒都沒有差，九個數字一模一樣</a:t>
+            </a:r>
+            <a:r>
+              <a:rPr sz="1000" lang="zh-TW" dirty="0">
+                <a:solidFill>
+                  <a:srgbClr val="000000"/>
+                </a:solidFill>
+                <a:latin typeface="Arial Unicode MS"/>
+                <a:ea typeface="Arial Unicode MS"/>
+                <a:cs typeface="Arial Unicode MS"/>
+              </a:rPr>
+              <a:t>。
 </a:t>
             </a:r>
           </a:p>
@@ -4607,7 +4893,7 @@
                 <a:ea typeface="Arial Unicode MS"/>
                 <a:cs typeface="Arial Unicode MS"/>
               </a:rPr>
-              <a:t>為什麼？回想第二節那張圖：</a:t>
+              <a:t>為什麼？回到第一節第七張那條煞停距離。這個場景的目標車速是四十公里，煞停距離十三點六公尺。所以</a:t>
             </a:r>
             <a:r>
               <a:rPr sz="1000" b="1" lang="zh-TW" dirty="0">
@@ -4618,7 +4904,7 @@
                 <a:ea typeface="Arial Unicode MS"/>
                 <a:cs typeface="Arial Unicode MS"/>
               </a:rPr>
-              <a:t>射線的數量是固定的，攤得愈廣就愈稀。</a:t>
+              <a:t>二十五公尺就已經夠了</a:t>
             </a:r>
             <a:r>
               <a:rPr sz="1000" lang="zh-TW" dirty="0">
@@ -4629,7 +4915,7 @@
                 <a:ea typeface="Arial Unicode MS"/>
                 <a:cs typeface="Arial Unicode MS"/>
               </a:rPr>
-              <a:t>把張角從一百二十度放大到一百五十度，聽起來看得更廣，可是我實測反而掉到二十七秒，因為每一條射線之間的縫變大了，機車就是從那個縫鑽進來的。反過來把張角收到九十度，也只剩二十二秒，因為側面來的車完全看不到。
+              <a:t>。超過那個門檻之後，再長的射線，車子根本用不到——它煞車的依據是「前面十三公尺內有沒有東西」，不是「我看得到一百二十公尺」。
 </a:t>
             </a:r>
           </a:p>
@@ -4651,7 +4937,29 @@
                 <a:ea typeface="Arial Unicode MS"/>
                 <a:cs typeface="Arial Unicode MS"/>
               </a:rPr>
-              <a:t>一百二十度左右是最好的。這個「甜蜜點」不是我告訴各位的，是各位自己調出來的。
+              <a:t>請大家把這一句寫下來：</a:t>
+            </a:r>
+            <a:r>
+              <a:rPr sz="1000" b="1" lang="zh-TW" dirty="0">
+                <a:solidFill>
+                  <a:srgbClr val="000000"/>
+                </a:solidFill>
+                <a:latin typeface="Arial Unicode MS"/>
+                <a:ea typeface="Arial Unicode MS"/>
+                <a:cs typeface="Arial Unicode MS"/>
+              </a:rPr>
+              <a:t>規格不是愈大愈好，是要剛好跨過那個門檻。</a:t>
+            </a:r>
+            <a:r>
+              <a:rPr sz="1000" lang="zh-TW" dirty="0">
+                <a:solidFill>
+                  <a:srgbClr val="000000"/>
+                </a:solidFill>
+                <a:latin typeface="Arial Unicode MS"/>
+                <a:ea typeface="Arial Unicode MS"/>
+                <a:cs typeface="Arial Unicode MS"/>
+              </a:rPr>
+              <a:t>跨過去之後再加，錢是白花的。這句話第五週讀真規格表的時候，我們會再用到一次。
 </a:t>
             </a:r>
           </a:p>
@@ -4673,29 +4981,7 @@
                 <a:ea typeface="Arial Unicode MS"/>
                 <a:cs typeface="Arial Unicode MS"/>
               </a:rPr>
-              <a:t>第三，這是最重要的一件事——</a:t>
-            </a:r>
-            <a:r>
-              <a:rPr sz="1000" b="1" lang="zh-TW" dirty="0">
-                <a:solidFill>
-                  <a:srgbClr val="000000"/>
-                </a:solidFill>
-                <a:latin typeface="Arial Unicode MS"/>
-                <a:ea typeface="Arial Unicode MS"/>
-                <a:cs typeface="Arial Unicode MS"/>
-              </a:rPr>
-              <a:t>把所有數字看成一片，它們會集中在某個範圍。</a:t>
-            </a:r>
-            <a:r>
-              <a:rPr sz="1000" lang="zh-TW" dirty="0">
-                <a:solidFill>
-                  <a:srgbClr val="000000"/>
-                </a:solidFill>
-                <a:latin typeface="Arial Unicode MS"/>
-                <a:ea typeface="Arial Unicode MS"/>
-                <a:cs typeface="Arial Unicode MS"/>
-              </a:rPr>
-              <a:t>
+              <a:t>那射線數和張角呢？有一點用，但是也不多。從九條加到六十條、張角從九十度開到一百八十度，中位數只從十五秒進步到二十一秒。
 </a:t>
             </a:r>
           </a:p>
@@ -4717,7 +5003,29 @@
                 <a:ea typeface="Arial Unicode MS"/>
                 <a:cs typeface="Arial Unicode MS"/>
               </a:rPr>
-              <a:t>我在白板上把範圍圈出來，例如射線二十到三十五條、長度三十到五十公尺、張角一百到一百四十度。
+              <a:t>第三，這是最重要的一件事——</a:t>
+            </a:r>
+            <a:r>
+              <a:rPr sz="1000" b="1" lang="zh-TW" dirty="0">
+                <a:solidFill>
+                  <a:srgbClr val="000000"/>
+                </a:solidFill>
+                <a:latin typeface="Arial Unicode MS"/>
+                <a:ea typeface="Arial Unicode MS"/>
+                <a:cs typeface="Arial Unicode MS"/>
+              </a:rPr>
+              <a:t>把所有數字看成一片，它們會集中在某個範圍。</a:t>
+            </a:r>
+            <a:r>
+              <a:rPr sz="1000" lang="zh-TW" dirty="0">
+                <a:solidFill>
+                  <a:srgbClr val="000000"/>
+                </a:solidFill>
+                <a:latin typeface="Arial Unicode MS"/>
+                <a:ea typeface="Arial Unicode MS"/>
+                <a:cs typeface="Arial Unicode MS"/>
+              </a:rPr>
+              <a:t>
 </a:t>
             </a:r>
           </a:p>
@@ -4739,29 +5047,7 @@
                 <a:ea typeface="Arial Unicode MS"/>
                 <a:cs typeface="Arial Unicode MS"/>
               </a:rPr>
-              <a:t>那個範圍有一個名字：</a:t>
-            </a:r>
-            <a:r>
-              <a:rPr sz="1000" b="1" lang="zh-TW" dirty="0">
-                <a:solidFill>
-                  <a:srgbClr val="000000"/>
-                </a:solidFill>
-                <a:latin typeface="Arial Unicode MS"/>
-                <a:ea typeface="Arial Unicode MS"/>
-                <a:cs typeface="Arial Unicode MS"/>
-              </a:rPr>
-              <a:t>河內尖峰的最低感測器規格。</a:t>
-            </a:r>
-            <a:r>
-              <a:rPr sz="1000" lang="zh-TW" dirty="0">
-                <a:solidFill>
-                  <a:srgbClr val="000000"/>
-                </a:solidFill>
-                <a:latin typeface="Arial Unicode MS"/>
-                <a:ea typeface="Arial Unicode MS"/>
-                <a:cs typeface="Arial Unicode MS"/>
-              </a:rPr>
-              <a:t>
+              <a:t>我在白板上把範圍圈出來，例如射線二十到三十五條、張角一百到一百四十度；長度那一欄我只圈一個下限，二十五公尺。
 </a:t>
             </a:r>
           </a:p>
@@ -4783,7 +5069,73 @@
                 <a:ea typeface="Arial Unicode MS"/>
                 <a:cs typeface="Arial Unicode MS"/>
               </a:rPr>
-              <a:t>它不是我給各位的，是全班一起掃出來的。
+              <a:t>那個範圍有一個名字：</a:t>
+            </a:r>
+            <a:r>
+              <a:rPr sz="1000" b="1" lang="zh-TW" dirty="0">
+                <a:solidFill>
+                  <a:srgbClr val="000000"/>
+                </a:solidFill>
+                <a:latin typeface="Arial Unicode MS"/>
+                <a:ea typeface="Arial Unicode MS"/>
+                <a:cs typeface="Arial Unicode MS"/>
+              </a:rPr>
+              <a:t>河內尖峰的最低感測器規格。</a:t>
+            </a:r>
+            <a:r>
+              <a:rPr sz="1000" lang="zh-TW" dirty="0">
+                <a:solidFill>
+                  <a:srgbClr val="000000"/>
+                </a:solidFill>
+                <a:latin typeface="Arial Unicode MS"/>
+                <a:ea typeface="Arial Unicode MS"/>
+                <a:cs typeface="Arial Unicode MS"/>
+              </a:rPr>
+              <a:t>
+</a:t>
+            </a:r>
+          </a:p>
+          <a:p>
+            <a:pPr algn="l">
+              <a:lnSpc>
+                <a:spcPct val="115000"/>
+              </a:lnSpc>
+              <a:spcAft>
+                <a:spcPts val="500"/>
+              </a:spcAft>
+            </a:pPr>
+            <a:r>
+              <a:rPr sz="1000" lang="zh-TW" dirty="0">
+                <a:solidFill>
+                  <a:srgbClr val="000000"/>
+                </a:solidFill>
+                <a:latin typeface="Arial Unicode MS"/>
+                <a:ea typeface="Arial Unicode MS"/>
+                <a:cs typeface="Arial Unicode MS"/>
+              </a:rPr>
+              <a:t>它不是我給各位的，是全班一起掃出來的。而且各位現在知道，這張表上有兩種欄位：</a:t>
+            </a:r>
+            <a:r>
+              <a:rPr sz="1000" b="1" lang="zh-TW" dirty="0">
+                <a:solidFill>
+                  <a:srgbClr val="000000"/>
+                </a:solidFill>
+                <a:latin typeface="Arial Unicode MS"/>
+                <a:ea typeface="Arial Unicode MS"/>
+                <a:cs typeface="Arial Unicode MS"/>
+              </a:rPr>
+              <a:t>有的是愈多愈好，有的只是一道門檻。</a:t>
+            </a:r>
+            <a:r>
+              <a:rPr sz="1000" lang="zh-TW" dirty="0">
+                <a:solidFill>
+                  <a:srgbClr val="000000"/>
+                </a:solidFill>
+                <a:latin typeface="Arial Unicode MS"/>
+                <a:ea typeface="Arial Unicode MS"/>
+                <a:cs typeface="Arial Unicode MS"/>
+              </a:rPr>
+              <a:t>
 </a:t>
             </a:r>
           </a:p>

--- a/第四週(10-01)/第四週_第3節_簡報.pptx
+++ b/第四週(10-01)/第四週_第3節_簡報.pptx
@@ -5826,8 +5826,8 @@
         </p:nvSpPr>
         <p:spPr>
           <a:xfrm>
-            <a:off x="6766560" y="-1371600"/>
-            <a:ext cx="4206240" cy="4206240"/>
+            <a:off x="6130753" y="-947729"/>
+            <a:ext cx="2987610" cy="2987610"/>
           </a:xfrm>
           <a:prstGeom prst="ellipse">
             <a:avLst/>
@@ -5851,8 +5851,8 @@
         </p:nvSpPr>
         <p:spPr>
           <a:xfrm>
-            <a:off x="7863840" y="3108960"/>
-            <a:ext cx="2560320" cy="2560320"/>
+            <a:off x="7104973" y="1520297"/>
+            <a:ext cx="1688649" cy="1688649"/>
           </a:xfrm>
           <a:prstGeom prst="ellipse">
             <a:avLst/>
@@ -5873,8 +5873,8 @@
         </p:nvSpPr>
         <p:spPr>
           <a:xfrm>
-            <a:off x="502920" y="1207008"/>
-            <a:ext cx="6949440" cy="274320"/>
+            <a:off x="1681812" y="883806"/>
+            <a:ext cx="4936051" cy="194844"/>
           </a:xfrm>
           <a:prstGeom prst="rect">
             <a:avLst/>
@@ -5890,7 +5890,7 @@
               <a:buNone/>
             </a:pPr>
             <a:r>
-              <a:rPr lang="en-US" sz="1250" b="1" dirty="0">
+              <a:rPr lang="en-US" sz="890" b="1" dirty="0">
                 <a:solidFill>
                   <a:srgbClr val="00A896"/>
                 </a:solidFill>
@@ -5900,7 +5900,7 @@
               </a:rPr>
               <a:t>MITUST · Nguyên lý xe tự lái · Tuần 4</a:t>
             </a:r>
-            <a:endParaRPr lang="en-US" sz="1250" dirty="0"/>
+            <a:endParaRPr lang="en-US" sz="890" dirty="0"/>
           </a:p>
         </p:txBody>
       </p:sp>
@@ -5912,8 +5912,8 @@
         </p:nvSpPr>
         <p:spPr>
           <a:xfrm>
-            <a:off x="502920" y="1572768"/>
-            <a:ext cx="7498080" cy="885499"/>
+            <a:off x="1681812" y="1143598"/>
+            <a:ext cx="5325739" cy="628953"/>
           </a:xfrm>
           <a:prstGeom prst="rect">
             <a:avLst/>
@@ -5932,7 +5932,7 @@
               <a:buNone/>
             </a:pPr>
             <a:r>
-              <a:rPr lang="en-US" sz="3400" b="1" dirty="0">
+              <a:rPr lang="en-US" sz="2410" b="1" dirty="0">
                 <a:solidFill>
                   <a:srgbClr val="FFFFFF"/>
                 </a:solidFill>
@@ -5942,7 +5942,7 @@
               </a:rPr>
               <a:t>Cấu hình cảm biến cho Hà Nội</a:t>
             </a:r>
-            <a:endParaRPr lang="en-US" sz="3400" dirty="0"/>
+            <a:endParaRPr lang="en-US" sz="2410" dirty="0"/>
           </a:p>
           <a:p>
             <a:pPr indent="0" marL="0">
@@ -5952,7 +5952,7 @@
               <a:buNone/>
             </a:pPr>
             <a:r>
-              <a:rPr lang="en-US" sz="1900" dirty="0">
+              <a:rPr lang="en-US" sz="1350" dirty="0">
                 <a:solidFill>
                   <a:srgbClr val="C8D6E2"/>
                 </a:solidFill>
@@ -5962,7 +5962,7 @@
               </a:rPr>
               <a:t>為河內配一組感測器</a:t>
             </a:r>
-            <a:endParaRPr lang="en-US" sz="3400" dirty="0"/>
+            <a:endParaRPr lang="en-US" sz="2410" dirty="0"/>
           </a:p>
         </p:txBody>
       </p:sp>
@@ -5974,8 +5974,8 @@
         </p:nvSpPr>
         <p:spPr>
           <a:xfrm>
-            <a:off x="502920" y="2787554"/>
-            <a:ext cx="1371600" cy="41148"/>
+            <a:off x="1681812" y="2006437"/>
+            <a:ext cx="974221" cy="29227"/>
           </a:xfrm>
           <a:prstGeom prst="rect">
             <a:avLst/>
@@ -5994,8 +5994,8 @@
         </p:nvSpPr>
         <p:spPr>
           <a:xfrm>
-            <a:off x="502920" y="2988722"/>
-            <a:ext cx="7132320" cy="833470"/>
+            <a:off x="1681812" y="2149323"/>
+            <a:ext cx="5065947" cy="591997"/>
           </a:xfrm>
           <a:prstGeom prst="rect">
             <a:avLst/>
@@ -6014,7 +6014,7 @@
               <a:buNone/>
             </a:pPr>
             <a:r>
-              <a:rPr lang="en-US" sz="1450" dirty="0">
+              <a:rPr lang="en-US" sz="1030" dirty="0">
                 <a:solidFill>
                   <a:srgbClr val="C8D6E2"/>
                 </a:solidFill>
@@ -6024,7 +6024,7 @@
               </a:rPr>
               <a:t>Bốn câu, hai người một nhóm, một tờ giấy. Đáp án mang thẳng sang đề tài cuối kỳ.</a:t>
             </a:r>
-            <a:endParaRPr lang="en-US" sz="1450" dirty="0"/>
+            <a:endParaRPr lang="en-US" sz="1030" dirty="0"/>
           </a:p>
           <a:p>
             <a:pPr indent="0" marL="0">
@@ -6034,7 +6034,7 @@
               <a:buNone/>
             </a:pPr>
             <a:r>
-              <a:rPr lang="en-US" sz="1250" dirty="0">
+              <a:rPr lang="en-US" sz="890" dirty="0">
                 <a:solidFill>
                   <a:srgbClr val="8AA0B4"/>
                 </a:solidFill>
@@ -6044,7 +6044,7 @@
               </a:rPr>
               <a:t>四題，兩人一組，一張紙。答案直接帶到期末專題。</a:t>
             </a:r>
-            <a:endParaRPr lang="en-US" sz="1450" dirty="0"/>
+            <a:endParaRPr lang="en-US" sz="1030" dirty="0"/>
           </a:p>
         </p:txBody>
       </p:sp>
@@ -6056,8 +6056,8 @@
         </p:nvSpPr>
         <p:spPr>
           <a:xfrm>
-            <a:off x="502920" y="3895344"/>
-            <a:ext cx="5943600" cy="384048"/>
+            <a:off x="1681812" y="2793278"/>
+            <a:ext cx="4221622" cy="272782"/>
           </a:xfrm>
           <a:prstGeom prst="roundRect">
             <a:avLst>
@@ -6078,8 +6078,8 @@
         </p:nvSpPr>
         <p:spPr>
           <a:xfrm>
-            <a:off x="630936" y="3941064"/>
-            <a:ext cx="5687568" cy="292608"/>
+            <a:off x="1772740" y="2825752"/>
+            <a:ext cx="4039768" cy="207834"/>
           </a:xfrm>
           <a:prstGeom prst="rect">
             <a:avLst/>
@@ -6095,7 +6095,7 @@
               <a:buNone/>
             </a:pPr>
             <a:r>
-              <a:rPr lang="en-US" sz="1050" b="1" dirty="0">
+              <a:rPr lang="en-US" sz="750" b="1" dirty="0">
                 <a:solidFill>
                   <a:srgbClr val="9FD6CE"/>
                 </a:solidFill>
@@ -6105,7 +6105,7 @@
               </a:rPr>
               <a:t>工具｜Công cụ： ch-neural.github.io/MITUST-Principles-of-Self-Driving-Cars/week4/sim/</a:t>
             </a:r>
-            <a:endParaRPr lang="en-US" sz="1050" dirty="0"/>
+            <a:endParaRPr lang="en-US" sz="750" dirty="0"/>
           </a:p>
         </p:txBody>
       </p:sp>
@@ -6117,8 +6117,8 @@
         </p:nvSpPr>
         <p:spPr>
           <a:xfrm>
-            <a:off x="502920" y="4370832"/>
-            <a:ext cx="6949440" cy="274320"/>
+            <a:off x="1681812" y="3131008"/>
+            <a:ext cx="4936051" cy="194844"/>
           </a:xfrm>
           <a:prstGeom prst="rect">
             <a:avLst/>
@@ -6134,7 +6134,7 @@
               <a:buNone/>
             </a:pPr>
             <a:r>
-              <a:rPr lang="en-US" sz="1150" dirty="0">
+              <a:rPr lang="en-US" sz="820" dirty="0">
                 <a:solidFill>
                   <a:srgbClr val="8AA0B4"/>
                 </a:solidFill>
@@ -6144,7 +6144,7 @@
               </a:rPr>
               <a:t>第四週 第 3 節　2026/10/01（四）11:10–12:00　CH Tseng</a:t>
             </a:r>
-            <a:endParaRPr lang="en-US" sz="1150" dirty="0"/>
+            <a:endParaRPr lang="en-US" sz="820" dirty="0"/>
           </a:p>
         </p:txBody>
       </p:sp>
@@ -6156,8 +6156,8 @@
         </p:nvSpPr>
         <p:spPr>
           <a:xfrm>
-            <a:off x="356616" y="310896"/>
-            <a:ext cx="2212848" cy="749808"/>
+            <a:off x="1577895" y="247315"/>
+            <a:ext cx="1571743" cy="532574"/>
           </a:xfrm>
           <a:prstGeom prst="roundRect">
             <a:avLst>
@@ -6186,8 +6186,8 @@
         </p:blipFill>
         <p:spPr>
           <a:xfrm>
-            <a:off x="502920" y="475488"/>
-            <a:ext cx="1920240" cy="424269"/>
+            <a:off x="1681812" y="364222"/>
+            <a:ext cx="1363909" cy="301350"/>
           </a:xfrm>
           <a:prstGeom prst="rect">
             <a:avLst/>
@@ -6234,8 +6234,8 @@
         </p:nvSpPr>
         <p:spPr>
           <a:xfrm>
-            <a:off x="6766560" y="-1371600"/>
-            <a:ext cx="4206240" cy="4206240"/>
+            <a:off x="6130753" y="-947729"/>
+            <a:ext cx="2987610" cy="2987610"/>
           </a:xfrm>
           <a:prstGeom prst="ellipse">
             <a:avLst/>
@@ -6259,8 +6259,8 @@
         </p:nvSpPr>
         <p:spPr>
           <a:xfrm>
-            <a:off x="7863840" y="3108960"/>
-            <a:ext cx="2560320" cy="2560320"/>
+            <a:off x="7104973" y="1520297"/>
+            <a:ext cx="1688649" cy="1688649"/>
           </a:xfrm>
           <a:prstGeom prst="ellipse">
             <a:avLst/>
@@ -6281,8 +6281,8 @@
         </p:nvSpPr>
         <p:spPr>
           <a:xfrm>
-            <a:off x="502920" y="475488"/>
-            <a:ext cx="6766560" cy="274320"/>
+            <a:off x="1681812" y="364222"/>
+            <a:ext cx="4806155" cy="194844"/>
           </a:xfrm>
           <a:prstGeom prst="rect">
             <a:avLst/>
@@ -6298,7 +6298,7 @@
               <a:buNone/>
             </a:pPr>
             <a:r>
-              <a:rPr lang="en-US" sz="1250" b="1" dirty="0">
+              <a:rPr lang="en-US" sz="890" b="1" dirty="0">
                 <a:solidFill>
                   <a:srgbClr val="FFB020"/>
                 </a:solidFill>
@@ -6308,7 +6308,7 @@
               </a:rPr>
               <a:t>Đáp án · 答案：四句都錯</a:t>
             </a:r>
-            <a:endParaRPr lang="en-US" sz="1250" dirty="0"/>
+            <a:endParaRPr lang="en-US" sz="890" dirty="0"/>
           </a:p>
         </p:txBody>
       </p:sp>
@@ -6320,8 +6320,8 @@
         </p:nvSpPr>
         <p:spPr>
           <a:xfrm>
-            <a:off x="502920" y="822960"/>
-            <a:ext cx="8046720" cy="1060704"/>
+            <a:off x="1681812" y="611024"/>
+            <a:ext cx="5715427" cy="753397"/>
           </a:xfrm>
           <a:prstGeom prst="rect">
             <a:avLst/>
@@ -6340,7 +6340,7 @@
               <a:buNone/>
             </a:pPr>
             <a:r>
-              <a:rPr lang="en-US" sz="2500" b="1" dirty="0">
+              <a:rPr lang="en-US" sz="1780" b="1" dirty="0">
                 <a:solidFill>
                   <a:srgbClr val="FFFFFF"/>
                 </a:solidFill>
@@ -6350,7 +6350,7 @@
               </a:rPr>
               <a:t>Bốn câu đều sai — và mỗi câu sai một kiểu</a:t>
             </a:r>
-            <a:endParaRPr lang="en-US" sz="2500" dirty="0"/>
+            <a:endParaRPr lang="en-US" sz="1780" dirty="0"/>
           </a:p>
           <a:p>
             <a:pPr indent="0" marL="0">
@@ -6360,7 +6360,7 @@
               <a:buNone/>
             </a:pPr>
             <a:r>
-              <a:rPr lang="en-US" sz="1500" dirty="0">
+              <a:rPr lang="en-US" sz="1070" dirty="0">
                 <a:solidFill>
                   <a:srgbClr val="AFC3D4"/>
                 </a:solidFill>
@@ -6370,7 +6370,7 @@
               </a:rPr>
               <a:t>四句都錯——而且每一句錯的方式不一樣</a:t>
             </a:r>
-            <a:endParaRPr lang="en-US" sz="2500" dirty="0"/>
+            <a:endParaRPr lang="en-US" sz="1780" dirty="0"/>
           </a:p>
         </p:txBody>
       </p:sp>
@@ -6382,8 +6382,8 @@
         </p:nvSpPr>
         <p:spPr>
           <a:xfrm>
-            <a:off x="502920" y="1975104"/>
-            <a:ext cx="45720" cy="512064"/>
+            <a:off x="1681812" y="1429370"/>
+            <a:ext cx="32474" cy="363709"/>
           </a:xfrm>
           <a:prstGeom prst="rect">
             <a:avLst/>
@@ -6402,8 +6402,8 @@
         </p:nvSpPr>
         <p:spPr>
           <a:xfrm>
-            <a:off x="722376" y="1938528"/>
-            <a:ext cx="7863840" cy="621792"/>
+            <a:off x="1837688" y="1403390"/>
+            <a:ext cx="5585531" cy="441647"/>
           </a:xfrm>
           <a:prstGeom prst="rect">
             <a:avLst/>
@@ -6422,7 +6422,7 @@
               <a:buNone/>
             </a:pPr>
             <a:r>
-              <a:rPr lang="en-US" sz="1350" b="1" dirty="0">
+              <a:rPr lang="en-US" sz="960" b="1" dirty="0">
                 <a:solidFill>
                   <a:srgbClr val="FFFFFF"/>
                 </a:solidFill>
@@ -6432,7 +6432,7 @@
               </a:rPr>
               <a:t>① Cần 11 tỉ dặm, mà phần lớn là đường thẳng buồn tẻ. Đơn vị đúng là kịch bản.</a:t>
             </a:r>
-            <a:endParaRPr lang="en-US" sz="1350" dirty="0"/>
+            <a:endParaRPr lang="en-US" sz="960" dirty="0"/>
           </a:p>
           <a:p>
             <a:pPr indent="0" marL="0">
@@ -6442,7 +6442,7 @@
               <a:buNone/>
             </a:pPr>
             <a:r>
-              <a:rPr lang="en-US" sz="1200" dirty="0">
+              <a:rPr lang="en-US" sz="850" dirty="0">
                 <a:solidFill>
                   <a:srgbClr val="AFC3D4"/>
                 </a:solidFill>
@@ -6452,7 +6452,7 @@
               </a:rPr>
               <a:t>① 要一百一十億英里，而且大多是無聊的直路。正確的單位是場景。</a:t>
             </a:r>
-            <a:endParaRPr lang="en-US" sz="1350" dirty="0"/>
+            <a:endParaRPr lang="en-US" sz="960" dirty="0"/>
           </a:p>
         </p:txBody>
       </p:sp>
@@ -6464,8 +6464,8 @@
         </p:nvSpPr>
         <p:spPr>
           <a:xfrm>
-            <a:off x="502920" y="2688336"/>
-            <a:ext cx="45720" cy="672713"/>
+            <a:off x="1681812" y="1935964"/>
+            <a:ext cx="32474" cy="477815"/>
           </a:xfrm>
           <a:prstGeom prst="rect">
             <a:avLst/>
@@ -6484,8 +6484,8 @@
         </p:nvSpPr>
         <p:spPr>
           <a:xfrm>
-            <a:off x="722376" y="2651760"/>
-            <a:ext cx="7863840" cy="782441"/>
+            <a:off x="1837688" y="1909985"/>
+            <a:ext cx="5585531" cy="555752"/>
           </a:xfrm>
           <a:prstGeom prst="rect">
             <a:avLst/>
@@ -6504,7 +6504,7 @@
               <a:buNone/>
             </a:pPr>
             <a:r>
-              <a:rPr lang="en-US" sz="1350" b="1" dirty="0">
+              <a:rPr lang="en-US" sz="960" b="1" dirty="0">
                 <a:solidFill>
                   <a:srgbClr val="FFFFFF"/>
                 </a:solidFill>
@@ -6514,7 +6514,7 @@
               </a:rPr>
               <a:t>② Ba khoảng cách: hình ảnh, hành vi, vật lý. Mô phỏng là cái sàng — qua được chỉ là lấy vé lên xe thật.</a:t>
             </a:r>
-            <a:endParaRPr lang="en-US" sz="1350" dirty="0"/>
+            <a:endParaRPr lang="en-US" sz="960" dirty="0"/>
           </a:p>
           <a:p>
             <a:pPr indent="0" marL="0">
@@ -6524,7 +6524,7 @@
               <a:buNone/>
             </a:pPr>
             <a:r>
-              <a:rPr lang="en-US" sz="1200" dirty="0">
+              <a:rPr lang="en-US" sz="850" dirty="0">
                 <a:solidFill>
                   <a:srgbClr val="AFC3D4"/>
                 </a:solidFill>
@@ -6534,7 +6534,7 @@
               </a:rPr>
               <a:t>② 三種落差：外觀、行為、物理。模擬是一個篩子——通過只是拿到上真車的門票。</a:t>
             </a:r>
-            <a:endParaRPr lang="en-US" sz="1350" dirty="0"/>
+            <a:endParaRPr lang="en-US" sz="960" dirty="0"/>
           </a:p>
         </p:txBody>
       </p:sp>
@@ -6546,8 +6546,8 @@
         </p:nvSpPr>
         <p:spPr>
           <a:xfrm>
-            <a:off x="502920" y="3562217"/>
-            <a:ext cx="45720" cy="672713"/>
+            <a:off x="1681812" y="2556665"/>
+            <a:ext cx="32474" cy="477815"/>
           </a:xfrm>
           <a:prstGeom prst="rect">
             <a:avLst/>
@@ -6566,8 +6566,8 @@
         </p:nvSpPr>
         <p:spPr>
           <a:xfrm>
-            <a:off x="722376" y="3525641"/>
-            <a:ext cx="7863840" cy="782441"/>
+            <a:off x="1837688" y="2530685"/>
+            <a:ext cx="5585531" cy="555752"/>
           </a:xfrm>
           <a:prstGeom prst="rect">
             <a:avLst/>
@@ -6586,7 +6586,7 @@
               <a:buNone/>
             </a:pPr>
             <a:r>
-              <a:rPr lang="en-US" sz="1350" b="1" dirty="0">
+              <a:rPr lang="en-US" sz="960" b="1" dirty="0">
                 <a:solidFill>
                   <a:srgbClr val="FFFFFF"/>
                 </a:solidFill>
@@ -6596,7 +6596,7 @@
               </a:rPr>
               <a:t>③ Góc rộng thì cùng số tia đó thưa đi; tia nhiều thì máy tính chậm lại. Xe thật là mấy cảm biến chia việc.</a:t>
             </a:r>
-            <a:endParaRPr lang="en-US" sz="1350" dirty="0"/>
+            <a:endParaRPr lang="en-US" sz="960" dirty="0"/>
           </a:p>
           <a:p>
             <a:pPr indent="0" marL="0">
@@ -6606,7 +6606,7 @@
               <a:buNone/>
             </a:pPr>
             <a:r>
-              <a:rPr lang="en-US" sz="1200" dirty="0">
+              <a:rPr lang="en-US" sz="850" dirty="0">
                 <a:solidFill>
                   <a:srgbClr val="AFC3D4"/>
                 </a:solidFill>
@@ -6616,7 +6616,7 @@
               </a:rPr>
               <a:t>③ 張角大，同樣的射線就變稀；射線多，電腦算得慢。真車是好幾顆感測器分工。</a:t>
             </a:r>
-            <a:endParaRPr lang="en-US" sz="1350" dirty="0"/>
+            <a:endParaRPr lang="en-US" sz="960" dirty="0"/>
           </a:p>
         </p:txBody>
       </p:sp>
@@ -6628,8 +6628,8 @@
         </p:nvSpPr>
         <p:spPr>
           <a:xfrm>
-            <a:off x="109728" y="4791456"/>
-            <a:ext cx="822960" cy="256032"/>
+            <a:off x="1402536" y="3390800"/>
+            <a:ext cx="584532" cy="181855"/>
           </a:xfrm>
           <a:prstGeom prst="rect">
             <a:avLst/>
@@ -6645,7 +6645,7 @@
               <a:buNone/>
             </a:pPr>
             <a:r>
-              <a:rPr lang="en-US" sz="900" dirty="0">
+              <a:rPr lang="en-US" sz="640" dirty="0">
                 <a:solidFill>
                   <a:srgbClr val="9FB3C8"/>
                 </a:solidFill>
@@ -6655,7 +6655,7 @@
               </a:rPr>
               <a:t>10 / 11</a:t>
             </a:r>
-            <a:endParaRPr lang="en-US" sz="900" dirty="0"/>
+            <a:endParaRPr lang="en-US" sz="640" dirty="0"/>
           </a:p>
         </p:txBody>
       </p:sp>
@@ -6667,8 +6667,8 @@
         </p:nvSpPr>
         <p:spPr>
           <a:xfrm>
-            <a:off x="960120" y="4791456"/>
-            <a:ext cx="2011680" cy="256032"/>
+            <a:off x="2006553" y="3390800"/>
+            <a:ext cx="1428857" cy="181855"/>
           </a:xfrm>
           <a:prstGeom prst="rect">
             <a:avLst/>
@@ -6684,7 +6684,7 @@
               <a:buNone/>
             </a:pPr>
             <a:r>
-              <a:rPr lang="en-US" sz="900" dirty="0">
+              <a:rPr lang="en-US" sz="640" dirty="0">
                 <a:solidFill>
                   <a:srgbClr val="9FB3C8"/>
                 </a:solidFill>
@@ -6694,7 +6694,7 @@
               </a:rPr>
               <a:t>Tiết 3 · 第 3 節</a:t>
             </a:r>
-            <a:endParaRPr lang="en-US" sz="900" dirty="0"/>
+            <a:endParaRPr lang="en-US" sz="640" dirty="0"/>
           </a:p>
         </p:txBody>
       </p:sp>
@@ -6738,8 +6738,8 @@
         </p:nvSpPr>
         <p:spPr>
           <a:xfrm>
-            <a:off x="6766560" y="-1371600"/>
-            <a:ext cx="4206240" cy="4206240"/>
+            <a:off x="6130753" y="-947729"/>
+            <a:ext cx="2987610" cy="2987610"/>
           </a:xfrm>
           <a:prstGeom prst="ellipse">
             <a:avLst/>
@@ -6763,8 +6763,8 @@
         </p:nvSpPr>
         <p:spPr>
           <a:xfrm>
-            <a:off x="7863840" y="3108960"/>
-            <a:ext cx="2560320" cy="2560320"/>
+            <a:off x="7104973" y="1520297"/>
+            <a:ext cx="1688649" cy="1688649"/>
           </a:xfrm>
           <a:prstGeom prst="ellipse">
             <a:avLst/>
@@ -6785,8 +6785,8 @@
         </p:nvSpPr>
         <p:spPr>
           <a:xfrm>
-            <a:off x="502920" y="475488"/>
-            <a:ext cx="6766560" cy="274320"/>
+            <a:off x="1681812" y="364222"/>
+            <a:ext cx="4806155" cy="194844"/>
           </a:xfrm>
           <a:prstGeom prst="rect">
             <a:avLst/>
@@ -6802,7 +6802,7 @@
               <a:buNone/>
             </a:pPr>
             <a:r>
-              <a:rPr lang="en-US" sz="1250" b="1" dirty="0">
+              <a:rPr lang="en-US" sz="890" b="1" dirty="0">
                 <a:solidFill>
                   <a:srgbClr val="FFB020"/>
                 </a:solidFill>
@@ -6812,7 +6812,7 @@
               </a:rPr>
               <a:t>Tuần sau · 下週預告</a:t>
             </a:r>
-            <a:endParaRPr lang="en-US" sz="1250" dirty="0"/>
+            <a:endParaRPr lang="en-US" sz="890" dirty="0"/>
           </a:p>
         </p:txBody>
       </p:sp>
@@ -6824,8 +6824,8 @@
         </p:nvSpPr>
         <p:spPr>
           <a:xfrm>
-            <a:off x="502920" y="822960"/>
-            <a:ext cx="8046720" cy="1060704"/>
+            <a:off x="1681812" y="611024"/>
+            <a:ext cx="5715427" cy="753397"/>
           </a:xfrm>
           <a:prstGeom prst="rect">
             <a:avLst/>
@@ -6844,7 +6844,7 @@
               <a:buNone/>
             </a:pPr>
             <a:r>
-              <a:rPr lang="en-US" sz="2500" b="1" dirty="0">
+              <a:rPr lang="en-US" sz="1780" b="1" dirty="0">
                 <a:solidFill>
                   <a:srgbClr val="FFFFFF"/>
                 </a:solidFill>
@@ -6854,7 +6854,7 @@
               </a:rPr>
               <a:t>Tuần 5, 8/10: vào chương 3, cảm biến</a:t>
             </a:r>
-            <a:endParaRPr lang="en-US" sz="2500" dirty="0"/>
+            <a:endParaRPr lang="en-US" sz="1780" dirty="0"/>
           </a:p>
           <a:p>
             <a:pPr indent="0" marL="0">
@@ -6864,7 +6864,7 @@
               <a:buNone/>
             </a:pPr>
             <a:r>
-              <a:rPr lang="en-US" sz="1500" dirty="0">
+              <a:rPr lang="en-US" sz="1070" dirty="0">
                 <a:solidFill>
                   <a:srgbClr val="AFC3D4"/>
                 </a:solidFill>
@@ -6874,7 +6874,7 @@
               </a:rPr>
               <a:t>第 5 週，10 月 8 日：進第三章，感測器</a:t>
             </a:r>
-            <a:endParaRPr lang="en-US" sz="2500" dirty="0"/>
+            <a:endParaRPr lang="en-US" sz="1780" dirty="0"/>
           </a:p>
         </p:txBody>
       </p:sp>
@@ -6886,8 +6886,8 @@
         </p:nvSpPr>
         <p:spPr>
           <a:xfrm>
-            <a:off x="502920" y="1975104"/>
-            <a:ext cx="45720" cy="512064"/>
+            <a:off x="1681812" y="1429370"/>
+            <a:ext cx="32474" cy="363709"/>
           </a:xfrm>
           <a:prstGeom prst="rect">
             <a:avLst/>
@@ -6906,8 +6906,8 @@
         </p:nvSpPr>
         <p:spPr>
           <a:xfrm>
-            <a:off x="722376" y="1938528"/>
-            <a:ext cx="7863840" cy="621792"/>
+            <a:off x="1837688" y="1403390"/>
+            <a:ext cx="5585531" cy="441647"/>
           </a:xfrm>
           <a:prstGeom prst="rect">
             <a:avLst/>
@@ -6926,7 +6926,7 @@
               <a:buNone/>
             </a:pPr>
             <a:r>
-              <a:rPr lang="en-US" sz="1350" b="1" dirty="0">
+              <a:rPr lang="en-US" sz="960" b="1" dirty="0">
                 <a:solidFill>
                   <a:srgbClr val="FFFFFF"/>
                 </a:solidFill>
@@ -6936,7 +6936,7 @@
               </a:rPr>
               <a:t>Nộp: phiếu bài tập tuần 3 và tuần 4, mỗi nhóm một tờ.</a:t>
             </a:r>
-            <a:endParaRPr lang="en-US" sz="1350" dirty="0"/>
+            <a:endParaRPr lang="en-US" sz="960" dirty="0"/>
           </a:p>
           <a:p>
             <a:pPr indent="0" marL="0">
@@ -6946,7 +6946,7 @@
               <a:buNone/>
             </a:pPr>
             <a:r>
-              <a:rPr lang="en-US" sz="1200" dirty="0">
+              <a:rPr lang="en-US" sz="850" dirty="0">
                 <a:solidFill>
                   <a:srgbClr val="AFC3D4"/>
                 </a:solidFill>
@@ -6956,7 +6956,7 @@
               </a:rPr>
               <a:t>要交：第三週和第四週的任務單，每組一張。</a:t>
             </a:r>
-            <a:endParaRPr lang="en-US" sz="1350" dirty="0"/>
+            <a:endParaRPr lang="en-US" sz="960" dirty="0"/>
           </a:p>
         </p:txBody>
       </p:sp>
@@ -6968,8 +6968,8 @@
         </p:nvSpPr>
         <p:spPr>
           <a:xfrm>
-            <a:off x="502920" y="2688336"/>
-            <a:ext cx="45720" cy="512064"/>
+            <a:off x="1681812" y="1935964"/>
+            <a:ext cx="32474" cy="363709"/>
           </a:xfrm>
           <a:prstGeom prst="rect">
             <a:avLst/>
@@ -6988,8 +6988,8 @@
         </p:nvSpPr>
         <p:spPr>
           <a:xfrm>
-            <a:off x="722376" y="2651760"/>
-            <a:ext cx="7863840" cy="621792"/>
+            <a:off x="1837688" y="1909985"/>
+            <a:ext cx="5585531" cy="441647"/>
           </a:xfrm>
           <a:prstGeom prst="rect">
             <a:avLst/>
@@ -7008,7 +7008,7 @@
               <a:buNone/>
             </a:pPr>
             <a:r>
-              <a:rPr lang="en-US" sz="1350" b="1" dirty="0">
+              <a:rPr lang="en-US" sz="960" b="1" dirty="0">
                 <a:solidFill>
                   <a:srgbClr val="FFFFFF"/>
                 </a:solidFill>
@@ -7018,7 +7018,7 @@
               </a:rPr>
               <a:t>Làm: câu trắc nghiệm ở 2.8 trong giáo trình. Đáp án ở phụ lục 2.</a:t>
             </a:r>
-            <a:endParaRPr lang="en-US" sz="1350" dirty="0"/>
+            <a:endParaRPr lang="en-US" sz="960" dirty="0"/>
           </a:p>
           <a:p>
             <a:pPr indent="0" marL="0">
@@ -7028,7 +7028,7 @@
               <a:buNone/>
             </a:pPr>
             <a:r>
-              <a:rPr lang="en-US" sz="1200" dirty="0">
+              <a:rPr lang="en-US" sz="850" dirty="0">
                 <a:solidFill>
                   <a:srgbClr val="AFC3D4"/>
                 </a:solidFill>
@@ -7038,7 +7038,7 @@
               </a:rPr>
               <a:t>要做：講義 2.8 的選擇題。附錄二有答案。</a:t>
             </a:r>
-            <a:endParaRPr lang="en-US" sz="1350" dirty="0"/>
+            <a:endParaRPr lang="en-US" sz="960" dirty="0"/>
           </a:p>
         </p:txBody>
       </p:sp>
@@ -7050,8 +7050,8 @@
         </p:nvSpPr>
         <p:spPr>
           <a:xfrm>
-            <a:off x="502920" y="3401568"/>
-            <a:ext cx="45720" cy="512064"/>
+            <a:off x="1681812" y="2442559"/>
+            <a:ext cx="32474" cy="363709"/>
           </a:xfrm>
           <a:prstGeom prst="rect">
             <a:avLst/>
@@ -7070,8 +7070,8 @@
         </p:nvSpPr>
         <p:spPr>
           <a:xfrm>
-            <a:off x="722376" y="3364992"/>
-            <a:ext cx="7863840" cy="621792"/>
+            <a:off x="1837688" y="2416580"/>
+            <a:ext cx="5585531" cy="441647"/>
           </a:xfrm>
           <a:prstGeom prst="rect">
             <a:avLst/>
@@ -7090,7 +7090,7 @@
               <a:buNone/>
             </a:pPr>
             <a:r>
-              <a:rPr lang="en-US" sz="1350" b="1" dirty="0">
+              <a:rPr lang="en-US" sz="960" b="1" dirty="0">
                 <a:solidFill>
                   <a:srgbClr val="FFFFFF"/>
                 </a:solidFill>
@@ -7100,7 +7100,7 @@
               </a:rPr>
               <a:t>Mang: một ảnh chụp bằng điện thoại — một tình huống bạn nghĩ camera sẽ nhìn không rõ.</a:t>
             </a:r>
-            <a:endParaRPr lang="en-US" sz="1350" dirty="0"/>
+            <a:endParaRPr lang="en-US" sz="960" dirty="0"/>
           </a:p>
           <a:p>
             <a:pPr indent="0" marL="0">
@@ -7110,7 +7110,7 @@
               <a:buNone/>
             </a:pPr>
             <a:r>
-              <a:rPr lang="en-US" sz="1200" dirty="0">
+              <a:rPr lang="en-US" sz="850" dirty="0">
                 <a:solidFill>
                   <a:srgbClr val="AFC3D4"/>
                 </a:solidFill>
@@ -7120,7 +7120,7 @@
               </a:rPr>
               <a:t>要帶：用手機拍一張你覺得「相機會看不清楚」的路況。</a:t>
             </a:r>
-            <a:endParaRPr lang="en-US" sz="1350" dirty="0"/>
+            <a:endParaRPr lang="en-US" sz="960" dirty="0"/>
           </a:p>
         </p:txBody>
       </p:sp>
@@ -7132,8 +7132,8 @@
         </p:nvSpPr>
         <p:spPr>
           <a:xfrm>
-            <a:off x="109728" y="4791456"/>
-            <a:ext cx="822960" cy="256032"/>
+            <a:off x="1402536" y="3390800"/>
+            <a:ext cx="584532" cy="181855"/>
           </a:xfrm>
           <a:prstGeom prst="rect">
             <a:avLst/>
@@ -7149,7 +7149,7 @@
               <a:buNone/>
             </a:pPr>
             <a:r>
-              <a:rPr lang="en-US" sz="900" dirty="0">
+              <a:rPr lang="en-US" sz="640" dirty="0">
                 <a:solidFill>
                   <a:srgbClr val="9FB3C8"/>
                 </a:solidFill>
@@ -7159,7 +7159,7 @@
               </a:rPr>
               <a:t>11 / 11</a:t>
             </a:r>
-            <a:endParaRPr lang="en-US" sz="900" dirty="0"/>
+            <a:endParaRPr lang="en-US" sz="640" dirty="0"/>
           </a:p>
         </p:txBody>
       </p:sp>
@@ -7171,8 +7171,8 @@
         </p:nvSpPr>
         <p:spPr>
           <a:xfrm>
-            <a:off x="960120" y="4791456"/>
-            <a:ext cx="2011680" cy="256032"/>
+            <a:off x="2006553" y="3390800"/>
+            <a:ext cx="1428857" cy="181855"/>
           </a:xfrm>
           <a:prstGeom prst="rect">
             <a:avLst/>
@@ -7188,7 +7188,7 @@
               <a:buNone/>
             </a:pPr>
             <a:r>
-              <a:rPr lang="en-US" sz="900" dirty="0">
+              <a:rPr lang="en-US" sz="640" dirty="0">
                 <a:solidFill>
                   <a:srgbClr val="9FB3C8"/>
                 </a:solidFill>
@@ -7198,7 +7198,7 @@
               </a:rPr>
               <a:t>Tiết 3 · 第 3 節</a:t>
             </a:r>
-            <a:endParaRPr lang="en-US" sz="900" dirty="0"/>
+            <a:endParaRPr lang="en-US" sz="640" dirty="0"/>
           </a:p>
         </p:txBody>
       </p:sp>
@@ -7235,8 +7235,8 @@
         </p:nvSpPr>
         <p:spPr>
           <a:xfrm>
-            <a:off x="502920" y="292608"/>
-            <a:ext cx="8138160" cy="841248"/>
+            <a:off x="1681812" y="234326"/>
+            <a:ext cx="5780375" cy="597522"/>
           </a:xfrm>
           <a:prstGeom prst="rect">
             <a:avLst/>
@@ -7255,7 +7255,7 @@
               <a:buNone/>
             </a:pPr>
             <a:r>
-              <a:rPr lang="en-US" sz="2200" b="1" dirty="0">
+              <a:rPr lang="en-US" sz="1560" b="1" dirty="0">
                 <a:solidFill>
                   <a:srgbClr val="0B1F3A"/>
                 </a:solidFill>
@@ -7265,7 +7265,7 @@
               </a:rPr>
               <a:t>Bốn câu, làm theo thứ tự</a:t>
             </a:r>
-            <a:endParaRPr lang="en-US" sz="2200" dirty="0"/>
+            <a:endParaRPr lang="en-US" sz="1560" dirty="0"/>
           </a:p>
           <a:p>
             <a:pPr indent="0" marL="0">
@@ -7275,7 +7275,7 @@
               <a:buNone/>
             </a:pPr>
             <a:r>
-              <a:rPr lang="en-US" sz="1350" dirty="0">
+              <a:rPr lang="en-US" sz="960" dirty="0">
                 <a:solidFill>
                   <a:srgbClr val="5F7183"/>
                 </a:solidFill>
@@ -7285,7 +7285,7 @@
               </a:rPr>
               <a:t>四題，照順序做</a:t>
             </a:r>
-            <a:endParaRPr lang="en-US" sz="2200" dirty="0"/>
+            <a:endParaRPr lang="en-US" sz="1560" dirty="0"/>
           </a:p>
         </p:txBody>
       </p:sp>
@@ -7297,8 +7297,8 @@
         </p:nvSpPr>
         <p:spPr>
           <a:xfrm>
-            <a:off x="502920" y="1133856"/>
-            <a:ext cx="1828800" cy="2724912"/>
+            <a:off x="1681812" y="831848"/>
+            <a:ext cx="1298961" cy="1935452"/>
           </a:xfrm>
           <a:prstGeom prst="roundRect">
             <a:avLst>
@@ -7331,8 +7331,8 @@
         </p:nvSpPr>
         <p:spPr>
           <a:xfrm>
-            <a:off x="1179576" y="1316736"/>
-            <a:ext cx="475488" cy="475488"/>
+            <a:off x="2162428" y="961744"/>
+            <a:ext cx="337730" cy="337730"/>
           </a:xfrm>
           <a:prstGeom prst="ellipse">
             <a:avLst/>
@@ -7351,8 +7351,8 @@
         </p:nvSpPr>
         <p:spPr>
           <a:xfrm>
-            <a:off x="1179576" y="1417320"/>
-            <a:ext cx="475488" cy="274320"/>
+            <a:off x="2162428" y="1033187"/>
+            <a:ext cx="337730" cy="194844"/>
           </a:xfrm>
           <a:prstGeom prst="rect">
             <a:avLst/>
@@ -7368,7 +7368,7 @@
               <a:buNone/>
             </a:pPr>
             <a:r>
-              <a:rPr lang="en-US" sz="1500" b="1" dirty="0">
+              <a:rPr lang="en-US" sz="1070" b="1" dirty="0">
                 <a:solidFill>
                   <a:srgbClr val="FFFFFF"/>
                 </a:solidFill>
@@ -7378,7 +7378,7 @@
               </a:rPr>
               <a:t>1</a:t>
             </a:r>
-            <a:endParaRPr lang="en-US" sz="1500" dirty="0"/>
+            <a:endParaRPr lang="en-US" sz="1070" dirty="0"/>
           </a:p>
         </p:txBody>
       </p:sp>
@@ -7390,8 +7390,8 @@
         </p:nvSpPr>
         <p:spPr>
           <a:xfrm>
-            <a:off x="630936" y="1883664"/>
-            <a:ext cx="1572768" cy="658368"/>
+            <a:off x="1772740" y="1364422"/>
+            <a:ext cx="1117106" cy="467626"/>
           </a:xfrm>
           <a:prstGeom prst="rect">
             <a:avLst/>
@@ -7410,7 +7410,7 @@
               <a:buNone/>
             </a:pPr>
             <a:r>
-              <a:rPr lang="en-US" sz="1400" b="1" dirty="0">
+              <a:rPr lang="en-US" sz="990" b="1" dirty="0">
                 <a:solidFill>
                   <a:srgbClr val="0B1F3A"/>
                 </a:solidFill>
@@ -7420,7 +7420,7 @@
               </a:rPr>
               <a:t>Nhìn nó đâm</a:t>
             </a:r>
-            <a:endParaRPr lang="en-US" sz="1400" dirty="0"/>
+            <a:endParaRPr lang="en-US" sz="990" dirty="0"/>
           </a:p>
           <a:p>
             <a:pPr algn="ctr" indent="0" marL="0">
@@ -7430,7 +7430,7 @@
               <a:buNone/>
             </a:pPr>
             <a:r>
-              <a:rPr lang="en-US" sz="1200" dirty="0">
+              <a:rPr lang="en-US" sz="850" dirty="0">
                 <a:solidFill>
                   <a:srgbClr val="007F72"/>
                 </a:solidFill>
@@ -7440,7 +7440,7 @@
               </a:rPr>
               <a:t>先看它怎麼撞</a:t>
             </a:r>
-            <a:endParaRPr lang="en-US" sz="1400" dirty="0"/>
+            <a:endParaRPr lang="en-US" sz="990" dirty="0"/>
           </a:p>
         </p:txBody>
       </p:sp>
@@ -7452,8 +7452,8 @@
         </p:nvSpPr>
         <p:spPr>
           <a:xfrm>
-            <a:off x="630936" y="2578608"/>
-            <a:ext cx="1572768" cy="1170432"/>
+            <a:off x="1772740" y="1858027"/>
+            <a:ext cx="1117106" cy="831335"/>
           </a:xfrm>
           <a:prstGeom prst="rect">
             <a:avLst/>
@@ -7472,7 +7472,7 @@
               <a:buNone/>
             </a:pPr>
             <a:r>
-              <a:rPr lang="en-US" sz="1050" dirty="0">
+              <a:rPr lang="en-US" sz="750" dirty="0">
                 <a:solidFill>
                   <a:srgbClr val="5F7183"/>
                 </a:solidFill>
@@ -7482,7 +7482,7 @@
               </a:rPr>
               <a:t>Chưa đổi gì cả</a:t>
             </a:r>
-            <a:endParaRPr lang="en-US" sz="1050" dirty="0"/>
+            <a:endParaRPr lang="en-US" sz="750" dirty="0"/>
           </a:p>
           <a:p>
             <a:pPr algn="ctr" indent="0" marL="0">
@@ -7492,7 +7492,7 @@
               <a:buNone/>
             </a:pPr>
             <a:r>
-              <a:rPr lang="en-US" sz="1050" dirty="0">
+              <a:rPr lang="en-US" sz="750" dirty="0">
                 <a:solidFill>
                   <a:srgbClr val="5F7183"/>
                 </a:solidFill>
@@ -7502,7 +7502,7 @@
               </a:rPr>
               <a:t>3 lần va chạm đầu</a:t>
             </a:r>
-            <a:endParaRPr lang="en-US" sz="1050" dirty="0"/>
+            <a:endParaRPr lang="en-US" sz="750" dirty="0"/>
           </a:p>
           <a:p>
             <a:pPr algn="ctr" indent="0" marL="0">
@@ -7512,7 +7512,7 @@
               <a:buNone/>
             </a:pPr>
             <a:r>
-              <a:rPr lang="en-US" sz="950" dirty="0">
+              <a:rPr lang="en-US" sz="670" dirty="0">
                 <a:solidFill>
                   <a:srgbClr val="5F7183"/>
                 </a:solidFill>
@@ -7522,7 +7522,7 @@
               </a:rPr>
               <a:t>什麼都不要改</a:t>
             </a:r>
-            <a:endParaRPr lang="en-US" sz="1050" dirty="0"/>
+            <a:endParaRPr lang="en-US" sz="750" dirty="0"/>
           </a:p>
           <a:p>
             <a:pPr algn="ctr" indent="0" marL="0">
@@ -7532,7 +7532,7 @@
               <a:buNone/>
             </a:pPr>
             <a:r>
-              <a:rPr lang="en-US" sz="950" dirty="0">
+              <a:rPr lang="en-US" sz="670" dirty="0">
                 <a:solidFill>
                   <a:srgbClr val="5F7183"/>
                 </a:solidFill>
@@ -7542,7 +7542,7 @@
               </a:rPr>
               <a:t>記前三次</a:t>
             </a:r>
-            <a:endParaRPr lang="en-US" sz="1050" dirty="0"/>
+            <a:endParaRPr lang="en-US" sz="750" dirty="0"/>
           </a:p>
         </p:txBody>
       </p:sp>
@@ -7554,8 +7554,8 @@
         </p:nvSpPr>
         <p:spPr>
           <a:xfrm>
-            <a:off x="2331720" y="2048256"/>
-            <a:ext cx="274320" cy="365760"/>
+            <a:off x="2980773" y="1481328"/>
+            <a:ext cx="194844" cy="259792"/>
           </a:xfrm>
           <a:prstGeom prst="rect">
             <a:avLst/>
@@ -7571,7 +7571,7 @@
               <a:buNone/>
             </a:pPr>
             <a:r>
-              <a:rPr lang="en-US" sz="1900" b="1" dirty="0">
+              <a:rPr lang="en-US" sz="1350" b="1" dirty="0">
                 <a:solidFill>
                   <a:srgbClr val="00A896"/>
                 </a:solidFill>
@@ -7581,7 +7581,7 @@
               </a:rPr>
               <a:t>→</a:t>
             </a:r>
-            <a:endParaRPr lang="en-US" sz="1900" dirty="0"/>
+            <a:endParaRPr lang="en-US" sz="1350" dirty="0"/>
           </a:p>
         </p:txBody>
       </p:sp>
@@ -7593,8 +7593,8 @@
         </p:nvSpPr>
         <p:spPr>
           <a:xfrm>
-            <a:off x="2606040" y="1133856"/>
-            <a:ext cx="1828800" cy="2724912"/>
+            <a:off x="3175617" y="831848"/>
+            <a:ext cx="1298961" cy="1935452"/>
           </a:xfrm>
           <a:prstGeom prst="roundRect">
             <a:avLst>
@@ -7627,8 +7627,8 @@
         </p:nvSpPr>
         <p:spPr>
           <a:xfrm>
-            <a:off x="3282696" y="1316736"/>
-            <a:ext cx="475488" cy="475488"/>
+            <a:off x="3656233" y="961744"/>
+            <a:ext cx="337730" cy="337730"/>
           </a:xfrm>
           <a:prstGeom prst="ellipse">
             <a:avLst/>
@@ -7647,8 +7647,8 @@
         </p:nvSpPr>
         <p:spPr>
           <a:xfrm>
-            <a:off x="3282696" y="1417320"/>
-            <a:ext cx="475488" cy="274320"/>
+            <a:off x="3656233" y="1033187"/>
+            <a:ext cx="337730" cy="194844"/>
           </a:xfrm>
           <a:prstGeom prst="rect">
             <a:avLst/>
@@ -7664,7 +7664,7 @@
               <a:buNone/>
             </a:pPr>
             <a:r>
-              <a:rPr lang="en-US" sz="1500" b="1" dirty="0">
+              <a:rPr lang="en-US" sz="1070" b="1" dirty="0">
                 <a:solidFill>
                   <a:srgbClr val="FFFFFF"/>
                 </a:solidFill>
@@ -7674,7 +7674,7 @@
               </a:rPr>
               <a:t>2</a:t>
             </a:r>
-            <a:endParaRPr lang="en-US" sz="1500" dirty="0"/>
+            <a:endParaRPr lang="en-US" sz="1070" dirty="0"/>
           </a:p>
         </p:txBody>
       </p:sp>
@@ -7686,8 +7686,8 @@
         </p:nvSpPr>
         <p:spPr>
           <a:xfrm>
-            <a:off x="2734056" y="1883664"/>
-            <a:ext cx="1572768" cy="658368"/>
+            <a:off x="3266544" y="1364422"/>
+            <a:ext cx="1117106" cy="467626"/>
           </a:xfrm>
           <a:prstGeom prst="rect">
             <a:avLst/>
@@ -7706,7 +7706,7 @@
               <a:buNone/>
             </a:pPr>
             <a:r>
-              <a:rPr lang="en-US" sz="1400" b="1" dirty="0">
+              <a:rPr lang="en-US" sz="990" b="1" dirty="0">
                 <a:solidFill>
                   <a:srgbClr val="0B1F3A"/>
                 </a:solidFill>
@@ -7716,7 +7716,7 @@
               </a:rPr>
               <a:t>Quét tham số</a:t>
             </a:r>
-            <a:endParaRPr lang="en-US" sz="1400" dirty="0"/>
+            <a:endParaRPr lang="en-US" sz="990" dirty="0"/>
           </a:p>
           <a:p>
             <a:pPr algn="ctr" indent="0" marL="0">
@@ -7726,7 +7726,7 @@
               <a:buNone/>
             </a:pPr>
             <a:r>
-              <a:rPr lang="en-US" sz="1200" dirty="0">
+              <a:rPr lang="en-US" sz="850" dirty="0">
                 <a:solidFill>
                   <a:srgbClr val="007F72"/>
                 </a:solidFill>
@@ -7736,7 +7736,7 @@
               </a:rPr>
               <a:t>掃參數</a:t>
             </a:r>
-            <a:endParaRPr lang="en-US" sz="1400" dirty="0"/>
+            <a:endParaRPr lang="en-US" sz="990" dirty="0"/>
           </a:p>
         </p:txBody>
       </p:sp>
@@ -7748,8 +7748,8 @@
         </p:nvSpPr>
         <p:spPr>
           <a:xfrm>
-            <a:off x="2734056" y="2578608"/>
-            <a:ext cx="1572768" cy="1170432"/>
+            <a:off x="3266544" y="1858027"/>
+            <a:ext cx="1117106" cy="831335"/>
           </a:xfrm>
           <a:prstGeom prst="rect">
             <a:avLst/>
@@ -7768,7 +7768,7 @@
               <a:buNone/>
             </a:pPr>
             <a:r>
-              <a:rPr lang="en-US" sz="1050" dirty="0">
+              <a:rPr lang="en-US" sz="750" dirty="0">
                 <a:solidFill>
                   <a:srgbClr val="5F7183"/>
                 </a:solidFill>
@@ -7778,7 +7778,7 @@
               </a:rPr>
               <a:t>Trụ được lâu nhất</a:t>
             </a:r>
-            <a:endParaRPr lang="en-US" sz="1050" dirty="0"/>
+            <a:endParaRPr lang="en-US" sz="750" dirty="0"/>
           </a:p>
           <a:p>
             <a:pPr algn="ctr" indent="0" marL="0">
@@ -7788,7 +7788,7 @@
               <a:buNone/>
             </a:pPr>
             <a:r>
-              <a:rPr lang="en-US" sz="1050" dirty="0">
+              <a:rPr lang="en-US" sz="750" dirty="0">
                 <a:solidFill>
                   <a:srgbClr val="5F7183"/>
                 </a:solidFill>
@@ -7798,7 +7798,7 @@
               </a:rPr>
               <a:t>3 lần lấy lần tốt nhất</a:t>
             </a:r>
-            <a:endParaRPr lang="en-US" sz="1050" dirty="0"/>
+            <a:endParaRPr lang="en-US" sz="750" dirty="0"/>
           </a:p>
           <a:p>
             <a:pPr algn="ctr" indent="0" marL="0">
@@ -7808,7 +7808,7 @@
               <a:buNone/>
             </a:pPr>
             <a:r>
-              <a:rPr lang="en-US" sz="950" dirty="0">
+              <a:rPr lang="en-US" sz="670" dirty="0">
                 <a:solidFill>
                   <a:srgbClr val="5F7183"/>
                 </a:solidFill>
@@ -7818,7 +7818,7 @@
               </a:rPr>
               <a:t>撐最久</a:t>
             </a:r>
-            <a:endParaRPr lang="en-US" sz="1050" dirty="0"/>
+            <a:endParaRPr lang="en-US" sz="750" dirty="0"/>
           </a:p>
           <a:p>
             <a:pPr algn="ctr" indent="0" marL="0">
@@ -7828,7 +7828,7 @@
               <a:buNone/>
             </a:pPr>
             <a:r>
-              <a:rPr lang="en-US" sz="950" dirty="0">
+              <a:rPr lang="en-US" sz="670" dirty="0">
                 <a:solidFill>
                   <a:srgbClr val="5F7183"/>
                 </a:solidFill>
@@ -7838,7 +7838,7 @@
               </a:rPr>
               <a:t>跑 3 次取最好</a:t>
             </a:r>
-            <a:endParaRPr lang="en-US" sz="1050" dirty="0"/>
+            <a:endParaRPr lang="en-US" sz="750" dirty="0"/>
           </a:p>
         </p:txBody>
       </p:sp>
@@ -7850,8 +7850,8 @@
         </p:nvSpPr>
         <p:spPr>
           <a:xfrm>
-            <a:off x="4434840" y="2048256"/>
-            <a:ext cx="274320" cy="365760"/>
+            <a:off x="4474578" y="1481328"/>
+            <a:ext cx="194844" cy="259792"/>
           </a:xfrm>
           <a:prstGeom prst="rect">
             <a:avLst/>
@@ -7867,7 +7867,7 @@
               <a:buNone/>
             </a:pPr>
             <a:r>
-              <a:rPr lang="en-US" sz="1900" b="1" dirty="0">
+              <a:rPr lang="en-US" sz="1350" b="1" dirty="0">
                 <a:solidFill>
                   <a:srgbClr val="00A896"/>
                 </a:solidFill>
@@ -7877,7 +7877,7 @@
               </a:rPr>
               <a:t>→</a:t>
             </a:r>
-            <a:endParaRPr lang="en-US" sz="1900" dirty="0"/>
+            <a:endParaRPr lang="en-US" sz="1350" dirty="0"/>
           </a:p>
         </p:txBody>
       </p:sp>
@@ -7889,8 +7889,8 @@
         </p:nvSpPr>
         <p:spPr>
           <a:xfrm>
-            <a:off x="4709160" y="1133856"/>
-            <a:ext cx="1828800" cy="2724912"/>
+            <a:off x="4669422" y="831848"/>
+            <a:ext cx="1298961" cy="1935452"/>
           </a:xfrm>
           <a:prstGeom prst="roundRect">
             <a:avLst>
@@ -7923,8 +7923,8 @@
         </p:nvSpPr>
         <p:spPr>
           <a:xfrm>
-            <a:off x="5385816" y="1316736"/>
-            <a:ext cx="475488" cy="475488"/>
+            <a:off x="5150038" y="961744"/>
+            <a:ext cx="337730" cy="337730"/>
           </a:xfrm>
           <a:prstGeom prst="ellipse">
             <a:avLst/>
@@ -7943,8 +7943,8 @@
         </p:nvSpPr>
         <p:spPr>
           <a:xfrm>
-            <a:off x="5385816" y="1417320"/>
-            <a:ext cx="475488" cy="274320"/>
+            <a:off x="5150038" y="1033187"/>
+            <a:ext cx="337730" cy="194844"/>
           </a:xfrm>
           <a:prstGeom prst="rect">
             <a:avLst/>
@@ -7960,7 +7960,7 @@
               <a:buNone/>
             </a:pPr>
             <a:r>
-              <a:rPr lang="en-US" sz="1500" b="1" dirty="0">
+              <a:rPr lang="en-US" sz="1070" b="1" dirty="0">
                 <a:solidFill>
                   <a:srgbClr val="FFFFFF"/>
                 </a:solidFill>
@@ -7970,7 +7970,7 @@
               </a:rPr>
               <a:t>3</a:t>
             </a:r>
-            <a:endParaRPr lang="en-US" sz="1500" dirty="0"/>
+            <a:endParaRPr lang="en-US" sz="1070" dirty="0"/>
           </a:p>
         </p:txBody>
       </p:sp>
@@ -7982,8 +7982,8 @@
         </p:nvSpPr>
         <p:spPr>
           <a:xfrm>
-            <a:off x="4837176" y="1883664"/>
-            <a:ext cx="1572768" cy="658368"/>
+            <a:off x="4760349" y="1364422"/>
+            <a:ext cx="1117106" cy="467626"/>
           </a:xfrm>
           <a:prstGeom prst="rect">
             <a:avLst/>
@@ -8002,7 +8002,7 @@
               <a:buNone/>
             </a:pPr>
             <a:r>
-              <a:rPr lang="en-US" sz="1400" b="1" dirty="0">
+              <a:rPr lang="en-US" sz="990" b="1" dirty="0">
                 <a:solidFill>
                   <a:srgbClr val="0B1F3A"/>
                 </a:solidFill>
@@ -8012,7 +8012,7 @@
               </a:rPr>
               <a:t>Bật mưa</a:t>
             </a:r>
-            <a:endParaRPr lang="en-US" sz="1400" dirty="0"/>
+            <a:endParaRPr lang="en-US" sz="990" dirty="0"/>
           </a:p>
           <a:p>
             <a:pPr algn="ctr" indent="0" marL="0">
@@ -8022,7 +8022,7 @@
               <a:buNone/>
             </a:pPr>
             <a:r>
-              <a:rPr lang="en-US" sz="1200" dirty="0">
+              <a:rPr lang="en-US" sz="850" dirty="0">
                 <a:solidFill>
                   <a:srgbClr val="007F72"/>
                 </a:solidFill>
@@ -8032,7 +8032,7 @@
               </a:rPr>
               <a:t>打開雨天</a:t>
             </a:r>
-            <a:endParaRPr lang="en-US" sz="1400" dirty="0"/>
+            <a:endParaRPr lang="en-US" sz="990" dirty="0"/>
           </a:p>
         </p:txBody>
       </p:sp>
@@ -8044,8 +8044,8 @@
         </p:nvSpPr>
         <p:spPr>
           <a:xfrm>
-            <a:off x="4837176" y="2578608"/>
-            <a:ext cx="1572768" cy="1170432"/>
+            <a:off x="4760349" y="1858027"/>
+            <a:ext cx="1117106" cy="831335"/>
           </a:xfrm>
           <a:prstGeom prst="rect">
             <a:avLst/>
@@ -8064,7 +8064,7 @@
               <a:buNone/>
             </a:pPr>
             <a:r>
-              <a:rPr lang="en-US" sz="1050" dirty="0">
+              <a:rPr lang="en-US" sz="750" dirty="0">
                 <a:solidFill>
                   <a:srgbClr val="5F7183"/>
                 </a:solidFill>
@@ -8074,7 +8074,7 @@
               </a:rPr>
               <a:t>Trụ được bao lâu?</a:t>
             </a:r>
-            <a:endParaRPr lang="en-US" sz="1050" dirty="0"/>
+            <a:endParaRPr lang="en-US" sz="750" dirty="0"/>
           </a:p>
           <a:p>
             <a:pPr algn="ctr" indent="0" marL="0">
@@ -8084,7 +8084,7 @@
               <a:buNone/>
             </a:pPr>
             <a:r>
-              <a:rPr lang="en-US" sz="1050" dirty="0">
+              <a:rPr lang="en-US" sz="750" dirty="0">
                 <a:solidFill>
                   <a:srgbClr val="5F7183"/>
                 </a:solidFill>
@@ -8094,7 +8094,7 @@
               </a:rPr>
               <a:t>Đổi gì, vì sao</a:t>
             </a:r>
-            <a:endParaRPr lang="en-US" sz="1050" dirty="0"/>
+            <a:endParaRPr lang="en-US" sz="750" dirty="0"/>
           </a:p>
           <a:p>
             <a:pPr algn="ctr" indent="0" marL="0">
@@ -8104,7 +8104,7 @@
               <a:buNone/>
             </a:pPr>
             <a:r>
-              <a:rPr lang="en-US" sz="950" dirty="0">
+              <a:rPr lang="en-US" sz="670" dirty="0">
                 <a:solidFill>
                   <a:srgbClr val="5F7183"/>
                 </a:solidFill>
@@ -8114,7 +8114,7 @@
               </a:rPr>
               <a:t>這次撐多久？</a:t>
             </a:r>
-            <a:endParaRPr lang="en-US" sz="1050" dirty="0"/>
+            <a:endParaRPr lang="en-US" sz="750" dirty="0"/>
           </a:p>
           <a:p>
             <a:pPr algn="ctr" indent="0" marL="0">
@@ -8124,7 +8124,7 @@
               <a:buNone/>
             </a:pPr>
             <a:r>
-              <a:rPr lang="en-US" sz="950" dirty="0">
+              <a:rPr lang="en-US" sz="670" dirty="0">
                 <a:solidFill>
                   <a:srgbClr val="5F7183"/>
                 </a:solidFill>
@@ -8134,7 +8134,7 @@
               </a:rPr>
               <a:t>改什麼、為什麼</a:t>
             </a:r>
-            <a:endParaRPr lang="en-US" sz="1050" dirty="0"/>
+            <a:endParaRPr lang="en-US" sz="750" dirty="0"/>
           </a:p>
         </p:txBody>
       </p:sp>
@@ -8146,8 +8146,8 @@
         </p:nvSpPr>
         <p:spPr>
           <a:xfrm>
-            <a:off x="6537960" y="2048256"/>
-            <a:ext cx="274320" cy="365760"/>
+            <a:off x="5968383" y="1481328"/>
+            <a:ext cx="194844" cy="259792"/>
           </a:xfrm>
           <a:prstGeom prst="rect">
             <a:avLst/>
@@ -8163,7 +8163,7 @@
               <a:buNone/>
             </a:pPr>
             <a:r>
-              <a:rPr lang="en-US" sz="1900" b="1" dirty="0">
+              <a:rPr lang="en-US" sz="1350" b="1" dirty="0">
                 <a:solidFill>
                   <a:srgbClr val="00A896"/>
                 </a:solidFill>
@@ -8173,7 +8173,7 @@
               </a:rPr>
               <a:t>→</a:t>
             </a:r>
-            <a:endParaRPr lang="en-US" sz="1900" dirty="0"/>
+            <a:endParaRPr lang="en-US" sz="1350" dirty="0"/>
           </a:p>
         </p:txBody>
       </p:sp>
@@ -8185,8 +8185,8 @@
         </p:nvSpPr>
         <p:spPr>
           <a:xfrm>
-            <a:off x="6812280" y="1133856"/>
-            <a:ext cx="1828800" cy="2724912"/>
+            <a:off x="6163227" y="831848"/>
+            <a:ext cx="1298961" cy="1935452"/>
           </a:xfrm>
           <a:prstGeom prst="roundRect">
             <a:avLst>
@@ -8219,8 +8219,8 @@
         </p:nvSpPr>
         <p:spPr>
           <a:xfrm>
-            <a:off x="7488936" y="1316736"/>
-            <a:ext cx="475488" cy="475488"/>
+            <a:off x="6643842" y="961744"/>
+            <a:ext cx="337730" cy="337730"/>
           </a:xfrm>
           <a:prstGeom prst="ellipse">
             <a:avLst/>
@@ -8239,8 +8239,8 @@
         </p:nvSpPr>
         <p:spPr>
           <a:xfrm>
-            <a:off x="7488936" y="1417320"/>
-            <a:ext cx="475488" cy="274320"/>
+            <a:off x="6643842" y="1033187"/>
+            <a:ext cx="337730" cy="194844"/>
           </a:xfrm>
           <a:prstGeom prst="rect">
             <a:avLst/>
@@ -8256,7 +8256,7 @@
               <a:buNone/>
             </a:pPr>
             <a:r>
-              <a:rPr lang="en-US" sz="1500" b="1" dirty="0">
+              <a:rPr lang="en-US" sz="1070" b="1" dirty="0">
                 <a:solidFill>
                   <a:srgbClr val="FFFFFF"/>
                 </a:solidFill>
@@ -8266,7 +8266,7 @@
               </a:rPr>
               <a:t>4</a:t>
             </a:r>
-            <a:endParaRPr lang="en-US" sz="1500" dirty="0"/>
+            <a:endParaRPr lang="en-US" sz="1070" dirty="0"/>
           </a:p>
         </p:txBody>
       </p:sp>
@@ -8278,8 +8278,8 @@
         </p:nvSpPr>
         <p:spPr>
           <a:xfrm>
-            <a:off x="6940296" y="1883664"/>
-            <a:ext cx="1572768" cy="658368"/>
+            <a:off x="6254154" y="1364422"/>
+            <a:ext cx="1117106" cy="467626"/>
           </a:xfrm>
           <a:prstGeom prst="rect">
             <a:avLst/>
@@ -8298,7 +8298,7 @@
               <a:buNone/>
             </a:pPr>
             <a:r>
-              <a:rPr lang="en-US" sz="1400" b="1" dirty="0">
+              <a:rPr lang="en-US" sz="990" b="1" dirty="0">
                 <a:solidFill>
                   <a:srgbClr val="0B1F3A"/>
                 </a:solidFill>
@@ -8308,7 +8308,7 @@
               </a:rPr>
               <a:t>Câu chữ</a:t>
             </a:r>
-            <a:endParaRPr lang="en-US" sz="1400" dirty="0"/>
+            <a:endParaRPr lang="en-US" sz="990" dirty="0"/>
           </a:p>
           <a:p>
             <a:pPr algn="ctr" indent="0" marL="0">
@@ -8318,7 +8318,7 @@
               <a:buNone/>
             </a:pPr>
             <a:r>
-              <a:rPr lang="en-US" sz="1200" dirty="0">
+              <a:rPr lang="en-US" sz="850" dirty="0">
                 <a:solidFill>
                   <a:srgbClr val="007F72"/>
                 </a:solidFill>
@@ -8328,7 +8328,7 @@
               </a:rPr>
               <a:t>文字題</a:t>
             </a:r>
-            <a:endParaRPr lang="en-US" sz="1400" dirty="0"/>
+            <a:endParaRPr lang="en-US" sz="990" dirty="0"/>
           </a:p>
         </p:txBody>
       </p:sp>
@@ -8340,8 +8340,8 @@
         </p:nvSpPr>
         <p:spPr>
           <a:xfrm>
-            <a:off x="6940296" y="2578608"/>
-            <a:ext cx="1572768" cy="1170432"/>
+            <a:off x="6254154" y="1858027"/>
+            <a:ext cx="1117106" cy="831335"/>
           </a:xfrm>
           <a:prstGeom prst="rect">
             <a:avLst/>
@@ -8360,7 +8360,7 @@
               <a:buNone/>
             </a:pPr>
             <a:r>
-              <a:rPr lang="en-US" sz="1050" dirty="0">
+              <a:rPr lang="en-US" sz="750" dirty="0">
                 <a:solidFill>
                   <a:srgbClr val="5F7183"/>
                 </a:solidFill>
@@ -8370,7 +8370,7 @@
               </a:rPr>
               <a:t>Tia = cảm biến nào?</a:t>
             </a:r>
-            <a:endParaRPr lang="en-US" sz="1050" dirty="0"/>
+            <a:endParaRPr lang="en-US" sz="750" dirty="0"/>
           </a:p>
           <a:p>
             <a:pPr algn="ctr" indent="0" marL="0">
@@ -8380,7 +8380,7 @@
               <a:buNone/>
             </a:pPr>
             <a:r>
-              <a:rPr lang="en-US" sz="1050" dirty="0">
+              <a:rPr lang="en-US" sz="750" dirty="0">
                 <a:solidFill>
                   <a:srgbClr val="5F7183"/>
                 </a:solidFill>
@@ -8390,7 +8390,7 @@
               </a:rPr>
               <a:t>Thiếu gì?</a:t>
             </a:r>
-            <a:endParaRPr lang="en-US" sz="1050" dirty="0"/>
+            <a:endParaRPr lang="en-US" sz="750" dirty="0"/>
           </a:p>
           <a:p>
             <a:pPr algn="ctr" indent="0" marL="0">
@@ -8400,7 +8400,7 @@
               <a:buNone/>
             </a:pPr>
             <a:r>
-              <a:rPr lang="en-US" sz="950" dirty="0">
+              <a:rPr lang="en-US" sz="670" dirty="0">
                 <a:solidFill>
                   <a:srgbClr val="5F7183"/>
                 </a:solidFill>
@@ -8410,7 +8410,7 @@
               </a:rPr>
               <a:t>射線＝哪種感測器？</a:t>
             </a:r>
-            <a:endParaRPr lang="en-US" sz="1050" dirty="0"/>
+            <a:endParaRPr lang="en-US" sz="750" dirty="0"/>
           </a:p>
           <a:p>
             <a:pPr algn="ctr" indent="0" marL="0">
@@ -8420,7 +8420,7 @@
               <a:buNone/>
             </a:pPr>
             <a:r>
-              <a:rPr lang="en-US" sz="950" dirty="0">
+              <a:rPr lang="en-US" sz="670" dirty="0">
                 <a:solidFill>
                   <a:srgbClr val="5F7183"/>
                 </a:solidFill>
@@ -8430,7 +8430,7 @@
               </a:rPr>
               <a:t>少了什麼？</a:t>
             </a:r>
-            <a:endParaRPr lang="en-US" sz="1050" dirty="0"/>
+            <a:endParaRPr lang="en-US" sz="750" dirty="0"/>
           </a:p>
         </p:txBody>
       </p:sp>
@@ -8442,8 +8442,8 @@
         </p:nvSpPr>
         <p:spPr>
           <a:xfrm>
-            <a:off x="502920" y="4005072"/>
-            <a:ext cx="8138160" cy="566928"/>
+            <a:off x="1681812" y="2871216"/>
+            <a:ext cx="5780375" cy="402678"/>
           </a:xfrm>
           <a:prstGeom prst="rect">
             <a:avLst/>
@@ -8462,7 +8462,7 @@
               <a:buNone/>
             </a:pPr>
             <a:r>
-              <a:rPr lang="en-US" sz="1250" b="1" dirty="0">
+              <a:rPr lang="en-US" sz="890" b="1" dirty="0">
                 <a:solidFill>
                   <a:srgbClr val="0B1F3A"/>
                 </a:solidFill>
@@ -8472,7 +8472,7 @@
               </a:rPr>
               <a:t>Ba câu đầu có con số, câu cuối viết chữ. Nộp một tờ mỗi nhóm trước khi hết giờ.</a:t>
             </a:r>
-            <a:endParaRPr lang="en-US" sz="1250" dirty="0"/>
+            <a:endParaRPr lang="en-US" sz="890" dirty="0"/>
           </a:p>
           <a:p>
             <a:pPr indent="0" marL="0">
@@ -8482,7 +8482,7 @@
               <a:buNone/>
             </a:pPr>
             <a:r>
-              <a:rPr lang="en-US" sz="1150" dirty="0">
+              <a:rPr lang="en-US" sz="820" dirty="0">
                 <a:solidFill>
                   <a:srgbClr val="007F72"/>
                 </a:solidFill>
@@ -8492,7 +8492,7 @@
               </a:rPr>
               <a:t>前三題有數字，最後一題寫字。每組一張紙，下課前交。</a:t>
             </a:r>
-            <a:endParaRPr lang="en-US" sz="1250" dirty="0"/>
+            <a:endParaRPr lang="en-US" sz="890" dirty="0"/>
           </a:p>
         </p:txBody>
       </p:sp>
@@ -8512,8 +8512,8 @@
         </p:blipFill>
         <p:spPr>
           <a:xfrm>
-            <a:off x="7516368" y="4718304"/>
-            <a:ext cx="1097280" cy="242439"/>
+            <a:off x="6663327" y="3338842"/>
+            <a:ext cx="779376" cy="172200"/>
           </a:xfrm>
           <a:prstGeom prst="rect">
             <a:avLst/>
@@ -8528,8 +8528,8 @@
         </p:nvSpPr>
         <p:spPr>
           <a:xfrm>
-            <a:off x="109728" y="4791456"/>
-            <a:ext cx="822960" cy="256032"/>
+            <a:off x="1402536" y="3390800"/>
+            <a:ext cx="584532" cy="181855"/>
           </a:xfrm>
           <a:prstGeom prst="rect">
             <a:avLst/>
@@ -8545,7 +8545,7 @@
               <a:buNone/>
             </a:pPr>
             <a:r>
-              <a:rPr lang="en-US" sz="900" dirty="0">
+              <a:rPr lang="en-US" sz="640" dirty="0">
                 <a:solidFill>
                   <a:srgbClr val="5F7183"/>
                 </a:solidFill>
@@ -8555,7 +8555,7 @@
               </a:rPr>
               <a:t>2 / 11</a:t>
             </a:r>
-            <a:endParaRPr lang="en-US" sz="900" dirty="0"/>
+            <a:endParaRPr lang="en-US" sz="640" dirty="0"/>
           </a:p>
         </p:txBody>
       </p:sp>
@@ -8567,8 +8567,8 @@
         </p:nvSpPr>
         <p:spPr>
           <a:xfrm>
-            <a:off x="960120" y="4791456"/>
-            <a:ext cx="2011680" cy="256032"/>
+            <a:off x="2006553" y="3390800"/>
+            <a:ext cx="1428857" cy="181855"/>
           </a:xfrm>
           <a:prstGeom prst="rect">
             <a:avLst/>
@@ -8584,7 +8584,7 @@
               <a:buNone/>
             </a:pPr>
             <a:r>
-              <a:rPr lang="en-US" sz="900" dirty="0">
+              <a:rPr lang="en-US" sz="640" dirty="0">
                 <a:solidFill>
                   <a:srgbClr val="5F7183"/>
                 </a:solidFill>
@@ -8594,7 +8594,7 @@
               </a:rPr>
               <a:t>Tiết 3 · 第 3 節</a:t>
             </a:r>
-            <a:endParaRPr lang="en-US" sz="900" dirty="0"/>
+            <a:endParaRPr lang="en-US" sz="640" dirty="0"/>
           </a:p>
         </p:txBody>
       </p:sp>
@@ -8638,8 +8638,8 @@
         </p:nvSpPr>
         <p:spPr>
           <a:xfrm>
-            <a:off x="6766560" y="-1371600"/>
-            <a:ext cx="4206240" cy="4206240"/>
+            <a:off x="6130753" y="-947729"/>
+            <a:ext cx="2987610" cy="2987610"/>
           </a:xfrm>
           <a:prstGeom prst="ellipse">
             <a:avLst/>
@@ -8663,8 +8663,8 @@
         </p:nvSpPr>
         <p:spPr>
           <a:xfrm>
-            <a:off x="7863840" y="3108960"/>
-            <a:ext cx="2560320" cy="2560320"/>
+            <a:off x="7104973" y="1520297"/>
+            <a:ext cx="1688649" cy="1688649"/>
           </a:xfrm>
           <a:prstGeom prst="ellipse">
             <a:avLst/>
@@ -8685,8 +8685,8 @@
         </p:nvSpPr>
         <p:spPr>
           <a:xfrm>
-            <a:off x="502920" y="475488"/>
-            <a:ext cx="6766560" cy="274320"/>
+            <a:off x="1681812" y="364222"/>
+            <a:ext cx="4806155" cy="194844"/>
           </a:xfrm>
           <a:prstGeom prst="rect">
             <a:avLst/>
@@ -8702,7 +8702,7 @@
               <a:buNone/>
             </a:pPr>
             <a:r>
-              <a:rPr lang="en-US" sz="1250" b="1" dirty="0">
+              <a:rPr lang="en-US" sz="890" b="1" dirty="0">
                 <a:solidFill>
                   <a:srgbClr val="FFB020"/>
                 </a:solidFill>
@@ -8712,7 +8712,7 @@
               </a:rPr>
               <a:t>Câu 1 · 第一題（5 分鐘）</a:t>
             </a:r>
-            <a:endParaRPr lang="en-US" sz="1250" dirty="0"/>
+            <a:endParaRPr lang="en-US" sz="890" dirty="0"/>
           </a:p>
         </p:txBody>
       </p:sp>
@@ -8724,8 +8724,8 @@
         </p:nvSpPr>
         <p:spPr>
           <a:xfrm>
-            <a:off x="502920" y="786384"/>
-            <a:ext cx="8046720" cy="1225296"/>
+            <a:off x="1681812" y="585045"/>
+            <a:ext cx="5715427" cy="870304"/>
           </a:xfrm>
           <a:prstGeom prst="rect">
             <a:avLst/>
@@ -8744,7 +8744,7 @@
               <a:buNone/>
             </a:pPr>
             <a:r>
-              <a:rPr lang="en-US" sz="2300" b="1" dirty="0">
+              <a:rPr lang="en-US" sz="1630" b="1" dirty="0">
                 <a:solidFill>
                   <a:srgbClr val="FFFFFF"/>
                 </a:solidFill>
@@ -8754,7 +8754,7 @@
               </a:rPr>
               <a:t>Bấm «Giờ cao điểm Hà Nội». Đừng đổi gì cả. Xem nó đâm trong tình huống nào.</a:t>
             </a:r>
-            <a:endParaRPr lang="en-US" sz="2300" dirty="0"/>
+            <a:endParaRPr lang="en-US" sz="1630" dirty="0"/>
           </a:p>
           <a:p>
             <a:pPr indent="0" marL="0">
@@ -8764,7 +8764,7 @@
               <a:buNone/>
             </a:pPr>
             <a:r>
-              <a:rPr lang="en-US" sz="1500" dirty="0">
+              <a:rPr lang="en-US" sz="1070" dirty="0">
                 <a:solidFill>
                   <a:srgbClr val="AFC3D4"/>
                 </a:solidFill>
@@ -8774,7 +8774,7 @@
               </a:rPr>
               <a:t>按「河內尖峰」。什麼都不要改。看它撞在什麼情況。</a:t>
             </a:r>
-            <a:endParaRPr lang="en-US" sz="2300" dirty="0"/>
+            <a:endParaRPr lang="en-US" sz="1630" dirty="0"/>
           </a:p>
         </p:txBody>
       </p:sp>
@@ -8786,8 +8786,8 @@
         </p:nvSpPr>
         <p:spPr>
           <a:xfrm>
-            <a:off x="502920" y="1880384"/>
-            <a:ext cx="8138160" cy="621792"/>
+            <a:off x="1681812" y="1362092"/>
+            <a:ext cx="5780375" cy="441647"/>
           </a:xfrm>
           <a:prstGeom prst="roundRect">
             <a:avLst>
@@ -8808,8 +8808,8 @@
         </p:nvSpPr>
         <p:spPr>
           <a:xfrm>
-            <a:off x="667512" y="2026688"/>
-            <a:ext cx="329184" cy="329184"/>
+            <a:off x="1798719" y="1466008"/>
+            <a:ext cx="233813" cy="233813"/>
           </a:xfrm>
           <a:prstGeom prst="ellipse">
             <a:avLst/>
@@ -8828,8 +8828,8 @@
         </p:nvSpPr>
         <p:spPr>
           <a:xfrm>
-            <a:off x="667512" y="2054120"/>
-            <a:ext cx="329184" cy="274320"/>
+            <a:off x="1798719" y="1485493"/>
+            <a:ext cx="233813" cy="194844"/>
           </a:xfrm>
           <a:prstGeom prst="rect">
             <a:avLst/>
@@ -8845,7 +8845,7 @@
               <a:buNone/>
             </a:pPr>
             <a:r>
-              <a:rPr lang="en-US" sz="1200" b="1" dirty="0">
+              <a:rPr lang="en-US" sz="850" b="1" dirty="0">
                 <a:solidFill>
                   <a:srgbClr val="FFFFFF"/>
                 </a:solidFill>
@@ -8855,7 +8855,7 @@
               </a:rPr>
               <a:t>1</a:t>
             </a:r>
-            <a:endParaRPr lang="en-US" sz="1200" dirty="0"/>
+            <a:endParaRPr lang="en-US" sz="850" dirty="0"/>
           </a:p>
         </p:txBody>
       </p:sp>
@@ -8867,8 +8867,8 @@
         </p:nvSpPr>
         <p:spPr>
           <a:xfrm>
-            <a:off x="1161288" y="1926104"/>
-            <a:ext cx="7296912" cy="548640"/>
+            <a:off x="2149438" y="1394566"/>
+            <a:ext cx="5182853" cy="389688"/>
           </a:xfrm>
           <a:prstGeom prst="rect">
             <a:avLst/>
@@ -8887,7 +8887,7 @@
               <a:buNone/>
             </a:pPr>
             <a:r>
-              <a:rPr lang="en-US" sz="1250" b="1" dirty="0">
+              <a:rPr lang="en-US" sz="890" b="1" dirty="0">
                 <a:solidFill>
                   <a:srgbClr val="FFFFFF"/>
                 </a:solidFill>
@@ -8897,7 +8897,7 @@
               </a:rPr>
               <a:t>Chạy ba lần. Mỗi lần đâm xong đọc dòng cuối trong cột sự kiện bên phải.</a:t>
             </a:r>
-            <a:endParaRPr lang="en-US" sz="1250" dirty="0"/>
+            <a:endParaRPr lang="en-US" sz="890" dirty="0"/>
           </a:p>
           <a:p>
             <a:pPr indent="0" marL="0">
@@ -8907,7 +8907,7 @@
               <a:buNone/>
             </a:pPr>
             <a:r>
-              <a:rPr lang="en-US" sz="1150" dirty="0">
+              <a:rPr lang="en-US" sz="820" dirty="0">
                 <a:solidFill>
                   <a:srgbClr val="AFC3D4"/>
                 </a:solidFill>
@@ -8917,7 +8917,7 @@
               </a:rPr>
               <a:t>跑三次。每次撞了就看右欄事件紀錄的最後一行。</a:t>
             </a:r>
-            <a:endParaRPr lang="en-US" sz="1250" dirty="0"/>
+            <a:endParaRPr lang="en-US" sz="890" dirty="0"/>
           </a:p>
         </p:txBody>
       </p:sp>
@@ -8929,8 +8929,8 @@
         </p:nvSpPr>
         <p:spPr>
           <a:xfrm>
-            <a:off x="502920" y="2593616"/>
-            <a:ext cx="8138160" cy="621792"/>
+            <a:off x="1681812" y="1868686"/>
+            <a:ext cx="5780375" cy="441647"/>
           </a:xfrm>
           <a:prstGeom prst="roundRect">
             <a:avLst>
@@ -8951,8 +8951,8 @@
         </p:nvSpPr>
         <p:spPr>
           <a:xfrm>
-            <a:off x="667512" y="2739920"/>
-            <a:ext cx="329184" cy="329184"/>
+            <a:off x="1798719" y="1972603"/>
+            <a:ext cx="233813" cy="233813"/>
           </a:xfrm>
           <a:prstGeom prst="ellipse">
             <a:avLst/>
@@ -8971,8 +8971,8 @@
         </p:nvSpPr>
         <p:spPr>
           <a:xfrm>
-            <a:off x="667512" y="2767352"/>
-            <a:ext cx="329184" cy="274320"/>
+            <a:off x="1798719" y="1992087"/>
+            <a:ext cx="233813" cy="194844"/>
           </a:xfrm>
           <a:prstGeom prst="rect">
             <a:avLst/>
@@ -8988,7 +8988,7 @@
               <a:buNone/>
             </a:pPr>
             <a:r>
-              <a:rPr lang="en-US" sz="1200" b="1" dirty="0">
+              <a:rPr lang="en-US" sz="850" b="1" dirty="0">
                 <a:solidFill>
                   <a:srgbClr val="FFFFFF"/>
                 </a:solidFill>
@@ -8998,7 +8998,7 @@
               </a:rPr>
               <a:t>2</a:t>
             </a:r>
-            <a:endParaRPr lang="en-US" sz="1200" dirty="0"/>
+            <a:endParaRPr lang="en-US" sz="850" dirty="0"/>
           </a:p>
         </p:txBody>
       </p:sp>
@@ -9010,8 +9010,8 @@
         </p:nvSpPr>
         <p:spPr>
           <a:xfrm>
-            <a:off x="1161288" y="2639336"/>
-            <a:ext cx="7296912" cy="548640"/>
+            <a:off x="2149438" y="1901160"/>
+            <a:ext cx="5182853" cy="389688"/>
           </a:xfrm>
           <a:prstGeom prst="rect">
             <a:avLst/>
@@ -9030,7 +9030,7 @@
               <a:buNone/>
             </a:pPr>
             <a:r>
-              <a:rPr lang="en-US" sz="1250" b="1" dirty="0">
+              <a:rPr lang="en-US" sz="890" b="1" dirty="0">
                 <a:solidFill>
                   <a:srgbClr val="FFFFFF"/>
                 </a:solidFill>
@@ -9040,7 +9040,7 @@
               </a:rPr>
               <a:t>Ghi lại nguyên nhân của ba lần: xe máy lách khe? người đi bộ? xe tải đỗ sai?</a:t>
             </a:r>
-            <a:endParaRPr lang="en-US" sz="1250" dirty="0"/>
+            <a:endParaRPr lang="en-US" sz="890" dirty="0"/>
           </a:p>
           <a:p>
             <a:pPr indent="0" marL="0">
@@ -9050,7 +9050,7 @@
               <a:buNone/>
             </a:pPr>
             <a:r>
-              <a:rPr lang="en-US" sz="1150" dirty="0">
+              <a:rPr lang="en-US" sz="820" dirty="0">
                 <a:solidFill>
                   <a:srgbClr val="AFC3D4"/>
                 </a:solidFill>
@@ -9060,7 +9060,7 @@
               </a:rPr>
               <a:t>記下三次的原因：機車鑽縫？行人？違停的貨車？</a:t>
             </a:r>
-            <a:endParaRPr lang="en-US" sz="1250" dirty="0"/>
+            <a:endParaRPr lang="en-US" sz="890" dirty="0"/>
           </a:p>
         </p:txBody>
       </p:sp>
@@ -9072,8 +9072,8 @@
         </p:nvSpPr>
         <p:spPr>
           <a:xfrm>
-            <a:off x="502920" y="3306848"/>
-            <a:ext cx="8138160" cy="621792"/>
+            <a:off x="1681812" y="2375281"/>
+            <a:ext cx="5780375" cy="441647"/>
           </a:xfrm>
           <a:prstGeom prst="roundRect">
             <a:avLst>
@@ -9094,8 +9094,8 @@
         </p:nvSpPr>
         <p:spPr>
           <a:xfrm>
-            <a:off x="667512" y="3453152"/>
-            <a:ext cx="329184" cy="329184"/>
+            <a:off x="1798719" y="2479198"/>
+            <a:ext cx="233813" cy="233813"/>
           </a:xfrm>
           <a:prstGeom prst="ellipse">
             <a:avLst/>
@@ -9114,8 +9114,8 @@
         </p:nvSpPr>
         <p:spPr>
           <a:xfrm>
-            <a:off x="667512" y="3480584"/>
-            <a:ext cx="329184" cy="274320"/>
+            <a:off x="1798719" y="2498682"/>
+            <a:ext cx="233813" cy="194844"/>
           </a:xfrm>
           <a:prstGeom prst="rect">
             <a:avLst/>
@@ -9131,7 +9131,7 @@
               <a:buNone/>
             </a:pPr>
             <a:r>
-              <a:rPr lang="en-US" sz="1200" b="1" dirty="0">
+              <a:rPr lang="en-US" sz="850" b="1" dirty="0">
                 <a:solidFill>
                   <a:srgbClr val="FFFFFF"/>
                 </a:solidFill>
@@ -9141,7 +9141,7 @@
               </a:rPr>
               <a:t>3</a:t>
             </a:r>
-            <a:endParaRPr lang="en-US" sz="1200" dirty="0"/>
+            <a:endParaRPr lang="en-US" sz="850" dirty="0"/>
           </a:p>
         </p:txBody>
       </p:sp>
@@ -9153,8 +9153,8 @@
         </p:nvSpPr>
         <p:spPr>
           <a:xfrm>
-            <a:off x="1161288" y="3352568"/>
-            <a:ext cx="7296912" cy="548640"/>
+            <a:off x="2149438" y="2407755"/>
+            <a:ext cx="5182853" cy="389688"/>
           </a:xfrm>
           <a:prstGeom prst="rect">
             <a:avLst/>
@@ -9173,7 +9173,7 @@
               <a:buNone/>
             </a:pPr>
             <a:r>
-              <a:rPr lang="en-US" sz="1250" b="1" dirty="0">
+              <a:rPr lang="en-US" sz="890" b="1" dirty="0">
                 <a:solidFill>
                   <a:srgbClr val="FFFFFF"/>
                 </a:solidFill>
@@ -9183,7 +9183,7 @@
               </a:rPr>
               <a:t>Ba lần có giống nhau không? Đây mới là câu hỏi thật.</a:t>
             </a:r>
-            <a:endParaRPr lang="en-US" sz="1250" dirty="0"/>
+            <a:endParaRPr lang="en-US" sz="890" dirty="0"/>
           </a:p>
           <a:p>
             <a:pPr indent="0" marL="0">
@@ -9193,7 +9193,7 @@
               <a:buNone/>
             </a:pPr>
             <a:r>
-              <a:rPr lang="en-US" sz="1150" dirty="0">
+              <a:rPr lang="en-US" sz="820" dirty="0">
                 <a:solidFill>
                   <a:srgbClr val="AFC3D4"/>
                 </a:solidFill>
@@ -9203,7 +9203,7 @@
               </a:rPr>
               <a:t>三次的原因一樣嗎？這才是真正要問的。</a:t>
             </a:r>
-            <a:endParaRPr lang="en-US" sz="1250" dirty="0"/>
+            <a:endParaRPr lang="en-US" sz="890" dirty="0"/>
           </a:p>
         </p:txBody>
       </p:sp>
@@ -9215,8 +9215,8 @@
         </p:nvSpPr>
         <p:spPr>
           <a:xfrm>
-            <a:off x="502920" y="4056656"/>
-            <a:ext cx="8046720" cy="457200"/>
+            <a:off x="1681812" y="2907855"/>
+            <a:ext cx="5715427" cy="324740"/>
           </a:xfrm>
           <a:prstGeom prst="rect">
             <a:avLst/>
@@ -9235,7 +9235,7 @@
               <a:buNone/>
             </a:pPr>
             <a:r>
-              <a:rPr lang="en-US" sz="1250" b="1" dirty="0">
+              <a:rPr lang="en-US" sz="890" b="1" dirty="0">
                 <a:solidFill>
                   <a:srgbClr val="FFB020"/>
                 </a:solidFill>
@@ -9245,7 +9245,7 @@
               </a:rPr>
               <a:t>Cùng tham số, ba lần ba kiểu — nên phải chạy nhiều lần.</a:t>
             </a:r>
-            <a:endParaRPr lang="en-US" sz="1250" dirty="0"/>
+            <a:endParaRPr lang="en-US" sz="890" dirty="0"/>
           </a:p>
           <a:p>
             <a:pPr indent="0" marL="0">
@@ -9255,7 +9255,7 @@
               <a:buNone/>
             </a:pPr>
             <a:r>
-              <a:rPr lang="en-US" sz="1150" dirty="0">
+              <a:rPr lang="en-US" sz="820" dirty="0">
                 <a:solidFill>
                   <a:srgbClr val="FFB020"/>
                 </a:solidFill>
@@ -9265,7 +9265,7 @@
               </a:rPr>
               <a:t>同一組參數，三次不一樣——所以要跑很多次。</a:t>
             </a:r>
-            <a:endParaRPr lang="en-US" sz="1250" dirty="0"/>
+            <a:endParaRPr lang="en-US" sz="890" dirty="0"/>
           </a:p>
         </p:txBody>
       </p:sp>
@@ -9277,8 +9277,8 @@
         </p:nvSpPr>
         <p:spPr>
           <a:xfrm>
-            <a:off x="109728" y="4791456"/>
-            <a:ext cx="822960" cy="256032"/>
+            <a:off x="1402536" y="3390800"/>
+            <a:ext cx="584532" cy="181855"/>
           </a:xfrm>
           <a:prstGeom prst="rect">
             <a:avLst/>
@@ -9294,7 +9294,7 @@
               <a:buNone/>
             </a:pPr>
             <a:r>
-              <a:rPr lang="en-US" sz="900" dirty="0">
+              <a:rPr lang="en-US" sz="640" dirty="0">
                 <a:solidFill>
                   <a:srgbClr val="9FB3C8"/>
                 </a:solidFill>
@@ -9304,7 +9304,7 @@
               </a:rPr>
               <a:t>3 / 11</a:t>
             </a:r>
-            <a:endParaRPr lang="en-US" sz="900" dirty="0"/>
+            <a:endParaRPr lang="en-US" sz="640" dirty="0"/>
           </a:p>
         </p:txBody>
       </p:sp>
@@ -9316,8 +9316,8 @@
         </p:nvSpPr>
         <p:spPr>
           <a:xfrm>
-            <a:off x="960120" y="4791456"/>
-            <a:ext cx="2011680" cy="256032"/>
+            <a:off x="2006553" y="3390800"/>
+            <a:ext cx="1428857" cy="181855"/>
           </a:xfrm>
           <a:prstGeom prst="rect">
             <a:avLst/>
@@ -9333,7 +9333,7 @@
               <a:buNone/>
             </a:pPr>
             <a:r>
-              <a:rPr lang="en-US" sz="900" dirty="0">
+              <a:rPr lang="en-US" sz="640" dirty="0">
                 <a:solidFill>
                   <a:srgbClr val="9FB3C8"/>
                 </a:solidFill>
@@ -9343,7 +9343,7 @@
               </a:rPr>
               <a:t>Tiết 3 · 第 3 節</a:t>
             </a:r>
-            <a:endParaRPr lang="en-US" sz="900" dirty="0"/>
+            <a:endParaRPr lang="en-US" sz="640" dirty="0"/>
           </a:p>
         </p:txBody>
       </p:sp>
@@ -9387,8 +9387,8 @@
         </p:nvSpPr>
         <p:spPr>
           <a:xfrm>
-            <a:off x="6766560" y="-1371600"/>
-            <a:ext cx="4206240" cy="4206240"/>
+            <a:off x="6130753" y="-947729"/>
+            <a:ext cx="2987610" cy="2987610"/>
           </a:xfrm>
           <a:prstGeom prst="ellipse">
             <a:avLst/>
@@ -9412,8 +9412,8 @@
         </p:nvSpPr>
         <p:spPr>
           <a:xfrm>
-            <a:off x="7863840" y="3108960"/>
-            <a:ext cx="2560320" cy="2560320"/>
+            <a:off x="7104973" y="1520297"/>
+            <a:ext cx="1688649" cy="1688649"/>
           </a:xfrm>
           <a:prstGeom prst="ellipse">
             <a:avLst/>
@@ -9434,8 +9434,8 @@
         </p:nvSpPr>
         <p:spPr>
           <a:xfrm>
-            <a:off x="502920" y="475488"/>
-            <a:ext cx="6766560" cy="274320"/>
+            <a:off x="1681812" y="364222"/>
+            <a:ext cx="4806155" cy="194844"/>
           </a:xfrm>
           <a:prstGeom prst="rect">
             <a:avLst/>
@@ -9451,7 +9451,7 @@
               <a:buNone/>
             </a:pPr>
             <a:r>
-              <a:rPr lang="en-US" sz="1250" b="1" dirty="0">
+              <a:rPr lang="en-US" sz="890" b="1" dirty="0">
                 <a:solidFill>
                   <a:srgbClr val="FFB020"/>
                 </a:solidFill>
@@ -9461,7 +9461,7 @@
               </a:rPr>
               <a:t>Câu 2 · 第二題（15 分鐘，今天的主菜）</a:t>
             </a:r>
-            <a:endParaRPr lang="en-US" sz="1250" dirty="0"/>
+            <a:endParaRPr lang="en-US" sz="890" dirty="0"/>
           </a:p>
         </p:txBody>
       </p:sp>
@@ -9473,8 +9473,8 @@
         </p:nvSpPr>
         <p:spPr>
           <a:xfrm>
-            <a:off x="502920" y="786384"/>
-            <a:ext cx="8046720" cy="1225296"/>
+            <a:off x="1681812" y="585045"/>
+            <a:ext cx="5715427" cy="870304"/>
           </a:xfrm>
           <a:prstGeom prst="rect">
             <a:avLst/>
@@ -9493,7 +9493,7 @@
               <a:buNone/>
             </a:pPr>
             <a:r>
-              <a:rPr lang="en-US" sz="2300" b="1" dirty="0">
+              <a:rPr lang="en-US" sz="1630" b="1" dirty="0">
                 <a:solidFill>
                   <a:srgbClr val="FFFFFF"/>
                 </a:solidFill>
@@ -9503,7 +9503,7 @@
               </a:rPr>
               <a:t>Chỉnh ba tham số, sao cho xe trụ được LÂU NHẤT trước khi đâm. Chạy 3 lần, lấy lần tốt nhất.</a:t>
             </a:r>
-            <a:endParaRPr lang="en-US" sz="2300" dirty="0"/>
+            <a:endParaRPr lang="en-US" sz="1630" dirty="0"/>
           </a:p>
           <a:p>
             <a:pPr indent="0" marL="0">
@@ -9513,7 +9513,7 @@
               <a:buNone/>
             </a:pPr>
             <a:r>
-              <a:rPr lang="en-US" sz="1500" dirty="0">
+              <a:rPr lang="en-US" sz="1070" dirty="0">
                 <a:solidFill>
                   <a:srgbClr val="AFC3D4"/>
                 </a:solidFill>
@@ -9523,7 +9523,7 @@
               </a:rPr>
               <a:t>調三個參數，讓車子在撞車前撐得最久。跑三次，取最好的那一次。</a:t>
             </a:r>
-            <a:endParaRPr lang="en-US" sz="2300" dirty="0"/>
+            <a:endParaRPr lang="en-US" sz="1630" dirty="0"/>
           </a:p>
         </p:txBody>
       </p:sp>
@@ -9535,8 +9535,8 @@
         </p:nvSpPr>
         <p:spPr>
           <a:xfrm>
-            <a:off x="502920" y="1880384"/>
-            <a:ext cx="8138160" cy="621792"/>
+            <a:off x="1681812" y="1362092"/>
+            <a:ext cx="5780375" cy="441647"/>
           </a:xfrm>
           <a:prstGeom prst="roundRect">
             <a:avLst>
@@ -9557,8 +9557,8 @@
         </p:nvSpPr>
         <p:spPr>
           <a:xfrm>
-            <a:off x="667512" y="2026688"/>
-            <a:ext cx="329184" cy="329184"/>
+            <a:off x="1798719" y="1466008"/>
+            <a:ext cx="233813" cy="233813"/>
           </a:xfrm>
           <a:prstGeom prst="ellipse">
             <a:avLst/>
@@ -9577,8 +9577,8 @@
         </p:nvSpPr>
         <p:spPr>
           <a:xfrm>
-            <a:off x="667512" y="2054120"/>
-            <a:ext cx="329184" cy="274320"/>
+            <a:off x="1798719" y="1485493"/>
+            <a:ext cx="233813" cy="194844"/>
           </a:xfrm>
           <a:prstGeom prst="rect">
             <a:avLst/>
@@ -9594,7 +9594,7 @@
               <a:buNone/>
             </a:pPr>
             <a:r>
-              <a:rPr lang="en-US" sz="1200" b="1" dirty="0">
+              <a:rPr lang="en-US" sz="850" b="1" dirty="0">
                 <a:solidFill>
                   <a:srgbClr val="FFFFFF"/>
                 </a:solidFill>
@@ -9604,7 +9604,7 @@
               </a:rPr>
               <a:t>1</a:t>
             </a:r>
-            <a:endParaRPr lang="en-US" sz="1200" dirty="0"/>
+            <a:endParaRPr lang="en-US" sz="850" dirty="0"/>
           </a:p>
         </p:txBody>
       </p:sp>
@@ -9616,8 +9616,8 @@
         </p:nvSpPr>
         <p:spPr>
           <a:xfrm>
-            <a:off x="1161288" y="1926104"/>
-            <a:ext cx="7296912" cy="548640"/>
+            <a:off x="2149438" y="1394566"/>
+            <a:ext cx="5182853" cy="389688"/>
           </a:xfrm>
           <a:prstGeom prst="rect">
             <a:avLst/>
@@ -9636,7 +9636,7 @@
               <a:buNone/>
             </a:pPr>
             <a:r>
-              <a:rPr lang="en-US" sz="1250" b="1" dirty="0">
+              <a:rPr lang="en-US" sz="890" b="1" dirty="0">
                 <a:solidFill>
                   <a:srgbClr val="FFFFFF"/>
                 </a:solidFill>
@@ -9646,7 +9646,7 @@
               </a:rPr>
               <a:t>Ba tham số: số tia · chiều dài tia · góc quét. Đổi MỘT cái một lần, đừng đổi cả ba cùng lúc.</a:t>
             </a:r>
-            <a:endParaRPr lang="en-US" sz="1250" dirty="0"/>
+            <a:endParaRPr lang="en-US" sz="890" dirty="0"/>
           </a:p>
           <a:p>
             <a:pPr indent="0" marL="0">
@@ -9656,7 +9656,7 @@
               <a:buNone/>
             </a:pPr>
             <a:r>
-              <a:rPr lang="en-US" sz="1150" dirty="0">
+              <a:rPr lang="en-US" sz="820" dirty="0">
                 <a:solidFill>
                   <a:srgbClr val="AFC3D4"/>
                 </a:solidFill>
@@ -9666,7 +9666,7 @@
               </a:rPr>
               <a:t>三個參數：射線數・射線長度・張角。一次只改一個，不要三個一起改。</a:t>
             </a:r>
-            <a:endParaRPr lang="en-US" sz="1250" dirty="0"/>
+            <a:endParaRPr lang="en-US" sz="890" dirty="0"/>
           </a:p>
         </p:txBody>
       </p:sp>
@@ -9678,8 +9678,8 @@
         </p:nvSpPr>
         <p:spPr>
           <a:xfrm>
-            <a:off x="502920" y="2593616"/>
-            <a:ext cx="8138160" cy="621792"/>
+            <a:off x="1681812" y="1868686"/>
+            <a:ext cx="5780375" cy="441647"/>
           </a:xfrm>
           <a:prstGeom prst="roundRect">
             <a:avLst>
@@ -9700,8 +9700,8 @@
         </p:nvSpPr>
         <p:spPr>
           <a:xfrm>
-            <a:off x="667512" y="2739920"/>
-            <a:ext cx="329184" cy="329184"/>
+            <a:off x="1798719" y="1972603"/>
+            <a:ext cx="233813" cy="233813"/>
           </a:xfrm>
           <a:prstGeom prst="ellipse">
             <a:avLst/>
@@ -9720,8 +9720,8 @@
         </p:nvSpPr>
         <p:spPr>
           <a:xfrm>
-            <a:off x="667512" y="2767352"/>
-            <a:ext cx="329184" cy="274320"/>
+            <a:off x="1798719" y="1992087"/>
+            <a:ext cx="233813" cy="194844"/>
           </a:xfrm>
           <a:prstGeom prst="rect">
             <a:avLst/>
@@ -9737,7 +9737,7 @@
               <a:buNone/>
             </a:pPr>
             <a:r>
-              <a:rPr lang="en-US" sz="1200" b="1" dirty="0">
+              <a:rPr lang="en-US" sz="850" b="1" dirty="0">
                 <a:solidFill>
                   <a:srgbClr val="FFFFFF"/>
                 </a:solidFill>
@@ -9747,7 +9747,7 @@
               </a:rPr>
               <a:t>2</a:t>
             </a:r>
-            <a:endParaRPr lang="en-US" sz="1200" dirty="0"/>
+            <a:endParaRPr lang="en-US" sz="850" dirty="0"/>
           </a:p>
         </p:txBody>
       </p:sp>
@@ -9759,8 +9759,8 @@
         </p:nvSpPr>
         <p:spPr>
           <a:xfrm>
-            <a:off x="1161288" y="2639336"/>
-            <a:ext cx="7296912" cy="548640"/>
+            <a:off x="2149438" y="1901160"/>
+            <a:ext cx="5182853" cy="389688"/>
           </a:xfrm>
           <a:prstGeom prst="rect">
             <a:avLst/>
@@ -9779,7 +9779,7 @@
               <a:buNone/>
             </a:pPr>
             <a:r>
-              <a:rPr lang="en-US" sz="1250" b="1" dirty="0">
+              <a:rPr lang="en-US" sz="890" b="1" dirty="0">
                 <a:solidFill>
                   <a:srgbClr val="FFFFFF"/>
                 </a:solidFill>
@@ -9789,7 +9789,7 @@
               </a:rPr>
               <a:t>Nhắc lại tiết 1: chạy 50 km/h thì tia không được ngắn hơn 25 m.</a:t>
             </a:r>
-            <a:endParaRPr lang="en-US" sz="1250" dirty="0"/>
+            <a:endParaRPr lang="en-US" sz="890" dirty="0"/>
           </a:p>
           <a:p>
             <a:pPr indent="0" marL="0">
@@ -9799,7 +9799,7 @@
               <a:buNone/>
             </a:pPr>
             <a:r>
-              <a:rPr lang="en-US" sz="1150" dirty="0">
+              <a:rPr lang="en-US" sz="820" dirty="0">
                 <a:solidFill>
                   <a:srgbClr val="AFC3D4"/>
                 </a:solidFill>
@@ -9809,7 +9809,7 @@
               </a:rPr>
               <a:t>提醒：第一節算過，時速 50 的話射線不能短於 25 公尺。</a:t>
             </a:r>
-            <a:endParaRPr lang="en-US" sz="1250" dirty="0"/>
+            <a:endParaRPr lang="en-US" sz="890" dirty="0"/>
           </a:p>
         </p:txBody>
       </p:sp>
@@ -9821,8 +9821,8 @@
         </p:nvSpPr>
         <p:spPr>
           <a:xfrm>
-            <a:off x="502920" y="3306848"/>
-            <a:ext cx="8138160" cy="621792"/>
+            <a:off x="1681812" y="2375281"/>
+            <a:ext cx="5780375" cy="441647"/>
           </a:xfrm>
           <a:prstGeom prst="roundRect">
             <a:avLst>
@@ -9843,8 +9843,8 @@
         </p:nvSpPr>
         <p:spPr>
           <a:xfrm>
-            <a:off x="667512" y="3453152"/>
-            <a:ext cx="329184" cy="329184"/>
+            <a:off x="1798719" y="2479198"/>
+            <a:ext cx="233813" cy="233813"/>
           </a:xfrm>
           <a:prstGeom prst="ellipse">
             <a:avLst/>
@@ -9863,8 +9863,8 @@
         </p:nvSpPr>
         <p:spPr>
           <a:xfrm>
-            <a:off x="667512" y="3480584"/>
-            <a:ext cx="329184" cy="274320"/>
+            <a:off x="1798719" y="2498682"/>
+            <a:ext cx="233813" cy="194844"/>
           </a:xfrm>
           <a:prstGeom prst="rect">
             <a:avLst/>
@@ -9880,7 +9880,7 @@
               <a:buNone/>
             </a:pPr>
             <a:r>
-              <a:rPr lang="en-US" sz="1200" b="1" dirty="0">
+              <a:rPr lang="en-US" sz="850" b="1" dirty="0">
                 <a:solidFill>
                   <a:srgbClr val="FFFFFF"/>
                 </a:solidFill>
@@ -9890,7 +9890,7 @@
               </a:rPr>
               <a:t>3</a:t>
             </a:r>
-            <a:endParaRPr lang="en-US" sz="1200" dirty="0"/>
+            <a:endParaRPr lang="en-US" sz="850" dirty="0"/>
           </a:p>
         </p:txBody>
       </p:sp>
@@ -9902,8 +9902,8 @@
         </p:nvSpPr>
         <p:spPr>
           <a:xfrm>
-            <a:off x="1161288" y="3352568"/>
-            <a:ext cx="7296912" cy="548640"/>
+            <a:off x="2149438" y="2407755"/>
+            <a:ext cx="5182853" cy="389688"/>
           </a:xfrm>
           <a:prstGeom prst="rect">
             <a:avLst/>
@@ -9922,7 +9922,7 @@
               <a:buNone/>
             </a:pPr>
             <a:r>
-              <a:rPr lang="en-US" sz="1250" b="1" dirty="0">
+              <a:rPr lang="en-US" sz="890" b="1" dirty="0">
                 <a:solidFill>
                   <a:srgbClr val="FFFFFF"/>
                 </a:solidFill>
@@ -9932,7 +9932,7 @@
               </a:rPr>
               <a:t>Nộp: số giây trụ được lâu nhất, kèm ba con số lúc đó.</a:t>
             </a:r>
-            <a:endParaRPr lang="en-US" sz="1250" dirty="0"/>
+            <a:endParaRPr lang="en-US" sz="890" dirty="0"/>
           </a:p>
           <a:p>
             <a:pPr indent="0" marL="0">
@@ -9942,7 +9942,7 @@
               <a:buNone/>
             </a:pPr>
             <a:r>
-              <a:rPr lang="en-US" sz="1150" dirty="0">
+              <a:rPr lang="en-US" sz="820" dirty="0">
                 <a:solidFill>
                   <a:srgbClr val="AFC3D4"/>
                 </a:solidFill>
@@ -9952,7 +9952,7 @@
               </a:rPr>
               <a:t>要交的是：撐最久的那個秒數，加上當時的三個數字。</a:t>
             </a:r>
-            <a:endParaRPr lang="en-US" sz="1250" dirty="0"/>
+            <a:endParaRPr lang="en-US" sz="890" dirty="0"/>
           </a:p>
         </p:txBody>
       </p:sp>
@@ -9964,8 +9964,8 @@
         </p:nvSpPr>
         <p:spPr>
           <a:xfrm>
-            <a:off x="502920" y="4056656"/>
-            <a:ext cx="8046720" cy="457200"/>
+            <a:off x="1681812" y="2907855"/>
+            <a:ext cx="5715427" cy="324740"/>
           </a:xfrm>
           <a:prstGeom prst="rect">
             <a:avLst/>
@@ -9984,7 +9984,7 @@
               <a:buNone/>
             </a:pPr>
             <a:r>
-              <a:rPr lang="en-US" sz="1250" b="1" dirty="0">
+              <a:rPr lang="en-US" sz="890" b="1" dirty="0">
                 <a:solidFill>
                   <a:srgbClr val="FFB020"/>
                 </a:solidFill>
@@ -9994,7 +9994,7 @@
               </a:rPr>
               <a:t>Không nhóm nào qua được 90 giây — kể cả khi kéo cả ba lên tối đa. Đó chính là bài học.</a:t>
             </a:r>
-            <a:endParaRPr lang="en-US" sz="1250" dirty="0"/>
+            <a:endParaRPr lang="en-US" sz="890" dirty="0"/>
           </a:p>
           <a:p>
             <a:pPr indent="0" marL="0">
@@ -10004,7 +10004,7 @@
               <a:buNone/>
             </a:pPr>
             <a:r>
-              <a:rPr lang="en-US" sz="1150" dirty="0">
+              <a:rPr lang="en-US" sz="820" dirty="0">
                 <a:solidFill>
                   <a:srgbClr val="FFB020"/>
                 </a:solidFill>
@@ -10014,7 +10014,7 @@
               </a:rPr>
               <a:t>沒有一組能撐過 90 秒——就算三個都拉到最大也一樣。這正是這一題要教的事。</a:t>
             </a:r>
-            <a:endParaRPr lang="en-US" sz="1250" dirty="0"/>
+            <a:endParaRPr lang="en-US" sz="890" dirty="0"/>
           </a:p>
         </p:txBody>
       </p:sp>
@@ -10026,8 +10026,8 @@
         </p:nvSpPr>
         <p:spPr>
           <a:xfrm>
-            <a:off x="109728" y="4791456"/>
-            <a:ext cx="822960" cy="256032"/>
+            <a:off x="1402536" y="3390800"/>
+            <a:ext cx="584532" cy="181855"/>
           </a:xfrm>
           <a:prstGeom prst="rect">
             <a:avLst/>
@@ -10043,7 +10043,7 @@
               <a:buNone/>
             </a:pPr>
             <a:r>
-              <a:rPr lang="en-US" sz="900" dirty="0">
+              <a:rPr lang="en-US" sz="640" dirty="0">
                 <a:solidFill>
                   <a:srgbClr val="9FB3C8"/>
                 </a:solidFill>
@@ -10053,7 +10053,7 @@
               </a:rPr>
               <a:t>4 / 11</a:t>
             </a:r>
-            <a:endParaRPr lang="en-US" sz="900" dirty="0"/>
+            <a:endParaRPr lang="en-US" sz="640" dirty="0"/>
           </a:p>
         </p:txBody>
       </p:sp>
@@ -10065,8 +10065,8 @@
         </p:nvSpPr>
         <p:spPr>
           <a:xfrm>
-            <a:off x="960120" y="4791456"/>
-            <a:ext cx="2011680" cy="256032"/>
+            <a:off x="2006553" y="3390800"/>
+            <a:ext cx="1428857" cy="181855"/>
           </a:xfrm>
           <a:prstGeom prst="rect">
             <a:avLst/>
@@ -10082,7 +10082,7 @@
               <a:buNone/>
             </a:pPr>
             <a:r>
-              <a:rPr lang="en-US" sz="900" dirty="0">
+              <a:rPr lang="en-US" sz="640" dirty="0">
                 <a:solidFill>
                   <a:srgbClr val="9FB3C8"/>
                 </a:solidFill>
@@ -10092,7 +10092,7 @@
               </a:rPr>
               <a:t>Tiết 3 · 第 3 節</a:t>
             </a:r>
-            <a:endParaRPr lang="en-US" sz="900" dirty="0"/>
+            <a:endParaRPr lang="en-US" sz="640" dirty="0"/>
           </a:p>
         </p:txBody>
       </p:sp>
@@ -10136,8 +10136,8 @@
         </p:nvSpPr>
         <p:spPr>
           <a:xfrm>
-            <a:off x="6766560" y="-1371600"/>
-            <a:ext cx="4206240" cy="4206240"/>
+            <a:off x="6130753" y="-947729"/>
+            <a:ext cx="2987610" cy="2987610"/>
           </a:xfrm>
           <a:prstGeom prst="ellipse">
             <a:avLst/>
@@ -10161,8 +10161,8 @@
         </p:nvSpPr>
         <p:spPr>
           <a:xfrm>
-            <a:off x="7863840" y="3108960"/>
-            <a:ext cx="2560320" cy="2560320"/>
+            <a:off x="7104973" y="1520297"/>
+            <a:ext cx="1688649" cy="1688649"/>
           </a:xfrm>
           <a:prstGeom prst="ellipse">
             <a:avLst/>
@@ -10183,8 +10183,8 @@
         </p:nvSpPr>
         <p:spPr>
           <a:xfrm>
-            <a:off x="502920" y="475488"/>
-            <a:ext cx="6766560" cy="274320"/>
+            <a:off x="1681812" y="364222"/>
+            <a:ext cx="4806155" cy="194844"/>
           </a:xfrm>
           <a:prstGeom prst="rect">
             <a:avLst/>
@@ -10200,7 +10200,7 @@
               <a:buNone/>
             </a:pPr>
             <a:r>
-              <a:rPr lang="en-US" sz="1250" b="1" dirty="0">
+              <a:rPr lang="en-US" sz="890" b="1" dirty="0">
                 <a:solidFill>
                   <a:srgbClr val="FFB020"/>
                 </a:solidFill>
@@ -10210,7 +10210,7 @@
               </a:rPr>
               <a:t>Câu 3 · 第三題（5 分鐘）</a:t>
             </a:r>
-            <a:endParaRPr lang="en-US" sz="1250" dirty="0"/>
+            <a:endParaRPr lang="en-US" sz="890" dirty="0"/>
           </a:p>
         </p:txBody>
       </p:sp>
@@ -10222,8 +10222,8 @@
         </p:nvSpPr>
         <p:spPr>
           <a:xfrm>
-            <a:off x="502920" y="786384"/>
-            <a:ext cx="8046720" cy="1225296"/>
+            <a:off x="1681812" y="585045"/>
+            <a:ext cx="5715427" cy="870304"/>
           </a:xfrm>
           <a:prstGeom prst="rect">
             <a:avLst/>
@@ -10242,7 +10242,7 @@
               <a:buNone/>
             </a:pPr>
             <a:r>
-              <a:rPr lang="en-US" sz="2300" b="1" dirty="0">
+              <a:rPr lang="en-US" sz="1630" b="1" dirty="0">
                 <a:solidFill>
                   <a:srgbClr val="FFFFFF"/>
                 </a:solidFill>
@@ -10252,7 +10252,7 @@
               </a:rPr>
               <a:t>Giữ nguyên ba con số vừa tìm được, bật mưa lên. Trụ được bao lâu?</a:t>
             </a:r>
-            <a:endParaRPr lang="en-US" sz="2300" dirty="0"/>
+            <a:endParaRPr lang="en-US" sz="1630" dirty="0"/>
           </a:p>
           <a:p>
             <a:pPr indent="0" marL="0">
@@ -10262,7 +10262,7 @@
               <a:buNone/>
             </a:pPr>
             <a:r>
-              <a:rPr lang="en-US" sz="1500" dirty="0">
+              <a:rPr lang="en-US" sz="1070" dirty="0">
                 <a:solidFill>
                   <a:srgbClr val="AFC3D4"/>
                 </a:solidFill>
@@ -10272,7 +10272,7 @@
               </a:rPr>
               <a:t>三個數字不要動，把雨天打開。這次撐得了多久？</a:t>
             </a:r>
-            <a:endParaRPr lang="en-US" sz="2300" dirty="0"/>
+            <a:endParaRPr lang="en-US" sz="1630" dirty="0"/>
           </a:p>
         </p:txBody>
       </p:sp>
@@ -10284,8 +10284,8 @@
         </p:nvSpPr>
         <p:spPr>
           <a:xfrm>
-            <a:off x="502920" y="1880384"/>
-            <a:ext cx="8138160" cy="621792"/>
+            <a:off x="1681812" y="1362092"/>
+            <a:ext cx="5780375" cy="441647"/>
           </a:xfrm>
           <a:prstGeom prst="roundRect">
             <a:avLst>
@@ -10306,8 +10306,8 @@
         </p:nvSpPr>
         <p:spPr>
           <a:xfrm>
-            <a:off x="667512" y="2026688"/>
-            <a:ext cx="329184" cy="329184"/>
+            <a:off x="1798719" y="1466008"/>
+            <a:ext cx="233813" cy="233813"/>
           </a:xfrm>
           <a:prstGeom prst="ellipse">
             <a:avLst/>
@@ -10326,8 +10326,8 @@
         </p:nvSpPr>
         <p:spPr>
           <a:xfrm>
-            <a:off x="667512" y="2054120"/>
-            <a:ext cx="329184" cy="274320"/>
+            <a:off x="1798719" y="1485493"/>
+            <a:ext cx="233813" cy="194844"/>
           </a:xfrm>
           <a:prstGeom prst="rect">
             <a:avLst/>
@@ -10343,7 +10343,7 @@
               <a:buNone/>
             </a:pPr>
             <a:r>
-              <a:rPr lang="en-US" sz="1200" b="1" dirty="0">
+              <a:rPr lang="en-US" sz="850" b="1" dirty="0">
                 <a:solidFill>
                   <a:srgbClr val="FFFFFF"/>
                 </a:solidFill>
@@ -10353,7 +10353,7 @@
               </a:rPr>
               <a:t>1</a:t>
             </a:r>
-            <a:endParaRPr lang="en-US" sz="1200" dirty="0"/>
+            <a:endParaRPr lang="en-US" sz="850" dirty="0"/>
           </a:p>
         </p:txBody>
       </p:sp>
@@ -10365,8 +10365,8 @@
         </p:nvSpPr>
         <p:spPr>
           <a:xfrm>
-            <a:off x="1161288" y="1926104"/>
-            <a:ext cx="7296912" cy="548640"/>
+            <a:off x="2149438" y="1394566"/>
+            <a:ext cx="5182853" cy="389688"/>
           </a:xfrm>
           <a:prstGeom prst="rect">
             <a:avLst/>
@@ -10385,7 +10385,7 @@
               <a:buNone/>
             </a:pPr>
             <a:r>
-              <a:rPr lang="en-US" sz="1250" b="1" dirty="0">
+              <a:rPr lang="en-US" sz="890" b="1" dirty="0">
                 <a:solidFill>
                   <a:srgbClr val="FFFFFF"/>
                 </a:solidFill>
@@ -10395,7 +10395,7 @@
               </a:rPr>
               <a:t>Xem hai thứ: số lần đọc sót, và tia bị ngắn đi bao nhiêu.</a:t>
             </a:r>
-            <a:endParaRPr lang="en-US" sz="1250" dirty="0"/>
+            <a:endParaRPr lang="en-US" sz="890" dirty="0"/>
           </a:p>
           <a:p>
             <a:pPr indent="0" marL="0">
@@ -10405,7 +10405,7 @@
               <a:buNone/>
             </a:pPr>
             <a:r>
-              <a:rPr lang="en-US" sz="1150" dirty="0">
+              <a:rPr lang="en-US" sz="820" dirty="0">
                 <a:solidFill>
                   <a:srgbClr val="AFC3D4"/>
                 </a:solidFill>
@@ -10415,7 +10415,7 @@
               </a:rPr>
               <a:t>看兩件事：漏讀次數、射線變短多少。</a:t>
             </a:r>
-            <a:endParaRPr lang="en-US" sz="1250" dirty="0"/>
+            <a:endParaRPr lang="en-US" sz="890" dirty="0"/>
           </a:p>
         </p:txBody>
       </p:sp>
@@ -10427,8 +10427,8 @@
         </p:nvSpPr>
         <p:spPr>
           <a:xfrm>
-            <a:off x="502920" y="2593616"/>
-            <a:ext cx="8138160" cy="621792"/>
+            <a:off x="1681812" y="1868686"/>
+            <a:ext cx="5780375" cy="441647"/>
           </a:xfrm>
           <a:prstGeom prst="roundRect">
             <a:avLst>
@@ -10449,8 +10449,8 @@
         </p:nvSpPr>
         <p:spPr>
           <a:xfrm>
-            <a:off x="667512" y="2739920"/>
-            <a:ext cx="329184" cy="329184"/>
+            <a:off x="1798719" y="1972603"/>
+            <a:ext cx="233813" cy="233813"/>
           </a:xfrm>
           <a:prstGeom prst="ellipse">
             <a:avLst/>
@@ -10469,8 +10469,8 @@
         </p:nvSpPr>
         <p:spPr>
           <a:xfrm>
-            <a:off x="667512" y="2767352"/>
-            <a:ext cx="329184" cy="274320"/>
+            <a:off x="1798719" y="1992087"/>
+            <a:ext cx="233813" cy="194844"/>
           </a:xfrm>
           <a:prstGeom prst="rect">
             <a:avLst/>
@@ -10486,7 +10486,7 @@
               <a:buNone/>
             </a:pPr>
             <a:r>
-              <a:rPr lang="en-US" sz="1200" b="1" dirty="0">
+              <a:rPr lang="en-US" sz="850" b="1" dirty="0">
                 <a:solidFill>
                   <a:srgbClr val="FFFFFF"/>
                 </a:solidFill>
@@ -10496,7 +10496,7 @@
               </a:rPr>
               <a:t>2</a:t>
             </a:r>
-            <a:endParaRPr lang="en-US" sz="1200" dirty="0"/>
+            <a:endParaRPr lang="en-US" sz="850" dirty="0"/>
           </a:p>
         </p:txBody>
       </p:sp>
@@ -10508,8 +10508,8 @@
         </p:nvSpPr>
         <p:spPr>
           <a:xfrm>
-            <a:off x="1161288" y="2639336"/>
-            <a:ext cx="7296912" cy="548640"/>
+            <a:off x="2149438" y="1901160"/>
+            <a:ext cx="5182853" cy="389688"/>
           </a:xfrm>
           <a:prstGeom prst="rect">
             <a:avLst/>
@@ -10528,7 +10528,7 @@
               <a:buNone/>
             </a:pPr>
             <a:r>
-              <a:rPr lang="en-US" sz="1250" b="1" dirty="0">
+              <a:rPr lang="en-US" sz="890" b="1" dirty="0">
                 <a:solidFill>
                   <a:srgbClr val="FFFFFF"/>
                 </a:solidFill>
@@ -10538,7 +10538,7 @@
               </a:rPr>
               <a:t>Câu hỏi bẫy: tia ngắn đi rồi, thì quãng đường phanh có ngắn đi theo không?</a:t>
             </a:r>
-            <a:endParaRPr lang="en-US" sz="1250" dirty="0"/>
+            <a:endParaRPr lang="en-US" sz="890" dirty="0"/>
           </a:p>
           <a:p>
             <a:pPr indent="0" marL="0">
@@ -10548,7 +10548,7 @@
               <a:buNone/>
             </a:pPr>
             <a:r>
-              <a:rPr lang="en-US" sz="1150" dirty="0">
+              <a:rPr lang="en-US" sz="820" dirty="0">
                 <a:solidFill>
                   <a:srgbClr val="AFC3D4"/>
                 </a:solidFill>
@@ -10558,7 +10558,7 @@
               </a:rPr>
               <a:t>陷阱題：射線變短了，那煞停距離有跟著變短嗎？</a:t>
             </a:r>
-            <a:endParaRPr lang="en-US" sz="1250" dirty="0"/>
+            <a:endParaRPr lang="en-US" sz="890" dirty="0"/>
           </a:p>
         </p:txBody>
       </p:sp>
@@ -10570,8 +10570,8 @@
         </p:nvSpPr>
         <p:spPr>
           <a:xfrm>
-            <a:off x="502920" y="3306848"/>
-            <a:ext cx="8138160" cy="621792"/>
+            <a:off x="1681812" y="2375281"/>
+            <a:ext cx="5780375" cy="441647"/>
           </a:xfrm>
           <a:prstGeom prst="roundRect">
             <a:avLst>
@@ -10592,8 +10592,8 @@
         </p:nvSpPr>
         <p:spPr>
           <a:xfrm>
-            <a:off x="667512" y="3453152"/>
-            <a:ext cx="329184" cy="329184"/>
+            <a:off x="1798719" y="2479198"/>
+            <a:ext cx="233813" cy="233813"/>
           </a:xfrm>
           <a:prstGeom prst="ellipse">
             <a:avLst/>
@@ -10612,8 +10612,8 @@
         </p:nvSpPr>
         <p:spPr>
           <a:xfrm>
-            <a:off x="667512" y="3480584"/>
-            <a:ext cx="329184" cy="274320"/>
+            <a:off x="1798719" y="2498682"/>
+            <a:ext cx="233813" cy="194844"/>
           </a:xfrm>
           <a:prstGeom prst="rect">
             <a:avLst/>
@@ -10629,7 +10629,7 @@
               <a:buNone/>
             </a:pPr>
             <a:r>
-              <a:rPr lang="en-US" sz="1200" b="1" dirty="0">
+              <a:rPr lang="en-US" sz="850" b="1" dirty="0">
                 <a:solidFill>
                   <a:srgbClr val="FFFFFF"/>
                 </a:solidFill>
@@ -10639,7 +10639,7 @@
               </a:rPr>
               <a:t>3</a:t>
             </a:r>
-            <a:endParaRPr lang="en-US" sz="1200" dirty="0"/>
+            <a:endParaRPr lang="en-US" sz="850" dirty="0"/>
           </a:p>
         </p:txBody>
       </p:sp>
@@ -10651,8 +10651,8 @@
         </p:nvSpPr>
         <p:spPr>
           <a:xfrm>
-            <a:off x="1161288" y="3352568"/>
-            <a:ext cx="7296912" cy="548640"/>
+            <a:off x="2149438" y="2407755"/>
+            <a:ext cx="5182853" cy="389688"/>
           </a:xfrm>
           <a:prstGeom prst="rect">
             <a:avLst/>
@@ -10671,7 +10671,7 @@
               <a:buNone/>
             </a:pPr>
             <a:r>
-              <a:rPr lang="en-US" sz="1250" b="1" dirty="0">
+              <a:rPr lang="en-US" sz="890" b="1" dirty="0">
                 <a:solidFill>
                   <a:srgbClr val="FFFFFF"/>
                 </a:solidFill>
@@ -10681,7 +10681,7 @@
               </a:rPr>
               <a:t>Ngắn đi bao nhiêu giây? Bạn đổi gì để kéo lại? Ghi lại đổi gì và VÌ SAO.</a:t>
             </a:r>
-            <a:endParaRPr lang="en-US" sz="1250" dirty="0"/>
+            <a:endParaRPr lang="en-US" sz="890" dirty="0"/>
           </a:p>
           <a:p>
             <a:pPr indent="0" marL="0">
@@ -10691,7 +10691,7 @@
               <a:buNone/>
             </a:pPr>
             <a:r>
-              <a:rPr lang="en-US" sz="1150" dirty="0">
+              <a:rPr lang="en-US" sz="820" dirty="0">
                 <a:solidFill>
                   <a:srgbClr val="AFC3D4"/>
                 </a:solidFill>
@@ -10701,7 +10701,7 @@
               </a:rPr>
               <a:t>少撐了幾秒？你要改什麼把它拉回來？寫下改了什麼、還有為什麼。</a:t>
             </a:r>
-            <a:endParaRPr lang="en-US" sz="1250" dirty="0"/>
+            <a:endParaRPr lang="en-US" sz="890" dirty="0"/>
           </a:p>
         </p:txBody>
       </p:sp>
@@ -10713,8 +10713,8 @@
         </p:nvSpPr>
         <p:spPr>
           <a:xfrm>
-            <a:off x="502920" y="4056656"/>
-            <a:ext cx="8046720" cy="457200"/>
+            <a:off x="1681812" y="2907855"/>
+            <a:ext cx="5715427" cy="324740"/>
           </a:xfrm>
           <a:prstGeom prst="rect">
             <a:avLst/>
@@ -10733,7 +10733,7 @@
               <a:buNone/>
             </a:pPr>
             <a:r>
-              <a:rPr lang="en-US" sz="1250" b="1" dirty="0">
+              <a:rPr lang="en-US" sz="890" b="1" dirty="0">
                 <a:solidFill>
                   <a:srgbClr val="FFB020"/>
                 </a:solidFill>
@@ -10743,7 +10743,7 @@
               </a:rPr>
               <a:t>Hai đáp án đều đúng: giảm tốc độ, hoặc tăng số tia để bù phần đọc sót. Lý do khác nhau.</a:t>
             </a:r>
-            <a:endParaRPr lang="en-US" sz="1250" dirty="0"/>
+            <a:endParaRPr lang="en-US" sz="890" dirty="0"/>
           </a:p>
           <a:p>
             <a:pPr indent="0" marL="0">
@@ -10753,7 +10753,7 @@
               <a:buNone/>
             </a:pPr>
             <a:r>
-              <a:rPr lang="en-US" sz="1150" dirty="0">
+              <a:rPr lang="en-US" sz="820" dirty="0">
                 <a:solidFill>
                   <a:srgbClr val="FFB020"/>
                 </a:solidFill>
@@ -10763,7 +10763,7 @@
               </a:rPr>
               <a:t>兩個答案都對：降低車速，或加射線數補漏讀。理由不一樣。</a:t>
             </a:r>
-            <a:endParaRPr lang="en-US" sz="1250" dirty="0"/>
+            <a:endParaRPr lang="en-US" sz="890" dirty="0"/>
           </a:p>
         </p:txBody>
       </p:sp>
@@ -10775,8 +10775,8 @@
         </p:nvSpPr>
         <p:spPr>
           <a:xfrm>
-            <a:off x="109728" y="4791456"/>
-            <a:ext cx="822960" cy="256032"/>
+            <a:off x="1402536" y="3390800"/>
+            <a:ext cx="584532" cy="181855"/>
           </a:xfrm>
           <a:prstGeom prst="rect">
             <a:avLst/>
@@ -10792,7 +10792,7 @@
               <a:buNone/>
             </a:pPr>
             <a:r>
-              <a:rPr lang="en-US" sz="900" dirty="0">
+              <a:rPr lang="en-US" sz="640" dirty="0">
                 <a:solidFill>
                   <a:srgbClr val="9FB3C8"/>
                 </a:solidFill>
@@ -10802,7 +10802,7 @@
               </a:rPr>
               <a:t>5 / 11</a:t>
             </a:r>
-            <a:endParaRPr lang="en-US" sz="900" dirty="0"/>
+            <a:endParaRPr lang="en-US" sz="640" dirty="0"/>
           </a:p>
         </p:txBody>
       </p:sp>
@@ -10814,8 +10814,8 @@
         </p:nvSpPr>
         <p:spPr>
           <a:xfrm>
-            <a:off x="960120" y="4791456"/>
-            <a:ext cx="2011680" cy="256032"/>
+            <a:off x="2006553" y="3390800"/>
+            <a:ext cx="1428857" cy="181855"/>
           </a:xfrm>
           <a:prstGeom prst="rect">
             <a:avLst/>
@@ -10831,7 +10831,7 @@
               <a:buNone/>
             </a:pPr>
             <a:r>
-              <a:rPr lang="en-US" sz="900" dirty="0">
+              <a:rPr lang="en-US" sz="640" dirty="0">
                 <a:solidFill>
                   <a:srgbClr val="9FB3C8"/>
                 </a:solidFill>
@@ -10841,7 +10841,7 @@
               </a:rPr>
               <a:t>Tiết 3 · 第 3 節</a:t>
             </a:r>
-            <a:endParaRPr lang="en-US" sz="900" dirty="0"/>
+            <a:endParaRPr lang="en-US" sz="640" dirty="0"/>
           </a:p>
         </p:txBody>
       </p:sp>
@@ -10885,8 +10885,8 @@
         </p:nvSpPr>
         <p:spPr>
           <a:xfrm>
-            <a:off x="6766560" y="-1371600"/>
-            <a:ext cx="4206240" cy="4206240"/>
+            <a:off x="6130753" y="-947729"/>
+            <a:ext cx="2987610" cy="2987610"/>
           </a:xfrm>
           <a:prstGeom prst="ellipse">
             <a:avLst/>
@@ -10910,8 +10910,8 @@
         </p:nvSpPr>
         <p:spPr>
           <a:xfrm>
-            <a:off x="7863840" y="3108960"/>
-            <a:ext cx="2560320" cy="2560320"/>
+            <a:off x="7104973" y="1520297"/>
+            <a:ext cx="1688649" cy="1688649"/>
           </a:xfrm>
           <a:prstGeom prst="ellipse">
             <a:avLst/>
@@ -10932,8 +10932,8 @@
         </p:nvSpPr>
         <p:spPr>
           <a:xfrm>
-            <a:off x="502920" y="475488"/>
-            <a:ext cx="6766560" cy="274320"/>
+            <a:off x="1681812" y="364222"/>
+            <a:ext cx="4806155" cy="194844"/>
           </a:xfrm>
           <a:prstGeom prst="rect">
             <a:avLst/>
@@ -10949,7 +10949,7 @@
               <a:buNone/>
             </a:pPr>
             <a:r>
-              <a:rPr lang="en-US" sz="1250" b="1" dirty="0">
+              <a:rPr lang="en-US" sz="890" b="1" dirty="0">
                 <a:solidFill>
                   <a:srgbClr val="FFB020"/>
                 </a:solidFill>
@@ -10959,7 +10959,7 @@
               </a:rPr>
               <a:t>Câu 4 · 第四題（5 分鐘，文字題）</a:t>
             </a:r>
-            <a:endParaRPr lang="en-US" sz="1250" dirty="0"/>
+            <a:endParaRPr lang="en-US" sz="890" dirty="0"/>
           </a:p>
         </p:txBody>
       </p:sp>
@@ -10971,8 +10971,8 @@
         </p:nvSpPr>
         <p:spPr>
           <a:xfrm>
-            <a:off x="502920" y="786384"/>
-            <a:ext cx="8046720" cy="1225296"/>
+            <a:off x="1681812" y="585045"/>
+            <a:ext cx="5715427" cy="870304"/>
           </a:xfrm>
           <a:prstGeom prst="rect">
             <a:avLst/>
@@ -10991,7 +10991,7 @@
               <a:buNone/>
             </a:pPr>
             <a:r>
-              <a:rPr lang="en-US" sz="2300" b="1" dirty="0">
+              <a:rPr lang="en-US" sz="1630" b="1" dirty="0">
                 <a:solidFill>
                   <a:srgbClr val="FFFFFF"/>
                 </a:solidFill>
@@ -11001,7 +11001,7 @@
               </a:rPr>
               <a:t>«Tia» trong mô phỏng này, trên xe thật là cảm biến nào? Nó thiếu những khả năng gì?</a:t>
             </a:r>
-            <a:endParaRPr lang="en-US" sz="2300" dirty="0"/>
+            <a:endParaRPr lang="en-US" sz="1630" dirty="0"/>
           </a:p>
           <a:p>
             <a:pPr indent="0" marL="0">
@@ -11011,7 +11011,7 @@
               <a:buNone/>
             </a:pPr>
             <a:r>
-              <a:rPr lang="en-US" sz="1500" dirty="0">
+              <a:rPr lang="en-US" sz="1070" dirty="0">
                 <a:solidFill>
                   <a:srgbClr val="AFC3D4"/>
                 </a:solidFill>
@@ -11021,7 +11021,7 @@
               </a:rPr>
               <a:t>模擬器裡的「射線」，在真車上是哪一種感測器？它少了哪些能力？</a:t>
             </a:r>
-            <a:endParaRPr lang="en-US" sz="2300" dirty="0"/>
+            <a:endParaRPr lang="en-US" sz="1630" dirty="0"/>
           </a:p>
         </p:txBody>
       </p:sp>
@@ -11033,8 +11033,8 @@
         </p:nvSpPr>
         <p:spPr>
           <a:xfrm>
-            <a:off x="502920" y="1880384"/>
-            <a:ext cx="8138160" cy="621792"/>
+            <a:off x="1681812" y="1362092"/>
+            <a:ext cx="5780375" cy="441647"/>
           </a:xfrm>
           <a:prstGeom prst="roundRect">
             <a:avLst>
@@ -11055,8 +11055,8 @@
         </p:nvSpPr>
         <p:spPr>
           <a:xfrm>
-            <a:off x="667512" y="2026688"/>
-            <a:ext cx="329184" cy="329184"/>
+            <a:off x="1798719" y="1466008"/>
+            <a:ext cx="233813" cy="233813"/>
           </a:xfrm>
           <a:prstGeom prst="ellipse">
             <a:avLst/>
@@ -11075,8 +11075,8 @@
         </p:nvSpPr>
         <p:spPr>
           <a:xfrm>
-            <a:off x="667512" y="2054120"/>
-            <a:ext cx="329184" cy="274320"/>
+            <a:off x="1798719" y="1485493"/>
+            <a:ext cx="233813" cy="194844"/>
           </a:xfrm>
           <a:prstGeom prst="rect">
             <a:avLst/>
@@ -11092,7 +11092,7 @@
               <a:buNone/>
             </a:pPr>
             <a:r>
-              <a:rPr lang="en-US" sz="1200" b="1" dirty="0">
+              <a:rPr lang="en-US" sz="850" b="1" dirty="0">
                 <a:solidFill>
                   <a:srgbClr val="FFFFFF"/>
                 </a:solidFill>
@@ -11102,7 +11102,7 @@
               </a:rPr>
               <a:t>1</a:t>
             </a:r>
-            <a:endParaRPr lang="en-US" sz="1200" dirty="0"/>
+            <a:endParaRPr lang="en-US" sz="850" dirty="0"/>
           </a:p>
         </p:txBody>
       </p:sp>
@@ -11114,8 +11114,8 @@
         </p:nvSpPr>
         <p:spPr>
           <a:xfrm>
-            <a:off x="1161288" y="1926104"/>
-            <a:ext cx="7296912" cy="548640"/>
+            <a:off x="2149438" y="1394566"/>
+            <a:ext cx="5182853" cy="389688"/>
           </a:xfrm>
           <a:prstGeom prst="rect">
             <a:avLst/>
@@ -11134,7 +11134,7 @@
               <a:buNone/>
             </a:pPr>
             <a:r>
-              <a:rPr lang="en-US" sz="1250" b="1" dirty="0">
+              <a:rPr lang="en-US" sz="890" b="1" dirty="0">
                 <a:solidFill>
                   <a:srgbClr val="FFFFFF"/>
                 </a:solidFill>
@@ -11144,7 +11144,7 @@
               </a:rPr>
               <a:t>Gợi ý: nó không thấy màu, không thấy vạch kẻ đường</a:t>
             </a:r>
-            <a:endParaRPr lang="en-US" sz="1250" dirty="0"/>
+            <a:endParaRPr lang="en-US" sz="890" dirty="0"/>
           </a:p>
           <a:p>
             <a:pPr indent="0" marL="0">
@@ -11154,7 +11154,7 @@
               <a:buNone/>
             </a:pPr>
             <a:r>
-              <a:rPr lang="en-US" sz="1150" dirty="0">
+              <a:rPr lang="en-US" sz="820" dirty="0">
                 <a:solidFill>
                   <a:srgbClr val="AFC3D4"/>
                 </a:solidFill>
@@ -11164,7 +11164,7 @@
               </a:rPr>
               <a:t>提示：它看不到顏色、看不到車道線</a:t>
             </a:r>
-            <a:endParaRPr lang="en-US" sz="1250" dirty="0"/>
+            <a:endParaRPr lang="en-US" sz="890" dirty="0"/>
           </a:p>
         </p:txBody>
       </p:sp>
@@ -11176,8 +11176,8 @@
         </p:nvSpPr>
         <p:spPr>
           <a:xfrm>
-            <a:off x="502920" y="2593616"/>
-            <a:ext cx="8138160" cy="621792"/>
+            <a:off x="1681812" y="1868686"/>
+            <a:ext cx="5780375" cy="441647"/>
           </a:xfrm>
           <a:prstGeom prst="roundRect">
             <a:avLst>
@@ -11198,8 +11198,8 @@
         </p:nvSpPr>
         <p:spPr>
           <a:xfrm>
-            <a:off x="667512" y="2739920"/>
-            <a:ext cx="329184" cy="329184"/>
+            <a:off x="1798719" y="1972603"/>
+            <a:ext cx="233813" cy="233813"/>
           </a:xfrm>
           <a:prstGeom prst="ellipse">
             <a:avLst/>
@@ -11218,8 +11218,8 @@
         </p:nvSpPr>
         <p:spPr>
           <a:xfrm>
-            <a:off x="667512" y="2767352"/>
-            <a:ext cx="329184" cy="274320"/>
+            <a:off x="1798719" y="1992087"/>
+            <a:ext cx="233813" cy="194844"/>
           </a:xfrm>
           <a:prstGeom prst="rect">
             <a:avLst/>
@@ -11235,7 +11235,7 @@
               <a:buNone/>
             </a:pPr>
             <a:r>
-              <a:rPr lang="en-US" sz="1200" b="1" dirty="0">
+              <a:rPr lang="en-US" sz="850" b="1" dirty="0">
                 <a:solidFill>
                   <a:srgbClr val="FFFFFF"/>
                 </a:solidFill>
@@ -11245,7 +11245,7 @@
               </a:rPr>
               <a:t>2</a:t>
             </a:r>
-            <a:endParaRPr lang="en-US" sz="1200" dirty="0"/>
+            <a:endParaRPr lang="en-US" sz="850" dirty="0"/>
           </a:p>
         </p:txBody>
       </p:sp>
@@ -11257,8 +11257,8 @@
         </p:nvSpPr>
         <p:spPr>
           <a:xfrm>
-            <a:off x="1161288" y="2639336"/>
-            <a:ext cx="7296912" cy="548640"/>
+            <a:off x="2149438" y="1901160"/>
+            <a:ext cx="5182853" cy="389688"/>
           </a:xfrm>
           <a:prstGeom prst="rect">
             <a:avLst/>
@@ -11277,7 +11277,7 @@
               <a:buNone/>
             </a:pPr>
             <a:r>
-              <a:rPr lang="en-US" sz="1250" b="1" dirty="0">
+              <a:rPr lang="en-US" sz="890" b="1" dirty="0">
                 <a:solidFill>
                   <a:srgbClr val="FFFFFF"/>
                 </a:solidFill>
@@ -11287,7 +11287,7 @@
               </a:rPr>
               <a:t>Gợi ý: nó không phân biệt được người với cột điện</a:t>
             </a:r>
-            <a:endParaRPr lang="en-US" sz="1250" dirty="0"/>
+            <a:endParaRPr lang="en-US" sz="890" dirty="0"/>
           </a:p>
           <a:p>
             <a:pPr indent="0" marL="0">
@@ -11297,7 +11297,7 @@
               <a:buNone/>
             </a:pPr>
             <a:r>
-              <a:rPr lang="en-US" sz="1150" dirty="0">
+              <a:rPr lang="en-US" sz="820" dirty="0">
                 <a:solidFill>
                   <a:srgbClr val="AFC3D4"/>
                 </a:solidFill>
@@ -11307,7 +11307,7 @@
               </a:rPr>
               <a:t>提示：它分不出那是人還是一根柱子</a:t>
             </a:r>
-            <a:endParaRPr lang="en-US" sz="1250" dirty="0"/>
+            <a:endParaRPr lang="en-US" sz="890" dirty="0"/>
           </a:p>
         </p:txBody>
       </p:sp>
@@ -11319,8 +11319,8 @@
         </p:nvSpPr>
         <p:spPr>
           <a:xfrm>
-            <a:off x="502920" y="3306848"/>
-            <a:ext cx="8138160" cy="621792"/>
+            <a:off x="1681812" y="2375281"/>
+            <a:ext cx="5780375" cy="441647"/>
           </a:xfrm>
           <a:prstGeom prst="roundRect">
             <a:avLst>
@@ -11341,8 +11341,8 @@
         </p:nvSpPr>
         <p:spPr>
           <a:xfrm>
-            <a:off x="667512" y="3453152"/>
-            <a:ext cx="329184" cy="329184"/>
+            <a:off x="1798719" y="2479198"/>
+            <a:ext cx="233813" cy="233813"/>
           </a:xfrm>
           <a:prstGeom prst="ellipse">
             <a:avLst/>
@@ -11361,8 +11361,8 @@
         </p:nvSpPr>
         <p:spPr>
           <a:xfrm>
-            <a:off x="667512" y="3480584"/>
-            <a:ext cx="329184" cy="274320"/>
+            <a:off x="1798719" y="2498682"/>
+            <a:ext cx="233813" cy="194844"/>
           </a:xfrm>
           <a:prstGeom prst="rect">
             <a:avLst/>
@@ -11378,7 +11378,7 @@
               <a:buNone/>
             </a:pPr>
             <a:r>
-              <a:rPr lang="en-US" sz="1200" b="1" dirty="0">
+              <a:rPr lang="en-US" sz="850" b="1" dirty="0">
                 <a:solidFill>
                   <a:srgbClr val="FFFFFF"/>
                 </a:solidFill>
@@ -11388,7 +11388,7 @@
               </a:rPr>
               <a:t>3</a:t>
             </a:r>
-            <a:endParaRPr lang="en-US" sz="1200" dirty="0"/>
+            <a:endParaRPr lang="en-US" sz="850" dirty="0"/>
           </a:p>
         </p:txBody>
       </p:sp>
@@ -11400,8 +11400,8 @@
         </p:nvSpPr>
         <p:spPr>
           <a:xfrm>
-            <a:off x="1161288" y="3352568"/>
-            <a:ext cx="7296912" cy="548640"/>
+            <a:off x="2149438" y="2407755"/>
+            <a:ext cx="5182853" cy="389688"/>
           </a:xfrm>
           <a:prstGeom prst="rect">
             <a:avLst/>
@@ -11420,7 +11420,7 @@
               <a:buNone/>
             </a:pPr>
             <a:r>
-              <a:rPr lang="en-US" sz="1250" b="1" dirty="0">
+              <a:rPr lang="en-US" sz="890" b="1" dirty="0">
                 <a:solidFill>
                   <a:srgbClr val="FFFFFF"/>
                 </a:solidFill>
@@ -11430,7 +11430,7 @@
               </a:rPr>
               <a:t>Gợi ý: nó không biết chiếc xe máy đó giây sau sẽ lách sang đâu</a:t>
             </a:r>
-            <a:endParaRPr lang="en-US" sz="1250" dirty="0"/>
+            <a:endParaRPr lang="en-US" sz="890" dirty="0"/>
           </a:p>
           <a:p>
             <a:pPr indent="0" marL="0">
@@ -11440,7 +11440,7 @@
               <a:buNone/>
             </a:pPr>
             <a:r>
-              <a:rPr lang="en-US" sz="1150" dirty="0">
+              <a:rPr lang="en-US" sz="820" dirty="0">
                 <a:solidFill>
                   <a:srgbClr val="AFC3D4"/>
                 </a:solidFill>
@@ -11450,7 +11450,7 @@
               </a:rPr>
               <a:t>提示：它不知道那台機車下一秒要往哪裡鑽</a:t>
             </a:r>
-            <a:endParaRPr lang="en-US" sz="1250" dirty="0"/>
+            <a:endParaRPr lang="en-US" sz="890" dirty="0"/>
           </a:p>
         </p:txBody>
       </p:sp>
@@ -11462,8 +11462,8 @@
         </p:nvSpPr>
         <p:spPr>
           <a:xfrm>
-            <a:off x="502920" y="4056656"/>
-            <a:ext cx="8046720" cy="457200"/>
+            <a:off x="1681812" y="2907855"/>
+            <a:ext cx="5715427" cy="324740"/>
           </a:xfrm>
           <a:prstGeom prst="rect">
             <a:avLst/>
@@ -11482,7 +11482,7 @@
               <a:buNone/>
             </a:pPr>
             <a:r>
-              <a:rPr lang="en-US" sz="1250" b="1" dirty="0">
+              <a:rPr lang="en-US" sz="890" b="1" dirty="0">
                 <a:solidFill>
                   <a:srgbClr val="FFB020"/>
                 </a:solidFill>
@@ -11492,7 +11492,7 @@
               </a:rPr>
               <a:t>Viết ba câu. Tờ giấy này tuần 8 sẽ lấy ra đối chiếu lại.</a:t>
             </a:r>
-            <a:endParaRPr lang="en-US" sz="1250" dirty="0"/>
+            <a:endParaRPr lang="en-US" sz="890" dirty="0"/>
           </a:p>
           <a:p>
             <a:pPr indent="0" marL="0">
@@ -11502,7 +11502,7 @@
               <a:buNone/>
             </a:pPr>
             <a:r>
-              <a:rPr lang="en-US" sz="1150" dirty="0">
+              <a:rPr lang="en-US" sz="820" dirty="0">
                 <a:solidFill>
                   <a:srgbClr val="FFB020"/>
                 </a:solidFill>
@@ -11512,7 +11512,7 @@
               </a:rPr>
               <a:t>寫三句話。這張紙第八週會拿出來對照。</a:t>
             </a:r>
-            <a:endParaRPr lang="en-US" sz="1250" dirty="0"/>
+            <a:endParaRPr lang="en-US" sz="890" dirty="0"/>
           </a:p>
         </p:txBody>
       </p:sp>
@@ -11524,8 +11524,8 @@
         </p:nvSpPr>
         <p:spPr>
           <a:xfrm>
-            <a:off x="109728" y="4791456"/>
-            <a:ext cx="822960" cy="256032"/>
+            <a:off x="1402536" y="3390800"/>
+            <a:ext cx="584532" cy="181855"/>
           </a:xfrm>
           <a:prstGeom prst="rect">
             <a:avLst/>
@@ -11541,7 +11541,7 @@
               <a:buNone/>
             </a:pPr>
             <a:r>
-              <a:rPr lang="en-US" sz="900" dirty="0">
+              <a:rPr lang="en-US" sz="640" dirty="0">
                 <a:solidFill>
                   <a:srgbClr val="9FB3C8"/>
                 </a:solidFill>
@@ -11551,7 +11551,7 @@
               </a:rPr>
               <a:t>6 / 11</a:t>
             </a:r>
-            <a:endParaRPr lang="en-US" sz="900" dirty="0"/>
+            <a:endParaRPr lang="en-US" sz="640" dirty="0"/>
           </a:p>
         </p:txBody>
       </p:sp>
@@ -11563,8 +11563,8 @@
         </p:nvSpPr>
         <p:spPr>
           <a:xfrm>
-            <a:off x="960120" y="4791456"/>
-            <a:ext cx="2011680" cy="256032"/>
+            <a:off x="2006553" y="3390800"/>
+            <a:ext cx="1428857" cy="181855"/>
           </a:xfrm>
           <a:prstGeom prst="rect">
             <a:avLst/>
@@ -11580,7 +11580,7 @@
               <a:buNone/>
             </a:pPr>
             <a:r>
-              <a:rPr lang="en-US" sz="900" dirty="0">
+              <a:rPr lang="en-US" sz="640" dirty="0">
                 <a:solidFill>
                   <a:srgbClr val="9FB3C8"/>
                 </a:solidFill>
@@ -11590,7 +11590,7 @@
               </a:rPr>
               <a:t>Tiết 3 · 第 3 節</a:t>
             </a:r>
-            <a:endParaRPr lang="en-US" sz="900" dirty="0"/>
+            <a:endParaRPr lang="en-US" sz="640" dirty="0"/>
           </a:p>
         </p:txBody>
       </p:sp>
@@ -11627,8 +11627,8 @@
         </p:nvSpPr>
         <p:spPr>
           <a:xfrm>
-            <a:off x="502920" y="420624"/>
-            <a:ext cx="8138160" cy="274320"/>
+            <a:off x="1681812" y="325253"/>
+            <a:ext cx="5780375" cy="194844"/>
           </a:xfrm>
           <a:prstGeom prst="rect">
             <a:avLst/>
@@ -11644,7 +11644,7 @@
               <a:buNone/>
             </a:pPr>
             <a:r>
-              <a:rPr lang="en-US" sz="1250" b="1" dirty="0">
+              <a:rPr lang="en-US" sz="890" b="1" dirty="0">
                 <a:solidFill>
                   <a:srgbClr val="007F72"/>
                 </a:solidFill>
@@ -11654,7 +11654,7 @@
               </a:rPr>
               <a:t>Thêm · 多一個按鈕（有做完的組別）</a:t>
             </a:r>
-            <a:endParaRPr lang="en-US" sz="1250" dirty="0"/>
+            <a:endParaRPr lang="en-US" sz="890" dirty="0"/>
           </a:p>
         </p:txBody>
       </p:sp>
@@ -11666,8 +11666,8 @@
         </p:nvSpPr>
         <p:spPr>
           <a:xfrm>
-            <a:off x="502920" y="1101852"/>
-            <a:ext cx="2468880" cy="2514600"/>
+            <a:off x="1681812" y="809116"/>
+            <a:ext cx="1753597" cy="1786071"/>
           </a:xfrm>
           <a:prstGeom prst="roundRect">
             <a:avLst>
@@ -11693,8 +11693,8 @@
         </p:nvSpPr>
         <p:spPr>
           <a:xfrm flipH="1" flipV="1">
-            <a:off x="657831" y="2306044"/>
-            <a:ext cx="459932" cy="265542"/>
+            <a:off x="1791842" y="1664430"/>
+            <a:ext cx="326681" cy="188609"/>
           </a:xfrm>
           <a:prstGeom prst="line">
             <a:avLst/>
@@ -11716,8 +11716,8 @@
         </p:nvSpPr>
         <p:spPr>
           <a:xfrm flipH="1" flipV="1">
-            <a:off x="776389" y="2164752"/>
-            <a:ext cx="341374" cy="406834"/>
+            <a:off x="1876052" y="1564073"/>
+            <a:ext cx="242471" cy="288966"/>
           </a:xfrm>
           <a:prstGeom prst="line">
             <a:avLst/>
@@ -11739,8 +11739,8 @@
         </p:nvSpPr>
         <p:spPr>
           <a:xfrm flipH="1" flipV="1">
-            <a:off x="936121" y="2072530"/>
-            <a:ext cx="181641" cy="499055"/>
+            <a:off x="1989507" y="1498569"/>
+            <a:ext cx="129016" cy="354469"/>
           </a:xfrm>
           <a:prstGeom prst="line">
             <a:avLst/>
@@ -11762,8 +11762,8 @@
         </p:nvSpPr>
         <p:spPr>
           <a:xfrm flipV="1">
-            <a:off x="1117763" y="2040502"/>
-            <a:ext cx="0" cy="531084"/>
+            <a:off x="2118523" y="1475820"/>
+            <a:ext cx="0" cy="377218"/>
           </a:xfrm>
           <a:prstGeom prst="line">
             <a:avLst/>
@@ -11785,8 +11785,8 @@
         </p:nvSpPr>
         <p:spPr>
           <a:xfrm flipV="1">
-            <a:off x="1117763" y="2072530"/>
-            <a:ext cx="181641" cy="499055"/>
+            <a:off x="2118523" y="1498569"/>
+            <a:ext cx="129016" cy="354469"/>
           </a:xfrm>
           <a:prstGeom prst="line">
             <a:avLst/>
@@ -11808,8 +11808,8 @@
         </p:nvSpPr>
         <p:spPr>
           <a:xfrm flipV="1">
-            <a:off x="1117763" y="2164752"/>
-            <a:ext cx="341374" cy="406834"/>
+            <a:off x="2118523" y="1564073"/>
+            <a:ext cx="242471" cy="288966"/>
           </a:xfrm>
           <a:prstGeom prst="line">
             <a:avLst/>
@@ -11831,8 +11831,8 @@
         </p:nvSpPr>
         <p:spPr>
           <a:xfrm flipV="1">
-            <a:off x="1117763" y="2306044"/>
-            <a:ext cx="459932" cy="265542"/>
+            <a:off x="2118523" y="1664430"/>
+            <a:ext cx="326681" cy="188609"/>
           </a:xfrm>
           <a:prstGeom prst="line">
             <a:avLst/>
@@ -11854,8 +11854,8 @@
         </p:nvSpPr>
         <p:spPr>
           <a:xfrm>
-            <a:off x="1069080" y="2522903"/>
-            <a:ext cx="97365" cy="97365"/>
+            <a:off x="2083945" y="1818460"/>
+            <a:ext cx="69157" cy="69157"/>
           </a:xfrm>
           <a:prstGeom prst="ellipse">
             <a:avLst/>
@@ -11874,8 +11874,8 @@
         </p:nvSpPr>
         <p:spPr>
           <a:xfrm>
-            <a:off x="2002902" y="2005096"/>
-            <a:ext cx="708111" cy="708111"/>
+            <a:off x="2747220" y="1450673"/>
+            <a:ext cx="502958" cy="502958"/>
           </a:xfrm>
           <a:prstGeom prst="donut">
             <a:avLst/>
@@ -11896,8 +11896,8 @@
         </p:nvSpPr>
         <p:spPr>
           <a:xfrm>
-            <a:off x="2711013" y="2359152"/>
-            <a:ext cx="177028" cy="0"/>
+            <a:off x="3250178" y="1702151"/>
+            <a:ext cx="125739" cy="0"/>
           </a:xfrm>
           <a:prstGeom prst="line">
             <a:avLst/>
@@ -11919,8 +11919,8 @@
         </p:nvSpPr>
         <p:spPr>
           <a:xfrm>
-            <a:off x="2663579" y="2536180"/>
-            <a:ext cx="153311" cy="88514"/>
+            <a:off x="3216486" y="1827891"/>
+            <a:ext cx="108894" cy="62870"/>
           </a:xfrm>
           <a:prstGeom prst="line">
             <a:avLst/>
@@ -11942,8 +11942,8 @@
         </p:nvSpPr>
         <p:spPr>
           <a:xfrm>
-            <a:off x="2533985" y="2665773"/>
-            <a:ext cx="88514" cy="153311"/>
+            <a:off x="3124438" y="1919938"/>
+            <a:ext cx="62870" cy="108894"/>
           </a:xfrm>
           <a:prstGeom prst="line">
             <a:avLst/>
@@ -11965,8 +11965,8 @@
         </p:nvSpPr>
         <p:spPr>
           <a:xfrm>
-            <a:off x="2356957" y="2713208"/>
-            <a:ext cx="0" cy="177028"/>
+            <a:off x="2998699" y="1953630"/>
+            <a:ext cx="0" cy="125739"/>
           </a:xfrm>
           <a:prstGeom prst="line">
             <a:avLst/>
@@ -11988,8 +11988,8 @@
         </p:nvSpPr>
         <p:spPr>
           <a:xfrm flipH="1">
-            <a:off x="2091416" y="2665773"/>
-            <a:ext cx="88514" cy="153311"/>
+            <a:off x="2810090" y="1919938"/>
+            <a:ext cx="62870" cy="108894"/>
           </a:xfrm>
           <a:prstGeom prst="line">
             <a:avLst/>
@@ -12011,8 +12011,8 @@
         </p:nvSpPr>
         <p:spPr>
           <a:xfrm flipH="1">
-            <a:off x="1897026" y="2536180"/>
-            <a:ext cx="153311" cy="88514"/>
+            <a:off x="2672018" y="1827891"/>
+            <a:ext cx="108894" cy="62870"/>
           </a:xfrm>
           <a:prstGeom prst="line">
             <a:avLst/>
@@ -12034,8 +12034,8 @@
         </p:nvSpPr>
         <p:spPr>
           <a:xfrm flipH="1">
-            <a:off x="1825874" y="2359152"/>
-            <a:ext cx="177028" cy="0"/>
+            <a:off x="2621481" y="1702151"/>
+            <a:ext cx="125739" cy="0"/>
           </a:xfrm>
           <a:prstGeom prst="line">
             <a:avLst/>
@@ -12057,8 +12057,8 @@
         </p:nvSpPr>
         <p:spPr>
           <a:xfrm flipH="1" flipV="1">
-            <a:off x="1897026" y="2093610"/>
-            <a:ext cx="153311" cy="88514"/>
+            <a:off x="2672018" y="1513542"/>
+            <a:ext cx="108894" cy="62870"/>
           </a:xfrm>
           <a:prstGeom prst="line">
             <a:avLst/>
@@ -12080,8 +12080,8 @@
         </p:nvSpPr>
         <p:spPr>
           <a:xfrm flipH="1" flipV="1">
-            <a:off x="2091416" y="1899220"/>
-            <a:ext cx="88514" cy="153311"/>
+            <a:off x="2810090" y="1375471"/>
+            <a:ext cx="62870" cy="108894"/>
           </a:xfrm>
           <a:prstGeom prst="line">
             <a:avLst/>
@@ -12103,8 +12103,8 @@
         </p:nvSpPr>
         <p:spPr>
           <a:xfrm flipH="1" flipV="1">
-            <a:off x="2356957" y="1828068"/>
-            <a:ext cx="0" cy="177028"/>
+            <a:off x="2998699" y="1324933"/>
+            <a:ext cx="0" cy="125739"/>
           </a:xfrm>
           <a:prstGeom prst="line">
             <a:avLst/>
@@ -12126,8 +12126,8 @@
         </p:nvSpPr>
         <p:spPr>
           <a:xfrm flipV="1">
-            <a:off x="2533985" y="1899220"/>
-            <a:ext cx="88514" cy="153311"/>
+            <a:off x="3124438" y="1375471"/>
+            <a:ext cx="62870" cy="108894"/>
           </a:xfrm>
           <a:prstGeom prst="line">
             <a:avLst/>
@@ -12149,8 +12149,8 @@
         </p:nvSpPr>
         <p:spPr>
           <a:xfrm flipV="1">
-            <a:off x="2663579" y="2093610"/>
-            <a:ext cx="153311" cy="88514"/>
+            <a:off x="3216486" y="1513542"/>
+            <a:ext cx="108894" cy="62870"/>
           </a:xfrm>
           <a:prstGeom prst="line">
             <a:avLst/>
@@ -12172,8 +12172,8 @@
         </p:nvSpPr>
         <p:spPr>
           <a:xfrm>
-            <a:off x="2308275" y="2310469"/>
-            <a:ext cx="97365" cy="97365"/>
+            <a:off x="2964120" y="1667573"/>
+            <a:ext cx="69157" cy="69157"/>
           </a:xfrm>
           <a:prstGeom prst="ellipse">
             <a:avLst/>
@@ -12192,8 +12192,8 @@
         </p:nvSpPr>
         <p:spPr>
           <a:xfrm>
-            <a:off x="1648846" y="2292492"/>
-            <a:ext cx="177028" cy="133320"/>
+            <a:off x="2495741" y="1654804"/>
+            <a:ext cx="125739" cy="94694"/>
           </a:xfrm>
           <a:prstGeom prst="rightArrow">
             <a:avLst/>
@@ -12212,8 +12212,8 @@
         </p:nvSpPr>
         <p:spPr>
           <a:xfrm>
-            <a:off x="3429000" y="1319005"/>
-            <a:ext cx="5212080" cy="1005611"/>
+            <a:off x="3760150" y="963355"/>
+            <a:ext cx="3702038" cy="714266"/>
           </a:xfrm>
           <a:prstGeom prst="rect">
             <a:avLst/>
@@ -12232,7 +12232,7 @@
               <a:buNone/>
             </a:pPr>
             <a:r>
-              <a:rPr lang="en-US" sz="2300" b="1" dirty="0">
+              <a:rPr lang="en-US" sz="1630" b="1" dirty="0">
                 <a:solidFill>
                   <a:srgbClr val="0B1F3A"/>
                 </a:solidFill>
@@ -12242,7 +12242,7 @@
               </a:rPr>
               <a:t>Nút mới: đổi giữa LiDAR cố định và LiDAR quay 360°</a:t>
             </a:r>
-            <a:endParaRPr lang="en-US" sz="2300" dirty="0"/>
+            <a:endParaRPr lang="en-US" sz="1630" dirty="0"/>
           </a:p>
           <a:p>
             <a:pPr indent="0" marL="0">
@@ -12252,7 +12252,7 @@
               <a:buNone/>
             </a:pPr>
             <a:r>
-              <a:rPr lang="en-US" sz="1400" dirty="0">
+              <a:rPr lang="en-US" sz="990" dirty="0">
                 <a:solidFill>
                   <a:srgbClr val="007F72"/>
                 </a:solidFill>
@@ -12262,7 +12262,7 @@
               </a:rPr>
               <a:t>新按鈕：固定式光達 ↔ 360° 旋轉式光達</a:t>
             </a:r>
-            <a:endParaRPr lang="en-US" sz="2300" dirty="0"/>
+            <a:endParaRPr lang="en-US" sz="1630" dirty="0"/>
           </a:p>
         </p:txBody>
       </p:sp>
@@ -12274,8 +12274,8 @@
         </p:nvSpPr>
         <p:spPr>
           <a:xfrm>
-            <a:off x="3429000" y="2416057"/>
-            <a:ext cx="5212080" cy="1074682"/>
+            <a:off x="3760150" y="1742570"/>
+            <a:ext cx="3702038" cy="763326"/>
           </a:xfrm>
           <a:prstGeom prst="rect">
             <a:avLst/>
@@ -12294,7 +12294,7 @@
               <a:buNone/>
             </a:pPr>
             <a:r>
-              <a:rPr lang="en-US" sz="1250" dirty="0">
+              <a:rPr lang="en-US" sz="890" dirty="0">
                 <a:solidFill>
                   <a:srgbClr val="5F7183"/>
                 </a:solidFill>
@@ -12304,7 +12304,7 @@
               </a:rPr>
               <a:t>Loại cố định chỉ nhìn phía trước, nhưng dữ liệu luôn mới. Loại quay nhìn được vòng quanh, nhưng mỗi hướng chỉ được cập nhật mỗi vòng một lần — lúc bạn nhìn nó, số liệu đó có thể đã cũ.</a:t>
             </a:r>
-            <a:endParaRPr lang="en-US" sz="1250" dirty="0"/>
+            <a:endParaRPr lang="en-US" sz="890" dirty="0"/>
           </a:p>
           <a:p>
             <a:pPr indent="0" marL="0">
@@ -12314,7 +12314,7 @@
               <a:buNone/>
             </a:pPr>
             <a:r>
-              <a:rPr lang="en-US" sz="1150" dirty="0">
+              <a:rPr lang="en-US" sz="820" dirty="0">
                 <a:solidFill>
                   <a:srgbClr val="5F7183"/>
                 </a:solidFill>
@@ -12324,7 +12324,7 @@
               </a:rPr>
               <a:t>固定式只看前方，但資料永遠是最新的。旋轉式看得到一圈，但每個方向每轉一圈才更新一次——你看它的時候，那筆資料可能已經是舊的。</a:t>
             </a:r>
-            <a:endParaRPr lang="en-US" sz="1250" dirty="0"/>
+            <a:endParaRPr lang="en-US" sz="890" dirty="0"/>
           </a:p>
         </p:txBody>
       </p:sp>
@@ -12336,8 +12336,8 @@
         </p:nvSpPr>
         <p:spPr>
           <a:xfrm>
-            <a:off x="502920" y="3913632"/>
-            <a:ext cx="8138160" cy="621792"/>
+            <a:off x="1681812" y="2806268"/>
+            <a:ext cx="5780375" cy="441647"/>
           </a:xfrm>
           <a:prstGeom prst="roundRect">
             <a:avLst>
@@ -12363,8 +12363,8 @@
         </p:nvSpPr>
         <p:spPr>
           <a:xfrm>
-            <a:off x="685800" y="3986784"/>
-            <a:ext cx="7772400" cy="493776"/>
+            <a:off x="1811708" y="2858226"/>
+            <a:ext cx="5520583" cy="350719"/>
           </a:xfrm>
           <a:prstGeom prst="rect">
             <a:avLst/>
@@ -12383,7 +12383,7 @@
               <a:buNone/>
             </a:pPr>
             <a:r>
-              <a:rPr lang="en-US" sz="1250" b="1" dirty="0">
+              <a:rPr lang="en-US" sz="890" b="1" dirty="0">
                 <a:solidFill>
                   <a:srgbClr val="7A4E00"/>
                 </a:solidFill>
@@ -12393,7 +12393,7 @@
               </a:rPr>
               <a:t>Nhóm nào xong sớm: thử đổi sang loại quay, xem ba con số của bạn có còn dùng được không.</a:t>
             </a:r>
-            <a:endParaRPr lang="en-US" sz="1250" dirty="0"/>
+            <a:endParaRPr lang="en-US" sz="890" dirty="0"/>
           </a:p>
           <a:p>
             <a:pPr indent="0" marL="0">
@@ -12403,7 +12403,7 @@
               <a:buNone/>
             </a:pPr>
             <a:r>
-              <a:rPr lang="en-US" sz="1150" dirty="0">
+              <a:rPr lang="en-US" sz="820" dirty="0">
                 <a:solidFill>
                   <a:srgbClr val="7A4E00"/>
                 </a:solidFill>
@@ -12413,7 +12413,7 @@
               </a:rPr>
               <a:t>提早做完的組別：切到旋轉式，看你們那三個數字還管不管用。</a:t>
             </a:r>
-            <a:endParaRPr lang="en-US" sz="1250" dirty="0"/>
+            <a:endParaRPr lang="en-US" sz="890" dirty="0"/>
           </a:p>
         </p:txBody>
       </p:sp>
@@ -12433,8 +12433,8 @@
         </p:blipFill>
         <p:spPr>
           <a:xfrm>
-            <a:off x="7516368" y="4718304"/>
-            <a:ext cx="1097280" cy="242439"/>
+            <a:off x="6663327" y="3338842"/>
+            <a:ext cx="779376" cy="172200"/>
           </a:xfrm>
           <a:prstGeom prst="rect">
             <a:avLst/>
@@ -12449,8 +12449,8 @@
         </p:nvSpPr>
         <p:spPr>
           <a:xfrm>
-            <a:off x="109728" y="4791456"/>
-            <a:ext cx="822960" cy="256032"/>
+            <a:off x="1402536" y="3390800"/>
+            <a:ext cx="584532" cy="181855"/>
           </a:xfrm>
           <a:prstGeom prst="rect">
             <a:avLst/>
@@ -12466,7 +12466,7 @@
               <a:buNone/>
             </a:pPr>
             <a:r>
-              <a:rPr lang="en-US" sz="900" dirty="0">
+              <a:rPr lang="en-US" sz="640" dirty="0">
                 <a:solidFill>
                   <a:srgbClr val="5F7183"/>
                 </a:solidFill>
@@ -12476,7 +12476,7 @@
               </a:rPr>
               <a:t>7 / 11</a:t>
             </a:r>
-            <a:endParaRPr lang="en-US" sz="900" dirty="0"/>
+            <a:endParaRPr lang="en-US" sz="640" dirty="0"/>
           </a:p>
         </p:txBody>
       </p:sp>
@@ -12488,8 +12488,8 @@
         </p:nvSpPr>
         <p:spPr>
           <a:xfrm>
-            <a:off x="960120" y="4791456"/>
-            <a:ext cx="2011680" cy="256032"/>
+            <a:off x="2006553" y="3390800"/>
+            <a:ext cx="1428857" cy="181855"/>
           </a:xfrm>
           <a:prstGeom prst="rect">
             <a:avLst/>
@@ -12505,7 +12505,7 @@
               <a:buNone/>
             </a:pPr>
             <a:r>
-              <a:rPr lang="en-US" sz="900" dirty="0">
+              <a:rPr lang="en-US" sz="640" dirty="0">
                 <a:solidFill>
                   <a:srgbClr val="5F7183"/>
                 </a:solidFill>
@@ -12515,7 +12515,7 @@
               </a:rPr>
               <a:t>Tiết 3 · 第 3 節</a:t>
             </a:r>
-            <a:endParaRPr lang="en-US" sz="900" dirty="0"/>
+            <a:endParaRPr lang="en-US" sz="640" dirty="0"/>
           </a:p>
         </p:txBody>
       </p:sp>
@@ -12559,8 +12559,8 @@
         </p:nvSpPr>
         <p:spPr>
           <a:xfrm>
-            <a:off x="6766560" y="-1371600"/>
-            <a:ext cx="4206240" cy="4206240"/>
+            <a:off x="6130753" y="-947729"/>
+            <a:ext cx="2987610" cy="2987610"/>
           </a:xfrm>
           <a:prstGeom prst="ellipse">
             <a:avLst/>
@@ -12584,8 +12584,8 @@
         </p:nvSpPr>
         <p:spPr>
           <a:xfrm>
-            <a:off x="7863840" y="3108960"/>
-            <a:ext cx="2560320" cy="2560320"/>
+            <a:off x="7104973" y="1520297"/>
+            <a:ext cx="1688649" cy="1688649"/>
           </a:xfrm>
           <a:prstGeom prst="ellipse">
             <a:avLst/>
@@ -12606,8 +12606,8 @@
         </p:nvSpPr>
         <p:spPr>
           <a:xfrm>
-            <a:off x="502920" y="475488"/>
-            <a:ext cx="6766560" cy="274320"/>
+            <a:off x="1681812" y="364222"/>
+            <a:ext cx="4806155" cy="194844"/>
           </a:xfrm>
           <a:prstGeom prst="rect">
             <a:avLst/>
@@ -12623,7 +12623,7 @@
               <a:buNone/>
             </a:pPr>
             <a:r>
-              <a:rPr lang="en-US" sz="1250" b="1" dirty="0">
+              <a:rPr lang="en-US" sz="890" b="1" dirty="0">
                 <a:solidFill>
                   <a:srgbClr val="FFB020"/>
                 </a:solidFill>
@@ -12633,7 +12633,7 @@
               </a:rPr>
               <a:t>Lên bảng · 上台（10 分鐘）</a:t>
             </a:r>
-            <a:endParaRPr lang="en-US" sz="1250" dirty="0"/>
+            <a:endParaRPr lang="en-US" sz="890" dirty="0"/>
           </a:p>
         </p:txBody>
       </p:sp>
@@ -12645,8 +12645,8 @@
         </p:nvSpPr>
         <p:spPr>
           <a:xfrm>
-            <a:off x="502920" y="786384"/>
-            <a:ext cx="8046720" cy="1225296"/>
+            <a:off x="1681812" y="585045"/>
+            <a:ext cx="5715427" cy="870304"/>
           </a:xfrm>
           <a:prstGeom prst="rect">
             <a:avLst/>
@@ -12665,7 +12665,7 @@
               <a:buNone/>
             </a:pPr>
             <a:r>
-              <a:rPr lang="en-US" sz="2300" b="1" dirty="0">
+              <a:rPr lang="en-US" sz="1630" b="1" dirty="0">
                 <a:solidFill>
                   <a:srgbClr val="FFFFFF"/>
                 </a:solidFill>
@@ -12675,7 +12675,7 @@
               </a:rPr>
               <a:t>Mỗi nhóm 30 giây: chỉnh ba con số của nhóm cho cả lớp xem, nói một câu vì sao.</a:t>
             </a:r>
-            <a:endParaRPr lang="en-US" sz="2300" dirty="0"/>
+            <a:endParaRPr lang="en-US" sz="1630" dirty="0"/>
           </a:p>
           <a:p>
             <a:pPr indent="0" marL="0">
@@ -12685,7 +12685,7 @@
               <a:buNone/>
             </a:pPr>
             <a:r>
-              <a:rPr lang="en-US" sz="1500" dirty="0">
+              <a:rPr lang="en-US" sz="1070" dirty="0">
                 <a:solidFill>
                   <a:srgbClr val="AFC3D4"/>
                 </a:solidFill>
@@ -12695,7 +12695,7 @@
               </a:rPr>
               <a:t>每組 30 秒：把你們的三個數字調給全班看，說一句為什麼。</a:t>
             </a:r>
-            <a:endParaRPr lang="en-US" sz="2300" dirty="0"/>
+            <a:endParaRPr lang="en-US" sz="1630" dirty="0"/>
           </a:p>
         </p:txBody>
       </p:sp>
@@ -12707,8 +12707,8 @@
         </p:nvSpPr>
         <p:spPr>
           <a:xfrm>
-            <a:off x="502920" y="1880384"/>
-            <a:ext cx="8138160" cy="621792"/>
+            <a:off x="1681812" y="1362092"/>
+            <a:ext cx="5780375" cy="441647"/>
           </a:xfrm>
           <a:prstGeom prst="roundRect">
             <a:avLst>
@@ -12729,8 +12729,8 @@
         </p:nvSpPr>
         <p:spPr>
           <a:xfrm>
-            <a:off x="667512" y="2026688"/>
-            <a:ext cx="329184" cy="329184"/>
+            <a:off x="1798719" y="1466008"/>
+            <a:ext cx="233813" cy="233813"/>
           </a:xfrm>
           <a:prstGeom prst="ellipse">
             <a:avLst/>
@@ -12749,8 +12749,8 @@
         </p:nvSpPr>
         <p:spPr>
           <a:xfrm>
-            <a:off x="667512" y="2054120"/>
-            <a:ext cx="329184" cy="274320"/>
+            <a:off x="1798719" y="1485493"/>
+            <a:ext cx="233813" cy="194844"/>
           </a:xfrm>
           <a:prstGeom prst="rect">
             <a:avLst/>
@@ -12766,7 +12766,7 @@
               <a:buNone/>
             </a:pPr>
             <a:r>
-              <a:rPr lang="en-US" sz="1200" b="1" dirty="0">
+              <a:rPr lang="en-US" sz="850" b="1" dirty="0">
                 <a:solidFill>
                   <a:srgbClr val="FFFFFF"/>
                 </a:solidFill>
@@ -12776,7 +12776,7 @@
               </a:rPr>
               <a:t>1</a:t>
             </a:r>
-            <a:endParaRPr lang="en-US" sz="1200" dirty="0"/>
+            <a:endParaRPr lang="en-US" sz="850" dirty="0"/>
           </a:p>
         </p:txBody>
       </p:sp>
@@ -12788,8 +12788,8 @@
         </p:nvSpPr>
         <p:spPr>
           <a:xfrm>
-            <a:off x="1161288" y="1926104"/>
-            <a:ext cx="7296912" cy="548640"/>
+            <a:off x="2149438" y="1394566"/>
+            <a:ext cx="5182853" cy="389688"/>
           </a:xfrm>
           <a:prstGeom prst="rect">
             <a:avLst/>
@@ -12808,7 +12808,7 @@
               <a:buNone/>
             </a:pPr>
             <a:r>
-              <a:rPr lang="en-US" sz="1250" b="1" dirty="0">
+              <a:rPr lang="en-US" sz="890" b="1" dirty="0">
                 <a:solidFill>
                   <a:srgbClr val="FFFFFF"/>
                 </a:solidFill>
@@ -12818,7 +12818,7 @@
               </a:rPr>
               <a:t>Thầy ghi lên bảng: số giây trụ được · số tia · chiều dài · góc quét</a:t>
             </a:r>
-            <a:endParaRPr lang="en-US" sz="1250" dirty="0"/>
+            <a:endParaRPr lang="en-US" sz="890" dirty="0"/>
           </a:p>
           <a:p>
             <a:pPr indent="0" marL="0">
@@ -12828,7 +12828,7 @@
               <a:buNone/>
             </a:pPr>
             <a:r>
-              <a:rPr lang="en-US" sz="1150" dirty="0">
+              <a:rPr lang="en-US" sz="820" dirty="0">
                 <a:solidFill>
                   <a:srgbClr val="AFC3D4"/>
                 </a:solidFill>
@@ -12838,7 +12838,7 @@
               </a:rPr>
               <a:t>老師在白板上記：撐了幾秒・射線數・長度・張角</a:t>
             </a:r>
-            <a:endParaRPr lang="en-US" sz="1250" dirty="0"/>
+            <a:endParaRPr lang="en-US" sz="890" dirty="0"/>
           </a:p>
         </p:txBody>
       </p:sp>
@@ -12850,8 +12850,8 @@
         </p:nvSpPr>
         <p:spPr>
           <a:xfrm>
-            <a:off x="502920" y="2593616"/>
-            <a:ext cx="8138160" cy="621792"/>
+            <a:off x="1681812" y="1868686"/>
+            <a:ext cx="5780375" cy="441647"/>
           </a:xfrm>
           <a:prstGeom prst="roundRect">
             <a:avLst>
@@ -12872,8 +12872,8 @@
         </p:nvSpPr>
         <p:spPr>
           <a:xfrm>
-            <a:off x="667512" y="2739920"/>
-            <a:ext cx="329184" cy="329184"/>
+            <a:off x="1798719" y="1972603"/>
+            <a:ext cx="233813" cy="233813"/>
           </a:xfrm>
           <a:prstGeom prst="ellipse">
             <a:avLst/>
@@ -12892,8 +12892,8 @@
         </p:nvSpPr>
         <p:spPr>
           <a:xfrm>
-            <a:off x="667512" y="2767352"/>
-            <a:ext cx="329184" cy="274320"/>
+            <a:off x="1798719" y="1992087"/>
+            <a:ext cx="233813" cy="194844"/>
           </a:xfrm>
           <a:prstGeom prst="rect">
             <a:avLst/>
@@ -12909,7 +12909,7 @@
               <a:buNone/>
             </a:pPr>
             <a:r>
-              <a:rPr lang="en-US" sz="1200" b="1" dirty="0">
+              <a:rPr lang="en-US" sz="850" b="1" dirty="0">
                 <a:solidFill>
                   <a:srgbClr val="FFFFFF"/>
                 </a:solidFill>
@@ -12919,7 +12919,7 @@
               </a:rPr>
               <a:t>2</a:t>
             </a:r>
-            <a:endParaRPr lang="en-US" sz="1200" dirty="0"/>
+            <a:endParaRPr lang="en-US" sz="850" dirty="0"/>
           </a:p>
         </p:txBody>
       </p:sp>
@@ -12931,8 +12931,8 @@
         </p:nvSpPr>
         <p:spPr>
           <a:xfrm>
-            <a:off x="1161288" y="2639336"/>
-            <a:ext cx="7296912" cy="548640"/>
+            <a:off x="2149438" y="1901160"/>
+            <a:ext cx="5182853" cy="389688"/>
           </a:xfrm>
           <a:prstGeom prst="rect">
             <a:avLst/>
@@ -12951,7 +12951,7 @@
               <a:buNone/>
             </a:pPr>
             <a:r>
-              <a:rPr lang="en-US" sz="1250" b="1" dirty="0">
+              <a:rPr lang="en-US" sz="890" b="1" dirty="0">
                 <a:solidFill>
                   <a:srgbClr val="FFFFFF"/>
                 </a:solidFill>
@@ -12961,7 +12961,7 @@
               </a:rPr>
               <a:t>Xem có hai nhóm nào ra giống hệt nhau không. Nhóm trụ lâu nhất dùng ba con số nào?</a:t>
             </a:r>
-            <a:endParaRPr lang="en-US" sz="1250" dirty="0"/>
+            <a:endParaRPr lang="en-US" sz="890" dirty="0"/>
           </a:p>
           <a:p>
             <a:pPr indent="0" marL="0">
@@ -12971,7 +12971,7 @@
               <a:buNone/>
             </a:pPr>
             <a:r>
-              <a:rPr lang="en-US" sz="1150" dirty="0">
+              <a:rPr lang="en-US" sz="820" dirty="0">
                 <a:solidFill>
                   <a:srgbClr val="AFC3D4"/>
                 </a:solidFill>
@@ -12981,7 +12981,7 @@
               </a:rPr>
               <a:t>看有沒有兩組完全一樣。撐最久的那一組，用的是哪三個數字？</a:t>
             </a:r>
-            <a:endParaRPr lang="en-US" sz="1250" dirty="0"/>
+            <a:endParaRPr lang="en-US" sz="890" dirty="0"/>
           </a:p>
         </p:txBody>
       </p:sp>
@@ -12993,8 +12993,8 @@
         </p:nvSpPr>
         <p:spPr>
           <a:xfrm>
-            <a:off x="502920" y="3306848"/>
-            <a:ext cx="8138160" cy="621792"/>
+            <a:off x="1681812" y="2375281"/>
+            <a:ext cx="5780375" cy="441647"/>
           </a:xfrm>
           <a:prstGeom prst="roundRect">
             <a:avLst>
@@ -13015,8 +13015,8 @@
         </p:nvSpPr>
         <p:spPr>
           <a:xfrm>
-            <a:off x="667512" y="3453152"/>
-            <a:ext cx="329184" cy="329184"/>
+            <a:off x="1798719" y="2479198"/>
+            <a:ext cx="233813" cy="233813"/>
           </a:xfrm>
           <a:prstGeom prst="ellipse">
             <a:avLst/>
@@ -13035,8 +13035,8 @@
         </p:nvSpPr>
         <p:spPr>
           <a:xfrm>
-            <a:off x="667512" y="3480584"/>
-            <a:ext cx="329184" cy="274320"/>
+            <a:off x="1798719" y="2498682"/>
+            <a:ext cx="233813" cy="194844"/>
           </a:xfrm>
           <a:prstGeom prst="rect">
             <a:avLst/>
@@ -13052,7 +13052,7 @@
               <a:buNone/>
             </a:pPr>
             <a:r>
-              <a:rPr lang="en-US" sz="1200" b="1" dirty="0">
+              <a:rPr lang="en-US" sz="850" b="1" dirty="0">
                 <a:solidFill>
                   <a:srgbClr val="FFFFFF"/>
                 </a:solidFill>
@@ -13062,7 +13062,7 @@
               </a:rPr>
               <a:t>3</a:t>
             </a:r>
-            <a:endParaRPr lang="en-US" sz="1200" dirty="0"/>
+            <a:endParaRPr lang="en-US" sz="850" dirty="0"/>
           </a:p>
         </p:txBody>
       </p:sp>
@@ -13074,8 +13074,8 @@
         </p:nvSpPr>
         <p:spPr>
           <a:xfrm>
-            <a:off x="1161288" y="3352568"/>
-            <a:ext cx="7296912" cy="548640"/>
+            <a:off x="2149438" y="2407755"/>
+            <a:ext cx="5182853" cy="389688"/>
           </a:xfrm>
           <a:prstGeom prst="rect">
             <a:avLst/>
@@ -13094,7 +13094,7 @@
               <a:buNone/>
             </a:pPr>
             <a:r>
-              <a:rPr lang="en-US" sz="1250" b="1" dirty="0">
+              <a:rPr lang="en-US" sz="890" b="1" dirty="0">
                 <a:solidFill>
                   <a:srgbClr val="FFFFFF"/>
                 </a:solidFill>
@@ -13104,7 +13104,7 @@
               </a:rPr>
               <a:t>Không có đáp án chuẩn — nhưng các con số sẽ tụ lại trong một khoảng.</a:t>
             </a:r>
-            <a:endParaRPr lang="en-US" sz="1250" dirty="0"/>
+            <a:endParaRPr lang="en-US" sz="890" dirty="0"/>
           </a:p>
           <a:p>
             <a:pPr indent="0" marL="0">
@@ -13114,7 +13114,7 @@
               <a:buNone/>
             </a:pPr>
             <a:r>
-              <a:rPr lang="en-US" sz="1150" dirty="0">
+              <a:rPr lang="en-US" sz="820" dirty="0">
                 <a:solidFill>
                   <a:srgbClr val="AFC3D4"/>
                 </a:solidFill>
@@ -13124,7 +13124,7 @@
               </a:rPr>
               <a:t>沒有標準答案——但各組的數字會集中在某個範圍。</a:t>
             </a:r>
-            <a:endParaRPr lang="en-US" sz="1250" dirty="0"/>
+            <a:endParaRPr lang="en-US" sz="890" dirty="0"/>
           </a:p>
         </p:txBody>
       </p:sp>
@@ -13136,8 +13136,8 @@
         </p:nvSpPr>
         <p:spPr>
           <a:xfrm>
-            <a:off x="502920" y="4056656"/>
-            <a:ext cx="8046720" cy="457200"/>
+            <a:off x="1681812" y="2907855"/>
+            <a:ext cx="5715427" cy="324740"/>
           </a:xfrm>
           <a:prstGeom prst="rect">
             <a:avLst/>
@@ -13156,7 +13156,7 @@
               <a:buNone/>
             </a:pPr>
             <a:r>
-              <a:rPr lang="en-US" sz="1250" b="1" dirty="0">
+              <a:rPr lang="en-US" sz="890" b="1" dirty="0">
                 <a:solidFill>
                   <a:srgbClr val="FFB020"/>
                 </a:solidFill>
@@ -13166,7 +13166,7 @@
               </a:rPr>
               <a:t>Khoảng đó = «thông số tối thiểu cho giờ cao điểm Hà Nội». Tuần 5 đối chiếu bảng thật.</a:t>
             </a:r>
-            <a:endParaRPr lang="en-US" sz="1250" dirty="0"/>
+            <a:endParaRPr lang="en-US" sz="890" dirty="0"/>
           </a:p>
           <a:p>
             <a:pPr indent="0" marL="0">
@@ -13176,7 +13176,7 @@
               <a:buNone/>
             </a:pPr>
             <a:r>
-              <a:rPr lang="en-US" sz="1150" dirty="0">
+              <a:rPr lang="en-US" sz="820" dirty="0">
                 <a:solidFill>
                   <a:srgbClr val="FFB020"/>
                 </a:solidFill>
@@ -13186,7 +13186,7 @@
               </a:rPr>
               <a:t>那個範圍就是「河內尖峰的最低感測器規格」。第五週拿真規格表來對。</a:t>
             </a:r>
-            <a:endParaRPr lang="en-US" sz="1250" dirty="0"/>
+            <a:endParaRPr lang="en-US" sz="890" dirty="0"/>
           </a:p>
         </p:txBody>
       </p:sp>
@@ -13198,8 +13198,8 @@
         </p:nvSpPr>
         <p:spPr>
           <a:xfrm>
-            <a:off x="109728" y="4791456"/>
-            <a:ext cx="822960" cy="256032"/>
+            <a:off x="1402536" y="3390800"/>
+            <a:ext cx="584532" cy="181855"/>
           </a:xfrm>
           <a:prstGeom prst="rect">
             <a:avLst/>
@@ -13215,7 +13215,7 @@
               <a:buNone/>
             </a:pPr>
             <a:r>
-              <a:rPr lang="en-US" sz="900" dirty="0">
+              <a:rPr lang="en-US" sz="640" dirty="0">
                 <a:solidFill>
                   <a:srgbClr val="9FB3C8"/>
                 </a:solidFill>
@@ -13225,7 +13225,7 @@
               </a:rPr>
               <a:t>8 / 11</a:t>
             </a:r>
-            <a:endParaRPr lang="en-US" sz="900" dirty="0"/>
+            <a:endParaRPr lang="en-US" sz="640" dirty="0"/>
           </a:p>
         </p:txBody>
       </p:sp>
@@ -13237,8 +13237,8 @@
         </p:nvSpPr>
         <p:spPr>
           <a:xfrm>
-            <a:off x="960120" y="4791456"/>
-            <a:ext cx="2011680" cy="256032"/>
+            <a:off x="2006553" y="3390800"/>
+            <a:ext cx="1428857" cy="181855"/>
           </a:xfrm>
           <a:prstGeom prst="rect">
             <a:avLst/>
@@ -13254,7 +13254,7 @@
               <a:buNone/>
             </a:pPr>
             <a:r>
-              <a:rPr lang="en-US" sz="900" dirty="0">
+              <a:rPr lang="en-US" sz="640" dirty="0">
                 <a:solidFill>
                   <a:srgbClr val="9FB3C8"/>
                 </a:solidFill>
@@ -13264,7 +13264,7 @@
               </a:rPr>
               <a:t>Tiết 3 · 第 3 節</a:t>
             </a:r>
-            <a:endParaRPr lang="en-US" sz="900" dirty="0"/>
+            <a:endParaRPr lang="en-US" sz="640" dirty="0"/>
           </a:p>
         </p:txBody>
       </p:sp>
@@ -13308,8 +13308,8 @@
         </p:nvSpPr>
         <p:spPr>
           <a:xfrm>
-            <a:off x="6766560" y="-1371600"/>
-            <a:ext cx="4206240" cy="4206240"/>
+            <a:off x="6130753" y="-947729"/>
+            <a:ext cx="2987610" cy="2987610"/>
           </a:xfrm>
           <a:prstGeom prst="ellipse">
             <a:avLst/>
@@ -13333,8 +13333,8 @@
         </p:nvSpPr>
         <p:spPr>
           <a:xfrm>
-            <a:off x="7863840" y="3108960"/>
-            <a:ext cx="2560320" cy="2560320"/>
+            <a:off x="7104973" y="1520297"/>
+            <a:ext cx="1688649" cy="1688649"/>
           </a:xfrm>
           <a:prstGeom prst="ellipse">
             <a:avLst/>
@@ -13355,8 +13355,8 @@
         </p:nvSpPr>
         <p:spPr>
           <a:xfrm>
-            <a:off x="502920" y="475488"/>
-            <a:ext cx="6766560" cy="274320"/>
+            <a:off x="1681812" y="364222"/>
+            <a:ext cx="4806155" cy="194844"/>
           </a:xfrm>
           <a:prstGeom prst="rect">
             <a:avLst/>
@@ -13372,7 +13372,7 @@
               <a:buNone/>
             </a:pPr>
             <a:r>
-              <a:rPr lang="en-US" sz="1250" b="1" dirty="0">
+              <a:rPr lang="en-US" sz="890" b="1" dirty="0">
                 <a:solidFill>
                   <a:srgbClr val="FFB020"/>
                 </a:solidFill>
@@ -13382,7 +13382,7 @@
               </a:rPr>
               <a:t>Hoạt động · 這句話對不對（每題 1 分鐘）</a:t>
             </a:r>
-            <a:endParaRPr lang="en-US" sz="1250" dirty="0"/>
+            <a:endParaRPr lang="en-US" sz="890" dirty="0"/>
           </a:p>
         </p:txBody>
       </p:sp>
@@ -13394,8 +13394,8 @@
         </p:nvSpPr>
         <p:spPr>
           <a:xfrm>
-            <a:off x="502920" y="786384"/>
-            <a:ext cx="8046720" cy="1225296"/>
+            <a:off x="1681812" y="585045"/>
+            <a:ext cx="5715427" cy="870304"/>
           </a:xfrm>
           <a:prstGeom prst="rect">
             <a:avLst/>
@@ -13414,7 +13414,7 @@
               <a:buNone/>
             </a:pPr>
             <a:r>
-              <a:rPr lang="en-US" sz="2300" b="1" dirty="0">
+              <a:rPr lang="en-US" sz="1630" b="1" dirty="0">
                 <a:solidFill>
                   <a:srgbClr val="FFFFFF"/>
                 </a:solidFill>
@@ -13424,7 +13424,7 @@
               </a:rPr>
               <a:t>Bốn câu dưới đây. Đúng hay sai, và nói một câu lý do.</a:t>
             </a:r>
-            <a:endParaRPr lang="en-US" sz="2300" dirty="0"/>
+            <a:endParaRPr lang="en-US" sz="1630" dirty="0"/>
           </a:p>
           <a:p>
             <a:pPr indent="0" marL="0">
@@ -13434,7 +13434,7 @@
               <a:buNone/>
             </a:pPr>
             <a:r>
-              <a:rPr lang="en-US" sz="1500" dirty="0">
+              <a:rPr lang="en-US" sz="1070" dirty="0">
                 <a:solidFill>
                   <a:srgbClr val="AFC3D4"/>
                 </a:solidFill>
@@ -13444,7 +13444,7 @@
               </a:rPr>
               <a:t>下面四句話。對或錯，再說一句理由。</a:t>
             </a:r>
-            <a:endParaRPr lang="en-US" sz="2300" dirty="0"/>
+            <a:endParaRPr lang="en-US" sz="1630" dirty="0"/>
           </a:p>
         </p:txBody>
       </p:sp>
@@ -13456,8 +13456,8 @@
         </p:nvSpPr>
         <p:spPr>
           <a:xfrm>
-            <a:off x="502920" y="1880384"/>
-            <a:ext cx="8138160" cy="621792"/>
+            <a:off x="1681812" y="1362092"/>
+            <a:ext cx="5780375" cy="441647"/>
           </a:xfrm>
           <a:prstGeom prst="roundRect">
             <a:avLst>
@@ -13478,8 +13478,8 @@
         </p:nvSpPr>
         <p:spPr>
           <a:xfrm>
-            <a:off x="667512" y="2026688"/>
-            <a:ext cx="329184" cy="329184"/>
+            <a:off x="1798719" y="1466008"/>
+            <a:ext cx="233813" cy="233813"/>
           </a:xfrm>
           <a:prstGeom prst="ellipse">
             <a:avLst/>
@@ -13498,8 +13498,8 @@
         </p:nvSpPr>
         <p:spPr>
           <a:xfrm>
-            <a:off x="667512" y="2054120"/>
-            <a:ext cx="329184" cy="274320"/>
+            <a:off x="1798719" y="1485493"/>
+            <a:ext cx="233813" cy="194844"/>
           </a:xfrm>
           <a:prstGeom prst="rect">
             <a:avLst/>
@@ -13515,7 +13515,7 @@
               <a:buNone/>
             </a:pPr>
             <a:r>
-              <a:rPr lang="en-US" sz="1200" b="1" dirty="0">
+              <a:rPr lang="en-US" sz="850" b="1" dirty="0">
                 <a:solidFill>
                   <a:srgbClr val="FFFFFF"/>
                 </a:solidFill>
@@ -13525,7 +13525,7 @@
               </a:rPr>
               <a:t>1</a:t>
             </a:r>
-            <a:endParaRPr lang="en-US" sz="1200" dirty="0"/>
+            <a:endParaRPr lang="en-US" sz="850" dirty="0"/>
           </a:p>
         </p:txBody>
       </p:sp>
@@ -13537,8 +13537,8 @@
         </p:nvSpPr>
         <p:spPr>
           <a:xfrm>
-            <a:off x="1161288" y="1926104"/>
-            <a:ext cx="7296912" cy="548640"/>
+            <a:off x="2149438" y="1394566"/>
+            <a:ext cx="5182853" cy="389688"/>
           </a:xfrm>
           <a:prstGeom prst="rect">
             <a:avLst/>
@@ -13557,7 +13557,7 @@
               <a:buNone/>
             </a:pPr>
             <a:r>
-              <a:rPr lang="en-US" sz="1250" b="1" dirty="0">
+              <a:rPr lang="en-US" sz="890" b="1" dirty="0">
                 <a:solidFill>
                   <a:srgbClr val="FFFFFF"/>
                 </a:solidFill>
@@ -13567,7 +13567,7 @@
               </a:rPr>
               <a:t>① Xe tự lái chạy đủ nhiều km thì chứng minh được nó an toàn.</a:t>
             </a:r>
-            <a:endParaRPr lang="en-US" sz="1250" dirty="0"/>
+            <a:endParaRPr lang="en-US" sz="890" dirty="0"/>
           </a:p>
           <a:p>
             <a:pPr indent="0" marL="0">
@@ -13577,7 +13577,7 @@
               <a:buNone/>
             </a:pPr>
             <a:r>
-              <a:rPr lang="en-US" sz="1150" dirty="0">
+              <a:rPr lang="en-US" sz="820" dirty="0">
                 <a:solidFill>
                   <a:srgbClr val="AFC3D4"/>
                 </a:solidFill>
@@ -13587,7 +13587,7 @@
               </a:rPr>
               <a:t>① 自駕車跑得夠多公里，就能證明它安全。</a:t>
             </a:r>
-            <a:endParaRPr lang="en-US" sz="1250" dirty="0"/>
+            <a:endParaRPr lang="en-US" sz="890" dirty="0"/>
           </a:p>
         </p:txBody>
       </p:sp>
@@ -13599,8 +13599,8 @@
         </p:nvSpPr>
         <p:spPr>
           <a:xfrm>
-            <a:off x="502920" y="2593616"/>
-            <a:ext cx="8138160" cy="621792"/>
+            <a:off x="1681812" y="1868686"/>
+            <a:ext cx="5780375" cy="441647"/>
           </a:xfrm>
           <a:prstGeom prst="roundRect">
             <a:avLst>
@@ -13621,8 +13621,8 @@
         </p:nvSpPr>
         <p:spPr>
           <a:xfrm>
-            <a:off x="667512" y="2739920"/>
-            <a:ext cx="329184" cy="329184"/>
+            <a:off x="1798719" y="1972603"/>
+            <a:ext cx="233813" cy="233813"/>
           </a:xfrm>
           <a:prstGeom prst="ellipse">
             <a:avLst/>
@@ -13641,8 +13641,8 @@
         </p:nvSpPr>
         <p:spPr>
           <a:xfrm>
-            <a:off x="667512" y="2767352"/>
-            <a:ext cx="329184" cy="274320"/>
+            <a:off x="1798719" y="1992087"/>
+            <a:ext cx="233813" cy="194844"/>
           </a:xfrm>
           <a:prstGeom prst="rect">
             <a:avLst/>
@@ -13658,7 +13658,7 @@
               <a:buNone/>
             </a:pPr>
             <a:r>
-              <a:rPr lang="en-US" sz="1200" b="1" dirty="0">
+              <a:rPr lang="en-US" sz="850" b="1" dirty="0">
                 <a:solidFill>
                   <a:srgbClr val="FFFFFF"/>
                 </a:solidFill>
@@ -13668,7 +13668,7 @@
               </a:rPr>
               <a:t>2</a:t>
             </a:r>
-            <a:endParaRPr lang="en-US" sz="1200" dirty="0"/>
+            <a:endParaRPr lang="en-US" sz="850" dirty="0"/>
           </a:p>
         </p:txBody>
       </p:sp>
@@ -13680,8 +13680,8 @@
         </p:nvSpPr>
         <p:spPr>
           <a:xfrm>
-            <a:off x="1161288" y="2639336"/>
-            <a:ext cx="7296912" cy="548640"/>
+            <a:off x="2149438" y="1901160"/>
+            <a:ext cx="5182853" cy="389688"/>
           </a:xfrm>
           <a:prstGeom prst="rect">
             <a:avLst/>
@@ -13700,7 +13700,7 @@
               <a:buNone/>
             </a:pPr>
             <a:r>
-              <a:rPr lang="en-US" sz="1250" b="1" dirty="0">
+              <a:rPr lang="en-US" sz="890" b="1" dirty="0">
                 <a:solidFill>
                   <a:srgbClr val="FFFFFF"/>
                 </a:solidFill>
@@ -13710,7 +13710,7 @@
               </a:rPr>
               <a:t>② Trong mô phỏng không đâm thì xe thật cũng sẽ không đâm.</a:t>
             </a:r>
-            <a:endParaRPr lang="en-US" sz="1250" dirty="0"/>
+            <a:endParaRPr lang="en-US" sz="890" dirty="0"/>
           </a:p>
           <a:p>
             <a:pPr indent="0" marL="0">
@@ -13720,7 +13720,7 @@
               <a:buNone/>
             </a:pPr>
             <a:r>
-              <a:rPr lang="en-US" sz="1150" dirty="0">
+              <a:rPr lang="en-US" sz="820" dirty="0">
                 <a:solidFill>
                   <a:srgbClr val="AFC3D4"/>
                 </a:solidFill>
@@ -13730,7 +13730,7 @@
               </a:rPr>
               <a:t>② 在模擬器裡不撞，真車就不會撞。</a:t>
             </a:r>
-            <a:endParaRPr lang="en-US" sz="1250" dirty="0"/>
+            <a:endParaRPr lang="en-US" sz="890" dirty="0"/>
           </a:p>
         </p:txBody>
       </p:sp>
@@ -13742,8 +13742,8 @@
         </p:nvSpPr>
         <p:spPr>
           <a:xfrm>
-            <a:off x="502920" y="3306848"/>
-            <a:ext cx="8138160" cy="621792"/>
+            <a:off x="1681812" y="2375281"/>
+            <a:ext cx="5780375" cy="441647"/>
           </a:xfrm>
           <a:prstGeom prst="roundRect">
             <a:avLst>
@@ -13764,8 +13764,8 @@
         </p:nvSpPr>
         <p:spPr>
           <a:xfrm>
-            <a:off x="667512" y="3453152"/>
-            <a:ext cx="329184" cy="329184"/>
+            <a:off x="1798719" y="2479198"/>
+            <a:ext cx="233813" cy="233813"/>
           </a:xfrm>
           <a:prstGeom prst="ellipse">
             <a:avLst/>
@@ -13784,8 +13784,8 @@
         </p:nvSpPr>
         <p:spPr>
           <a:xfrm>
-            <a:off x="667512" y="3480584"/>
-            <a:ext cx="329184" cy="274320"/>
+            <a:off x="1798719" y="2498682"/>
+            <a:ext cx="233813" cy="194844"/>
           </a:xfrm>
           <a:prstGeom prst="rect">
             <a:avLst/>
@@ -13801,7 +13801,7 @@
               <a:buNone/>
             </a:pPr>
             <a:r>
-              <a:rPr lang="en-US" sz="1200" b="1" dirty="0">
+              <a:rPr lang="en-US" sz="850" b="1" dirty="0">
                 <a:solidFill>
                   <a:srgbClr val="FFFFFF"/>
                 </a:solidFill>
@@ -13811,7 +13811,7 @@
               </a:rPr>
               <a:t>3</a:t>
             </a:r>
-            <a:endParaRPr lang="en-US" sz="1200" dirty="0"/>
+            <a:endParaRPr lang="en-US" sz="850" dirty="0"/>
           </a:p>
         </p:txBody>
       </p:sp>
@@ -13823,8 +13823,8 @@
         </p:nvSpPr>
         <p:spPr>
           <a:xfrm>
-            <a:off x="1161288" y="3352568"/>
-            <a:ext cx="7296912" cy="548640"/>
+            <a:off x="2149438" y="2407755"/>
+            <a:ext cx="5182853" cy="389688"/>
           </a:xfrm>
           <a:prstGeom prst="rect">
             <a:avLst/>
@@ -13843,7 +13843,7 @@
               <a:buNone/>
             </a:pPr>
             <a:r>
-              <a:rPr lang="en-US" sz="1250" b="1" dirty="0">
+              <a:rPr lang="en-US" sz="890" b="1" dirty="0">
                 <a:solidFill>
                   <a:srgbClr val="FFFFFF"/>
                 </a:solidFill>
@@ -13853,7 +13853,7 @@
               </a:rPr>
               <a:t>③ Càng nhiều tia càng tốt, góc quét càng rộng càng tốt.</a:t>
             </a:r>
-            <a:endParaRPr lang="en-US" sz="1250" dirty="0"/>
+            <a:endParaRPr lang="en-US" sz="890" dirty="0"/>
           </a:p>
           <a:p>
             <a:pPr indent="0" marL="0">
@@ -13863,7 +13863,7 @@
               <a:buNone/>
             </a:pPr>
             <a:r>
-              <a:rPr lang="en-US" sz="1150" dirty="0">
+              <a:rPr lang="en-US" sz="820" dirty="0">
                 <a:solidFill>
                   <a:srgbClr val="AFC3D4"/>
                 </a:solidFill>
@@ -13873,7 +13873,7 @@
               </a:rPr>
               <a:t>③ 射線數愈多愈好，張角愈大愈好。</a:t>
             </a:r>
-            <a:endParaRPr lang="en-US" sz="1250" dirty="0"/>
+            <a:endParaRPr lang="en-US" sz="890" dirty="0"/>
           </a:p>
         </p:txBody>
       </p:sp>
@@ -13885,8 +13885,8 @@
         </p:nvSpPr>
         <p:spPr>
           <a:xfrm>
-            <a:off x="502920" y="4056656"/>
-            <a:ext cx="8046720" cy="457200"/>
+            <a:off x="1681812" y="2907855"/>
+            <a:ext cx="5715427" cy="324740"/>
           </a:xfrm>
           <a:prstGeom prst="rect">
             <a:avLst/>
@@ -13905,7 +13905,7 @@
               <a:buNone/>
             </a:pPr>
             <a:r>
-              <a:rPr lang="en-US" sz="1250" b="1" dirty="0">
+              <a:rPr lang="en-US" sz="890" b="1" dirty="0">
                 <a:solidFill>
                   <a:srgbClr val="FFB020"/>
                 </a:solidFill>
@@ -13915,7 +13915,7 @@
               </a:rPr>
               <a:t>④ Mô phỏng có sẵn là test được đường Việt Nam? Thế giới trong đó là của ai?</a:t>
             </a:r>
-            <a:endParaRPr lang="en-US" sz="1250" dirty="0"/>
+            <a:endParaRPr lang="en-US" sz="890" dirty="0"/>
           </a:p>
           <a:p>
             <a:pPr indent="0" marL="0">
@@ -13925,7 +13925,7 @@
               <a:buNone/>
             </a:pPr>
             <a:r>
-              <a:rPr lang="en-US" sz="1150" dirty="0">
+              <a:rPr lang="en-US" sz="820" dirty="0">
                 <a:solidFill>
                   <a:srgbClr val="FFB020"/>
                 </a:solidFill>
@@ -13935,7 +13935,7 @@
               </a:rPr>
               <a:t>④ 現成模擬器就能測越南的路況？裡面的世界是照誰做的？</a:t>
             </a:r>
-            <a:endParaRPr lang="en-US" sz="1250" dirty="0"/>
+            <a:endParaRPr lang="en-US" sz="890" dirty="0"/>
           </a:p>
         </p:txBody>
       </p:sp>
@@ -13947,8 +13947,8 @@
         </p:nvSpPr>
         <p:spPr>
           <a:xfrm>
-            <a:off x="109728" y="4791456"/>
-            <a:ext cx="822960" cy="256032"/>
+            <a:off x="1402536" y="3390800"/>
+            <a:ext cx="584532" cy="181855"/>
           </a:xfrm>
           <a:prstGeom prst="rect">
             <a:avLst/>
@@ -13964,7 +13964,7 @@
               <a:buNone/>
             </a:pPr>
             <a:r>
-              <a:rPr lang="en-US" sz="900" dirty="0">
+              <a:rPr lang="en-US" sz="640" dirty="0">
                 <a:solidFill>
                   <a:srgbClr val="9FB3C8"/>
                 </a:solidFill>
@@ -13974,7 +13974,7 @@
               </a:rPr>
               <a:t>9 / 11</a:t>
             </a:r>
-            <a:endParaRPr lang="en-US" sz="900" dirty="0"/>
+            <a:endParaRPr lang="en-US" sz="640" dirty="0"/>
           </a:p>
         </p:txBody>
       </p:sp>
@@ -13986,8 +13986,8 @@
         </p:nvSpPr>
         <p:spPr>
           <a:xfrm>
-            <a:off x="960120" y="4791456"/>
-            <a:ext cx="2011680" cy="256032"/>
+            <a:off x="2006553" y="3390800"/>
+            <a:ext cx="1428857" cy="181855"/>
           </a:xfrm>
           <a:prstGeom prst="rect">
             <a:avLst/>
@@ -14003,7 +14003,7 @@
               <a:buNone/>
             </a:pPr>
             <a:r>
-              <a:rPr lang="en-US" sz="900" dirty="0">
+              <a:rPr lang="en-US" sz="640" dirty="0">
                 <a:solidFill>
                   <a:srgbClr val="9FB3C8"/>
                 </a:solidFill>
@@ -14013,7 +14013,7 @@
               </a:rPr>
               <a:t>Tiết 3 · 第 3 節</a:t>
             </a:r>
-            <a:endParaRPr lang="en-US" sz="900" dirty="0"/>
+            <a:endParaRPr lang="en-US" sz="640" dirty="0"/>
           </a:p>
         </p:txBody>
       </p:sp>

--- a/第四週(10-01)/第四週_第3節_簡報.pptx
+++ b/第四週(10-01)/第四週_第3節_簡報.pptx
@@ -5812,8 +5812,8 @@
       </p:nvGrpSpPr>
       <p:grpSpPr>
         <a:xfrm>
-          <a:off x="0" y="0"/>
-          <a:ext cx="0" cy="0"/>
+          <a:off x="1028250" y="0"/>
+          <a:ext cx="1" cy="1"/>
           <a:chOff x="0" y="0"/>
           <a:chExt cx="0" cy="0"/>
         </a:xfrm>
@@ -5826,8 +5826,8 @@
         </p:nvSpPr>
         <p:spPr>
           <a:xfrm>
-            <a:off x="6130753" y="-947729"/>
-            <a:ext cx="2987610" cy="2987610"/>
+            <a:off x="6273000" y="-1063125"/>
+            <a:ext cx="3260250" cy="3260250"/>
           </a:xfrm>
           <a:prstGeom prst="ellipse">
             <a:avLst/>
@@ -5851,8 +5851,8 @@
         </p:nvSpPr>
         <p:spPr>
           <a:xfrm>
-            <a:off x="7104973" y="1520297"/>
-            <a:ext cx="1688649" cy="1688649"/>
+            <a:off x="7336125" y="1630125"/>
+            <a:ext cx="1842750" cy="1842750"/>
           </a:xfrm>
           <a:prstGeom prst="ellipse">
             <a:avLst/>
@@ -5873,8 +5873,8 @@
         </p:nvSpPr>
         <p:spPr>
           <a:xfrm>
-            <a:off x="1681812" y="883806"/>
-            <a:ext cx="4936051" cy="194844"/>
+            <a:off x="1418063" y="935550"/>
+            <a:ext cx="5386500" cy="212625"/>
           </a:xfrm>
           <a:prstGeom prst="rect">
             <a:avLst/>
@@ -5890,7 +5890,7 @@
               <a:buNone/>
             </a:pPr>
             <a:r>
-              <a:rPr lang="en-US" sz="890" b="1" dirty="0">
+              <a:rPr lang="en-US" sz="970" b="1" dirty="0">
                 <a:solidFill>
                   <a:srgbClr val="00A896"/>
                 </a:solidFill>
@@ -5900,7 +5900,7 @@
               </a:rPr>
               <a:t>MITUST · Nguyên lý xe tự lái · Tuần 4</a:t>
             </a:r>
-            <a:endParaRPr lang="en-US" sz="890" dirty="0"/>
+            <a:endParaRPr lang="en-US" sz="970" dirty="0"/>
           </a:p>
         </p:txBody>
       </p:sp>
@@ -5912,8 +5912,8 @@
         </p:nvSpPr>
         <p:spPr>
           <a:xfrm>
-            <a:off x="1681812" y="1143598"/>
-            <a:ext cx="5325739" cy="628953"/>
+            <a:off x="1418063" y="1219050"/>
+            <a:ext cx="5811750" cy="686349"/>
           </a:xfrm>
           <a:prstGeom prst="rect">
             <a:avLst/>
@@ -5932,7 +5932,7 @@
               <a:buNone/>
             </a:pPr>
             <a:r>
-              <a:rPr lang="en-US" sz="2410" b="1" dirty="0">
+              <a:rPr lang="en-US" sz="2640" b="1" dirty="0">
                 <a:solidFill>
                   <a:srgbClr val="FFFFFF"/>
                 </a:solidFill>
@@ -5942,7 +5942,7 @@
               </a:rPr>
               <a:t>Cấu hình cảm biến cho Hà Nội</a:t>
             </a:r>
-            <a:endParaRPr lang="en-US" sz="2410" dirty="0"/>
+            <a:endParaRPr lang="en-US" sz="2640" dirty="0"/>
           </a:p>
           <a:p>
             <a:pPr indent="0" marL="0">
@@ -5952,7 +5952,7 @@
               <a:buNone/>
             </a:pPr>
             <a:r>
-              <a:rPr lang="en-US" sz="1350" dirty="0">
+              <a:rPr lang="en-US" sz="1470" dirty="0">
                 <a:solidFill>
                   <a:srgbClr val="C8D6E2"/>
                 </a:solidFill>
@@ -5962,7 +5962,7 @@
               </a:rPr>
               <a:t>為河內配一組感測器</a:t>
             </a:r>
-            <a:endParaRPr lang="en-US" sz="2410" dirty="0"/>
+            <a:endParaRPr lang="en-US" sz="2640" dirty="0"/>
           </a:p>
         </p:txBody>
       </p:sp>
@@ -5974,8 +5974,8 @@
         </p:nvSpPr>
         <p:spPr>
           <a:xfrm>
-            <a:off x="1681812" y="2006437"/>
-            <a:ext cx="974221" cy="29227"/>
+            <a:off x="1418063" y="2160629"/>
+            <a:ext cx="1063125" cy="31894"/>
           </a:xfrm>
           <a:prstGeom prst="rect">
             <a:avLst/>
@@ -5994,8 +5994,8 @@
         </p:nvSpPr>
         <p:spPr>
           <a:xfrm>
-            <a:off x="1681812" y="2149323"/>
-            <a:ext cx="5065947" cy="591997"/>
+            <a:off x="1418063" y="2316554"/>
+            <a:ext cx="5528250" cy="646021"/>
           </a:xfrm>
           <a:prstGeom prst="rect">
             <a:avLst/>
@@ -6014,7 +6014,7 @@
               <a:buNone/>
             </a:pPr>
             <a:r>
-              <a:rPr lang="en-US" sz="1030" dirty="0">
+              <a:rPr lang="en-US" sz="1120" dirty="0">
                 <a:solidFill>
                   <a:srgbClr val="C8D6E2"/>
                 </a:solidFill>
@@ -6024,7 +6024,7 @@
               </a:rPr>
               <a:t>Bốn câu, hai người một nhóm, một tờ giấy. Đáp án mang thẳng sang đề tài cuối kỳ.</a:t>
             </a:r>
-            <a:endParaRPr lang="en-US" sz="1030" dirty="0"/>
+            <a:endParaRPr lang="en-US" sz="1120" dirty="0"/>
           </a:p>
           <a:p>
             <a:pPr indent="0" marL="0">
@@ -6034,7 +6034,7 @@
               <a:buNone/>
             </a:pPr>
             <a:r>
-              <a:rPr lang="en-US" sz="890" dirty="0">
+              <a:rPr lang="en-US" sz="970" dirty="0">
                 <a:solidFill>
                   <a:srgbClr val="8AA0B4"/>
                 </a:solidFill>
@@ -6044,7 +6044,7 @@
               </a:rPr>
               <a:t>四題，兩人一組，一張紙。答案直接帶到期末專題。</a:t>
             </a:r>
-            <a:endParaRPr lang="en-US" sz="1030" dirty="0"/>
+            <a:endParaRPr lang="en-US" sz="1120" dirty="0"/>
           </a:p>
         </p:txBody>
       </p:sp>
@@ -6056,8 +6056,8 @@
         </p:nvSpPr>
         <p:spPr>
           <a:xfrm>
-            <a:off x="1681812" y="2793278"/>
-            <a:ext cx="4221622" cy="272782"/>
+            <a:off x="1418063" y="3019275"/>
+            <a:ext cx="4606875" cy="297675"/>
           </a:xfrm>
           <a:prstGeom prst="roundRect">
             <a:avLst>
@@ -6078,8 +6078,8 @@
         </p:nvSpPr>
         <p:spPr>
           <a:xfrm>
-            <a:off x="1772740" y="2825752"/>
-            <a:ext cx="4039768" cy="207834"/>
+            <a:off x="1517288" y="3054713"/>
+            <a:ext cx="4408425" cy="226800"/>
           </a:xfrm>
           <a:prstGeom prst="rect">
             <a:avLst/>
@@ -6095,7 +6095,7 @@
               <a:buNone/>
             </a:pPr>
             <a:r>
-              <a:rPr lang="en-US" sz="750" b="1" dirty="0">
+              <a:rPr lang="en-US" sz="810" b="1" dirty="0">
                 <a:solidFill>
                   <a:srgbClr val="9FD6CE"/>
                 </a:solidFill>
@@ -6105,7 +6105,7 @@
               </a:rPr>
               <a:t>工具｜Công cụ： ch-neural.github.io/MITUST-Principles-of-Self-Driving-Cars/week4/sim/</a:t>
             </a:r>
-            <a:endParaRPr lang="en-US" sz="750" dirty="0"/>
+            <a:endParaRPr lang="en-US" sz="810" dirty="0"/>
           </a:p>
         </p:txBody>
       </p:sp>
@@ -6117,8 +6117,8 @@
         </p:nvSpPr>
         <p:spPr>
           <a:xfrm>
-            <a:off x="1681812" y="3131008"/>
-            <a:ext cx="4936051" cy="194844"/>
+            <a:off x="1418063" y="3387825"/>
+            <a:ext cx="5386500" cy="212625"/>
           </a:xfrm>
           <a:prstGeom prst="rect">
             <a:avLst/>
@@ -6134,7 +6134,7 @@
               <a:buNone/>
             </a:pPr>
             <a:r>
-              <a:rPr lang="en-US" sz="820" dirty="0">
+              <a:rPr lang="en-US" sz="890" dirty="0">
                 <a:solidFill>
                   <a:srgbClr val="8AA0B4"/>
                 </a:solidFill>
@@ -6144,7 +6144,7 @@
               </a:rPr>
               <a:t>第四週 第 3 節　2026/10/01（四）11:10–12:00　CH Tseng</a:t>
             </a:r>
-            <a:endParaRPr lang="en-US" sz="820" dirty="0"/>
+            <a:endParaRPr lang="en-US" sz="890" dirty="0"/>
           </a:p>
         </p:txBody>
       </p:sp>
@@ -6156,8 +6156,8 @@
         </p:nvSpPr>
         <p:spPr>
           <a:xfrm>
-            <a:off x="1577895" y="247315"/>
-            <a:ext cx="1571743" cy="532574"/>
+            <a:off x="1304663" y="240975"/>
+            <a:ext cx="1715175" cy="581175"/>
           </a:xfrm>
           <a:prstGeom prst="roundRect">
             <a:avLst>
@@ -6186,8 +6186,8 @@
         </p:blipFill>
         <p:spPr>
           <a:xfrm>
-            <a:off x="1681812" y="364222"/>
-            <a:ext cx="1363909" cy="301350"/>
+            <a:off x="502920" y="475488"/>
+            <a:ext cx="1920240" cy="424269"/>
           </a:xfrm>
           <a:prstGeom prst="rect">
             <a:avLst/>
@@ -6220,8 +6220,8 @@
       </p:nvGrpSpPr>
       <p:grpSpPr>
         <a:xfrm>
-          <a:off x="0" y="0"/>
-          <a:ext cx="0" cy="0"/>
+          <a:off x="898071" y="0"/>
+          <a:ext cx="1" cy="1"/>
           <a:chOff x="0" y="0"/>
           <a:chExt cx="0" cy="0"/>
         </a:xfrm>
@@ -6234,8 +6234,8 @@
         </p:nvSpPr>
         <p:spPr>
           <a:xfrm>
-            <a:off x="6130753" y="-947729"/>
-            <a:ext cx="2987610" cy="2987610"/>
+            <a:off x="6335486" y="-1102179"/>
+            <a:ext cx="3380014" cy="3380014"/>
           </a:xfrm>
           <a:prstGeom prst="ellipse">
             <a:avLst/>
@@ -6259,8 +6259,8 @@
         </p:nvSpPr>
         <p:spPr>
           <a:xfrm>
-            <a:off x="7104973" y="1520297"/>
-            <a:ext cx="1688649" cy="1688649"/>
+            <a:off x="7437664" y="1690007"/>
+            <a:ext cx="1910443" cy="1910443"/>
           </a:xfrm>
           <a:prstGeom prst="ellipse">
             <a:avLst/>
@@ -6281,8 +6281,8 @@
         </p:nvSpPr>
         <p:spPr>
           <a:xfrm>
-            <a:off x="1681812" y="364222"/>
-            <a:ext cx="4806155" cy="194844"/>
+            <a:off x="1302204" y="382089"/>
+            <a:ext cx="5437414" cy="220436"/>
           </a:xfrm>
           <a:prstGeom prst="rect">
             <a:avLst/>
@@ -6298,7 +6298,7 @@
               <a:buNone/>
             </a:pPr>
             <a:r>
-              <a:rPr lang="en-US" sz="890" b="1" dirty="0">
+              <a:rPr lang="en-US" sz="1000" b="1" dirty="0">
                 <a:solidFill>
                   <a:srgbClr val="FFB020"/>
                 </a:solidFill>
@@ -6308,7 +6308,7 @@
               </a:rPr>
               <a:t>Đáp án · 答案：四句都錯</a:t>
             </a:r>
-            <a:endParaRPr lang="en-US" sz="890" dirty="0"/>
+            <a:endParaRPr lang="en-US" sz="1000" dirty="0"/>
           </a:p>
         </p:txBody>
       </p:sp>
@@ -6320,8 +6320,8 @@
         </p:nvSpPr>
         <p:spPr>
           <a:xfrm>
-            <a:off x="1681812" y="611024"/>
-            <a:ext cx="5715427" cy="753397"/>
+            <a:off x="1302204" y="661307"/>
+            <a:ext cx="6466114" cy="852351"/>
           </a:xfrm>
           <a:prstGeom prst="rect">
             <a:avLst/>
@@ -6340,7 +6340,7 @@
               <a:buNone/>
             </a:pPr>
             <a:r>
-              <a:rPr lang="en-US" sz="1780" b="1" dirty="0">
+              <a:rPr lang="en-US" sz="2010" b="1" dirty="0">
                 <a:solidFill>
                   <a:srgbClr val="FFFFFF"/>
                 </a:solidFill>
@@ -6350,7 +6350,7 @@
               </a:rPr>
               <a:t>Bốn câu đều sai — và mỗi câu sai một kiểu</a:t>
             </a:r>
-            <a:endParaRPr lang="en-US" sz="1780" dirty="0"/>
+            <a:endParaRPr lang="en-US" sz="2010" dirty="0"/>
           </a:p>
           <a:p>
             <a:pPr indent="0" marL="0">
@@ -6360,7 +6360,7 @@
               <a:buNone/>
             </a:pPr>
             <a:r>
-              <a:rPr lang="en-US" sz="1070" dirty="0">
+              <a:rPr lang="en-US" sz="1210" dirty="0">
                 <a:solidFill>
                   <a:srgbClr val="AFC3D4"/>
                 </a:solidFill>
@@ -6370,7 +6370,7 @@
               </a:rPr>
               <a:t>四句都錯——而且每一句錯的方式不一樣</a:t>
             </a:r>
-            <a:endParaRPr lang="en-US" sz="1780" dirty="0"/>
+            <a:endParaRPr lang="en-US" sz="2010" dirty="0"/>
           </a:p>
         </p:txBody>
       </p:sp>
@@ -6382,8 +6382,8 @@
         </p:nvSpPr>
         <p:spPr>
           <a:xfrm>
-            <a:off x="1681812" y="1429370"/>
-            <a:ext cx="32474" cy="363709"/>
+            <a:off x="1302204" y="1587137"/>
+            <a:ext cx="36739" cy="411480"/>
           </a:xfrm>
           <a:prstGeom prst="rect">
             <a:avLst/>
@@ -6402,8 +6402,8 @@
         </p:nvSpPr>
         <p:spPr>
           <a:xfrm>
-            <a:off x="1837688" y="1403390"/>
-            <a:ext cx="5585531" cy="441647"/>
+            <a:off x="1478552" y="1557746"/>
+            <a:ext cx="6319157" cy="499654"/>
           </a:xfrm>
           <a:prstGeom prst="rect">
             <a:avLst/>
@@ -6422,7 +6422,7 @@
               <a:buNone/>
             </a:pPr>
             <a:r>
-              <a:rPr lang="en-US" sz="960" b="1" dirty="0">
+              <a:rPr lang="en-US" sz="1080" b="1" dirty="0">
                 <a:solidFill>
                   <a:srgbClr val="FFFFFF"/>
                 </a:solidFill>
@@ -6432,7 +6432,7 @@
               </a:rPr>
               <a:t>① Cần 11 tỉ dặm, mà phần lớn là đường thẳng buồn tẻ. Đơn vị đúng là kịch bản.</a:t>
             </a:r>
-            <a:endParaRPr lang="en-US" sz="960" dirty="0"/>
+            <a:endParaRPr lang="en-US" sz="1080" dirty="0"/>
           </a:p>
           <a:p>
             <a:pPr indent="0" marL="0">
@@ -6442,7 +6442,7 @@
               <a:buNone/>
             </a:pPr>
             <a:r>
-              <a:rPr lang="en-US" sz="850" dirty="0">
+              <a:rPr lang="en-US" sz="960" dirty="0">
                 <a:solidFill>
                   <a:srgbClr val="AFC3D4"/>
                 </a:solidFill>
@@ -6452,7 +6452,7 @@
               </a:rPr>
               <a:t>① 要一百一十億英里，而且大多是無聊的直路。正確的單位是場景。</a:t>
             </a:r>
-            <a:endParaRPr lang="en-US" sz="960" dirty="0"/>
+            <a:endParaRPr lang="en-US" sz="1080" dirty="0"/>
           </a:p>
         </p:txBody>
       </p:sp>
@@ -6464,8 +6464,8 @@
         </p:nvSpPr>
         <p:spPr>
           <a:xfrm>
-            <a:off x="1681812" y="1935964"/>
-            <a:ext cx="32474" cy="477815"/>
+            <a:off x="1302204" y="2160270"/>
+            <a:ext cx="36739" cy="540573"/>
           </a:xfrm>
           <a:prstGeom prst="rect">
             <a:avLst/>
@@ -6484,8 +6484,8 @@
         </p:nvSpPr>
         <p:spPr>
           <a:xfrm>
-            <a:off x="1837688" y="1909985"/>
-            <a:ext cx="5585531" cy="555752"/>
+            <a:off x="1478552" y="2130879"/>
+            <a:ext cx="6319157" cy="628747"/>
           </a:xfrm>
           <a:prstGeom prst="rect">
             <a:avLst/>
@@ -6504,7 +6504,7 @@
               <a:buNone/>
             </a:pPr>
             <a:r>
-              <a:rPr lang="en-US" sz="960" b="1" dirty="0">
+              <a:rPr lang="en-US" sz="1080" b="1" dirty="0">
                 <a:solidFill>
                   <a:srgbClr val="FFFFFF"/>
                 </a:solidFill>
@@ -6514,7 +6514,7 @@
               </a:rPr>
               <a:t>② Ba khoảng cách: hình ảnh, hành vi, vật lý. Mô phỏng là cái sàng — qua được chỉ là lấy vé lên xe thật.</a:t>
             </a:r>
-            <a:endParaRPr lang="en-US" sz="960" dirty="0"/>
+            <a:endParaRPr lang="en-US" sz="1080" dirty="0"/>
           </a:p>
           <a:p>
             <a:pPr indent="0" marL="0">
@@ -6524,7 +6524,7 @@
               <a:buNone/>
             </a:pPr>
             <a:r>
-              <a:rPr lang="en-US" sz="850" dirty="0">
+              <a:rPr lang="en-US" sz="960" dirty="0">
                 <a:solidFill>
                   <a:srgbClr val="AFC3D4"/>
                 </a:solidFill>
@@ -6534,7 +6534,7 @@
               </a:rPr>
               <a:t>② 三種落差：外觀、行為、物理。模擬是一個篩子——通過只是拿到上真車的門票。</a:t>
             </a:r>
-            <a:endParaRPr lang="en-US" sz="960" dirty="0"/>
+            <a:endParaRPr lang="en-US" sz="1080" dirty="0"/>
           </a:p>
         </p:txBody>
       </p:sp>
@@ -6546,8 +6546,8 @@
         </p:nvSpPr>
         <p:spPr>
           <a:xfrm>
-            <a:off x="1681812" y="2556665"/>
-            <a:ext cx="32474" cy="477815"/>
+            <a:off x="1302204" y="2862496"/>
+            <a:ext cx="36739" cy="540573"/>
           </a:xfrm>
           <a:prstGeom prst="rect">
             <a:avLst/>
@@ -6566,8 +6566,8 @@
         </p:nvSpPr>
         <p:spPr>
           <a:xfrm>
-            <a:off x="1837688" y="2530685"/>
-            <a:ext cx="5585531" cy="555752"/>
+            <a:off x="1478552" y="2833104"/>
+            <a:ext cx="6319157" cy="628747"/>
           </a:xfrm>
           <a:prstGeom prst="rect">
             <a:avLst/>
@@ -6586,7 +6586,7 @@
               <a:buNone/>
             </a:pPr>
             <a:r>
-              <a:rPr lang="en-US" sz="960" b="1" dirty="0">
+              <a:rPr lang="en-US" sz="1080" b="1" dirty="0">
                 <a:solidFill>
                   <a:srgbClr val="FFFFFF"/>
                 </a:solidFill>
@@ -6596,7 +6596,7 @@
               </a:rPr>
               <a:t>③ Góc rộng thì cùng số tia đó thưa đi; tia nhiều thì máy tính chậm lại. Xe thật là mấy cảm biến chia việc.</a:t>
             </a:r>
-            <a:endParaRPr lang="en-US" sz="960" dirty="0"/>
+            <a:endParaRPr lang="en-US" sz="1080" dirty="0"/>
           </a:p>
           <a:p>
             <a:pPr indent="0" marL="0">
@@ -6606,7 +6606,7 @@
               <a:buNone/>
             </a:pPr>
             <a:r>
-              <a:rPr lang="en-US" sz="850" dirty="0">
+              <a:rPr lang="en-US" sz="960" dirty="0">
                 <a:solidFill>
                   <a:srgbClr val="AFC3D4"/>
                 </a:solidFill>
@@ -6616,7 +6616,7 @@
               </a:rPr>
               <a:t>③ 張角大，同樣的射線就變稀；射線多，電腦算得慢。真車是好幾顆感測器分工。</a:t>
             </a:r>
-            <a:endParaRPr lang="en-US" sz="960" dirty="0"/>
+            <a:endParaRPr lang="en-US" sz="1080" dirty="0"/>
           </a:p>
         </p:txBody>
       </p:sp>
@@ -6628,8 +6628,8 @@
         </p:nvSpPr>
         <p:spPr>
           <a:xfrm>
-            <a:off x="1402536" y="3390800"/>
-            <a:ext cx="584532" cy="181855"/>
+            <a:off x="986246" y="102870"/>
+            <a:ext cx="661307" cy="205740"/>
           </a:xfrm>
           <a:prstGeom prst="rect">
             <a:avLst/>
@@ -6645,7 +6645,7 @@
               <a:buNone/>
             </a:pPr>
             <a:r>
-              <a:rPr lang="en-US" sz="640" dirty="0">
+              <a:rPr lang="en-US" sz="720" dirty="0">
                 <a:solidFill>
                   <a:srgbClr val="9FB3C8"/>
                 </a:solidFill>
@@ -6655,7 +6655,7 @@
               </a:rPr>
               <a:t>10 / 11</a:t>
             </a:r>
-            <a:endParaRPr lang="en-US" sz="640" dirty="0"/>
+            <a:endParaRPr lang="en-US" sz="720" dirty="0"/>
           </a:p>
         </p:txBody>
       </p:sp>
@@ -6667,8 +6667,8 @@
         </p:nvSpPr>
         <p:spPr>
           <a:xfrm>
-            <a:off x="2006553" y="3390800"/>
-            <a:ext cx="1428857" cy="181855"/>
+            <a:off x="1669596" y="102870"/>
+            <a:ext cx="1616529" cy="205740"/>
           </a:xfrm>
           <a:prstGeom prst="rect">
             <a:avLst/>
@@ -6684,7 +6684,7 @@
               <a:buNone/>
             </a:pPr>
             <a:r>
-              <a:rPr lang="en-US" sz="640" dirty="0">
+              <a:rPr lang="en-US" sz="720" dirty="0">
                 <a:solidFill>
                   <a:srgbClr val="9FB3C8"/>
                 </a:solidFill>
@@ -6694,7 +6694,7 @@
               </a:rPr>
               <a:t>Tiết 3 · 第 3 節</a:t>
             </a:r>
-            <a:endParaRPr lang="en-US" sz="640" dirty="0"/>
+            <a:endParaRPr lang="en-US" sz="720" dirty="0"/>
           </a:p>
         </p:txBody>
       </p:sp>
@@ -6724,8 +6724,8 @@
       </p:nvGrpSpPr>
       <p:grpSpPr>
         <a:xfrm>
-          <a:off x="0" y="0"/>
-          <a:ext cx="0" cy="0"/>
+          <a:off x="898071" y="0"/>
+          <a:ext cx="1" cy="1"/>
           <a:chOff x="0" y="0"/>
           <a:chExt cx="0" cy="0"/>
         </a:xfrm>
@@ -6738,8 +6738,8 @@
         </p:nvSpPr>
         <p:spPr>
           <a:xfrm>
-            <a:off x="6130753" y="-947729"/>
-            <a:ext cx="2987610" cy="2987610"/>
+            <a:off x="6335486" y="-1102179"/>
+            <a:ext cx="3380014" cy="3380014"/>
           </a:xfrm>
           <a:prstGeom prst="ellipse">
             <a:avLst/>
@@ -6763,8 +6763,8 @@
         </p:nvSpPr>
         <p:spPr>
           <a:xfrm>
-            <a:off x="7104973" y="1520297"/>
-            <a:ext cx="1688649" cy="1688649"/>
+            <a:off x="7437664" y="1690007"/>
+            <a:ext cx="1910443" cy="1910443"/>
           </a:xfrm>
           <a:prstGeom prst="ellipse">
             <a:avLst/>
@@ -6785,8 +6785,8 @@
         </p:nvSpPr>
         <p:spPr>
           <a:xfrm>
-            <a:off x="1681812" y="364222"/>
-            <a:ext cx="4806155" cy="194844"/>
+            <a:off x="1302204" y="382089"/>
+            <a:ext cx="5437414" cy="220436"/>
           </a:xfrm>
           <a:prstGeom prst="rect">
             <a:avLst/>
@@ -6802,7 +6802,7 @@
               <a:buNone/>
             </a:pPr>
             <a:r>
-              <a:rPr lang="en-US" sz="890" b="1" dirty="0">
+              <a:rPr lang="en-US" sz="1000" b="1" dirty="0">
                 <a:solidFill>
                   <a:srgbClr val="FFB020"/>
                 </a:solidFill>
@@ -6812,7 +6812,7 @@
               </a:rPr>
               <a:t>Tuần sau · 下週預告</a:t>
             </a:r>
-            <a:endParaRPr lang="en-US" sz="890" dirty="0"/>
+            <a:endParaRPr lang="en-US" sz="1000" dirty="0"/>
           </a:p>
         </p:txBody>
       </p:sp>
@@ -6824,8 +6824,8 @@
         </p:nvSpPr>
         <p:spPr>
           <a:xfrm>
-            <a:off x="1681812" y="611024"/>
-            <a:ext cx="5715427" cy="753397"/>
+            <a:off x="1302204" y="661307"/>
+            <a:ext cx="6466114" cy="852351"/>
           </a:xfrm>
           <a:prstGeom prst="rect">
             <a:avLst/>
@@ -6844,7 +6844,7 @@
               <a:buNone/>
             </a:pPr>
             <a:r>
-              <a:rPr lang="en-US" sz="1780" b="1" dirty="0">
+              <a:rPr lang="en-US" sz="2010" b="1" dirty="0">
                 <a:solidFill>
                   <a:srgbClr val="FFFFFF"/>
                 </a:solidFill>
@@ -6854,7 +6854,7 @@
               </a:rPr>
               <a:t>Tuần 5, 8/10: vào chương 3, cảm biến</a:t>
             </a:r>
-            <a:endParaRPr lang="en-US" sz="1780" dirty="0"/>
+            <a:endParaRPr lang="en-US" sz="2010" dirty="0"/>
           </a:p>
           <a:p>
             <a:pPr indent="0" marL="0">
@@ -6864,7 +6864,7 @@
               <a:buNone/>
             </a:pPr>
             <a:r>
-              <a:rPr lang="en-US" sz="1070" dirty="0">
+              <a:rPr lang="en-US" sz="1210" dirty="0">
                 <a:solidFill>
                   <a:srgbClr val="AFC3D4"/>
                 </a:solidFill>
@@ -6874,7 +6874,7 @@
               </a:rPr>
               <a:t>第 5 週，10 月 8 日：進第三章，感測器</a:t>
             </a:r>
-            <a:endParaRPr lang="en-US" sz="1780" dirty="0"/>
+            <a:endParaRPr lang="en-US" sz="2010" dirty="0"/>
           </a:p>
         </p:txBody>
       </p:sp>
@@ -6886,8 +6886,8 @@
         </p:nvSpPr>
         <p:spPr>
           <a:xfrm>
-            <a:off x="1681812" y="1429370"/>
-            <a:ext cx="32474" cy="363709"/>
+            <a:off x="1302204" y="1587137"/>
+            <a:ext cx="36739" cy="411480"/>
           </a:xfrm>
           <a:prstGeom prst="rect">
             <a:avLst/>
@@ -6906,8 +6906,8 @@
         </p:nvSpPr>
         <p:spPr>
           <a:xfrm>
-            <a:off x="1837688" y="1403390"/>
-            <a:ext cx="5585531" cy="441647"/>
+            <a:off x="1478552" y="1557746"/>
+            <a:ext cx="6319157" cy="499654"/>
           </a:xfrm>
           <a:prstGeom prst="rect">
             <a:avLst/>
@@ -6926,7 +6926,7 @@
               <a:buNone/>
             </a:pPr>
             <a:r>
-              <a:rPr lang="en-US" sz="960" b="1" dirty="0">
+              <a:rPr lang="en-US" sz="1080" b="1" dirty="0">
                 <a:solidFill>
                   <a:srgbClr val="FFFFFF"/>
                 </a:solidFill>
@@ -6936,7 +6936,7 @@
               </a:rPr>
               <a:t>Nộp: phiếu bài tập tuần 3 và tuần 4, mỗi nhóm một tờ.</a:t>
             </a:r>
-            <a:endParaRPr lang="en-US" sz="960" dirty="0"/>
+            <a:endParaRPr lang="en-US" sz="1080" dirty="0"/>
           </a:p>
           <a:p>
             <a:pPr indent="0" marL="0">
@@ -6946,7 +6946,7 @@
               <a:buNone/>
             </a:pPr>
             <a:r>
-              <a:rPr lang="en-US" sz="850" dirty="0">
+              <a:rPr lang="en-US" sz="960" dirty="0">
                 <a:solidFill>
                   <a:srgbClr val="AFC3D4"/>
                 </a:solidFill>
@@ -6956,7 +6956,7 @@
               </a:rPr>
               <a:t>要交：第三週和第四週的任務單，每組一張。</a:t>
             </a:r>
-            <a:endParaRPr lang="en-US" sz="960" dirty="0"/>
+            <a:endParaRPr lang="en-US" sz="1080" dirty="0"/>
           </a:p>
         </p:txBody>
       </p:sp>
@@ -6968,8 +6968,8 @@
         </p:nvSpPr>
         <p:spPr>
           <a:xfrm>
-            <a:off x="1681812" y="1935964"/>
-            <a:ext cx="32474" cy="363709"/>
+            <a:off x="1302204" y="2160270"/>
+            <a:ext cx="36739" cy="411480"/>
           </a:xfrm>
           <a:prstGeom prst="rect">
             <a:avLst/>
@@ -6988,8 +6988,8 @@
         </p:nvSpPr>
         <p:spPr>
           <a:xfrm>
-            <a:off x="1837688" y="1909985"/>
-            <a:ext cx="5585531" cy="441647"/>
+            <a:off x="1478552" y="2130879"/>
+            <a:ext cx="6319157" cy="499654"/>
           </a:xfrm>
           <a:prstGeom prst="rect">
             <a:avLst/>
@@ -7008,7 +7008,7 @@
               <a:buNone/>
             </a:pPr>
             <a:r>
-              <a:rPr lang="en-US" sz="960" b="1" dirty="0">
+              <a:rPr lang="en-US" sz="1080" b="1" dirty="0">
                 <a:solidFill>
                   <a:srgbClr val="FFFFFF"/>
                 </a:solidFill>
@@ -7018,7 +7018,7 @@
               </a:rPr>
               <a:t>Làm: câu trắc nghiệm ở 2.8 trong giáo trình. Đáp án ở phụ lục 2.</a:t>
             </a:r>
-            <a:endParaRPr lang="en-US" sz="960" dirty="0"/>
+            <a:endParaRPr lang="en-US" sz="1080" dirty="0"/>
           </a:p>
           <a:p>
             <a:pPr indent="0" marL="0">
@@ -7028,7 +7028,7 @@
               <a:buNone/>
             </a:pPr>
             <a:r>
-              <a:rPr lang="en-US" sz="850" dirty="0">
+              <a:rPr lang="en-US" sz="960" dirty="0">
                 <a:solidFill>
                   <a:srgbClr val="AFC3D4"/>
                 </a:solidFill>
@@ -7038,7 +7038,7 @@
               </a:rPr>
               <a:t>要做：講義 2.8 的選擇題。附錄二有答案。</a:t>
             </a:r>
-            <a:endParaRPr lang="en-US" sz="960" dirty="0"/>
+            <a:endParaRPr lang="en-US" sz="1080" dirty="0"/>
           </a:p>
         </p:txBody>
       </p:sp>
@@ -7050,8 +7050,8 @@
         </p:nvSpPr>
         <p:spPr>
           <a:xfrm>
-            <a:off x="1681812" y="2442559"/>
-            <a:ext cx="32474" cy="363709"/>
+            <a:off x="1302204" y="2733403"/>
+            <a:ext cx="36739" cy="411480"/>
           </a:xfrm>
           <a:prstGeom prst="rect">
             <a:avLst/>
@@ -7070,8 +7070,8 @@
         </p:nvSpPr>
         <p:spPr>
           <a:xfrm>
-            <a:off x="1837688" y="2416580"/>
-            <a:ext cx="5585531" cy="441647"/>
+            <a:off x="1478552" y="2704011"/>
+            <a:ext cx="6319157" cy="499654"/>
           </a:xfrm>
           <a:prstGeom prst="rect">
             <a:avLst/>
@@ -7090,7 +7090,7 @@
               <a:buNone/>
             </a:pPr>
             <a:r>
-              <a:rPr lang="en-US" sz="960" b="1" dirty="0">
+              <a:rPr lang="en-US" sz="1080" b="1" dirty="0">
                 <a:solidFill>
                   <a:srgbClr val="FFFFFF"/>
                 </a:solidFill>
@@ -7100,7 +7100,7 @@
               </a:rPr>
               <a:t>Mang: một ảnh chụp bằng điện thoại — một tình huống bạn nghĩ camera sẽ nhìn không rõ.</a:t>
             </a:r>
-            <a:endParaRPr lang="en-US" sz="960" dirty="0"/>
+            <a:endParaRPr lang="en-US" sz="1080" dirty="0"/>
           </a:p>
           <a:p>
             <a:pPr indent="0" marL="0">
@@ -7110,7 +7110,7 @@
               <a:buNone/>
             </a:pPr>
             <a:r>
-              <a:rPr lang="en-US" sz="850" dirty="0">
+              <a:rPr lang="en-US" sz="960" dirty="0">
                 <a:solidFill>
                   <a:srgbClr val="AFC3D4"/>
                 </a:solidFill>
@@ -7120,7 +7120,7 @@
               </a:rPr>
               <a:t>要帶：用手機拍一張你覺得「相機會看不清楚」的路況。</a:t>
             </a:r>
-            <a:endParaRPr lang="en-US" sz="960" dirty="0"/>
+            <a:endParaRPr lang="en-US" sz="1080" dirty="0"/>
           </a:p>
         </p:txBody>
       </p:sp>
@@ -7132,8 +7132,8 @@
         </p:nvSpPr>
         <p:spPr>
           <a:xfrm>
-            <a:off x="1402536" y="3390800"/>
-            <a:ext cx="584532" cy="181855"/>
+            <a:off x="986246" y="102870"/>
+            <a:ext cx="661307" cy="205740"/>
           </a:xfrm>
           <a:prstGeom prst="rect">
             <a:avLst/>
@@ -7149,7 +7149,7 @@
               <a:buNone/>
             </a:pPr>
             <a:r>
-              <a:rPr lang="en-US" sz="640" dirty="0">
+              <a:rPr lang="en-US" sz="720" dirty="0">
                 <a:solidFill>
                   <a:srgbClr val="9FB3C8"/>
                 </a:solidFill>
@@ -7159,7 +7159,7 @@
               </a:rPr>
               <a:t>11 / 11</a:t>
             </a:r>
-            <a:endParaRPr lang="en-US" sz="640" dirty="0"/>
+            <a:endParaRPr lang="en-US" sz="720" dirty="0"/>
           </a:p>
         </p:txBody>
       </p:sp>
@@ -7171,8 +7171,8 @@
         </p:nvSpPr>
         <p:spPr>
           <a:xfrm>
-            <a:off x="2006553" y="3390800"/>
-            <a:ext cx="1428857" cy="181855"/>
+            <a:off x="1669596" y="102870"/>
+            <a:ext cx="1616529" cy="205740"/>
           </a:xfrm>
           <a:prstGeom prst="rect">
             <a:avLst/>
@@ -7188,7 +7188,7 @@
               <a:buNone/>
             </a:pPr>
             <a:r>
-              <a:rPr lang="en-US" sz="640" dirty="0">
+              <a:rPr lang="en-US" sz="720" dirty="0">
                 <a:solidFill>
                   <a:srgbClr val="9FB3C8"/>
                 </a:solidFill>
@@ -7198,7 +7198,7 @@
               </a:rPr>
               <a:t>Tiết 3 · 第 3 節</a:t>
             </a:r>
-            <a:endParaRPr lang="en-US" sz="640" dirty="0"/>
+            <a:endParaRPr lang="en-US" sz="720" dirty="0"/>
           </a:p>
         </p:txBody>
       </p:sp>
@@ -7221,8 +7221,8 @@
       </p:nvGrpSpPr>
       <p:grpSpPr>
         <a:xfrm>
-          <a:off x="0" y="0"/>
-          <a:ext cx="0" cy="0"/>
+          <a:off x="971550" y="0"/>
+          <a:ext cx="1" cy="1"/>
           <a:chOff x="0" y="0"/>
           <a:chExt cx="0" cy="0"/>
         </a:xfrm>
@@ -7235,8 +7235,8 @@
         </p:nvSpPr>
         <p:spPr>
           <a:xfrm>
-            <a:off x="1681812" y="234326"/>
-            <a:ext cx="5780375" cy="597522"/>
+            <a:off x="1367600" y="230429"/>
+            <a:ext cx="6408801" cy="662483"/>
           </a:xfrm>
           <a:prstGeom prst="rect">
             <a:avLst/>
@@ -7255,7 +7255,7 @@
               <a:buNone/>
             </a:pPr>
             <a:r>
-              <a:rPr lang="en-US" sz="1560" b="1" dirty="0">
+              <a:rPr lang="en-US" sz="1730" b="1" dirty="0">
                 <a:solidFill>
                   <a:srgbClr val="0B1F3A"/>
                 </a:solidFill>
@@ -7265,7 +7265,7 @@
               </a:rPr>
               <a:t>Bốn câu, làm theo thứ tự</a:t>
             </a:r>
-            <a:endParaRPr lang="en-US" sz="1560" dirty="0"/>
+            <a:endParaRPr lang="en-US" sz="1730" dirty="0"/>
           </a:p>
           <a:p>
             <a:pPr indent="0" marL="0">
@@ -7275,7 +7275,7 @@
               <a:buNone/>
             </a:pPr>
             <a:r>
-              <a:rPr lang="en-US" sz="960" dirty="0">
+              <a:rPr lang="en-US" sz="1060" dirty="0">
                 <a:solidFill>
                   <a:srgbClr val="5F7183"/>
                 </a:solidFill>
@@ -7285,7 +7285,7 @@
               </a:rPr>
               <a:t>四題，照順序做</a:t>
             </a:r>
-            <a:endParaRPr lang="en-US" sz="1560" dirty="0"/>
+            <a:endParaRPr lang="en-US" sz="1730" dirty="0"/>
           </a:p>
         </p:txBody>
       </p:sp>
@@ -7297,8 +7297,8 @@
         </p:nvSpPr>
         <p:spPr>
           <a:xfrm>
-            <a:off x="1681812" y="831848"/>
-            <a:ext cx="1298961" cy="1935452"/>
+            <a:off x="1367600" y="892912"/>
+            <a:ext cx="1440180" cy="2145868"/>
           </a:xfrm>
           <a:prstGeom prst="roundRect">
             <a:avLst>
@@ -7331,8 +7331,8 @@
         </p:nvSpPr>
         <p:spPr>
           <a:xfrm>
-            <a:off x="2162428" y="961744"/>
-            <a:ext cx="337730" cy="337730"/>
+            <a:off x="1900466" y="1036930"/>
+            <a:ext cx="374447" cy="374447"/>
           </a:xfrm>
           <a:prstGeom prst="ellipse">
             <a:avLst/>
@@ -7351,8 +7351,8 @@
         </p:nvSpPr>
         <p:spPr>
           <a:xfrm>
-            <a:off x="2162428" y="1033187"/>
-            <a:ext cx="337730" cy="194844"/>
+            <a:off x="1900466" y="1116140"/>
+            <a:ext cx="374447" cy="216027"/>
           </a:xfrm>
           <a:prstGeom prst="rect">
             <a:avLst/>
@@ -7368,7 +7368,7 @@
               <a:buNone/>
             </a:pPr>
             <a:r>
-              <a:rPr lang="en-US" sz="1070" b="1" dirty="0">
+              <a:rPr lang="en-US" sz="1180" b="1" dirty="0">
                 <a:solidFill>
                   <a:srgbClr val="FFFFFF"/>
                 </a:solidFill>
@@ -7378,7 +7378,7 @@
               </a:rPr>
               <a:t>1</a:t>
             </a:r>
-            <a:endParaRPr lang="en-US" sz="1070" dirty="0"/>
+            <a:endParaRPr lang="en-US" sz="1180" dirty="0"/>
           </a:p>
         </p:txBody>
       </p:sp>
@@ -7390,8 +7390,8 @@
         </p:nvSpPr>
         <p:spPr>
           <a:xfrm>
-            <a:off x="1772740" y="1364422"/>
-            <a:ext cx="1117106" cy="467626"/>
+            <a:off x="1468412" y="1483385"/>
+            <a:ext cx="1238555" cy="518465"/>
           </a:xfrm>
           <a:prstGeom prst="rect">
             <a:avLst/>
@@ -7410,7 +7410,7 @@
               <a:buNone/>
             </a:pPr>
             <a:r>
-              <a:rPr lang="en-US" sz="990" b="1" dirty="0">
+              <a:rPr lang="en-US" sz="1100" b="1" dirty="0">
                 <a:solidFill>
                   <a:srgbClr val="0B1F3A"/>
                 </a:solidFill>
@@ -7420,7 +7420,7 @@
               </a:rPr>
               <a:t>Nhìn nó đâm</a:t>
             </a:r>
-            <a:endParaRPr lang="en-US" sz="990" dirty="0"/>
+            <a:endParaRPr lang="en-US" sz="1100" dirty="0"/>
           </a:p>
           <a:p>
             <a:pPr algn="ctr" indent="0" marL="0">
@@ -7430,7 +7430,7 @@
               <a:buNone/>
             </a:pPr>
             <a:r>
-              <a:rPr lang="en-US" sz="850" dirty="0">
+              <a:rPr lang="en-US" sz="950" dirty="0">
                 <a:solidFill>
                   <a:srgbClr val="007F72"/>
                 </a:solidFill>
@@ -7440,7 +7440,7 @@
               </a:rPr>
               <a:t>先看它怎麼撞</a:t>
             </a:r>
-            <a:endParaRPr lang="en-US" sz="990" dirty="0"/>
+            <a:endParaRPr lang="en-US" sz="1100" dirty="0"/>
           </a:p>
         </p:txBody>
       </p:sp>
@@ -7452,8 +7452,8 @@
         </p:nvSpPr>
         <p:spPr>
           <a:xfrm>
-            <a:off x="1772740" y="1858027"/>
-            <a:ext cx="1117106" cy="831335"/>
+            <a:off x="1468412" y="2030654"/>
+            <a:ext cx="1238555" cy="921715"/>
           </a:xfrm>
           <a:prstGeom prst="rect">
             <a:avLst/>
@@ -7472,7 +7472,7 @@
               <a:buNone/>
             </a:pPr>
             <a:r>
-              <a:rPr lang="en-US" sz="750" dirty="0">
+              <a:rPr lang="en-US" sz="830" dirty="0">
                 <a:solidFill>
                   <a:srgbClr val="5F7183"/>
                 </a:solidFill>
@@ -7482,7 +7482,7 @@
               </a:rPr>
               <a:t>Chưa đổi gì cả</a:t>
             </a:r>
-            <a:endParaRPr lang="en-US" sz="750" dirty="0"/>
+            <a:endParaRPr lang="en-US" sz="830" dirty="0"/>
           </a:p>
           <a:p>
             <a:pPr algn="ctr" indent="0" marL="0">
@@ -7492,7 +7492,7 @@
               <a:buNone/>
             </a:pPr>
             <a:r>
-              <a:rPr lang="en-US" sz="750" dirty="0">
+              <a:rPr lang="en-US" sz="830" dirty="0">
                 <a:solidFill>
                   <a:srgbClr val="5F7183"/>
                 </a:solidFill>
@@ -7502,7 +7502,7 @@
               </a:rPr>
               <a:t>3 lần va chạm đầu</a:t>
             </a:r>
-            <a:endParaRPr lang="en-US" sz="750" dirty="0"/>
+            <a:endParaRPr lang="en-US" sz="830" dirty="0"/>
           </a:p>
           <a:p>
             <a:pPr algn="ctr" indent="0" marL="0">
@@ -7512,7 +7512,7 @@
               <a:buNone/>
             </a:pPr>
             <a:r>
-              <a:rPr lang="en-US" sz="670" dirty="0">
+              <a:rPr lang="en-US" sz="750" dirty="0">
                 <a:solidFill>
                   <a:srgbClr val="5F7183"/>
                 </a:solidFill>
@@ -7522,7 +7522,7 @@
               </a:rPr>
               <a:t>什麼都不要改</a:t>
             </a:r>
-            <a:endParaRPr lang="en-US" sz="750" dirty="0"/>
+            <a:endParaRPr lang="en-US" sz="830" dirty="0"/>
           </a:p>
           <a:p>
             <a:pPr algn="ctr" indent="0" marL="0">
@@ -7532,7 +7532,7 @@
               <a:buNone/>
             </a:pPr>
             <a:r>
-              <a:rPr lang="en-US" sz="670" dirty="0">
+              <a:rPr lang="en-US" sz="750" dirty="0">
                 <a:solidFill>
                   <a:srgbClr val="5F7183"/>
                 </a:solidFill>
@@ -7542,7 +7542,7 @@
               </a:rPr>
               <a:t>記前三次</a:t>
             </a:r>
-            <a:endParaRPr lang="en-US" sz="750" dirty="0"/>
+            <a:endParaRPr lang="en-US" sz="830" dirty="0"/>
           </a:p>
         </p:txBody>
       </p:sp>
@@ -7554,8 +7554,8 @@
         </p:nvSpPr>
         <p:spPr>
           <a:xfrm>
-            <a:off x="2980773" y="1481328"/>
-            <a:ext cx="194844" cy="259792"/>
+            <a:off x="2807780" y="1613002"/>
+            <a:ext cx="216027" cy="288036"/>
           </a:xfrm>
           <a:prstGeom prst="rect">
             <a:avLst/>
@@ -7571,7 +7571,7 @@
               <a:buNone/>
             </a:pPr>
             <a:r>
-              <a:rPr lang="en-US" sz="1350" b="1" dirty="0">
+              <a:rPr lang="en-US" sz="1500" b="1" dirty="0">
                 <a:solidFill>
                   <a:srgbClr val="00A896"/>
                 </a:solidFill>
@@ -7581,7 +7581,7 @@
               </a:rPr>
               <a:t>→</a:t>
             </a:r>
-            <a:endParaRPr lang="en-US" sz="1350" dirty="0"/>
+            <a:endParaRPr lang="en-US" sz="1500" dirty="0"/>
           </a:p>
         </p:txBody>
       </p:sp>
@@ -7593,8 +7593,8 @@
         </p:nvSpPr>
         <p:spPr>
           <a:xfrm>
-            <a:off x="3175617" y="831848"/>
-            <a:ext cx="1298961" cy="1935452"/>
+            <a:off x="3023807" y="892912"/>
+            <a:ext cx="1440180" cy="2145868"/>
           </a:xfrm>
           <a:prstGeom prst="roundRect">
             <a:avLst>
@@ -7627,8 +7627,8 @@
         </p:nvSpPr>
         <p:spPr>
           <a:xfrm>
-            <a:off x="3656233" y="961744"/>
-            <a:ext cx="337730" cy="337730"/>
+            <a:off x="3556673" y="1036930"/>
+            <a:ext cx="374447" cy="374447"/>
           </a:xfrm>
           <a:prstGeom prst="ellipse">
             <a:avLst/>
@@ -7647,8 +7647,8 @@
         </p:nvSpPr>
         <p:spPr>
           <a:xfrm>
-            <a:off x="3656233" y="1033187"/>
-            <a:ext cx="337730" cy="194844"/>
+            <a:off x="3556673" y="1116140"/>
+            <a:ext cx="374447" cy="216027"/>
           </a:xfrm>
           <a:prstGeom prst="rect">
             <a:avLst/>
@@ -7664,7 +7664,7 @@
               <a:buNone/>
             </a:pPr>
             <a:r>
-              <a:rPr lang="en-US" sz="1070" b="1" dirty="0">
+              <a:rPr lang="en-US" sz="1180" b="1" dirty="0">
                 <a:solidFill>
                   <a:srgbClr val="FFFFFF"/>
                 </a:solidFill>
@@ -7674,7 +7674,7 @@
               </a:rPr>
               <a:t>2</a:t>
             </a:r>
-            <a:endParaRPr lang="en-US" sz="1070" dirty="0"/>
+            <a:endParaRPr lang="en-US" sz="1180" dirty="0"/>
           </a:p>
         </p:txBody>
       </p:sp>
@@ -7686,8 +7686,8 @@
         </p:nvSpPr>
         <p:spPr>
           <a:xfrm>
-            <a:off x="3266544" y="1364422"/>
-            <a:ext cx="1117106" cy="467626"/>
+            <a:off x="3124619" y="1483385"/>
+            <a:ext cx="1238555" cy="518465"/>
           </a:xfrm>
           <a:prstGeom prst="rect">
             <a:avLst/>
@@ -7706,7 +7706,7 @@
               <a:buNone/>
             </a:pPr>
             <a:r>
-              <a:rPr lang="en-US" sz="990" b="1" dirty="0">
+              <a:rPr lang="en-US" sz="1100" b="1" dirty="0">
                 <a:solidFill>
                   <a:srgbClr val="0B1F3A"/>
                 </a:solidFill>
@@ -7716,7 +7716,7 @@
               </a:rPr>
               <a:t>Quét tham số</a:t>
             </a:r>
-            <a:endParaRPr lang="en-US" sz="990" dirty="0"/>
+            <a:endParaRPr lang="en-US" sz="1100" dirty="0"/>
           </a:p>
           <a:p>
             <a:pPr algn="ctr" indent="0" marL="0">
@@ -7726,7 +7726,7 @@
               <a:buNone/>
             </a:pPr>
             <a:r>
-              <a:rPr lang="en-US" sz="850" dirty="0">
+              <a:rPr lang="en-US" sz="950" dirty="0">
                 <a:solidFill>
                   <a:srgbClr val="007F72"/>
                 </a:solidFill>
@@ -7736,7 +7736,7 @@
               </a:rPr>
               <a:t>掃參數</a:t>
             </a:r>
-            <a:endParaRPr lang="en-US" sz="990" dirty="0"/>
+            <a:endParaRPr lang="en-US" sz="1100" dirty="0"/>
           </a:p>
         </p:txBody>
       </p:sp>
@@ -7748,8 +7748,8 @@
         </p:nvSpPr>
         <p:spPr>
           <a:xfrm>
-            <a:off x="3266544" y="1858027"/>
-            <a:ext cx="1117106" cy="831335"/>
+            <a:off x="3124619" y="2030654"/>
+            <a:ext cx="1238555" cy="921715"/>
           </a:xfrm>
           <a:prstGeom prst="rect">
             <a:avLst/>
@@ -7768,7 +7768,7 @@
               <a:buNone/>
             </a:pPr>
             <a:r>
-              <a:rPr lang="en-US" sz="750" dirty="0">
+              <a:rPr lang="en-US" sz="830" dirty="0">
                 <a:solidFill>
                   <a:srgbClr val="5F7183"/>
                 </a:solidFill>
@@ -7778,7 +7778,7 @@
               </a:rPr>
               <a:t>Trụ được lâu nhất</a:t>
             </a:r>
-            <a:endParaRPr lang="en-US" sz="750" dirty="0"/>
+            <a:endParaRPr lang="en-US" sz="830" dirty="0"/>
           </a:p>
           <a:p>
             <a:pPr algn="ctr" indent="0" marL="0">
@@ -7788,7 +7788,7 @@
               <a:buNone/>
             </a:pPr>
             <a:r>
-              <a:rPr lang="en-US" sz="750" dirty="0">
+              <a:rPr lang="en-US" sz="830" dirty="0">
                 <a:solidFill>
                   <a:srgbClr val="5F7183"/>
                 </a:solidFill>
@@ -7798,7 +7798,7 @@
               </a:rPr>
               <a:t>3 lần lấy lần tốt nhất</a:t>
             </a:r>
-            <a:endParaRPr lang="en-US" sz="750" dirty="0"/>
+            <a:endParaRPr lang="en-US" sz="830" dirty="0"/>
           </a:p>
           <a:p>
             <a:pPr algn="ctr" indent="0" marL="0">
@@ -7808,7 +7808,7 @@
               <a:buNone/>
             </a:pPr>
             <a:r>
-              <a:rPr lang="en-US" sz="670" dirty="0">
+              <a:rPr lang="en-US" sz="750" dirty="0">
                 <a:solidFill>
                   <a:srgbClr val="5F7183"/>
                 </a:solidFill>
@@ -7818,7 +7818,7 @@
               </a:rPr>
               <a:t>撐最久</a:t>
             </a:r>
-            <a:endParaRPr lang="en-US" sz="750" dirty="0"/>
+            <a:endParaRPr lang="en-US" sz="830" dirty="0"/>
           </a:p>
           <a:p>
             <a:pPr algn="ctr" indent="0" marL="0">
@@ -7828,7 +7828,7 @@
               <a:buNone/>
             </a:pPr>
             <a:r>
-              <a:rPr lang="en-US" sz="670" dirty="0">
+              <a:rPr lang="en-US" sz="750" dirty="0">
                 <a:solidFill>
                   <a:srgbClr val="5F7183"/>
                 </a:solidFill>
@@ -7838,7 +7838,7 @@
               </a:rPr>
               <a:t>跑 3 次取最好</a:t>
             </a:r>
-            <a:endParaRPr lang="en-US" sz="750" dirty="0"/>
+            <a:endParaRPr lang="en-US" sz="830" dirty="0"/>
           </a:p>
         </p:txBody>
       </p:sp>
@@ -7850,8 +7850,8 @@
         </p:nvSpPr>
         <p:spPr>
           <a:xfrm>
-            <a:off x="4474578" y="1481328"/>
-            <a:ext cx="194844" cy="259792"/>
+            <a:off x="4463987" y="1613002"/>
+            <a:ext cx="216027" cy="288036"/>
           </a:xfrm>
           <a:prstGeom prst="rect">
             <a:avLst/>
@@ -7867,7 +7867,7 @@
               <a:buNone/>
             </a:pPr>
             <a:r>
-              <a:rPr lang="en-US" sz="1350" b="1" dirty="0">
+              <a:rPr lang="en-US" sz="1500" b="1" dirty="0">
                 <a:solidFill>
                   <a:srgbClr val="00A896"/>
                 </a:solidFill>
@@ -7877,7 +7877,7 @@
               </a:rPr>
               <a:t>→</a:t>
             </a:r>
-            <a:endParaRPr lang="en-US" sz="1350" dirty="0"/>
+            <a:endParaRPr lang="en-US" sz="1500" dirty="0"/>
           </a:p>
         </p:txBody>
       </p:sp>
@@ -7889,8 +7889,8 @@
         </p:nvSpPr>
         <p:spPr>
           <a:xfrm>
-            <a:off x="4669422" y="831848"/>
-            <a:ext cx="1298961" cy="1935452"/>
+            <a:off x="4680014" y="892912"/>
+            <a:ext cx="1440180" cy="2145868"/>
           </a:xfrm>
           <a:prstGeom prst="roundRect">
             <a:avLst>
@@ -7923,8 +7923,8 @@
         </p:nvSpPr>
         <p:spPr>
           <a:xfrm>
-            <a:off x="5150038" y="961744"/>
-            <a:ext cx="337730" cy="337730"/>
+            <a:off x="5212880" y="1036930"/>
+            <a:ext cx="374447" cy="374447"/>
           </a:xfrm>
           <a:prstGeom prst="ellipse">
             <a:avLst/>
@@ -7943,8 +7943,8 @@
         </p:nvSpPr>
         <p:spPr>
           <a:xfrm>
-            <a:off x="5150038" y="1033187"/>
-            <a:ext cx="337730" cy="194844"/>
+            <a:off x="5212880" y="1116140"/>
+            <a:ext cx="374447" cy="216027"/>
           </a:xfrm>
           <a:prstGeom prst="rect">
             <a:avLst/>
@@ -7960,7 +7960,7 @@
               <a:buNone/>
             </a:pPr>
             <a:r>
-              <a:rPr lang="en-US" sz="1070" b="1" dirty="0">
+              <a:rPr lang="en-US" sz="1180" b="1" dirty="0">
                 <a:solidFill>
                   <a:srgbClr val="FFFFFF"/>
                 </a:solidFill>
@@ -7970,7 +7970,7 @@
               </a:rPr>
               <a:t>3</a:t>
             </a:r>
-            <a:endParaRPr lang="en-US" sz="1070" dirty="0"/>
+            <a:endParaRPr lang="en-US" sz="1180" dirty="0"/>
           </a:p>
         </p:txBody>
       </p:sp>
@@ -7982,8 +7982,8 @@
         </p:nvSpPr>
         <p:spPr>
           <a:xfrm>
-            <a:off x="4760349" y="1364422"/>
-            <a:ext cx="1117106" cy="467626"/>
+            <a:off x="4780826" y="1483385"/>
+            <a:ext cx="1238555" cy="518465"/>
           </a:xfrm>
           <a:prstGeom prst="rect">
             <a:avLst/>
@@ -8002,7 +8002,7 @@
               <a:buNone/>
             </a:pPr>
             <a:r>
-              <a:rPr lang="en-US" sz="990" b="1" dirty="0">
+              <a:rPr lang="en-US" sz="1100" b="1" dirty="0">
                 <a:solidFill>
                   <a:srgbClr val="0B1F3A"/>
                 </a:solidFill>
@@ -8012,7 +8012,7 @@
               </a:rPr>
               <a:t>Bật mưa</a:t>
             </a:r>
-            <a:endParaRPr lang="en-US" sz="990" dirty="0"/>
+            <a:endParaRPr lang="en-US" sz="1100" dirty="0"/>
           </a:p>
           <a:p>
             <a:pPr algn="ctr" indent="0" marL="0">
@@ -8022,7 +8022,7 @@
               <a:buNone/>
             </a:pPr>
             <a:r>
-              <a:rPr lang="en-US" sz="850" dirty="0">
+              <a:rPr lang="en-US" sz="950" dirty="0">
                 <a:solidFill>
                   <a:srgbClr val="007F72"/>
                 </a:solidFill>
@@ -8032,7 +8032,7 @@
               </a:rPr>
               <a:t>打開雨天</a:t>
             </a:r>
-            <a:endParaRPr lang="en-US" sz="990" dirty="0"/>
+            <a:endParaRPr lang="en-US" sz="1100" dirty="0"/>
           </a:p>
         </p:txBody>
       </p:sp>
@@ -8044,8 +8044,8 @@
         </p:nvSpPr>
         <p:spPr>
           <a:xfrm>
-            <a:off x="4760349" y="1858027"/>
-            <a:ext cx="1117106" cy="831335"/>
+            <a:off x="4780826" y="2030654"/>
+            <a:ext cx="1238555" cy="921715"/>
           </a:xfrm>
           <a:prstGeom prst="rect">
             <a:avLst/>
@@ -8064,7 +8064,7 @@
               <a:buNone/>
             </a:pPr>
             <a:r>
-              <a:rPr lang="en-US" sz="750" dirty="0">
+              <a:rPr lang="en-US" sz="830" dirty="0">
                 <a:solidFill>
                   <a:srgbClr val="5F7183"/>
                 </a:solidFill>
@@ -8074,7 +8074,7 @@
               </a:rPr>
               <a:t>Trụ được bao lâu?</a:t>
             </a:r>
-            <a:endParaRPr lang="en-US" sz="750" dirty="0"/>
+            <a:endParaRPr lang="en-US" sz="830" dirty="0"/>
           </a:p>
           <a:p>
             <a:pPr algn="ctr" indent="0" marL="0">
@@ -8084,7 +8084,7 @@
               <a:buNone/>
             </a:pPr>
             <a:r>
-              <a:rPr lang="en-US" sz="750" dirty="0">
+              <a:rPr lang="en-US" sz="830" dirty="0">
                 <a:solidFill>
                   <a:srgbClr val="5F7183"/>
                 </a:solidFill>
@@ -8094,7 +8094,7 @@
               </a:rPr>
               <a:t>Đổi gì, vì sao</a:t>
             </a:r>
-            <a:endParaRPr lang="en-US" sz="750" dirty="0"/>
+            <a:endParaRPr lang="en-US" sz="830" dirty="0"/>
           </a:p>
           <a:p>
             <a:pPr algn="ctr" indent="0" marL="0">
@@ -8104,7 +8104,7 @@
               <a:buNone/>
             </a:pPr>
             <a:r>
-              <a:rPr lang="en-US" sz="670" dirty="0">
+              <a:rPr lang="en-US" sz="750" dirty="0">
                 <a:solidFill>
                   <a:srgbClr val="5F7183"/>
                 </a:solidFill>
@@ -8114,7 +8114,7 @@
               </a:rPr>
               <a:t>這次撐多久？</a:t>
             </a:r>
-            <a:endParaRPr lang="en-US" sz="750" dirty="0"/>
+            <a:endParaRPr lang="en-US" sz="830" dirty="0"/>
           </a:p>
           <a:p>
             <a:pPr algn="ctr" indent="0" marL="0">
@@ -8124,7 +8124,7 @@
               <a:buNone/>
             </a:pPr>
             <a:r>
-              <a:rPr lang="en-US" sz="670" dirty="0">
+              <a:rPr lang="en-US" sz="750" dirty="0">
                 <a:solidFill>
                   <a:srgbClr val="5F7183"/>
                 </a:solidFill>
@@ -8134,7 +8134,7 @@
               </a:rPr>
               <a:t>改什麼、為什麼</a:t>
             </a:r>
-            <a:endParaRPr lang="en-US" sz="750" dirty="0"/>
+            <a:endParaRPr lang="en-US" sz="830" dirty="0"/>
           </a:p>
         </p:txBody>
       </p:sp>
@@ -8146,8 +8146,8 @@
         </p:nvSpPr>
         <p:spPr>
           <a:xfrm>
-            <a:off x="5968383" y="1481328"/>
-            <a:ext cx="194844" cy="259792"/>
+            <a:off x="6120194" y="1613002"/>
+            <a:ext cx="216027" cy="288036"/>
           </a:xfrm>
           <a:prstGeom prst="rect">
             <a:avLst/>
@@ -8163,7 +8163,7 @@
               <a:buNone/>
             </a:pPr>
             <a:r>
-              <a:rPr lang="en-US" sz="1350" b="1" dirty="0">
+              <a:rPr lang="en-US" sz="1500" b="1" dirty="0">
                 <a:solidFill>
                   <a:srgbClr val="00A896"/>
                 </a:solidFill>
@@ -8173,7 +8173,7 @@
               </a:rPr>
               <a:t>→</a:t>
             </a:r>
-            <a:endParaRPr lang="en-US" sz="1350" dirty="0"/>
+            <a:endParaRPr lang="en-US" sz="1500" dirty="0"/>
           </a:p>
         </p:txBody>
       </p:sp>
@@ -8185,8 +8185,8 @@
         </p:nvSpPr>
         <p:spPr>
           <a:xfrm>
-            <a:off x="6163227" y="831848"/>
-            <a:ext cx="1298961" cy="1935452"/>
+            <a:off x="6336221" y="892912"/>
+            <a:ext cx="1440180" cy="2145868"/>
           </a:xfrm>
           <a:prstGeom prst="roundRect">
             <a:avLst>
@@ -8219,8 +8219,8 @@
         </p:nvSpPr>
         <p:spPr>
           <a:xfrm>
-            <a:off x="6643842" y="961744"/>
-            <a:ext cx="337730" cy="337730"/>
+            <a:off x="6869087" y="1036930"/>
+            <a:ext cx="374447" cy="374447"/>
           </a:xfrm>
           <a:prstGeom prst="ellipse">
             <a:avLst/>
@@ -8239,8 +8239,8 @@
         </p:nvSpPr>
         <p:spPr>
           <a:xfrm>
-            <a:off x="6643842" y="1033187"/>
-            <a:ext cx="337730" cy="194844"/>
+            <a:off x="6869087" y="1116140"/>
+            <a:ext cx="374447" cy="216027"/>
           </a:xfrm>
           <a:prstGeom prst="rect">
             <a:avLst/>
@@ -8256,7 +8256,7 @@
               <a:buNone/>
             </a:pPr>
             <a:r>
-              <a:rPr lang="en-US" sz="1070" b="1" dirty="0">
+              <a:rPr lang="en-US" sz="1180" b="1" dirty="0">
                 <a:solidFill>
                   <a:srgbClr val="FFFFFF"/>
                 </a:solidFill>
@@ -8266,7 +8266,7 @@
               </a:rPr>
               <a:t>4</a:t>
             </a:r>
-            <a:endParaRPr lang="en-US" sz="1070" dirty="0"/>
+            <a:endParaRPr lang="en-US" sz="1180" dirty="0"/>
           </a:p>
         </p:txBody>
       </p:sp>
@@ -8278,8 +8278,8 @@
         </p:nvSpPr>
         <p:spPr>
           <a:xfrm>
-            <a:off x="6254154" y="1364422"/>
-            <a:ext cx="1117106" cy="467626"/>
+            <a:off x="6437033" y="1483385"/>
+            <a:ext cx="1238555" cy="518465"/>
           </a:xfrm>
           <a:prstGeom prst="rect">
             <a:avLst/>
@@ -8298,7 +8298,7 @@
               <a:buNone/>
             </a:pPr>
             <a:r>
-              <a:rPr lang="en-US" sz="990" b="1" dirty="0">
+              <a:rPr lang="en-US" sz="1100" b="1" dirty="0">
                 <a:solidFill>
                   <a:srgbClr val="0B1F3A"/>
                 </a:solidFill>
@@ -8308,7 +8308,7 @@
               </a:rPr>
               <a:t>Câu chữ</a:t>
             </a:r>
-            <a:endParaRPr lang="en-US" sz="990" dirty="0"/>
+            <a:endParaRPr lang="en-US" sz="1100" dirty="0"/>
           </a:p>
           <a:p>
             <a:pPr algn="ctr" indent="0" marL="0">
@@ -8318,7 +8318,7 @@
               <a:buNone/>
             </a:pPr>
             <a:r>
-              <a:rPr lang="en-US" sz="850" dirty="0">
+              <a:rPr lang="en-US" sz="950" dirty="0">
                 <a:solidFill>
                   <a:srgbClr val="007F72"/>
                 </a:solidFill>
@@ -8328,7 +8328,7 @@
               </a:rPr>
               <a:t>文字題</a:t>
             </a:r>
-            <a:endParaRPr lang="en-US" sz="990" dirty="0"/>
+            <a:endParaRPr lang="en-US" sz="1100" dirty="0"/>
           </a:p>
         </p:txBody>
       </p:sp>
@@ -8340,8 +8340,8 @@
         </p:nvSpPr>
         <p:spPr>
           <a:xfrm>
-            <a:off x="6254154" y="1858027"/>
-            <a:ext cx="1117106" cy="831335"/>
+            <a:off x="6437033" y="2030654"/>
+            <a:ext cx="1238555" cy="921715"/>
           </a:xfrm>
           <a:prstGeom prst="rect">
             <a:avLst/>
@@ -8360,7 +8360,7 @@
               <a:buNone/>
             </a:pPr>
             <a:r>
-              <a:rPr lang="en-US" sz="750" dirty="0">
+              <a:rPr lang="en-US" sz="830" dirty="0">
                 <a:solidFill>
                   <a:srgbClr val="5F7183"/>
                 </a:solidFill>
@@ -8370,7 +8370,7 @@
               </a:rPr>
               <a:t>Tia = cảm biến nào?</a:t>
             </a:r>
-            <a:endParaRPr lang="en-US" sz="750" dirty="0"/>
+            <a:endParaRPr lang="en-US" sz="830" dirty="0"/>
           </a:p>
           <a:p>
             <a:pPr algn="ctr" indent="0" marL="0">
@@ -8380,7 +8380,7 @@
               <a:buNone/>
             </a:pPr>
             <a:r>
-              <a:rPr lang="en-US" sz="750" dirty="0">
+              <a:rPr lang="en-US" sz="830" dirty="0">
                 <a:solidFill>
                   <a:srgbClr val="5F7183"/>
                 </a:solidFill>
@@ -8390,7 +8390,7 @@
               </a:rPr>
               <a:t>Thiếu gì?</a:t>
             </a:r>
-            <a:endParaRPr lang="en-US" sz="750" dirty="0"/>
+            <a:endParaRPr lang="en-US" sz="830" dirty="0"/>
           </a:p>
           <a:p>
             <a:pPr algn="ctr" indent="0" marL="0">
@@ -8400,7 +8400,7 @@
               <a:buNone/>
             </a:pPr>
             <a:r>
-              <a:rPr lang="en-US" sz="670" dirty="0">
+              <a:rPr lang="en-US" sz="750" dirty="0">
                 <a:solidFill>
                   <a:srgbClr val="5F7183"/>
                 </a:solidFill>
@@ -8410,7 +8410,7 @@
               </a:rPr>
               <a:t>射線＝哪種感測器？</a:t>
             </a:r>
-            <a:endParaRPr lang="en-US" sz="750" dirty="0"/>
+            <a:endParaRPr lang="en-US" sz="830" dirty="0"/>
           </a:p>
           <a:p>
             <a:pPr algn="ctr" indent="0" marL="0">
@@ -8420,7 +8420,7 @@
               <a:buNone/>
             </a:pPr>
             <a:r>
-              <a:rPr lang="en-US" sz="670" dirty="0">
+              <a:rPr lang="en-US" sz="750" dirty="0">
                 <a:solidFill>
                   <a:srgbClr val="5F7183"/>
                 </a:solidFill>
@@ -8430,7 +8430,7 @@
               </a:rPr>
               <a:t>少了什麼？</a:t>
             </a:r>
-            <a:endParaRPr lang="en-US" sz="750" dirty="0"/>
+            <a:endParaRPr lang="en-US" sz="830" dirty="0"/>
           </a:p>
         </p:txBody>
       </p:sp>
@@ -8442,8 +8442,8 @@
         </p:nvSpPr>
         <p:spPr>
           <a:xfrm>
-            <a:off x="1681812" y="2871216"/>
-            <a:ext cx="5780375" cy="402678"/>
+            <a:off x="1367600" y="3153994"/>
+            <a:ext cx="6408801" cy="446456"/>
           </a:xfrm>
           <a:prstGeom prst="rect">
             <a:avLst/>
@@ -8462,7 +8462,7 @@
               <a:buNone/>
             </a:pPr>
             <a:r>
-              <a:rPr lang="en-US" sz="890" b="1" dirty="0">
+              <a:rPr lang="en-US" sz="980" b="1" dirty="0">
                 <a:solidFill>
                   <a:srgbClr val="0B1F3A"/>
                 </a:solidFill>
@@ -8472,7 +8472,7 @@
               </a:rPr>
               <a:t>Ba câu đầu có con số, câu cuối viết chữ. Nộp một tờ mỗi nhóm trước khi hết giờ.</a:t>
             </a:r>
-            <a:endParaRPr lang="en-US" sz="890" dirty="0"/>
+            <a:endParaRPr lang="en-US" sz="980" dirty="0"/>
           </a:p>
           <a:p>
             <a:pPr indent="0" marL="0">
@@ -8482,7 +8482,7 @@
               <a:buNone/>
             </a:pPr>
             <a:r>
-              <a:rPr lang="en-US" sz="820" dirty="0">
+              <a:rPr lang="en-US" sz="910" dirty="0">
                 <a:solidFill>
                   <a:srgbClr val="007F72"/>
                 </a:solidFill>
@@ -8492,7 +8492,7 @@
               </a:rPr>
               <a:t>前三題有數字，最後一題寫字。每組一張紙，下課前交。</a:t>
             </a:r>
-            <a:endParaRPr lang="en-US" sz="890" dirty="0"/>
+            <a:endParaRPr lang="en-US" sz="980" dirty="0"/>
           </a:p>
         </p:txBody>
       </p:sp>
@@ -8512,8 +8512,8 @@
         </p:blipFill>
         <p:spPr>
           <a:xfrm>
-            <a:off x="6663327" y="3338842"/>
-            <a:ext cx="779376" cy="172200"/>
+            <a:off x="7882128" y="109728"/>
+            <a:ext cx="1097280" cy="242439"/>
           </a:xfrm>
           <a:prstGeom prst="rect">
             <a:avLst/>
@@ -8528,8 +8528,8 @@
         </p:nvSpPr>
         <p:spPr>
           <a:xfrm>
-            <a:off x="1402536" y="3390800"/>
-            <a:ext cx="584532" cy="181855"/>
+            <a:off x="1057961" y="100813"/>
+            <a:ext cx="648081" cy="201625"/>
           </a:xfrm>
           <a:prstGeom prst="rect">
             <a:avLst/>
@@ -8545,7 +8545,7 @@
               <a:buNone/>
             </a:pPr>
             <a:r>
-              <a:rPr lang="en-US" sz="640" dirty="0">
+              <a:rPr lang="en-US" sz="710" dirty="0">
                 <a:solidFill>
                   <a:srgbClr val="5F7183"/>
                 </a:solidFill>
@@ -8555,7 +8555,7 @@
               </a:rPr>
               <a:t>2 / 11</a:t>
             </a:r>
-            <a:endParaRPr lang="en-US" sz="640" dirty="0"/>
+            <a:endParaRPr lang="en-US" sz="710" dirty="0"/>
           </a:p>
         </p:txBody>
       </p:sp>
@@ -8567,8 +8567,8 @@
         </p:nvSpPr>
         <p:spPr>
           <a:xfrm>
-            <a:off x="2006553" y="3390800"/>
-            <a:ext cx="1428857" cy="181855"/>
+            <a:off x="1727645" y="100813"/>
+            <a:ext cx="1584198" cy="201625"/>
           </a:xfrm>
           <a:prstGeom prst="rect">
             <a:avLst/>
@@ -8584,7 +8584,7 @@
               <a:buNone/>
             </a:pPr>
             <a:r>
-              <a:rPr lang="en-US" sz="640" dirty="0">
+              <a:rPr lang="en-US" sz="710" dirty="0">
                 <a:solidFill>
                   <a:srgbClr val="5F7183"/>
                 </a:solidFill>
@@ -8594,7 +8594,7 @@
               </a:rPr>
               <a:t>Tiết 3 · 第 3 節</a:t>
             </a:r>
-            <a:endParaRPr lang="en-US" sz="640" dirty="0"/>
+            <a:endParaRPr lang="en-US" sz="710" dirty="0"/>
           </a:p>
         </p:txBody>
       </p:sp>
@@ -8624,8 +8624,8 @@
       </p:nvGrpSpPr>
       <p:grpSpPr>
         <a:xfrm>
-          <a:off x="0" y="0"/>
-          <a:ext cx="0" cy="0"/>
+          <a:off x="925172" y="0"/>
+          <a:ext cx="1" cy="1"/>
           <a:chOff x="0" y="0"/>
           <a:chExt cx="0" cy="0"/>
         </a:xfrm>
@@ -8638,8 +8638,8 @@
         </p:nvSpPr>
         <p:spPr>
           <a:xfrm>
-            <a:off x="6130753" y="-947729"/>
-            <a:ext cx="2987610" cy="2987610"/>
+            <a:off x="6322478" y="-1094048"/>
+            <a:ext cx="3355082" cy="3355082"/>
           </a:xfrm>
           <a:prstGeom prst="ellipse">
             <a:avLst/>
@@ -8663,8 +8663,8 @@
         </p:nvSpPr>
         <p:spPr>
           <a:xfrm>
-            <a:off x="7104973" y="1520297"/>
-            <a:ext cx="1688649" cy="1688649"/>
+            <a:off x="7416526" y="1677541"/>
+            <a:ext cx="1896351" cy="1896351"/>
           </a:xfrm>
           <a:prstGeom prst="ellipse">
             <a:avLst/>
@@ -8685,8 +8685,8 @@
         </p:nvSpPr>
         <p:spPr>
           <a:xfrm>
-            <a:off x="1681812" y="364222"/>
-            <a:ext cx="4806155" cy="194844"/>
+            <a:off x="1326323" y="379270"/>
+            <a:ext cx="5397306" cy="218810"/>
           </a:xfrm>
           <a:prstGeom prst="rect">
             <a:avLst/>
@@ -8702,7 +8702,7 @@
               <a:buNone/>
             </a:pPr>
             <a:r>
-              <a:rPr lang="en-US" sz="890" b="1" dirty="0">
+              <a:rPr lang="en-US" sz="1000" b="1" dirty="0">
                 <a:solidFill>
                   <a:srgbClr val="FFB020"/>
                 </a:solidFill>
@@ -8712,7 +8712,7 @@
               </a:rPr>
               <a:t>Câu 1 · 第一題（5 分鐘）</a:t>
             </a:r>
-            <a:endParaRPr lang="en-US" sz="890" dirty="0"/>
+            <a:endParaRPr lang="en-US" sz="1000" dirty="0"/>
           </a:p>
         </p:txBody>
       </p:sp>
@@ -8724,8 +8724,8 @@
         </p:nvSpPr>
         <p:spPr>
           <a:xfrm>
-            <a:off x="1681812" y="585045"/>
-            <a:ext cx="5715427" cy="870304"/>
+            <a:off x="1326323" y="627254"/>
+            <a:ext cx="6418418" cy="977350"/>
           </a:xfrm>
           <a:prstGeom prst="rect">
             <a:avLst/>
@@ -8744,7 +8744,7 @@
               <a:buNone/>
             </a:pPr>
             <a:r>
-              <a:rPr lang="en-US" sz="1630" b="1" dirty="0">
+              <a:rPr lang="en-US" sz="1830" b="1" dirty="0">
                 <a:solidFill>
                   <a:srgbClr val="FFFFFF"/>
                 </a:solidFill>
@@ -8754,7 +8754,7 @@
               </a:rPr>
               <a:t>Bấm «Giờ cao điểm Hà Nội». Đừng đổi gì cả. Xem nó đâm trong tình huống nào.</a:t>
             </a:r>
-            <a:endParaRPr lang="en-US" sz="1630" dirty="0"/>
+            <a:endParaRPr lang="en-US" sz="1830" dirty="0"/>
           </a:p>
           <a:p>
             <a:pPr indent="0" marL="0">
@@ -8764,7 +8764,7 @@
               <a:buNone/>
             </a:pPr>
             <a:r>
-              <a:rPr lang="en-US" sz="1070" dirty="0">
+              <a:rPr lang="en-US" sz="1200" dirty="0">
                 <a:solidFill>
                   <a:srgbClr val="AFC3D4"/>
                 </a:solidFill>
@@ -8774,7 +8774,7 @@
               </a:rPr>
               <a:t>按「河內尖峰」。什麼都不要改。看它撞在什麼情況。</a:t>
             </a:r>
-            <a:endParaRPr lang="en-US" sz="1630" dirty="0"/>
+            <a:endParaRPr lang="en-US" sz="1830" dirty="0"/>
           </a:p>
         </p:txBody>
       </p:sp>
@@ -8786,8 +8786,8 @@
         </p:nvSpPr>
         <p:spPr>
           <a:xfrm>
-            <a:off x="1681812" y="1362092"/>
-            <a:ext cx="5780375" cy="441647"/>
+            <a:off x="1326323" y="1499877"/>
+            <a:ext cx="6491354" cy="495969"/>
           </a:xfrm>
           <a:prstGeom prst="roundRect">
             <a:avLst>
@@ -8808,8 +8808,8 @@
         </p:nvSpPr>
         <p:spPr>
           <a:xfrm>
-            <a:off x="1798719" y="1466008"/>
-            <a:ext cx="233813" cy="233813"/>
+            <a:off x="1457609" y="1616575"/>
+            <a:ext cx="262572" cy="262572"/>
           </a:xfrm>
           <a:prstGeom prst="ellipse">
             <a:avLst/>
@@ -8828,8 +8828,8 @@
         </p:nvSpPr>
         <p:spPr>
           <a:xfrm>
-            <a:off x="1798719" y="1485493"/>
-            <a:ext cx="233813" cy="194844"/>
+            <a:off x="1457609" y="1638456"/>
+            <a:ext cx="262572" cy="218810"/>
           </a:xfrm>
           <a:prstGeom prst="rect">
             <a:avLst/>
@@ -8845,7 +8845,7 @@
               <a:buNone/>
             </a:pPr>
             <a:r>
-              <a:rPr lang="en-US" sz="850" b="1" dirty="0">
+              <a:rPr lang="en-US" sz="960" b="1" dirty="0">
                 <a:solidFill>
                   <a:srgbClr val="FFFFFF"/>
                 </a:solidFill>
@@ -8855,7 +8855,7 @@
               </a:rPr>
               <a:t>1</a:t>
             </a:r>
-            <a:endParaRPr lang="en-US" sz="850" dirty="0"/>
+            <a:endParaRPr lang="en-US" sz="960" dirty="0"/>
           </a:p>
         </p:txBody>
       </p:sp>
@@ -8867,8 +8867,8 @@
         </p:nvSpPr>
         <p:spPr>
           <a:xfrm>
-            <a:off x="2149438" y="1394566"/>
-            <a:ext cx="5182853" cy="389688"/>
+            <a:off x="1851466" y="1536345"/>
+            <a:ext cx="5820338" cy="437619"/>
           </a:xfrm>
           <a:prstGeom prst="rect">
             <a:avLst/>
@@ -8887,7 +8887,7 @@
               <a:buNone/>
             </a:pPr>
             <a:r>
-              <a:rPr lang="en-US" sz="890" b="1" dirty="0">
+              <a:rPr lang="en-US" sz="1000" b="1" dirty="0">
                 <a:solidFill>
                   <a:srgbClr val="FFFFFF"/>
                 </a:solidFill>
@@ -8897,7 +8897,7 @@
               </a:rPr>
               <a:t>Chạy ba lần. Mỗi lần đâm xong đọc dòng cuối trong cột sự kiện bên phải.</a:t>
             </a:r>
-            <a:endParaRPr lang="en-US" sz="890" dirty="0"/>
+            <a:endParaRPr lang="en-US" sz="1000" dirty="0"/>
           </a:p>
           <a:p>
             <a:pPr indent="0" marL="0">
@@ -8907,7 +8907,7 @@
               <a:buNone/>
             </a:pPr>
             <a:r>
-              <a:rPr lang="en-US" sz="820" dirty="0">
+              <a:rPr lang="en-US" sz="920" dirty="0">
                 <a:solidFill>
                   <a:srgbClr val="AFC3D4"/>
                 </a:solidFill>
@@ -8917,7 +8917,7 @@
               </a:rPr>
               <a:t>跑三次。每次撞了就看右欄事件紀錄的最後一行。</a:t>
             </a:r>
-            <a:endParaRPr lang="en-US" sz="890" dirty="0"/>
+            <a:endParaRPr lang="en-US" sz="1000" dirty="0"/>
           </a:p>
         </p:txBody>
       </p:sp>
@@ -8929,8 +8929,8 @@
         </p:nvSpPr>
         <p:spPr>
           <a:xfrm>
-            <a:off x="1681812" y="1868686"/>
-            <a:ext cx="5780375" cy="441647"/>
+            <a:off x="1326323" y="2068782"/>
+            <a:ext cx="6491354" cy="495969"/>
           </a:xfrm>
           <a:prstGeom prst="roundRect">
             <a:avLst>
@@ -8951,8 +8951,8 @@
         </p:nvSpPr>
         <p:spPr>
           <a:xfrm>
-            <a:off x="1798719" y="1972603"/>
-            <a:ext cx="233813" cy="233813"/>
+            <a:off x="1457609" y="2185481"/>
+            <a:ext cx="262572" cy="262572"/>
           </a:xfrm>
           <a:prstGeom prst="ellipse">
             <a:avLst/>
@@ -8971,8 +8971,8 @@
         </p:nvSpPr>
         <p:spPr>
           <a:xfrm>
-            <a:off x="1798719" y="1992087"/>
-            <a:ext cx="233813" cy="194844"/>
+            <a:off x="1457609" y="2207362"/>
+            <a:ext cx="262572" cy="218810"/>
           </a:xfrm>
           <a:prstGeom prst="rect">
             <a:avLst/>
@@ -8988,7 +8988,7 @@
               <a:buNone/>
             </a:pPr>
             <a:r>
-              <a:rPr lang="en-US" sz="850" b="1" dirty="0">
+              <a:rPr lang="en-US" sz="960" b="1" dirty="0">
                 <a:solidFill>
                   <a:srgbClr val="FFFFFF"/>
                 </a:solidFill>
@@ -8998,7 +8998,7 @@
               </a:rPr>
               <a:t>2</a:t>
             </a:r>
-            <a:endParaRPr lang="en-US" sz="850" dirty="0"/>
+            <a:endParaRPr lang="en-US" sz="960" dirty="0"/>
           </a:p>
         </p:txBody>
       </p:sp>
@@ -9010,8 +9010,8 @@
         </p:nvSpPr>
         <p:spPr>
           <a:xfrm>
-            <a:off x="2149438" y="1901160"/>
-            <a:ext cx="5182853" cy="389688"/>
+            <a:off x="1851466" y="2105250"/>
+            <a:ext cx="5820338" cy="437619"/>
           </a:xfrm>
           <a:prstGeom prst="rect">
             <a:avLst/>
@@ -9030,7 +9030,7 @@
               <a:buNone/>
             </a:pPr>
             <a:r>
-              <a:rPr lang="en-US" sz="890" b="1" dirty="0">
+              <a:rPr lang="en-US" sz="1000" b="1" dirty="0">
                 <a:solidFill>
                   <a:srgbClr val="FFFFFF"/>
                 </a:solidFill>
@@ -9040,7 +9040,7 @@
               </a:rPr>
               <a:t>Ghi lại nguyên nhân của ba lần: xe máy lách khe? người đi bộ? xe tải đỗ sai?</a:t>
             </a:r>
-            <a:endParaRPr lang="en-US" sz="890" dirty="0"/>
+            <a:endParaRPr lang="en-US" sz="1000" dirty="0"/>
           </a:p>
           <a:p>
             <a:pPr indent="0" marL="0">
@@ -9050,7 +9050,7 @@
               <a:buNone/>
             </a:pPr>
             <a:r>
-              <a:rPr lang="en-US" sz="820" dirty="0">
+              <a:rPr lang="en-US" sz="920" dirty="0">
                 <a:solidFill>
                   <a:srgbClr val="AFC3D4"/>
                 </a:solidFill>
@@ -9060,7 +9060,7 @@
               </a:rPr>
               <a:t>記下三次的原因：機車鑽縫？行人？違停的貨車？</a:t>
             </a:r>
-            <a:endParaRPr lang="en-US" sz="890" dirty="0"/>
+            <a:endParaRPr lang="en-US" sz="1000" dirty="0"/>
           </a:p>
         </p:txBody>
       </p:sp>
@@ -9072,8 +9072,8 @@
         </p:nvSpPr>
         <p:spPr>
           <a:xfrm>
-            <a:off x="1681812" y="2375281"/>
-            <a:ext cx="5780375" cy="441647"/>
+            <a:off x="1326323" y="2637687"/>
+            <a:ext cx="6491354" cy="495969"/>
           </a:xfrm>
           <a:prstGeom prst="roundRect">
             <a:avLst>
@@ -9094,8 +9094,8 @@
         </p:nvSpPr>
         <p:spPr>
           <a:xfrm>
-            <a:off x="1798719" y="2479198"/>
-            <a:ext cx="233813" cy="233813"/>
+            <a:off x="1457609" y="2754386"/>
+            <a:ext cx="262572" cy="262572"/>
           </a:xfrm>
           <a:prstGeom prst="ellipse">
             <a:avLst/>
@@ -9114,8 +9114,8 @@
         </p:nvSpPr>
         <p:spPr>
           <a:xfrm>
-            <a:off x="1798719" y="2498682"/>
-            <a:ext cx="233813" cy="194844"/>
+            <a:off x="1457609" y="2776267"/>
+            <a:ext cx="262572" cy="218810"/>
           </a:xfrm>
           <a:prstGeom prst="rect">
             <a:avLst/>
@@ -9131,7 +9131,7 @@
               <a:buNone/>
             </a:pPr>
             <a:r>
-              <a:rPr lang="en-US" sz="850" b="1" dirty="0">
+              <a:rPr lang="en-US" sz="960" b="1" dirty="0">
                 <a:solidFill>
                   <a:srgbClr val="FFFFFF"/>
                 </a:solidFill>
@@ -9141,7 +9141,7 @@
               </a:rPr>
               <a:t>3</a:t>
             </a:r>
-            <a:endParaRPr lang="en-US" sz="850" dirty="0"/>
+            <a:endParaRPr lang="en-US" sz="960" dirty="0"/>
           </a:p>
         </p:txBody>
       </p:sp>
@@ -9153,8 +9153,8 @@
         </p:nvSpPr>
         <p:spPr>
           <a:xfrm>
-            <a:off x="2149438" y="2407755"/>
-            <a:ext cx="5182853" cy="389688"/>
+            <a:off x="1851466" y="2674156"/>
+            <a:ext cx="5820338" cy="437619"/>
           </a:xfrm>
           <a:prstGeom prst="rect">
             <a:avLst/>
@@ -9173,7 +9173,7 @@
               <a:buNone/>
             </a:pPr>
             <a:r>
-              <a:rPr lang="en-US" sz="890" b="1" dirty="0">
+              <a:rPr lang="en-US" sz="1000" b="1" dirty="0">
                 <a:solidFill>
                   <a:srgbClr val="FFFFFF"/>
                 </a:solidFill>
@@ -9183,7 +9183,7 @@
               </a:rPr>
               <a:t>Ba lần có giống nhau không? Đây mới là câu hỏi thật.</a:t>
             </a:r>
-            <a:endParaRPr lang="en-US" sz="890" dirty="0"/>
+            <a:endParaRPr lang="en-US" sz="1000" dirty="0"/>
           </a:p>
           <a:p>
             <a:pPr indent="0" marL="0">
@@ -9193,7 +9193,7 @@
               <a:buNone/>
             </a:pPr>
             <a:r>
-              <a:rPr lang="en-US" sz="820" dirty="0">
+              <a:rPr lang="en-US" sz="920" dirty="0">
                 <a:solidFill>
                   <a:srgbClr val="AFC3D4"/>
                 </a:solidFill>
@@ -9203,7 +9203,7 @@
               </a:rPr>
               <a:t>三次的原因一樣嗎？這才是真正要問的。</a:t>
             </a:r>
-            <a:endParaRPr lang="en-US" sz="890" dirty="0"/>
+            <a:endParaRPr lang="en-US" sz="1000" dirty="0"/>
           </a:p>
         </p:txBody>
       </p:sp>
@@ -9215,8 +9215,8 @@
         </p:nvSpPr>
         <p:spPr>
           <a:xfrm>
-            <a:off x="1681812" y="2907855"/>
-            <a:ext cx="5715427" cy="324740"/>
+            <a:off x="1326323" y="3235767"/>
+            <a:ext cx="6418418" cy="364683"/>
           </a:xfrm>
           <a:prstGeom prst="rect">
             <a:avLst/>
@@ -9235,7 +9235,7 @@
               <a:buNone/>
             </a:pPr>
             <a:r>
-              <a:rPr lang="en-US" sz="890" b="1" dirty="0">
+              <a:rPr lang="en-US" sz="1000" b="1" dirty="0">
                 <a:solidFill>
                   <a:srgbClr val="FFB020"/>
                 </a:solidFill>
@@ -9245,7 +9245,7 @@
               </a:rPr>
               <a:t>Cùng tham số, ba lần ba kiểu — nên phải chạy nhiều lần.</a:t>
             </a:r>
-            <a:endParaRPr lang="en-US" sz="890" dirty="0"/>
+            <a:endParaRPr lang="en-US" sz="1000" dirty="0"/>
           </a:p>
           <a:p>
             <a:pPr indent="0" marL="0">
@@ -9255,7 +9255,7 @@
               <a:buNone/>
             </a:pPr>
             <a:r>
-              <a:rPr lang="en-US" sz="820" dirty="0">
+              <a:rPr lang="en-US" sz="920" dirty="0">
                 <a:solidFill>
                   <a:srgbClr val="FFB020"/>
                 </a:solidFill>
@@ -9265,7 +9265,7 @@
               </a:rPr>
               <a:t>同一組參數，三次不一樣——所以要跑很多次。</a:t>
             </a:r>
-            <a:endParaRPr lang="en-US" sz="890" dirty="0"/>
+            <a:endParaRPr lang="en-US" sz="1000" dirty="0"/>
           </a:p>
         </p:txBody>
       </p:sp>
@@ -9277,8 +9277,8 @@
         </p:nvSpPr>
         <p:spPr>
           <a:xfrm>
-            <a:off x="1402536" y="3390800"/>
-            <a:ext cx="584532" cy="181855"/>
+            <a:off x="1012696" y="102111"/>
+            <a:ext cx="656429" cy="204222"/>
           </a:xfrm>
           <a:prstGeom prst="rect">
             <a:avLst/>
@@ -9294,7 +9294,7 @@
               <a:buNone/>
             </a:pPr>
             <a:r>
-              <a:rPr lang="en-US" sz="640" dirty="0">
+              <a:rPr lang="en-US" sz="720" dirty="0">
                 <a:solidFill>
                   <a:srgbClr val="9FB3C8"/>
                 </a:solidFill>
@@ -9304,7 +9304,7 @@
               </a:rPr>
               <a:t>3 / 11</a:t>
             </a:r>
-            <a:endParaRPr lang="en-US" sz="640" dirty="0"/>
+            <a:endParaRPr lang="en-US" sz="720" dirty="0"/>
           </a:p>
         </p:txBody>
       </p:sp>
@@ -9316,8 +9316,8 @@
         </p:nvSpPr>
         <p:spPr>
           <a:xfrm>
-            <a:off x="2006553" y="3390800"/>
-            <a:ext cx="1428857" cy="181855"/>
+            <a:off x="1691006" y="102111"/>
+            <a:ext cx="1604604" cy="204222"/>
           </a:xfrm>
           <a:prstGeom prst="rect">
             <a:avLst/>
@@ -9333,7 +9333,7 @@
               <a:buNone/>
             </a:pPr>
             <a:r>
-              <a:rPr lang="en-US" sz="640" dirty="0">
+              <a:rPr lang="en-US" sz="720" dirty="0">
                 <a:solidFill>
                   <a:srgbClr val="9FB3C8"/>
                 </a:solidFill>
@@ -9343,7 +9343,7 @@
               </a:rPr>
               <a:t>Tiết 3 · 第 3 節</a:t>
             </a:r>
-            <a:endParaRPr lang="en-US" sz="640" dirty="0"/>
+            <a:endParaRPr lang="en-US" sz="720" dirty="0"/>
           </a:p>
         </p:txBody>
       </p:sp>
@@ -9373,8 +9373,8 @@
       </p:nvGrpSpPr>
       <p:grpSpPr>
         <a:xfrm>
-          <a:off x="0" y="0"/>
-          <a:ext cx="0" cy="0"/>
+          <a:off x="925172" y="0"/>
+          <a:ext cx="1" cy="1"/>
           <a:chOff x="0" y="0"/>
           <a:chExt cx="0" cy="0"/>
         </a:xfrm>
@@ -9387,8 +9387,8 @@
         </p:nvSpPr>
         <p:spPr>
           <a:xfrm>
-            <a:off x="6130753" y="-947729"/>
-            <a:ext cx="2987610" cy="2987610"/>
+            <a:off x="6322478" y="-1094048"/>
+            <a:ext cx="3355082" cy="3355082"/>
           </a:xfrm>
           <a:prstGeom prst="ellipse">
             <a:avLst/>
@@ -9412,8 +9412,8 @@
         </p:nvSpPr>
         <p:spPr>
           <a:xfrm>
-            <a:off x="7104973" y="1520297"/>
-            <a:ext cx="1688649" cy="1688649"/>
+            <a:off x="7416526" y="1677541"/>
+            <a:ext cx="1896351" cy="1896351"/>
           </a:xfrm>
           <a:prstGeom prst="ellipse">
             <a:avLst/>
@@ -9434,8 +9434,8 @@
         </p:nvSpPr>
         <p:spPr>
           <a:xfrm>
-            <a:off x="1681812" y="364222"/>
-            <a:ext cx="4806155" cy="194844"/>
+            <a:off x="1326323" y="379270"/>
+            <a:ext cx="5397306" cy="218810"/>
           </a:xfrm>
           <a:prstGeom prst="rect">
             <a:avLst/>
@@ -9451,7 +9451,7 @@
               <a:buNone/>
             </a:pPr>
             <a:r>
-              <a:rPr lang="en-US" sz="890" b="1" dirty="0">
+              <a:rPr lang="en-US" sz="1000" b="1" dirty="0">
                 <a:solidFill>
                   <a:srgbClr val="FFB020"/>
                 </a:solidFill>
@@ -9461,7 +9461,7 @@
               </a:rPr>
               <a:t>Câu 2 · 第二題（15 分鐘，今天的主菜）</a:t>
             </a:r>
-            <a:endParaRPr lang="en-US" sz="890" dirty="0"/>
+            <a:endParaRPr lang="en-US" sz="1000" dirty="0"/>
           </a:p>
         </p:txBody>
       </p:sp>
@@ -9473,8 +9473,8 @@
         </p:nvSpPr>
         <p:spPr>
           <a:xfrm>
-            <a:off x="1681812" y="585045"/>
-            <a:ext cx="5715427" cy="870304"/>
+            <a:off x="1326323" y="627254"/>
+            <a:ext cx="6418418" cy="977350"/>
           </a:xfrm>
           <a:prstGeom prst="rect">
             <a:avLst/>
@@ -9493,7 +9493,7 @@
               <a:buNone/>
             </a:pPr>
             <a:r>
-              <a:rPr lang="en-US" sz="1630" b="1" dirty="0">
+              <a:rPr lang="en-US" sz="1830" b="1" dirty="0">
                 <a:solidFill>
                   <a:srgbClr val="FFFFFF"/>
                 </a:solidFill>
@@ -9503,7 +9503,7 @@
               </a:rPr>
               <a:t>Chỉnh ba tham số, sao cho xe trụ được LÂU NHẤT trước khi đâm. Chạy 3 lần, lấy lần tốt nhất.</a:t>
             </a:r>
-            <a:endParaRPr lang="en-US" sz="1630" dirty="0"/>
+            <a:endParaRPr lang="en-US" sz="1830" dirty="0"/>
           </a:p>
           <a:p>
             <a:pPr indent="0" marL="0">
@@ -9513,7 +9513,7 @@
               <a:buNone/>
             </a:pPr>
             <a:r>
-              <a:rPr lang="en-US" sz="1070" dirty="0">
+              <a:rPr lang="en-US" sz="1200" dirty="0">
                 <a:solidFill>
                   <a:srgbClr val="AFC3D4"/>
                 </a:solidFill>
@@ -9523,7 +9523,7 @@
               </a:rPr>
               <a:t>調三個參數，讓車子在撞車前撐得最久。跑三次，取最好的那一次。</a:t>
             </a:r>
-            <a:endParaRPr lang="en-US" sz="1630" dirty="0"/>
+            <a:endParaRPr lang="en-US" sz="1830" dirty="0"/>
           </a:p>
         </p:txBody>
       </p:sp>
@@ -9535,8 +9535,8 @@
         </p:nvSpPr>
         <p:spPr>
           <a:xfrm>
-            <a:off x="1681812" y="1362092"/>
-            <a:ext cx="5780375" cy="441647"/>
+            <a:off x="1326323" y="1499877"/>
+            <a:ext cx="6491354" cy="495969"/>
           </a:xfrm>
           <a:prstGeom prst="roundRect">
             <a:avLst>
@@ -9557,8 +9557,8 @@
         </p:nvSpPr>
         <p:spPr>
           <a:xfrm>
-            <a:off x="1798719" y="1466008"/>
-            <a:ext cx="233813" cy="233813"/>
+            <a:off x="1457609" y="1616575"/>
+            <a:ext cx="262572" cy="262572"/>
           </a:xfrm>
           <a:prstGeom prst="ellipse">
             <a:avLst/>
@@ -9577,8 +9577,8 @@
         </p:nvSpPr>
         <p:spPr>
           <a:xfrm>
-            <a:off x="1798719" y="1485493"/>
-            <a:ext cx="233813" cy="194844"/>
+            <a:off x="1457609" y="1638456"/>
+            <a:ext cx="262572" cy="218810"/>
           </a:xfrm>
           <a:prstGeom prst="rect">
             <a:avLst/>
@@ -9594,7 +9594,7 @@
               <a:buNone/>
             </a:pPr>
             <a:r>
-              <a:rPr lang="en-US" sz="850" b="1" dirty="0">
+              <a:rPr lang="en-US" sz="960" b="1" dirty="0">
                 <a:solidFill>
                   <a:srgbClr val="FFFFFF"/>
                 </a:solidFill>
@@ -9604,7 +9604,7 @@
               </a:rPr>
               <a:t>1</a:t>
             </a:r>
-            <a:endParaRPr lang="en-US" sz="850" dirty="0"/>
+            <a:endParaRPr lang="en-US" sz="960" dirty="0"/>
           </a:p>
         </p:txBody>
       </p:sp>
@@ -9616,8 +9616,8 @@
         </p:nvSpPr>
         <p:spPr>
           <a:xfrm>
-            <a:off x="2149438" y="1394566"/>
-            <a:ext cx="5182853" cy="389688"/>
+            <a:off x="1851466" y="1536345"/>
+            <a:ext cx="5820338" cy="437619"/>
           </a:xfrm>
           <a:prstGeom prst="rect">
             <a:avLst/>
@@ -9636,7 +9636,7 @@
               <a:buNone/>
             </a:pPr>
             <a:r>
-              <a:rPr lang="en-US" sz="890" b="1" dirty="0">
+              <a:rPr lang="en-US" sz="1000" b="1" dirty="0">
                 <a:solidFill>
                   <a:srgbClr val="FFFFFF"/>
                 </a:solidFill>
@@ -9646,7 +9646,7 @@
               </a:rPr>
               <a:t>Ba tham số: số tia · chiều dài tia · góc quét. Đổi MỘT cái một lần, đừng đổi cả ba cùng lúc.</a:t>
             </a:r>
-            <a:endParaRPr lang="en-US" sz="890" dirty="0"/>
+            <a:endParaRPr lang="en-US" sz="1000" dirty="0"/>
           </a:p>
           <a:p>
             <a:pPr indent="0" marL="0">
@@ -9656,7 +9656,7 @@
               <a:buNone/>
             </a:pPr>
             <a:r>
-              <a:rPr lang="en-US" sz="820" dirty="0">
+              <a:rPr lang="en-US" sz="920" dirty="0">
                 <a:solidFill>
                   <a:srgbClr val="AFC3D4"/>
                 </a:solidFill>
@@ -9666,7 +9666,7 @@
               </a:rPr>
               <a:t>三個參數：射線數・射線長度・張角。一次只改一個，不要三個一起改。</a:t>
             </a:r>
-            <a:endParaRPr lang="en-US" sz="890" dirty="0"/>
+            <a:endParaRPr lang="en-US" sz="1000" dirty="0"/>
           </a:p>
         </p:txBody>
       </p:sp>
@@ -9678,8 +9678,8 @@
         </p:nvSpPr>
         <p:spPr>
           <a:xfrm>
-            <a:off x="1681812" y="1868686"/>
-            <a:ext cx="5780375" cy="441647"/>
+            <a:off x="1326323" y="2068782"/>
+            <a:ext cx="6491354" cy="495969"/>
           </a:xfrm>
           <a:prstGeom prst="roundRect">
             <a:avLst>
@@ -9700,8 +9700,8 @@
         </p:nvSpPr>
         <p:spPr>
           <a:xfrm>
-            <a:off x="1798719" y="1972603"/>
-            <a:ext cx="233813" cy="233813"/>
+            <a:off x="1457609" y="2185481"/>
+            <a:ext cx="262572" cy="262572"/>
           </a:xfrm>
           <a:prstGeom prst="ellipse">
             <a:avLst/>
@@ -9720,8 +9720,8 @@
         </p:nvSpPr>
         <p:spPr>
           <a:xfrm>
-            <a:off x="1798719" y="1992087"/>
-            <a:ext cx="233813" cy="194844"/>
+            <a:off x="1457609" y="2207362"/>
+            <a:ext cx="262572" cy="218810"/>
           </a:xfrm>
           <a:prstGeom prst="rect">
             <a:avLst/>
@@ -9737,7 +9737,7 @@
               <a:buNone/>
             </a:pPr>
             <a:r>
-              <a:rPr lang="en-US" sz="850" b="1" dirty="0">
+              <a:rPr lang="en-US" sz="960" b="1" dirty="0">
                 <a:solidFill>
                   <a:srgbClr val="FFFFFF"/>
                 </a:solidFill>
@@ -9747,7 +9747,7 @@
               </a:rPr>
               <a:t>2</a:t>
             </a:r>
-            <a:endParaRPr lang="en-US" sz="850" dirty="0"/>
+            <a:endParaRPr lang="en-US" sz="960" dirty="0"/>
           </a:p>
         </p:txBody>
       </p:sp>
@@ -9759,8 +9759,8 @@
         </p:nvSpPr>
         <p:spPr>
           <a:xfrm>
-            <a:off x="2149438" y="1901160"/>
-            <a:ext cx="5182853" cy="389688"/>
+            <a:off x="1851466" y="2105250"/>
+            <a:ext cx="5820338" cy="437619"/>
           </a:xfrm>
           <a:prstGeom prst="rect">
             <a:avLst/>
@@ -9779,7 +9779,7 @@
               <a:buNone/>
             </a:pPr>
             <a:r>
-              <a:rPr lang="en-US" sz="890" b="1" dirty="0">
+              <a:rPr lang="en-US" sz="1000" b="1" dirty="0">
                 <a:solidFill>
                   <a:srgbClr val="FFFFFF"/>
                 </a:solidFill>
@@ -9789,7 +9789,7 @@
               </a:rPr>
               <a:t>Nhắc lại tiết 1: chạy 50 km/h thì tia không được ngắn hơn 25 m.</a:t>
             </a:r>
-            <a:endParaRPr lang="en-US" sz="890" dirty="0"/>
+            <a:endParaRPr lang="en-US" sz="1000" dirty="0"/>
           </a:p>
           <a:p>
             <a:pPr indent="0" marL="0">
@@ -9799,7 +9799,7 @@
               <a:buNone/>
             </a:pPr>
             <a:r>
-              <a:rPr lang="en-US" sz="820" dirty="0">
+              <a:rPr lang="en-US" sz="920" dirty="0">
                 <a:solidFill>
                   <a:srgbClr val="AFC3D4"/>
                 </a:solidFill>
@@ -9809,7 +9809,7 @@
               </a:rPr>
               <a:t>提醒：第一節算過，時速 50 的話射線不能短於 25 公尺。</a:t>
             </a:r>
-            <a:endParaRPr lang="en-US" sz="890" dirty="0"/>
+            <a:endParaRPr lang="en-US" sz="1000" dirty="0"/>
           </a:p>
         </p:txBody>
       </p:sp>
@@ -9821,8 +9821,8 @@
         </p:nvSpPr>
         <p:spPr>
           <a:xfrm>
-            <a:off x="1681812" y="2375281"/>
-            <a:ext cx="5780375" cy="441647"/>
+            <a:off x="1326323" y="2637687"/>
+            <a:ext cx="6491354" cy="495969"/>
           </a:xfrm>
           <a:prstGeom prst="roundRect">
             <a:avLst>
@@ -9843,8 +9843,8 @@
         </p:nvSpPr>
         <p:spPr>
           <a:xfrm>
-            <a:off x="1798719" y="2479198"/>
-            <a:ext cx="233813" cy="233813"/>
+            <a:off x="1457609" y="2754386"/>
+            <a:ext cx="262572" cy="262572"/>
           </a:xfrm>
           <a:prstGeom prst="ellipse">
             <a:avLst/>
@@ -9863,8 +9863,8 @@
         </p:nvSpPr>
         <p:spPr>
           <a:xfrm>
-            <a:off x="1798719" y="2498682"/>
-            <a:ext cx="233813" cy="194844"/>
+            <a:off x="1457609" y="2776267"/>
+            <a:ext cx="262572" cy="218810"/>
           </a:xfrm>
           <a:prstGeom prst="rect">
             <a:avLst/>
@@ -9880,7 +9880,7 @@
               <a:buNone/>
             </a:pPr>
             <a:r>
-              <a:rPr lang="en-US" sz="850" b="1" dirty="0">
+              <a:rPr lang="en-US" sz="960" b="1" dirty="0">
                 <a:solidFill>
                   <a:srgbClr val="FFFFFF"/>
                 </a:solidFill>
@@ -9890,7 +9890,7 @@
               </a:rPr>
               <a:t>3</a:t>
             </a:r>
-            <a:endParaRPr lang="en-US" sz="850" dirty="0"/>
+            <a:endParaRPr lang="en-US" sz="960" dirty="0"/>
           </a:p>
         </p:txBody>
       </p:sp>
@@ -9902,8 +9902,8 @@
         </p:nvSpPr>
         <p:spPr>
           <a:xfrm>
-            <a:off x="2149438" y="2407755"/>
-            <a:ext cx="5182853" cy="389688"/>
+            <a:off x="1851466" y="2674156"/>
+            <a:ext cx="5820338" cy="437619"/>
           </a:xfrm>
           <a:prstGeom prst="rect">
             <a:avLst/>
@@ -9922,7 +9922,7 @@
               <a:buNone/>
             </a:pPr>
             <a:r>
-              <a:rPr lang="en-US" sz="890" b="1" dirty="0">
+              <a:rPr lang="en-US" sz="1000" b="1" dirty="0">
                 <a:solidFill>
                   <a:srgbClr val="FFFFFF"/>
                 </a:solidFill>
@@ -9932,7 +9932,7 @@
               </a:rPr>
               <a:t>Nộp: số giây trụ được lâu nhất, kèm ba con số lúc đó.</a:t>
             </a:r>
-            <a:endParaRPr lang="en-US" sz="890" dirty="0"/>
+            <a:endParaRPr lang="en-US" sz="1000" dirty="0"/>
           </a:p>
           <a:p>
             <a:pPr indent="0" marL="0">
@@ -9942,7 +9942,7 @@
               <a:buNone/>
             </a:pPr>
             <a:r>
-              <a:rPr lang="en-US" sz="820" dirty="0">
+              <a:rPr lang="en-US" sz="920" dirty="0">
                 <a:solidFill>
                   <a:srgbClr val="AFC3D4"/>
                 </a:solidFill>
@@ -9952,7 +9952,7 @@
               </a:rPr>
               <a:t>要交的是：撐最久的那個秒數，加上當時的三個數字。</a:t>
             </a:r>
-            <a:endParaRPr lang="en-US" sz="890" dirty="0"/>
+            <a:endParaRPr lang="en-US" sz="1000" dirty="0"/>
           </a:p>
         </p:txBody>
       </p:sp>
@@ -9964,8 +9964,8 @@
         </p:nvSpPr>
         <p:spPr>
           <a:xfrm>
-            <a:off x="1681812" y="2907855"/>
-            <a:ext cx="5715427" cy="324740"/>
+            <a:off x="1326323" y="3235767"/>
+            <a:ext cx="6418418" cy="364683"/>
           </a:xfrm>
           <a:prstGeom prst="rect">
             <a:avLst/>
@@ -9984,7 +9984,7 @@
               <a:buNone/>
             </a:pPr>
             <a:r>
-              <a:rPr lang="en-US" sz="890" b="1" dirty="0">
+              <a:rPr lang="en-US" sz="1000" b="1" dirty="0">
                 <a:solidFill>
                   <a:srgbClr val="FFB020"/>
                 </a:solidFill>
@@ -9994,7 +9994,7 @@
               </a:rPr>
               <a:t>Không nhóm nào qua được 90 giây — kể cả khi kéo cả ba lên tối đa. Đó chính là bài học.</a:t>
             </a:r>
-            <a:endParaRPr lang="en-US" sz="890" dirty="0"/>
+            <a:endParaRPr lang="en-US" sz="1000" dirty="0"/>
           </a:p>
           <a:p>
             <a:pPr indent="0" marL="0">
@@ -10004,7 +10004,7 @@
               <a:buNone/>
             </a:pPr>
             <a:r>
-              <a:rPr lang="en-US" sz="820" dirty="0">
+              <a:rPr lang="en-US" sz="920" dirty="0">
                 <a:solidFill>
                   <a:srgbClr val="FFB020"/>
                 </a:solidFill>
@@ -10014,7 +10014,7 @@
               </a:rPr>
               <a:t>沒有一組能撐過 90 秒——就算三個都拉到最大也一樣。這正是這一題要教的事。</a:t>
             </a:r>
-            <a:endParaRPr lang="en-US" sz="890" dirty="0"/>
+            <a:endParaRPr lang="en-US" sz="1000" dirty="0"/>
           </a:p>
         </p:txBody>
       </p:sp>
@@ -10026,8 +10026,8 @@
         </p:nvSpPr>
         <p:spPr>
           <a:xfrm>
-            <a:off x="1402536" y="3390800"/>
-            <a:ext cx="584532" cy="181855"/>
+            <a:off x="1012696" y="102111"/>
+            <a:ext cx="656429" cy="204222"/>
           </a:xfrm>
           <a:prstGeom prst="rect">
             <a:avLst/>
@@ -10043,7 +10043,7 @@
               <a:buNone/>
             </a:pPr>
             <a:r>
-              <a:rPr lang="en-US" sz="640" dirty="0">
+              <a:rPr lang="en-US" sz="720" dirty="0">
                 <a:solidFill>
                   <a:srgbClr val="9FB3C8"/>
                 </a:solidFill>
@@ -10053,7 +10053,7 @@
               </a:rPr>
               <a:t>4 / 11</a:t>
             </a:r>
-            <a:endParaRPr lang="en-US" sz="640" dirty="0"/>
+            <a:endParaRPr lang="en-US" sz="720" dirty="0"/>
           </a:p>
         </p:txBody>
       </p:sp>
@@ -10065,8 +10065,8 @@
         </p:nvSpPr>
         <p:spPr>
           <a:xfrm>
-            <a:off x="2006553" y="3390800"/>
-            <a:ext cx="1428857" cy="181855"/>
+            <a:off x="1691006" y="102111"/>
+            <a:ext cx="1604604" cy="204222"/>
           </a:xfrm>
           <a:prstGeom prst="rect">
             <a:avLst/>
@@ -10082,7 +10082,7 @@
               <a:buNone/>
             </a:pPr>
             <a:r>
-              <a:rPr lang="en-US" sz="640" dirty="0">
+              <a:rPr lang="en-US" sz="720" dirty="0">
                 <a:solidFill>
                   <a:srgbClr val="9FB3C8"/>
                 </a:solidFill>
@@ -10092,7 +10092,7 @@
               </a:rPr>
               <a:t>Tiết 3 · 第 3 節</a:t>
             </a:r>
-            <a:endParaRPr lang="en-US" sz="640" dirty="0"/>
+            <a:endParaRPr lang="en-US" sz="720" dirty="0"/>
           </a:p>
         </p:txBody>
       </p:sp>
@@ -10122,8 +10122,8 @@
       </p:nvGrpSpPr>
       <p:grpSpPr>
         <a:xfrm>
-          <a:off x="0" y="0"/>
-          <a:ext cx="0" cy="0"/>
+          <a:off x="925172" y="0"/>
+          <a:ext cx="1" cy="1"/>
           <a:chOff x="0" y="0"/>
           <a:chExt cx="0" cy="0"/>
         </a:xfrm>
@@ -10136,8 +10136,8 @@
         </p:nvSpPr>
         <p:spPr>
           <a:xfrm>
-            <a:off x="6130753" y="-947729"/>
-            <a:ext cx="2987610" cy="2987610"/>
+            <a:off x="6322478" y="-1094048"/>
+            <a:ext cx="3355082" cy="3355082"/>
           </a:xfrm>
           <a:prstGeom prst="ellipse">
             <a:avLst/>
@@ -10161,8 +10161,8 @@
         </p:nvSpPr>
         <p:spPr>
           <a:xfrm>
-            <a:off x="7104973" y="1520297"/>
-            <a:ext cx="1688649" cy="1688649"/>
+            <a:off x="7416526" y="1677541"/>
+            <a:ext cx="1896351" cy="1896351"/>
           </a:xfrm>
           <a:prstGeom prst="ellipse">
             <a:avLst/>
@@ -10183,8 +10183,8 @@
         </p:nvSpPr>
         <p:spPr>
           <a:xfrm>
-            <a:off x="1681812" y="364222"/>
-            <a:ext cx="4806155" cy="194844"/>
+            <a:off x="1326323" y="379270"/>
+            <a:ext cx="5397306" cy="218810"/>
           </a:xfrm>
           <a:prstGeom prst="rect">
             <a:avLst/>
@@ -10200,7 +10200,7 @@
               <a:buNone/>
             </a:pPr>
             <a:r>
-              <a:rPr lang="en-US" sz="890" b="1" dirty="0">
+              <a:rPr lang="en-US" sz="1000" b="1" dirty="0">
                 <a:solidFill>
                   <a:srgbClr val="FFB020"/>
                 </a:solidFill>
@@ -10210,7 +10210,7 @@
               </a:rPr>
               <a:t>Câu 3 · 第三題（5 分鐘）</a:t>
             </a:r>
-            <a:endParaRPr lang="en-US" sz="890" dirty="0"/>
+            <a:endParaRPr lang="en-US" sz="1000" dirty="0"/>
           </a:p>
         </p:txBody>
       </p:sp>
@@ -10222,8 +10222,8 @@
         </p:nvSpPr>
         <p:spPr>
           <a:xfrm>
-            <a:off x="1681812" y="585045"/>
-            <a:ext cx="5715427" cy="870304"/>
+            <a:off x="1326323" y="627254"/>
+            <a:ext cx="6418418" cy="977350"/>
           </a:xfrm>
           <a:prstGeom prst="rect">
             <a:avLst/>
@@ -10242,7 +10242,7 @@
               <a:buNone/>
             </a:pPr>
             <a:r>
-              <a:rPr lang="en-US" sz="1630" b="1" dirty="0">
+              <a:rPr lang="en-US" sz="1830" b="1" dirty="0">
                 <a:solidFill>
                   <a:srgbClr val="FFFFFF"/>
                 </a:solidFill>
@@ -10252,7 +10252,7 @@
               </a:rPr>
               <a:t>Giữ nguyên ba con số vừa tìm được, bật mưa lên. Trụ được bao lâu?</a:t>
             </a:r>
-            <a:endParaRPr lang="en-US" sz="1630" dirty="0"/>
+            <a:endParaRPr lang="en-US" sz="1830" dirty="0"/>
           </a:p>
           <a:p>
             <a:pPr indent="0" marL="0">
@@ -10262,7 +10262,7 @@
               <a:buNone/>
             </a:pPr>
             <a:r>
-              <a:rPr lang="en-US" sz="1070" dirty="0">
+              <a:rPr lang="en-US" sz="1200" dirty="0">
                 <a:solidFill>
                   <a:srgbClr val="AFC3D4"/>
                 </a:solidFill>
@@ -10272,7 +10272,7 @@
               </a:rPr>
               <a:t>三個數字不要動，把雨天打開。這次撐得了多久？</a:t>
             </a:r>
-            <a:endParaRPr lang="en-US" sz="1630" dirty="0"/>
+            <a:endParaRPr lang="en-US" sz="1830" dirty="0"/>
           </a:p>
         </p:txBody>
       </p:sp>
@@ -10284,8 +10284,8 @@
         </p:nvSpPr>
         <p:spPr>
           <a:xfrm>
-            <a:off x="1681812" y="1362092"/>
-            <a:ext cx="5780375" cy="441647"/>
+            <a:off x="1326323" y="1499877"/>
+            <a:ext cx="6491354" cy="495969"/>
           </a:xfrm>
           <a:prstGeom prst="roundRect">
             <a:avLst>
@@ -10306,8 +10306,8 @@
         </p:nvSpPr>
         <p:spPr>
           <a:xfrm>
-            <a:off x="1798719" y="1466008"/>
-            <a:ext cx="233813" cy="233813"/>
+            <a:off x="1457609" y="1616575"/>
+            <a:ext cx="262572" cy="262572"/>
           </a:xfrm>
           <a:prstGeom prst="ellipse">
             <a:avLst/>
@@ -10326,8 +10326,8 @@
         </p:nvSpPr>
         <p:spPr>
           <a:xfrm>
-            <a:off x="1798719" y="1485493"/>
-            <a:ext cx="233813" cy="194844"/>
+            <a:off x="1457609" y="1638456"/>
+            <a:ext cx="262572" cy="218810"/>
           </a:xfrm>
           <a:prstGeom prst="rect">
             <a:avLst/>
@@ -10343,7 +10343,7 @@
               <a:buNone/>
             </a:pPr>
             <a:r>
-              <a:rPr lang="en-US" sz="850" b="1" dirty="0">
+              <a:rPr lang="en-US" sz="960" b="1" dirty="0">
                 <a:solidFill>
                   <a:srgbClr val="FFFFFF"/>
                 </a:solidFill>
@@ -10353,7 +10353,7 @@
               </a:rPr>
               <a:t>1</a:t>
             </a:r>
-            <a:endParaRPr lang="en-US" sz="850" dirty="0"/>
+            <a:endParaRPr lang="en-US" sz="960" dirty="0"/>
           </a:p>
         </p:txBody>
       </p:sp>
@@ -10365,8 +10365,8 @@
         </p:nvSpPr>
         <p:spPr>
           <a:xfrm>
-            <a:off x="2149438" y="1394566"/>
-            <a:ext cx="5182853" cy="389688"/>
+            <a:off x="1851466" y="1536345"/>
+            <a:ext cx="5820338" cy="437619"/>
           </a:xfrm>
           <a:prstGeom prst="rect">
             <a:avLst/>
@@ -10385,7 +10385,7 @@
               <a:buNone/>
             </a:pPr>
             <a:r>
-              <a:rPr lang="en-US" sz="890" b="1" dirty="0">
+              <a:rPr lang="en-US" sz="1000" b="1" dirty="0">
                 <a:solidFill>
                   <a:srgbClr val="FFFFFF"/>
                 </a:solidFill>
@@ -10395,7 +10395,7 @@
               </a:rPr>
               <a:t>Xem hai thứ: số lần đọc sót, và tia bị ngắn đi bao nhiêu.</a:t>
             </a:r>
-            <a:endParaRPr lang="en-US" sz="890" dirty="0"/>
+            <a:endParaRPr lang="en-US" sz="1000" dirty="0"/>
           </a:p>
           <a:p>
             <a:pPr indent="0" marL="0">
@@ -10405,7 +10405,7 @@
               <a:buNone/>
             </a:pPr>
             <a:r>
-              <a:rPr lang="en-US" sz="820" dirty="0">
+              <a:rPr lang="en-US" sz="920" dirty="0">
                 <a:solidFill>
                   <a:srgbClr val="AFC3D4"/>
                 </a:solidFill>
@@ -10415,7 +10415,7 @@
               </a:rPr>
               <a:t>看兩件事：漏讀次數、射線變短多少。</a:t>
             </a:r>
-            <a:endParaRPr lang="en-US" sz="890" dirty="0"/>
+            <a:endParaRPr lang="en-US" sz="1000" dirty="0"/>
           </a:p>
         </p:txBody>
       </p:sp>
@@ -10427,8 +10427,8 @@
         </p:nvSpPr>
         <p:spPr>
           <a:xfrm>
-            <a:off x="1681812" y="1868686"/>
-            <a:ext cx="5780375" cy="441647"/>
+            <a:off x="1326323" y="2068782"/>
+            <a:ext cx="6491354" cy="495969"/>
           </a:xfrm>
           <a:prstGeom prst="roundRect">
             <a:avLst>
@@ -10449,8 +10449,8 @@
         </p:nvSpPr>
         <p:spPr>
           <a:xfrm>
-            <a:off x="1798719" y="1972603"/>
-            <a:ext cx="233813" cy="233813"/>
+            <a:off x="1457609" y="2185481"/>
+            <a:ext cx="262572" cy="262572"/>
           </a:xfrm>
           <a:prstGeom prst="ellipse">
             <a:avLst/>
@@ -10469,8 +10469,8 @@
         </p:nvSpPr>
         <p:spPr>
           <a:xfrm>
-            <a:off x="1798719" y="1992087"/>
-            <a:ext cx="233813" cy="194844"/>
+            <a:off x="1457609" y="2207362"/>
+            <a:ext cx="262572" cy="218810"/>
           </a:xfrm>
           <a:prstGeom prst="rect">
             <a:avLst/>
@@ -10486,7 +10486,7 @@
               <a:buNone/>
             </a:pPr>
             <a:r>
-              <a:rPr lang="en-US" sz="850" b="1" dirty="0">
+              <a:rPr lang="en-US" sz="960" b="1" dirty="0">
                 <a:solidFill>
                   <a:srgbClr val="FFFFFF"/>
                 </a:solidFill>
@@ -10496,7 +10496,7 @@
               </a:rPr>
               <a:t>2</a:t>
             </a:r>
-            <a:endParaRPr lang="en-US" sz="850" dirty="0"/>
+            <a:endParaRPr lang="en-US" sz="960" dirty="0"/>
           </a:p>
         </p:txBody>
       </p:sp>
@@ -10508,8 +10508,8 @@
         </p:nvSpPr>
         <p:spPr>
           <a:xfrm>
-            <a:off x="2149438" y="1901160"/>
-            <a:ext cx="5182853" cy="389688"/>
+            <a:off x="1851466" y="2105250"/>
+            <a:ext cx="5820338" cy="437619"/>
           </a:xfrm>
           <a:prstGeom prst="rect">
             <a:avLst/>
@@ -10528,7 +10528,7 @@
               <a:buNone/>
             </a:pPr>
             <a:r>
-              <a:rPr lang="en-US" sz="890" b="1" dirty="0">
+              <a:rPr lang="en-US" sz="1000" b="1" dirty="0">
                 <a:solidFill>
                   <a:srgbClr val="FFFFFF"/>
                 </a:solidFill>
@@ -10538,7 +10538,7 @@
               </a:rPr>
               <a:t>Câu hỏi bẫy: tia ngắn đi rồi, thì quãng đường phanh có ngắn đi theo không?</a:t>
             </a:r>
-            <a:endParaRPr lang="en-US" sz="890" dirty="0"/>
+            <a:endParaRPr lang="en-US" sz="1000" dirty="0"/>
           </a:p>
           <a:p>
             <a:pPr indent="0" marL="0">
@@ -10548,7 +10548,7 @@
               <a:buNone/>
             </a:pPr>
             <a:r>
-              <a:rPr lang="en-US" sz="820" dirty="0">
+              <a:rPr lang="en-US" sz="920" dirty="0">
                 <a:solidFill>
                   <a:srgbClr val="AFC3D4"/>
                 </a:solidFill>
@@ -10558,7 +10558,7 @@
               </a:rPr>
               <a:t>陷阱題：射線變短了，那煞停距離有跟著變短嗎？</a:t>
             </a:r>
-            <a:endParaRPr lang="en-US" sz="890" dirty="0"/>
+            <a:endParaRPr lang="en-US" sz="1000" dirty="0"/>
           </a:p>
         </p:txBody>
       </p:sp>
@@ -10570,8 +10570,8 @@
         </p:nvSpPr>
         <p:spPr>
           <a:xfrm>
-            <a:off x="1681812" y="2375281"/>
-            <a:ext cx="5780375" cy="441647"/>
+            <a:off x="1326323" y="2637687"/>
+            <a:ext cx="6491354" cy="495969"/>
           </a:xfrm>
           <a:prstGeom prst="roundRect">
             <a:avLst>
@@ -10592,8 +10592,8 @@
         </p:nvSpPr>
         <p:spPr>
           <a:xfrm>
-            <a:off x="1798719" y="2479198"/>
-            <a:ext cx="233813" cy="233813"/>
+            <a:off x="1457609" y="2754386"/>
+            <a:ext cx="262572" cy="262572"/>
           </a:xfrm>
           <a:prstGeom prst="ellipse">
             <a:avLst/>
@@ -10612,8 +10612,8 @@
         </p:nvSpPr>
         <p:spPr>
           <a:xfrm>
-            <a:off x="1798719" y="2498682"/>
-            <a:ext cx="233813" cy="194844"/>
+            <a:off x="1457609" y="2776267"/>
+            <a:ext cx="262572" cy="218810"/>
           </a:xfrm>
           <a:prstGeom prst="rect">
             <a:avLst/>
@@ -10629,7 +10629,7 @@
               <a:buNone/>
             </a:pPr>
             <a:r>
-              <a:rPr lang="en-US" sz="850" b="1" dirty="0">
+              <a:rPr lang="en-US" sz="960" b="1" dirty="0">
                 <a:solidFill>
                   <a:srgbClr val="FFFFFF"/>
                 </a:solidFill>
@@ -10639,7 +10639,7 @@
               </a:rPr>
               <a:t>3</a:t>
             </a:r>
-            <a:endParaRPr lang="en-US" sz="850" dirty="0"/>
+            <a:endParaRPr lang="en-US" sz="960" dirty="0"/>
           </a:p>
         </p:txBody>
       </p:sp>
@@ -10651,8 +10651,8 @@
         </p:nvSpPr>
         <p:spPr>
           <a:xfrm>
-            <a:off x="2149438" y="2407755"/>
-            <a:ext cx="5182853" cy="389688"/>
+            <a:off x="1851466" y="2674156"/>
+            <a:ext cx="5820338" cy="437619"/>
           </a:xfrm>
           <a:prstGeom prst="rect">
             <a:avLst/>
@@ -10671,7 +10671,7 @@
               <a:buNone/>
             </a:pPr>
             <a:r>
-              <a:rPr lang="en-US" sz="890" b="1" dirty="0">
+              <a:rPr lang="en-US" sz="1000" b="1" dirty="0">
                 <a:solidFill>
                   <a:srgbClr val="FFFFFF"/>
                 </a:solidFill>
@@ -10681,7 +10681,7 @@
               </a:rPr>
               <a:t>Ngắn đi bao nhiêu giây? Bạn đổi gì để kéo lại? Ghi lại đổi gì và VÌ SAO.</a:t>
             </a:r>
-            <a:endParaRPr lang="en-US" sz="890" dirty="0"/>
+            <a:endParaRPr lang="en-US" sz="1000" dirty="0"/>
           </a:p>
           <a:p>
             <a:pPr indent="0" marL="0">
@@ -10691,7 +10691,7 @@
               <a:buNone/>
             </a:pPr>
             <a:r>
-              <a:rPr lang="en-US" sz="820" dirty="0">
+              <a:rPr lang="en-US" sz="920" dirty="0">
                 <a:solidFill>
                   <a:srgbClr val="AFC3D4"/>
                 </a:solidFill>
@@ -10701,7 +10701,7 @@
               </a:rPr>
               <a:t>少撐了幾秒？你要改什麼把它拉回來？寫下改了什麼、還有為什麼。</a:t>
             </a:r>
-            <a:endParaRPr lang="en-US" sz="890" dirty="0"/>
+            <a:endParaRPr lang="en-US" sz="1000" dirty="0"/>
           </a:p>
         </p:txBody>
       </p:sp>
@@ -10713,8 +10713,8 @@
         </p:nvSpPr>
         <p:spPr>
           <a:xfrm>
-            <a:off x="1681812" y="2907855"/>
-            <a:ext cx="5715427" cy="324740"/>
+            <a:off x="1326323" y="3235767"/>
+            <a:ext cx="6418418" cy="364683"/>
           </a:xfrm>
           <a:prstGeom prst="rect">
             <a:avLst/>
@@ -10733,7 +10733,7 @@
               <a:buNone/>
             </a:pPr>
             <a:r>
-              <a:rPr lang="en-US" sz="890" b="1" dirty="0">
+              <a:rPr lang="en-US" sz="1000" b="1" dirty="0">
                 <a:solidFill>
                   <a:srgbClr val="FFB020"/>
                 </a:solidFill>
@@ -10743,7 +10743,7 @@
               </a:rPr>
               <a:t>Hai đáp án đều đúng: giảm tốc độ, hoặc tăng số tia để bù phần đọc sót. Lý do khác nhau.</a:t>
             </a:r>
-            <a:endParaRPr lang="en-US" sz="890" dirty="0"/>
+            <a:endParaRPr lang="en-US" sz="1000" dirty="0"/>
           </a:p>
           <a:p>
             <a:pPr indent="0" marL="0">
@@ -10753,7 +10753,7 @@
               <a:buNone/>
             </a:pPr>
             <a:r>
-              <a:rPr lang="en-US" sz="820" dirty="0">
+              <a:rPr lang="en-US" sz="920" dirty="0">
                 <a:solidFill>
                   <a:srgbClr val="FFB020"/>
                 </a:solidFill>
@@ -10763,7 +10763,7 @@
               </a:rPr>
               <a:t>兩個答案都對：降低車速，或加射線數補漏讀。理由不一樣。</a:t>
             </a:r>
-            <a:endParaRPr lang="en-US" sz="890" dirty="0"/>
+            <a:endParaRPr lang="en-US" sz="1000" dirty="0"/>
           </a:p>
         </p:txBody>
       </p:sp>
@@ -10775,8 +10775,8 @@
         </p:nvSpPr>
         <p:spPr>
           <a:xfrm>
-            <a:off x="1402536" y="3390800"/>
-            <a:ext cx="584532" cy="181855"/>
+            <a:off x="1012696" y="102111"/>
+            <a:ext cx="656429" cy="204222"/>
           </a:xfrm>
           <a:prstGeom prst="rect">
             <a:avLst/>
@@ -10792,7 +10792,7 @@
               <a:buNone/>
             </a:pPr>
             <a:r>
-              <a:rPr lang="en-US" sz="640" dirty="0">
+              <a:rPr lang="en-US" sz="720" dirty="0">
                 <a:solidFill>
                   <a:srgbClr val="9FB3C8"/>
                 </a:solidFill>
@@ -10802,7 +10802,7 @@
               </a:rPr>
               <a:t>5 / 11</a:t>
             </a:r>
-            <a:endParaRPr lang="en-US" sz="640" dirty="0"/>
+            <a:endParaRPr lang="en-US" sz="720" dirty="0"/>
           </a:p>
         </p:txBody>
       </p:sp>
@@ -10814,8 +10814,8 @@
         </p:nvSpPr>
         <p:spPr>
           <a:xfrm>
-            <a:off x="2006553" y="3390800"/>
-            <a:ext cx="1428857" cy="181855"/>
+            <a:off x="1691006" y="102111"/>
+            <a:ext cx="1604604" cy="204222"/>
           </a:xfrm>
           <a:prstGeom prst="rect">
             <a:avLst/>
@@ -10831,7 +10831,7 @@
               <a:buNone/>
             </a:pPr>
             <a:r>
-              <a:rPr lang="en-US" sz="640" dirty="0">
+              <a:rPr lang="en-US" sz="720" dirty="0">
                 <a:solidFill>
                   <a:srgbClr val="9FB3C8"/>
                 </a:solidFill>
@@ -10841,7 +10841,7 @@
               </a:rPr>
               <a:t>Tiết 3 · 第 3 節</a:t>
             </a:r>
-            <a:endParaRPr lang="en-US" sz="640" dirty="0"/>
+            <a:endParaRPr lang="en-US" sz="720" dirty="0"/>
           </a:p>
         </p:txBody>
       </p:sp>
@@ -10871,8 +10871,8 @@
       </p:nvGrpSpPr>
       <p:grpSpPr>
         <a:xfrm>
-          <a:off x="0" y="0"/>
-          <a:ext cx="0" cy="0"/>
+          <a:off x="925172" y="0"/>
+          <a:ext cx="1" cy="1"/>
           <a:chOff x="0" y="0"/>
           <a:chExt cx="0" cy="0"/>
         </a:xfrm>
@@ -10885,8 +10885,8 @@
         </p:nvSpPr>
         <p:spPr>
           <a:xfrm>
-            <a:off x="6130753" y="-947729"/>
-            <a:ext cx="2987610" cy="2987610"/>
+            <a:off x="6322478" y="-1094048"/>
+            <a:ext cx="3355082" cy="3355082"/>
           </a:xfrm>
           <a:prstGeom prst="ellipse">
             <a:avLst/>
@@ -10910,8 +10910,8 @@
         </p:nvSpPr>
         <p:spPr>
           <a:xfrm>
-            <a:off x="7104973" y="1520297"/>
-            <a:ext cx="1688649" cy="1688649"/>
+            <a:off x="7416526" y="1677541"/>
+            <a:ext cx="1896351" cy="1896351"/>
           </a:xfrm>
           <a:prstGeom prst="ellipse">
             <a:avLst/>
@@ -10932,8 +10932,8 @@
         </p:nvSpPr>
         <p:spPr>
           <a:xfrm>
-            <a:off x="1681812" y="364222"/>
-            <a:ext cx="4806155" cy="194844"/>
+            <a:off x="1326323" y="379270"/>
+            <a:ext cx="5397306" cy="218810"/>
           </a:xfrm>
           <a:prstGeom prst="rect">
             <a:avLst/>
@@ -10949,7 +10949,7 @@
               <a:buNone/>
             </a:pPr>
             <a:r>
-              <a:rPr lang="en-US" sz="890" b="1" dirty="0">
+              <a:rPr lang="en-US" sz="1000" b="1" dirty="0">
                 <a:solidFill>
                   <a:srgbClr val="FFB020"/>
                 </a:solidFill>
@@ -10959,7 +10959,7 @@
               </a:rPr>
               <a:t>Câu 4 · 第四題（5 分鐘，文字題）</a:t>
             </a:r>
-            <a:endParaRPr lang="en-US" sz="890" dirty="0"/>
+            <a:endParaRPr lang="en-US" sz="1000" dirty="0"/>
           </a:p>
         </p:txBody>
       </p:sp>
@@ -10971,8 +10971,8 @@
         </p:nvSpPr>
         <p:spPr>
           <a:xfrm>
-            <a:off x="1681812" y="585045"/>
-            <a:ext cx="5715427" cy="870304"/>
+            <a:off x="1326323" y="627254"/>
+            <a:ext cx="6418418" cy="977350"/>
           </a:xfrm>
           <a:prstGeom prst="rect">
             <a:avLst/>
@@ -10991,7 +10991,7 @@
               <a:buNone/>
             </a:pPr>
             <a:r>
-              <a:rPr lang="en-US" sz="1630" b="1" dirty="0">
+              <a:rPr lang="en-US" sz="1830" b="1" dirty="0">
                 <a:solidFill>
                   <a:srgbClr val="FFFFFF"/>
                 </a:solidFill>
@@ -11001,7 +11001,7 @@
               </a:rPr>
               <a:t>«Tia» trong mô phỏng này, trên xe thật là cảm biến nào? Nó thiếu những khả năng gì?</a:t>
             </a:r>
-            <a:endParaRPr lang="en-US" sz="1630" dirty="0"/>
+            <a:endParaRPr lang="en-US" sz="1830" dirty="0"/>
           </a:p>
           <a:p>
             <a:pPr indent="0" marL="0">
@@ -11011,7 +11011,7 @@
               <a:buNone/>
             </a:pPr>
             <a:r>
-              <a:rPr lang="en-US" sz="1070" dirty="0">
+              <a:rPr lang="en-US" sz="1200" dirty="0">
                 <a:solidFill>
                   <a:srgbClr val="AFC3D4"/>
                 </a:solidFill>
@@ -11021,7 +11021,7 @@
               </a:rPr>
               <a:t>模擬器裡的「射線」，在真車上是哪一種感測器？它少了哪些能力？</a:t>
             </a:r>
-            <a:endParaRPr lang="en-US" sz="1630" dirty="0"/>
+            <a:endParaRPr lang="en-US" sz="1830" dirty="0"/>
           </a:p>
         </p:txBody>
       </p:sp>
@@ -11033,8 +11033,8 @@
         </p:nvSpPr>
         <p:spPr>
           <a:xfrm>
-            <a:off x="1681812" y="1362092"/>
-            <a:ext cx="5780375" cy="441647"/>
+            <a:off x="1326323" y="1499877"/>
+            <a:ext cx="6491354" cy="495969"/>
           </a:xfrm>
           <a:prstGeom prst="roundRect">
             <a:avLst>
@@ -11055,8 +11055,8 @@
         </p:nvSpPr>
         <p:spPr>
           <a:xfrm>
-            <a:off x="1798719" y="1466008"/>
-            <a:ext cx="233813" cy="233813"/>
+            <a:off x="1457609" y="1616575"/>
+            <a:ext cx="262572" cy="262572"/>
           </a:xfrm>
           <a:prstGeom prst="ellipse">
             <a:avLst/>
@@ -11075,8 +11075,8 @@
         </p:nvSpPr>
         <p:spPr>
           <a:xfrm>
-            <a:off x="1798719" y="1485493"/>
-            <a:ext cx="233813" cy="194844"/>
+            <a:off x="1457609" y="1638456"/>
+            <a:ext cx="262572" cy="218810"/>
           </a:xfrm>
           <a:prstGeom prst="rect">
             <a:avLst/>
@@ -11092,7 +11092,7 @@
               <a:buNone/>
             </a:pPr>
             <a:r>
-              <a:rPr lang="en-US" sz="850" b="1" dirty="0">
+              <a:rPr lang="en-US" sz="960" b="1" dirty="0">
                 <a:solidFill>
                   <a:srgbClr val="FFFFFF"/>
                 </a:solidFill>
@@ -11102,7 +11102,7 @@
               </a:rPr>
               <a:t>1</a:t>
             </a:r>
-            <a:endParaRPr lang="en-US" sz="850" dirty="0"/>
+            <a:endParaRPr lang="en-US" sz="960" dirty="0"/>
           </a:p>
         </p:txBody>
       </p:sp>
@@ -11114,8 +11114,8 @@
         </p:nvSpPr>
         <p:spPr>
           <a:xfrm>
-            <a:off x="2149438" y="1394566"/>
-            <a:ext cx="5182853" cy="389688"/>
+            <a:off x="1851466" y="1536345"/>
+            <a:ext cx="5820338" cy="437619"/>
           </a:xfrm>
           <a:prstGeom prst="rect">
             <a:avLst/>
@@ -11134,7 +11134,7 @@
               <a:buNone/>
             </a:pPr>
             <a:r>
-              <a:rPr lang="en-US" sz="890" b="1" dirty="0">
+              <a:rPr lang="en-US" sz="1000" b="1" dirty="0">
                 <a:solidFill>
                   <a:srgbClr val="FFFFFF"/>
                 </a:solidFill>
@@ -11144,7 +11144,7 @@
               </a:rPr>
               <a:t>Gợi ý: nó không thấy màu, không thấy vạch kẻ đường</a:t>
             </a:r>
-            <a:endParaRPr lang="en-US" sz="890" dirty="0"/>
+            <a:endParaRPr lang="en-US" sz="1000" dirty="0"/>
           </a:p>
           <a:p>
             <a:pPr indent="0" marL="0">
@@ -11154,7 +11154,7 @@
               <a:buNone/>
             </a:pPr>
             <a:r>
-              <a:rPr lang="en-US" sz="820" dirty="0">
+              <a:rPr lang="en-US" sz="920" dirty="0">
                 <a:solidFill>
                   <a:srgbClr val="AFC3D4"/>
                 </a:solidFill>
@@ -11164,7 +11164,7 @@
               </a:rPr>
               <a:t>提示：它看不到顏色、看不到車道線</a:t>
             </a:r>
-            <a:endParaRPr lang="en-US" sz="890" dirty="0"/>
+            <a:endParaRPr lang="en-US" sz="1000" dirty="0"/>
           </a:p>
         </p:txBody>
       </p:sp>
@@ -11176,8 +11176,8 @@
         </p:nvSpPr>
         <p:spPr>
           <a:xfrm>
-            <a:off x="1681812" y="1868686"/>
-            <a:ext cx="5780375" cy="441647"/>
+            <a:off x="1326323" y="2068782"/>
+            <a:ext cx="6491354" cy="495969"/>
           </a:xfrm>
           <a:prstGeom prst="roundRect">
             <a:avLst>
@@ -11198,8 +11198,8 @@
         </p:nvSpPr>
         <p:spPr>
           <a:xfrm>
-            <a:off x="1798719" y="1972603"/>
-            <a:ext cx="233813" cy="233813"/>
+            <a:off x="1457609" y="2185481"/>
+            <a:ext cx="262572" cy="262572"/>
           </a:xfrm>
           <a:prstGeom prst="ellipse">
             <a:avLst/>
@@ -11218,8 +11218,8 @@
         </p:nvSpPr>
         <p:spPr>
           <a:xfrm>
-            <a:off x="1798719" y="1992087"/>
-            <a:ext cx="233813" cy="194844"/>
+            <a:off x="1457609" y="2207362"/>
+            <a:ext cx="262572" cy="218810"/>
           </a:xfrm>
           <a:prstGeom prst="rect">
             <a:avLst/>
@@ -11235,7 +11235,7 @@
               <a:buNone/>
             </a:pPr>
             <a:r>
-              <a:rPr lang="en-US" sz="850" b="1" dirty="0">
+              <a:rPr lang="en-US" sz="960" b="1" dirty="0">
                 <a:solidFill>
                   <a:srgbClr val="FFFFFF"/>
                 </a:solidFill>
@@ -11245,7 +11245,7 @@
               </a:rPr>
               <a:t>2</a:t>
             </a:r>
-            <a:endParaRPr lang="en-US" sz="850" dirty="0"/>
+            <a:endParaRPr lang="en-US" sz="960" dirty="0"/>
           </a:p>
         </p:txBody>
       </p:sp>
@@ -11257,8 +11257,8 @@
         </p:nvSpPr>
         <p:spPr>
           <a:xfrm>
-            <a:off x="2149438" y="1901160"/>
-            <a:ext cx="5182853" cy="389688"/>
+            <a:off x="1851466" y="2105250"/>
+            <a:ext cx="5820338" cy="437619"/>
           </a:xfrm>
           <a:prstGeom prst="rect">
             <a:avLst/>
@@ -11277,7 +11277,7 @@
               <a:buNone/>
             </a:pPr>
             <a:r>
-              <a:rPr lang="en-US" sz="890" b="1" dirty="0">
+              <a:rPr lang="en-US" sz="1000" b="1" dirty="0">
                 <a:solidFill>
                   <a:srgbClr val="FFFFFF"/>
                 </a:solidFill>
@@ -11287,7 +11287,7 @@
               </a:rPr>
               <a:t>Gợi ý: nó không phân biệt được người với cột điện</a:t>
             </a:r>
-            <a:endParaRPr lang="en-US" sz="890" dirty="0"/>
+            <a:endParaRPr lang="en-US" sz="1000" dirty="0"/>
           </a:p>
           <a:p>
             <a:pPr indent="0" marL="0">
@@ -11297,7 +11297,7 @@
               <a:buNone/>
             </a:pPr>
             <a:r>
-              <a:rPr lang="en-US" sz="820" dirty="0">
+              <a:rPr lang="en-US" sz="920" dirty="0">
                 <a:solidFill>
                   <a:srgbClr val="AFC3D4"/>
                 </a:solidFill>
@@ -11307,7 +11307,7 @@
               </a:rPr>
               <a:t>提示：它分不出那是人還是一根柱子</a:t>
             </a:r>
-            <a:endParaRPr lang="en-US" sz="890" dirty="0"/>
+            <a:endParaRPr lang="en-US" sz="1000" dirty="0"/>
           </a:p>
         </p:txBody>
       </p:sp>
@@ -11319,8 +11319,8 @@
         </p:nvSpPr>
         <p:spPr>
           <a:xfrm>
-            <a:off x="1681812" y="2375281"/>
-            <a:ext cx="5780375" cy="441647"/>
+            <a:off x="1326323" y="2637687"/>
+            <a:ext cx="6491354" cy="495969"/>
           </a:xfrm>
           <a:prstGeom prst="roundRect">
             <a:avLst>
@@ -11341,8 +11341,8 @@
         </p:nvSpPr>
         <p:spPr>
           <a:xfrm>
-            <a:off x="1798719" y="2479198"/>
-            <a:ext cx="233813" cy="233813"/>
+            <a:off x="1457609" y="2754386"/>
+            <a:ext cx="262572" cy="262572"/>
           </a:xfrm>
           <a:prstGeom prst="ellipse">
             <a:avLst/>
@@ -11361,8 +11361,8 @@
         </p:nvSpPr>
         <p:spPr>
           <a:xfrm>
-            <a:off x="1798719" y="2498682"/>
-            <a:ext cx="233813" cy="194844"/>
+            <a:off x="1457609" y="2776267"/>
+            <a:ext cx="262572" cy="218810"/>
           </a:xfrm>
           <a:prstGeom prst="rect">
             <a:avLst/>
@@ -11378,7 +11378,7 @@
               <a:buNone/>
             </a:pPr>
             <a:r>
-              <a:rPr lang="en-US" sz="850" b="1" dirty="0">
+              <a:rPr lang="en-US" sz="960" b="1" dirty="0">
                 <a:solidFill>
                   <a:srgbClr val="FFFFFF"/>
                 </a:solidFill>
@@ -11388,7 +11388,7 @@
               </a:rPr>
               <a:t>3</a:t>
             </a:r>
-            <a:endParaRPr lang="en-US" sz="850" dirty="0"/>
+            <a:endParaRPr lang="en-US" sz="960" dirty="0"/>
           </a:p>
         </p:txBody>
       </p:sp>
@@ -11400,8 +11400,8 @@
         </p:nvSpPr>
         <p:spPr>
           <a:xfrm>
-            <a:off x="2149438" y="2407755"/>
-            <a:ext cx="5182853" cy="389688"/>
+            <a:off x="1851466" y="2674156"/>
+            <a:ext cx="5820338" cy="437619"/>
           </a:xfrm>
           <a:prstGeom prst="rect">
             <a:avLst/>
@@ -11420,7 +11420,7 @@
               <a:buNone/>
             </a:pPr>
             <a:r>
-              <a:rPr lang="en-US" sz="890" b="1" dirty="0">
+              <a:rPr lang="en-US" sz="1000" b="1" dirty="0">
                 <a:solidFill>
                   <a:srgbClr val="FFFFFF"/>
                 </a:solidFill>
@@ -11430,7 +11430,7 @@
               </a:rPr>
               <a:t>Gợi ý: nó không biết chiếc xe máy đó giây sau sẽ lách sang đâu</a:t>
             </a:r>
-            <a:endParaRPr lang="en-US" sz="890" dirty="0"/>
+            <a:endParaRPr lang="en-US" sz="1000" dirty="0"/>
           </a:p>
           <a:p>
             <a:pPr indent="0" marL="0">
@@ -11440,7 +11440,7 @@
               <a:buNone/>
             </a:pPr>
             <a:r>
-              <a:rPr lang="en-US" sz="820" dirty="0">
+              <a:rPr lang="en-US" sz="920" dirty="0">
                 <a:solidFill>
                   <a:srgbClr val="AFC3D4"/>
                 </a:solidFill>
@@ -11450,7 +11450,7 @@
               </a:rPr>
               <a:t>提示：它不知道那台機車下一秒要往哪裡鑽</a:t>
             </a:r>
-            <a:endParaRPr lang="en-US" sz="890" dirty="0"/>
+            <a:endParaRPr lang="en-US" sz="1000" dirty="0"/>
           </a:p>
         </p:txBody>
       </p:sp>
@@ -11462,8 +11462,8 @@
         </p:nvSpPr>
         <p:spPr>
           <a:xfrm>
-            <a:off x="1681812" y="2907855"/>
-            <a:ext cx="5715427" cy="324740"/>
+            <a:off x="1326323" y="3235767"/>
+            <a:ext cx="6418418" cy="364683"/>
           </a:xfrm>
           <a:prstGeom prst="rect">
             <a:avLst/>
@@ -11482,7 +11482,7 @@
               <a:buNone/>
             </a:pPr>
             <a:r>
-              <a:rPr lang="en-US" sz="890" b="1" dirty="0">
+              <a:rPr lang="en-US" sz="1000" b="1" dirty="0">
                 <a:solidFill>
                   <a:srgbClr val="FFB020"/>
                 </a:solidFill>
@@ -11492,7 +11492,7 @@
               </a:rPr>
               <a:t>Viết ba câu. Tờ giấy này tuần 8 sẽ lấy ra đối chiếu lại.</a:t>
             </a:r>
-            <a:endParaRPr lang="en-US" sz="890" dirty="0"/>
+            <a:endParaRPr lang="en-US" sz="1000" dirty="0"/>
           </a:p>
           <a:p>
             <a:pPr indent="0" marL="0">
@@ -11502,7 +11502,7 @@
               <a:buNone/>
             </a:pPr>
             <a:r>
-              <a:rPr lang="en-US" sz="820" dirty="0">
+              <a:rPr lang="en-US" sz="920" dirty="0">
                 <a:solidFill>
                   <a:srgbClr val="FFB020"/>
                 </a:solidFill>
@@ -11512,7 +11512,7 @@
               </a:rPr>
               <a:t>寫三句話。這張紙第八週會拿出來對照。</a:t>
             </a:r>
-            <a:endParaRPr lang="en-US" sz="890" dirty="0"/>
+            <a:endParaRPr lang="en-US" sz="1000" dirty="0"/>
           </a:p>
         </p:txBody>
       </p:sp>
@@ -11524,8 +11524,8 @@
         </p:nvSpPr>
         <p:spPr>
           <a:xfrm>
-            <a:off x="1402536" y="3390800"/>
-            <a:ext cx="584532" cy="181855"/>
+            <a:off x="1012696" y="102111"/>
+            <a:ext cx="656429" cy="204222"/>
           </a:xfrm>
           <a:prstGeom prst="rect">
             <a:avLst/>
@@ -11541,7 +11541,7 @@
               <a:buNone/>
             </a:pPr>
             <a:r>
-              <a:rPr lang="en-US" sz="640" dirty="0">
+              <a:rPr lang="en-US" sz="720" dirty="0">
                 <a:solidFill>
                   <a:srgbClr val="9FB3C8"/>
                 </a:solidFill>
@@ -11551,7 +11551,7 @@
               </a:rPr>
               <a:t>6 / 11</a:t>
             </a:r>
-            <a:endParaRPr lang="en-US" sz="640" dirty="0"/>
+            <a:endParaRPr lang="en-US" sz="720" dirty="0"/>
           </a:p>
         </p:txBody>
       </p:sp>
@@ -11563,8 +11563,8 @@
         </p:nvSpPr>
         <p:spPr>
           <a:xfrm>
-            <a:off x="2006553" y="3390800"/>
-            <a:ext cx="1428857" cy="181855"/>
+            <a:off x="1691006" y="102111"/>
+            <a:ext cx="1604604" cy="204222"/>
           </a:xfrm>
           <a:prstGeom prst="rect">
             <a:avLst/>
@@ -11580,7 +11580,7 @@
               <a:buNone/>
             </a:pPr>
             <a:r>
-              <a:rPr lang="en-US" sz="640" dirty="0">
+              <a:rPr lang="en-US" sz="720" dirty="0">
                 <a:solidFill>
                   <a:srgbClr val="9FB3C8"/>
                 </a:solidFill>
@@ -11590,7 +11590,7 @@
               </a:rPr>
               <a:t>Tiết 3 · 第 3 節</a:t>
             </a:r>
-            <a:endParaRPr lang="en-US" sz="640" dirty="0"/>
+            <a:endParaRPr lang="en-US" sz="720" dirty="0"/>
           </a:p>
         </p:txBody>
       </p:sp>
@@ -11613,8 +11613,8 @@
       </p:nvGrpSpPr>
       <p:grpSpPr>
         <a:xfrm>
-          <a:off x="0" y="0"/>
-          <a:ext cx="0" cy="0"/>
+          <a:off x="942514" y="0"/>
+          <a:ext cx="1" cy="1"/>
           <a:chOff x="0" y="0"/>
           <a:chExt cx="0" cy="0"/>
         </a:xfrm>
@@ -11627,8 +11627,8 @@
         </p:nvSpPr>
         <p:spPr>
           <a:xfrm>
-            <a:off x="1681812" y="325253"/>
-            <a:ext cx="5780375" cy="194844"/>
+            <a:off x="1341758" y="333913"/>
+            <a:ext cx="6460485" cy="217769"/>
           </a:xfrm>
           <a:prstGeom prst="rect">
             <a:avLst/>
@@ -11644,7 +11644,7 @@
               <a:buNone/>
             </a:pPr>
             <a:r>
-              <a:rPr lang="en-US" sz="890" b="1" dirty="0">
+              <a:rPr lang="en-US" sz="990" b="1" dirty="0">
                 <a:solidFill>
                   <a:srgbClr val="007F72"/>
                 </a:solidFill>
@@ -11654,7 +11654,7 @@
               </a:rPr>
               <a:t>Thêm · 多一個按鈕（有做完的組別）</a:t>
             </a:r>
-            <a:endParaRPr lang="en-US" sz="890" dirty="0"/>
+            <a:endParaRPr lang="en-US" sz="990" dirty="0"/>
           </a:p>
         </p:txBody>
       </p:sp>
@@ -11666,8 +11666,8 @@
         </p:nvSpPr>
         <p:spPr>
           <a:xfrm>
-            <a:off x="1681812" y="809116"/>
-            <a:ext cx="1753597" cy="1786071"/>
+            <a:off x="1341758" y="874706"/>
+            <a:ext cx="1959922" cy="1996217"/>
           </a:xfrm>
           <a:prstGeom prst="roundRect">
             <a:avLst>
@@ -11693,8 +11693,8 @@
         </p:nvSpPr>
         <p:spPr>
           <a:xfrm flipH="1" flipV="1">
-            <a:off x="1791842" y="1664430"/>
-            <a:ext cx="326681" cy="188609"/>
+            <a:off x="1464734" y="1830655"/>
+            <a:ext cx="365117" cy="210801"/>
           </a:xfrm>
           <a:prstGeom prst="line">
             <a:avLst/>
@@ -11716,8 +11716,8 @@
         </p:nvSpPr>
         <p:spPr>
           <a:xfrm flipH="1" flipV="1">
-            <a:off x="1876052" y="1564073"/>
-            <a:ext cx="242471" cy="288966"/>
+            <a:off x="1558851" y="1718490"/>
+            <a:ext cx="271000" cy="322965"/>
           </a:xfrm>
           <a:prstGeom prst="line">
             <a:avLst/>
@@ -11739,8 +11739,8 @@
         </p:nvSpPr>
         <p:spPr>
           <a:xfrm flipH="1" flipV="1">
-            <a:off x="1989507" y="1498569"/>
-            <a:ext cx="129016" cy="354469"/>
+            <a:off x="1685655" y="1645280"/>
+            <a:ext cx="144196" cy="396175"/>
           </a:xfrm>
           <a:prstGeom prst="line">
             <a:avLst/>
@@ -11762,8 +11762,8 @@
         </p:nvSpPr>
         <p:spPr>
           <a:xfrm flipV="1">
-            <a:off x="2118523" y="1475820"/>
-            <a:ext cx="0" cy="377218"/>
+            <a:off x="1829851" y="1619854"/>
+            <a:ext cx="1" cy="421601"/>
           </a:xfrm>
           <a:prstGeom prst="line">
             <a:avLst/>
@@ -11785,8 +11785,8 @@
         </p:nvSpPr>
         <p:spPr>
           <a:xfrm flipV="1">
-            <a:off x="2118523" y="1498569"/>
-            <a:ext cx="129016" cy="354469"/>
+            <a:off x="1829851" y="1645280"/>
+            <a:ext cx="144196" cy="396175"/>
           </a:xfrm>
           <a:prstGeom prst="line">
             <a:avLst/>
@@ -11808,8 +11808,8 @@
         </p:nvSpPr>
         <p:spPr>
           <a:xfrm flipV="1">
-            <a:off x="2118523" y="1564073"/>
-            <a:ext cx="242471" cy="288966"/>
+            <a:off x="1829851" y="1718490"/>
+            <a:ext cx="271000" cy="322965"/>
           </a:xfrm>
           <a:prstGeom prst="line">
             <a:avLst/>
@@ -11831,8 +11831,8 @@
         </p:nvSpPr>
         <p:spPr>
           <a:xfrm flipV="1">
-            <a:off x="2118523" y="1664430"/>
-            <a:ext cx="326681" cy="188609"/>
+            <a:off x="1829851" y="1830655"/>
+            <a:ext cx="365117" cy="210801"/>
           </a:xfrm>
           <a:prstGeom prst="line">
             <a:avLst/>
@@ -11854,8 +11854,8 @@
         </p:nvSpPr>
         <p:spPr>
           <a:xfrm>
-            <a:off x="2083945" y="1818460"/>
-            <a:ext cx="69157" cy="69157"/>
+            <a:off x="1791204" y="2002809"/>
+            <a:ext cx="77293" cy="77293"/>
           </a:xfrm>
           <a:prstGeom prst="ellipse">
             <a:avLst/>
@@ -11874,8 +11874,8 @@
         </p:nvSpPr>
         <p:spPr>
           <a:xfrm>
-            <a:off x="2747220" y="1450673"/>
-            <a:ext cx="502958" cy="502958"/>
+            <a:off x="2532519" y="1591747"/>
+            <a:ext cx="562134" cy="562134"/>
           </a:xfrm>
           <a:prstGeom prst="donut">
             <a:avLst/>
@@ -11896,8 +11896,8 @@
         </p:nvSpPr>
         <p:spPr>
           <a:xfrm>
-            <a:off x="3250178" y="1702151"/>
-            <a:ext cx="125739" cy="0"/>
+            <a:off x="3094654" y="1872815"/>
+            <a:ext cx="140534" cy="1"/>
           </a:xfrm>
           <a:prstGeom prst="line">
             <a:avLst/>
@@ -11919,8 +11919,8 @@
         </p:nvSpPr>
         <p:spPr>
           <a:xfrm>
-            <a:off x="3216486" y="1827891"/>
-            <a:ext cx="108894" cy="62870"/>
+            <a:off x="3056998" y="2013349"/>
+            <a:ext cx="121706" cy="70267"/>
           </a:xfrm>
           <a:prstGeom prst="line">
             <a:avLst/>
@@ -11942,8 +11942,8 @@
         </p:nvSpPr>
         <p:spPr>
           <a:xfrm>
-            <a:off x="3124438" y="1919938"/>
-            <a:ext cx="62870" cy="108894"/>
+            <a:off x="2954120" y="2116226"/>
+            <a:ext cx="70267" cy="121706"/>
           </a:xfrm>
           <a:prstGeom prst="line">
             <a:avLst/>
@@ -11965,8 +11965,8 @@
         </p:nvSpPr>
         <p:spPr>
           <a:xfrm>
-            <a:off x="2998699" y="1953630"/>
-            <a:ext cx="0" cy="125739"/>
+            <a:off x="2813586" y="2153882"/>
+            <a:ext cx="1" cy="140534"/>
           </a:xfrm>
           <a:prstGeom prst="line">
             <a:avLst/>
@@ -11988,8 +11988,8 @@
         </p:nvSpPr>
         <p:spPr>
           <a:xfrm flipH="1">
-            <a:off x="2810090" y="1919938"/>
-            <a:ext cx="62870" cy="108894"/>
+            <a:off x="2602786" y="2116226"/>
+            <a:ext cx="70267" cy="121706"/>
           </a:xfrm>
           <a:prstGeom prst="line">
             <a:avLst/>
@@ -12011,8 +12011,8 @@
         </p:nvSpPr>
         <p:spPr>
           <a:xfrm flipH="1">
-            <a:off x="2672018" y="1827891"/>
-            <a:ext cx="108894" cy="62870"/>
+            <a:off x="2448470" y="2013349"/>
+            <a:ext cx="121706" cy="70267"/>
           </a:xfrm>
           <a:prstGeom prst="line">
             <a:avLst/>
@@ -12034,8 +12034,8 @@
         </p:nvSpPr>
         <p:spPr>
           <a:xfrm flipH="1">
-            <a:off x="2621481" y="1702151"/>
-            <a:ext cx="125739" cy="0"/>
+            <a:off x="2391986" y="1872815"/>
+            <a:ext cx="140534" cy="1"/>
           </a:xfrm>
           <a:prstGeom prst="line">
             <a:avLst/>
@@ -12057,8 +12057,8 @@
         </p:nvSpPr>
         <p:spPr>
           <a:xfrm flipH="1" flipV="1">
-            <a:off x="2672018" y="1513542"/>
-            <a:ext cx="108894" cy="62870"/>
+            <a:off x="2448470" y="1662014"/>
+            <a:ext cx="121706" cy="70267"/>
           </a:xfrm>
           <a:prstGeom prst="line">
             <a:avLst/>
@@ -12080,8 +12080,8 @@
         </p:nvSpPr>
         <p:spPr>
           <a:xfrm flipH="1" flipV="1">
-            <a:off x="2810090" y="1375471"/>
-            <a:ext cx="62870" cy="108894"/>
+            <a:off x="2602786" y="1507697"/>
+            <a:ext cx="70267" cy="121706"/>
           </a:xfrm>
           <a:prstGeom prst="line">
             <a:avLst/>
@@ -12103,8 +12103,8 @@
         </p:nvSpPr>
         <p:spPr>
           <a:xfrm flipH="1" flipV="1">
-            <a:off x="2998699" y="1324933"/>
-            <a:ext cx="0" cy="125739"/>
+            <a:off x="2813586" y="1451213"/>
+            <a:ext cx="1" cy="140534"/>
           </a:xfrm>
           <a:prstGeom prst="line">
             <a:avLst/>
@@ -12126,8 +12126,8 @@
         </p:nvSpPr>
         <p:spPr>
           <a:xfrm flipV="1">
-            <a:off x="3124438" y="1375471"/>
-            <a:ext cx="62870" cy="108894"/>
+            <a:off x="2954120" y="1507697"/>
+            <a:ext cx="70267" cy="121706"/>
           </a:xfrm>
           <a:prstGeom prst="line">
             <a:avLst/>
@@ -12149,8 +12149,8 @@
         </p:nvSpPr>
         <p:spPr>
           <a:xfrm flipV="1">
-            <a:off x="3216486" y="1513542"/>
-            <a:ext cx="108894" cy="62870"/>
+            <a:off x="3056998" y="1662014"/>
+            <a:ext cx="121706" cy="70267"/>
           </a:xfrm>
           <a:prstGeom prst="line">
             <a:avLst/>
@@ -12172,8 +12172,8 @@
         </p:nvSpPr>
         <p:spPr>
           <a:xfrm>
-            <a:off x="2964120" y="1667573"/>
-            <a:ext cx="69157" cy="69157"/>
+            <a:off x="2774940" y="1834168"/>
+            <a:ext cx="77293" cy="77293"/>
           </a:xfrm>
           <a:prstGeom prst="ellipse">
             <a:avLst/>
@@ -12192,8 +12192,8 @@
         </p:nvSpPr>
         <p:spPr>
           <a:xfrm>
-            <a:off x="2495741" y="1654804"/>
-            <a:ext cx="125739" cy="94694"/>
+            <a:off x="2251452" y="1819897"/>
+            <a:ext cx="140534" cy="105836"/>
           </a:xfrm>
           <a:prstGeom prst="rightArrow">
             <a:avLst/>
@@ -12212,8 +12212,8 @@
         </p:nvSpPr>
         <p:spPr>
           <a:xfrm>
-            <a:off x="3760150" y="963355"/>
-            <a:ext cx="3702038" cy="714266"/>
+            <a:off x="3664629" y="1047093"/>
+            <a:ext cx="4137614" cy="798305"/>
           </a:xfrm>
           <a:prstGeom prst="rect">
             <a:avLst/>
@@ -12232,7 +12232,7 @@
               <a:buNone/>
             </a:pPr>
             <a:r>
-              <a:rPr lang="en-US" sz="1630" b="1" dirty="0">
+              <a:rPr lang="en-US" sz="1830" b="1" dirty="0">
                 <a:solidFill>
                   <a:srgbClr val="0B1F3A"/>
                 </a:solidFill>
@@ -12242,7 +12242,7 @@
               </a:rPr>
               <a:t>Nút mới: đổi giữa LiDAR cố định và LiDAR quay 360°</a:t>
             </a:r>
-            <a:endParaRPr lang="en-US" sz="1630" dirty="0"/>
+            <a:endParaRPr lang="en-US" sz="1830" dirty="0"/>
           </a:p>
           <a:p>
             <a:pPr indent="0" marL="0">
@@ -12252,7 +12252,7 @@
               <a:buNone/>
             </a:pPr>
             <a:r>
-              <a:rPr lang="en-US" sz="990" dirty="0">
+              <a:rPr lang="en-US" sz="1110" dirty="0">
                 <a:solidFill>
                   <a:srgbClr val="007F72"/>
                 </a:solidFill>
@@ -12262,7 +12262,7 @@
               </a:rPr>
               <a:t>新按鈕：固定式光達 ↔ 360° 旋轉式光達</a:t>
             </a:r>
-            <a:endParaRPr lang="en-US" sz="1630" dirty="0"/>
+            <a:endParaRPr lang="en-US" sz="1830" dirty="0"/>
           </a:p>
         </p:txBody>
       </p:sp>
@@ -12274,8 +12274,8 @@
         </p:nvSpPr>
         <p:spPr>
           <a:xfrm>
-            <a:off x="3760150" y="1742570"/>
-            <a:ext cx="3702038" cy="763326"/>
+            <a:off x="3664629" y="1917989"/>
+            <a:ext cx="4137614" cy="853137"/>
           </a:xfrm>
           <a:prstGeom prst="rect">
             <a:avLst/>
@@ -12294,7 +12294,7 @@
               <a:buNone/>
             </a:pPr>
             <a:r>
-              <a:rPr lang="en-US" sz="890" dirty="0">
+              <a:rPr lang="en-US" sz="990" dirty="0">
                 <a:solidFill>
                   <a:srgbClr val="5F7183"/>
                 </a:solidFill>
@@ -12304,7 +12304,7 @@
               </a:rPr>
               <a:t>Loại cố định chỉ nhìn phía trước, nhưng dữ liệu luôn mới. Loại quay nhìn được vòng quanh, nhưng mỗi hướng chỉ được cập nhật mỗi vòng một lần — lúc bạn nhìn nó, số liệu đó có thể đã cũ.</a:t>
             </a:r>
-            <a:endParaRPr lang="en-US" sz="890" dirty="0"/>
+            <a:endParaRPr lang="en-US" sz="990" dirty="0"/>
           </a:p>
           <a:p>
             <a:pPr indent="0" marL="0">
@@ -12314,7 +12314,7 @@
               <a:buNone/>
             </a:pPr>
             <a:r>
-              <a:rPr lang="en-US" sz="820" dirty="0">
+              <a:rPr lang="en-US" sz="910" dirty="0">
                 <a:solidFill>
                   <a:srgbClr val="5F7183"/>
                 </a:solidFill>
@@ -12324,7 +12324,7 @@
               </a:rPr>
               <a:t>固定式只看前方，但資料永遠是最新的。旋轉式看得到一圈，但每個方向每轉一圈才更新一次——你看它的時候，那筆資料可能已經是舊的。</a:t>
             </a:r>
-            <a:endParaRPr lang="en-US" sz="890" dirty="0"/>
+            <a:endParaRPr lang="en-US" sz="990" dirty="0"/>
           </a:p>
         </p:txBody>
       </p:sp>
@@ -12336,8 +12336,8 @@
         </p:nvSpPr>
         <p:spPr>
           <a:xfrm>
-            <a:off x="1681812" y="2806268"/>
-            <a:ext cx="5780375" cy="441647"/>
+            <a:off x="1341758" y="3106840"/>
+            <a:ext cx="6460485" cy="493610"/>
           </a:xfrm>
           <a:prstGeom prst="roundRect">
             <a:avLst>
@@ -12363,8 +12363,8 @@
         </p:nvSpPr>
         <p:spPr>
           <a:xfrm>
-            <a:off x="1811708" y="2858226"/>
-            <a:ext cx="5520583" cy="350719"/>
+            <a:off x="1486937" y="3164912"/>
+            <a:ext cx="6170126" cy="391984"/>
           </a:xfrm>
           <a:prstGeom prst="rect">
             <a:avLst/>
@@ -12383,7 +12383,7 @@
               <a:buNone/>
             </a:pPr>
             <a:r>
-              <a:rPr lang="en-US" sz="890" b="1" dirty="0">
+              <a:rPr lang="en-US" sz="990" b="1" dirty="0">
                 <a:solidFill>
                   <a:srgbClr val="7A4E00"/>
                 </a:solidFill>
@@ -12393,7 +12393,7 @@
               </a:rPr>
               <a:t>Nhóm nào xong sớm: thử đổi sang loại quay, xem ba con số của bạn có còn dùng được không.</a:t>
             </a:r>
-            <a:endParaRPr lang="en-US" sz="890" dirty="0"/>
+            <a:endParaRPr lang="en-US" sz="990" dirty="0"/>
           </a:p>
           <a:p>
             <a:pPr indent="0" marL="0">
@@ -12403,7 +12403,7 @@
               <a:buNone/>
             </a:pPr>
             <a:r>
-              <a:rPr lang="en-US" sz="820" dirty="0">
+              <a:rPr lang="en-US" sz="910" dirty="0">
                 <a:solidFill>
                   <a:srgbClr val="7A4E00"/>
                 </a:solidFill>
@@ -12413,7 +12413,7 @@
               </a:rPr>
               <a:t>提早做完的組別：切到旋轉式，看你們那三個數字還管不管用。</a:t>
             </a:r>
-            <a:endParaRPr lang="en-US" sz="890" dirty="0"/>
+            <a:endParaRPr lang="en-US" sz="990" dirty="0"/>
           </a:p>
         </p:txBody>
       </p:sp>
@@ -12433,8 +12433,8 @@
         </p:blipFill>
         <p:spPr>
           <a:xfrm>
-            <a:off x="6663327" y="3338842"/>
-            <a:ext cx="779376" cy="172200"/>
+            <a:off x="7882128" y="109728"/>
+            <a:ext cx="1097280" cy="242439"/>
           </a:xfrm>
           <a:prstGeom prst="rect">
             <a:avLst/>
@@ -12449,8 +12449,8 @@
         </p:nvSpPr>
         <p:spPr>
           <a:xfrm>
-            <a:off x="1402536" y="3390800"/>
-            <a:ext cx="584532" cy="181855"/>
+            <a:off x="1029622" y="101626"/>
+            <a:ext cx="653307" cy="203251"/>
           </a:xfrm>
           <a:prstGeom prst="rect">
             <a:avLst/>
@@ -12466,7 +12466,7 @@
               <a:buNone/>
             </a:pPr>
             <a:r>
-              <a:rPr lang="en-US" sz="640" dirty="0">
+              <a:rPr lang="en-US" sz="710" dirty="0">
                 <a:solidFill>
                   <a:srgbClr val="5F7183"/>
                 </a:solidFill>
@@ -12476,7 +12476,7 @@
               </a:rPr>
               <a:t>7 / 11</a:t>
             </a:r>
-            <a:endParaRPr lang="en-US" sz="640" dirty="0"/>
+            <a:endParaRPr lang="en-US" sz="710" dirty="0"/>
           </a:p>
         </p:txBody>
       </p:sp>
@@ -12488,8 +12488,8 @@
         </p:nvSpPr>
         <p:spPr>
           <a:xfrm>
-            <a:off x="2006553" y="3390800"/>
-            <a:ext cx="1428857" cy="181855"/>
+            <a:off x="1704706" y="101626"/>
+            <a:ext cx="1596974" cy="203251"/>
           </a:xfrm>
           <a:prstGeom prst="rect">
             <a:avLst/>
@@ -12505,7 +12505,7 @@
               <a:buNone/>
             </a:pPr>
             <a:r>
-              <a:rPr lang="en-US" sz="640" dirty="0">
+              <a:rPr lang="en-US" sz="710" dirty="0">
                 <a:solidFill>
                   <a:srgbClr val="5F7183"/>
                 </a:solidFill>
@@ -12515,7 +12515,7 @@
               </a:rPr>
               <a:t>Tiết 3 · 第 3 節</a:t>
             </a:r>
-            <a:endParaRPr lang="en-US" sz="640" dirty="0"/>
+            <a:endParaRPr lang="en-US" sz="710" dirty="0"/>
           </a:p>
         </p:txBody>
       </p:sp>
@@ -12545,8 +12545,8 @@
       </p:nvGrpSpPr>
       <p:grpSpPr>
         <a:xfrm>
-          <a:off x="0" y="0"/>
-          <a:ext cx="0" cy="0"/>
+          <a:off x="925172" y="0"/>
+          <a:ext cx="1" cy="1"/>
           <a:chOff x="0" y="0"/>
           <a:chExt cx="0" cy="0"/>
         </a:xfrm>
@@ -12559,8 +12559,8 @@
         </p:nvSpPr>
         <p:spPr>
           <a:xfrm>
-            <a:off x="6130753" y="-947729"/>
-            <a:ext cx="2987610" cy="2987610"/>
+            <a:off x="6322478" y="-1094048"/>
+            <a:ext cx="3355082" cy="3355082"/>
           </a:xfrm>
           <a:prstGeom prst="ellipse">
             <a:avLst/>
@@ -12584,8 +12584,8 @@
         </p:nvSpPr>
         <p:spPr>
           <a:xfrm>
-            <a:off x="7104973" y="1520297"/>
-            <a:ext cx="1688649" cy="1688649"/>
+            <a:off x="7416526" y="1677541"/>
+            <a:ext cx="1896351" cy="1896351"/>
           </a:xfrm>
           <a:prstGeom prst="ellipse">
             <a:avLst/>
@@ -12606,8 +12606,8 @@
         </p:nvSpPr>
         <p:spPr>
           <a:xfrm>
-            <a:off x="1681812" y="364222"/>
-            <a:ext cx="4806155" cy="194844"/>
+            <a:off x="1326323" y="379270"/>
+            <a:ext cx="5397306" cy="218810"/>
           </a:xfrm>
           <a:prstGeom prst="rect">
             <a:avLst/>
@@ -12623,7 +12623,7 @@
               <a:buNone/>
             </a:pPr>
             <a:r>
-              <a:rPr lang="en-US" sz="890" b="1" dirty="0">
+              <a:rPr lang="en-US" sz="1000" b="1" dirty="0">
                 <a:solidFill>
                   <a:srgbClr val="FFB020"/>
                 </a:solidFill>
@@ -12633,7 +12633,7 @@
               </a:rPr>
               <a:t>Lên bảng · 上台（10 分鐘）</a:t>
             </a:r>
-            <a:endParaRPr lang="en-US" sz="890" dirty="0"/>
+            <a:endParaRPr lang="en-US" sz="1000" dirty="0"/>
           </a:p>
         </p:txBody>
       </p:sp>
@@ -12645,8 +12645,8 @@
         </p:nvSpPr>
         <p:spPr>
           <a:xfrm>
-            <a:off x="1681812" y="585045"/>
-            <a:ext cx="5715427" cy="870304"/>
+            <a:off x="1326323" y="627254"/>
+            <a:ext cx="6418418" cy="977350"/>
           </a:xfrm>
           <a:prstGeom prst="rect">
             <a:avLst/>
@@ -12665,7 +12665,7 @@
               <a:buNone/>
             </a:pPr>
             <a:r>
-              <a:rPr lang="en-US" sz="1630" b="1" dirty="0">
+              <a:rPr lang="en-US" sz="1830" b="1" dirty="0">
                 <a:solidFill>
                   <a:srgbClr val="FFFFFF"/>
                 </a:solidFill>
@@ -12675,7 +12675,7 @@
               </a:rPr>
               <a:t>Mỗi nhóm 30 giây: chỉnh ba con số của nhóm cho cả lớp xem, nói một câu vì sao.</a:t>
             </a:r>
-            <a:endParaRPr lang="en-US" sz="1630" dirty="0"/>
+            <a:endParaRPr lang="en-US" sz="1830" dirty="0"/>
           </a:p>
           <a:p>
             <a:pPr indent="0" marL="0">
@@ -12685,7 +12685,7 @@
               <a:buNone/>
             </a:pPr>
             <a:r>
-              <a:rPr lang="en-US" sz="1070" dirty="0">
+              <a:rPr lang="en-US" sz="1200" dirty="0">
                 <a:solidFill>
                   <a:srgbClr val="AFC3D4"/>
                 </a:solidFill>
@@ -12695,7 +12695,7 @@
               </a:rPr>
               <a:t>每組 30 秒：把你們的三個數字調給全班看，說一句為什麼。</a:t>
             </a:r>
-            <a:endParaRPr lang="en-US" sz="1630" dirty="0"/>
+            <a:endParaRPr lang="en-US" sz="1830" dirty="0"/>
           </a:p>
         </p:txBody>
       </p:sp>
@@ -12707,8 +12707,8 @@
         </p:nvSpPr>
         <p:spPr>
           <a:xfrm>
-            <a:off x="1681812" y="1362092"/>
-            <a:ext cx="5780375" cy="441647"/>
+            <a:off x="1326323" y="1499877"/>
+            <a:ext cx="6491354" cy="495969"/>
           </a:xfrm>
           <a:prstGeom prst="roundRect">
             <a:avLst>
@@ -12729,8 +12729,8 @@
         </p:nvSpPr>
         <p:spPr>
           <a:xfrm>
-            <a:off x="1798719" y="1466008"/>
-            <a:ext cx="233813" cy="233813"/>
+            <a:off x="1457609" y="1616575"/>
+            <a:ext cx="262572" cy="262572"/>
           </a:xfrm>
           <a:prstGeom prst="ellipse">
             <a:avLst/>
@@ -12749,8 +12749,8 @@
         </p:nvSpPr>
         <p:spPr>
           <a:xfrm>
-            <a:off x="1798719" y="1485493"/>
-            <a:ext cx="233813" cy="194844"/>
+            <a:off x="1457609" y="1638456"/>
+            <a:ext cx="262572" cy="218810"/>
           </a:xfrm>
           <a:prstGeom prst="rect">
             <a:avLst/>
@@ -12766,7 +12766,7 @@
               <a:buNone/>
             </a:pPr>
             <a:r>
-              <a:rPr lang="en-US" sz="850" b="1" dirty="0">
+              <a:rPr lang="en-US" sz="960" b="1" dirty="0">
                 <a:solidFill>
                   <a:srgbClr val="FFFFFF"/>
                 </a:solidFill>
@@ -12776,7 +12776,7 @@
               </a:rPr>
               <a:t>1</a:t>
             </a:r>
-            <a:endParaRPr lang="en-US" sz="850" dirty="0"/>
+            <a:endParaRPr lang="en-US" sz="960" dirty="0"/>
           </a:p>
         </p:txBody>
       </p:sp>
@@ -12788,8 +12788,8 @@
         </p:nvSpPr>
         <p:spPr>
           <a:xfrm>
-            <a:off x="2149438" y="1394566"/>
-            <a:ext cx="5182853" cy="389688"/>
+            <a:off x="1851466" y="1536345"/>
+            <a:ext cx="5820338" cy="437619"/>
           </a:xfrm>
           <a:prstGeom prst="rect">
             <a:avLst/>
@@ -12808,7 +12808,7 @@
               <a:buNone/>
             </a:pPr>
             <a:r>
-              <a:rPr lang="en-US" sz="890" b="1" dirty="0">
+              <a:rPr lang="en-US" sz="1000" b="1" dirty="0">
                 <a:solidFill>
                   <a:srgbClr val="FFFFFF"/>
                 </a:solidFill>
@@ -12818,7 +12818,7 @@
               </a:rPr>
               <a:t>Thầy ghi lên bảng: số giây trụ được · số tia · chiều dài · góc quét</a:t>
             </a:r>
-            <a:endParaRPr lang="en-US" sz="890" dirty="0"/>
+            <a:endParaRPr lang="en-US" sz="1000" dirty="0"/>
           </a:p>
           <a:p>
             <a:pPr indent="0" marL="0">
@@ -12828,7 +12828,7 @@
               <a:buNone/>
             </a:pPr>
             <a:r>
-              <a:rPr lang="en-US" sz="820" dirty="0">
+              <a:rPr lang="en-US" sz="920" dirty="0">
                 <a:solidFill>
                   <a:srgbClr val="AFC3D4"/>
                 </a:solidFill>
@@ -12838,7 +12838,7 @@
               </a:rPr>
               <a:t>老師在白板上記：撐了幾秒・射線數・長度・張角</a:t>
             </a:r>
-            <a:endParaRPr lang="en-US" sz="890" dirty="0"/>
+            <a:endParaRPr lang="en-US" sz="1000" dirty="0"/>
           </a:p>
         </p:txBody>
       </p:sp>
@@ -12850,8 +12850,8 @@
         </p:nvSpPr>
         <p:spPr>
           <a:xfrm>
-            <a:off x="1681812" y="1868686"/>
-            <a:ext cx="5780375" cy="441647"/>
+            <a:off x="1326323" y="2068782"/>
+            <a:ext cx="6491354" cy="495969"/>
           </a:xfrm>
           <a:prstGeom prst="roundRect">
             <a:avLst>
@@ -12872,8 +12872,8 @@
         </p:nvSpPr>
         <p:spPr>
           <a:xfrm>
-            <a:off x="1798719" y="1972603"/>
-            <a:ext cx="233813" cy="233813"/>
+            <a:off x="1457609" y="2185481"/>
+            <a:ext cx="262572" cy="262572"/>
           </a:xfrm>
           <a:prstGeom prst="ellipse">
             <a:avLst/>
@@ -12892,8 +12892,8 @@
         </p:nvSpPr>
         <p:spPr>
           <a:xfrm>
-            <a:off x="1798719" y="1992087"/>
-            <a:ext cx="233813" cy="194844"/>
+            <a:off x="1457609" y="2207362"/>
+            <a:ext cx="262572" cy="218810"/>
           </a:xfrm>
           <a:prstGeom prst="rect">
             <a:avLst/>
@@ -12909,7 +12909,7 @@
               <a:buNone/>
             </a:pPr>
             <a:r>
-              <a:rPr lang="en-US" sz="850" b="1" dirty="0">
+              <a:rPr lang="en-US" sz="960" b="1" dirty="0">
                 <a:solidFill>
                   <a:srgbClr val="FFFFFF"/>
                 </a:solidFill>
@@ -12919,7 +12919,7 @@
               </a:rPr>
               <a:t>2</a:t>
             </a:r>
-            <a:endParaRPr lang="en-US" sz="850" dirty="0"/>
+            <a:endParaRPr lang="en-US" sz="960" dirty="0"/>
           </a:p>
         </p:txBody>
       </p:sp>
@@ -12931,8 +12931,8 @@
         </p:nvSpPr>
         <p:spPr>
           <a:xfrm>
-            <a:off x="2149438" y="1901160"/>
-            <a:ext cx="5182853" cy="389688"/>
+            <a:off x="1851466" y="2105250"/>
+            <a:ext cx="5820338" cy="437619"/>
           </a:xfrm>
           <a:prstGeom prst="rect">
             <a:avLst/>
@@ -12951,7 +12951,7 @@
               <a:buNone/>
             </a:pPr>
             <a:r>
-              <a:rPr lang="en-US" sz="890" b="1" dirty="0">
+              <a:rPr lang="en-US" sz="1000" b="1" dirty="0">
                 <a:solidFill>
                   <a:srgbClr val="FFFFFF"/>
                 </a:solidFill>
@@ -12961,7 +12961,7 @@
               </a:rPr>
               <a:t>Xem có hai nhóm nào ra giống hệt nhau không. Nhóm trụ lâu nhất dùng ba con số nào?</a:t>
             </a:r>
-            <a:endParaRPr lang="en-US" sz="890" dirty="0"/>
+            <a:endParaRPr lang="en-US" sz="1000" dirty="0"/>
           </a:p>
           <a:p>
             <a:pPr indent="0" marL="0">
@@ -12971,7 +12971,7 @@
               <a:buNone/>
             </a:pPr>
             <a:r>
-              <a:rPr lang="en-US" sz="820" dirty="0">
+              <a:rPr lang="en-US" sz="920" dirty="0">
                 <a:solidFill>
                   <a:srgbClr val="AFC3D4"/>
                 </a:solidFill>
@@ -12981,7 +12981,7 @@
               </a:rPr>
               <a:t>看有沒有兩組完全一樣。撐最久的那一組，用的是哪三個數字？</a:t>
             </a:r>
-            <a:endParaRPr lang="en-US" sz="890" dirty="0"/>
+            <a:endParaRPr lang="en-US" sz="1000" dirty="0"/>
           </a:p>
         </p:txBody>
       </p:sp>
@@ -12993,8 +12993,8 @@
         </p:nvSpPr>
         <p:spPr>
           <a:xfrm>
-            <a:off x="1681812" y="2375281"/>
-            <a:ext cx="5780375" cy="441647"/>
+            <a:off x="1326323" y="2637687"/>
+            <a:ext cx="6491354" cy="495969"/>
           </a:xfrm>
           <a:prstGeom prst="roundRect">
             <a:avLst>
@@ -13015,8 +13015,8 @@
         </p:nvSpPr>
         <p:spPr>
           <a:xfrm>
-            <a:off x="1798719" y="2479198"/>
-            <a:ext cx="233813" cy="233813"/>
+            <a:off x="1457609" y="2754386"/>
+            <a:ext cx="262572" cy="262572"/>
           </a:xfrm>
           <a:prstGeom prst="ellipse">
             <a:avLst/>
@@ -13035,8 +13035,8 @@
         </p:nvSpPr>
         <p:spPr>
           <a:xfrm>
-            <a:off x="1798719" y="2498682"/>
-            <a:ext cx="233813" cy="194844"/>
+            <a:off x="1457609" y="2776267"/>
+            <a:ext cx="262572" cy="218810"/>
           </a:xfrm>
           <a:prstGeom prst="rect">
             <a:avLst/>
@@ -13052,7 +13052,7 @@
               <a:buNone/>
             </a:pPr>
             <a:r>
-              <a:rPr lang="en-US" sz="850" b="1" dirty="0">
+              <a:rPr lang="en-US" sz="960" b="1" dirty="0">
                 <a:solidFill>
                   <a:srgbClr val="FFFFFF"/>
                 </a:solidFill>
@@ -13062,7 +13062,7 @@
               </a:rPr>
               <a:t>3</a:t>
             </a:r>
-            <a:endParaRPr lang="en-US" sz="850" dirty="0"/>
+            <a:endParaRPr lang="en-US" sz="960" dirty="0"/>
           </a:p>
         </p:txBody>
       </p:sp>
@@ -13074,8 +13074,8 @@
         </p:nvSpPr>
         <p:spPr>
           <a:xfrm>
-            <a:off x="2149438" y="2407755"/>
-            <a:ext cx="5182853" cy="389688"/>
+            <a:off x="1851466" y="2674156"/>
+            <a:ext cx="5820338" cy="437619"/>
           </a:xfrm>
           <a:prstGeom prst="rect">
             <a:avLst/>
@@ -13094,7 +13094,7 @@
               <a:buNone/>
             </a:pPr>
             <a:r>
-              <a:rPr lang="en-US" sz="890" b="1" dirty="0">
+              <a:rPr lang="en-US" sz="1000" b="1" dirty="0">
                 <a:solidFill>
                   <a:srgbClr val="FFFFFF"/>
                 </a:solidFill>
@@ -13104,7 +13104,7 @@
               </a:rPr>
               <a:t>Không có đáp án chuẩn — nhưng các con số sẽ tụ lại trong một khoảng.</a:t>
             </a:r>
-            <a:endParaRPr lang="en-US" sz="890" dirty="0"/>
+            <a:endParaRPr lang="en-US" sz="1000" dirty="0"/>
           </a:p>
           <a:p>
             <a:pPr indent="0" marL="0">
@@ -13114,7 +13114,7 @@
               <a:buNone/>
             </a:pPr>
             <a:r>
-              <a:rPr lang="en-US" sz="820" dirty="0">
+              <a:rPr lang="en-US" sz="920" dirty="0">
                 <a:solidFill>
                   <a:srgbClr val="AFC3D4"/>
                 </a:solidFill>
@@ -13124,7 +13124,7 @@
               </a:rPr>
               <a:t>沒有標準答案——但各組的數字會集中在某個範圍。</a:t>
             </a:r>
-            <a:endParaRPr lang="en-US" sz="890" dirty="0"/>
+            <a:endParaRPr lang="en-US" sz="1000" dirty="0"/>
           </a:p>
         </p:txBody>
       </p:sp>
@@ -13136,8 +13136,8 @@
         </p:nvSpPr>
         <p:spPr>
           <a:xfrm>
-            <a:off x="1681812" y="2907855"/>
-            <a:ext cx="5715427" cy="324740"/>
+            <a:off x="1326323" y="3235767"/>
+            <a:ext cx="6418418" cy="364683"/>
           </a:xfrm>
           <a:prstGeom prst="rect">
             <a:avLst/>
@@ -13156,7 +13156,7 @@
               <a:buNone/>
             </a:pPr>
             <a:r>
-              <a:rPr lang="en-US" sz="890" b="1" dirty="0">
+              <a:rPr lang="en-US" sz="1000" b="1" dirty="0">
                 <a:solidFill>
                   <a:srgbClr val="FFB020"/>
                 </a:solidFill>
@@ -13166,7 +13166,7 @@
               </a:rPr>
               <a:t>Khoảng đó = «thông số tối thiểu cho giờ cao điểm Hà Nội». Tuần 5 đối chiếu bảng thật.</a:t>
             </a:r>
-            <a:endParaRPr lang="en-US" sz="890" dirty="0"/>
+            <a:endParaRPr lang="en-US" sz="1000" dirty="0"/>
           </a:p>
           <a:p>
             <a:pPr indent="0" marL="0">
@@ -13176,7 +13176,7 @@
               <a:buNone/>
             </a:pPr>
             <a:r>
-              <a:rPr lang="en-US" sz="820" dirty="0">
+              <a:rPr lang="en-US" sz="920" dirty="0">
                 <a:solidFill>
                   <a:srgbClr val="FFB020"/>
                 </a:solidFill>
@@ -13186,7 +13186,7 @@
               </a:rPr>
               <a:t>那個範圍就是「河內尖峰的最低感測器規格」。第五週拿真規格表來對。</a:t>
             </a:r>
-            <a:endParaRPr lang="en-US" sz="890" dirty="0"/>
+            <a:endParaRPr lang="en-US" sz="1000" dirty="0"/>
           </a:p>
         </p:txBody>
       </p:sp>
@@ -13198,8 +13198,8 @@
         </p:nvSpPr>
         <p:spPr>
           <a:xfrm>
-            <a:off x="1402536" y="3390800"/>
-            <a:ext cx="584532" cy="181855"/>
+            <a:off x="1012696" y="102111"/>
+            <a:ext cx="656429" cy="204222"/>
           </a:xfrm>
           <a:prstGeom prst="rect">
             <a:avLst/>
@@ -13215,7 +13215,7 @@
               <a:buNone/>
             </a:pPr>
             <a:r>
-              <a:rPr lang="en-US" sz="640" dirty="0">
+              <a:rPr lang="en-US" sz="720" dirty="0">
                 <a:solidFill>
                   <a:srgbClr val="9FB3C8"/>
                 </a:solidFill>
@@ -13225,7 +13225,7 @@
               </a:rPr>
               <a:t>8 / 11</a:t>
             </a:r>
-            <a:endParaRPr lang="en-US" sz="640" dirty="0"/>
+            <a:endParaRPr lang="en-US" sz="720" dirty="0"/>
           </a:p>
         </p:txBody>
       </p:sp>
@@ -13237,8 +13237,8 @@
         </p:nvSpPr>
         <p:spPr>
           <a:xfrm>
-            <a:off x="2006553" y="3390800"/>
-            <a:ext cx="1428857" cy="181855"/>
+            <a:off x="1691006" y="102111"/>
+            <a:ext cx="1604604" cy="204222"/>
           </a:xfrm>
           <a:prstGeom prst="rect">
             <a:avLst/>
@@ -13254,7 +13254,7 @@
               <a:buNone/>
             </a:pPr>
             <a:r>
-              <a:rPr lang="en-US" sz="640" dirty="0">
+              <a:rPr lang="en-US" sz="720" dirty="0">
                 <a:solidFill>
                   <a:srgbClr val="9FB3C8"/>
                 </a:solidFill>
@@ -13264,7 +13264,7 @@
               </a:rPr>
               <a:t>Tiết 3 · 第 3 節</a:t>
             </a:r>
-            <a:endParaRPr lang="en-US" sz="640" dirty="0"/>
+            <a:endParaRPr lang="en-US" sz="720" dirty="0"/>
           </a:p>
         </p:txBody>
       </p:sp>
@@ -13294,8 +13294,8 @@
       </p:nvGrpSpPr>
       <p:grpSpPr>
         <a:xfrm>
-          <a:off x="0" y="0"/>
-          <a:ext cx="0" cy="0"/>
+          <a:off x="925172" y="0"/>
+          <a:ext cx="1" cy="1"/>
           <a:chOff x="0" y="0"/>
           <a:chExt cx="0" cy="0"/>
         </a:xfrm>
@@ -13308,8 +13308,8 @@
         </p:nvSpPr>
         <p:spPr>
           <a:xfrm>
-            <a:off x="6130753" y="-947729"/>
-            <a:ext cx="2987610" cy="2987610"/>
+            <a:off x="6322478" y="-1094048"/>
+            <a:ext cx="3355082" cy="3355082"/>
           </a:xfrm>
           <a:prstGeom prst="ellipse">
             <a:avLst/>
@@ -13333,8 +13333,8 @@
         </p:nvSpPr>
         <p:spPr>
           <a:xfrm>
-            <a:off x="7104973" y="1520297"/>
-            <a:ext cx="1688649" cy="1688649"/>
+            <a:off x="7416526" y="1677541"/>
+            <a:ext cx="1896351" cy="1896351"/>
           </a:xfrm>
           <a:prstGeom prst="ellipse">
             <a:avLst/>
@@ -13355,8 +13355,8 @@
         </p:nvSpPr>
         <p:spPr>
           <a:xfrm>
-            <a:off x="1681812" y="364222"/>
-            <a:ext cx="4806155" cy="194844"/>
+            <a:off x="1326323" y="379270"/>
+            <a:ext cx="5397306" cy="218810"/>
           </a:xfrm>
           <a:prstGeom prst="rect">
             <a:avLst/>
@@ -13372,7 +13372,7 @@
               <a:buNone/>
             </a:pPr>
             <a:r>
-              <a:rPr lang="en-US" sz="890" b="1" dirty="0">
+              <a:rPr lang="en-US" sz="1000" b="1" dirty="0">
                 <a:solidFill>
                   <a:srgbClr val="FFB020"/>
                 </a:solidFill>
@@ -13382,7 +13382,7 @@
               </a:rPr>
               <a:t>Hoạt động · 這句話對不對（每題 1 分鐘）</a:t>
             </a:r>
-            <a:endParaRPr lang="en-US" sz="890" dirty="0"/>
+            <a:endParaRPr lang="en-US" sz="1000" dirty="0"/>
           </a:p>
         </p:txBody>
       </p:sp>
@@ -13394,8 +13394,8 @@
         </p:nvSpPr>
         <p:spPr>
           <a:xfrm>
-            <a:off x="1681812" y="585045"/>
-            <a:ext cx="5715427" cy="870304"/>
+            <a:off x="1326323" y="627254"/>
+            <a:ext cx="6418418" cy="977350"/>
           </a:xfrm>
           <a:prstGeom prst="rect">
             <a:avLst/>
@@ -13414,7 +13414,7 @@
               <a:buNone/>
             </a:pPr>
             <a:r>
-              <a:rPr lang="en-US" sz="1630" b="1" dirty="0">
+              <a:rPr lang="en-US" sz="1830" b="1" dirty="0">
                 <a:solidFill>
                   <a:srgbClr val="FFFFFF"/>
                 </a:solidFill>
@@ -13424,7 +13424,7 @@
               </a:rPr>
               <a:t>Bốn câu dưới đây. Đúng hay sai, và nói một câu lý do.</a:t>
             </a:r>
-            <a:endParaRPr lang="en-US" sz="1630" dirty="0"/>
+            <a:endParaRPr lang="en-US" sz="1830" dirty="0"/>
           </a:p>
           <a:p>
             <a:pPr indent="0" marL="0">
@@ -13434,7 +13434,7 @@
               <a:buNone/>
             </a:pPr>
             <a:r>
-              <a:rPr lang="en-US" sz="1070" dirty="0">
+              <a:rPr lang="en-US" sz="1200" dirty="0">
                 <a:solidFill>
                   <a:srgbClr val="AFC3D4"/>
                 </a:solidFill>
@@ -13444,7 +13444,7 @@
               </a:rPr>
               <a:t>下面四句話。對或錯，再說一句理由。</a:t>
             </a:r>
-            <a:endParaRPr lang="en-US" sz="1630" dirty="0"/>
+            <a:endParaRPr lang="en-US" sz="1830" dirty="0"/>
           </a:p>
         </p:txBody>
       </p:sp>
@@ -13456,8 +13456,8 @@
         </p:nvSpPr>
         <p:spPr>
           <a:xfrm>
-            <a:off x="1681812" y="1362092"/>
-            <a:ext cx="5780375" cy="441647"/>
+            <a:off x="1326323" y="1499877"/>
+            <a:ext cx="6491354" cy="495969"/>
           </a:xfrm>
           <a:prstGeom prst="roundRect">
             <a:avLst>
@@ -13478,8 +13478,8 @@
         </p:nvSpPr>
         <p:spPr>
           <a:xfrm>
-            <a:off x="1798719" y="1466008"/>
-            <a:ext cx="233813" cy="233813"/>
+            <a:off x="1457609" y="1616575"/>
+            <a:ext cx="262572" cy="262572"/>
           </a:xfrm>
           <a:prstGeom prst="ellipse">
             <a:avLst/>
@@ -13498,8 +13498,8 @@
         </p:nvSpPr>
         <p:spPr>
           <a:xfrm>
-            <a:off x="1798719" y="1485493"/>
-            <a:ext cx="233813" cy="194844"/>
+            <a:off x="1457609" y="1638456"/>
+            <a:ext cx="262572" cy="218810"/>
           </a:xfrm>
           <a:prstGeom prst="rect">
             <a:avLst/>
@@ -13515,7 +13515,7 @@
               <a:buNone/>
             </a:pPr>
             <a:r>
-              <a:rPr lang="en-US" sz="850" b="1" dirty="0">
+              <a:rPr lang="en-US" sz="960" b="1" dirty="0">
                 <a:solidFill>
                   <a:srgbClr val="FFFFFF"/>
                 </a:solidFill>
@@ -13525,7 +13525,7 @@
               </a:rPr>
               <a:t>1</a:t>
             </a:r>
-            <a:endParaRPr lang="en-US" sz="850" dirty="0"/>
+            <a:endParaRPr lang="en-US" sz="960" dirty="0"/>
           </a:p>
         </p:txBody>
       </p:sp>
@@ -13537,8 +13537,8 @@
         </p:nvSpPr>
         <p:spPr>
           <a:xfrm>
-            <a:off x="2149438" y="1394566"/>
-            <a:ext cx="5182853" cy="389688"/>
+            <a:off x="1851466" y="1536345"/>
+            <a:ext cx="5820338" cy="437619"/>
           </a:xfrm>
           <a:prstGeom prst="rect">
             <a:avLst/>
@@ -13557,7 +13557,7 @@
               <a:buNone/>
             </a:pPr>
             <a:r>
-              <a:rPr lang="en-US" sz="890" b="1" dirty="0">
+              <a:rPr lang="en-US" sz="1000" b="1" dirty="0">
                 <a:solidFill>
                   <a:srgbClr val="FFFFFF"/>
                 </a:solidFill>
@@ -13567,7 +13567,7 @@
               </a:rPr>
               <a:t>① Xe tự lái chạy đủ nhiều km thì chứng minh được nó an toàn.</a:t>
             </a:r>
-            <a:endParaRPr lang="en-US" sz="890" dirty="0"/>
+            <a:endParaRPr lang="en-US" sz="1000" dirty="0"/>
           </a:p>
           <a:p>
             <a:pPr indent="0" marL="0">
@@ -13577,7 +13577,7 @@
               <a:buNone/>
             </a:pPr>
             <a:r>
-              <a:rPr lang="en-US" sz="820" dirty="0">
+              <a:rPr lang="en-US" sz="920" dirty="0">
                 <a:solidFill>
                   <a:srgbClr val="AFC3D4"/>
                 </a:solidFill>
@@ -13587,7 +13587,7 @@
               </a:rPr>
               <a:t>① 自駕車跑得夠多公里，就能證明它安全。</a:t>
             </a:r>
-            <a:endParaRPr lang="en-US" sz="890" dirty="0"/>
+            <a:endParaRPr lang="en-US" sz="1000" dirty="0"/>
           </a:p>
         </p:txBody>
       </p:sp>
@@ -13599,8 +13599,8 @@
         </p:nvSpPr>
         <p:spPr>
           <a:xfrm>
-            <a:off x="1681812" y="1868686"/>
-            <a:ext cx="5780375" cy="441647"/>
+            <a:off x="1326323" y="2068782"/>
+            <a:ext cx="6491354" cy="495969"/>
           </a:xfrm>
           <a:prstGeom prst="roundRect">
             <a:avLst>
@@ -13621,8 +13621,8 @@
         </p:nvSpPr>
         <p:spPr>
           <a:xfrm>
-            <a:off x="1798719" y="1972603"/>
-            <a:ext cx="233813" cy="233813"/>
+            <a:off x="1457609" y="2185481"/>
+            <a:ext cx="262572" cy="262572"/>
           </a:xfrm>
           <a:prstGeom prst="ellipse">
             <a:avLst/>
@@ -13641,8 +13641,8 @@
         </p:nvSpPr>
         <p:spPr>
           <a:xfrm>
-            <a:off x="1798719" y="1992087"/>
-            <a:ext cx="233813" cy="194844"/>
+            <a:off x="1457609" y="2207362"/>
+            <a:ext cx="262572" cy="218810"/>
           </a:xfrm>
           <a:prstGeom prst="rect">
             <a:avLst/>
@@ -13658,7 +13658,7 @@
               <a:buNone/>
             </a:pPr>
             <a:r>
-              <a:rPr lang="en-US" sz="850" b="1" dirty="0">
+              <a:rPr lang="en-US" sz="960" b="1" dirty="0">
                 <a:solidFill>
                   <a:srgbClr val="FFFFFF"/>
                 </a:solidFill>
@@ -13668,7 +13668,7 @@
               </a:rPr>
               <a:t>2</a:t>
             </a:r>
-            <a:endParaRPr lang="en-US" sz="850" dirty="0"/>
+            <a:endParaRPr lang="en-US" sz="960" dirty="0"/>
           </a:p>
         </p:txBody>
       </p:sp>
@@ -13680,8 +13680,8 @@
         </p:nvSpPr>
         <p:spPr>
           <a:xfrm>
-            <a:off x="2149438" y="1901160"/>
-            <a:ext cx="5182853" cy="389688"/>
+            <a:off x="1851466" y="2105250"/>
+            <a:ext cx="5820338" cy="437619"/>
           </a:xfrm>
           <a:prstGeom prst="rect">
             <a:avLst/>
@@ -13700,7 +13700,7 @@
               <a:buNone/>
             </a:pPr>
             <a:r>
-              <a:rPr lang="en-US" sz="890" b="1" dirty="0">
+              <a:rPr lang="en-US" sz="1000" b="1" dirty="0">
                 <a:solidFill>
                   <a:srgbClr val="FFFFFF"/>
                 </a:solidFill>
@@ -13710,7 +13710,7 @@
               </a:rPr>
               <a:t>② Trong mô phỏng không đâm thì xe thật cũng sẽ không đâm.</a:t>
             </a:r>
-            <a:endParaRPr lang="en-US" sz="890" dirty="0"/>
+            <a:endParaRPr lang="en-US" sz="1000" dirty="0"/>
           </a:p>
           <a:p>
             <a:pPr indent="0" marL="0">
@@ -13720,7 +13720,7 @@
               <a:buNone/>
             </a:pPr>
             <a:r>
-              <a:rPr lang="en-US" sz="820" dirty="0">
+              <a:rPr lang="en-US" sz="920" dirty="0">
                 <a:solidFill>
                   <a:srgbClr val="AFC3D4"/>
                 </a:solidFill>
@@ -13730,7 +13730,7 @@
               </a:rPr>
               <a:t>② 在模擬器裡不撞，真車就不會撞。</a:t>
             </a:r>
-            <a:endParaRPr lang="en-US" sz="890" dirty="0"/>
+            <a:endParaRPr lang="en-US" sz="1000" dirty="0"/>
           </a:p>
         </p:txBody>
       </p:sp>
@@ -13742,8 +13742,8 @@
         </p:nvSpPr>
         <p:spPr>
           <a:xfrm>
-            <a:off x="1681812" y="2375281"/>
-            <a:ext cx="5780375" cy="441647"/>
+            <a:off x="1326323" y="2637687"/>
+            <a:ext cx="6491354" cy="495969"/>
           </a:xfrm>
           <a:prstGeom prst="roundRect">
             <a:avLst>
@@ -13764,8 +13764,8 @@
         </p:nvSpPr>
         <p:spPr>
           <a:xfrm>
-            <a:off x="1798719" y="2479198"/>
-            <a:ext cx="233813" cy="233813"/>
+            <a:off x="1457609" y="2754386"/>
+            <a:ext cx="262572" cy="262572"/>
           </a:xfrm>
           <a:prstGeom prst="ellipse">
             <a:avLst/>
@@ -13784,8 +13784,8 @@
         </p:nvSpPr>
         <p:spPr>
           <a:xfrm>
-            <a:off x="1798719" y="2498682"/>
-            <a:ext cx="233813" cy="194844"/>
+            <a:off x="1457609" y="2776267"/>
+            <a:ext cx="262572" cy="218810"/>
           </a:xfrm>
           <a:prstGeom prst="rect">
             <a:avLst/>
@@ -13801,7 +13801,7 @@
               <a:buNone/>
             </a:pPr>
             <a:r>
-              <a:rPr lang="en-US" sz="850" b="1" dirty="0">
+              <a:rPr lang="en-US" sz="960" b="1" dirty="0">
                 <a:solidFill>
                   <a:srgbClr val="FFFFFF"/>
                 </a:solidFill>
@@ -13811,7 +13811,7 @@
               </a:rPr>
               <a:t>3</a:t>
             </a:r>
-            <a:endParaRPr lang="en-US" sz="850" dirty="0"/>
+            <a:endParaRPr lang="en-US" sz="960" dirty="0"/>
           </a:p>
         </p:txBody>
       </p:sp>
@@ -13823,8 +13823,8 @@
         </p:nvSpPr>
         <p:spPr>
           <a:xfrm>
-            <a:off x="2149438" y="2407755"/>
-            <a:ext cx="5182853" cy="389688"/>
+            <a:off x="1851466" y="2674156"/>
+            <a:ext cx="5820338" cy="437619"/>
           </a:xfrm>
           <a:prstGeom prst="rect">
             <a:avLst/>
@@ -13843,7 +13843,7 @@
               <a:buNone/>
             </a:pPr>
             <a:r>
-              <a:rPr lang="en-US" sz="890" b="1" dirty="0">
+              <a:rPr lang="en-US" sz="1000" b="1" dirty="0">
                 <a:solidFill>
                   <a:srgbClr val="FFFFFF"/>
                 </a:solidFill>
@@ -13853,7 +13853,7 @@
               </a:rPr>
               <a:t>③ Càng nhiều tia càng tốt, góc quét càng rộng càng tốt.</a:t>
             </a:r>
-            <a:endParaRPr lang="en-US" sz="890" dirty="0"/>
+            <a:endParaRPr lang="en-US" sz="1000" dirty="0"/>
           </a:p>
           <a:p>
             <a:pPr indent="0" marL="0">
@@ -13863,7 +13863,7 @@
               <a:buNone/>
             </a:pPr>
             <a:r>
-              <a:rPr lang="en-US" sz="820" dirty="0">
+              <a:rPr lang="en-US" sz="920" dirty="0">
                 <a:solidFill>
                   <a:srgbClr val="AFC3D4"/>
                 </a:solidFill>
@@ -13873,7 +13873,7 @@
               </a:rPr>
               <a:t>③ 射線數愈多愈好，張角愈大愈好。</a:t>
             </a:r>
-            <a:endParaRPr lang="en-US" sz="890" dirty="0"/>
+            <a:endParaRPr lang="en-US" sz="1000" dirty="0"/>
           </a:p>
         </p:txBody>
       </p:sp>
@@ -13885,8 +13885,8 @@
         </p:nvSpPr>
         <p:spPr>
           <a:xfrm>
-            <a:off x="1681812" y="2907855"/>
-            <a:ext cx="5715427" cy="324740"/>
+            <a:off x="1326323" y="3235767"/>
+            <a:ext cx="6418418" cy="364683"/>
           </a:xfrm>
           <a:prstGeom prst="rect">
             <a:avLst/>
@@ -13905,7 +13905,7 @@
               <a:buNone/>
             </a:pPr>
             <a:r>
-              <a:rPr lang="en-US" sz="890" b="1" dirty="0">
+              <a:rPr lang="en-US" sz="1000" b="1" dirty="0">
                 <a:solidFill>
                   <a:srgbClr val="FFB020"/>
                 </a:solidFill>
@@ -13915,7 +13915,7 @@
               </a:rPr>
               <a:t>④ Mô phỏng có sẵn là test được đường Việt Nam? Thế giới trong đó là của ai?</a:t>
             </a:r>
-            <a:endParaRPr lang="en-US" sz="890" dirty="0"/>
+            <a:endParaRPr lang="en-US" sz="1000" dirty="0"/>
           </a:p>
           <a:p>
             <a:pPr indent="0" marL="0">
@@ -13925,7 +13925,7 @@
               <a:buNone/>
             </a:pPr>
             <a:r>
-              <a:rPr lang="en-US" sz="820" dirty="0">
+              <a:rPr lang="en-US" sz="920" dirty="0">
                 <a:solidFill>
                   <a:srgbClr val="FFB020"/>
                 </a:solidFill>
@@ -13935,7 +13935,7 @@
               </a:rPr>
               <a:t>④ 現成模擬器就能測越南的路況？裡面的世界是照誰做的？</a:t>
             </a:r>
-            <a:endParaRPr lang="en-US" sz="890" dirty="0"/>
+            <a:endParaRPr lang="en-US" sz="1000" dirty="0"/>
           </a:p>
         </p:txBody>
       </p:sp>
@@ -13947,8 +13947,8 @@
         </p:nvSpPr>
         <p:spPr>
           <a:xfrm>
-            <a:off x="1402536" y="3390800"/>
-            <a:ext cx="584532" cy="181855"/>
+            <a:off x="1012696" y="102111"/>
+            <a:ext cx="656429" cy="204222"/>
           </a:xfrm>
           <a:prstGeom prst="rect">
             <a:avLst/>
@@ -13964,7 +13964,7 @@
               <a:buNone/>
             </a:pPr>
             <a:r>
-              <a:rPr lang="en-US" sz="640" dirty="0">
+              <a:rPr lang="en-US" sz="720" dirty="0">
                 <a:solidFill>
                   <a:srgbClr val="9FB3C8"/>
                 </a:solidFill>
@@ -13974,7 +13974,7 @@
               </a:rPr>
               <a:t>9 / 11</a:t>
             </a:r>
-            <a:endParaRPr lang="en-US" sz="640" dirty="0"/>
+            <a:endParaRPr lang="en-US" sz="720" dirty="0"/>
           </a:p>
         </p:txBody>
       </p:sp>
@@ -13986,8 +13986,8 @@
         </p:nvSpPr>
         <p:spPr>
           <a:xfrm>
-            <a:off x="2006553" y="3390800"/>
-            <a:ext cx="1428857" cy="181855"/>
+            <a:off x="1691006" y="102111"/>
+            <a:ext cx="1604604" cy="204222"/>
           </a:xfrm>
           <a:prstGeom prst="rect">
             <a:avLst/>
@@ -14003,7 +14003,7 @@
               <a:buNone/>
             </a:pPr>
             <a:r>
-              <a:rPr lang="en-US" sz="640" dirty="0">
+              <a:rPr lang="en-US" sz="720" dirty="0">
                 <a:solidFill>
                   <a:srgbClr val="9FB3C8"/>
                 </a:solidFill>
@@ -14013,7 +14013,7 @@
               </a:rPr>
               <a:t>Tiết 3 · 第 3 節</a:t>
             </a:r>
-            <a:endParaRPr lang="en-US" sz="640" dirty="0"/>
+            <a:endParaRPr lang="en-US" sz="720" dirty="0"/>
           </a:p>
         </p:txBody>
       </p:sp>

--- a/第四週(10-01)/第四週_第3節_簡報.pptx
+++ b/第四週(10-01)/第四週_第3節_簡報.pptx
@@ -437,11 +437,154 @@
                 <a:spcPct val="115000"/>
               </a:lnSpc>
               <a:spcAft>
-                <a:spcPts val="600"/>
-              </a:spcAft>
-            </a:pPr>
-            <a:r>
-              <a:rPr sz="1200" lang="zh-TW" dirty="0">
+                <a:spcPts val="575"/>
+              </a:spcAft>
+            </a:pPr>
+            <a:r>
+              <a:rPr sz="1150" b="1" lang="zh-TW" dirty="0">
+                <a:solidFill>
+                  <a:srgbClr val="000000"/>
+                </a:solidFill>
+                <a:latin typeface="Arial Unicode MS"/>
+                <a:ea typeface="Arial Unicode MS"/>
+                <a:cs typeface="Arial Unicode MS"/>
+              </a:rPr>
+              <a:t>▍這一張要做什麼</a:t>
+            </a:r>
+            <a:r>
+              <a:rPr sz="1150" lang="zh-TW" dirty="0">
+                <a:solidFill>
+                  <a:srgbClr val="000000"/>
+                </a:solidFill>
+                <a:latin typeface="Arial Unicode MS"/>
+                <a:ea typeface="Arial Unicode MS"/>
+                <a:cs typeface="Arial Unicode MS"/>
+              </a:rPr>
+              <a:t>
+</a:t>
+            </a:r>
+          </a:p>
+          <a:p>
+            <a:pPr algn="l">
+              <a:lnSpc>
+                <a:spcPct val="115000"/>
+              </a:lnSpc>
+              <a:spcAft>
+                <a:spcPts val="575"/>
+              </a:spcAft>
+            </a:pPr>
+            <a:r>
+              <a:rPr sz="1150" lang="zh-TW" dirty="0">
+                <a:solidFill>
+                  <a:srgbClr val="000000"/>
+                </a:solidFill>
+                <a:latin typeface="Arial Unicode MS"/>
+                <a:ea typeface="Arial Unicode MS"/>
+                <a:cs typeface="Arial Unicode MS"/>
+              </a:rPr>
+              <a:t>第三節開場。今天整節上機，目標是全班一起掃出「河內尖峰的最低感測器規格」。
+</a:t>
+            </a:r>
+          </a:p>
+          <a:p>
+            <a:pPr algn="l">
+              <a:lnSpc>
+                <a:spcPct val="115000"/>
+              </a:lnSpc>
+              <a:spcAft>
+                <a:spcPts val="575"/>
+              </a:spcAft>
+            </a:pPr>
+            <a:r>
+              <a:rPr sz="1150" b="1" lang="zh-TW" dirty="0">
+                <a:solidFill>
+                  <a:srgbClr val="000000"/>
+                </a:solidFill>
+                <a:latin typeface="Arial Unicode MS"/>
+                <a:ea typeface="Arial Unicode MS"/>
+                <a:cs typeface="Arial Unicode MS"/>
+              </a:rPr>
+              <a:t>▍畫面上圈這裡</a:t>
+            </a:r>
+            <a:r>
+              <a:rPr sz="1150" lang="zh-TW" dirty="0">
+                <a:solidFill>
+                  <a:srgbClr val="000000"/>
+                </a:solidFill>
+                <a:latin typeface="Arial Unicode MS"/>
+                <a:ea typeface="Arial Unicode MS"/>
+                <a:cs typeface="Arial Unicode MS"/>
+              </a:rPr>
+              <a:t>
+</a:t>
+            </a:r>
+          </a:p>
+          <a:p>
+            <a:pPr algn="l">
+              <a:lnSpc>
+                <a:spcPct val="115000"/>
+              </a:lnSpc>
+              <a:spcAft>
+                <a:spcPts val="575"/>
+              </a:spcAft>
+            </a:pPr>
+            <a:r>
+              <a:rPr sz="1150" lang="zh-TW" dirty="0">
+                <a:solidFill>
+                  <a:srgbClr val="000000"/>
+                </a:solidFill>
+                <a:latin typeface="Arial Unicode MS"/>
+                <a:ea typeface="Arial Unicode MS"/>
+                <a:cs typeface="Arial Unicode MS"/>
+              </a:rPr>
+              <a:t>圈主標「為河內配一組感測器」。說明各組掃出來的數字最後會合成一張表。
+</a:t>
+            </a:r>
+          </a:p>
+          <a:p>
+            <a:pPr algn="l">
+              <a:lnSpc>
+                <a:spcPct val="115000"/>
+              </a:lnSpc>
+              <a:spcAft>
+                <a:spcPts val="575"/>
+              </a:spcAft>
+            </a:pPr>
+            <a:r>
+              <a:rPr sz="1150" b="1" lang="zh-TW" dirty="0">
+                <a:solidFill>
+                  <a:srgbClr val="000000"/>
+                </a:solidFill>
+                <a:latin typeface="Arial Unicode MS"/>
+                <a:ea typeface="Arial Unicode MS"/>
+                <a:cs typeface="Arial Unicode MS"/>
+              </a:rPr>
+              <a:t>▍以下照著唸</a:t>
+            </a:r>
+            <a:r>
+              <a:rPr sz="1150" lang="zh-TW" dirty="0">
+                <a:solidFill>
+                  <a:srgbClr val="000000"/>
+                </a:solidFill>
+                <a:latin typeface="Arial Unicode MS"/>
+                <a:ea typeface="Arial Unicode MS"/>
+                <a:cs typeface="Arial Unicode MS"/>
+              </a:rPr>
+              <a:t>
+</a:t>
+            </a:r>
+          </a:p>
+          <a:p>
+            <a:pPr algn="l">
+              <a:lnSpc>
+                <a:spcPct val="115000"/>
+              </a:lnSpc>
+              <a:spcAft>
+                <a:spcPts val="575"/>
+              </a:spcAft>
+            </a:pPr>
+            <a:r>
+              <a:rPr sz="1150" lang="zh-TW" dirty="0">
                 <a:solidFill>
                   <a:srgbClr val="000000"/>
                 </a:solidFill>
@@ -459,11 +602,11 @@
                 <a:spcPct val="115000"/>
               </a:lnSpc>
               <a:spcAft>
-                <a:spcPts val="600"/>
-              </a:spcAft>
-            </a:pPr>
-            <a:r>
-              <a:rPr sz="1200" lang="zh-TW" dirty="0">
+                <a:spcPts val="575"/>
+              </a:spcAft>
+            </a:pPr>
+            <a:r>
+              <a:rPr sz="1150" lang="zh-TW" dirty="0">
                 <a:solidFill>
                   <a:srgbClr val="000000"/>
                 </a:solidFill>
@@ -481,11 +624,11 @@
                 <a:spcPct val="115000"/>
               </a:lnSpc>
               <a:spcAft>
-                <a:spcPts val="600"/>
-              </a:spcAft>
-            </a:pPr>
-            <a:r>
-              <a:rPr sz="1200" lang="zh-TW" dirty="0">
+                <a:spcPts val="575"/>
+              </a:spcAft>
+            </a:pPr>
+            <a:r>
+              <a:rPr sz="1150" lang="zh-TW" dirty="0">
                 <a:solidFill>
                   <a:srgbClr val="000000"/>
                 </a:solidFill>
@@ -496,7 +639,7 @@
               <a:t>先說清楚</a:t>
             </a:r>
             <a:r>
-              <a:rPr sz="1200" b="1" lang="zh-TW" dirty="0">
+              <a:rPr sz="1150" b="1" lang="zh-TW" dirty="0">
                 <a:solidFill>
                   <a:srgbClr val="000000"/>
                 </a:solidFill>
@@ -507,7 +650,7 @@
               <a:t>為什麼要做這件事</a:t>
             </a:r>
             <a:r>
-              <a:rPr sz="1200" lang="zh-TW" dirty="0">
+              <a:rPr sz="1150" lang="zh-TW" dirty="0">
                 <a:solidFill>
                   <a:srgbClr val="000000"/>
                 </a:solidFill>
@@ -525,11 +668,11 @@
                 <a:spcPct val="115000"/>
               </a:lnSpc>
               <a:spcAft>
-                <a:spcPts val="600"/>
-              </a:spcAft>
-            </a:pPr>
-            <a:r>
-              <a:rPr sz="1200" lang="zh-TW" dirty="0">
+                <a:spcPts val="575"/>
+              </a:spcAft>
+            </a:pPr>
+            <a:r>
+              <a:rPr sz="1150" lang="zh-TW" dirty="0">
                 <a:solidFill>
                   <a:srgbClr val="000000"/>
                 </a:solidFill>
@@ -540,7 +683,7 @@
               <a:t>前兩節我們講了三個規格、三種落差、場景三層。這些都是知識。現在要各位做的，是把這些知識變成</a:t>
             </a:r>
             <a:r>
-              <a:rPr sz="1200" b="1" lang="zh-TW" dirty="0">
+              <a:rPr sz="1150" b="1" lang="zh-TW" dirty="0">
                 <a:solidFill>
                   <a:srgbClr val="000000"/>
                 </a:solidFill>
@@ -551,7 +694,7 @@
               <a:t>三個數字</a:t>
             </a:r>
             <a:r>
-              <a:rPr sz="1200" lang="zh-TW" dirty="0">
+              <a:rPr sz="1150" lang="zh-TW" dirty="0">
                 <a:solidFill>
                   <a:srgbClr val="000000"/>
                 </a:solidFill>
@@ -569,11 +712,11 @@
                 <a:spcPct val="115000"/>
               </a:lnSpc>
               <a:spcAft>
-                <a:spcPts val="600"/>
-              </a:spcAft>
-            </a:pPr>
-            <a:r>
-              <a:rPr sz="1200" lang="zh-TW" dirty="0">
+                <a:spcPts val="575"/>
+              </a:spcAft>
+            </a:pPr>
+            <a:r>
+              <a:rPr sz="1150" lang="zh-TW" dirty="0">
                 <a:solidFill>
                   <a:srgbClr val="000000"/>
                 </a:solidFill>
@@ -591,11 +734,11 @@
                 <a:spcPct val="115000"/>
               </a:lnSpc>
               <a:spcAft>
-                <a:spcPts val="600"/>
-              </a:spcAft>
-            </a:pPr>
-            <a:r>
-              <a:rPr sz="1200" lang="zh-TW" dirty="0">
+                <a:spcPts val="575"/>
+              </a:spcAft>
+            </a:pPr>
+            <a:r>
+              <a:rPr sz="1150" lang="zh-TW" dirty="0">
                 <a:solidFill>
                   <a:srgbClr val="000000"/>
                 </a:solidFill>
@@ -712,11 +855,154 @@
                 <a:spcPct val="115000"/>
               </a:lnSpc>
               <a:spcAft>
-                <a:spcPts val="575"/>
-              </a:spcAft>
-            </a:pPr>
-            <a:r>
-              <a:rPr sz="1150" lang="zh-TW" dirty="0">
+                <a:spcPts val="500"/>
+              </a:spcAft>
+            </a:pPr>
+            <a:r>
+              <a:rPr sz="1000" b="1" lang="zh-TW" dirty="0">
+                <a:solidFill>
+                  <a:srgbClr val="000000"/>
+                </a:solidFill>
+                <a:latin typeface="Arial Unicode MS"/>
+                <a:ea typeface="Arial Unicode MS"/>
+                <a:cs typeface="Arial Unicode MS"/>
+              </a:rPr>
+              <a:t>▍這一張要做什麼</a:t>
+            </a:r>
+            <a:r>
+              <a:rPr sz="1000" lang="zh-TW" dirty="0">
+                <a:solidFill>
+                  <a:srgbClr val="000000"/>
+                </a:solidFill>
+                <a:latin typeface="Arial Unicode MS"/>
+                <a:ea typeface="Arial Unicode MS"/>
+                <a:cs typeface="Arial Unicode MS"/>
+              </a:rPr>
+              <a:t>
+</a:t>
+            </a:r>
+          </a:p>
+          <a:p>
+            <a:pPr algn="l">
+              <a:lnSpc>
+                <a:spcPct val="115000"/>
+              </a:lnSpc>
+              <a:spcAft>
+                <a:spcPts val="500"/>
+              </a:spcAft>
+            </a:pPr>
+            <a:r>
+              <a:rPr sz="1000" lang="zh-TW" dirty="0">
+                <a:solidFill>
+                  <a:srgbClr val="000000"/>
+                </a:solidFill>
+                <a:latin typeface="Arial Unicode MS"/>
+                <a:ea typeface="Arial Unicode MS"/>
+                <a:cs typeface="Arial Unicode MS"/>
+              </a:rPr>
+              <a:t>公布答案並解釋每一句錯在哪裡。
+</a:t>
+            </a:r>
+          </a:p>
+          <a:p>
+            <a:pPr algn="l">
+              <a:lnSpc>
+                <a:spcPct val="115000"/>
+              </a:lnSpc>
+              <a:spcAft>
+                <a:spcPts val="500"/>
+              </a:spcAft>
+            </a:pPr>
+            <a:r>
+              <a:rPr sz="1000" b="1" lang="zh-TW" dirty="0">
+                <a:solidFill>
+                  <a:srgbClr val="000000"/>
+                </a:solidFill>
+                <a:latin typeface="Arial Unicode MS"/>
+                <a:ea typeface="Arial Unicode MS"/>
+                <a:cs typeface="Arial Unicode MS"/>
+              </a:rPr>
+              <a:t>▍畫面上圈這裡</a:t>
+            </a:r>
+            <a:r>
+              <a:rPr sz="1000" lang="zh-TW" dirty="0">
+                <a:solidFill>
+                  <a:srgbClr val="000000"/>
+                </a:solidFill>
+                <a:latin typeface="Arial Unicode MS"/>
+                <a:ea typeface="Arial Unicode MS"/>
+                <a:cs typeface="Arial Unicode MS"/>
+              </a:rPr>
+              <a:t>
+</a:t>
+            </a:r>
+          </a:p>
+          <a:p>
+            <a:pPr algn="l">
+              <a:lnSpc>
+                <a:spcPct val="115000"/>
+              </a:lnSpc>
+              <a:spcAft>
+                <a:spcPts val="500"/>
+              </a:spcAft>
+            </a:pPr>
+            <a:r>
+              <a:rPr sz="1000" lang="zh-TW" dirty="0">
+                <a:solidFill>
+                  <a:srgbClr val="000000"/>
+                </a:solidFill>
+                <a:latin typeface="Arial Unicode MS"/>
+                <a:ea typeface="Arial Unicode MS"/>
+                <a:cs typeface="Arial Unicode MS"/>
+              </a:rPr>
+              <a:t>四句依序圈。第三句要回到今天各組自己掃出來的結果，不要只用道理講。
+</a:t>
+            </a:r>
+          </a:p>
+          <a:p>
+            <a:pPr algn="l">
+              <a:lnSpc>
+                <a:spcPct val="115000"/>
+              </a:lnSpc>
+              <a:spcAft>
+                <a:spcPts val="500"/>
+              </a:spcAft>
+            </a:pPr>
+            <a:r>
+              <a:rPr sz="1000" b="1" lang="zh-TW" dirty="0">
+                <a:solidFill>
+                  <a:srgbClr val="000000"/>
+                </a:solidFill>
+                <a:latin typeface="Arial Unicode MS"/>
+                <a:ea typeface="Arial Unicode MS"/>
+                <a:cs typeface="Arial Unicode MS"/>
+              </a:rPr>
+              <a:t>▍以下照著唸</a:t>
+            </a:r>
+            <a:r>
+              <a:rPr sz="1000" lang="zh-TW" dirty="0">
+                <a:solidFill>
+                  <a:srgbClr val="000000"/>
+                </a:solidFill>
+                <a:latin typeface="Arial Unicode MS"/>
+                <a:ea typeface="Arial Unicode MS"/>
+                <a:cs typeface="Arial Unicode MS"/>
+              </a:rPr>
+              <a:t>
+</a:t>
+            </a:r>
+          </a:p>
+          <a:p>
+            <a:pPr algn="l">
+              <a:lnSpc>
+                <a:spcPct val="115000"/>
+              </a:lnSpc>
+              <a:spcAft>
+                <a:spcPts val="500"/>
+              </a:spcAft>
+            </a:pPr>
+            <a:r>
+              <a:rPr sz="1000" lang="zh-TW" dirty="0">
                 <a:solidFill>
                   <a:srgbClr val="000000"/>
                 </a:solidFill>
@@ -727,7 +1013,7 @@
               <a:t>答案：</a:t>
             </a:r>
             <a:r>
-              <a:rPr sz="1150" b="1" lang="zh-TW" dirty="0">
+              <a:rPr sz="1000" b="1" lang="zh-TW" dirty="0">
                 <a:solidFill>
                   <a:srgbClr val="000000"/>
                 </a:solidFill>
@@ -738,7 +1024,7 @@
               <a:t>四句都錯。</a:t>
             </a:r>
             <a:r>
-              <a:rPr sz="1150" lang="zh-TW" dirty="0">
+              <a:rPr sz="1000" lang="zh-TW" dirty="0">
                 <a:solidFill>
                   <a:srgbClr val="000000"/>
                 </a:solidFill>
@@ -756,11 +1042,11 @@
                 <a:spcPct val="115000"/>
               </a:lnSpc>
               <a:spcAft>
-                <a:spcPts val="575"/>
-              </a:spcAft>
-            </a:pPr>
-            <a:r>
-              <a:rPr sz="1150" b="1" lang="zh-TW" dirty="0">
+                <a:spcPts val="500"/>
+              </a:spcAft>
+            </a:pPr>
+            <a:r>
+              <a:rPr sz="1000" b="1" lang="zh-TW" dirty="0">
                 <a:solidFill>
                   <a:srgbClr val="000000"/>
                 </a:solidFill>
@@ -771,7 +1057,7 @@
               <a:t>第一句</a:t>
             </a:r>
             <a:r>
-              <a:rPr sz="1150" lang="zh-TW" dirty="0">
+              <a:rPr sz="1000" lang="zh-TW" dirty="0">
                 <a:solidFill>
                   <a:srgbClr val="000000"/>
                 </a:solidFill>
@@ -789,11 +1075,11 @@
                 <a:spcPct val="115000"/>
               </a:lnSpc>
               <a:spcAft>
-                <a:spcPts val="575"/>
-              </a:spcAft>
-            </a:pPr>
-            <a:r>
-              <a:rPr sz="1150" b="1" lang="zh-TW" dirty="0">
+                <a:spcPts val="500"/>
+              </a:spcAft>
+            </a:pPr>
+            <a:r>
+              <a:rPr sz="1000" b="1" lang="zh-TW" dirty="0">
                 <a:solidFill>
                   <a:srgbClr val="000000"/>
                 </a:solidFill>
@@ -804,7 +1090,7 @@
               <a:t>第二句</a:t>
             </a:r>
             <a:r>
-              <a:rPr sz="1150" lang="zh-TW" dirty="0">
+              <a:rPr sz="1000" lang="zh-TW" dirty="0">
                 <a:solidFill>
                   <a:srgbClr val="000000"/>
                 </a:solidFill>
@@ -822,11 +1108,11 @@
                 <a:spcPct val="115000"/>
               </a:lnSpc>
               <a:spcAft>
-                <a:spcPts val="575"/>
-              </a:spcAft>
-            </a:pPr>
-            <a:r>
-              <a:rPr sz="1150" lang="zh-TW" dirty="0">
+                <a:spcPts val="500"/>
+              </a:spcAft>
+            </a:pPr>
+            <a:r>
+              <a:rPr sz="1000" lang="zh-TW" dirty="0">
                 <a:solidFill>
                   <a:srgbClr val="000000"/>
                 </a:solidFill>
@@ -837,7 +1123,7 @@
               <a:t>（這裡給一個比喻）模擬是一個</a:t>
             </a:r>
             <a:r>
-              <a:rPr sz="1150" b="1" lang="zh-TW" dirty="0">
+              <a:rPr sz="1000" b="1" lang="zh-TW" dirty="0">
                 <a:solidFill>
                   <a:srgbClr val="000000"/>
                 </a:solidFill>
@@ -848,7 +1134,7 @@
               <a:t>篩子</a:t>
             </a:r>
             <a:r>
-              <a:rPr sz="1150" lang="zh-TW" dirty="0">
+              <a:rPr sz="1000" lang="zh-TW" dirty="0">
                 <a:solidFill>
                   <a:srgbClr val="000000"/>
                 </a:solidFill>
@@ -859,7 +1145,7 @@
               <a:t>。通過篩子不代表你安全，只代表你</a:t>
             </a:r>
             <a:r>
-              <a:rPr sz="1150" b="1" lang="zh-TW" dirty="0">
+              <a:rPr sz="1000" b="1" lang="zh-TW" dirty="0">
                 <a:solidFill>
                   <a:srgbClr val="000000"/>
                 </a:solidFill>
@@ -870,7 +1156,7 @@
               <a:t>拿到了上真車測試的門票</a:t>
             </a:r>
             <a:r>
-              <a:rPr sz="1150" lang="zh-TW" dirty="0">
+              <a:rPr sz="1000" lang="zh-TW" dirty="0">
                 <a:solidFill>
                   <a:srgbClr val="000000"/>
                 </a:solidFill>
@@ -888,11 +1174,11 @@
                 <a:spcPct val="115000"/>
               </a:lnSpc>
               <a:spcAft>
-                <a:spcPts val="575"/>
-              </a:spcAft>
-            </a:pPr>
-            <a:r>
-              <a:rPr sz="1150" b="1" lang="zh-TW" dirty="0">
+                <a:spcPts val="500"/>
+              </a:spcAft>
+            </a:pPr>
+            <a:r>
+              <a:rPr sz="1000" b="1" lang="zh-TW" dirty="0">
                 <a:solidFill>
                   <a:srgbClr val="000000"/>
                 </a:solidFill>
@@ -903,7 +1189,7 @@
               <a:t>第三句</a:t>
             </a:r>
             <a:r>
-              <a:rPr sz="1150" lang="zh-TW" dirty="0">
+              <a:rPr sz="1000" lang="zh-TW" dirty="0">
                 <a:solidFill>
                   <a:srgbClr val="000000"/>
                 </a:solidFill>
@@ -921,11 +1207,11 @@
                 <a:spcPct val="115000"/>
               </a:lnSpc>
               <a:spcAft>
-                <a:spcPts val="575"/>
-              </a:spcAft>
-            </a:pPr>
-            <a:r>
-              <a:rPr sz="1150" lang="zh-TW" dirty="0">
+                <a:spcPts val="500"/>
+              </a:spcAft>
+            </a:pPr>
+            <a:r>
+              <a:rPr sz="1000" lang="zh-TW" dirty="0">
                 <a:solidFill>
                   <a:srgbClr val="000000"/>
                 </a:solidFill>
@@ -936,7 +1222,7 @@
               <a:t>各位今天掃參數的時候已經自己撞上另一半的答案了：</a:t>
             </a:r>
             <a:r>
-              <a:rPr sz="1150" b="1" lang="zh-TW" dirty="0">
+              <a:rPr sz="1000" b="1" lang="zh-TW" dirty="0">
                 <a:solidFill>
                   <a:srgbClr val="000000"/>
                 </a:solidFill>
@@ -947,7 +1233,7 @@
               <a:t>射線長度過了煞停距離那個門檻之後，再加完全沒有用。</a:t>
             </a:r>
             <a:r>
-              <a:rPr sz="1150" lang="zh-TW" dirty="0">
+              <a:rPr sz="1000" lang="zh-TW" dirty="0">
                 <a:solidFill>
                   <a:srgbClr val="000000"/>
                 </a:solidFill>
@@ -965,11 +1251,11 @@
                 <a:spcPct val="115000"/>
               </a:lnSpc>
               <a:spcAft>
-                <a:spcPts val="575"/>
-              </a:spcAft>
-            </a:pPr>
-            <a:r>
-              <a:rPr sz="1150" b="1" lang="zh-TW" dirty="0">
+                <a:spcPts val="500"/>
+              </a:spcAft>
+            </a:pPr>
+            <a:r>
+              <a:rPr sz="1000" b="1" lang="zh-TW" dirty="0">
                 <a:solidFill>
                   <a:srgbClr val="000000"/>
                 </a:solidFill>
@@ -980,7 +1266,7 @@
               <a:t>第四句</a:t>
             </a:r>
             <a:r>
-              <a:rPr sz="1150" lang="zh-TW" dirty="0">
+              <a:rPr sz="1000" lang="zh-TW" dirty="0">
                 <a:solidFill>
                   <a:srgbClr val="000000"/>
                 </a:solidFill>
@@ -998,11 +1284,11 @@
                 <a:spcPct val="115000"/>
               </a:lnSpc>
               <a:spcAft>
-                <a:spcPts val="575"/>
-              </a:spcAft>
-            </a:pPr>
-            <a:r>
-              <a:rPr sz="1150" lang="zh-TW" dirty="0">
+                <a:spcPts val="500"/>
+              </a:spcAft>
+            </a:pPr>
+            <a:r>
+              <a:rPr sz="1000" lang="zh-TW" dirty="0">
                 <a:solidFill>
                   <a:srgbClr val="000000"/>
                 </a:solidFill>
@@ -1119,11 +1405,154 @@
                 <a:spcPct val="115000"/>
               </a:lnSpc>
               <a:spcAft>
-                <a:spcPts val="600"/>
-              </a:spcAft>
-            </a:pPr>
-            <a:r>
-              <a:rPr sz="1200" lang="zh-TW" dirty="0">
+                <a:spcPts val="500"/>
+              </a:spcAft>
+            </a:pPr>
+            <a:r>
+              <a:rPr sz="1000" b="1" lang="zh-TW" dirty="0">
+                <a:solidFill>
+                  <a:srgbClr val="000000"/>
+                </a:solidFill>
+                <a:latin typeface="Arial Unicode MS"/>
+                <a:ea typeface="Arial Unicode MS"/>
+                <a:cs typeface="Arial Unicode MS"/>
+              </a:rPr>
+              <a:t>▍這一張要做什麼</a:t>
+            </a:r>
+            <a:r>
+              <a:rPr sz="1000" lang="zh-TW" dirty="0">
+                <a:solidFill>
+                  <a:srgbClr val="000000"/>
+                </a:solidFill>
+                <a:latin typeface="Arial Unicode MS"/>
+                <a:ea typeface="Arial Unicode MS"/>
+                <a:cs typeface="Arial Unicode MS"/>
+              </a:rPr>
+              <a:t>
+</a:t>
+            </a:r>
+          </a:p>
+          <a:p>
+            <a:pPr algn="l">
+              <a:lnSpc>
+                <a:spcPct val="115000"/>
+              </a:lnSpc>
+              <a:spcAft>
+                <a:spcPts val="500"/>
+              </a:spcAft>
+            </a:pPr>
+            <a:r>
+              <a:rPr sz="1000" lang="zh-TW" dirty="0">
+                <a:solidFill>
+                  <a:srgbClr val="000000"/>
+                </a:solidFill>
+                <a:latin typeface="Arial Unicode MS"/>
+                <a:ea typeface="Arial Unicode MS"/>
+                <a:cs typeface="Arial Unicode MS"/>
+              </a:rPr>
+              <a:t>下週預告，把今天掃出來的規格接到第五週的真規格表。
+</a:t>
+            </a:r>
+          </a:p>
+          <a:p>
+            <a:pPr algn="l">
+              <a:lnSpc>
+                <a:spcPct val="115000"/>
+              </a:lnSpc>
+              <a:spcAft>
+                <a:spcPts val="500"/>
+              </a:spcAft>
+            </a:pPr>
+            <a:r>
+              <a:rPr sz="1000" b="1" lang="zh-TW" dirty="0">
+                <a:solidFill>
+                  <a:srgbClr val="000000"/>
+                </a:solidFill>
+                <a:latin typeface="Arial Unicode MS"/>
+                <a:ea typeface="Arial Unicode MS"/>
+                <a:cs typeface="Arial Unicode MS"/>
+              </a:rPr>
+              <a:t>▍畫面上圈這裡</a:t>
+            </a:r>
+            <a:r>
+              <a:rPr sz="1000" lang="zh-TW" dirty="0">
+                <a:solidFill>
+                  <a:srgbClr val="000000"/>
+                </a:solidFill>
+                <a:latin typeface="Arial Unicode MS"/>
+                <a:ea typeface="Arial Unicode MS"/>
+                <a:cs typeface="Arial Unicode MS"/>
+              </a:rPr>
+              <a:t>
+</a:t>
+            </a:r>
+          </a:p>
+          <a:p>
+            <a:pPr algn="l">
+              <a:lnSpc>
+                <a:spcPct val="115000"/>
+              </a:lnSpc>
+              <a:spcAft>
+                <a:spcPts val="500"/>
+              </a:spcAft>
+            </a:pPr>
+            <a:r>
+              <a:rPr sz="1000" lang="zh-TW" dirty="0">
+                <a:solidFill>
+                  <a:srgbClr val="000000"/>
+                </a:solidFill>
+                <a:latin typeface="Arial Unicode MS"/>
+                <a:ea typeface="Arial Unicode MS"/>
+                <a:cs typeface="Arial Unicode MS"/>
+              </a:rPr>
+              <a:t>圈「真規格表」，告訴他們今天白板那張照片下週第一節會拿出來對照。
+</a:t>
+            </a:r>
+          </a:p>
+          <a:p>
+            <a:pPr algn="l">
+              <a:lnSpc>
+                <a:spcPct val="115000"/>
+              </a:lnSpc>
+              <a:spcAft>
+                <a:spcPts val="500"/>
+              </a:spcAft>
+            </a:pPr>
+            <a:r>
+              <a:rPr sz="1000" b="1" lang="zh-TW" dirty="0">
+                <a:solidFill>
+                  <a:srgbClr val="000000"/>
+                </a:solidFill>
+                <a:latin typeface="Arial Unicode MS"/>
+                <a:ea typeface="Arial Unicode MS"/>
+                <a:cs typeface="Arial Unicode MS"/>
+              </a:rPr>
+              <a:t>▍以下照著唸</a:t>
+            </a:r>
+            <a:r>
+              <a:rPr sz="1000" lang="zh-TW" dirty="0">
+                <a:solidFill>
+                  <a:srgbClr val="000000"/>
+                </a:solidFill>
+                <a:latin typeface="Arial Unicode MS"/>
+                <a:ea typeface="Arial Unicode MS"/>
+                <a:cs typeface="Arial Unicode MS"/>
+              </a:rPr>
+              <a:t>
+</a:t>
+            </a:r>
+          </a:p>
+          <a:p>
+            <a:pPr algn="l">
+              <a:lnSpc>
+                <a:spcPct val="115000"/>
+              </a:lnSpc>
+              <a:spcAft>
+                <a:spcPts val="500"/>
+              </a:spcAft>
+            </a:pPr>
+            <a:r>
+              <a:rPr sz="1000" lang="zh-TW" dirty="0">
                 <a:solidFill>
                   <a:srgbClr val="000000"/>
                 </a:solidFill>
@@ -1141,11 +1570,11 @@
                 <a:spcPct val="115000"/>
               </a:lnSpc>
               <a:spcAft>
-                <a:spcPts val="600"/>
-              </a:spcAft>
-            </a:pPr>
-            <a:r>
-              <a:rPr sz="1200" lang="zh-TW" dirty="0">
+                <a:spcPts val="500"/>
+              </a:spcAft>
+            </a:pPr>
+            <a:r>
+              <a:rPr sz="1000" lang="zh-TW" dirty="0">
                 <a:solidFill>
                   <a:srgbClr val="000000"/>
                 </a:solidFill>
@@ -1156,7 +1585,7 @@
               <a:t>下週第五週，十月八日，進第三章</a:t>
             </a:r>
             <a:r>
-              <a:rPr sz="1200" b="1" lang="zh-TW" dirty="0">
+              <a:rPr sz="1000" b="1" lang="zh-TW" dirty="0">
                 <a:solidFill>
                   <a:srgbClr val="000000"/>
                 </a:solidFill>
@@ -1167,7 +1596,7 @@
               <a:t>感測器</a:t>
             </a:r>
             <a:r>
-              <a:rPr sz="1200" lang="zh-TW" dirty="0">
+              <a:rPr sz="1000" lang="zh-TW" dirty="0">
                 <a:solidFill>
                   <a:srgbClr val="000000"/>
                 </a:solidFill>
@@ -1185,11 +1614,11 @@
                 <a:spcPct val="115000"/>
               </a:lnSpc>
               <a:spcAft>
-                <a:spcPts val="600"/>
-              </a:spcAft>
-            </a:pPr>
-            <a:r>
-              <a:rPr sz="1200" lang="zh-TW" dirty="0">
+                <a:spcPts val="500"/>
+              </a:spcAft>
+            </a:pPr>
+            <a:r>
+              <a:rPr sz="1000" lang="zh-TW" dirty="0">
                 <a:solidFill>
                   <a:srgbClr val="000000"/>
                 </a:solidFill>
@@ -1207,11 +1636,11 @@
                 <a:spcPct val="115000"/>
               </a:lnSpc>
               <a:spcAft>
-                <a:spcPts val="600"/>
-              </a:spcAft>
-            </a:pPr>
-            <a:r>
-              <a:rPr sz="1200" lang="zh-TW" dirty="0">
+                <a:spcPts val="500"/>
+              </a:spcAft>
+            </a:pPr>
+            <a:r>
+              <a:rPr sz="1000" lang="zh-TW" dirty="0">
                 <a:solidFill>
                   <a:srgbClr val="000000"/>
                 </a:solidFill>
@@ -1222,7 +1651,7 @@
               <a:t>第一，</a:t>
             </a:r>
             <a:r>
-              <a:rPr sz="1200" b="1" lang="zh-TW" dirty="0">
+              <a:rPr sz="1000" b="1" lang="zh-TW" dirty="0">
                 <a:solidFill>
                   <a:srgbClr val="000000"/>
                 </a:solidFill>
@@ -1233,7 +1662,7 @@
               <a:t>交第三週和第四週的任務單</a:t>
             </a:r>
             <a:r>
-              <a:rPr sz="1200" lang="zh-TW" dirty="0">
+              <a:rPr sz="1000" lang="zh-TW" dirty="0">
                 <a:solidFill>
                   <a:srgbClr val="000000"/>
                 </a:solidFill>
@@ -1251,11 +1680,11 @@
                 <a:spcPct val="115000"/>
               </a:lnSpc>
               <a:spcAft>
-                <a:spcPts val="600"/>
-              </a:spcAft>
-            </a:pPr>
-            <a:r>
-              <a:rPr sz="1200" lang="zh-TW" dirty="0">
+                <a:spcPts val="500"/>
+              </a:spcAft>
+            </a:pPr>
+            <a:r>
+              <a:rPr sz="1000" lang="zh-TW" dirty="0">
                 <a:solidFill>
                   <a:srgbClr val="000000"/>
                 </a:solidFill>
@@ -1273,11 +1702,11 @@
                 <a:spcPct val="115000"/>
               </a:lnSpc>
               <a:spcAft>
-                <a:spcPts val="600"/>
-              </a:spcAft>
-            </a:pPr>
-            <a:r>
-              <a:rPr sz="1200" lang="zh-TW" dirty="0">
+                <a:spcPts val="500"/>
+              </a:spcAft>
+            </a:pPr>
+            <a:r>
+              <a:rPr sz="1000" lang="zh-TW" dirty="0">
                 <a:solidFill>
                   <a:srgbClr val="000000"/>
                 </a:solidFill>
@@ -1288,7 +1717,7 @@
               <a:t>第三，這件最重要：</a:t>
             </a:r>
             <a:r>
-              <a:rPr sz="1200" b="1" lang="zh-TW" dirty="0">
+              <a:rPr sz="1000" b="1" lang="zh-TW" dirty="0">
                 <a:solidFill>
                   <a:srgbClr val="000000"/>
                 </a:solidFill>
@@ -1299,7 +1728,7 @@
               <a:t>用手機拍一張你覺得「相機會看不清楚」的路況</a:t>
             </a:r>
             <a:r>
-              <a:rPr sz="1200" lang="zh-TW" dirty="0">
+              <a:rPr sz="1000" lang="zh-TW" dirty="0">
                 <a:solidFill>
                   <a:srgbClr val="000000"/>
                 </a:solidFill>
@@ -1317,11 +1746,11 @@
                 <a:spcPct val="115000"/>
               </a:lnSpc>
               <a:spcAft>
-                <a:spcPts val="600"/>
-              </a:spcAft>
-            </a:pPr>
-            <a:r>
-              <a:rPr sz="1200" lang="zh-TW" dirty="0">
+                <a:spcPts val="500"/>
+              </a:spcAft>
+            </a:pPr>
+            <a:r>
+              <a:rPr sz="1000" lang="zh-TW" dirty="0">
                 <a:solidFill>
                   <a:srgbClr val="000000"/>
                 </a:solidFill>
@@ -1339,11 +1768,11 @@
                 <a:spcPct val="115000"/>
               </a:lnSpc>
               <a:spcAft>
-                <a:spcPts val="600"/>
-              </a:spcAft>
-            </a:pPr>
-            <a:r>
-              <a:rPr sz="1200" lang="zh-TW" dirty="0">
+                <a:spcPts val="500"/>
+              </a:spcAft>
+            </a:pPr>
+            <a:r>
+              <a:rPr sz="1000" lang="zh-TW" dirty="0">
                 <a:solidFill>
                   <a:srgbClr val="000000"/>
                 </a:solidFill>
@@ -1354,7 +1783,7 @@
               <a:t>第三章是整學期</a:t>
             </a:r>
             <a:r>
-              <a:rPr sz="1200" b="1" lang="zh-TW" dirty="0">
+              <a:rPr sz="1000" b="1" lang="zh-TW" dirty="0">
                 <a:solidFill>
                   <a:srgbClr val="000000"/>
                 </a:solidFill>
@@ -1365,7 +1794,7 @@
               <a:t>最直觀的一章</a:t>
             </a:r>
             <a:r>
-              <a:rPr sz="1200" lang="zh-TW" dirty="0">
+              <a:rPr sz="1000" lang="zh-TW" dirty="0">
                 <a:solidFill>
                   <a:srgbClr val="000000"/>
                 </a:solidFill>
@@ -1376,7 +1805,7 @@
               <a:t>，也是</a:t>
             </a:r>
             <a:r>
-              <a:rPr sz="1200" b="1" lang="zh-TW" dirty="0">
+              <a:rPr sz="1000" b="1" lang="zh-TW" dirty="0">
                 <a:solidFill>
                   <a:srgbClr val="000000"/>
                 </a:solidFill>
@@ -1387,7 +1816,7 @@
               <a:t>最接近台灣就業市場</a:t>
             </a:r>
             <a:r>
-              <a:rPr sz="1200" lang="zh-TW" dirty="0">
+              <a:rPr sz="1000" lang="zh-TW" dirty="0">
                 <a:solidFill>
                   <a:srgbClr val="000000"/>
                 </a:solidFill>
@@ -1405,11 +1834,11 @@
                 <a:spcPct val="115000"/>
               </a:lnSpc>
               <a:spcAft>
-                <a:spcPts val="600"/>
-              </a:spcAft>
-            </a:pPr>
-            <a:r>
-              <a:rPr sz="1200" lang="zh-TW" dirty="0">
+                <a:spcPts val="500"/>
+              </a:spcAft>
+            </a:pPr>
+            <a:r>
+              <a:rPr sz="1000" lang="zh-TW" dirty="0">
                 <a:solidFill>
                   <a:srgbClr val="000000"/>
                 </a:solidFill>
@@ -1526,11 +1955,154 @@
                 <a:spcPct val="115000"/>
               </a:lnSpc>
               <a:spcAft>
-                <a:spcPts val="600"/>
-              </a:spcAft>
-            </a:pPr>
-            <a:r>
-              <a:rPr sz="1200" lang="zh-TW" dirty="0">
+                <a:spcPts val="525"/>
+              </a:spcAft>
+            </a:pPr>
+            <a:r>
+              <a:rPr sz="1050" b="1" lang="zh-TW" dirty="0">
+                <a:solidFill>
+                  <a:srgbClr val="000000"/>
+                </a:solidFill>
+                <a:latin typeface="Arial Unicode MS"/>
+                <a:ea typeface="Arial Unicode MS"/>
+                <a:cs typeface="Arial Unicode MS"/>
+              </a:rPr>
+              <a:t>▍這一張要做什麼</a:t>
+            </a:r>
+            <a:r>
+              <a:rPr sz="1050" lang="zh-TW" dirty="0">
+                <a:solidFill>
+                  <a:srgbClr val="000000"/>
+                </a:solidFill>
+                <a:latin typeface="Arial Unicode MS"/>
+                <a:ea typeface="Arial Unicode MS"/>
+                <a:cs typeface="Arial Unicode MS"/>
+              </a:rPr>
+              <a:t>
+</a:t>
+            </a:r>
+          </a:p>
+          <a:p>
+            <a:pPr algn="l">
+              <a:lnSpc>
+                <a:spcPct val="115000"/>
+              </a:lnSpc>
+              <a:spcAft>
+                <a:spcPts val="525"/>
+              </a:spcAft>
+            </a:pPr>
+            <a:r>
+              <a:rPr sz="1050" lang="zh-TW" dirty="0">
+                <a:solidFill>
+                  <a:srgbClr val="000000"/>
+                </a:solidFill>
+                <a:latin typeface="Arial Unicode MS"/>
+                <a:ea typeface="Arial Unicode MS"/>
+                <a:cs typeface="Arial Unicode MS"/>
+              </a:rPr>
+              <a:t>交代四題的順序與時間，讓各組知道自己該在什麼時候做什麼。
+</a:t>
+            </a:r>
+          </a:p>
+          <a:p>
+            <a:pPr algn="l">
+              <a:lnSpc>
+                <a:spcPct val="115000"/>
+              </a:lnSpc>
+              <a:spcAft>
+                <a:spcPts val="525"/>
+              </a:spcAft>
+            </a:pPr>
+            <a:r>
+              <a:rPr sz="1050" b="1" lang="zh-TW" dirty="0">
+                <a:solidFill>
+                  <a:srgbClr val="000000"/>
+                </a:solidFill>
+                <a:latin typeface="Arial Unicode MS"/>
+                <a:ea typeface="Arial Unicode MS"/>
+                <a:cs typeface="Arial Unicode MS"/>
+              </a:rPr>
+              <a:t>▍畫面上圈這裡</a:t>
+            </a:r>
+            <a:r>
+              <a:rPr sz="1050" lang="zh-TW" dirty="0">
+                <a:solidFill>
+                  <a:srgbClr val="000000"/>
+                </a:solidFill>
+                <a:latin typeface="Arial Unicode MS"/>
+                <a:ea typeface="Arial Unicode MS"/>
+                <a:cs typeface="Arial Unicode MS"/>
+              </a:rPr>
+              <a:t>
+</a:t>
+            </a:r>
+          </a:p>
+          <a:p>
+            <a:pPr algn="l">
+              <a:lnSpc>
+                <a:spcPct val="115000"/>
+              </a:lnSpc>
+              <a:spcAft>
+                <a:spcPts val="525"/>
+              </a:spcAft>
+            </a:pPr>
+            <a:r>
+              <a:rPr sz="1050" lang="zh-TW" dirty="0">
+                <a:solidFill>
+                  <a:srgbClr val="000000"/>
+                </a:solidFill>
+                <a:latin typeface="Arial Unicode MS"/>
+                <a:ea typeface="Arial Unicode MS"/>
+                <a:cs typeface="Arial Unicode MS"/>
+              </a:rPr>
+              <a:t>圈第二題那一格——那是今天的主菜，佔十五分鐘。再圈總時間。
+</a:t>
+            </a:r>
+          </a:p>
+          <a:p>
+            <a:pPr algn="l">
+              <a:lnSpc>
+                <a:spcPct val="115000"/>
+              </a:lnSpc>
+              <a:spcAft>
+                <a:spcPts val="525"/>
+              </a:spcAft>
+            </a:pPr>
+            <a:r>
+              <a:rPr sz="1050" b="1" lang="zh-TW" dirty="0">
+                <a:solidFill>
+                  <a:srgbClr val="000000"/>
+                </a:solidFill>
+                <a:latin typeface="Arial Unicode MS"/>
+                <a:ea typeface="Arial Unicode MS"/>
+                <a:cs typeface="Arial Unicode MS"/>
+              </a:rPr>
+              <a:t>▍以下照著唸</a:t>
+            </a:r>
+            <a:r>
+              <a:rPr sz="1050" lang="zh-TW" dirty="0">
+                <a:solidFill>
+                  <a:srgbClr val="000000"/>
+                </a:solidFill>
+                <a:latin typeface="Arial Unicode MS"/>
+                <a:ea typeface="Arial Unicode MS"/>
+                <a:cs typeface="Arial Unicode MS"/>
+              </a:rPr>
+              <a:t>
+</a:t>
+            </a:r>
+          </a:p>
+          <a:p>
+            <a:pPr algn="l">
+              <a:lnSpc>
+                <a:spcPct val="115000"/>
+              </a:lnSpc>
+              <a:spcAft>
+                <a:spcPts val="525"/>
+              </a:spcAft>
+            </a:pPr>
+            <a:r>
+              <a:rPr sz="1050" lang="zh-TW" dirty="0">
                 <a:solidFill>
                   <a:srgbClr val="000000"/>
                 </a:solidFill>
@@ -1548,11 +2120,11 @@
                 <a:spcPct val="115000"/>
               </a:lnSpc>
               <a:spcAft>
-                <a:spcPts val="600"/>
-              </a:spcAft>
-            </a:pPr>
-            <a:r>
-              <a:rPr sz="1200" lang="zh-TW" dirty="0">
+                <a:spcPts val="525"/>
+              </a:spcAft>
+            </a:pPr>
+            <a:r>
+              <a:rPr sz="1050" lang="zh-TW" dirty="0">
                 <a:solidFill>
                   <a:srgbClr val="000000"/>
                 </a:solidFill>
@@ -1563,7 +2135,7 @@
               <a:t>第一題是</a:t>
             </a:r>
             <a:r>
-              <a:rPr sz="1200" b="1" lang="zh-TW" dirty="0">
+              <a:rPr sz="1050" b="1" lang="zh-TW" dirty="0">
                 <a:solidFill>
                   <a:srgbClr val="000000"/>
                 </a:solidFill>
@@ -1574,7 +2146,7 @@
               <a:t>觀察</a:t>
             </a:r>
             <a:r>
-              <a:rPr sz="1200" lang="zh-TW" dirty="0">
+              <a:rPr sz="1050" lang="zh-TW" dirty="0">
                 <a:solidFill>
                   <a:srgbClr val="000000"/>
                 </a:solidFill>
@@ -1592,11 +2164,11 @@
                 <a:spcPct val="115000"/>
               </a:lnSpc>
               <a:spcAft>
-                <a:spcPts val="600"/>
-              </a:spcAft>
-            </a:pPr>
-            <a:r>
-              <a:rPr sz="1200" lang="zh-TW" dirty="0">
+                <a:spcPts val="525"/>
+              </a:spcAft>
+            </a:pPr>
+            <a:r>
+              <a:rPr sz="1050" lang="zh-TW" dirty="0">
                 <a:solidFill>
                   <a:srgbClr val="000000"/>
                 </a:solidFill>
@@ -1607,7 +2179,7 @@
               <a:t>第二題是</a:t>
             </a:r>
             <a:r>
-              <a:rPr sz="1200" b="1" lang="zh-TW" dirty="0">
+              <a:rPr sz="1050" b="1" lang="zh-TW" dirty="0">
                 <a:solidFill>
                   <a:srgbClr val="000000"/>
                 </a:solidFill>
@@ -1618,7 +2190,7 @@
               <a:t>掃參數</a:t>
             </a:r>
             <a:r>
-              <a:rPr sz="1200" lang="zh-TW" dirty="0">
+              <a:rPr sz="1050" lang="zh-TW" dirty="0">
                 <a:solidFill>
                   <a:srgbClr val="000000"/>
                 </a:solidFill>
@@ -1636,11 +2208,11 @@
                 <a:spcPct val="115000"/>
               </a:lnSpc>
               <a:spcAft>
-                <a:spcPts val="600"/>
-              </a:spcAft>
-            </a:pPr>
-            <a:r>
-              <a:rPr sz="1200" lang="zh-TW" dirty="0">
+                <a:spcPts val="525"/>
+              </a:spcAft>
+            </a:pPr>
+            <a:r>
+              <a:rPr sz="1050" lang="zh-TW" dirty="0">
                 <a:solidFill>
                   <a:srgbClr val="000000"/>
                 </a:solidFill>
@@ -1651,7 +2223,7 @@
               <a:t>第三題是</a:t>
             </a:r>
             <a:r>
-              <a:rPr sz="1200" b="1" lang="zh-TW" dirty="0">
+              <a:rPr sz="1050" b="1" lang="zh-TW" dirty="0">
                 <a:solidFill>
                   <a:srgbClr val="000000"/>
                 </a:solidFill>
@@ -1662,7 +2234,7 @@
               <a:t>加一個變因</a:t>
             </a:r>
             <a:r>
-              <a:rPr sz="1200" lang="zh-TW" dirty="0">
+              <a:rPr sz="1050" lang="zh-TW" dirty="0">
                 <a:solidFill>
                   <a:srgbClr val="000000"/>
                 </a:solidFill>
@@ -1680,11 +2252,11 @@
                 <a:spcPct val="115000"/>
               </a:lnSpc>
               <a:spcAft>
-                <a:spcPts val="600"/>
-              </a:spcAft>
-            </a:pPr>
-            <a:r>
-              <a:rPr sz="1200" lang="zh-TW" dirty="0">
+                <a:spcPts val="525"/>
+              </a:spcAft>
+            </a:pPr>
+            <a:r>
+              <a:rPr sz="1050" lang="zh-TW" dirty="0">
                 <a:solidFill>
                   <a:srgbClr val="000000"/>
                 </a:solidFill>
@@ -1695,7 +2267,7 @@
               <a:t>第四題是</a:t>
             </a:r>
             <a:r>
-              <a:rPr sz="1200" b="1" lang="zh-TW" dirty="0">
+              <a:rPr sz="1050" b="1" lang="zh-TW" dirty="0">
                 <a:solidFill>
                   <a:srgbClr val="000000"/>
                 </a:solidFill>
@@ -1706,7 +2278,7 @@
               <a:t>文字題</a:t>
             </a:r>
             <a:r>
-              <a:rPr sz="1200" lang="zh-TW" dirty="0">
+              <a:rPr sz="1050" lang="zh-TW" dirty="0">
                 <a:solidFill>
                   <a:srgbClr val="000000"/>
                 </a:solidFill>
@@ -1724,11 +2296,11 @@
                 <a:spcPct val="115000"/>
               </a:lnSpc>
               <a:spcAft>
-                <a:spcPts val="600"/>
-              </a:spcAft>
-            </a:pPr>
-            <a:r>
-              <a:rPr sz="1200" lang="zh-TW" dirty="0">
+                <a:spcPts val="525"/>
+              </a:spcAft>
+            </a:pPr>
+            <a:r>
+              <a:rPr sz="1050" lang="zh-TW" dirty="0">
                 <a:solidFill>
                   <a:srgbClr val="000000"/>
                 </a:solidFill>
@@ -1746,11 +2318,11 @@
                 <a:spcPct val="115000"/>
               </a:lnSpc>
               <a:spcAft>
-                <a:spcPts val="600"/>
-              </a:spcAft>
-            </a:pPr>
-            <a:r>
-              <a:rPr sz="1200" lang="zh-TW" dirty="0">
+                <a:spcPts val="525"/>
+              </a:spcAft>
+            </a:pPr>
+            <a:r>
+              <a:rPr sz="1050" lang="zh-TW" dirty="0">
                 <a:solidFill>
                   <a:srgbClr val="000000"/>
                 </a:solidFill>
@@ -1867,11 +2439,154 @@
                 <a:spcPct val="115000"/>
               </a:lnSpc>
               <a:spcAft>
-                <a:spcPts val="600"/>
-              </a:spcAft>
-            </a:pPr>
-            <a:r>
-              <a:rPr sz="1200" lang="zh-TW" dirty="0">
+                <a:spcPts val="500"/>
+              </a:spcAft>
+            </a:pPr>
+            <a:r>
+              <a:rPr sz="1000" b="1" lang="zh-TW" dirty="0">
+                <a:solidFill>
+                  <a:srgbClr val="000000"/>
+                </a:solidFill>
+                <a:latin typeface="Arial Unicode MS"/>
+                <a:ea typeface="Arial Unicode MS"/>
+                <a:cs typeface="Arial Unicode MS"/>
+              </a:rPr>
+              <a:t>▍這一張要做什麼</a:t>
+            </a:r>
+            <a:r>
+              <a:rPr sz="1000" lang="zh-TW" dirty="0">
+                <a:solidFill>
+                  <a:srgbClr val="000000"/>
+                </a:solidFill>
+                <a:latin typeface="Arial Unicode MS"/>
+                <a:ea typeface="Arial Unicode MS"/>
+                <a:cs typeface="Arial Unicode MS"/>
+              </a:rPr>
+              <a:t>
+</a:t>
+            </a:r>
+          </a:p>
+          <a:p>
+            <a:pPr algn="l">
+              <a:lnSpc>
+                <a:spcPct val="115000"/>
+              </a:lnSpc>
+              <a:spcAft>
+                <a:spcPts val="500"/>
+              </a:spcAft>
+            </a:pPr>
+            <a:r>
+              <a:rPr sz="1000" lang="zh-TW" dirty="0">
+                <a:solidFill>
+                  <a:srgbClr val="000000"/>
+                </a:solidFill>
+                <a:latin typeface="Arial Unicode MS"/>
+                <a:ea typeface="Arial Unicode MS"/>
+                <a:cs typeface="Arial Unicode MS"/>
+              </a:rPr>
+              <a:t>第一題。先什麼都不改，看它怎麼撞，重點是讓學生發現三次撞的原因不一樣。
+</a:t>
+            </a:r>
+          </a:p>
+          <a:p>
+            <a:pPr algn="l">
+              <a:lnSpc>
+                <a:spcPct val="115000"/>
+              </a:lnSpc>
+              <a:spcAft>
+                <a:spcPts val="500"/>
+              </a:spcAft>
+            </a:pPr>
+            <a:r>
+              <a:rPr sz="1000" b="1" lang="zh-TW" dirty="0">
+                <a:solidFill>
+                  <a:srgbClr val="000000"/>
+                </a:solidFill>
+                <a:latin typeface="Arial Unicode MS"/>
+                <a:ea typeface="Arial Unicode MS"/>
+                <a:cs typeface="Arial Unicode MS"/>
+              </a:rPr>
+              <a:t>▍畫面上圈這裡</a:t>
+            </a:r>
+            <a:r>
+              <a:rPr sz="1000" lang="zh-TW" dirty="0">
+                <a:solidFill>
+                  <a:srgbClr val="000000"/>
+                </a:solidFill>
+                <a:latin typeface="Arial Unicode MS"/>
+                <a:ea typeface="Arial Unicode MS"/>
+                <a:cs typeface="Arial Unicode MS"/>
+              </a:rPr>
+              <a:t>
+</a:t>
+            </a:r>
+          </a:p>
+          <a:p>
+            <a:pPr algn="l">
+              <a:lnSpc>
+                <a:spcPct val="115000"/>
+              </a:lnSpc>
+              <a:spcAft>
+                <a:spcPts val="500"/>
+              </a:spcAft>
+            </a:pPr>
+            <a:r>
+              <a:rPr sz="1000" lang="zh-TW" dirty="0">
+                <a:solidFill>
+                  <a:srgbClr val="000000"/>
+                </a:solidFill>
+                <a:latin typeface="Arial Unicode MS"/>
+                <a:ea typeface="Arial Unicode MS"/>
+                <a:cs typeface="Arial Unicode MS"/>
+              </a:rPr>
+              <a:t>圈題目裡的「什麼都不要改」。請各組把右欄事件紀錄的最後一行抄下來。
+</a:t>
+            </a:r>
+          </a:p>
+          <a:p>
+            <a:pPr algn="l">
+              <a:lnSpc>
+                <a:spcPct val="115000"/>
+              </a:lnSpc>
+              <a:spcAft>
+                <a:spcPts val="500"/>
+              </a:spcAft>
+            </a:pPr>
+            <a:r>
+              <a:rPr sz="1000" b="1" lang="zh-TW" dirty="0">
+                <a:solidFill>
+                  <a:srgbClr val="000000"/>
+                </a:solidFill>
+                <a:latin typeface="Arial Unicode MS"/>
+                <a:ea typeface="Arial Unicode MS"/>
+                <a:cs typeface="Arial Unicode MS"/>
+              </a:rPr>
+              <a:t>▍以下照著唸</a:t>
+            </a:r>
+            <a:r>
+              <a:rPr sz="1000" lang="zh-TW" dirty="0">
+                <a:solidFill>
+                  <a:srgbClr val="000000"/>
+                </a:solidFill>
+                <a:latin typeface="Arial Unicode MS"/>
+                <a:ea typeface="Arial Unicode MS"/>
+                <a:cs typeface="Arial Unicode MS"/>
+              </a:rPr>
+              <a:t>
+</a:t>
+            </a:r>
+          </a:p>
+          <a:p>
+            <a:pPr algn="l">
+              <a:lnSpc>
+                <a:spcPct val="115000"/>
+              </a:lnSpc>
+              <a:spcAft>
+                <a:spcPts val="500"/>
+              </a:spcAft>
+            </a:pPr>
+            <a:r>
+              <a:rPr sz="1000" lang="zh-TW" dirty="0">
                 <a:solidFill>
                   <a:srgbClr val="000000"/>
                 </a:solidFill>
@@ -1889,11 +2604,11 @@
                 <a:spcPct val="115000"/>
               </a:lnSpc>
               <a:spcAft>
-                <a:spcPts val="600"/>
-              </a:spcAft>
-            </a:pPr>
-            <a:r>
-              <a:rPr sz="1200" lang="zh-TW" dirty="0">
+                <a:spcPts val="500"/>
+              </a:spcAft>
+            </a:pPr>
+            <a:r>
+              <a:rPr sz="1000" lang="zh-TW" dirty="0">
                 <a:solidFill>
                   <a:srgbClr val="000000"/>
                 </a:solidFill>
@@ -1911,11 +2626,11 @@
                 <a:spcPct val="115000"/>
               </a:lnSpc>
               <a:spcAft>
-                <a:spcPts val="600"/>
-              </a:spcAft>
-            </a:pPr>
-            <a:r>
-              <a:rPr sz="1200" lang="zh-TW" dirty="0">
+                <a:spcPts val="500"/>
+              </a:spcAft>
+            </a:pPr>
+            <a:r>
+              <a:rPr sz="1000" lang="zh-TW" dirty="0">
                 <a:solidFill>
                   <a:srgbClr val="000000"/>
                 </a:solidFill>
@@ -1933,11 +2648,11 @@
                 <a:spcPct val="115000"/>
               </a:lnSpc>
               <a:spcAft>
-                <a:spcPts val="600"/>
-              </a:spcAft>
-            </a:pPr>
-            <a:r>
-              <a:rPr sz="1200" lang="zh-TW" dirty="0">
+                <a:spcPts val="500"/>
+              </a:spcAft>
+            </a:pPr>
+            <a:r>
+              <a:rPr sz="1000" lang="zh-TW" dirty="0">
                 <a:solidFill>
                   <a:srgbClr val="000000"/>
                 </a:solidFill>
@@ -1955,11 +2670,11 @@
                 <a:spcPct val="115000"/>
               </a:lnSpc>
               <a:spcAft>
-                <a:spcPts val="600"/>
-              </a:spcAft>
-            </a:pPr>
-            <a:r>
-              <a:rPr sz="1200" lang="zh-TW" dirty="0">
+                <a:spcPts val="500"/>
+              </a:spcAft>
+            </a:pPr>
+            <a:r>
+              <a:rPr sz="1000" lang="zh-TW" dirty="0">
                 <a:solidFill>
                   <a:srgbClr val="000000"/>
                 </a:solidFill>
@@ -1977,11 +2692,11 @@
                 <a:spcPct val="115000"/>
               </a:lnSpc>
               <a:spcAft>
-                <a:spcPts val="600"/>
-              </a:spcAft>
-            </a:pPr>
-            <a:r>
-              <a:rPr sz="1200" b="1" lang="zh-TW" dirty="0">
+                <a:spcPts val="500"/>
+              </a:spcAft>
+            </a:pPr>
+            <a:r>
+              <a:rPr sz="1000" b="1" lang="zh-TW" dirty="0">
                 <a:solidFill>
                   <a:srgbClr val="000000"/>
                 </a:solidFill>
@@ -1992,7 +2707,7 @@
               <a:t>這就是重點。</a:t>
             </a:r>
             <a:r>
-              <a:rPr sz="1200" lang="zh-TW" dirty="0">
+              <a:rPr sz="1000" lang="zh-TW" dirty="0">
                 <a:solidFill>
                   <a:srgbClr val="000000"/>
                 </a:solidFill>
@@ -2010,11 +2725,11 @@
                 <a:spcPct val="115000"/>
               </a:lnSpc>
               <a:spcAft>
-                <a:spcPts val="600"/>
-              </a:spcAft>
-            </a:pPr>
-            <a:r>
-              <a:rPr sz="1200" lang="zh-TW" dirty="0">
+                <a:spcPts val="500"/>
+              </a:spcAft>
+            </a:pPr>
+            <a:r>
+              <a:rPr sz="1000" lang="zh-TW" dirty="0">
                 <a:solidFill>
                   <a:srgbClr val="000000"/>
                 </a:solidFill>
@@ -2025,7 +2740,7 @@
               <a:t>（連回第二節）所以我們說「掃參數」，不只是掃參數的值，</a:t>
             </a:r>
             <a:r>
-              <a:rPr sz="1200" b="1" lang="zh-TW" dirty="0">
+              <a:rPr sz="1000" b="1" lang="zh-TW" dirty="0">
                 <a:solidFill>
                   <a:srgbClr val="000000"/>
                 </a:solidFill>
@@ -2036,7 +2751,7 @@
               <a:t>同一組參數也要跑很多次</a:t>
             </a:r>
             <a:r>
-              <a:rPr sz="1200" lang="zh-TW" dirty="0">
+              <a:rPr sz="1000" lang="zh-TW" dirty="0">
                 <a:solidFill>
                   <a:srgbClr val="000000"/>
                 </a:solidFill>
@@ -2054,11 +2769,11 @@
                 <a:spcPct val="115000"/>
               </a:lnSpc>
               <a:spcAft>
-                <a:spcPts val="600"/>
-              </a:spcAft>
-            </a:pPr>
-            <a:r>
-              <a:rPr sz="1200" lang="zh-TW" dirty="0">
+                <a:spcPts val="500"/>
+              </a:spcAft>
+            </a:pPr>
+            <a:r>
+              <a:rPr sz="1000" lang="zh-TW" dirty="0">
                 <a:solidFill>
                   <a:srgbClr val="000000"/>
                 </a:solidFill>
@@ -2179,6 +2894,149 @@
               </a:spcAft>
             </a:pPr>
             <a:r>
+              <a:rPr sz="1000" b="1" lang="zh-TW" dirty="0">
+                <a:solidFill>
+                  <a:srgbClr val="000000"/>
+                </a:solidFill>
+                <a:latin typeface="Arial Unicode MS"/>
+                <a:ea typeface="Arial Unicode MS"/>
+                <a:cs typeface="Arial Unicode MS"/>
+              </a:rPr>
+              <a:t>▍這一張要做什麼</a:t>
+            </a:r>
+            <a:r>
+              <a:rPr sz="1000" lang="zh-TW" dirty="0">
+                <a:solidFill>
+                  <a:srgbClr val="000000"/>
+                </a:solidFill>
+                <a:latin typeface="Arial Unicode MS"/>
+                <a:ea typeface="Arial Unicode MS"/>
+                <a:cs typeface="Arial Unicode MS"/>
+              </a:rPr>
+              <a:t>
+</a:t>
+            </a:r>
+          </a:p>
+          <a:p>
+            <a:pPr algn="l">
+              <a:lnSpc>
+                <a:spcPct val="115000"/>
+              </a:lnSpc>
+              <a:spcAft>
+                <a:spcPts val="500"/>
+              </a:spcAft>
+            </a:pPr>
+            <a:r>
+              <a:rPr sz="1000" lang="zh-TW" dirty="0">
+                <a:solidFill>
+                  <a:srgbClr val="000000"/>
+                </a:solidFill>
+                <a:latin typeface="Arial Unicode MS"/>
+                <a:ea typeface="Arial Unicode MS"/>
+                <a:cs typeface="Arial Unicode MS"/>
+              </a:rPr>
+              <a:t>今天的主菜。這一題要先教會學生把車流固定住，再一次只改一個參數。
+</a:t>
+            </a:r>
+          </a:p>
+          <a:p>
+            <a:pPr algn="l">
+              <a:lnSpc>
+                <a:spcPct val="115000"/>
+              </a:lnSpc>
+              <a:spcAft>
+                <a:spcPts val="500"/>
+              </a:spcAft>
+            </a:pPr>
+            <a:r>
+              <a:rPr sz="1000" b="1" lang="zh-TW" dirty="0">
+                <a:solidFill>
+                  <a:srgbClr val="000000"/>
+                </a:solidFill>
+                <a:latin typeface="Arial Unicode MS"/>
+                <a:ea typeface="Arial Unicode MS"/>
+                <a:cs typeface="Arial Unicode MS"/>
+              </a:rPr>
+              <a:t>▍畫面上圈這裡</a:t>
+            </a:r>
+            <a:r>
+              <a:rPr sz="1000" lang="zh-TW" dirty="0">
+                <a:solidFill>
+                  <a:srgbClr val="000000"/>
+                </a:solidFill>
+                <a:latin typeface="Arial Unicode MS"/>
+                <a:ea typeface="Arial Unicode MS"/>
+                <a:cs typeface="Arial Unicode MS"/>
+              </a:rPr>
+              <a:t>
+</a:t>
+            </a:r>
+          </a:p>
+          <a:p>
+            <a:pPr algn="l">
+              <a:lnSpc>
+                <a:spcPct val="115000"/>
+              </a:lnSpc>
+              <a:spcAft>
+                <a:spcPts val="500"/>
+              </a:spcAft>
+            </a:pPr>
+            <a:r>
+              <a:rPr sz="1000" lang="zh-TW" dirty="0">
+                <a:solidFill>
+                  <a:srgbClr val="000000"/>
+                </a:solidFill>
+                <a:latin typeface="Arial Unicode MS"/>
+                <a:ea typeface="Arial Unicode MS"/>
+                <a:cs typeface="Arial Unicode MS"/>
+              </a:rPr>
+              <a:t>先圈左欄的「固定車流」勾選框與種子欄位，這是這一題成敗的關鍵。再圈題目的「跑三次取最好」。
+</a:t>
+            </a:r>
+          </a:p>
+          <a:p>
+            <a:pPr algn="l">
+              <a:lnSpc>
+                <a:spcPct val="115000"/>
+              </a:lnSpc>
+              <a:spcAft>
+                <a:spcPts val="500"/>
+              </a:spcAft>
+            </a:pPr>
+            <a:r>
+              <a:rPr sz="1000" b="1" lang="zh-TW" dirty="0">
+                <a:solidFill>
+                  <a:srgbClr val="000000"/>
+                </a:solidFill>
+                <a:latin typeface="Arial Unicode MS"/>
+                <a:ea typeface="Arial Unicode MS"/>
+                <a:cs typeface="Arial Unicode MS"/>
+              </a:rPr>
+              <a:t>▍以下照著唸</a:t>
+            </a:r>
+            <a:r>
+              <a:rPr sz="1000" lang="zh-TW" dirty="0">
+                <a:solidFill>
+                  <a:srgbClr val="000000"/>
+                </a:solidFill>
+                <a:latin typeface="Arial Unicode MS"/>
+                <a:ea typeface="Arial Unicode MS"/>
+                <a:cs typeface="Arial Unicode MS"/>
+              </a:rPr>
+              <a:t>
+</a:t>
+            </a:r>
+          </a:p>
+          <a:p>
+            <a:pPr algn="l">
+              <a:lnSpc>
+                <a:spcPct val="115000"/>
+              </a:lnSpc>
+              <a:spcAft>
+                <a:spcPts val="500"/>
+              </a:spcAft>
+            </a:pPr>
+            <a:r>
               <a:rPr sz="1000" lang="zh-TW" dirty="0">
                 <a:solidFill>
                   <a:srgbClr val="000000"/>
@@ -3015,6 +3873,149 @@
               </a:spcAft>
             </a:pPr>
             <a:r>
+              <a:rPr sz="1000" b="1" lang="zh-TW" dirty="0">
+                <a:solidFill>
+                  <a:srgbClr val="000000"/>
+                </a:solidFill>
+                <a:latin typeface="Arial Unicode MS"/>
+                <a:ea typeface="Arial Unicode MS"/>
+                <a:cs typeface="Arial Unicode MS"/>
+              </a:rPr>
+              <a:t>▍這一張要做什麼</a:t>
+            </a:r>
+            <a:r>
+              <a:rPr sz="1000" lang="zh-TW" dirty="0">
+                <a:solidFill>
+                  <a:srgbClr val="000000"/>
+                </a:solidFill>
+                <a:latin typeface="Arial Unicode MS"/>
+                <a:ea typeface="Arial Unicode MS"/>
+                <a:cs typeface="Arial Unicode MS"/>
+              </a:rPr>
+              <a:t>
+</a:t>
+            </a:r>
+          </a:p>
+          <a:p>
+            <a:pPr algn="l">
+              <a:lnSpc>
+                <a:spcPct val="115000"/>
+              </a:lnSpc>
+              <a:spcAft>
+                <a:spcPts val="500"/>
+              </a:spcAft>
+            </a:pPr>
+            <a:r>
+              <a:rPr sz="1000" lang="zh-TW" dirty="0">
+                <a:solidFill>
+                  <a:srgbClr val="000000"/>
+                </a:solidFill>
+                <a:latin typeface="Arial Unicode MS"/>
+                <a:ea typeface="Arial Unicode MS"/>
+                <a:cs typeface="Arial Unicode MS"/>
+              </a:rPr>
+              <a:t>第三題。保留自己調好的三個數字，只把雨天打開，看兩條線交叉。
+</a:t>
+            </a:r>
+          </a:p>
+          <a:p>
+            <a:pPr algn="l">
+              <a:lnSpc>
+                <a:spcPct val="115000"/>
+              </a:lnSpc>
+              <a:spcAft>
+                <a:spcPts val="500"/>
+              </a:spcAft>
+            </a:pPr>
+            <a:r>
+              <a:rPr sz="1000" b="1" lang="zh-TW" dirty="0">
+                <a:solidFill>
+                  <a:srgbClr val="000000"/>
+                </a:solidFill>
+                <a:latin typeface="Arial Unicode MS"/>
+                <a:ea typeface="Arial Unicode MS"/>
+                <a:cs typeface="Arial Unicode MS"/>
+              </a:rPr>
+              <a:t>▍畫面上圈這裡</a:t>
+            </a:r>
+            <a:r>
+              <a:rPr sz="1000" lang="zh-TW" dirty="0">
+                <a:solidFill>
+                  <a:srgbClr val="000000"/>
+                </a:solidFill>
+                <a:latin typeface="Arial Unicode MS"/>
+                <a:ea typeface="Arial Unicode MS"/>
+                <a:cs typeface="Arial Unicode MS"/>
+              </a:rPr>
+              <a:t>
+</a:t>
+            </a:r>
+          </a:p>
+          <a:p>
+            <a:pPr algn="l">
+              <a:lnSpc>
+                <a:spcPct val="115000"/>
+              </a:lnSpc>
+              <a:spcAft>
+                <a:spcPts val="500"/>
+              </a:spcAft>
+            </a:pPr>
+            <a:r>
+              <a:rPr sz="1000" lang="zh-TW" dirty="0">
+                <a:solidFill>
+                  <a:srgbClr val="000000"/>
+                </a:solidFill>
+                <a:latin typeface="Arial Unicode MS"/>
+                <a:ea typeface="Arial Unicode MS"/>
+                <a:cs typeface="Arial Unicode MS"/>
+              </a:rPr>
+              <a:t>圈「三個數字不要動」。操作時用左欄的「第三題 只加雨天」按鈕，不要手動改參數。
+</a:t>
+            </a:r>
+          </a:p>
+          <a:p>
+            <a:pPr algn="l">
+              <a:lnSpc>
+                <a:spcPct val="115000"/>
+              </a:lnSpc>
+              <a:spcAft>
+                <a:spcPts val="500"/>
+              </a:spcAft>
+            </a:pPr>
+            <a:r>
+              <a:rPr sz="1000" b="1" lang="zh-TW" dirty="0">
+                <a:solidFill>
+                  <a:srgbClr val="000000"/>
+                </a:solidFill>
+                <a:latin typeface="Arial Unicode MS"/>
+                <a:ea typeface="Arial Unicode MS"/>
+                <a:cs typeface="Arial Unicode MS"/>
+              </a:rPr>
+              <a:t>▍以下照著唸</a:t>
+            </a:r>
+            <a:r>
+              <a:rPr sz="1000" lang="zh-TW" dirty="0">
+                <a:solidFill>
+                  <a:srgbClr val="000000"/>
+                </a:solidFill>
+                <a:latin typeface="Arial Unicode MS"/>
+                <a:ea typeface="Arial Unicode MS"/>
+                <a:cs typeface="Arial Unicode MS"/>
+              </a:rPr>
+              <a:t>
+</a:t>
+            </a:r>
+          </a:p>
+          <a:p>
+            <a:pPr algn="l">
+              <a:lnSpc>
+                <a:spcPct val="115000"/>
+              </a:lnSpc>
+              <a:spcAft>
+                <a:spcPts val="500"/>
+              </a:spcAft>
+            </a:pPr>
+            <a:r>
               <a:rPr sz="1000" lang="zh-TW" dirty="0">
                 <a:solidFill>
                   <a:srgbClr val="000000"/>
@@ -3609,6 +4610,149 @@
               </a:spcAft>
             </a:pPr>
             <a:r>
+              <a:rPr sz="1000" b="1" lang="zh-TW" dirty="0">
+                <a:solidFill>
+                  <a:srgbClr val="000000"/>
+                </a:solidFill>
+                <a:latin typeface="Arial Unicode MS"/>
+                <a:ea typeface="Arial Unicode MS"/>
+                <a:cs typeface="Arial Unicode MS"/>
+              </a:rPr>
+              <a:t>▍這一張要做什麼</a:t>
+            </a:r>
+            <a:r>
+              <a:rPr sz="1000" lang="zh-TW" dirty="0">
+                <a:solidFill>
+                  <a:srgbClr val="000000"/>
+                </a:solidFill>
+                <a:latin typeface="Arial Unicode MS"/>
+                <a:ea typeface="Arial Unicode MS"/>
+                <a:cs typeface="Arial Unicode MS"/>
+              </a:rPr>
+              <a:t>
+</a:t>
+            </a:r>
+          </a:p>
+          <a:p>
+            <a:pPr algn="l">
+              <a:lnSpc>
+                <a:spcPct val="115000"/>
+              </a:lnSpc>
+              <a:spcAft>
+                <a:spcPts val="500"/>
+              </a:spcAft>
+            </a:pPr>
+            <a:r>
+              <a:rPr sz="1000" lang="zh-TW" dirty="0">
+                <a:solidFill>
+                  <a:srgbClr val="000000"/>
+                </a:solidFill>
+                <a:latin typeface="Arial Unicode MS"/>
+                <a:ea typeface="Arial Unicode MS"/>
+                <a:cs typeface="Arial Unicode MS"/>
+              </a:rPr>
+              <a:t>第四題是文字題，把模擬器的射線接回真實的光達。
+</a:t>
+            </a:r>
+          </a:p>
+          <a:p>
+            <a:pPr algn="l">
+              <a:lnSpc>
+                <a:spcPct val="115000"/>
+              </a:lnSpc>
+              <a:spcAft>
+                <a:spcPts val="500"/>
+              </a:spcAft>
+            </a:pPr>
+            <a:r>
+              <a:rPr sz="1000" b="1" lang="zh-TW" dirty="0">
+                <a:solidFill>
+                  <a:srgbClr val="000000"/>
+                </a:solidFill>
+                <a:latin typeface="Arial Unicode MS"/>
+                <a:ea typeface="Arial Unicode MS"/>
+                <a:cs typeface="Arial Unicode MS"/>
+              </a:rPr>
+              <a:t>▍畫面上圈這裡</a:t>
+            </a:r>
+            <a:r>
+              <a:rPr sz="1000" lang="zh-TW" dirty="0">
+                <a:solidFill>
+                  <a:srgbClr val="000000"/>
+                </a:solidFill>
+                <a:latin typeface="Arial Unicode MS"/>
+                <a:ea typeface="Arial Unicode MS"/>
+                <a:cs typeface="Arial Unicode MS"/>
+              </a:rPr>
+              <a:t>
+</a:t>
+            </a:r>
+          </a:p>
+          <a:p>
+            <a:pPr algn="l">
+              <a:lnSpc>
+                <a:spcPct val="115000"/>
+              </a:lnSpc>
+              <a:spcAft>
+                <a:spcPts val="500"/>
+              </a:spcAft>
+            </a:pPr>
+            <a:r>
+              <a:rPr sz="1000" lang="zh-TW" dirty="0">
+                <a:solidFill>
+                  <a:srgbClr val="000000"/>
+                </a:solidFill>
+                <a:latin typeface="Arial Unicode MS"/>
+                <a:ea typeface="Arial Unicode MS"/>
+                <a:cs typeface="Arial Unicode MS"/>
+              </a:rPr>
+              <a:t>圈題目的「少了哪些能力」。提示他們回想第三週那六張感測器卡。
+</a:t>
+            </a:r>
+          </a:p>
+          <a:p>
+            <a:pPr algn="l">
+              <a:lnSpc>
+                <a:spcPct val="115000"/>
+              </a:lnSpc>
+              <a:spcAft>
+                <a:spcPts val="500"/>
+              </a:spcAft>
+            </a:pPr>
+            <a:r>
+              <a:rPr sz="1000" b="1" lang="zh-TW" dirty="0">
+                <a:solidFill>
+                  <a:srgbClr val="000000"/>
+                </a:solidFill>
+                <a:latin typeface="Arial Unicode MS"/>
+                <a:ea typeface="Arial Unicode MS"/>
+                <a:cs typeface="Arial Unicode MS"/>
+              </a:rPr>
+              <a:t>▍以下照著唸</a:t>
+            </a:r>
+            <a:r>
+              <a:rPr sz="1000" lang="zh-TW" dirty="0">
+                <a:solidFill>
+                  <a:srgbClr val="000000"/>
+                </a:solidFill>
+                <a:latin typeface="Arial Unicode MS"/>
+                <a:ea typeface="Arial Unicode MS"/>
+                <a:cs typeface="Arial Unicode MS"/>
+              </a:rPr>
+              <a:t>
+</a:t>
+            </a:r>
+          </a:p>
+          <a:p>
+            <a:pPr algn="l">
+              <a:lnSpc>
+                <a:spcPct val="115000"/>
+              </a:lnSpc>
+              <a:spcAft>
+                <a:spcPts val="500"/>
+              </a:spcAft>
+            </a:pPr>
+            <a:r>
               <a:rPr sz="1000" lang="zh-TW" dirty="0">
                 <a:solidFill>
                   <a:srgbClr val="000000"/>
@@ -4133,11 +5277,154 @@
                 <a:spcPct val="115000"/>
               </a:lnSpc>
               <a:spcAft>
-                <a:spcPts val="600"/>
-              </a:spcAft>
-            </a:pPr>
-            <a:r>
-              <a:rPr sz="1200" lang="zh-TW" dirty="0">
+                <a:spcPts val="500"/>
+              </a:spcAft>
+            </a:pPr>
+            <a:r>
+              <a:rPr sz="1000" b="1" lang="zh-TW" dirty="0">
+                <a:solidFill>
+                  <a:srgbClr val="000000"/>
+                </a:solidFill>
+                <a:latin typeface="Arial Unicode MS"/>
+                <a:ea typeface="Arial Unicode MS"/>
+                <a:cs typeface="Arial Unicode MS"/>
+              </a:rPr>
+              <a:t>▍這一張要做什麼</a:t>
+            </a:r>
+            <a:r>
+              <a:rPr sz="1000" lang="zh-TW" dirty="0">
+                <a:solidFill>
+                  <a:srgbClr val="000000"/>
+                </a:solidFill>
+                <a:latin typeface="Arial Unicode MS"/>
+                <a:ea typeface="Arial Unicode MS"/>
+                <a:cs typeface="Arial Unicode MS"/>
+              </a:rPr>
+              <a:t>
+</a:t>
+            </a:r>
+          </a:p>
+          <a:p>
+            <a:pPr algn="l">
+              <a:lnSpc>
+                <a:spcPct val="115000"/>
+              </a:lnSpc>
+              <a:spcAft>
+                <a:spcPts val="500"/>
+              </a:spcAft>
+            </a:pPr>
+            <a:r>
+              <a:rPr sz="1000" lang="zh-TW" dirty="0">
+                <a:solidFill>
+                  <a:srgbClr val="000000"/>
+                </a:solidFill>
+                <a:latin typeface="Arial Unicode MS"/>
+                <a:ea typeface="Arial Unicode MS"/>
+                <a:cs typeface="Arial Unicode MS"/>
+              </a:rPr>
+              <a:t>給提早做完的組別加碼：切換固定式與旋轉式光達。
+</a:t>
+            </a:r>
+          </a:p>
+          <a:p>
+            <a:pPr algn="l">
+              <a:lnSpc>
+                <a:spcPct val="115000"/>
+              </a:lnSpc>
+              <a:spcAft>
+                <a:spcPts val="500"/>
+              </a:spcAft>
+            </a:pPr>
+            <a:r>
+              <a:rPr sz="1000" b="1" lang="zh-TW" dirty="0">
+                <a:solidFill>
+                  <a:srgbClr val="000000"/>
+                </a:solidFill>
+                <a:latin typeface="Arial Unicode MS"/>
+                <a:ea typeface="Arial Unicode MS"/>
+                <a:cs typeface="Arial Unicode MS"/>
+              </a:rPr>
+              <a:t>▍畫面上圈這裡</a:t>
+            </a:r>
+            <a:r>
+              <a:rPr sz="1000" lang="zh-TW" dirty="0">
+                <a:solidFill>
+                  <a:srgbClr val="000000"/>
+                </a:solidFill>
+                <a:latin typeface="Arial Unicode MS"/>
+                <a:ea typeface="Arial Unicode MS"/>
+                <a:cs typeface="Arial Unicode MS"/>
+              </a:rPr>
+              <a:t>
+</a:t>
+            </a:r>
+          </a:p>
+          <a:p>
+            <a:pPr algn="l">
+              <a:lnSpc>
+                <a:spcPct val="115000"/>
+              </a:lnSpc>
+              <a:spcAft>
+                <a:spcPts val="500"/>
+              </a:spcAft>
+            </a:pPr>
+            <a:r>
+              <a:rPr sz="1000" lang="zh-TW" dirty="0">
+                <a:solidFill>
+                  <a:srgbClr val="000000"/>
+                </a:solidFill>
+                <a:latin typeface="Arial Unicode MS"/>
+                <a:ea typeface="Arial Unicode MS"/>
+                <a:cs typeface="Arial Unicode MS"/>
+              </a:rPr>
+              <a:t>圈兩個按鈕，再圈說明裡「輪流掃」三個字。
+</a:t>
+            </a:r>
+          </a:p>
+          <a:p>
+            <a:pPr algn="l">
+              <a:lnSpc>
+                <a:spcPct val="115000"/>
+              </a:lnSpc>
+              <a:spcAft>
+                <a:spcPts val="500"/>
+              </a:spcAft>
+            </a:pPr>
+            <a:r>
+              <a:rPr sz="1000" b="1" lang="zh-TW" dirty="0">
+                <a:solidFill>
+                  <a:srgbClr val="000000"/>
+                </a:solidFill>
+                <a:latin typeface="Arial Unicode MS"/>
+                <a:ea typeface="Arial Unicode MS"/>
+                <a:cs typeface="Arial Unicode MS"/>
+              </a:rPr>
+              <a:t>▍以下照著唸</a:t>
+            </a:r>
+            <a:r>
+              <a:rPr sz="1000" lang="zh-TW" dirty="0">
+                <a:solidFill>
+                  <a:srgbClr val="000000"/>
+                </a:solidFill>
+                <a:latin typeface="Arial Unicode MS"/>
+                <a:ea typeface="Arial Unicode MS"/>
+                <a:cs typeface="Arial Unicode MS"/>
+              </a:rPr>
+              <a:t>
+</a:t>
+            </a:r>
+          </a:p>
+          <a:p>
+            <a:pPr algn="l">
+              <a:lnSpc>
+                <a:spcPct val="115000"/>
+              </a:lnSpc>
+              <a:spcAft>
+                <a:spcPts val="500"/>
+              </a:spcAft>
+            </a:pPr>
+            <a:r>
+              <a:rPr sz="1000" lang="zh-TW" dirty="0">
                 <a:solidFill>
                   <a:srgbClr val="000000"/>
                 </a:solidFill>
@@ -4155,11 +5442,11 @@
                 <a:spcPct val="115000"/>
               </a:lnSpc>
               <a:spcAft>
-                <a:spcPts val="600"/>
-              </a:spcAft>
-            </a:pPr>
-            <a:r>
-              <a:rPr sz="1200" lang="zh-TW" dirty="0">
+                <a:spcPts val="500"/>
+              </a:spcAft>
+            </a:pPr>
+            <a:r>
+              <a:rPr sz="1000" lang="zh-TW" dirty="0">
                 <a:solidFill>
                   <a:srgbClr val="000000"/>
                 </a:solidFill>
@@ -4170,7 +5457,7 @@
               <a:t>模擬器上有一個新按鈕，可以把感測器從</a:t>
             </a:r>
             <a:r>
-              <a:rPr sz="1200" b="1" lang="zh-TW" dirty="0">
+              <a:rPr sz="1000" b="1" lang="zh-TW" dirty="0">
                 <a:solidFill>
                   <a:srgbClr val="000000"/>
                 </a:solidFill>
@@ -4181,7 +5468,7 @@
               <a:t>固定式</a:t>
             </a:r>
             <a:r>
-              <a:rPr sz="1200" lang="zh-TW" dirty="0">
+              <a:rPr sz="1000" lang="zh-TW" dirty="0">
                 <a:solidFill>
                   <a:srgbClr val="000000"/>
                 </a:solidFill>
@@ -4192,7 +5479,7 @@
               <a:t>切換成 </a:t>
             </a:r>
             <a:r>
-              <a:rPr sz="1200" b="1" lang="zh-TW" dirty="0">
+              <a:rPr sz="1000" b="1" lang="zh-TW" dirty="0">
                 <a:solidFill>
                   <a:srgbClr val="000000"/>
                 </a:solidFill>
@@ -4203,7 +5490,7 @@
               <a:t>360 度旋轉式</a:t>
             </a:r>
             <a:r>
-              <a:rPr sz="1200" lang="zh-TW" dirty="0">
+              <a:rPr sz="1000" lang="zh-TW" dirty="0">
                 <a:solidFill>
                   <a:srgbClr val="000000"/>
                 </a:solidFill>
@@ -4221,11 +5508,11 @@
                 <a:spcPct val="115000"/>
               </a:lnSpc>
               <a:spcAft>
-                <a:spcPts val="600"/>
-              </a:spcAft>
-            </a:pPr>
-            <a:r>
-              <a:rPr sz="1200" lang="zh-TW" dirty="0">
+                <a:spcPts val="500"/>
+              </a:spcAft>
+            </a:pPr>
+            <a:r>
+              <a:rPr sz="1000" lang="zh-TW" dirty="0">
                 <a:solidFill>
                   <a:srgbClr val="000000"/>
                 </a:solidFill>
@@ -4243,11 +5530,11 @@
                 <a:spcPct val="115000"/>
               </a:lnSpc>
               <a:spcAft>
-                <a:spcPts val="600"/>
-              </a:spcAft>
-            </a:pPr>
-            <a:r>
-              <a:rPr sz="1200" b="1" lang="zh-TW" dirty="0">
+                <a:spcPts val="500"/>
+              </a:spcAft>
+            </a:pPr>
+            <a:r>
+              <a:rPr sz="1000" b="1" lang="zh-TW" dirty="0">
                 <a:solidFill>
                   <a:srgbClr val="000000"/>
                 </a:solidFill>
@@ -4258,7 +5545,7 @@
               <a:t>固定式</a:t>
             </a:r>
             <a:r>
-              <a:rPr sz="1200" lang="zh-TW" dirty="0">
+              <a:rPr sz="1000" lang="zh-TW" dirty="0">
                 <a:solidFill>
                   <a:srgbClr val="000000"/>
                 </a:solidFill>
@@ -4269,7 +5556,7 @@
               <a:t>只看前方那個扇形，可是那個扇形裡的資料</a:t>
             </a:r>
             <a:r>
-              <a:rPr sz="1200" b="1" lang="zh-TW" dirty="0">
+              <a:rPr sz="1000" b="1" lang="zh-TW" dirty="0">
                 <a:solidFill>
                   <a:srgbClr val="000000"/>
                 </a:solidFill>
@@ -4280,7 +5567,7 @@
               <a:t>永遠是最新的</a:t>
             </a:r>
             <a:r>
-              <a:rPr sz="1200" lang="zh-TW" dirty="0">
+              <a:rPr sz="1000" lang="zh-TW" dirty="0">
                 <a:solidFill>
                   <a:srgbClr val="000000"/>
                 </a:solidFill>
@@ -4298,11 +5585,11 @@
                 <a:spcPct val="115000"/>
               </a:lnSpc>
               <a:spcAft>
-                <a:spcPts val="600"/>
-              </a:spcAft>
-            </a:pPr>
-            <a:r>
-              <a:rPr sz="1200" b="1" lang="zh-TW" dirty="0">
+                <a:spcPts val="500"/>
+              </a:spcAft>
+            </a:pPr>
+            <a:r>
+              <a:rPr sz="1000" b="1" lang="zh-TW" dirty="0">
                 <a:solidFill>
                   <a:srgbClr val="000000"/>
                 </a:solidFill>
@@ -4313,7 +5600,7 @@
               <a:t>旋轉式</a:t>
             </a:r>
             <a:r>
-              <a:rPr sz="1200" lang="zh-TW" dirty="0">
+              <a:rPr sz="1000" lang="zh-TW" dirty="0">
                 <a:solidFill>
                   <a:srgbClr val="000000"/>
                 </a:solidFill>
@@ -4324,7 +5611,7 @@
               <a:t>看得到一整圈，可是每個方向</a:t>
             </a:r>
             <a:r>
-              <a:rPr sz="1200" b="1" lang="zh-TW" dirty="0">
+              <a:rPr sz="1000" b="1" lang="zh-TW" dirty="0">
                 <a:solidFill>
                   <a:srgbClr val="000000"/>
                 </a:solidFill>
@@ -4335,7 +5622,7 @@
               <a:t>要等它轉一圈才更新一次</a:t>
             </a:r>
             <a:r>
-              <a:rPr sz="1200" lang="zh-TW" dirty="0">
+              <a:rPr sz="1000" lang="zh-TW" dirty="0">
                 <a:solidFill>
                   <a:srgbClr val="000000"/>
                 </a:solidFill>
@@ -4353,11 +5640,11 @@
                 <a:spcPct val="115000"/>
               </a:lnSpc>
               <a:spcAft>
-                <a:spcPts val="600"/>
-              </a:spcAft>
-            </a:pPr>
-            <a:r>
-              <a:rPr sz="1200" lang="zh-TW" dirty="0">
+                <a:spcPts val="500"/>
+              </a:spcAft>
+            </a:pPr>
+            <a:r>
+              <a:rPr sz="1000" lang="zh-TW" dirty="0">
                 <a:solidFill>
                   <a:srgbClr val="000000"/>
                 </a:solidFill>
@@ -4375,11 +5662,11 @@
                 <a:spcPct val="115000"/>
               </a:lnSpc>
               <a:spcAft>
-                <a:spcPts val="600"/>
-              </a:spcAft>
-            </a:pPr>
-            <a:r>
-              <a:rPr sz="1200" lang="zh-TW" dirty="0">
+                <a:spcPts val="500"/>
+              </a:spcAft>
+            </a:pPr>
+            <a:r>
+              <a:rPr sz="1000" lang="zh-TW" dirty="0">
                 <a:solidFill>
                   <a:srgbClr val="000000"/>
                 </a:solidFill>
@@ -4397,11 +5684,11 @@
                 <a:spcPct val="115000"/>
               </a:lnSpc>
               <a:spcAft>
-                <a:spcPts val="600"/>
-              </a:spcAft>
-            </a:pPr>
-            <a:r>
-              <a:rPr sz="1200" lang="zh-TW" dirty="0">
+                <a:spcPts val="500"/>
+              </a:spcAft>
+            </a:pPr>
+            <a:r>
+              <a:rPr sz="1000" lang="zh-TW" dirty="0">
                 <a:solidFill>
                   <a:srgbClr val="000000"/>
                 </a:solidFill>
@@ -4419,11 +5706,11 @@
                 <a:spcPct val="115000"/>
               </a:lnSpc>
               <a:spcAft>
-                <a:spcPts val="600"/>
-              </a:spcAft>
-            </a:pPr>
-            <a:r>
-              <a:rPr sz="1200" lang="zh-TW" dirty="0">
+                <a:spcPts val="500"/>
+              </a:spcAft>
+            </a:pPr>
+            <a:r>
+              <a:rPr sz="1000" lang="zh-TW" dirty="0">
                 <a:solidFill>
                   <a:srgbClr val="000000"/>
                 </a:solidFill>
@@ -4441,11 +5728,11 @@
                 <a:spcPct val="115000"/>
               </a:lnSpc>
               <a:spcAft>
-                <a:spcPts val="600"/>
-              </a:spcAft>
-            </a:pPr>
-            <a:r>
-              <a:rPr sz="1200" lang="zh-TW" dirty="0">
+                <a:spcPts val="500"/>
+              </a:spcAft>
+            </a:pPr>
+            <a:r>
+              <a:rPr sz="1000" lang="zh-TW" dirty="0">
                 <a:solidFill>
                   <a:srgbClr val="000000"/>
                 </a:solidFill>
@@ -4566,6 +5853,149 @@
               </a:spcAft>
             </a:pPr>
             <a:r>
+              <a:rPr sz="1000" b="1" lang="zh-TW" dirty="0">
+                <a:solidFill>
+                  <a:srgbClr val="000000"/>
+                </a:solidFill>
+                <a:latin typeface="Arial Unicode MS"/>
+                <a:ea typeface="Arial Unicode MS"/>
+                <a:cs typeface="Arial Unicode MS"/>
+              </a:rPr>
+              <a:t>▍這一張要做什麼</a:t>
+            </a:r>
+            <a:r>
+              <a:rPr sz="1000" lang="zh-TW" dirty="0">
+                <a:solidFill>
+                  <a:srgbClr val="000000"/>
+                </a:solidFill>
+                <a:latin typeface="Arial Unicode MS"/>
+                <a:ea typeface="Arial Unicode MS"/>
+                <a:cs typeface="Arial Unicode MS"/>
+              </a:rPr>
+              <a:t>
+</a:t>
+            </a:r>
+          </a:p>
+          <a:p>
+            <a:pPr algn="l">
+              <a:lnSpc>
+                <a:spcPct val="115000"/>
+              </a:lnSpc>
+              <a:spcAft>
+                <a:spcPts val="500"/>
+              </a:spcAft>
+            </a:pPr>
+            <a:r>
+              <a:rPr sz="1000" lang="zh-TW" dirty="0">
+                <a:solidFill>
+                  <a:srgbClr val="000000"/>
+                </a:solidFill>
+                <a:latin typeface="Arial Unicode MS"/>
+                <a:ea typeface="Arial Unicode MS"/>
+                <a:cs typeface="Arial Unicode MS"/>
+              </a:rPr>
+              <a:t>上台環節。這是今天最重要的十分鐘，全班的數字要在白板上合成一張表。
+</a:t>
+            </a:r>
+          </a:p>
+          <a:p>
+            <a:pPr algn="l">
+              <a:lnSpc>
+                <a:spcPct val="115000"/>
+              </a:lnSpc>
+              <a:spcAft>
+                <a:spcPts val="500"/>
+              </a:spcAft>
+            </a:pPr>
+            <a:r>
+              <a:rPr sz="1000" b="1" lang="zh-TW" dirty="0">
+                <a:solidFill>
+                  <a:srgbClr val="000000"/>
+                </a:solidFill>
+                <a:latin typeface="Arial Unicode MS"/>
+                <a:ea typeface="Arial Unicode MS"/>
+                <a:cs typeface="Arial Unicode MS"/>
+              </a:rPr>
+              <a:t>▍畫面上圈這裡</a:t>
+            </a:r>
+            <a:r>
+              <a:rPr sz="1000" lang="zh-TW" dirty="0">
+                <a:solidFill>
+                  <a:srgbClr val="000000"/>
+                </a:solidFill>
+                <a:latin typeface="Arial Unicode MS"/>
+                <a:ea typeface="Arial Unicode MS"/>
+                <a:cs typeface="Arial Unicode MS"/>
+              </a:rPr>
+              <a:t>
+</a:t>
+            </a:r>
+          </a:p>
+          <a:p>
+            <a:pPr algn="l">
+              <a:lnSpc>
+                <a:spcPct val="115000"/>
+              </a:lnSpc>
+              <a:spcAft>
+                <a:spcPts val="500"/>
+              </a:spcAft>
+            </a:pPr>
+            <a:r>
+              <a:rPr sz="1000" lang="zh-TW" dirty="0">
+                <a:solidFill>
+                  <a:srgbClr val="000000"/>
+                </a:solidFill>
+                <a:latin typeface="Arial Unicode MS"/>
+                <a:ea typeface="Arial Unicode MS"/>
+                <a:cs typeface="Arial Unicode MS"/>
+              </a:rPr>
+              <a:t>在白板上開三欄記數字。揭曉那一段請圈第 4 張講過的射線長度——重點是「過了門檻再加沒有用」。
+</a:t>
+            </a:r>
+          </a:p>
+          <a:p>
+            <a:pPr algn="l">
+              <a:lnSpc>
+                <a:spcPct val="115000"/>
+              </a:lnSpc>
+              <a:spcAft>
+                <a:spcPts val="500"/>
+              </a:spcAft>
+            </a:pPr>
+            <a:r>
+              <a:rPr sz="1000" b="1" lang="zh-TW" dirty="0">
+                <a:solidFill>
+                  <a:srgbClr val="000000"/>
+                </a:solidFill>
+                <a:latin typeface="Arial Unicode MS"/>
+                <a:ea typeface="Arial Unicode MS"/>
+                <a:cs typeface="Arial Unicode MS"/>
+              </a:rPr>
+              <a:t>▍以下照著唸</a:t>
+            </a:r>
+            <a:r>
+              <a:rPr sz="1000" lang="zh-TW" dirty="0">
+                <a:solidFill>
+                  <a:srgbClr val="000000"/>
+                </a:solidFill>
+                <a:latin typeface="Arial Unicode MS"/>
+                <a:ea typeface="Arial Unicode MS"/>
+                <a:cs typeface="Arial Unicode MS"/>
+              </a:rPr>
+              <a:t>
+</a:t>
+            </a:r>
+          </a:p>
+          <a:p>
+            <a:pPr algn="l">
+              <a:lnSpc>
+                <a:spcPct val="115000"/>
+              </a:lnSpc>
+              <a:spcAft>
+                <a:spcPts val="500"/>
+              </a:spcAft>
+            </a:pPr>
+            <a:r>
               <a:rPr sz="1000" lang="zh-TW" dirty="0">
                 <a:solidFill>
                   <a:srgbClr val="000000"/>
@@ -5260,6 +6690,149 @@
         <p:txBody>
           <a:bodyPr vert="horz" wrap="square" anchor="t" lIns="91440" rIns="91440" tIns="45720" bIns="45720"/>
           <a:lstStyle/>
+          <a:p>
+            <a:pPr algn="l">
+              <a:lnSpc>
+                <a:spcPct val="115000"/>
+              </a:lnSpc>
+              <a:spcAft>
+                <a:spcPts val="600"/>
+              </a:spcAft>
+            </a:pPr>
+            <a:r>
+              <a:rPr sz="1200" b="1" lang="zh-TW" dirty="0">
+                <a:solidFill>
+                  <a:srgbClr val="000000"/>
+                </a:solidFill>
+                <a:latin typeface="Arial Unicode MS"/>
+                <a:ea typeface="Arial Unicode MS"/>
+                <a:cs typeface="Arial Unicode MS"/>
+              </a:rPr>
+              <a:t>▍這一張要做什麼</a:t>
+            </a:r>
+            <a:r>
+              <a:rPr sz="1200" lang="zh-TW" dirty="0">
+                <a:solidFill>
+                  <a:srgbClr val="000000"/>
+                </a:solidFill>
+                <a:latin typeface="Arial Unicode MS"/>
+                <a:ea typeface="Arial Unicode MS"/>
+                <a:cs typeface="Arial Unicode MS"/>
+              </a:rPr>
+              <a:t>
+</a:t>
+            </a:r>
+          </a:p>
+          <a:p>
+            <a:pPr algn="l">
+              <a:lnSpc>
+                <a:spcPct val="115000"/>
+              </a:lnSpc>
+              <a:spcAft>
+                <a:spcPts val="600"/>
+              </a:spcAft>
+            </a:pPr>
+            <a:r>
+              <a:rPr sz="1200" lang="zh-TW" dirty="0">
+                <a:solidFill>
+                  <a:srgbClr val="000000"/>
+                </a:solidFill>
+                <a:latin typeface="Arial Unicode MS"/>
+                <a:ea typeface="Arial Unicode MS"/>
+                <a:cs typeface="Arial Unicode MS"/>
+              </a:rPr>
+              <a:t>四句是非題，當作三節課的總複習。
+</a:t>
+            </a:r>
+          </a:p>
+          <a:p>
+            <a:pPr algn="l">
+              <a:lnSpc>
+                <a:spcPct val="115000"/>
+              </a:lnSpc>
+              <a:spcAft>
+                <a:spcPts val="600"/>
+              </a:spcAft>
+            </a:pPr>
+            <a:r>
+              <a:rPr sz="1200" b="1" lang="zh-TW" dirty="0">
+                <a:solidFill>
+                  <a:srgbClr val="000000"/>
+                </a:solidFill>
+                <a:latin typeface="Arial Unicode MS"/>
+                <a:ea typeface="Arial Unicode MS"/>
+                <a:cs typeface="Arial Unicode MS"/>
+              </a:rPr>
+              <a:t>▍畫面上圈這裡</a:t>
+            </a:r>
+            <a:r>
+              <a:rPr sz="1200" lang="zh-TW" dirty="0">
+                <a:solidFill>
+                  <a:srgbClr val="000000"/>
+                </a:solidFill>
+                <a:latin typeface="Arial Unicode MS"/>
+                <a:ea typeface="Arial Unicode MS"/>
+                <a:cs typeface="Arial Unicode MS"/>
+              </a:rPr>
+              <a:t>
+</a:t>
+            </a:r>
+          </a:p>
+          <a:p>
+            <a:pPr algn="l">
+              <a:lnSpc>
+                <a:spcPct val="115000"/>
+              </a:lnSpc>
+              <a:spcAft>
+                <a:spcPts val="600"/>
+              </a:spcAft>
+            </a:pPr>
+            <a:r>
+              <a:rPr sz="1200" lang="zh-TW" dirty="0">
+                <a:solidFill>
+                  <a:srgbClr val="000000"/>
+                </a:solidFill>
+                <a:latin typeface="Arial Unicode MS"/>
+                <a:ea typeface="Arial Unicode MS"/>
+                <a:cs typeface="Arial Unicode MS"/>
+              </a:rPr>
+              <a:t>一句一句圈，每圈一句給一分鐘，先讓學生表態再公布答案。
+</a:t>
+            </a:r>
+          </a:p>
+          <a:p>
+            <a:pPr algn="l">
+              <a:lnSpc>
+                <a:spcPct val="115000"/>
+              </a:lnSpc>
+              <a:spcAft>
+                <a:spcPts val="600"/>
+              </a:spcAft>
+            </a:pPr>
+            <a:r>
+              <a:rPr sz="1200" b="1" lang="zh-TW" dirty="0">
+                <a:solidFill>
+                  <a:srgbClr val="000000"/>
+                </a:solidFill>
+                <a:latin typeface="Arial Unicode MS"/>
+                <a:ea typeface="Arial Unicode MS"/>
+                <a:cs typeface="Arial Unicode MS"/>
+              </a:rPr>
+              <a:t>▍以下照著唸</a:t>
+            </a:r>
+            <a:r>
+              <a:rPr sz="1200" lang="zh-TW" dirty="0">
+                <a:solidFill>
+                  <a:srgbClr val="000000"/>
+                </a:solidFill>
+                <a:latin typeface="Arial Unicode MS"/>
+                <a:ea typeface="Arial Unicode MS"/>
+                <a:cs typeface="Arial Unicode MS"/>
+              </a:rPr>
+              <a:t>
+</a:t>
+            </a:r>
+          </a:p>
           <a:p>
             <a:pPr algn="l">
               <a:lnSpc>

--- a/第四週(10-01)/第四週_第3節_簡報.pptx
+++ b/第四週(10-01)/第四週_第3節_簡報.pptx
@@ -5886,6 +5886,72 @@
                 <a:cs typeface="Arial Unicode MS"/>
               </a:rPr>
               <a:t>，大部分的人會答對——上週第三週我們整整花了一節課在講它。
+</a:t>
+            </a:r>
+          </a:p>
+          <a:p>
+            <a:pPr algn="l">
+              <a:lnSpc>
+                <a:spcPct val="100000"/>
+              </a:lnSpc>
+              <a:spcAft>
+                <a:spcPts val="400"/>
+              </a:spcAft>
+            </a:pPr>
+            <a:r>
+              <a:rPr sz="1200" lang="zh-TW" dirty="0">
+                <a:solidFill>
+                  <a:srgbClr val="000000"/>
+                </a:solidFill>
+                <a:latin typeface="Arial Unicode MS"/>
+                <a:ea typeface="Arial Unicode MS"/>
+                <a:cs typeface="Arial Unicode MS"/>
+              </a:rPr>
+              <a:t>更準確一點：是</a:t>
+            </a:r>
+            <a:r>
+              <a:rPr sz="1200" b="1" lang="zh-TW" dirty="0">
+                <a:solidFill>
+                  <a:srgbClr val="000000"/>
+                </a:solidFill>
+                <a:latin typeface="Arial Unicode MS"/>
+                <a:ea typeface="Arial Unicode MS"/>
+                <a:cs typeface="Arial Unicode MS"/>
+              </a:rPr>
+              <a:t>光達的一層掃描線</a:t>
+            </a:r>
+            <a:r>
+              <a:rPr sz="1200" lang="zh-TW" dirty="0">
+                <a:solidFill>
+                  <a:srgbClr val="000000"/>
+                </a:solidFill>
+                <a:latin typeface="Arial Unicode MS"/>
+                <a:ea typeface="Arial Unicode MS"/>
+                <a:cs typeface="Arial Unicode MS"/>
+              </a:rPr>
+              <a:t>。真光達上下分好幾層，一個行人會打到幾十個點；我們這裡只有一層、幾條。所以等一下揭曉那頁講「九條射線追不住那個行人」，那是</a:t>
+            </a:r>
+            <a:r>
+              <a:rPr sz="1200" b="1" lang="zh-TW" dirty="0">
+                <a:solidFill>
+                  <a:srgbClr val="000000"/>
+                </a:solidFill>
+                <a:latin typeface="Arial Unicode MS"/>
+                <a:ea typeface="Arial Unicode MS"/>
+                <a:cs typeface="Arial Unicode MS"/>
+              </a:rPr>
+              <a:t>這支模擬器</a:t>
+            </a:r>
+            <a:r>
+              <a:rPr sz="1200" lang="zh-TW" dirty="0">
+                <a:solidFill>
+                  <a:srgbClr val="000000"/>
+                </a:solidFill>
+                <a:latin typeface="Arial Unicode MS"/>
+                <a:ea typeface="Arial Unicode MS"/>
+                <a:cs typeface="Arial Unicode MS"/>
+              </a:rPr>
+              <a:t>的限制，不是真光達的。
 </a:t>
             </a:r>
           </a:p>

--- a/第四週(10-01)/第四週_第3節_簡報.pptx
+++ b/第四週(10-01)/第四週_第3節_簡報.pptx
@@ -4410,11 +4410,11 @@
                 <a:spcPct val="100000"/>
               </a:lnSpc>
               <a:spcAft>
-                <a:spcPts val="283"/>
+                <a:spcPts val="267"/>
               </a:spcAft>
             </a:pPr>
             <a:r>
-              <a:rPr sz="850" lang="zh-TW" dirty="0">
+              <a:rPr sz="800" lang="zh-TW" dirty="0">
                 <a:solidFill>
                   <a:srgbClr val="000000"/>
                 </a:solidFill>
@@ -4425,7 +4425,7 @@
               <a:t>第二題，十三分鐘，今天的主菜，</a:t>
             </a:r>
             <a:r>
-              <a:rPr sz="850" b="1" lang="zh-TW" dirty="0">
+              <a:rPr sz="800" b="1" lang="zh-TW" dirty="0">
                 <a:solidFill>
                   <a:srgbClr val="000000"/>
                 </a:solidFill>
@@ -4436,7 +4436,7 @@
               <a:t>也是今天唯一要交的作業</a:t>
             </a:r>
             <a:r>
-              <a:rPr sz="850" lang="zh-TW" dirty="0">
+              <a:rPr sz="800" lang="zh-TW" dirty="0">
                 <a:solidFill>
                   <a:srgbClr val="000000"/>
                 </a:solidFill>
@@ -4447,7 +4447,7 @@
               <a:t>。目標：調三個參數，讓車子在撞車前</a:t>
             </a:r>
             <a:r>
-              <a:rPr sz="850" b="1" lang="zh-TW" dirty="0">
+              <a:rPr sz="800" b="1" lang="zh-TW" dirty="0">
                 <a:solidFill>
                   <a:srgbClr val="000000"/>
                 </a:solidFill>
@@ -4458,15 +4458,15 @@
               <a:t>撐得最久</a:t>
             </a:r>
             <a:r>
-              <a:rPr sz="850" lang="zh-TW" dirty="0">
-                <a:solidFill>
-                  <a:srgbClr val="000000"/>
-                </a:solidFill>
-                <a:latin typeface="Arial Unicode MS"/>
-                <a:ea typeface="Arial Unicode MS"/>
-                <a:cs typeface="Arial Unicode MS"/>
-              </a:rPr>
-              <a:t>。我先講清楚，為什麼這一題是比「撐最久」，而不是「不准撞」。
+              <a:rPr sz="800" lang="zh-TW" dirty="0">
+                <a:solidFill>
+                  <a:srgbClr val="000000"/>
+                </a:solidFill>
+                <a:latin typeface="Arial Unicode MS"/>
+                <a:ea typeface="Arial Unicode MS"/>
+                <a:cs typeface="Arial Unicode MS"/>
+              </a:rPr>
+              <a:t>。
 </a:t>
             </a:r>
           </a:p>
@@ -4476,66 +4476,264 @@
                 <a:spcPct val="100000"/>
               </a:lnSpc>
               <a:spcAft>
-                <a:spcPts val="283"/>
+                <a:spcPts val="267"/>
               </a:spcAft>
             </a:pPr>
             <a:r>
-              <a:rPr sz="850" lang="zh-TW" dirty="0">
-                <a:solidFill>
-                  <a:srgbClr val="000000"/>
-                </a:solidFill>
-                <a:latin typeface="Arial Unicode MS"/>
-                <a:ea typeface="Arial Unicode MS"/>
-                <a:cs typeface="Arial Unicode MS"/>
-              </a:rPr>
-              <a:t>在開始調之前，請各組先做一件事：</a:t>
-            </a:r>
-            <a:r>
-              <a:rPr sz="850" b="1" lang="zh-TW" dirty="0">
-                <a:solidFill>
-                  <a:srgbClr val="000000"/>
-                </a:solidFill>
-                <a:latin typeface="Arial Unicode MS"/>
-                <a:ea typeface="Arial Unicode MS"/>
-                <a:cs typeface="Arial Unicode MS"/>
-              </a:rPr>
-              <a:t>把左邊的「固定車流」打勾，種子挑一個會早撞的——三、八、九、十二、十四都可以</a:t>
-            </a:r>
-            <a:r>
-              <a:rPr sz="850" lang="zh-TW" dirty="0">
-                <a:solidFill>
-                  <a:srgbClr val="000000"/>
-                </a:solidFill>
-                <a:latin typeface="Arial Unicode MS"/>
-                <a:ea typeface="Arial Unicode MS"/>
-                <a:cs typeface="Arial Unicode MS"/>
-              </a:rPr>
-              <a:t>，這幾個用預設參數大約八秒就撞，各位才有東西可以改。（如果你的種子跑超過兩分鐘都不撞，換一個。）為什麼？第一題各位已經看到了，</a:t>
-            </a:r>
-            <a:r>
-              <a:rPr sz="850" b="1" lang="zh-TW" dirty="0">
-                <a:solidFill>
-                  <a:srgbClr val="000000"/>
-                </a:solidFill>
-                <a:latin typeface="Arial Unicode MS"/>
-                <a:ea typeface="Arial Unicode MS"/>
-                <a:cs typeface="Arial Unicode MS"/>
-              </a:rPr>
-              <a:t>換一個種子就撞在不同的地方</a:t>
-            </a:r>
-            <a:r>
-              <a:rPr sz="850" lang="zh-TW" dirty="0">
-                <a:solidFill>
-                  <a:srgbClr val="000000"/>
-                </a:solidFill>
-                <a:latin typeface="Arial Unicode MS"/>
-                <a:ea typeface="Arial Unicode MS"/>
-                <a:cs typeface="Arial Unicode MS"/>
-              </a:rPr>
-              <a:t>。如果每一趟的車流都不一樣，你根本分不出秒數變長是因為你調對了，還是因為這一趟運氣好。固定車流之後按重新開始，出現的會是</a:t>
-            </a:r>
-            <a:r>
-              <a:rPr sz="850" b="1" lang="zh-TW" dirty="0">
+              <a:rPr sz="800" lang="zh-TW" dirty="0">
+                <a:solidFill>
+                  <a:srgbClr val="000000"/>
+                </a:solidFill>
+                <a:latin typeface="Arial Unicode MS"/>
+                <a:ea typeface="Arial Unicode MS"/>
+                <a:cs typeface="Arial Unicode MS"/>
+              </a:rPr>
+              <a:t>先連回第二節。第二節說「模擬的用法是掃參數」，那時候掃的是</a:t>
+            </a:r>
+            <a:r>
+              <a:rPr sz="800" b="1" lang="zh-TW" dirty="0">
+                <a:solidFill>
+                  <a:srgbClr val="000000"/>
+                </a:solidFill>
+                <a:latin typeface="Arial Unicode MS"/>
+                <a:ea typeface="Arial Unicode MS"/>
+                <a:cs typeface="Arial Unicode MS"/>
+              </a:rPr>
+              <a:t>場景</a:t>
+            </a:r>
+            <a:r>
+              <a:rPr sz="800" lang="zh-TW" dirty="0">
+                <a:solidFill>
+                  <a:srgbClr val="000000"/>
+                </a:solidFill>
+                <a:latin typeface="Arial Unicode MS"/>
+                <a:ea typeface="Arial Unicode MS"/>
+                <a:cs typeface="Arial Unicode MS"/>
+              </a:rPr>
+              <a:t>——距離二十到六十、減速度三到八、車速四十到七十，展開成三千一百五十七個具體場景。</a:t>
+            </a:r>
+            <a:r>
+              <a:rPr sz="800" b="1" lang="zh-TW" dirty="0">
+                <a:solidFill>
+                  <a:srgbClr val="000000"/>
+                </a:solidFill>
+                <a:latin typeface="Arial Unicode MS"/>
+                <a:ea typeface="Arial Unicode MS"/>
+                <a:cs typeface="Arial Unicode MS"/>
+              </a:rPr>
+              <a:t>今天反過來：場景我幫各位鎖死，要掃的是規格。</a:t>
+            </a:r>
+            <a:r>
+              <a:rPr sz="800" lang="zh-TW" dirty="0">
+                <a:solidFill>
+                  <a:srgbClr val="000000"/>
+                </a:solidFill>
+                <a:latin typeface="Arial Unicode MS"/>
+                <a:ea typeface="Arial Unicode MS"/>
+                <a:cs typeface="Arial Unicode MS"/>
+              </a:rPr>
+              <a:t>三層現在是這樣：</a:t>
+            </a:r>
+            <a:r>
+              <a:rPr sz="800" b="1" lang="zh-TW" dirty="0">
+                <a:solidFill>
+                  <a:srgbClr val="000000"/>
+                </a:solidFill>
+                <a:latin typeface="Arial Unicode MS"/>
+                <a:ea typeface="Arial Unicode MS"/>
+                <a:cs typeface="Arial Unicode MS"/>
+              </a:rPr>
+              <a:t>功能場景</a:t>
+            </a:r>
+            <a:r>
+              <a:rPr sz="800" lang="zh-TW" dirty="0">
+                <a:solidFill>
+                  <a:srgbClr val="000000"/>
+                </a:solidFill>
+                <a:latin typeface="Arial Unicode MS"/>
+                <a:ea typeface="Arial Unicode MS"/>
+                <a:cs typeface="Arial Unicode MS"/>
+              </a:rPr>
+              <a:t>＝「河內尖峰」（選單選好就鎖住）；</a:t>
+            </a:r>
+            <a:r>
+              <a:rPr sz="800" b="1" lang="zh-TW" dirty="0">
+                <a:solidFill>
+                  <a:srgbClr val="000000"/>
+                </a:solidFill>
+                <a:latin typeface="Arial Unicode MS"/>
+                <a:ea typeface="Arial Unicode MS"/>
+                <a:cs typeface="Arial Unicode MS"/>
+              </a:rPr>
+              <a:t>邏輯場景</a:t>
+            </a:r>
+            <a:r>
+              <a:rPr sz="800" lang="zh-TW" dirty="0">
+                <a:solidFill>
+                  <a:srgbClr val="000000"/>
+                </a:solidFill>
+                <a:latin typeface="Arial Unicode MS"/>
+                <a:ea typeface="Arial Unicode MS"/>
+                <a:cs typeface="Arial Unicode MS"/>
+              </a:rPr>
+              <a:t>＝那一整組設定，密度七、機車海、違停、行人、晴天、時速四十（選單一次設好）；</a:t>
+            </a:r>
+            <a:r>
+              <a:rPr sz="800" b="1" lang="zh-TW" dirty="0">
+                <a:solidFill>
+                  <a:srgbClr val="000000"/>
+                </a:solidFill>
+                <a:latin typeface="Arial Unicode MS"/>
+                <a:ea typeface="Arial Unicode MS"/>
+                <a:cs typeface="Arial Unicode MS"/>
+              </a:rPr>
+              <a:t>具體場景</a:t>
+            </a:r>
+            <a:r>
+              <a:rPr sz="800" lang="zh-TW" dirty="0">
+                <a:solidFill>
+                  <a:srgbClr val="000000"/>
+                </a:solidFill>
+                <a:latin typeface="Arial Unicode MS"/>
+                <a:ea typeface="Arial Unicode MS"/>
+                <a:cs typeface="Arial Unicode MS"/>
+              </a:rPr>
+              <a:t>＝各位填的那個種子。
+</a:t>
+            </a:r>
+          </a:p>
+          <a:p>
+            <a:pPr algn="l">
+              <a:lnSpc>
+                <a:spcPct val="100000"/>
+              </a:lnSpc>
+              <a:spcAft>
+                <a:spcPts val="267"/>
+              </a:spcAft>
+            </a:pPr>
+            <a:r>
+              <a:rPr sz="800" lang="zh-TW" dirty="0">
+                <a:solidFill>
+                  <a:srgbClr val="000000"/>
+                </a:solidFill>
+                <a:latin typeface="Arial Unicode MS"/>
+                <a:ea typeface="Arial Unicode MS"/>
+                <a:cs typeface="Arial Unicode MS"/>
+              </a:rPr>
+              <a:t>所以手上唯一會動的是</a:t>
+            </a:r>
+            <a:r>
+              <a:rPr sz="800" b="1" lang="zh-TW" dirty="0">
+                <a:solidFill>
+                  <a:srgbClr val="000000"/>
+                </a:solidFill>
+                <a:latin typeface="Arial Unicode MS"/>
+                <a:ea typeface="Arial Unicode MS"/>
+                <a:cs typeface="Arial Unicode MS"/>
+              </a:rPr>
+              <a:t>射線數、長度、張角</a:t>
+            </a:r>
+            <a:r>
+              <a:rPr sz="800" lang="zh-TW" dirty="0">
+                <a:solidFill>
+                  <a:srgbClr val="000000"/>
+                </a:solidFill>
+                <a:latin typeface="Arial Unicode MS"/>
+                <a:ea typeface="Arial Unicode MS"/>
+                <a:cs typeface="Arial Unicode MS"/>
+              </a:rPr>
+              <a:t>——</a:t>
+            </a:r>
+            <a:r>
+              <a:rPr sz="800" b="1" lang="zh-TW" dirty="0">
+                <a:solidFill>
+                  <a:srgbClr val="000000"/>
+                </a:solidFill>
+                <a:latin typeface="Arial Unicode MS"/>
+                <a:ea typeface="Arial Unicode MS"/>
+                <a:cs typeface="Arial Unicode MS"/>
+              </a:rPr>
+              <a:t>那不是場景，那是車子的規格。</a:t>
+            </a:r>
+            <a:r>
+              <a:rPr sz="800" lang="zh-TW" dirty="0">
+                <a:solidFill>
+                  <a:srgbClr val="000000"/>
+                </a:solidFill>
+                <a:latin typeface="Arial Unicode MS"/>
+                <a:ea typeface="Arial Unicode MS"/>
+                <a:cs typeface="Arial Unicode MS"/>
+              </a:rPr>
+              <a:t>這就是為什麼「固定車流」一定要打勾：場景不鎖死，你分不出秒數變長是規格的功勞還是運氣。（第三題會打開雨天，那一題是故意讓各位</a:t>
+            </a:r>
+            <a:r>
+              <a:rPr sz="800" b="1" lang="zh-TW" dirty="0">
+                <a:solidFill>
+                  <a:srgbClr val="000000"/>
+                </a:solidFill>
+                <a:latin typeface="Arial Unicode MS"/>
+                <a:ea typeface="Arial Unicode MS"/>
+                <a:cs typeface="Arial Unicode MS"/>
+              </a:rPr>
+              <a:t>改一次邏輯場景</a:t>
+            </a:r>
+            <a:r>
+              <a:rPr sz="800" lang="zh-TW" dirty="0">
+                <a:solidFill>
+                  <a:srgbClr val="000000"/>
+                </a:solidFill>
+                <a:latin typeface="Arial Unicode MS"/>
+                <a:ea typeface="Arial Unicode MS"/>
+                <a:cs typeface="Arial Unicode MS"/>
+              </a:rPr>
+              <a:t>，看配好的規格還撐不撐得住。）我先講清楚，為什麼這一題是比「撐最久」，而不是「不准撞」。
+</a:t>
+            </a:r>
+          </a:p>
+          <a:p>
+            <a:pPr algn="l">
+              <a:lnSpc>
+                <a:spcPct val="100000"/>
+              </a:lnSpc>
+              <a:spcAft>
+                <a:spcPts val="267"/>
+              </a:spcAft>
+            </a:pPr>
+            <a:r>
+              <a:rPr sz="800" lang="zh-TW" dirty="0">
+                <a:solidFill>
+                  <a:srgbClr val="000000"/>
+                </a:solidFill>
+                <a:latin typeface="Arial Unicode MS"/>
+                <a:ea typeface="Arial Unicode MS"/>
+                <a:cs typeface="Arial Unicode MS"/>
+              </a:rPr>
+              <a:t>操作上，</a:t>
+            </a:r>
+            <a:r>
+              <a:rPr sz="800" b="1" lang="zh-TW" dirty="0">
+                <a:solidFill>
+                  <a:srgbClr val="000000"/>
+                </a:solidFill>
+                <a:latin typeface="Arial Unicode MS"/>
+                <a:ea typeface="Arial Unicode MS"/>
+                <a:cs typeface="Arial Unicode MS"/>
+              </a:rPr>
+              <a:t>種子挑一個會早撞的——三、八、九、十二、十四都可以</a:t>
+            </a:r>
+            <a:r>
+              <a:rPr sz="800" lang="zh-TW" dirty="0">
+                <a:solidFill>
+                  <a:srgbClr val="000000"/>
+                </a:solidFill>
+                <a:latin typeface="Arial Unicode MS"/>
+                <a:ea typeface="Arial Unicode MS"/>
+                <a:cs typeface="Arial Unicode MS"/>
+              </a:rPr>
+              <a:t>，這幾個用預設參數大約八秒就撞，各位才有東西可以改。（跑超過兩分鐘都不撞的就換一個。）打勾之後按重新開始，出現的會是</a:t>
+            </a:r>
+            <a:r>
+              <a:rPr sz="800" b="1" lang="zh-TW" dirty="0">
                 <a:solidFill>
                   <a:srgbClr val="000000"/>
                 </a:solidFill>
@@ -4546,18 +4744,18 @@
               <a:t>一模一樣的那一批車</a:t>
             </a:r>
             <a:r>
-              <a:rPr sz="850" lang="zh-TW" dirty="0">
-                <a:solidFill>
-                  <a:srgbClr val="000000"/>
-                </a:solidFill>
-                <a:latin typeface="Arial Unicode MS"/>
-                <a:ea typeface="Arial Unicode MS"/>
-                <a:cs typeface="Arial Unicode MS"/>
-              </a:rPr>
-              <a:t>。這時候你改一個參數，秒數的變化就真的是那個參數造成的。這就是第二節講的「掃參數」在真實工程裡的樣子：</a:t>
-            </a:r>
-            <a:r>
-              <a:rPr sz="850" b="1" lang="zh-TW" dirty="0">
+              <a:rPr sz="800" lang="zh-TW" dirty="0">
+                <a:solidFill>
+                  <a:srgbClr val="000000"/>
+                </a:solidFill>
+                <a:latin typeface="Arial Unicode MS"/>
+                <a:ea typeface="Arial Unicode MS"/>
+                <a:cs typeface="Arial Unicode MS"/>
+              </a:rPr>
+              <a:t>，這時候改一個參數，秒數的變化就真的是那個參數造成的——這就是第二節說的「掃參數」在真實工程裡的樣子：</a:t>
+            </a:r>
+            <a:r>
+              <a:rPr sz="800" b="1" lang="zh-TW" dirty="0">
                 <a:solidFill>
                   <a:srgbClr val="000000"/>
                 </a:solidFill>
@@ -4568,7 +4766,7 @@
               <a:t>先把場景鎖死，再一次只改一個變數。</a:t>
             </a:r>
             <a:r>
-              <a:rPr sz="850" lang="zh-TW" dirty="0">
+              <a:rPr sz="800" lang="zh-TW" dirty="0">
                 <a:solidFill>
                   <a:srgbClr val="000000"/>
                 </a:solidFill>
@@ -4586,11 +4784,11 @@
                 <a:spcPct val="100000"/>
               </a:lnSpc>
               <a:spcAft>
-                <a:spcPts val="283"/>
+                <a:spcPts val="267"/>
               </a:spcAft>
             </a:pPr>
             <a:r>
-              <a:rPr sz="850" lang="zh-TW" dirty="0">
+              <a:rPr sz="800" lang="zh-TW" dirty="0">
                 <a:solidFill>
                   <a:srgbClr val="000000"/>
                 </a:solidFill>
@@ -4601,7 +4799,7 @@
               <a:t>我先告訴各位一件事，免得大家白費力氣：</a:t>
             </a:r>
             <a:r>
-              <a:rPr sz="850" b="1" lang="zh-TW" dirty="0">
+              <a:rPr sz="800" b="1" lang="zh-TW" dirty="0">
                 <a:solidFill>
                   <a:srgbClr val="000000"/>
                 </a:solidFill>
@@ -4612,7 +4810,7 @@
               <a:t>在河內尖峰這個場景裡，沒有任何一組參數能保證不撞。</a:t>
             </a:r>
             <a:r>
-              <a:rPr sz="850" lang="zh-TW" dirty="0">
+              <a:rPr sz="800" lang="zh-TW" dirty="0">
                 <a:solidFill>
                   <a:srgbClr val="000000"/>
                 </a:solidFill>
@@ -4623,7 +4821,7 @@
               <a:t>這不是模擬器壞了，這正是這個場景要告訴大家的事：</a:t>
             </a:r>
             <a:r>
-              <a:rPr sz="850" b="1" lang="zh-TW" dirty="0">
+              <a:rPr sz="800" b="1" lang="zh-TW" dirty="0">
                 <a:solidFill>
                   <a:srgbClr val="000000"/>
                 </a:solidFill>
@@ -4634,7 +4832,7 @@
               <a:t>有些環境，用現在這些感測器規格就是搞不定。</a:t>
             </a:r>
             <a:r>
-              <a:rPr sz="850" lang="zh-TW" dirty="0">
+              <a:rPr sz="800" lang="zh-TW" dirty="0">
                 <a:solidFill>
                   <a:srgbClr val="000000"/>
                 </a:solidFill>
@@ -4645,7 +4843,7 @@
               <a:t>這時候工程上的答案不是再加感測器，是</a:t>
             </a:r>
             <a:r>
-              <a:rPr sz="850" b="1" lang="zh-TW" dirty="0">
+              <a:rPr sz="800" b="1" lang="zh-TW" dirty="0">
                 <a:solidFill>
                   <a:srgbClr val="000000"/>
                 </a:solidFill>
@@ -4656,7 +4854,7 @@
               <a:t>把運行範圍縮小</a:t>
             </a:r>
             <a:r>
-              <a:rPr sz="850" lang="zh-TW" dirty="0">
+              <a:rPr sz="800" lang="zh-TW" dirty="0">
                 <a:solidFill>
                   <a:srgbClr val="000000"/>
                 </a:solidFill>
@@ -4674,11 +4872,11 @@
                 <a:spcPct val="100000"/>
               </a:lnSpc>
               <a:spcAft>
-                <a:spcPts val="283"/>
+                <a:spcPts val="267"/>
               </a:spcAft>
             </a:pPr>
             <a:r>
-              <a:rPr sz="850" lang="zh-TW" dirty="0">
+              <a:rPr sz="800" lang="zh-TW" dirty="0">
                 <a:solidFill>
                   <a:srgbClr val="000000"/>
                 </a:solidFill>
@@ -4689,7 +4887,7 @@
               <a:t>操作上我要提醒一件事，而且會一直重複講。</a:t>
             </a:r>
             <a:r>
-              <a:rPr sz="850" b="1" lang="zh-TW" dirty="0">
+              <a:rPr sz="800" b="1" lang="zh-TW" dirty="0">
                 <a:solidFill>
                   <a:srgbClr val="000000"/>
                 </a:solidFill>
@@ -4700,7 +4898,7 @@
               <a:t>一次只改一個參數。</a:t>
             </a:r>
             <a:r>
-              <a:rPr sz="850" lang="zh-TW" dirty="0">
+              <a:rPr sz="800" lang="zh-TW" dirty="0">
                 <a:solidFill>
                   <a:srgbClr val="000000"/>
                 </a:solidFill>
@@ -4711,7 +4909,7 @@
               <a:t>三個一起改，你不會知道是哪一個起了作用——這就是第二節說的「掃參數」，一次掃一維。還有，回頭看第一節那條公式，但</a:t>
             </a:r>
             <a:r>
-              <a:rPr sz="850" b="1" lang="zh-TW" dirty="0">
+              <a:rPr sz="800" b="1" lang="zh-TW" dirty="0">
                 <a:solidFill>
                   <a:srgbClr val="000000"/>
                 </a:solidFill>
@@ -4722,7 +4920,7 @@
               <a:t>要用今天的車速</a:t>
             </a:r>
             <a:r>
-              <a:rPr sz="850" lang="zh-TW" dirty="0">
+              <a:rPr sz="800" lang="zh-TW" dirty="0">
                 <a:solidFill>
                   <a:srgbClr val="000000"/>
                 </a:solidFill>
@@ -4733,7 +4931,7 @@
               <a:t>：河內尖峰跑的是</a:t>
             </a:r>
             <a:r>
-              <a:rPr sz="850" b="1" lang="zh-TW" dirty="0">
+              <a:rPr sz="800" b="1" lang="zh-TW" dirty="0">
                 <a:solidFill>
                   <a:srgbClr val="000000"/>
                 </a:solidFill>
@@ -4744,7 +4942,7 @@
               <a:t>時速四十</a:t>
             </a:r>
             <a:r>
-              <a:rPr sz="850" lang="zh-TW" dirty="0">
+              <a:rPr sz="800" lang="zh-TW" dirty="0">
                 <a:solidFill>
                   <a:srgbClr val="000000"/>
                 </a:solidFill>
@@ -4755,7 +4953,7 @@
               <a:t>，煞停距離十三點六公尺，射線至少要</a:t>
             </a:r>
             <a:r>
-              <a:rPr sz="850" b="1" lang="zh-TW" dirty="0">
+              <a:rPr sz="800" b="1" lang="zh-TW" dirty="0">
                 <a:solidFill>
                   <a:srgbClr val="000000"/>
                 </a:solidFill>
@@ -4766,7 +4964,7 @@
               <a:t>十九公尺</a:t>
             </a:r>
             <a:r>
-              <a:rPr sz="850" lang="zh-TW" dirty="0">
+              <a:rPr sz="800" lang="zh-TW" dirty="0">
                 <a:solidFill>
                   <a:srgbClr val="000000"/>
                 </a:solidFill>
@@ -4777,7 +4975,7 @@
               <a:t>（煞停再加五公尺餘裕，模擬器長度滑桿下面那行就是這樣判的）。如果有組別把長度拉到十六公尺以下還在調射線數，請提醒他們那是白費力氣。十六個種子的中位數：十四公尺</a:t>
             </a:r>
             <a:r>
-              <a:rPr sz="850" b="1" lang="zh-TW" dirty="0">
+              <a:rPr sz="800" b="1" lang="zh-TW" dirty="0">
                 <a:solidFill>
                   <a:srgbClr val="000000"/>
                 </a:solidFill>
@@ -4788,7 +4986,7 @@
               <a:t>十四點五秒</a:t>
             </a:r>
             <a:r>
-              <a:rPr sz="850" lang="zh-TW" dirty="0">
+              <a:rPr sz="800" lang="zh-TW" dirty="0">
                 <a:solidFill>
                   <a:srgbClr val="000000"/>
                 </a:solidFill>
@@ -4799,7 +4997,7 @@
               <a:t>、十六公尺</a:t>
             </a:r>
             <a:r>
-              <a:rPr sz="850" b="1" lang="zh-TW" dirty="0">
+              <a:rPr sz="800" b="1" lang="zh-TW" dirty="0">
                 <a:solidFill>
                   <a:srgbClr val="000000"/>
                 </a:solidFill>
@@ -4810,7 +5008,7 @@
               <a:t>二十四點七秒</a:t>
             </a:r>
             <a:r>
-              <a:rPr sz="850" lang="zh-TW" dirty="0">
+              <a:rPr sz="800" lang="zh-TW" dirty="0">
                 <a:solidFill>
                   <a:srgbClr val="000000"/>
                 </a:solidFill>
@@ -4828,11 +5026,11 @@
                 <a:spcPct val="100000"/>
               </a:lnSpc>
               <a:spcAft>
-                <a:spcPts val="283"/>
+                <a:spcPts val="267"/>
               </a:spcAft>
             </a:pPr>
             <a:r>
-              <a:rPr sz="850" lang="zh-TW" dirty="0">
+              <a:rPr sz="800" lang="zh-TW" dirty="0">
                 <a:solidFill>
                   <a:srgbClr val="000000"/>
                 </a:solidFill>
@@ -4843,7 +5041,7 @@
               <a:t>還有一件事，很重要：</a:t>
             </a:r>
             <a:r>
-              <a:rPr sz="850" b="1" lang="zh-TW" dirty="0">
+              <a:rPr sz="800" b="1" lang="zh-TW" dirty="0">
                 <a:solidFill>
                   <a:srgbClr val="000000"/>
                 </a:solidFill>
@@ -4854,7 +5052,7 @@
               <a:t>調的時候用同一個種子，調好之後一定要換兩個種子驗。</a:t>
             </a:r>
             <a:r>
-              <a:rPr sz="850" lang="zh-TW" dirty="0">
+              <a:rPr sz="800" lang="zh-TW" dirty="0">
                 <a:solidFill>
                   <a:srgbClr val="000000"/>
                 </a:solidFill>
@@ -4865,7 +5063,7 @@
               <a:t>一個種子只是一個路況；在那個路況撐得久，換一個可能就撐不住。驗的時候取</a:t>
             </a:r>
             <a:r>
-              <a:rPr sz="850" b="1" lang="zh-TW" dirty="0">
+              <a:rPr sz="800" b="1" lang="zh-TW" dirty="0">
                 <a:solidFill>
                   <a:srgbClr val="000000"/>
                 </a:solidFill>
@@ -4876,7 +5074,7 @@
               <a:t>最差</a:t>
             </a:r>
             <a:r>
-              <a:rPr sz="850" lang="zh-TW" dirty="0">
+              <a:rPr sz="800" lang="zh-TW" dirty="0">
                 <a:solidFill>
                   <a:srgbClr val="000000"/>
                 </a:solidFill>
@@ -4894,11 +5092,11 @@
                 <a:spcPct val="100000"/>
               </a:lnSpc>
               <a:spcAft>
-                <a:spcPts val="283"/>
+                <a:spcPts val="267"/>
               </a:spcAft>
             </a:pPr>
             <a:r>
-              <a:rPr sz="850" b="1" lang="zh-TW" dirty="0">
+              <a:rPr sz="800" b="1" lang="zh-TW" dirty="0">
                 <a:solidFill>
                   <a:srgbClr val="000000"/>
                 </a:solidFill>
@@ -4909,7 +5107,7 @@
               <a:t>參考數字</a:t>
             </a:r>
             <a:r>
-              <a:rPr sz="850" lang="zh-TW" dirty="0">
+              <a:rPr sz="800" lang="zh-TW" dirty="0">
                 <a:solidFill>
                   <a:srgbClr val="000000"/>
                 </a:solidFill>
@@ -4920,7 +5118,7 @@
               <a:t>，十六個固定種子的中位數，預設是三十七點五秒：</a:t>
             </a:r>
             <a:r>
-              <a:rPr sz="850" b="1" lang="zh-TW" dirty="0">
+              <a:rPr sz="800" b="1" lang="zh-TW" dirty="0">
                 <a:solidFill>
                   <a:srgbClr val="000000"/>
                 </a:solidFill>
@@ -4931,7 +5129,7 @@
               <a:t>只把射線加到六十條 → 一百二十秒（都不撞）。</a:t>
             </a:r>
             <a:r>
-              <a:rPr sz="850" lang="zh-TW" dirty="0">
+              <a:rPr sz="800" lang="zh-TW" dirty="0">
                 <a:solidFill>
                   <a:srgbClr val="000000"/>
                 </a:solidFill>
@@ -4942,7 +5140,7 @@
               <a:t>只把張角拉到一百八十度 → 十五點九秒。</a:t>
             </a:r>
             <a:r>
-              <a:rPr sz="850" b="1" lang="zh-TW" dirty="0">
+              <a:rPr sz="800" b="1" lang="zh-TW" dirty="0">
                 <a:solidFill>
                   <a:srgbClr val="000000"/>
                 </a:solidFill>
@@ -4953,7 +5151,7 @@
               <a:t>反而變差。</a:t>
             </a:r>
             <a:r>
-              <a:rPr sz="850" lang="zh-TW" dirty="0">
+              <a:rPr sz="800" lang="zh-TW" dirty="0">
                 <a:solidFill>
                   <a:srgbClr val="000000"/>
                 </a:solidFill>
@@ -4964,7 +5162,7 @@
               <a:t>射線長度四十五和一百二十公尺 → 十六個種子</a:t>
             </a:r>
             <a:r>
-              <a:rPr sz="850" b="1" lang="zh-TW" dirty="0">
+              <a:rPr sz="800" b="1" lang="zh-TW" dirty="0">
                 <a:solidFill>
                   <a:srgbClr val="000000"/>
                 </a:solidFill>
@@ -4975,7 +5173,7 @@
               <a:t>一秒不差</a:t>
             </a:r>
             <a:r>
-              <a:rPr sz="850" lang="zh-TW" dirty="0">
+              <a:rPr sz="800" lang="zh-TW" dirty="0">
                 <a:solidFill>
                   <a:srgbClr val="000000"/>
                 </a:solidFill>
@@ -4986,7 +5184,7 @@
               <a:t>。這些先不要講給學生聽，等他們自己掃。你心裡有底就好：</a:t>
             </a:r>
             <a:r>
-              <a:rPr sz="850" b="1" lang="zh-TW" dirty="0">
+              <a:rPr sz="800" b="1" lang="zh-TW" dirty="0">
                 <a:solidFill>
                   <a:srgbClr val="000000"/>
                 </a:solidFill>
@@ -4997,7 +5195,7 @@
               <a:t>射線數幾乎萬能，但它最貴；有些種子收窄張角就夠了。</a:t>
             </a:r>
             <a:r>
-              <a:rPr sz="850" lang="zh-TW" dirty="0">
+              <a:rPr sz="800" lang="zh-TW" dirty="0">
                 <a:solidFill>
                   <a:srgbClr val="000000"/>
                 </a:solidFill>
@@ -5015,11 +5213,11 @@
                 <a:spcPct val="100000"/>
               </a:lnSpc>
               <a:spcAft>
-                <a:spcPts val="283"/>
+                <a:spcPts val="267"/>
               </a:spcAft>
             </a:pPr>
             <a:r>
-              <a:rPr sz="850" lang="zh-TW" dirty="0">
+              <a:rPr sz="800" lang="zh-TW" dirty="0">
                 <a:solidFill>
                   <a:srgbClr val="000000"/>
                 </a:solidFill>
@@ -5030,7 +5228,7 @@
               <a:t>所以今天各位真正要找的不是「哪一組數字最強」，是</a:t>
             </a:r>
             <a:r>
-              <a:rPr sz="850" b="1" lang="zh-TW" dirty="0">
+              <a:rPr sz="800" b="1" lang="zh-TW" dirty="0">
                 <a:solidFill>
                   <a:srgbClr val="000000"/>
                 </a:solidFill>
@@ -5041,7 +5239,7 @@
               <a:t>哪一個參數還有用、哪一個已經沒用了</a:t>
             </a:r>
             <a:r>
-              <a:rPr sz="850" lang="zh-TW" dirty="0">
+              <a:rPr sz="800" lang="zh-TW" dirty="0">
                 <a:solidFill>
                   <a:srgbClr val="000000"/>
                 </a:solidFill>
@@ -5059,11 +5257,11 @@
                 <a:spcPct val="100000"/>
               </a:lnSpc>
               <a:spcAft>
-                <a:spcPts val="283"/>
+                <a:spcPts val="267"/>
               </a:spcAft>
             </a:pPr>
             <a:r>
-              <a:rPr sz="850" b="1" lang="zh-TW" dirty="0">
+              <a:rPr sz="800" b="1" lang="zh-TW" dirty="0">
                 <a:solidFill>
                   <a:srgbClr val="000000"/>
                 </a:solidFill>
@@ -5074,7 +5272,7 @@
               <a:t>最後三分鐘提醒交作業。</a:t>
             </a:r>
             <a:r>
-              <a:rPr sz="850" lang="zh-TW" dirty="0">
+              <a:rPr sz="800" lang="zh-TW" dirty="0">
                 <a:solidFill>
                   <a:srgbClr val="000000"/>
                 </a:solidFill>
@@ -5085,7 +5283,7 @@
               <a:t>流程是這樣：撐最久的那一趟跑完，</a:t>
             </a:r>
             <a:r>
-              <a:rPr sz="850" b="1" lang="zh-TW" dirty="0">
+              <a:rPr sz="800" b="1" lang="zh-TW" dirty="0">
                 <a:solidFill>
                   <a:srgbClr val="000000"/>
                 </a:solidFill>
@@ -5096,7 +5294,7 @@
               <a:t>等碰撞視窗跳出來</a:t>
             </a:r>
             <a:r>
-              <a:rPr sz="850" lang="zh-TW" dirty="0">
+              <a:rPr sz="800" lang="zh-TW" dirty="0">
                 <a:solidFill>
                   <a:srgbClr val="000000"/>
                 </a:solidFill>
@@ -5107,7 +5305,7 @@
               <a:t>，那一行就有秒數、種子和三個數字——截圖，傳到課程的 LINE 群。手機直接截；筆電的話 Windows 按 Win＋Shift＋S、Mac 按 Command＋Shift＋4，再用手機把 LINE 打開傳。</a:t>
             </a:r>
             <a:r>
-              <a:rPr sz="850" b="1" lang="zh-TW" dirty="0">
+              <a:rPr sz="800" b="1" lang="zh-TW" dirty="0">
                 <a:solidFill>
                   <a:srgbClr val="000000"/>
                 </a:solidFill>
@@ -15447,7 +15645,7 @@
                 <a:ea typeface="Arial" pitchFamily="34" charset="-122"/>
                 <a:cs typeface="Arial" pitchFamily="34" charset="-120"/>
               </a:rPr>
-              <a:t>Chỉnh ba tham số, sao cho xe trụ được LÂU NHẤT trước khi đâm.</a:t>
+              <a:t>Kịch bản đã khoá — hôm nay chỉnh THÔNG SỐ: ba con số, cho xe trụ LÂU NHẤT.</a:t>
             </a:r>
             <a:endParaRPr lang="en-US" sz="1530" dirty="0"/>
           </a:p>
@@ -15467,7 +15665,7 @@
                 <a:ea typeface="微軟正黑體" pitchFamily="34" charset="-122"/>
                 <a:cs typeface="微軟正黑體" pitchFamily="34" charset="-120"/>
               </a:rPr>
-              <a:t>調三個參數，讓車子在撞車前撐得最久。</a:t>
+              <a:t>場景已經鎖住——今天調的是規格：三個參數，讓車子撐得最久。</a:t>
             </a:r>
             <a:endParaRPr lang="en-US" sz="1530" dirty="0"/>
           </a:p>
@@ -15481,7 +15679,7 @@
         </p:nvSpPr>
         <p:spPr>
           <a:xfrm>
-            <a:off x="1454879" y="1232839"/>
+            <a:off x="1454879" y="1387356"/>
             <a:ext cx="2970021" cy="1530397"/>
           </a:xfrm>
           <a:prstGeom prst="roundRect">
@@ -15523,7 +15721,7 @@
         </p:blipFill>
         <p:spPr>
           <a:xfrm>
-            <a:off x="1503912" y="1281872"/>
+            <a:off x="1503912" y="1436389"/>
             <a:ext cx="2871954" cy="1068082"/>
           </a:xfrm>
           <a:prstGeom prst="rect">
@@ -15539,7 +15737,7 @@
         </p:nvSpPr>
         <p:spPr>
           <a:xfrm>
-            <a:off x="1575711" y="1365183"/>
+            <a:off x="1575711" y="1519700"/>
             <a:ext cx="2705381" cy="367420"/>
           </a:xfrm>
           <a:prstGeom prst="roundRect">
@@ -15563,7 +15761,7 @@
         </p:nvSpPr>
         <p:spPr>
           <a:xfrm>
-            <a:off x="1575711" y="1780667"/>
+            <a:off x="1575711" y="1935183"/>
             <a:ext cx="807019" cy="555403"/>
           </a:xfrm>
           <a:prstGeom prst="roundRect">
@@ -15587,7 +15785,7 @@
         </p:nvSpPr>
         <p:spPr>
           <a:xfrm>
-            <a:off x="1524927" y="2384978"/>
+            <a:off x="1524927" y="2539495"/>
             <a:ext cx="2829926" cy="336229"/>
           </a:xfrm>
           <a:prstGeom prst="rect">
@@ -15649,7 +15847,7 @@
         </p:nvSpPr>
         <p:spPr>
           <a:xfrm>
-            <a:off x="4635043" y="1253853"/>
+            <a:off x="4635043" y="1408370"/>
             <a:ext cx="238162" cy="238162"/>
           </a:xfrm>
           <a:prstGeom prst="ellipse">
@@ -15669,7 +15867,7 @@
         </p:nvSpPr>
         <p:spPr>
           <a:xfrm>
-            <a:off x="4635043" y="1267863"/>
+            <a:off x="4635043" y="1422380"/>
             <a:ext cx="238162" cy="210143"/>
           </a:xfrm>
           <a:prstGeom prst="rect">
@@ -15708,7 +15906,7 @@
         </p:nvSpPr>
         <p:spPr>
           <a:xfrm>
-            <a:off x="4957262" y="1232839"/>
+            <a:off x="4957262" y="1387356"/>
             <a:ext cx="2731859" cy="518353"/>
           </a:xfrm>
           <a:prstGeom prst="rect">
@@ -15736,7 +15934,7 @@
                 <a:ea typeface="Arial" pitchFamily="34" charset="-122"/>
                 <a:cs typeface="Arial" pitchFamily="34" charset="-120"/>
               </a:rPr>
-              <a:t>Tích «Cố định dòng xe», chọn seed đâm sớm: 3, 8, 9, 12 hoặc 14</a:t>
+              <a:t>Khoá kịch bản: «Hà Nội giờ cao điểm» + «Cố định dòng xe»</a:t>
             </a:r>
             <a:endParaRPr lang="en-US" sz="880" dirty="0"/>
           </a:p>
@@ -15756,7 +15954,7 @@
                 <a:ea typeface="微軟正黑體" pitchFamily="34" charset="-122"/>
                 <a:cs typeface="微軟正黑體" pitchFamily="34" charset="-120"/>
               </a:rPr>
-              <a:t>把「固定車流」打勾，種子挑一個會早撞的：3、8、9、12、14</a:t>
+              <a:t>鎖場景：「河內尖峰」＋「固定車流」打勾</a:t>
             </a:r>
             <a:endParaRPr lang="en-US" sz="880" dirty="0"/>
           </a:p>
@@ -15770,7 +15968,7 @@
         </p:nvSpPr>
         <p:spPr>
           <a:xfrm>
-            <a:off x="4635043" y="1789209"/>
+            <a:off x="4635043" y="1829343"/>
             <a:ext cx="238162" cy="238162"/>
           </a:xfrm>
           <a:prstGeom prst="ellipse">
@@ -15790,7 +15988,7 @@
         </p:nvSpPr>
         <p:spPr>
           <a:xfrm>
-            <a:off x="4635043" y="1803219"/>
+            <a:off x="4635043" y="1843353"/>
             <a:ext cx="238162" cy="210143"/>
           </a:xfrm>
           <a:prstGeom prst="rect">
@@ -15829,7 +16027,7 @@
         </p:nvSpPr>
         <p:spPr>
           <a:xfrm>
-            <a:off x="4957262" y="1768195"/>
+            <a:off x="4957262" y="1808329"/>
             <a:ext cx="2731859" cy="518353"/>
           </a:xfrm>
           <a:prstGeom prst="rect">
@@ -15857,7 +16055,7 @@
                 <a:ea typeface="Arial" pitchFamily="34" charset="-122"/>
                 <a:cs typeface="Arial" pitchFamily="34" charset="-120"/>
               </a:rPr>
-              <a:t>Bấm «Bắt đầu lại» — vẫn đúng đàn xe đó chạy lại</a:t>
+              <a:t>Seed 3/8/9/12/14 → «Bắt đầu lại», vẫn đàn xe đó</a:t>
             </a:r>
             <a:endParaRPr lang="en-US" sz="880" dirty="0"/>
           </a:p>
@@ -15877,7 +16075,7 @@
                 <a:ea typeface="微軟正黑體" pitchFamily="34" charset="-122"/>
                 <a:cs typeface="微軟正黑體" pitchFamily="34" charset="-120"/>
               </a:rPr>
-              <a:t>按「重新開始」——出現的是一模一樣的那批車</a:t>
+              <a:t>種子填 3／8／9／12／14 →「重新開始」，還是同一批車</a:t>
             </a:r>
             <a:endParaRPr lang="en-US" sz="880" dirty="0"/>
           </a:p>
@@ -15891,7 +16089,7 @@
         </p:nvSpPr>
         <p:spPr>
           <a:xfrm>
-            <a:off x="4635043" y="2139448"/>
+            <a:off x="4635043" y="2179582"/>
             <a:ext cx="238162" cy="238162"/>
           </a:xfrm>
           <a:prstGeom prst="ellipse">
@@ -15911,7 +16109,7 @@
         </p:nvSpPr>
         <p:spPr>
           <a:xfrm>
-            <a:off x="4635043" y="2153457"/>
+            <a:off x="4635043" y="2193591"/>
             <a:ext cx="238162" cy="210143"/>
           </a:xfrm>
           <a:prstGeom prst="rect">
@@ -15950,7 +16148,7 @@
         </p:nvSpPr>
         <p:spPr>
           <a:xfrm>
-            <a:off x="4957262" y="2118433"/>
+            <a:off x="4957262" y="2158567"/>
             <a:ext cx="2731859" cy="518353"/>
           </a:xfrm>
           <a:prstGeom prst="rect">
@@ -16012,7 +16210,7 @@
         </p:nvSpPr>
         <p:spPr>
           <a:xfrm>
-            <a:off x="4635043" y="2489686"/>
+            <a:off x="4635043" y="2529820"/>
             <a:ext cx="238162" cy="238162"/>
           </a:xfrm>
           <a:prstGeom prst="ellipse">
@@ -16032,7 +16230,7 @@
         </p:nvSpPr>
         <p:spPr>
           <a:xfrm>
-            <a:off x="4635043" y="2503695"/>
+            <a:off x="4635043" y="2543830"/>
             <a:ext cx="238162" cy="210143"/>
           </a:xfrm>
           <a:prstGeom prst="rect">
@@ -16071,7 +16269,7 @@
         </p:nvSpPr>
         <p:spPr>
           <a:xfrm>
-            <a:off x="4957262" y="2468672"/>
+            <a:off x="4957262" y="2508806"/>
             <a:ext cx="2731859" cy="518353"/>
           </a:xfrm>
           <a:prstGeom prst="rect">
@@ -16099,7 +16297,7 @@
                 <a:ea typeface="Arial" pitchFamily="34" charset="-122"/>
                 <a:cs typeface="Arial" pitchFamily="34" charset="-120"/>
               </a:rPr>
-              <a:t>Chốt xong thì đổi sang 2 seed khác kiểm lại, lấy lần TỆ NHẤT. Tia không ngắn hơn 19 m.</a:t>
+              <a:t>Chốt xong đổi 2 seed khác kiểm lại, lấy lần TỆ NHẤT. Tia ≥ 19 m.</a:t>
             </a:r>
             <a:endParaRPr lang="en-US" sz="880" dirty="0"/>
           </a:p>
@@ -16119,7 +16317,7 @@
                 <a:ea typeface="微軟正黑體" pitchFamily="34" charset="-122"/>
                 <a:cs typeface="微軟正黑體" pitchFamily="34" charset="-120"/>
               </a:rPr>
-              <a:t>調好之後換兩個種子驗一次，取最差的那一次。射線長度不能短於 19 公尺。</a:t>
+              <a:t>調好換兩個種子驗，取最差那一次。射線長度不短於 19 公尺。</a:t>
             </a:r>
             <a:endParaRPr lang="en-US" sz="880" dirty="0"/>
           </a:p>

--- a/第四週(10-01)/第四週_第3節_簡報.pptx
+++ b/第四週(10-01)/第四週_第3節_簡報.pptx
@@ -434,12 +434,12 @@
           <a:bodyPr vert="horz" wrap="square" anchor="t" lIns="91440" rIns="91440" tIns="45720" bIns="45720"/>
           <a:lstStyle/>
           <a:p>
-            <a:pPr algn="l">
-              <a:lnSpc>
-                <a:spcPct val="100000"/>
-              </a:lnSpc>
+            <a:pPr algn="l" marL="0" indent="0">
+              <a:spcBef>
+                <a:spcPts val="0"/>
+              </a:spcBef>
               <a:spcAft>
-                <a:spcPts val="400"/>
+                <a:spcPts val="200"/>
               </a:spcAft>
             </a:pPr>
             <a:r>
@@ -456,12 +456,12 @@
             </a:r>
           </a:p>
           <a:p>
-            <a:pPr algn="l">
-              <a:lnSpc>
-                <a:spcPct val="100000"/>
-              </a:lnSpc>
+            <a:pPr algn="l" marL="0" indent="0">
+              <a:spcBef>
+                <a:spcPts val="0"/>
+              </a:spcBef>
               <a:spcAft>
-                <a:spcPts val="400"/>
+                <a:spcPts val="200"/>
               </a:spcAft>
             </a:pPr>
             <a:r>
@@ -500,12 +500,12 @@
             </a:r>
           </a:p>
           <a:p>
-            <a:pPr algn="l">
-              <a:lnSpc>
-                <a:spcPct val="100000"/>
-              </a:lnSpc>
+            <a:pPr algn="l" marL="0" indent="0">
+              <a:spcBef>
+                <a:spcPts val="0"/>
+              </a:spcBef>
               <a:spcAft>
-                <a:spcPts val="400"/>
+                <a:spcPts val="200"/>
               </a:spcAft>
             </a:pPr>
             <a:r>
@@ -544,12 +544,12 @@
             </a:r>
           </a:p>
           <a:p>
-            <a:pPr algn="l">
-              <a:lnSpc>
-                <a:spcPct val="100000"/>
-              </a:lnSpc>
+            <a:pPr algn="l" marL="0" indent="0">
+              <a:spcBef>
+                <a:spcPts val="0"/>
+              </a:spcBef>
               <a:spcAft>
-                <a:spcPts val="400"/>
+                <a:spcPts val="200"/>
               </a:spcAft>
             </a:pPr>
             <a:r>
@@ -588,12 +588,12 @@
             </a:r>
           </a:p>
           <a:p>
-            <a:pPr algn="l">
-              <a:lnSpc>
-                <a:spcPct val="100000"/>
-              </a:lnSpc>
+            <a:pPr algn="l" marL="0" indent="0">
+              <a:spcBef>
+                <a:spcPts val="0"/>
+              </a:spcBef>
               <a:spcAft>
-                <a:spcPts val="400"/>
+                <a:spcPts val="200"/>
               </a:spcAft>
             </a:pPr>
             <a:r>
@@ -610,12 +610,12 @@
             </a:r>
           </a:p>
           <a:p>
-            <a:pPr algn="l">
-              <a:lnSpc>
-                <a:spcPct val="100000"/>
-              </a:lnSpc>
+            <a:pPr algn="l" marL="0" indent="0">
+              <a:spcBef>
+                <a:spcPts val="0"/>
+              </a:spcBef>
               <a:spcAft>
-                <a:spcPts val="400"/>
+                <a:spcPts val="200"/>
               </a:spcAft>
             </a:pPr>
             <a:r>
@@ -674,12 +674,12 @@
           <a:bodyPr vert="horz" wrap="square" anchor="t" lIns="91440" rIns="91440" tIns="45720" bIns="45720"/>
           <a:lstStyle/>
           <a:p>
-            <a:pPr algn="l">
-              <a:lnSpc>
-                <a:spcPct val="100000"/>
-              </a:lnSpc>
+            <a:pPr algn="l" marL="0" indent="0">
+              <a:spcBef>
+                <a:spcPts val="0"/>
+              </a:spcBef>
               <a:spcAft>
-                <a:spcPts val="333"/>
+                <a:spcPts val="167"/>
               </a:spcAft>
             </a:pPr>
             <a:r>
@@ -753,12 +753,12 @@
           <a:bodyPr vert="horz" wrap="square" anchor="t" lIns="91440" rIns="91440" tIns="45720" bIns="45720"/>
           <a:lstStyle/>
           <a:p>
-            <a:pPr algn="l">
-              <a:lnSpc>
-                <a:spcPct val="100000"/>
-              </a:lnSpc>
+            <a:pPr algn="l" marL="0" indent="0">
+              <a:spcBef>
+                <a:spcPts val="0"/>
+              </a:spcBef>
               <a:spcAft>
-                <a:spcPts val="350"/>
+                <a:spcPts val="175"/>
               </a:spcAft>
             </a:pPr>
             <a:r>
@@ -775,12 +775,12 @@
             </a:r>
           </a:p>
           <a:p>
-            <a:pPr algn="l">
-              <a:lnSpc>
-                <a:spcPct val="100000"/>
-              </a:lnSpc>
+            <a:pPr algn="l" marL="0" indent="0">
+              <a:spcBef>
+                <a:spcPts val="0"/>
+              </a:spcBef>
               <a:spcAft>
-                <a:spcPts val="350"/>
+                <a:spcPts val="175"/>
               </a:spcAft>
             </a:pPr>
             <a:r>
@@ -808,12 +808,12 @@
             </a:r>
           </a:p>
           <a:p>
-            <a:pPr algn="l">
-              <a:lnSpc>
-                <a:spcPct val="100000"/>
-              </a:lnSpc>
+            <a:pPr algn="l" marL="0" indent="0">
+              <a:spcBef>
+                <a:spcPts val="0"/>
+              </a:spcBef>
               <a:spcAft>
-                <a:spcPts val="350"/>
+                <a:spcPts val="175"/>
               </a:spcAft>
             </a:pPr>
             <a:r>
@@ -852,12 +852,12 @@
             </a:r>
           </a:p>
           <a:p>
-            <a:pPr algn="l">
-              <a:lnSpc>
-                <a:spcPct val="100000"/>
-              </a:lnSpc>
+            <a:pPr algn="l" marL="0" indent="0">
+              <a:spcBef>
+                <a:spcPts val="0"/>
+              </a:spcBef>
               <a:spcAft>
-                <a:spcPts val="350"/>
+                <a:spcPts val="175"/>
               </a:spcAft>
             </a:pPr>
             <a:r>
@@ -896,12 +896,12 @@
             </a:r>
           </a:p>
           <a:p>
-            <a:pPr algn="l">
-              <a:lnSpc>
-                <a:spcPct val="100000"/>
-              </a:lnSpc>
+            <a:pPr algn="l" marL="0" indent="0">
+              <a:spcBef>
+                <a:spcPts val="0"/>
+              </a:spcBef>
               <a:spcAft>
-                <a:spcPts val="350"/>
+                <a:spcPts val="175"/>
               </a:spcAft>
             </a:pPr>
             <a:r>
@@ -962,12 +962,12 @@
             </a:r>
           </a:p>
           <a:p>
-            <a:pPr algn="l">
-              <a:lnSpc>
-                <a:spcPct val="100000"/>
-              </a:lnSpc>
+            <a:pPr algn="l" marL="0" indent="0">
+              <a:spcBef>
+                <a:spcPts val="0"/>
+              </a:spcBef>
               <a:spcAft>
-                <a:spcPts val="350"/>
+                <a:spcPts val="175"/>
               </a:spcAft>
             </a:pPr>
             <a:r>
@@ -1072,12 +1072,12 @@
             </a:r>
           </a:p>
           <a:p>
-            <a:pPr algn="l">
-              <a:lnSpc>
-                <a:spcPct val="100000"/>
-              </a:lnSpc>
+            <a:pPr algn="l" marL="0" indent="0">
+              <a:spcBef>
+                <a:spcPts val="0"/>
+              </a:spcBef>
               <a:spcAft>
-                <a:spcPts val="350"/>
+                <a:spcPts val="175"/>
               </a:spcAft>
             </a:pPr>
             <a:r>
@@ -1182,12 +1182,12 @@
             </a:r>
           </a:p>
           <a:p>
-            <a:pPr algn="l">
-              <a:lnSpc>
-                <a:spcPct val="100000"/>
-              </a:lnSpc>
+            <a:pPr algn="l" marL="0" indent="0">
+              <a:spcBef>
+                <a:spcPts val="0"/>
+              </a:spcBef>
               <a:spcAft>
-                <a:spcPts val="350"/>
+                <a:spcPts val="175"/>
               </a:spcAft>
             </a:pPr>
             <a:r>
@@ -1281,12 +1281,12 @@
             </a:r>
           </a:p>
           <a:p>
-            <a:pPr algn="l">
-              <a:lnSpc>
-                <a:spcPct val="100000"/>
-              </a:lnSpc>
+            <a:pPr algn="l" marL="0" indent="0">
+              <a:spcBef>
+                <a:spcPts val="0"/>
+              </a:spcBef>
               <a:spcAft>
-                <a:spcPts val="350"/>
+                <a:spcPts val="175"/>
               </a:spcAft>
             </a:pPr>
             <a:r>
@@ -1455,12 +1455,12 @@
           <a:bodyPr vert="horz" wrap="square" anchor="t" lIns="91440" rIns="91440" tIns="45720" bIns="45720"/>
           <a:lstStyle/>
           <a:p>
-            <a:pPr algn="l">
-              <a:lnSpc>
-                <a:spcPct val="100000"/>
-              </a:lnSpc>
+            <a:pPr algn="l" marL="0" indent="0">
+              <a:spcBef>
+                <a:spcPts val="0"/>
+              </a:spcBef>
               <a:spcAft>
-                <a:spcPts val="333"/>
+                <a:spcPts val="167"/>
               </a:spcAft>
             </a:pPr>
             <a:r>
@@ -1534,12 +1534,12 @@
           <a:bodyPr vert="horz" wrap="square" anchor="t" lIns="91440" rIns="91440" tIns="45720" bIns="45720"/>
           <a:lstStyle/>
           <a:p>
-            <a:pPr algn="l">
-              <a:lnSpc>
-                <a:spcPct val="100000"/>
-              </a:lnSpc>
+            <a:pPr algn="l" marL="0" indent="0">
+              <a:spcBef>
+                <a:spcPts val="0"/>
+              </a:spcBef>
               <a:spcAft>
-                <a:spcPts val="400"/>
+                <a:spcPts val="200"/>
               </a:spcAft>
             </a:pPr>
             <a:r>
@@ -1556,12 +1556,12 @@
             </a:r>
           </a:p>
           <a:p>
-            <a:pPr algn="l">
-              <a:lnSpc>
-                <a:spcPct val="100000"/>
-              </a:lnSpc>
+            <a:pPr algn="l" marL="0" indent="0">
+              <a:spcBef>
+                <a:spcPts val="0"/>
+              </a:spcBef>
               <a:spcAft>
-                <a:spcPts val="400"/>
+                <a:spcPts val="200"/>
               </a:spcAft>
             </a:pPr>
             <a:r>
@@ -1578,12 +1578,12 @@
             </a:r>
           </a:p>
           <a:p>
-            <a:pPr algn="l">
-              <a:lnSpc>
-                <a:spcPct val="100000"/>
-              </a:lnSpc>
+            <a:pPr algn="l" marL="0" indent="0">
+              <a:spcBef>
+                <a:spcPts val="0"/>
+              </a:spcBef>
               <a:spcAft>
-                <a:spcPts val="400"/>
+                <a:spcPts val="200"/>
               </a:spcAft>
             </a:pPr>
             <a:r>
@@ -1688,12 +1688,12 @@
             </a:r>
           </a:p>
           <a:p>
-            <a:pPr algn="l">
-              <a:lnSpc>
-                <a:spcPct val="100000"/>
-              </a:lnSpc>
+            <a:pPr algn="l" marL="0" indent="0">
+              <a:spcBef>
+                <a:spcPts val="0"/>
+              </a:spcBef>
               <a:spcAft>
-                <a:spcPts val="400"/>
+                <a:spcPts val="200"/>
               </a:spcAft>
             </a:pPr>
             <a:r>
@@ -1730,12 +1730,12 @@
           <a:bodyPr vert="horz" wrap="square" anchor="t" lIns="91440" rIns="91440" tIns="45720" bIns="45720"/>
           <a:lstStyle/>
           <a:p>
-            <a:pPr algn="l">
-              <a:lnSpc>
-                <a:spcPct val="100000"/>
-              </a:lnSpc>
+            <a:pPr algn="l" marL="0" indent="0">
+              <a:spcBef>
+                <a:spcPts val="0"/>
+              </a:spcBef>
               <a:spcAft>
-                <a:spcPts val="333"/>
+                <a:spcPts val="167"/>
               </a:spcAft>
             </a:pPr>
             <a:r>
@@ -1809,12 +1809,12 @@
           <a:bodyPr vert="horz" wrap="square" anchor="t" lIns="91440" rIns="91440" tIns="45720" bIns="45720"/>
           <a:lstStyle/>
           <a:p>
-            <a:pPr algn="l">
-              <a:lnSpc>
-                <a:spcPct val="100000"/>
-              </a:lnSpc>
+            <a:pPr algn="l" marL="0" indent="0">
+              <a:spcBef>
+                <a:spcPts val="0"/>
+              </a:spcBef>
               <a:spcAft>
-                <a:spcPts val="400"/>
+                <a:spcPts val="200"/>
               </a:spcAft>
             </a:pPr>
             <a:r>
@@ -1853,12 +1853,12 @@
             </a:r>
           </a:p>
           <a:p>
-            <a:pPr algn="l">
-              <a:lnSpc>
-                <a:spcPct val="100000"/>
-              </a:lnSpc>
+            <a:pPr algn="l" marL="0" indent="0">
+              <a:spcBef>
+                <a:spcPts val="0"/>
+              </a:spcBef>
               <a:spcAft>
-                <a:spcPts val="400"/>
+                <a:spcPts val="200"/>
               </a:spcAft>
             </a:pPr>
             <a:r>
@@ -1886,12 +1886,12 @@
             </a:r>
           </a:p>
           <a:p>
-            <a:pPr algn="l">
-              <a:lnSpc>
-                <a:spcPct val="100000"/>
-              </a:lnSpc>
+            <a:pPr algn="l" marL="0" indent="0">
+              <a:spcBef>
+                <a:spcPts val="0"/>
+              </a:spcBef>
               <a:spcAft>
-                <a:spcPts val="400"/>
+                <a:spcPts val="200"/>
               </a:spcAft>
             </a:pPr>
             <a:r>
@@ -1919,12 +1919,12 @@
             </a:r>
           </a:p>
           <a:p>
-            <a:pPr algn="l">
-              <a:lnSpc>
-                <a:spcPct val="100000"/>
-              </a:lnSpc>
+            <a:pPr algn="l" marL="0" indent="0">
+              <a:spcBef>
+                <a:spcPts val="0"/>
+              </a:spcBef>
               <a:spcAft>
-                <a:spcPts val="400"/>
+                <a:spcPts val="200"/>
               </a:spcAft>
             </a:pPr>
             <a:r>
@@ -1985,12 +1985,12 @@
             </a:r>
           </a:p>
           <a:p>
-            <a:pPr algn="l">
-              <a:lnSpc>
-                <a:spcPct val="100000"/>
-              </a:lnSpc>
+            <a:pPr algn="l" marL="0" indent="0">
+              <a:spcBef>
+                <a:spcPts val="0"/>
+              </a:spcBef>
               <a:spcAft>
-                <a:spcPts val="400"/>
+                <a:spcPts val="200"/>
               </a:spcAft>
             </a:pPr>
             <a:r>
@@ -2018,12 +2018,12 @@
             </a:r>
           </a:p>
           <a:p>
-            <a:pPr algn="l">
-              <a:lnSpc>
-                <a:spcPct val="100000"/>
-              </a:lnSpc>
+            <a:pPr algn="l" marL="0" indent="0">
+              <a:spcBef>
+                <a:spcPts val="0"/>
+              </a:spcBef>
               <a:spcAft>
-                <a:spcPts val="400"/>
+                <a:spcPts val="200"/>
               </a:spcAft>
             </a:pPr>
             <a:r>
@@ -2062,12 +2062,12 @@
             </a:r>
           </a:p>
           <a:p>
-            <a:pPr algn="l">
-              <a:lnSpc>
-                <a:spcPct val="100000"/>
-              </a:lnSpc>
+            <a:pPr algn="l" marL="0" indent="0">
+              <a:spcBef>
+                <a:spcPts val="0"/>
+              </a:spcBef>
               <a:spcAft>
-                <a:spcPts val="400"/>
+                <a:spcPts val="200"/>
               </a:spcAft>
             </a:pPr>
             <a:r>
@@ -2095,12 +2095,12 @@
             </a:r>
           </a:p>
           <a:p>
-            <a:pPr algn="l">
-              <a:lnSpc>
-                <a:spcPct val="100000"/>
-              </a:lnSpc>
+            <a:pPr algn="l" marL="0" indent="0">
+              <a:spcBef>
+                <a:spcPts val="0"/>
+              </a:spcBef>
               <a:spcAft>
-                <a:spcPts val="400"/>
+                <a:spcPts val="200"/>
               </a:spcAft>
             </a:pPr>
             <a:r>
@@ -2137,12 +2137,12 @@
           <a:bodyPr vert="horz" wrap="square" anchor="t" lIns="91440" rIns="91440" tIns="45720" bIns="45720"/>
           <a:lstStyle/>
           <a:p>
-            <a:pPr algn="l">
-              <a:lnSpc>
-                <a:spcPct val="100000"/>
-              </a:lnSpc>
+            <a:pPr algn="l" marL="0" indent="0">
+              <a:spcBef>
+                <a:spcPts val="0"/>
+              </a:spcBef>
               <a:spcAft>
-                <a:spcPts val="333"/>
+                <a:spcPts val="167"/>
               </a:spcAft>
             </a:pPr>
             <a:r>
@@ -2216,12 +2216,12 @@
           <a:bodyPr vert="horz" wrap="square" anchor="t" lIns="91440" rIns="91440" tIns="45720" bIns="45720"/>
           <a:lstStyle/>
           <a:p>
-            <a:pPr algn="l">
-              <a:lnSpc>
-                <a:spcPct val="100000"/>
-              </a:lnSpc>
+            <a:pPr algn="l" marL="0" indent="0">
+              <a:spcBef>
+                <a:spcPts val="0"/>
+              </a:spcBef>
               <a:spcAft>
-                <a:spcPts val="400"/>
+                <a:spcPts val="200"/>
               </a:spcAft>
             </a:pPr>
             <a:r>
@@ -2260,12 +2260,12 @@
             </a:r>
           </a:p>
           <a:p>
-            <a:pPr algn="l">
-              <a:lnSpc>
-                <a:spcPct val="100000"/>
-              </a:lnSpc>
+            <a:pPr algn="l" marL="0" indent="0">
+              <a:spcBef>
+                <a:spcPts val="0"/>
+              </a:spcBef>
               <a:spcAft>
-                <a:spcPts val="400"/>
+                <a:spcPts val="200"/>
               </a:spcAft>
             </a:pPr>
             <a:r>
@@ -2304,12 +2304,12 @@
             </a:r>
           </a:p>
           <a:p>
-            <a:pPr algn="l">
-              <a:lnSpc>
-                <a:spcPct val="100000"/>
-              </a:lnSpc>
+            <a:pPr algn="l" marL="0" indent="0">
+              <a:spcBef>
+                <a:spcPts val="0"/>
+              </a:spcBef>
               <a:spcAft>
-                <a:spcPts val="400"/>
+                <a:spcPts val="200"/>
               </a:spcAft>
             </a:pPr>
             <a:r>
@@ -2370,12 +2370,12 @@
             </a:r>
           </a:p>
           <a:p>
-            <a:pPr algn="l">
-              <a:lnSpc>
-                <a:spcPct val="100000"/>
-              </a:lnSpc>
+            <a:pPr algn="l" marL="0" indent="0">
+              <a:spcBef>
+                <a:spcPts val="0"/>
+              </a:spcBef>
               <a:spcAft>
-                <a:spcPts val="400"/>
+                <a:spcPts val="200"/>
               </a:spcAft>
             </a:pPr>
             <a:r>
@@ -2412,12 +2412,12 @@
           <a:bodyPr vert="horz" wrap="square" anchor="t" lIns="91440" rIns="91440" tIns="45720" bIns="45720"/>
           <a:lstStyle/>
           <a:p>
-            <a:pPr algn="l">
-              <a:lnSpc>
-                <a:spcPct val="100000"/>
-              </a:lnSpc>
+            <a:pPr algn="l" marL="0" indent="0">
+              <a:spcBef>
+                <a:spcPts val="0"/>
+              </a:spcBef>
               <a:spcAft>
-                <a:spcPts val="333"/>
+                <a:spcPts val="167"/>
               </a:spcAft>
             </a:pPr>
             <a:r>
@@ -2491,12 +2491,12 @@
           <a:bodyPr vert="horz" wrap="square" anchor="t" lIns="91440" rIns="91440" tIns="45720" bIns="45720"/>
           <a:lstStyle/>
           <a:p>
-            <a:pPr algn="l">
-              <a:lnSpc>
-                <a:spcPct val="100000"/>
-              </a:lnSpc>
+            <a:pPr algn="l" marL="0" indent="0">
+              <a:spcBef>
+                <a:spcPts val="0"/>
+              </a:spcBef>
               <a:spcAft>
-                <a:spcPts val="400"/>
+                <a:spcPts val="200"/>
               </a:spcAft>
             </a:pPr>
             <a:r>
@@ -2513,12 +2513,12 @@
             </a:r>
           </a:p>
           <a:p>
-            <a:pPr algn="l">
-              <a:lnSpc>
-                <a:spcPct val="100000"/>
-              </a:lnSpc>
+            <a:pPr algn="l" marL="0" indent="0">
+              <a:spcBef>
+                <a:spcPts val="0"/>
+              </a:spcBef>
               <a:spcAft>
-                <a:spcPts val="400"/>
+                <a:spcPts val="200"/>
               </a:spcAft>
             </a:pPr>
             <a:r>
@@ -2557,12 +2557,12 @@
             </a:r>
           </a:p>
           <a:p>
-            <a:pPr algn="l">
-              <a:lnSpc>
-                <a:spcPct val="100000"/>
-              </a:lnSpc>
+            <a:pPr algn="l" marL="0" indent="0">
+              <a:spcBef>
+                <a:spcPts val="0"/>
+              </a:spcBef>
               <a:spcAft>
-                <a:spcPts val="400"/>
+                <a:spcPts val="200"/>
               </a:spcAft>
             </a:pPr>
             <a:r>
@@ -2623,12 +2623,12 @@
             </a:r>
           </a:p>
           <a:p>
-            <a:pPr algn="l">
-              <a:lnSpc>
-                <a:spcPct val="100000"/>
-              </a:lnSpc>
+            <a:pPr algn="l" marL="0" indent="0">
+              <a:spcBef>
+                <a:spcPts val="0"/>
+              </a:spcBef>
               <a:spcAft>
-                <a:spcPts val="400"/>
+                <a:spcPts val="200"/>
               </a:spcAft>
             </a:pPr>
             <a:r>
@@ -2667,12 +2667,12 @@
             </a:r>
           </a:p>
           <a:p>
-            <a:pPr algn="l">
-              <a:lnSpc>
-                <a:spcPct val="100000"/>
-              </a:lnSpc>
+            <a:pPr algn="l" marL="0" indent="0">
+              <a:spcBef>
+                <a:spcPts val="0"/>
+              </a:spcBef>
               <a:spcAft>
-                <a:spcPts val="400"/>
+                <a:spcPts val="200"/>
               </a:spcAft>
             </a:pPr>
             <a:r>
@@ -2711,12 +2711,12 @@
             </a:r>
           </a:p>
           <a:p>
-            <a:pPr algn="l">
-              <a:lnSpc>
-                <a:spcPct val="100000"/>
-              </a:lnSpc>
+            <a:pPr algn="l" marL="0" indent="0">
+              <a:spcBef>
+                <a:spcPts val="0"/>
+              </a:spcBef>
               <a:spcAft>
-                <a:spcPts val="400"/>
+                <a:spcPts val="200"/>
               </a:spcAft>
             </a:pPr>
             <a:r>
@@ -2755,12 +2755,12 @@
             </a:r>
           </a:p>
           <a:p>
-            <a:pPr algn="l">
-              <a:lnSpc>
-                <a:spcPct val="100000"/>
-              </a:lnSpc>
+            <a:pPr algn="l" marL="0" indent="0">
+              <a:spcBef>
+                <a:spcPts val="0"/>
+              </a:spcBef>
               <a:spcAft>
-                <a:spcPts val="400"/>
+                <a:spcPts val="200"/>
               </a:spcAft>
             </a:pPr>
             <a:r>
@@ -2832,12 +2832,12 @@
             </a:r>
           </a:p>
           <a:p>
-            <a:pPr algn="l">
-              <a:lnSpc>
-                <a:spcPct val="100000"/>
-              </a:lnSpc>
+            <a:pPr algn="l" marL="0" indent="0">
+              <a:spcBef>
+                <a:spcPts val="0"/>
+              </a:spcBef>
               <a:spcAft>
-                <a:spcPts val="400"/>
+                <a:spcPts val="200"/>
               </a:spcAft>
             </a:pPr>
             <a:r>
@@ -2896,12 +2896,12 @@
           <a:bodyPr vert="horz" wrap="square" anchor="t" lIns="91440" rIns="91440" tIns="45720" bIns="45720"/>
           <a:lstStyle/>
           <a:p>
-            <a:pPr algn="l">
-              <a:lnSpc>
-                <a:spcPct val="100000"/>
-              </a:lnSpc>
+            <a:pPr algn="l" marL="0" indent="0">
+              <a:spcBef>
+                <a:spcPts val="0"/>
+              </a:spcBef>
               <a:spcAft>
-                <a:spcPts val="333"/>
+                <a:spcPts val="167"/>
               </a:spcAft>
             </a:pPr>
             <a:r>
@@ -2975,12 +2975,12 @@
           <a:bodyPr vert="horz" wrap="square" anchor="t" lIns="91440" rIns="91440" tIns="45720" bIns="45720"/>
           <a:lstStyle/>
           <a:p>
-            <a:pPr algn="l">
-              <a:lnSpc>
-                <a:spcPct val="100000"/>
-              </a:lnSpc>
+            <a:pPr algn="l" marL="0" indent="0">
+              <a:spcBef>
+                <a:spcPts val="0"/>
+              </a:spcBef>
               <a:spcAft>
-                <a:spcPts val="283"/>
+                <a:spcPts val="142"/>
               </a:spcAft>
             </a:pPr>
             <a:r>
@@ -3019,12 +3019,12 @@
             </a:r>
           </a:p>
           <a:p>
-            <a:pPr algn="l">
-              <a:lnSpc>
-                <a:spcPct val="100000"/>
-              </a:lnSpc>
+            <a:pPr algn="l" marL="0" indent="0">
+              <a:spcBef>
+                <a:spcPts val="0"/>
+              </a:spcBef>
               <a:spcAft>
-                <a:spcPts val="283"/>
+                <a:spcPts val="142"/>
               </a:spcAft>
             </a:pPr>
             <a:r>
@@ -3063,12 +3063,12 @@
             </a:r>
           </a:p>
           <a:p>
-            <a:pPr algn="l">
-              <a:lnSpc>
-                <a:spcPct val="100000"/>
-              </a:lnSpc>
+            <a:pPr algn="l" marL="0" indent="0">
+              <a:spcBef>
+                <a:spcPts val="0"/>
+              </a:spcBef>
               <a:spcAft>
-                <a:spcPts val="283"/>
+                <a:spcPts val="142"/>
               </a:spcAft>
             </a:pPr>
             <a:r>
@@ -3085,12 +3085,12 @@
             </a:r>
           </a:p>
           <a:p>
-            <a:pPr algn="l">
-              <a:lnSpc>
-                <a:spcPct val="100000"/>
-              </a:lnSpc>
+            <a:pPr algn="l" marL="0" indent="0">
+              <a:spcBef>
+                <a:spcPts val="0"/>
+              </a:spcBef>
               <a:spcAft>
-                <a:spcPts val="283"/>
+                <a:spcPts val="142"/>
               </a:spcAft>
             </a:pPr>
             <a:r>
@@ -3107,12 +3107,12 @@
             </a:r>
           </a:p>
           <a:p>
-            <a:pPr algn="l">
-              <a:lnSpc>
-                <a:spcPct val="100000"/>
-              </a:lnSpc>
+            <a:pPr algn="l" marL="0" indent="0">
+              <a:spcBef>
+                <a:spcPts val="0"/>
+              </a:spcBef>
               <a:spcAft>
-                <a:spcPts val="283"/>
+                <a:spcPts val="142"/>
               </a:spcAft>
             </a:pPr>
             <a:r>
@@ -3140,12 +3140,12 @@
             </a:r>
           </a:p>
           <a:p>
-            <a:pPr algn="l">
-              <a:lnSpc>
-                <a:spcPct val="100000"/>
-              </a:lnSpc>
+            <a:pPr algn="l" marL="0" indent="0">
+              <a:spcBef>
+                <a:spcPts val="0"/>
+              </a:spcBef>
               <a:spcAft>
-                <a:spcPts val="283"/>
+                <a:spcPts val="142"/>
               </a:spcAft>
             </a:pPr>
             <a:r>
@@ -3184,12 +3184,12 @@
             </a:r>
           </a:p>
           <a:p>
-            <a:pPr algn="l">
-              <a:lnSpc>
-                <a:spcPct val="100000"/>
-              </a:lnSpc>
+            <a:pPr algn="l" marL="0" indent="0">
+              <a:spcBef>
+                <a:spcPts val="0"/>
+              </a:spcBef>
               <a:spcAft>
-                <a:spcPts val="283"/>
+                <a:spcPts val="142"/>
               </a:spcAft>
             </a:pPr>
             <a:r>
@@ -3294,12 +3294,12 @@
             </a:r>
           </a:p>
           <a:p>
-            <a:pPr algn="l">
-              <a:lnSpc>
-                <a:spcPct val="100000"/>
-              </a:lnSpc>
+            <a:pPr algn="l" marL="0" indent="0">
+              <a:spcBef>
+                <a:spcPts val="0"/>
+              </a:spcBef>
               <a:spcAft>
-                <a:spcPts val="283"/>
+                <a:spcPts val="142"/>
               </a:spcAft>
             </a:pPr>
             <a:r>
@@ -3382,12 +3382,12 @@
             </a:r>
           </a:p>
           <a:p>
-            <a:pPr algn="l">
-              <a:lnSpc>
-                <a:spcPct val="100000"/>
-              </a:lnSpc>
+            <a:pPr algn="l" marL="0" indent="0">
+              <a:spcBef>
+                <a:spcPts val="0"/>
+              </a:spcBef>
               <a:spcAft>
-                <a:spcPts val="283"/>
+                <a:spcPts val="142"/>
               </a:spcAft>
             </a:pPr>
             <a:r>
@@ -3426,12 +3426,12 @@
             </a:r>
           </a:p>
           <a:p>
-            <a:pPr algn="l">
-              <a:lnSpc>
-                <a:spcPct val="100000"/>
-              </a:lnSpc>
+            <a:pPr algn="l" marL="0" indent="0">
+              <a:spcBef>
+                <a:spcPts val="0"/>
+              </a:spcBef>
               <a:spcAft>
-                <a:spcPts val="283"/>
+                <a:spcPts val="142"/>
               </a:spcAft>
             </a:pPr>
             <a:r>
@@ -3492,12 +3492,12 @@
             </a:r>
           </a:p>
           <a:p>
-            <a:pPr algn="l">
-              <a:lnSpc>
-                <a:spcPct val="100000"/>
-              </a:lnSpc>
+            <a:pPr algn="l" marL="0" indent="0">
+              <a:spcBef>
+                <a:spcPts val="0"/>
+              </a:spcBef>
               <a:spcAft>
-                <a:spcPts val="283"/>
+                <a:spcPts val="142"/>
               </a:spcAft>
             </a:pPr>
             <a:r>
@@ -3536,12 +3536,12 @@
             </a:r>
           </a:p>
           <a:p>
-            <a:pPr algn="l">
-              <a:lnSpc>
-                <a:spcPct val="100000"/>
-              </a:lnSpc>
+            <a:pPr algn="l" marL="0" indent="0">
+              <a:spcBef>
+                <a:spcPts val="0"/>
+              </a:spcBef>
               <a:spcAft>
-                <a:spcPts val="283"/>
+                <a:spcPts val="142"/>
               </a:spcAft>
             </a:pPr>
             <a:r>
@@ -3580,12 +3580,12 @@
             </a:r>
           </a:p>
           <a:p>
-            <a:pPr algn="l">
-              <a:lnSpc>
-                <a:spcPct val="100000"/>
-              </a:lnSpc>
+            <a:pPr algn="l" marL="0" indent="0">
+              <a:spcBef>
+                <a:spcPts val="0"/>
+              </a:spcBef>
               <a:spcAft>
-                <a:spcPts val="283"/>
+                <a:spcPts val="142"/>
               </a:spcAft>
             </a:pPr>
             <a:r>
@@ -3622,12 +3622,12 @@
           <a:bodyPr vert="horz" wrap="square" anchor="t" lIns="91440" rIns="91440" tIns="45720" bIns="45720"/>
           <a:lstStyle/>
           <a:p>
-            <a:pPr algn="l">
-              <a:lnSpc>
-                <a:spcPct val="100000"/>
-              </a:lnSpc>
+            <a:pPr algn="l" marL="0" indent="0">
+              <a:spcBef>
+                <a:spcPts val="0"/>
+              </a:spcBef>
               <a:spcAft>
-                <a:spcPts val="333"/>
+                <a:spcPts val="167"/>
               </a:spcAft>
             </a:pPr>
             <a:r>
@@ -3701,12 +3701,12 @@
           <a:bodyPr vert="horz" wrap="square" anchor="t" lIns="91440" rIns="91440" tIns="45720" bIns="45720"/>
           <a:lstStyle/>
           <a:p>
-            <a:pPr algn="l">
-              <a:lnSpc>
-                <a:spcPct val="100000"/>
-              </a:lnSpc>
+            <a:pPr algn="l" marL="0" indent="0">
+              <a:spcBef>
+                <a:spcPts val="0"/>
+              </a:spcBef>
               <a:spcAft>
-                <a:spcPts val="300"/>
+                <a:spcPts val="150"/>
               </a:spcAft>
             </a:pPr>
             <a:r>
@@ -3723,12 +3723,12 @@
             </a:r>
           </a:p>
           <a:p>
-            <a:pPr algn="l">
-              <a:lnSpc>
-                <a:spcPct val="100000"/>
-              </a:lnSpc>
+            <a:pPr algn="l" marL="0" indent="0">
+              <a:spcBef>
+                <a:spcPts val="0"/>
+              </a:spcBef>
               <a:spcAft>
-                <a:spcPts val="300"/>
+                <a:spcPts val="150"/>
               </a:spcAft>
             </a:pPr>
             <a:r>
@@ -3767,12 +3767,12 @@
             </a:r>
           </a:p>
           <a:p>
-            <a:pPr algn="l">
-              <a:lnSpc>
-                <a:spcPct val="100000"/>
-              </a:lnSpc>
+            <a:pPr algn="l" marL="0" indent="0">
+              <a:spcBef>
+                <a:spcPts val="0"/>
+              </a:spcBef>
               <a:spcAft>
-                <a:spcPts val="300"/>
+                <a:spcPts val="150"/>
               </a:spcAft>
             </a:pPr>
             <a:r>
@@ -3822,12 +3822,12 @@
             </a:r>
           </a:p>
           <a:p>
-            <a:pPr algn="l">
-              <a:lnSpc>
-                <a:spcPct val="100000"/>
-              </a:lnSpc>
+            <a:pPr algn="l" marL="0" indent="0">
+              <a:spcBef>
+                <a:spcPts val="0"/>
+              </a:spcBef>
               <a:spcAft>
-                <a:spcPts val="300"/>
+                <a:spcPts val="150"/>
               </a:spcAft>
             </a:pPr>
             <a:r>
@@ -3877,12 +3877,12 @@
             </a:r>
           </a:p>
           <a:p>
-            <a:pPr algn="l">
-              <a:lnSpc>
-                <a:spcPct val="100000"/>
-              </a:lnSpc>
+            <a:pPr algn="l" marL="0" indent="0">
+              <a:spcBef>
+                <a:spcPts val="0"/>
+              </a:spcBef>
               <a:spcAft>
-                <a:spcPts val="300"/>
+                <a:spcPts val="150"/>
               </a:spcAft>
             </a:pPr>
             <a:r>
@@ -3899,12 +3899,12 @@
             </a:r>
           </a:p>
           <a:p>
-            <a:pPr algn="l">
-              <a:lnSpc>
-                <a:spcPct val="100000"/>
-              </a:lnSpc>
+            <a:pPr algn="l" marL="0" indent="0">
+              <a:spcBef>
+                <a:spcPts val="0"/>
+              </a:spcBef>
               <a:spcAft>
-                <a:spcPts val="300"/>
+                <a:spcPts val="150"/>
               </a:spcAft>
             </a:pPr>
             <a:r>
@@ -3954,12 +3954,12 @@
             </a:r>
           </a:p>
           <a:p>
-            <a:pPr algn="l">
-              <a:lnSpc>
-                <a:spcPct val="100000"/>
-              </a:lnSpc>
+            <a:pPr algn="l" marL="0" indent="0">
+              <a:spcBef>
+                <a:spcPts val="0"/>
+              </a:spcBef>
               <a:spcAft>
-                <a:spcPts val="300"/>
+                <a:spcPts val="150"/>
               </a:spcAft>
             </a:pPr>
             <a:r>
@@ -4009,12 +4009,12 @@
             </a:r>
           </a:p>
           <a:p>
-            <a:pPr algn="l">
-              <a:lnSpc>
-                <a:spcPct val="100000"/>
-              </a:lnSpc>
+            <a:pPr algn="l" marL="0" indent="0">
+              <a:spcBef>
+                <a:spcPts val="0"/>
+              </a:spcBef>
               <a:spcAft>
-                <a:spcPts val="300"/>
+                <a:spcPts val="150"/>
               </a:spcAft>
             </a:pPr>
             <a:r>
@@ -4053,12 +4053,12 @@
             </a:r>
           </a:p>
           <a:p>
-            <a:pPr algn="l">
-              <a:lnSpc>
-                <a:spcPct val="100000"/>
-              </a:lnSpc>
+            <a:pPr algn="l" marL="0" indent="0">
+              <a:spcBef>
+                <a:spcPts val="0"/>
+              </a:spcBef>
               <a:spcAft>
-                <a:spcPts val="300"/>
+                <a:spcPts val="150"/>
               </a:spcAft>
             </a:pPr>
             <a:r>
@@ -4086,12 +4086,12 @@
             </a:r>
           </a:p>
           <a:p>
-            <a:pPr algn="l">
-              <a:lnSpc>
-                <a:spcPct val="100000"/>
-              </a:lnSpc>
+            <a:pPr algn="l" marL="0" indent="0">
+              <a:spcBef>
+                <a:spcPts val="0"/>
+              </a:spcBef>
               <a:spcAft>
-                <a:spcPts val="300"/>
+                <a:spcPts val="150"/>
               </a:spcAft>
             </a:pPr>
             <a:r>
@@ -4119,12 +4119,12 @@
             </a:r>
           </a:p>
           <a:p>
-            <a:pPr algn="l">
-              <a:lnSpc>
-                <a:spcPct val="100000"/>
-              </a:lnSpc>
+            <a:pPr algn="l" marL="0" indent="0">
+              <a:spcBef>
+                <a:spcPts val="0"/>
+              </a:spcBef>
               <a:spcAft>
-                <a:spcPts val="300"/>
+                <a:spcPts val="150"/>
               </a:spcAft>
             </a:pPr>
             <a:r>
@@ -4163,12 +4163,12 @@
             </a:r>
           </a:p>
           <a:p>
-            <a:pPr algn="l">
-              <a:lnSpc>
-                <a:spcPct val="100000"/>
-              </a:lnSpc>
+            <a:pPr algn="l" marL="0" indent="0">
+              <a:spcBef>
+                <a:spcPts val="0"/>
+              </a:spcBef>
               <a:spcAft>
-                <a:spcPts val="300"/>
+                <a:spcPts val="150"/>
               </a:spcAft>
             </a:pPr>
             <a:r>
@@ -4196,12 +4196,12 @@
             </a:r>
           </a:p>
           <a:p>
-            <a:pPr algn="l">
-              <a:lnSpc>
-                <a:spcPct val="100000"/>
-              </a:lnSpc>
+            <a:pPr algn="l" marL="0" indent="0">
+              <a:spcBef>
+                <a:spcPts val="0"/>
+              </a:spcBef>
               <a:spcAft>
-                <a:spcPts val="300"/>
+                <a:spcPts val="150"/>
               </a:spcAft>
             </a:pPr>
             <a:r>
@@ -4240,12 +4240,12 @@
             </a:r>
           </a:p>
           <a:p>
-            <a:pPr algn="l">
-              <a:lnSpc>
-                <a:spcPct val="100000"/>
-              </a:lnSpc>
+            <a:pPr algn="l" marL="0" indent="0">
+              <a:spcBef>
+                <a:spcPts val="0"/>
+              </a:spcBef>
               <a:spcAft>
-                <a:spcPts val="300"/>
+                <a:spcPts val="150"/>
               </a:spcAft>
             </a:pPr>
             <a:r>
@@ -4284,12 +4284,12 @@
             </a:r>
           </a:p>
           <a:p>
-            <a:pPr algn="l">
-              <a:lnSpc>
-                <a:spcPct val="100000"/>
-              </a:lnSpc>
+            <a:pPr algn="l" marL="0" indent="0">
+              <a:spcBef>
+                <a:spcPts val="0"/>
+              </a:spcBef>
               <a:spcAft>
-                <a:spcPts val="300"/>
+                <a:spcPts val="150"/>
               </a:spcAft>
             </a:pPr>
             <a:r>
@@ -4326,12 +4326,12 @@
           <a:bodyPr vert="horz" wrap="square" anchor="t" lIns="91440" rIns="91440" tIns="45720" bIns="45720"/>
           <a:lstStyle/>
           <a:p>
-            <a:pPr algn="l">
-              <a:lnSpc>
-                <a:spcPct val="100000"/>
-              </a:lnSpc>
+            <a:pPr algn="l" marL="0" indent="0">
+              <a:spcBef>
+                <a:spcPts val="0"/>
+              </a:spcBef>
               <a:spcAft>
-                <a:spcPts val="333"/>
+                <a:spcPts val="167"/>
               </a:spcAft>
             </a:pPr>
             <a:r>
@@ -4405,12 +4405,12 @@
           <a:bodyPr vert="horz" wrap="square" anchor="t" lIns="91440" rIns="91440" tIns="45720" bIns="45720"/>
           <a:lstStyle/>
           <a:p>
-            <a:pPr algn="l">
-              <a:lnSpc>
-                <a:spcPct val="100000"/>
-              </a:lnSpc>
+            <a:pPr algn="l" marL="0" indent="0">
+              <a:spcBef>
+                <a:spcPts val="0"/>
+              </a:spcBef>
               <a:spcAft>
-                <a:spcPts val="267"/>
+                <a:spcPts val="133"/>
               </a:spcAft>
             </a:pPr>
             <a:r>
@@ -4471,12 +4471,12 @@
             </a:r>
           </a:p>
           <a:p>
-            <a:pPr algn="l">
-              <a:lnSpc>
-                <a:spcPct val="100000"/>
-              </a:lnSpc>
+            <a:pPr algn="l" marL="0" indent="0">
+              <a:spcBef>
+                <a:spcPts val="0"/>
+              </a:spcBef>
               <a:spcAft>
-                <a:spcPts val="267"/>
+                <a:spcPts val="133"/>
               </a:spcAft>
             </a:pPr>
             <a:r>
@@ -4603,12 +4603,12 @@
             </a:r>
           </a:p>
           <a:p>
-            <a:pPr algn="l">
-              <a:lnSpc>
-                <a:spcPct val="100000"/>
-              </a:lnSpc>
+            <a:pPr algn="l" marL="0" indent="0">
+              <a:spcBef>
+                <a:spcPts val="0"/>
+              </a:spcBef>
               <a:spcAft>
-                <a:spcPts val="267"/>
+                <a:spcPts val="133"/>
               </a:spcAft>
             </a:pPr>
             <a:r>
@@ -4691,12 +4691,12 @@
             </a:r>
           </a:p>
           <a:p>
-            <a:pPr algn="l">
-              <a:lnSpc>
-                <a:spcPct val="100000"/>
-              </a:lnSpc>
+            <a:pPr algn="l" marL="0" indent="0">
+              <a:spcBef>
+                <a:spcPts val="0"/>
+              </a:spcBef>
               <a:spcAft>
-                <a:spcPts val="267"/>
+                <a:spcPts val="133"/>
               </a:spcAft>
             </a:pPr>
             <a:r>
@@ -4779,12 +4779,12 @@
             </a:r>
           </a:p>
           <a:p>
-            <a:pPr algn="l">
-              <a:lnSpc>
-                <a:spcPct val="100000"/>
-              </a:lnSpc>
+            <a:pPr algn="l" marL="0" indent="0">
+              <a:spcBef>
+                <a:spcPts val="0"/>
+              </a:spcBef>
               <a:spcAft>
-                <a:spcPts val="267"/>
+                <a:spcPts val="133"/>
               </a:spcAft>
             </a:pPr>
             <a:r>
@@ -4867,12 +4867,12 @@
             </a:r>
           </a:p>
           <a:p>
-            <a:pPr algn="l">
-              <a:lnSpc>
-                <a:spcPct val="100000"/>
-              </a:lnSpc>
+            <a:pPr algn="l" marL="0" indent="0">
+              <a:spcBef>
+                <a:spcPts val="0"/>
+              </a:spcBef>
               <a:spcAft>
-                <a:spcPts val="267"/>
+                <a:spcPts val="133"/>
               </a:spcAft>
             </a:pPr>
             <a:r>
@@ -5021,12 +5021,12 @@
             </a:r>
           </a:p>
           <a:p>
-            <a:pPr algn="l">
-              <a:lnSpc>
-                <a:spcPct val="100000"/>
-              </a:lnSpc>
+            <a:pPr algn="l" marL="0" indent="0">
+              <a:spcBef>
+                <a:spcPts val="0"/>
+              </a:spcBef>
               <a:spcAft>
-                <a:spcPts val="267"/>
+                <a:spcPts val="133"/>
               </a:spcAft>
             </a:pPr>
             <a:r>
@@ -5087,12 +5087,12 @@
             </a:r>
           </a:p>
           <a:p>
-            <a:pPr algn="l">
-              <a:lnSpc>
-                <a:spcPct val="100000"/>
-              </a:lnSpc>
+            <a:pPr algn="l" marL="0" indent="0">
+              <a:spcBef>
+                <a:spcPts val="0"/>
+              </a:spcBef>
               <a:spcAft>
-                <a:spcPts val="267"/>
+                <a:spcPts val="133"/>
               </a:spcAft>
             </a:pPr>
             <a:r>
@@ -5208,12 +5208,12 @@
             </a:r>
           </a:p>
           <a:p>
-            <a:pPr algn="l">
-              <a:lnSpc>
-                <a:spcPct val="100000"/>
-              </a:lnSpc>
+            <a:pPr algn="l" marL="0" indent="0">
+              <a:spcBef>
+                <a:spcPts val="0"/>
+              </a:spcBef>
               <a:spcAft>
-                <a:spcPts val="267"/>
+                <a:spcPts val="133"/>
               </a:spcAft>
             </a:pPr>
             <a:r>
@@ -5252,12 +5252,12 @@
             </a:r>
           </a:p>
           <a:p>
-            <a:pPr algn="l">
-              <a:lnSpc>
-                <a:spcPct val="100000"/>
-              </a:lnSpc>
+            <a:pPr algn="l" marL="0" indent="0">
+              <a:spcBef>
+                <a:spcPts val="0"/>
+              </a:spcBef>
               <a:spcAft>
-                <a:spcPts val="267"/>
+                <a:spcPts val="133"/>
               </a:spcAft>
             </a:pPr>
             <a:r>
@@ -5338,12 +5338,12 @@
           <a:bodyPr vert="horz" wrap="square" anchor="t" lIns="91440" rIns="91440" tIns="45720" bIns="45720"/>
           <a:lstStyle/>
           <a:p>
-            <a:pPr algn="l">
-              <a:lnSpc>
-                <a:spcPct val="100000"/>
-              </a:lnSpc>
+            <a:pPr algn="l" marL="0" indent="0">
+              <a:spcBef>
+                <a:spcPts val="0"/>
+              </a:spcBef>
               <a:spcAft>
-                <a:spcPts val="333"/>
+                <a:spcPts val="167"/>
               </a:spcAft>
             </a:pPr>
             <a:r>
@@ -5417,12 +5417,12 @@
           <a:bodyPr vert="horz" wrap="square" anchor="t" lIns="91440" rIns="91440" tIns="45720" bIns="45720"/>
           <a:lstStyle/>
           <a:p>
-            <a:pPr algn="l">
-              <a:lnSpc>
-                <a:spcPct val="100000"/>
-              </a:lnSpc>
+            <a:pPr algn="l" marL="0" indent="0">
+              <a:spcBef>
+                <a:spcPts val="0"/>
+              </a:spcBef>
               <a:spcAft>
-                <a:spcPts val="317"/>
+                <a:spcPts val="158"/>
               </a:spcAft>
             </a:pPr>
             <a:r>
@@ -5439,12 +5439,12 @@
             </a:r>
           </a:p>
           <a:p>
-            <a:pPr algn="l">
-              <a:lnSpc>
-                <a:spcPct val="100000"/>
-              </a:lnSpc>
+            <a:pPr algn="l" marL="0" indent="0">
+              <a:spcBef>
+                <a:spcPts val="0"/>
+              </a:spcBef>
               <a:spcAft>
-                <a:spcPts val="317"/>
+                <a:spcPts val="158"/>
               </a:spcAft>
             </a:pPr>
             <a:r>
@@ -5505,12 +5505,12 @@
             </a:r>
           </a:p>
           <a:p>
-            <a:pPr algn="l">
-              <a:lnSpc>
-                <a:spcPct val="100000"/>
-              </a:lnSpc>
+            <a:pPr algn="l" marL="0" indent="0">
+              <a:spcBef>
+                <a:spcPts val="0"/>
+              </a:spcBef>
               <a:spcAft>
-                <a:spcPts val="317"/>
+                <a:spcPts val="158"/>
               </a:spcAft>
             </a:pPr>
             <a:r>
@@ -5549,12 +5549,12 @@
             </a:r>
           </a:p>
           <a:p>
-            <a:pPr algn="l">
-              <a:lnSpc>
-                <a:spcPct val="100000"/>
-              </a:lnSpc>
+            <a:pPr algn="l" marL="0" indent="0">
+              <a:spcBef>
+                <a:spcPts val="0"/>
+              </a:spcBef>
               <a:spcAft>
-                <a:spcPts val="317"/>
+                <a:spcPts val="158"/>
               </a:spcAft>
             </a:pPr>
             <a:r>
@@ -5582,12 +5582,12 @@
             </a:r>
           </a:p>
           <a:p>
-            <a:pPr algn="l">
-              <a:lnSpc>
-                <a:spcPct val="100000"/>
-              </a:lnSpc>
+            <a:pPr algn="l" marL="0" indent="0">
+              <a:spcBef>
+                <a:spcPts val="0"/>
+              </a:spcBef>
               <a:spcAft>
-                <a:spcPts val="317"/>
+                <a:spcPts val="158"/>
               </a:spcAft>
             </a:pPr>
             <a:r>
@@ -5604,12 +5604,12 @@
             </a:r>
           </a:p>
           <a:p>
-            <a:pPr algn="l">
-              <a:lnSpc>
-                <a:spcPct val="100000"/>
-              </a:lnSpc>
+            <a:pPr algn="l" marL="0" indent="0">
+              <a:spcBef>
+                <a:spcPts val="0"/>
+              </a:spcBef>
               <a:spcAft>
-                <a:spcPts val="317"/>
+                <a:spcPts val="158"/>
               </a:spcAft>
             </a:pPr>
             <a:r>
@@ -5626,12 +5626,12 @@
             </a:r>
           </a:p>
           <a:p>
-            <a:pPr algn="l">
-              <a:lnSpc>
-                <a:spcPct val="100000"/>
-              </a:lnSpc>
+            <a:pPr algn="l" marL="0" indent="0">
+              <a:spcBef>
+                <a:spcPts val="0"/>
+              </a:spcBef>
               <a:spcAft>
-                <a:spcPts val="317"/>
+                <a:spcPts val="158"/>
               </a:spcAft>
             </a:pPr>
             <a:r>
@@ -5670,12 +5670,12 @@
             </a:r>
           </a:p>
           <a:p>
-            <a:pPr algn="l">
-              <a:lnSpc>
-                <a:spcPct val="100000"/>
-              </a:lnSpc>
+            <a:pPr algn="l" marL="0" indent="0">
+              <a:spcBef>
+                <a:spcPts val="0"/>
+              </a:spcBef>
               <a:spcAft>
-                <a:spcPts val="317"/>
+                <a:spcPts val="158"/>
               </a:spcAft>
             </a:pPr>
             <a:r>
@@ -5714,12 +5714,12 @@
             </a:r>
           </a:p>
           <a:p>
-            <a:pPr algn="l">
-              <a:lnSpc>
-                <a:spcPct val="100000"/>
-              </a:lnSpc>
+            <a:pPr algn="l" marL="0" indent="0">
+              <a:spcBef>
+                <a:spcPts val="0"/>
+              </a:spcBef>
               <a:spcAft>
-                <a:spcPts val="317"/>
+                <a:spcPts val="158"/>
               </a:spcAft>
             </a:pPr>
             <a:r>
@@ -5791,12 +5791,12 @@
             </a:r>
           </a:p>
           <a:p>
-            <a:pPr algn="l">
-              <a:lnSpc>
-                <a:spcPct val="100000"/>
-              </a:lnSpc>
+            <a:pPr algn="l" marL="0" indent="0">
+              <a:spcBef>
+                <a:spcPts val="0"/>
+              </a:spcBef>
               <a:spcAft>
-                <a:spcPts val="317"/>
+                <a:spcPts val="158"/>
               </a:spcAft>
             </a:pPr>
             <a:r>
@@ -5857,12 +5857,12 @@
             </a:r>
           </a:p>
           <a:p>
-            <a:pPr algn="l">
-              <a:lnSpc>
-                <a:spcPct val="100000"/>
-              </a:lnSpc>
+            <a:pPr algn="l" marL="0" indent="0">
+              <a:spcBef>
+                <a:spcPts val="0"/>
+              </a:spcBef>
               <a:spcAft>
-                <a:spcPts val="317"/>
+                <a:spcPts val="158"/>
               </a:spcAft>
             </a:pPr>
             <a:r>
@@ -5879,12 +5879,12 @@
             </a:r>
           </a:p>
           <a:p>
-            <a:pPr algn="l">
-              <a:lnSpc>
-                <a:spcPct val="100000"/>
-              </a:lnSpc>
+            <a:pPr algn="l" marL="0" indent="0">
+              <a:spcBef>
+                <a:spcPts val="0"/>
+              </a:spcBef>
               <a:spcAft>
-                <a:spcPts val="317"/>
+                <a:spcPts val="158"/>
               </a:spcAft>
             </a:pPr>
             <a:r>
@@ -5943,12 +5943,12 @@
           <a:bodyPr vert="horz" wrap="square" anchor="t" lIns="91440" rIns="91440" tIns="45720" bIns="45720"/>
           <a:lstStyle/>
           <a:p>
-            <a:pPr algn="l">
-              <a:lnSpc>
-                <a:spcPct val="100000"/>
-              </a:lnSpc>
+            <a:pPr algn="l" marL="0" indent="0">
+              <a:spcBef>
+                <a:spcPts val="0"/>
+              </a:spcBef>
               <a:spcAft>
-                <a:spcPts val="333"/>
+                <a:spcPts val="167"/>
               </a:spcAft>
             </a:pPr>
             <a:r>
@@ -6022,12 +6022,12 @@
           <a:bodyPr vert="horz" wrap="square" anchor="t" lIns="91440" rIns="91440" tIns="45720" bIns="45720"/>
           <a:lstStyle/>
           <a:p>
-            <a:pPr algn="l">
-              <a:lnSpc>
-                <a:spcPct val="100000"/>
-              </a:lnSpc>
+            <a:pPr algn="l" marL="0" indent="0">
+              <a:spcBef>
+                <a:spcPts val="0"/>
+              </a:spcBef>
               <a:spcAft>
-                <a:spcPts val="400"/>
+                <a:spcPts val="200"/>
               </a:spcAft>
             </a:pPr>
             <a:r>
@@ -6044,12 +6044,12 @@
             </a:r>
           </a:p>
           <a:p>
-            <a:pPr algn="l">
-              <a:lnSpc>
-                <a:spcPct val="100000"/>
-              </a:lnSpc>
+            <a:pPr algn="l" marL="0" indent="0">
+              <a:spcBef>
+                <a:spcPts val="0"/>
+              </a:spcBef>
               <a:spcAft>
-                <a:spcPts val="400"/>
+                <a:spcPts val="200"/>
               </a:spcAft>
             </a:pPr>
             <a:r>
@@ -6088,12 +6088,12 @@
             </a:r>
           </a:p>
           <a:p>
-            <a:pPr algn="l">
-              <a:lnSpc>
-                <a:spcPct val="100000"/>
-              </a:lnSpc>
+            <a:pPr algn="l" marL="0" indent="0">
+              <a:spcBef>
+                <a:spcPts val="0"/>
+              </a:spcBef>
               <a:spcAft>
-                <a:spcPts val="400"/>
+                <a:spcPts val="200"/>
               </a:spcAft>
             </a:pPr>
             <a:r>
@@ -6154,12 +6154,12 @@
             </a:r>
           </a:p>
           <a:p>
-            <a:pPr algn="l">
-              <a:lnSpc>
-                <a:spcPct val="100000"/>
-              </a:lnSpc>
+            <a:pPr algn="l" marL="0" indent="0">
+              <a:spcBef>
+                <a:spcPts val="0"/>
+              </a:spcBef>
               <a:spcAft>
-                <a:spcPts val="400"/>
+                <a:spcPts val="200"/>
               </a:spcAft>
             </a:pPr>
             <a:r>
@@ -6187,12 +6187,12 @@
             </a:r>
           </a:p>
           <a:p>
-            <a:pPr algn="l">
-              <a:lnSpc>
-                <a:spcPct val="100000"/>
-              </a:lnSpc>
+            <a:pPr algn="l" marL="0" indent="0">
+              <a:spcBef>
+                <a:spcPts val="0"/>
+              </a:spcBef>
               <a:spcAft>
-                <a:spcPts val="400"/>
+                <a:spcPts val="200"/>
               </a:spcAft>
             </a:pPr>
             <a:r>
@@ -6275,12 +6275,12 @@
             </a:r>
           </a:p>
           <a:p>
-            <a:pPr algn="l">
-              <a:lnSpc>
-                <a:spcPct val="100000"/>
-              </a:lnSpc>
+            <a:pPr algn="l" marL="0" indent="0">
+              <a:spcBef>
+                <a:spcPts val="0"/>
+              </a:spcBef>
               <a:spcAft>
-                <a:spcPts val="400"/>
+                <a:spcPts val="200"/>
               </a:spcAft>
             </a:pPr>
             <a:r>
@@ -6297,12 +6297,12 @@
             </a:r>
           </a:p>
           <a:p>
-            <a:pPr algn="l">
-              <a:lnSpc>
-                <a:spcPct val="100000"/>
-              </a:lnSpc>
+            <a:pPr algn="l" marL="0" indent="0">
+              <a:spcBef>
+                <a:spcPts val="0"/>
+              </a:spcBef>
               <a:spcAft>
-                <a:spcPts val="400"/>
+                <a:spcPts val="200"/>
               </a:spcAft>
             </a:pPr>
             <a:r>
@@ -6385,12 +6385,12 @@
             </a:r>
           </a:p>
           <a:p>
-            <a:pPr algn="l">
-              <a:lnSpc>
-                <a:spcPct val="100000"/>
-              </a:lnSpc>
+            <a:pPr algn="l" marL="0" indent="0">
+              <a:spcBef>
+                <a:spcPts val="0"/>
+              </a:spcBef>
               <a:spcAft>
-                <a:spcPts val="400"/>
+                <a:spcPts val="200"/>
               </a:spcAft>
             </a:pPr>
             <a:r>
@@ -6427,12 +6427,12 @@
           <a:bodyPr vert="horz" wrap="square" anchor="t" lIns="91440" rIns="91440" tIns="45720" bIns="45720"/>
           <a:lstStyle/>
           <a:p>
-            <a:pPr algn="l">
-              <a:lnSpc>
-                <a:spcPct val="100000"/>
-              </a:lnSpc>
+            <a:pPr algn="l" marL="0" indent="0">
+              <a:spcBef>
+                <a:spcPts val="0"/>
+              </a:spcBef>
               <a:spcAft>
-                <a:spcPts val="333"/>
+                <a:spcPts val="167"/>
               </a:spcAft>
             </a:pPr>
             <a:r>
@@ -6506,12 +6506,12 @@
           <a:bodyPr vert="horz" wrap="square" anchor="t" lIns="91440" rIns="91440" tIns="45720" bIns="45720"/>
           <a:lstStyle/>
           <a:p>
-            <a:pPr algn="l">
-              <a:lnSpc>
-                <a:spcPct val="100000"/>
-              </a:lnSpc>
+            <a:pPr algn="l" marL="0" indent="0">
+              <a:spcBef>
+                <a:spcPts val="0"/>
+              </a:spcBef>
               <a:spcAft>
-                <a:spcPts val="400"/>
+                <a:spcPts val="200"/>
               </a:spcAft>
             </a:pPr>
             <a:r>
@@ -6528,12 +6528,12 @@
             </a:r>
           </a:p>
           <a:p>
-            <a:pPr algn="l">
-              <a:lnSpc>
-                <a:spcPct val="100000"/>
-              </a:lnSpc>
+            <a:pPr algn="l" marL="0" indent="0">
+              <a:spcBef>
+                <a:spcPts val="0"/>
+              </a:spcBef>
               <a:spcAft>
-                <a:spcPts val="400"/>
+                <a:spcPts val="200"/>
               </a:spcAft>
             </a:pPr>
             <a:r>
@@ -6594,12 +6594,12 @@
             </a:r>
           </a:p>
           <a:p>
-            <a:pPr algn="l">
-              <a:lnSpc>
-                <a:spcPct val="100000"/>
-              </a:lnSpc>
+            <a:pPr algn="l" marL="0" indent="0">
+              <a:spcBef>
+                <a:spcPts val="0"/>
+              </a:spcBef>
               <a:spcAft>
-                <a:spcPts val="400"/>
+                <a:spcPts val="200"/>
               </a:spcAft>
             </a:pPr>
             <a:r>
@@ -6616,12 +6616,12 @@
             </a:r>
           </a:p>
           <a:p>
-            <a:pPr algn="l">
-              <a:lnSpc>
-                <a:spcPct val="100000"/>
-              </a:lnSpc>
+            <a:pPr algn="l" marL="0" indent="0">
+              <a:spcBef>
+                <a:spcPts val="0"/>
+              </a:spcBef>
               <a:spcAft>
-                <a:spcPts val="400"/>
+                <a:spcPts val="200"/>
               </a:spcAft>
             </a:pPr>
             <a:r>
@@ -6658,12 +6658,12 @@
           <a:bodyPr vert="horz" wrap="square" anchor="t" lIns="91440" rIns="91440" tIns="45720" bIns="45720"/>
           <a:lstStyle/>
           <a:p>
-            <a:pPr algn="l">
-              <a:lnSpc>
-                <a:spcPct val="100000"/>
-              </a:lnSpc>
+            <a:pPr algn="l" marL="0" indent="0">
+              <a:spcBef>
+                <a:spcPts val="0"/>
+              </a:spcBef>
               <a:spcAft>
-                <a:spcPts val="333"/>
+                <a:spcPts val="167"/>
               </a:spcAft>
             </a:pPr>
             <a:r>
@@ -6737,12 +6737,12 @@
           <a:bodyPr vert="horz" wrap="square" anchor="t" lIns="91440" rIns="91440" tIns="45720" bIns="45720"/>
           <a:lstStyle/>
           <a:p>
-            <a:pPr algn="l">
-              <a:lnSpc>
-                <a:spcPct val="100000"/>
-              </a:lnSpc>
+            <a:pPr algn="l" marL="0" indent="0">
+              <a:spcBef>
+                <a:spcPts val="0"/>
+              </a:spcBef>
               <a:spcAft>
-                <a:spcPts val="400"/>
+                <a:spcPts val="200"/>
               </a:spcAft>
             </a:pPr>
             <a:r>
@@ -6781,12 +6781,12 @@
             </a:r>
           </a:p>
           <a:p>
-            <a:pPr algn="l">
-              <a:lnSpc>
-                <a:spcPct val="100000"/>
-              </a:lnSpc>
+            <a:pPr algn="l" marL="0" indent="0">
+              <a:spcBef>
+                <a:spcPts val="0"/>
+              </a:spcBef>
               <a:spcAft>
-                <a:spcPts val="400"/>
+                <a:spcPts val="200"/>
               </a:spcAft>
             </a:pPr>
             <a:r>
@@ -6836,12 +6836,12 @@
             </a:r>
           </a:p>
           <a:p>
-            <a:pPr algn="l">
-              <a:lnSpc>
-                <a:spcPct val="100000"/>
-              </a:lnSpc>
+            <a:pPr algn="l" marL="0" indent="0">
+              <a:spcBef>
+                <a:spcPts val="0"/>
+              </a:spcBef>
               <a:spcAft>
-                <a:spcPts val="400"/>
+                <a:spcPts val="200"/>
               </a:spcAft>
             </a:pPr>
             <a:r>
@@ -6891,12 +6891,12 @@
             </a:r>
           </a:p>
           <a:p>
-            <a:pPr algn="l">
-              <a:lnSpc>
-                <a:spcPct val="100000"/>
-              </a:lnSpc>
+            <a:pPr algn="l" marL="0" indent="0">
+              <a:spcBef>
+                <a:spcPts val="0"/>
+              </a:spcBef>
               <a:spcAft>
-                <a:spcPts val="400"/>
+                <a:spcPts val="200"/>
               </a:spcAft>
             </a:pPr>
             <a:r>
@@ -6946,12 +6946,12 @@
             </a:r>
           </a:p>
           <a:p>
-            <a:pPr algn="l">
-              <a:lnSpc>
-                <a:spcPct val="100000"/>
-              </a:lnSpc>
+            <a:pPr algn="l" marL="0" indent="0">
+              <a:spcBef>
+                <a:spcPts val="0"/>
+              </a:spcBef>
               <a:spcAft>
-                <a:spcPts val="400"/>
+                <a:spcPts val="200"/>
               </a:spcAft>
             </a:pPr>
             <a:r>
@@ -6990,12 +6990,12 @@
             </a:r>
           </a:p>
           <a:p>
-            <a:pPr algn="l">
-              <a:lnSpc>
-                <a:spcPct val="100000"/>
-              </a:lnSpc>
+            <a:pPr algn="l" marL="0" indent="0">
+              <a:spcBef>
+                <a:spcPts val="0"/>
+              </a:spcBef>
               <a:spcAft>
-                <a:spcPts val="400"/>
+                <a:spcPts val="200"/>
               </a:spcAft>
             </a:pPr>
             <a:r>
@@ -7034,12 +7034,12 @@
             </a:r>
           </a:p>
           <a:p>
-            <a:pPr algn="l">
-              <a:lnSpc>
-                <a:spcPct val="100000"/>
-              </a:lnSpc>
+            <a:pPr algn="l" marL="0" indent="0">
+              <a:spcBef>
+                <a:spcPts val="0"/>
+              </a:spcBef>
               <a:spcAft>
-                <a:spcPts val="400"/>
+                <a:spcPts val="200"/>
               </a:spcAft>
             </a:pPr>
             <a:r>
@@ -7078,12 +7078,12 @@
             </a:r>
           </a:p>
           <a:p>
-            <a:pPr algn="l">
-              <a:lnSpc>
-                <a:spcPct val="100000"/>
-              </a:lnSpc>
+            <a:pPr algn="l" marL="0" indent="0">
+              <a:spcBef>
+                <a:spcPts val="0"/>
+              </a:spcBef>
               <a:spcAft>
-                <a:spcPts val="400"/>
+                <a:spcPts val="200"/>
               </a:spcAft>
             </a:pPr>
             <a:r>
@@ -7120,12 +7120,12 @@
           <a:bodyPr vert="horz" wrap="square" anchor="t" lIns="91440" rIns="91440" tIns="45720" bIns="45720"/>
           <a:lstStyle/>
           <a:p>
-            <a:pPr algn="l">
-              <a:lnSpc>
-                <a:spcPct val="100000"/>
-              </a:lnSpc>
+            <a:pPr algn="l" marL="0" indent="0">
+              <a:spcBef>
+                <a:spcPts val="0"/>
+              </a:spcBef>
               <a:spcAft>
-                <a:spcPts val="333"/>
+                <a:spcPts val="167"/>
               </a:spcAft>
             </a:pPr>
             <a:r>

--- a/第四週(10-01)/第四週_第3節_簡報.pptx
+++ b/第四週(10-01)/第四週_第3節_簡報.pptx
@@ -539,7 +539,7 @@
                 <a:ea typeface="Arial Unicode MS"/>
                 <a:cs typeface="Arial Unicode MS"/>
               </a:rPr>
-              <a:t>：
+              <a:t>。前兩節我們講了三組東西，我快速點一次名。
 </a:t>
             </a:r>
           </a:p>
@@ -553,6 +553,17 @@
               </a:spcAft>
             </a:pPr>
             <a:r>
+              <a:rPr sz="1200" b="1" lang="zh-TW" dirty="0">
+                <a:solidFill>
+                  <a:srgbClr val="000000"/>
+                </a:solidFill>
+                <a:latin typeface="Arial Unicode MS"/>
+                <a:ea typeface="Arial Unicode MS"/>
+                <a:cs typeface="Arial Unicode MS"/>
+              </a:rPr>
+              <a:t>第一節的三個規格</a:t>
+            </a:r>
+            <a:r>
               <a:rPr sz="1200" lang="zh-TW" dirty="0">
                 <a:solidFill>
                   <a:srgbClr val="000000"/>
@@ -561,7 +572,7 @@
                 <a:ea typeface="Arial Unicode MS"/>
                 <a:cs typeface="Arial Unicode MS"/>
               </a:rPr>
-              <a:t>前兩節我們講了三個規格、三種落差、場景三層。這些都是知識。現在要各位做的，是把這些知識變成</a:t>
+              <a:t>：射線數，也就是解析度；射線長度，也就是測距；張角，也就是視野——</a:t>
             </a:r>
             <a:r>
               <a:rPr sz="1200" b="1" lang="zh-TW" dirty="0">
@@ -572,7 +583,7 @@
                 <a:ea typeface="Arial Unicode MS"/>
                 <a:cs typeface="Arial Unicode MS"/>
               </a:rPr>
-              <a:t>三個數字</a:t>
+              <a:t>就是各位等一下要動的那三根滑桿</a:t>
             </a:r>
             <a:r>
               <a:rPr sz="1200" lang="zh-TW" dirty="0">
@@ -597,6 +608,17 @@
               </a:spcAft>
             </a:pPr>
             <a:r>
+              <a:rPr sz="1200" b="1" lang="zh-TW" dirty="0">
+                <a:solidFill>
+                  <a:srgbClr val="000000"/>
+                </a:solidFill>
+                <a:latin typeface="Arial Unicode MS"/>
+                <a:ea typeface="Arial Unicode MS"/>
+                <a:cs typeface="Arial Unicode MS"/>
+              </a:rPr>
+              <a:t>第一節的三種落差</a:t>
+            </a:r>
+            <a:r>
               <a:rPr sz="1200" lang="zh-TW" dirty="0">
                 <a:solidFill>
                   <a:srgbClr val="000000"/>
@@ -605,7 +627,84 @@
                 <a:ea typeface="Arial Unicode MS"/>
                 <a:cs typeface="Arial Unicode MS"/>
               </a:rPr>
-              <a:t>而且這三個數字不是我給的，是各位自己掃出來的。
+              <a:t>：外觀、行為、物理——模擬跟真實世界差在哪三個地方。
+</a:t>
+            </a:r>
+          </a:p>
+          <a:p>
+            <a:pPr algn="l" marL="0" indent="0">
+              <a:spcBef>
+                <a:spcPts val="0"/>
+              </a:spcBef>
+              <a:spcAft>
+                <a:spcPts val="200"/>
+              </a:spcAft>
+            </a:pPr>
+            <a:r>
+              <a:rPr sz="1200" b="1" lang="zh-TW" dirty="0">
+                <a:solidFill>
+                  <a:srgbClr val="000000"/>
+                </a:solidFill>
+                <a:latin typeface="Arial Unicode MS"/>
+                <a:ea typeface="Arial Unicode MS"/>
+                <a:cs typeface="Arial Unicode MS"/>
+              </a:rPr>
+              <a:t>第二節的場景三層</a:t>
+            </a:r>
+            <a:r>
+              <a:rPr sz="1200" lang="zh-TW" dirty="0">
+                <a:solidFill>
+                  <a:srgbClr val="000000"/>
+                </a:solidFill>
+                <a:latin typeface="Arial Unicode MS"/>
+                <a:ea typeface="Arial Unicode MS"/>
+                <a:cs typeface="Arial Unicode MS"/>
+              </a:rPr>
+              <a:t>：功能場景，用人話寫一句；邏輯場景，每個參數給一個範圍；具體場景，每個參數給一個值。
+</a:t>
+            </a:r>
+          </a:p>
+          <a:p>
+            <a:pPr algn="l" marL="0" indent="0">
+              <a:spcBef>
+                <a:spcPts val="0"/>
+              </a:spcBef>
+              <a:spcAft>
+                <a:spcPts val="200"/>
+              </a:spcAft>
+            </a:pPr>
+            <a:r>
+              <a:rPr sz="1200" lang="zh-TW" dirty="0">
+                <a:solidFill>
+                  <a:srgbClr val="000000"/>
+                </a:solidFill>
+                <a:latin typeface="Arial Unicode MS"/>
+                <a:ea typeface="Arial Unicode MS"/>
+                <a:cs typeface="Arial Unicode MS"/>
+              </a:rPr>
+              <a:t>這些到現在為止都還只是知識。今天要各位做的，是把它們變成</a:t>
+            </a:r>
+            <a:r>
+              <a:rPr sz="1200" b="1" lang="zh-TW" dirty="0">
+                <a:solidFill>
+                  <a:srgbClr val="000000"/>
+                </a:solidFill>
+                <a:latin typeface="Arial Unicode MS"/>
+                <a:ea typeface="Arial Unicode MS"/>
+                <a:cs typeface="Arial Unicode MS"/>
+              </a:rPr>
+              <a:t>三個數字</a:t>
+            </a:r>
+            <a:r>
+              <a:rPr sz="1200" lang="zh-TW" dirty="0">
+                <a:solidFill>
+                  <a:srgbClr val="000000"/>
+                </a:solidFill>
+                <a:latin typeface="Arial Unicode MS"/>
+                <a:ea typeface="Arial Unicode MS"/>
+                <a:cs typeface="Arial Unicode MS"/>
+              </a:rPr>
+              <a:t>——而且不是我給的，是各位自己掃出來的。
 </a:t>
             </a:r>
           </a:p>
@@ -2739,7 +2838,7 @@
                 <a:ea typeface="Arial Unicode MS"/>
                 <a:cs typeface="Arial Unicode MS"/>
               </a:rPr>
-              <a:t>調參數十三分鐘</a:t>
+              <a:t>調參數十二分半</a:t>
             </a:r>
             <a:r>
               <a:rPr sz="1200" lang="zh-TW" dirty="0">
@@ -4422,7 +4521,7 @@
                 <a:ea typeface="Arial Unicode MS"/>
                 <a:cs typeface="Arial Unicode MS"/>
               </a:rPr>
-              <a:t>第二題，十三分鐘，今天的主菜，</a:t>
+              <a:t>第二題，十二分半，今天的主菜，</a:t>
             </a:r>
             <a:r>
               <a:rPr sz="800" b="1" lang="zh-TW" dirty="0">
@@ -4862,7 +4961,51 @@
                 <a:ea typeface="Arial Unicode MS"/>
                 <a:cs typeface="Arial Unicode MS"/>
               </a:rPr>
-              <a:t>——降速、避開尖峰時段、或者根本不在這條路上營運。這就是第二週講的 ODD。所以今天的題目是：在搞不定的環境裡，你能把界線推到多遠？
+              <a:t>——降速、避開尖峰時段、或者根本不在這條路上營運。這就是第二週講的 </a:t>
+            </a:r>
+            <a:r>
+              <a:rPr sz="800" b="1" lang="zh-TW" dirty="0">
+                <a:solidFill>
+                  <a:srgbClr val="000000"/>
+                </a:solidFill>
+                <a:latin typeface="Arial Unicode MS"/>
+                <a:ea typeface="Arial Unicode MS"/>
+                <a:cs typeface="Arial Unicode MS"/>
+              </a:rPr>
+              <a:t>ODD，運行設計域</a:t>
+            </a:r>
+            <a:r>
+              <a:rPr sz="800" lang="zh-TW" dirty="0">
+                <a:solidFill>
+                  <a:srgbClr val="000000"/>
+                </a:solidFill>
+                <a:latin typeface="Arial Unicode MS"/>
+                <a:ea typeface="Arial Unicode MS"/>
+                <a:cs typeface="Arial Unicode MS"/>
+              </a:rPr>
+              <a:t>：這台車被設計成</a:t>
+            </a:r>
+            <a:r>
+              <a:rPr sz="800" b="1" lang="zh-TW" dirty="0">
+                <a:solidFill>
+                  <a:srgbClr val="000000"/>
+                </a:solidFill>
+                <a:latin typeface="Arial Unicode MS"/>
+                <a:ea typeface="Arial Unicode MS"/>
+                <a:cs typeface="Arial Unicode MS"/>
+              </a:rPr>
+              <a:t>只能在什麼條件下運作</a:t>
+            </a:r>
+            <a:r>
+              <a:rPr sz="800" lang="zh-TW" dirty="0">
+                <a:solidFill>
+                  <a:srgbClr val="000000"/>
+                </a:solidFill>
+                <a:latin typeface="Arial Unicode MS"/>
+                <a:ea typeface="Arial Unicode MS"/>
+                <a:cs typeface="Arial Unicode MS"/>
+              </a:rPr>
+              <a:t>，固定寫六個面向——道路類型、速度域、交通狀況、天候與光照、地理範圍、人的角色。剛剛那三招，改的就是其中的速度域、交通狀況和地理範圍。所以今天的題目是：在搞不定的環境裡，你能把界線推到多遠？
 </a:t>
             </a:r>
           </a:p>
@@ -11654,7 +11797,7 @@
                 <a:ea typeface="Arial" pitchFamily="34" charset="-122"/>
                 <a:cs typeface="Arial" pitchFamily="34" charset="-120"/>
               </a:rPr>
-              <a:t>13 phút · Chỉnh ba con số cho trụ lâu nhất　← BÀI TẬP</a:t>
+              <a:t>12,5 phút · Chỉnh ba con số cho trụ lâu nhất　← BÀI TẬP</a:t>
             </a:r>
             <a:endParaRPr lang="en-US" sz="880" dirty="0"/>
           </a:p>
@@ -11674,7 +11817,7 @@
                 <a:ea typeface="微軟正黑體" pitchFamily="34" charset="-122"/>
                 <a:cs typeface="微軟正黑體" pitchFamily="34" charset="-120"/>
               </a:rPr>
-              <a:t>13 分・調三個參數，撐最久　← 這一段就是作業</a:t>
+              <a:t>12.5 分・調三個參數，撐最久　← 這一段就是作業</a:t>
             </a:r>
             <a:endParaRPr lang="en-US" sz="880" dirty="0"/>
           </a:p>
@@ -15603,7 +15746,7 @@
                 <a:ea typeface="Arial" pitchFamily="34" charset="-122"/>
                 <a:cs typeface="Arial" pitchFamily="34" charset="-120"/>
               </a:rPr>
-              <a:t>Câu 2 · 第二題＝作業（13 分鐘，今天的主菜）</a:t>
+              <a:t>Câu 2 · 第二題＝作業（12.5 分鐘，今天的主菜）</a:t>
             </a:r>
             <a:endParaRPr lang="en-US" sz="960" dirty="0"/>
           </a:p>
